--- a/lessons/lesson-10/slides.pptx
+++ b/lessons/lesson-10/slides.pptx
@@ -404,7 +404,7 @@
           <a:lstStyle xmlns:a="http://schemas.openxmlformats.org/drawingml/2006/main"/>
           <a:p xmlns:a="http://schemas.openxmlformats.org/drawingml/2006/main">
             <a:r>
-              <a:t>第 10 课受限执行。屏显按现行逐页母稿压缩为课堂可读对象，完整说明保留在讲义与教师备注。</a:t>
+              <a:t>第10讲 AI 辅助编码、调试与受限 Agent 执行</a:t>
             </a:r>
           </a:p>
           <a:p xmlns:a="http://schemas.openxmlformats.org/drawingml/2006/main">
@@ -414,17 +414,92 @@
           </a:p>
           <a:p xmlns:a="http://schemas.openxmlformats.org/drawingml/2006/main">
             <a:r>
+              <a:t>讲义对应：§导读；课程入口</a:t>
+            </a:r>
+          </a:p>
+          <a:p xmlns:a="http://schemas.openxmlformats.org/drawingml/2006/main">
+            <a:r>
+              <a:t/>
+            </a:r>
+          </a:p>
+          <a:p xmlns:a="http://schemas.openxmlformats.org/drawingml/2006/main">
+            <a:r>
+              <a:t>[Teaching]</a:t>
+            </a:r>
+          </a:p>
+          <a:p xmlns:a="http://schemas.openxmlformats.org/drawingml/2006/main">
+            <a:r>
+              <a:t>开场放下模糊 prompt。第 9 课判断门已过，项目进入阶段七原型验证。本课回答：Agent 帮忙改代码、跑测试、归因错误时，研究者在哪里审核、用什么权限、留什么记录，才能让"Agent 帮忙"不等于"Agent 替代判断"或"Agent 污染实验"。</a:t>
+            </a:r>
+          </a:p>
+          <a:p xmlns:a="http://schemas.openxmlformats.org/drawingml/2006/main">
+            <a:r>
+              <a:t/>
+            </a:r>
+          </a:p>
+          <a:p xmlns:a="http://schemas.openxmlformats.org/drawingml/2006/main">
+            <a:r>
+              <a:t>[Student action]</a:t>
+            </a:r>
+          </a:p>
+          <a:p xmlns:a="http://schemas.openxmlformats.org/drawingml/2006/main">
+            <a:r>
+              <a:t>不展开课程行政信息，直接进入下一页回扣。</a:t>
+            </a:r>
+          </a:p>
+          <a:p xmlns:a="http://schemas.openxmlformats.org/drawingml/2006/main">
+            <a:r>
+              <a:t/>
+            </a:r>
+          </a:p>
+          <a:p xmlns:a="http://schemas.openxmlformats.org/drawingml/2006/main">
+            <a:r>
+              <a:t>[Timing]</a:t>
+            </a:r>
+          </a:p>
+          <a:p xmlns:a="http://schemas.openxmlformats.org/drawingml/2006/main">
+            <a:r>
+              <a:t>3 分钟。</a:t>
+            </a:r>
+          </a:p>
+          <a:p xmlns:a="http://schemas.openxmlformats.org/drawingml/2006/main">
+            <a:r>
+              <a:t/>
+            </a:r>
+          </a:p>
+          <a:p xmlns:a="http://schemas.openxmlformats.org/drawingml/2006/main">
+            <a:r>
+              <a:t>[Evidence boundary]</a:t>
+            </a:r>
+          </a:p>
+          <a:p xmlns:a="http://schemas.openxmlformats.org/drawingml/2006/main">
+            <a:r>
+              <a:t>课程定位以 [syllabus.md](../../course/syllabus.md) 与 [备课规划.md](../备课规划.md) 第 10 课段为准。</a:t>
+            </a:r>
+          </a:p>
+          <a:p xmlns:a="http://schemas.openxmlformats.org/drawingml/2006/main">
+            <a:r>
+              <a:t/>
+            </a:r>
+          </a:p>
+          <a:p xmlns:a="http://schemas.openxmlformats.org/drawingml/2006/main">
+            <a:r>
               <a:t>[Sources]</a:t>
             </a:r>
           </a:p>
           <a:p xmlns:a="http://schemas.openxmlformats.org/drawingml/2006/main">
             <a:r>
-              <a:t>- /Users/bright/Projects/courses/graduate/lessons/lesson-10/slides.md</a:t>
-            </a:r>
-          </a:p>
-          <a:p xmlns:a="http://schemas.openxmlformats.org/drawingml/2006/main">
-            <a:r>
-              <a:t>- /Users/bright/Projects/courses/graduate/lessons/lesson-10/handout.md</a:t>
+              <a:t>- lessons/lesson-10/slides.md P01</a:t>
+            </a:r>
+          </a:p>
+          <a:p xmlns:a="http://schemas.openxmlformats.org/drawingml/2006/main">
+            <a:r>
+              <a:t>- lessons/lesson-10/handout.md §导读；课程入口</a:t>
+            </a:r>
+          </a:p>
+          <a:p xmlns:a="http://schemas.openxmlformats.org/drawingml/2006/main">
+            <a:r>
+              <a:t>- lessons/lesson-10/teaching-plan.md</a:t>
             </a:r>
           </a:p>
           <a:p xmlns:a="http://schemas.openxmlformats.org/drawingml/2006/main">
@@ -499,7 +574,7 @@
           <a:lstStyle xmlns:a="http://schemas.openxmlformats.org/drawingml/2006/main"/>
           <a:p xmlns:a="http://schemas.openxmlformats.org/drawingml/2006/main">
             <a:r>
-              <a:t>第 10 课受限执行。屏显按现行逐页母稿压缩为课堂可读对象，完整说明保留在讲义与教师备注。</a:t>
+              <a:t>SWE-bench 的测试判定仍不充分</a:t>
             </a:r>
           </a:p>
           <a:p xmlns:a="http://schemas.openxmlformats.org/drawingml/2006/main">
@@ -509,17 +584,107 @@
           </a:p>
           <a:p xmlns:a="http://schemas.openxmlformats.org/drawingml/2006/main">
             <a:r>
+              <a:t>讲义对应：§四·4 SWE-bench 视角</a:t>
+            </a:r>
+          </a:p>
+          <a:p xmlns:a="http://schemas.openxmlformats.org/drawingml/2006/main">
+            <a:r>
+              <a:t/>
+            </a:r>
+          </a:p>
+          <a:p xmlns:a="http://schemas.openxmlformats.org/drawingml/2006/main">
+            <a:r>
+              <a:t>[Teaching]</a:t>
+            </a:r>
+          </a:p>
+          <a:p xmlns:a="http://schemas.openxmlformats.org/drawingml/2006/main">
+            <a:r>
+              <a:t>SWE-bench 把"解决"定义为"测试通过"而非"代码看起来合理"，本课沿用这一判定。课程项目往往没有 SWE-bench 级别的测试集，因此研究者必须额外人工核验。测试通过不等于方法正确、不等于未引入数据泄漏、不等于未污染评价协议。SWE-bench 只分析任务构造与测试判定。</a:t>
+            </a:r>
+          </a:p>
+          <a:p xmlns:a="http://schemas.openxmlformats.org/drawingml/2006/main">
+            <a:r>
+              <a:t/>
+            </a:r>
+          </a:p>
+          <a:p xmlns:a="http://schemas.openxmlformats.org/drawingml/2006/main">
+            <a:r>
+              <a:t>[Student action]</a:t>
+            </a:r>
+          </a:p>
+          <a:p xmlns:a="http://schemas.openxmlformats.org/drawingml/2006/main">
+            <a:r>
+              <a:t>无。</a:t>
+            </a:r>
+          </a:p>
+          <a:p xmlns:a="http://schemas.openxmlformats.org/drawingml/2006/main">
+            <a:r>
+              <a:t/>
+            </a:r>
+          </a:p>
+          <a:p xmlns:a="http://schemas.openxmlformats.org/drawingml/2006/main">
+            <a:r>
+              <a:t>[Timing]</a:t>
+            </a:r>
+          </a:p>
+          <a:p xmlns:a="http://schemas.openxmlformats.org/drawingml/2006/main">
+            <a:r>
+              <a:t>3 分钟。</a:t>
+            </a:r>
+          </a:p>
+          <a:p xmlns:a="http://schemas.openxmlformats.org/drawingml/2006/main">
+            <a:r>
+              <a:t/>
+            </a:r>
+          </a:p>
+          <a:p xmlns:a="http://schemas.openxmlformats.org/drawingml/2006/main">
+            <a:r>
+              <a:t>[Evidence boundary]</a:t>
+            </a:r>
+          </a:p>
+          <a:p xmlns:a="http://schemas.openxmlformats.org/drawingml/2006/main">
+            <a:r>
+              <a:t>直接来源：[正式来源](https://www.swebench.com/original.html)。</a:t>
+            </a:r>
+          </a:p>
+          <a:p xmlns:a="http://schemas.openxmlformats.org/drawingml/2006/main">
+            <a:r>
+              <a:t/>
+            </a:r>
+          </a:p>
+          <a:p xmlns:a="http://schemas.openxmlformats.org/drawingml/2006/main">
+            <a:r>
+              <a:t>讲义 §四·4；Jimenez et al. SWE-bench ICLR 2024（[reading-list.md](../../course/reading-list.md) 第 10 课）。</a:t>
+            </a:r>
+          </a:p>
+          <a:p xmlns:a="http://schemas.openxmlformats.org/drawingml/2006/main">
+            <a:r>
+              <a:t/>
+            </a:r>
+          </a:p>
+          <a:p xmlns:a="http://schemas.openxmlformats.org/drawingml/2006/main">
+            <a:r>
               <a:t>[Sources]</a:t>
             </a:r>
           </a:p>
           <a:p xmlns:a="http://schemas.openxmlformats.org/drawingml/2006/main">
             <a:r>
-              <a:t>- /Users/bright/Projects/courses/graduate/lessons/lesson-10/slides.md</a:t>
-            </a:r>
-          </a:p>
-          <a:p xmlns:a="http://schemas.openxmlformats.org/drawingml/2006/main">
-            <a:r>
-              <a:t>- /Users/bright/Projects/courses/graduate/lessons/lesson-10/handout.md</a:t>
+              <a:t>- lessons/lesson-10/slides.md P10</a:t>
+            </a:r>
+          </a:p>
+          <a:p xmlns:a="http://schemas.openxmlformats.org/drawingml/2006/main">
+            <a:r>
+              <a:t>- lessons/lesson-10/handout.md §四·4 SWE-bench 视角</a:t>
+            </a:r>
+          </a:p>
+          <a:p xmlns:a="http://schemas.openxmlformats.org/drawingml/2006/main">
+            <a:r>
+              <a:t>- lessons/lesson-10/teaching-plan.md</a:t>
+            </a:r>
+          </a:p>
+          <a:p xmlns:a="http://schemas.openxmlformats.org/drawingml/2006/main">
+            <a:r>
+              <a:t>- https://www.swebench.com/original.html</a:t>
             </a:r>
           </a:p>
           <a:p xmlns:a="http://schemas.openxmlformats.org/drawingml/2006/main">
@@ -594,7 +759,7 @@
           <a:lstStyle xmlns:a="http://schemas.openxmlformats.org/drawingml/2006/main"/>
           <a:p xmlns:a="http://schemas.openxmlformats.org/drawingml/2006/main">
             <a:r>
-              <a:t>第 10 课受限执行。屏显按现行逐页母稿压缩为课堂可读对象，完整说明保留在讲义与教师备注。</a:t>
+              <a:t>同一实验规格进入受限执行</a:t>
             </a:r>
           </a:p>
           <a:p xmlns:a="http://schemas.openxmlformats.org/drawingml/2006/main">
@@ -604,17 +769,92 @@
           </a:p>
           <a:p xmlns:a="http://schemas.openxmlformats.org/drawingml/2006/main">
             <a:r>
+              <a:t>讲义对应：§五 贯穿案例第一至二步（实验规格标注 + 任务契约五字段）</a:t>
+            </a:r>
+          </a:p>
+          <a:p xmlns:a="http://schemas.openxmlformats.org/drawingml/2006/main">
+            <a:r>
+              <a:t/>
+            </a:r>
+          </a:p>
+          <a:p xmlns:a="http://schemas.openxmlformats.org/drawingml/2006/main">
+            <a:r>
+              <a:t>[Teaching]</a:t>
+            </a:r>
+          </a:p>
+          <a:p xmlns:a="http://schemas.openxmlformats.org/drawingml/2006/main">
+            <a:r>
+              <a:t>演示如何从第 9 课实验规格中标注的"拟用 Agent"步骤选出本课的受限任务——以冻结配置分别生成。任务契约五字段已在 P04 展示，本页只固定样本、条件、配置、评价隔离与追踪口径。重点：Context 不暴露人工基准与最终评分；规模和 H1/A1/A2/A3 编号沿用第 9 课，不在本课改写。</a:t>
+            </a:r>
+          </a:p>
+          <a:p xmlns:a="http://schemas.openxmlformats.org/drawingml/2006/main">
+            <a:r>
+              <a:t/>
+            </a:r>
+          </a:p>
+          <a:p xmlns:a="http://schemas.openxmlformats.org/drawingml/2006/main">
+            <a:r>
+              <a:t>[Student action]</a:t>
+            </a:r>
+          </a:p>
+          <a:p xmlns:a="http://schemas.openxmlformats.org/drawingml/2006/main">
+            <a:r>
+              <a:t>让学生用自己的实验规格标注"拟用 Agent"与"必须人工"步骤。</a:t>
+            </a:r>
+          </a:p>
+          <a:p xmlns:a="http://schemas.openxmlformats.org/drawingml/2006/main">
+            <a:r>
+              <a:t/>
+            </a:r>
+          </a:p>
+          <a:p xmlns:a="http://schemas.openxmlformats.org/drawingml/2006/main">
+            <a:r>
+              <a:t>[Timing]</a:t>
+            </a:r>
+          </a:p>
+          <a:p xmlns:a="http://schemas.openxmlformats.org/drawingml/2006/main">
+            <a:r>
+              <a:t>5 分钟。</a:t>
+            </a:r>
+          </a:p>
+          <a:p xmlns:a="http://schemas.openxmlformats.org/drawingml/2006/main">
+            <a:r>
+              <a:t/>
+            </a:r>
+          </a:p>
+          <a:p xmlns:a="http://schemas.openxmlformats.org/drawingml/2006/main">
+            <a:r>
+              <a:t>[Evidence boundary]</a:t>
+            </a:r>
+          </a:p>
+          <a:p xmlns:a="http://schemas.openxmlformats.org/drawingml/2006/main">
+            <a:r>
+              <a:t>讲义 §五 第一步与第二步；第 9 课实验规格。</a:t>
+            </a:r>
+          </a:p>
+          <a:p xmlns:a="http://schemas.openxmlformats.org/drawingml/2006/main">
+            <a:r>
+              <a:t/>
+            </a:r>
+          </a:p>
+          <a:p xmlns:a="http://schemas.openxmlformats.org/drawingml/2006/main">
+            <a:r>
               <a:t>[Sources]</a:t>
             </a:r>
           </a:p>
           <a:p xmlns:a="http://schemas.openxmlformats.org/drawingml/2006/main">
             <a:r>
-              <a:t>- /Users/bright/Projects/courses/graduate/lessons/lesson-10/slides.md</a:t>
-            </a:r>
-          </a:p>
-          <a:p xmlns:a="http://schemas.openxmlformats.org/drawingml/2006/main">
-            <a:r>
-              <a:t>- /Users/bright/Projects/courses/graduate/lessons/lesson-10/handout.md</a:t>
+              <a:t>- lessons/lesson-10/slides.md P11</a:t>
+            </a:r>
+          </a:p>
+          <a:p xmlns:a="http://schemas.openxmlformats.org/drawingml/2006/main">
+            <a:r>
+              <a:t>- lessons/lesson-10/handout.md §五 贯穿案例第一至二步（实验规格标注 + 任务契约五字段）</a:t>
+            </a:r>
+          </a:p>
+          <a:p xmlns:a="http://schemas.openxmlformats.org/drawingml/2006/main">
+            <a:r>
+              <a:t>- lessons/lesson-10/teaching-plan.md</a:t>
             </a:r>
           </a:p>
           <a:p xmlns:a="http://schemas.openxmlformats.org/drawingml/2006/main">
@@ -689,7 +929,7 @@
           <a:lstStyle xmlns:a="http://schemas.openxmlformats.org/drawingml/2006/main"/>
           <a:p xmlns:a="http://schemas.openxmlformats.org/drawingml/2006/main">
             <a:r>
-              <a:t>第 10 课受限执行。屏显按现行逐页母稿压缩为课堂可读对象，完整说明保留在讲义与教师备注。</a:t>
+              <a:t>diff、测试和失败日志形成一次 trace</a:t>
             </a:r>
           </a:p>
           <a:p xmlns:a="http://schemas.openxmlformats.org/drawingml/2006/main">
@@ -699,17 +939,117 @@
           </a:p>
           <a:p xmlns:a="http://schemas.openxmlformats.org/drawingml/2006/main">
             <a:r>
+              <a:t>讲义对应：§五 贯穿案例第三至四步（Agent 执行与人工核验 + 失败记录）；§五 第五步（写入项目）</a:t>
+            </a:r>
+          </a:p>
+          <a:p xmlns:a="http://schemas.openxmlformats.org/drawingml/2006/main">
+            <a:r>
+              <a:t/>
+            </a:r>
+          </a:p>
+          <a:p xmlns:a="http://schemas.openxmlformats.org/drawingml/2006/main">
+            <a:r>
+              <a:t>[Teaching]</a:t>
+            </a:r>
+          </a:p>
+          <a:p xmlns:a="http://schemas.openxmlformats.org/drawingml/2006/main">
+            <a:r>
+              <a:t>直接打开本课资产 `generate.diff`、`test-output.txt`与 `failure-log.md`，而不只讲虚构结果。三者分别对应代码候选、真实运行证据和越权决策。第五步：本课产出回写个人项目，任务契约写入 `agent-tasks/`，失败记录写入 `experiments/*/agent-traces/`，AI 使用记录沿用完整披露字段。</a:t>
+            </a:r>
+          </a:p>
+          <a:p xmlns:a="http://schemas.openxmlformats.org/drawingml/2006/main">
+            <a:r>
+              <a:t/>
+            </a:r>
+          </a:p>
+          <a:p xmlns:a="http://schemas.openxmlformats.org/drawingml/2006/main">
+            <a:r>
+              <a:t>[Student action]</a:t>
+            </a:r>
+          </a:p>
+          <a:p xmlns:a="http://schemas.openxmlformats.org/drawingml/2006/main">
+            <a:r>
+              <a:t>让学生尝试为自己的任务写一条失败记录。</a:t>
+            </a:r>
+          </a:p>
+          <a:p xmlns:a="http://schemas.openxmlformats.org/drawingml/2006/main">
+            <a:r>
+              <a:t/>
+            </a:r>
+          </a:p>
+          <a:p xmlns:a="http://schemas.openxmlformats.org/drawingml/2006/main">
+            <a:r>
+              <a:t>[Timing]</a:t>
+            </a:r>
+          </a:p>
+          <a:p xmlns:a="http://schemas.openxmlformats.org/drawingml/2006/main">
+            <a:r>
+              <a:t>7 分钟。</a:t>
+            </a:r>
+          </a:p>
+          <a:p xmlns:a="http://schemas.openxmlformats.org/drawingml/2006/main">
+            <a:r>
+              <a:t/>
+            </a:r>
+          </a:p>
+          <a:p xmlns:a="http://schemas.openxmlformats.org/drawingml/2006/main">
+            <a:r>
+              <a:t>[Evidence boundary]</a:t>
+            </a:r>
+          </a:p>
+          <a:p xmlns:a="http://schemas.openxmlformats.org/drawingml/2006/main">
+            <a:r>
+              <a:t>直接来源：[本课工件](assets/agent-task-example/generate.diff)；[本课工件](assets/agent-task-example/test-output.txt)；[本课工件](assets/agent-task-example/failure-log.md)。</a:t>
+            </a:r>
+          </a:p>
+          <a:p xmlns:a="http://schemas.openxmlformats.org/drawingml/2006/main">
+            <a:r>
+              <a:t/>
+            </a:r>
+          </a:p>
+          <a:p xmlns:a="http://schemas.openxmlformats.org/drawingml/2006/main">
+            <a:r>
+              <a:t>讲义 §五 第三步、第四步与第五步；[project-template.md](../../course/project-template.md) §6.1 任务契约；本课 `assets/agent-task-example/` 中的任务契约、真实 diff、测试输出与失败日志。</a:t>
+            </a:r>
+          </a:p>
+          <a:p xmlns:a="http://schemas.openxmlformats.org/drawingml/2006/main">
+            <a:r>
+              <a:t/>
+            </a:r>
+          </a:p>
+          <a:p xmlns:a="http://schemas.openxmlformats.org/drawingml/2006/main">
+            <a:r>
               <a:t>[Sources]</a:t>
             </a:r>
           </a:p>
           <a:p xmlns:a="http://schemas.openxmlformats.org/drawingml/2006/main">
             <a:r>
-              <a:t>- /Users/bright/Projects/courses/graduate/lessons/lesson-10/slides.md</a:t>
-            </a:r>
-          </a:p>
-          <a:p xmlns:a="http://schemas.openxmlformats.org/drawingml/2006/main">
-            <a:r>
-              <a:t>- /Users/bright/Projects/courses/graduate/lessons/lesson-10/handout.md</a:t>
+              <a:t>- lessons/lesson-10/slides.md P12</a:t>
+            </a:r>
+          </a:p>
+          <a:p xmlns:a="http://schemas.openxmlformats.org/drawingml/2006/main">
+            <a:r>
+              <a:t>- lessons/lesson-10/handout.md §五 贯穿案例第三至四步（Agent 执行与人工核验 + 失败记录）；§五 第五步（写入项目）</a:t>
+            </a:r>
+          </a:p>
+          <a:p xmlns:a="http://schemas.openxmlformats.org/drawingml/2006/main">
+            <a:r>
+              <a:t>- lessons/lesson-10/teaching-plan.md</a:t>
+            </a:r>
+          </a:p>
+          <a:p xmlns:a="http://schemas.openxmlformats.org/drawingml/2006/main">
+            <a:r>
+              <a:t>- assets/agent-task-example/generate.diff</a:t>
+            </a:r>
+          </a:p>
+          <a:p xmlns:a="http://schemas.openxmlformats.org/drawingml/2006/main">
+            <a:r>
+              <a:t>- assets/agent-task-example/test-output.txt</a:t>
+            </a:r>
+          </a:p>
+          <a:p xmlns:a="http://schemas.openxmlformats.org/drawingml/2006/main">
+            <a:r>
+              <a:t>- assets/agent-task-example/failure-log.md</a:t>
             </a:r>
           </a:p>
           <a:p xmlns:a="http://schemas.openxmlformats.org/drawingml/2006/main">
@@ -784,7 +1124,7 @@
           <a:lstStyle xmlns:a="http://schemas.openxmlformats.org/drawingml/2006/main"/>
           <a:p xmlns:a="http://schemas.openxmlformats.org/drawingml/2006/main">
             <a:r>
-              <a:t>第 10 课受限执行。屏显按现行逐页母稿压缩为课堂可读对象，完整说明保留在讲义与教师备注。</a:t>
+              <a:t>把一个 Agent 步骤改写为受限任务</a:t>
             </a:r>
           </a:p>
           <a:p xmlns:a="http://schemas.openxmlformats.org/drawingml/2006/main">
@@ -794,17 +1134,92 @@
           </a:p>
           <a:p xmlns:a="http://schemas.openxmlformats.org/drawingml/2006/main">
             <a:r>
+              <a:t>讲义对应：个人实践第一段：契约与权限 | 契约初版</a:t>
+            </a:r>
+          </a:p>
+          <a:p xmlns:a="http://schemas.openxmlformats.org/drawingml/2006/main">
+            <a:r>
+              <a:t/>
+            </a:r>
+          </a:p>
+          <a:p xmlns:a="http://schemas.openxmlformats.org/drawingml/2006/main">
+            <a:r>
+              <a:t>[Teaching]</a:t>
+            </a:r>
+          </a:p>
+          <a:p xmlns:a="http://schemas.openxmlformats.org/drawingml/2006/main">
+            <a:r>
+              <a:t>验收不再要求所有学生当场运行 Agent。环境就绪者审查自己的真实 diff 与测试输出；备用路径直接使用本课预置工件。两条路径都必须产出：任务契约、权限边界、diff 审查、一条验证证据、一条失败/越权决策与 AI 披露记录开头。</a:t>
+            </a:r>
+          </a:p>
+          <a:p xmlns:a="http://schemas.openxmlformats.org/drawingml/2006/main">
+            <a:r>
+              <a:t/>
+            </a:r>
+          </a:p>
+          <a:p xmlns:a="http://schemas.openxmlformats.org/drawingml/2006/main">
+            <a:r>
+              <a:t>[Student action]</a:t>
+            </a:r>
+          </a:p>
+          <a:p xmlns:a="http://schemas.openxmlformats.org/drawingml/2006/main">
+            <a:r>
+              <a:t>本页用于第一段个人实践。教师巡视只记录共性卡点，不逐台代为修正。</a:t>
+            </a:r>
+          </a:p>
+          <a:p xmlns:a="http://schemas.openxmlformats.org/drawingml/2006/main">
+            <a:r>
+              <a:t/>
+            </a:r>
+          </a:p>
+          <a:p xmlns:a="http://schemas.openxmlformats.org/drawingml/2006/main">
+            <a:r>
+              <a:t>[Timing]</a:t>
+            </a:r>
+          </a:p>
+          <a:p xmlns:a="http://schemas.openxmlformats.org/drawingml/2006/main">
+            <a:r>
+              <a:t>10 分钟。</a:t>
+            </a:r>
+          </a:p>
+          <a:p xmlns:a="http://schemas.openxmlformats.org/drawingml/2006/main">
+            <a:r>
+              <a:t/>
+            </a:r>
+          </a:p>
+          <a:p xmlns:a="http://schemas.openxmlformats.org/drawingml/2006/main">
+            <a:r>
+              <a:t>[Evidence boundary]</a:t>
+            </a:r>
+          </a:p>
+          <a:p xmlns:a="http://schemas.openxmlformats.org/drawingml/2006/main">
+            <a:r>
+              <a:t>[project-template.md](../../course/project-template.md) 字段模板；第 9 课实验规格。</a:t>
+            </a:r>
+          </a:p>
+          <a:p xmlns:a="http://schemas.openxmlformats.org/drawingml/2006/main">
+            <a:r>
+              <a:t/>
+            </a:r>
+          </a:p>
+          <a:p xmlns:a="http://schemas.openxmlformats.org/drawingml/2006/main">
+            <a:r>
               <a:t>[Sources]</a:t>
             </a:r>
           </a:p>
           <a:p xmlns:a="http://schemas.openxmlformats.org/drawingml/2006/main">
             <a:r>
-              <a:t>- /Users/bright/Projects/courses/graduate/lessons/lesson-10/slides.md</a:t>
-            </a:r>
-          </a:p>
-          <a:p xmlns:a="http://schemas.openxmlformats.org/drawingml/2006/main">
-            <a:r>
-              <a:t>- /Users/bright/Projects/courses/graduate/lessons/lesson-10/handout.md</a:t>
+              <a:t>- lessons/lesson-10/slides.md P13</a:t>
+            </a:r>
+          </a:p>
+          <a:p xmlns:a="http://schemas.openxmlformats.org/drawingml/2006/main">
+            <a:r>
+              <a:t>- lessons/lesson-10/handout.md 个人实践第一段：契约与权限 | 契约初版</a:t>
+            </a:r>
+          </a:p>
+          <a:p xmlns:a="http://schemas.openxmlformats.org/drawingml/2006/main">
+            <a:r>
+              <a:t>- lessons/lesson-10/teaching-plan.md</a:t>
             </a:r>
           </a:p>
           <a:p xmlns:a="http://schemas.openxmlformats.org/drawingml/2006/main">
@@ -879,7 +1294,7 @@
           <a:lstStyle xmlns:a="http://schemas.openxmlformats.org/drawingml/2006/main"/>
           <a:p xmlns:a="http://schemas.openxmlformats.org/drawingml/2006/main">
             <a:r>
-              <a:t>第 10 课受限执行。屏显按现行逐页母稿压缩为课堂可读对象，完整说明保留在讲义与教师备注。</a:t>
+              <a:t>文件落点与 diff 审查</a:t>
             </a:r>
           </a:p>
           <a:p xmlns:a="http://schemas.openxmlformats.org/drawingml/2006/main">
@@ -889,17 +1304,92 @@
           </a:p>
           <a:p xmlns:a="http://schemas.openxmlformats.org/drawingml/2006/main">
             <a:r>
+              <a:t>讲义对应：教师中点点评后继续实践：diff/测试审查与失败记录 | 审查与决定记录</a:t>
+            </a:r>
+          </a:p>
+          <a:p xmlns:a="http://schemas.openxmlformats.org/drawingml/2006/main">
+            <a:r>
+              <a:t/>
+            </a:r>
+          </a:p>
+          <a:p xmlns:a="http://schemas.openxmlformats.org/drawingml/2006/main">
+            <a:r>
+              <a:t>[Teaching]</a:t>
+            </a:r>
+          </a:p>
+          <a:p xmlns:a="http://schemas.openxmlformats.org/drawingml/2006/main">
+            <a:r>
+              <a:t>模板投屏停留。学生可照抄文件结构。本课产出任务契约、代码 diff、验证记录与失败记录，回写个人项目。Agent 执行可在课后用合规环境补做，但任务契约与失败记录必须在课堂内启动。</a:t>
+            </a:r>
+          </a:p>
+          <a:p xmlns:a="http://schemas.openxmlformats.org/drawingml/2006/main">
+            <a:r>
+              <a:t/>
+            </a:r>
+          </a:p>
+          <a:p xmlns:a="http://schemas.openxmlformats.org/drawingml/2006/main">
+            <a:r>
+              <a:t>[Student action]</a:t>
+            </a:r>
+          </a:p>
+          <a:p xmlns:a="http://schemas.openxmlformats.org/drawingml/2006/main">
+            <a:r>
+              <a:t>教师先点评权限过宽、验收不可测、评价代码未隔离三类共性问题；学生再继续第二段个人实践。</a:t>
+            </a:r>
+          </a:p>
+          <a:p xmlns:a="http://schemas.openxmlformats.org/drawingml/2006/main">
+            <a:r>
+              <a:t/>
+            </a:r>
+          </a:p>
+          <a:p xmlns:a="http://schemas.openxmlformats.org/drawingml/2006/main">
+            <a:r>
+              <a:t>[Timing]</a:t>
+            </a:r>
+          </a:p>
+          <a:p xmlns:a="http://schemas.openxmlformats.org/drawingml/2006/main">
+            <a:r>
+              <a:t>15 分钟（教师中点点评 5 分钟 + 个人实践 10 分钟）。</a:t>
+            </a:r>
+          </a:p>
+          <a:p xmlns:a="http://schemas.openxmlformats.org/drawingml/2006/main">
+            <a:r>
+              <a:t/>
+            </a:r>
+          </a:p>
+          <a:p xmlns:a="http://schemas.openxmlformats.org/drawingml/2006/main">
+            <a:r>
+              <a:t>[Evidence boundary]</a:t>
+            </a:r>
+          </a:p>
+          <a:p xmlns:a="http://schemas.openxmlformats.org/drawingml/2006/main">
+            <a:r>
+              <a:t>[project-template.md](../../course/project-template.md)；讲义 §五 第五步。</a:t>
+            </a:r>
+          </a:p>
+          <a:p xmlns:a="http://schemas.openxmlformats.org/drawingml/2006/main">
+            <a:r>
+              <a:t/>
+            </a:r>
+          </a:p>
+          <a:p xmlns:a="http://schemas.openxmlformats.org/drawingml/2006/main">
+            <a:r>
               <a:t>[Sources]</a:t>
             </a:r>
           </a:p>
           <a:p xmlns:a="http://schemas.openxmlformats.org/drawingml/2006/main">
             <a:r>
-              <a:t>- /Users/bright/Projects/courses/graduate/lessons/lesson-10/slides.md</a:t>
-            </a:r>
-          </a:p>
-          <a:p xmlns:a="http://schemas.openxmlformats.org/drawingml/2006/main">
-            <a:r>
-              <a:t>- /Users/bright/Projects/courses/graduate/lessons/lesson-10/handout.md</a:t>
+              <a:t>- lessons/lesson-10/slides.md P14</a:t>
+            </a:r>
+          </a:p>
+          <a:p xmlns:a="http://schemas.openxmlformats.org/drawingml/2006/main">
+            <a:r>
+              <a:t>- lessons/lesson-10/handout.md 教师中点点评后继续实践：diff/测试审查与失败记录 | 审查与决定记录</a:t>
+            </a:r>
+          </a:p>
+          <a:p xmlns:a="http://schemas.openxmlformats.org/drawingml/2006/main">
+            <a:r>
+              <a:t>- lessons/lesson-10/teaching-plan.md</a:t>
             </a:r>
           </a:p>
           <a:p xmlns:a="http://schemas.openxmlformats.org/drawingml/2006/main">
@@ -974,7 +1464,7 @@
           <a:lstStyle xmlns:a="http://schemas.openxmlformats.org/drawingml/2006/main"/>
           <a:p xmlns:a="http://schemas.openxmlformats.org/drawingml/2006/main">
             <a:r>
-              <a:t>第 10 课受限执行。屏显按现行逐页母稿压缩为课堂可读对象，完整说明保留在讲义与教师备注。</a:t>
+              <a:t>同伴提问，作者决定</a:t>
             </a:r>
           </a:p>
           <a:p xmlns:a="http://schemas.openxmlformats.org/drawingml/2006/main">
@@ -984,17 +1474,92 @@
           </a:p>
           <a:p xmlns:a="http://schemas.openxmlformats.org/drawingml/2006/main">
             <a:r>
+              <a:t>讲义对应：同伴互查 | 互查问题与作者决定</a:t>
+            </a:r>
+          </a:p>
+          <a:p xmlns:a="http://schemas.openxmlformats.org/drawingml/2006/main">
+            <a:r>
+              <a:t/>
+            </a:r>
+          </a:p>
+          <a:p xmlns:a="http://schemas.openxmlformats.org/drawingml/2006/main">
+            <a:r>
+              <a:t>[Teaching]</a:t>
+            </a:r>
+          </a:p>
+          <a:p xmlns:a="http://schemas.openxmlformats.org/drawingml/2006/main">
+            <a:r>
+              <a:t>作者先说明任务契约与 diff，同伴围绕五字段、修改范围、测试和失败记录提问。优先检查权限边界、人工审核是否真的停住、测试是否判定了目标行为。作者记录采纳、澄清、补证、保留异议或暂缓及真实理由；反馈不要求立即改写，也不形成共同提交。人数为奇数时组成三人组，适当缩短每人的说明。</a:t>
+            </a:r>
+          </a:p>
+          <a:p xmlns:a="http://schemas.openxmlformats.org/drawingml/2006/main">
+            <a:r>
+              <a:t/>
+            </a:r>
+          </a:p>
+          <a:p xmlns:a="http://schemas.openxmlformats.org/drawingml/2006/main">
+            <a:r>
+              <a:t>[Student action]</a:t>
+            </a:r>
+          </a:p>
+          <a:p xmlns:a="http://schemas.openxmlformats.org/drawingml/2006/main">
+            <a:r>
+              <a:t>同伴互查。</a:t>
+            </a:r>
+          </a:p>
+          <a:p xmlns:a="http://schemas.openxmlformats.org/drawingml/2006/main">
+            <a:r>
+              <a:t/>
+            </a:r>
+          </a:p>
+          <a:p xmlns:a="http://schemas.openxmlformats.org/drawingml/2006/main">
+            <a:r>
+              <a:t>[Timing]</a:t>
+            </a:r>
+          </a:p>
+          <a:p xmlns:a="http://schemas.openxmlformats.org/drawingml/2006/main">
+            <a:r>
+              <a:t>15 分钟。</a:t>
+            </a:r>
+          </a:p>
+          <a:p xmlns:a="http://schemas.openxmlformats.org/drawingml/2006/main">
+            <a:r>
+              <a:t/>
+            </a:r>
+          </a:p>
+          <a:p xmlns:a="http://schemas.openxmlformats.org/drawingml/2006/main">
+            <a:r>
+              <a:t>[Evidence boundary]</a:t>
+            </a:r>
+          </a:p>
+          <a:p xmlns:a="http://schemas.openxmlformats.org/drawingml/2006/main">
+            <a:r>
+              <a:t>同伴反馈为形成性活动，不单独计分，不共同提交（[assignments.md](../../course/assignments.md)）。</a:t>
+            </a:r>
+          </a:p>
+          <a:p xmlns:a="http://schemas.openxmlformats.org/drawingml/2006/main">
+            <a:r>
+              <a:t/>
+            </a:r>
+          </a:p>
+          <a:p xmlns:a="http://schemas.openxmlformats.org/drawingml/2006/main">
+            <a:r>
               <a:t>[Sources]</a:t>
             </a:r>
           </a:p>
           <a:p xmlns:a="http://schemas.openxmlformats.org/drawingml/2006/main">
             <a:r>
-              <a:t>- /Users/bright/Projects/courses/graduate/lessons/lesson-10/slides.md</a:t>
-            </a:r>
-          </a:p>
-          <a:p xmlns:a="http://schemas.openxmlformats.org/drawingml/2006/main">
-            <a:r>
-              <a:t>- /Users/bright/Projects/courses/graduate/lessons/lesson-10/handout.md</a:t>
+              <a:t>- lessons/lesson-10/slides.md P15</a:t>
+            </a:r>
+          </a:p>
+          <a:p xmlns:a="http://schemas.openxmlformats.org/drawingml/2006/main">
+            <a:r>
+              <a:t>- lessons/lesson-10/handout.md 同伴互查 | 互查问题与作者决定</a:t>
+            </a:r>
+          </a:p>
+          <a:p xmlns:a="http://schemas.openxmlformats.org/drawingml/2006/main">
+            <a:r>
+              <a:t>- lessons/lesson-10/teaching-plan.md</a:t>
             </a:r>
           </a:p>
           <a:p xmlns:a="http://schemas.openxmlformats.org/drawingml/2006/main">
@@ -1069,7 +1634,7 @@
           <a:lstStyle xmlns:a="http://schemas.openxmlformats.org/drawingml/2006/main"/>
           <a:p xmlns:a="http://schemas.openxmlformats.org/drawingml/2006/main">
             <a:r>
-              <a:t>第 10 课受限执行。屏显按现行逐页母稿压缩为课堂可读对象，完整说明保留在讲义与教师备注。</a:t>
+              <a:t>本讲知识点总结</a:t>
             </a:r>
           </a:p>
           <a:p xmlns:a="http://schemas.openxmlformats.org/drawingml/2006/main">
@@ -1079,17 +1644,92 @@
           </a:p>
           <a:p xmlns:a="http://schemas.openxmlformats.org/drawingml/2006/main">
             <a:r>
+              <a:t>讲义对应：§二-§六 本讲核心链路与边界总结</a:t>
+            </a:r>
+          </a:p>
+          <a:p xmlns:a="http://schemas.openxmlformats.org/drawingml/2006/main">
+            <a:r>
+              <a:t/>
+            </a:r>
+          </a:p>
+          <a:p xmlns:a="http://schemas.openxmlformats.org/drawingml/2006/main">
+            <a:r>
+              <a:t>[Teaching]</a:t>
+            </a:r>
+          </a:p>
+          <a:p xmlns:a="http://schemas.openxmlformats.org/drawingml/2006/main">
+            <a:r>
+              <a:t>回收任务契约、受限执行、diff/验证与失败保留的关系。本页不新增任务，要求学生用边界句检查自己的任务契约和执行记录。</a:t>
+            </a:r>
+          </a:p>
+          <a:p xmlns:a="http://schemas.openxmlformats.org/drawingml/2006/main">
+            <a:r>
+              <a:t/>
+            </a:r>
+          </a:p>
+          <a:p xmlns:a="http://schemas.openxmlformats.org/drawingml/2006/main">
+            <a:r>
+              <a:t>[Student action]</a:t>
+            </a:r>
+          </a:p>
+          <a:p xmlns:a="http://schemas.openxmlformats.org/drawingml/2006/main">
+            <a:r>
+              <a:t>学生快速指出自己当前最薄弱的一张卡。</a:t>
+            </a:r>
+          </a:p>
+          <a:p xmlns:a="http://schemas.openxmlformats.org/drawingml/2006/main">
+            <a:r>
+              <a:t/>
+            </a:r>
+          </a:p>
+          <a:p xmlns:a="http://schemas.openxmlformats.org/drawingml/2006/main">
+            <a:r>
+              <a:t>[Timing]</a:t>
+            </a:r>
+          </a:p>
+          <a:p xmlns:a="http://schemas.openxmlformats.org/drawingml/2006/main">
+            <a:r>
+              <a:t>2 分钟。</a:t>
+            </a:r>
+          </a:p>
+          <a:p xmlns:a="http://schemas.openxmlformats.org/drawingml/2006/main">
+            <a:r>
+              <a:t/>
+            </a:r>
+          </a:p>
+          <a:p xmlns:a="http://schemas.openxmlformats.org/drawingml/2006/main">
+            <a:r>
+              <a:t>[Evidence boundary]</a:t>
+            </a:r>
+          </a:p>
+          <a:p xmlns:a="http://schemas.openxmlformats.org/drawingml/2006/main">
+            <a:r>
+              <a:t>[handout.md](./handout.md) §二-§六；[teaching-plan.md](./teaching-plan.md) 第四至六节。</a:t>
+            </a:r>
+          </a:p>
+          <a:p xmlns:a="http://schemas.openxmlformats.org/drawingml/2006/main">
+            <a:r>
+              <a:t/>
+            </a:r>
+          </a:p>
+          <a:p xmlns:a="http://schemas.openxmlformats.org/drawingml/2006/main">
+            <a:r>
               <a:t>[Sources]</a:t>
             </a:r>
           </a:p>
           <a:p xmlns:a="http://schemas.openxmlformats.org/drawingml/2006/main">
             <a:r>
-              <a:t>- /Users/bright/Projects/courses/graduate/lessons/lesson-10/slides.md</a:t>
-            </a:r>
-          </a:p>
-          <a:p xmlns:a="http://schemas.openxmlformats.org/drawingml/2006/main">
-            <a:r>
-              <a:t>- /Users/bright/Projects/courses/graduate/lessons/lesson-10/handout.md</a:t>
+              <a:t>- lessons/lesson-10/slides.md P16</a:t>
+            </a:r>
+          </a:p>
+          <a:p xmlns:a="http://schemas.openxmlformats.org/drawingml/2006/main">
+            <a:r>
+              <a:t>- lessons/lesson-10/handout.md §二-§六 本讲核心链路与边界总结</a:t>
+            </a:r>
+          </a:p>
+          <a:p xmlns:a="http://schemas.openxmlformats.org/drawingml/2006/main">
+            <a:r>
+              <a:t>- lessons/lesson-10/teaching-plan.md</a:t>
             </a:r>
           </a:p>
           <a:p xmlns:a="http://schemas.openxmlformats.org/drawingml/2006/main">
@@ -1164,7 +1804,7 @@
           <a:lstStyle xmlns:a="http://schemas.openxmlformats.org/drawingml/2006/main"/>
           <a:p xmlns:a="http://schemas.openxmlformats.org/drawingml/2006/main">
             <a:r>
-              <a:t>第 10 课受限执行。屏显按现行逐页母稿压缩为课堂可读对象，完整说明保留在讲义与教师备注。</a:t>
+              <a:t>受限执行能否安全重复？</a:t>
             </a:r>
           </a:p>
           <a:p xmlns:a="http://schemas.openxmlformats.org/drawingml/2006/main">
@@ -1174,17 +1814,117 @@
           </a:p>
           <a:p xmlns:a="http://schemas.openxmlformats.org/drawingml/2006/main">
             <a:r>
+              <a:t>讲义对应：§六 常见错误；§导读 第 11 课预告；退出卡</a:t>
+            </a:r>
+          </a:p>
+          <a:p xmlns:a="http://schemas.openxmlformats.org/drawingml/2006/main">
+            <a:r>
+              <a:t/>
+            </a:r>
+          </a:p>
+          <a:p xmlns:a="http://schemas.openxmlformats.org/drawingml/2006/main">
+            <a:r>
+              <a:t>[Teaching]</a:t>
+            </a:r>
+          </a:p>
+          <a:p xmlns:a="http://schemas.openxmlformats.org/drawingml/2006/main">
+            <a:r>
+              <a:t>回扣本课目标：任务契约、可核验 diff、验证证据、失败或越权处理和 AI 使用记录共同构成第 11 课输入。第 11 课将一次受限执行扩展为冻结运行队列，约束固定指标、预算、停止条件和失败恢复；另行分析优化循环的 Keep/Discard，不能据结果筛除冻结评价队列的输出。本课非正式提交门，产出回写个人项目。</a:t>
+            </a:r>
+          </a:p>
+          <a:p xmlns:a="http://schemas.openxmlformats.org/drawingml/2006/main">
+            <a:r>
+              <a:t/>
+            </a:r>
+          </a:p>
+          <a:p xmlns:a="http://schemas.openxmlformats.org/drawingml/2006/main">
+            <a:r>
+              <a:t>[Student action]</a:t>
+            </a:r>
+          </a:p>
+          <a:p xmlns:a="http://schemas.openxmlformats.org/drawingml/2006/main">
+            <a:r>
+              <a:t>学生提交退出卡或保存在个人项目。教师收集共性问题，用于第 11 课前调整。</a:t>
+            </a:r>
+          </a:p>
+          <a:p xmlns:a="http://schemas.openxmlformats.org/drawingml/2006/main">
+            <a:r>
+              <a:t/>
+            </a:r>
+          </a:p>
+          <a:p xmlns:a="http://schemas.openxmlformats.org/drawingml/2006/main">
+            <a:r>
+              <a:t>[Timing]</a:t>
+            </a:r>
+          </a:p>
+          <a:p xmlns:a="http://schemas.openxmlformats.org/drawingml/2006/main">
+            <a:r>
+              <a:t>3 分钟。</a:t>
+            </a:r>
+          </a:p>
+          <a:p xmlns:a="http://schemas.openxmlformats.org/drawingml/2006/main">
+            <a:r>
+              <a:t/>
+            </a:r>
+          </a:p>
+          <a:p xmlns:a="http://schemas.openxmlformats.org/drawingml/2006/main">
+            <a:r>
+              <a:t>[Evidence boundary]</a:t>
+            </a:r>
+          </a:p>
+          <a:p xmlns:a="http://schemas.openxmlformats.org/drawingml/2006/main">
+            <a:r>
+              <a:t>- Russell, S., &amp; Norvig, P. *Artificial Intelligence: A Modern Approach*, 4th ed. Pearson, 2020, Ch 2. [出版社页面](https://www.pearson.com/en-us/subject-catalog/p/artificial-intelligence-a-modern-approach/P200000003500/9780134610993)。</a:t>
+            </a:r>
+          </a:p>
+          <a:p xmlns:a="http://schemas.openxmlformats.org/drawingml/2006/main">
+            <a:r>
+              <a:t>- Yao, S. et al. "ReAct: Synergizing Reasoning and Acting in Language Models." *ICLR 2023*. [会议页面](https://iclr.cc/virtual/2023/poster/11003)。</a:t>
+            </a:r>
+          </a:p>
+          <a:p xmlns:a="http://schemas.openxmlformats.org/drawingml/2006/main">
+            <a:r>
+              <a:t>- Amershi, S. et al. "Guidelines for Human-AI Interaction." *CHI 2019*. DOI: [10.1145/3290605.3300233](https://www.microsoft.com/en-us/research/publication/guidelines-for-human-ai-interaction/)。</a:t>
+            </a:r>
+          </a:p>
+          <a:p xmlns:a="http://schemas.openxmlformats.org/drawingml/2006/main">
+            <a:r>
+              <a:t>- Jimenez, C. E. et al. *SWE-bench*, ICLR 2024. [项目页面](https://www.swebench.com/original.html)。</a:t>
+            </a:r>
+          </a:p>
+          <a:p xmlns:a="http://schemas.openxmlformats.org/drawingml/2006/main">
+            <a:r>
+              <a:t>- 阅读规则见 [reading-list.md](../../course/reading-list.md) 第 10 课。</a:t>
+            </a:r>
+          </a:p>
+          <a:p xmlns:a="http://schemas.openxmlformats.org/drawingml/2006/main">
+            <a:r>
+              <a:t>- 本课非正式提交门（[assignments.md](../../course/assignments.md)）。</a:t>
+            </a:r>
+          </a:p>
+          <a:p xmlns:a="http://schemas.openxmlformats.org/drawingml/2006/main">
+            <a:r>
+              <a:t/>
+            </a:r>
+          </a:p>
+          <a:p xmlns:a="http://schemas.openxmlformats.org/drawingml/2006/main">
+            <a:r>
               <a:t>[Sources]</a:t>
             </a:r>
           </a:p>
           <a:p xmlns:a="http://schemas.openxmlformats.org/drawingml/2006/main">
             <a:r>
-              <a:t>- /Users/bright/Projects/courses/graduate/lessons/lesson-10/slides.md</a:t>
-            </a:r>
-          </a:p>
-          <a:p xmlns:a="http://schemas.openxmlformats.org/drawingml/2006/main">
-            <a:r>
-              <a:t>- /Users/bright/Projects/courses/graduate/lessons/lesson-10/handout.md</a:t>
+              <a:t>- lessons/lesson-10/slides.md P17</a:t>
+            </a:r>
+          </a:p>
+          <a:p xmlns:a="http://schemas.openxmlformats.org/drawingml/2006/main">
+            <a:r>
+              <a:t>- lessons/lesson-10/handout.md §六 常见错误；§导读 第 11 课预告；退出卡</a:t>
+            </a:r>
+          </a:p>
+          <a:p xmlns:a="http://schemas.openxmlformats.org/drawingml/2006/main">
+            <a:r>
+              <a:t>- lessons/lesson-10/teaching-plan.md</a:t>
             </a:r>
           </a:p>
           <a:p xmlns:a="http://schemas.openxmlformats.org/drawingml/2006/main">
@@ -1259,7 +1999,7 @@
           <a:lstStyle xmlns:a="http://schemas.openxmlformats.org/drawingml/2006/main"/>
           <a:p xmlns:a="http://schemas.openxmlformats.org/drawingml/2006/main">
             <a:r>
-              <a:t>第 10 课受限执行。屏显按现行逐页母稿压缩为课堂可读对象，完整说明保留在讲义与教师备注。</a:t>
+              <a:t>实验规格还没有约束 Agent 执行</a:t>
             </a:r>
           </a:p>
           <a:p xmlns:a="http://schemas.openxmlformats.org/drawingml/2006/main">
@@ -1269,17 +2009,92 @@
           </a:p>
           <a:p xmlns:a="http://schemas.openxmlformats.org/drawingml/2006/main">
             <a:r>
+              <a:t>讲义对应：§一 受限 Agent 执行在研究链路中的位置；§导读（承接第 9 课）；§学习目标</a:t>
+            </a:r>
+          </a:p>
+          <a:p xmlns:a="http://schemas.openxmlformats.org/drawingml/2006/main">
+            <a:r>
+              <a:t/>
+            </a:r>
+          </a:p>
+          <a:p xmlns:a="http://schemas.openxmlformats.org/drawingml/2006/main">
+            <a:r>
+              <a:t>[Teaching]</a:t>
+            </a:r>
+          </a:p>
+          <a:p xmlns:a="http://schemas.openxmlformats.org/drawingml/2006/main">
+            <a:r>
+              <a:t>回扣第 9 课：判断门已过，实验规格中"哪些步骤拟用 Agent、哪些步骤必须人工"是本课任务契约的直接输入。本课把"拟用 Agent"步骤改写为带验收标准的任务契约，让 Agent 在受限权限下执行一次。明确边界：目标是完成一次受限 Agent 执行的可复盘链路，不要求把 baseline 跑到最优；产出回写个人项目，作为第 13 课验证门材料的过程证据。第 11 课把本课的"一次执行"扩展为冻结队列执行与失败恢复。</a:t>
+            </a:r>
+          </a:p>
+          <a:p xmlns:a="http://schemas.openxmlformats.org/drawingml/2006/main">
+            <a:r>
+              <a:t/>
+            </a:r>
+          </a:p>
+          <a:p xmlns:a="http://schemas.openxmlformats.org/drawingml/2006/main">
+            <a:r>
+              <a:t>[Student action]</a:t>
+            </a:r>
+          </a:p>
+          <a:p xmlns:a="http://schemas.openxmlformats.org/drawingml/2006/main">
+            <a:r>
+              <a:t>快问：你第 9 课实验规格中标注了几个"拟用 Agent"步骤？只听回答，不评价。</a:t>
+            </a:r>
+          </a:p>
+          <a:p xmlns:a="http://schemas.openxmlformats.org/drawingml/2006/main">
+            <a:r>
+              <a:t/>
+            </a:r>
+          </a:p>
+          <a:p xmlns:a="http://schemas.openxmlformats.org/drawingml/2006/main">
+            <a:r>
+              <a:t>[Timing]</a:t>
+            </a:r>
+          </a:p>
+          <a:p xmlns:a="http://schemas.openxmlformats.org/drawingml/2006/main">
+            <a:r>
+              <a:t>5 分钟。</a:t>
+            </a:r>
+          </a:p>
+          <a:p xmlns:a="http://schemas.openxmlformats.org/drawingml/2006/main">
+            <a:r>
+              <a:t/>
+            </a:r>
+          </a:p>
+          <a:p xmlns:a="http://schemas.openxmlformats.org/drawingml/2006/main">
+            <a:r>
+              <a:t>[Evidence boundary]</a:t>
+            </a:r>
+          </a:p>
+          <a:p xmlns:a="http://schemas.openxmlformats.org/drawingml/2006/main">
+            <a:r>
+              <a:t>回扣第 9 课讲义 §三·5 与 §五；[备课规划.md](../备课规划.md) 第 10 课目标段；[assignments.md](../../course/assignments.md)（第 10 课非正式提交门）；[AGENTS.md](../../AGENTS.md) 证据标准。</a:t>
+            </a:r>
+          </a:p>
+          <a:p xmlns:a="http://schemas.openxmlformats.org/drawingml/2006/main">
+            <a:r>
+              <a:t/>
+            </a:r>
+          </a:p>
+          <a:p xmlns:a="http://schemas.openxmlformats.org/drawingml/2006/main">
+            <a:r>
               <a:t>[Sources]</a:t>
             </a:r>
           </a:p>
           <a:p xmlns:a="http://schemas.openxmlformats.org/drawingml/2006/main">
             <a:r>
-              <a:t>- /Users/bright/Projects/courses/graduate/lessons/lesson-10/slides.md</a:t>
-            </a:r>
-          </a:p>
-          <a:p xmlns:a="http://schemas.openxmlformats.org/drawingml/2006/main">
-            <a:r>
-              <a:t>- /Users/bright/Projects/courses/graduate/lessons/lesson-10/handout.md</a:t>
+              <a:t>- lessons/lesson-10/slides.md P02</a:t>
+            </a:r>
+          </a:p>
+          <a:p xmlns:a="http://schemas.openxmlformats.org/drawingml/2006/main">
+            <a:r>
+              <a:t>- lessons/lesson-10/handout.md §一 受限 Agent 执行在研究链路中的位置；§导读（承接第 9 课）；§学习目标</a:t>
+            </a:r>
+          </a:p>
+          <a:p xmlns:a="http://schemas.openxmlformats.org/drawingml/2006/main">
+            <a:r>
+              <a:t>- lessons/lesson-10/teaching-plan.md</a:t>
             </a:r>
           </a:p>
           <a:p xmlns:a="http://schemas.openxmlformats.org/drawingml/2006/main">
@@ -1354,7 +2169,7 @@
           <a:lstStyle xmlns:a="http://schemas.openxmlformats.org/drawingml/2006/main"/>
           <a:p xmlns:a="http://schemas.openxmlformats.org/drawingml/2006/main">
             <a:r>
-              <a:t>第 10 课受限执行。屏显按现行逐页母稿压缩为课堂可读对象，完整说明保留在讲义与教师备注。</a:t>
+              <a:t>模糊 prompt 让错误无法追溯</a:t>
             </a:r>
           </a:p>
           <a:p xmlns:a="http://schemas.openxmlformats.org/drawingml/2006/main">
@@ -1364,17 +2179,92 @@
           </a:p>
           <a:p xmlns:a="http://schemas.openxmlformats.org/drawingml/2006/main">
             <a:r>
+              <a:t>讲义对应：§二·1 模糊 prompt 的问题</a:t>
+            </a:r>
+          </a:p>
+          <a:p xmlns:a="http://schemas.openxmlformats.org/drawingml/2006/main">
+            <a:r>
+              <a:t/>
+            </a:r>
+          </a:p>
+          <a:p xmlns:a="http://schemas.openxmlformats.org/drawingml/2006/main">
+            <a:r>
+              <a:t>[Teaching]</a:t>
+            </a:r>
+          </a:p>
+          <a:p xmlns:a="http://schemas.openxmlformats.org/drawingml/2006/main">
+            <a:r>
+              <a:t>模糊 prompt 把范围、权限、验收、失败处理都交给 Agent 解释。核心问题是出错后无法追溯——研究者不知道 Agent 做了什么、为什么做、依据什么标准，因此无法判断结果是否仍属于当前实验。本课的起点是把模糊 prompt 改写为任务契约。</a:t>
+            </a:r>
+          </a:p>
+          <a:p xmlns:a="http://schemas.openxmlformats.org/drawingml/2006/main">
+            <a:r>
+              <a:t/>
+            </a:r>
+          </a:p>
+          <a:p xmlns:a="http://schemas.openxmlformats.org/drawingml/2006/main">
+            <a:r>
+              <a:t>[Student action]</a:t>
+            </a:r>
+          </a:p>
+          <a:p xmlns:a="http://schemas.openxmlformats.org/drawingml/2006/main">
+            <a:r>
+              <a:t>让学生说出自己最近一次给 Agent 的 prompt 属于模糊 prompt 的哪些特征。</a:t>
+            </a:r>
+          </a:p>
+          <a:p xmlns:a="http://schemas.openxmlformats.org/drawingml/2006/main">
+            <a:r>
+              <a:t/>
+            </a:r>
+          </a:p>
+          <a:p xmlns:a="http://schemas.openxmlformats.org/drawingml/2006/main">
+            <a:r>
+              <a:t>[Timing]</a:t>
+            </a:r>
+          </a:p>
+          <a:p xmlns:a="http://schemas.openxmlformats.org/drawingml/2006/main">
+            <a:r>
+              <a:t>4 分钟。</a:t>
+            </a:r>
+          </a:p>
+          <a:p xmlns:a="http://schemas.openxmlformats.org/drawingml/2006/main">
+            <a:r>
+              <a:t/>
+            </a:r>
+          </a:p>
+          <a:p xmlns:a="http://schemas.openxmlformats.org/drawingml/2006/main">
+            <a:r>
+              <a:t>[Evidence boundary]</a:t>
+            </a:r>
+          </a:p>
+          <a:p xmlns:a="http://schemas.openxmlformats.org/drawingml/2006/main">
+            <a:r>
+              <a:t>讲义 §二·1。</a:t>
+            </a:r>
+          </a:p>
+          <a:p xmlns:a="http://schemas.openxmlformats.org/drawingml/2006/main">
+            <a:r>
+              <a:t/>
+            </a:r>
+          </a:p>
+          <a:p xmlns:a="http://schemas.openxmlformats.org/drawingml/2006/main">
+            <a:r>
               <a:t>[Sources]</a:t>
             </a:r>
           </a:p>
           <a:p xmlns:a="http://schemas.openxmlformats.org/drawingml/2006/main">
             <a:r>
-              <a:t>- /Users/bright/Projects/courses/graduate/lessons/lesson-10/slides.md</a:t>
-            </a:r>
-          </a:p>
-          <a:p xmlns:a="http://schemas.openxmlformats.org/drawingml/2006/main">
-            <a:r>
-              <a:t>- /Users/bright/Projects/courses/graduate/lessons/lesson-10/handout.md</a:t>
+              <a:t>- lessons/lesson-10/slides.md P03</a:t>
+            </a:r>
+          </a:p>
+          <a:p xmlns:a="http://schemas.openxmlformats.org/drawingml/2006/main">
+            <a:r>
+              <a:t>- lessons/lesson-10/handout.md §二·1 模糊 prompt 的问题</a:t>
+            </a:r>
+          </a:p>
+          <a:p xmlns:a="http://schemas.openxmlformats.org/drawingml/2006/main">
+            <a:r>
+              <a:t>- lessons/lesson-10/teaching-plan.md</a:t>
             </a:r>
           </a:p>
           <a:p xmlns:a="http://schemas.openxmlformats.org/drawingml/2006/main">
@@ -1449,7 +2339,7 @@
           <a:lstStyle xmlns:a="http://schemas.openxmlformats.org/drawingml/2006/main"/>
           <a:p xmlns:a="http://schemas.openxmlformats.org/drawingml/2006/main">
             <a:r>
-              <a:t>第 10 课受限执行。屏显按现行逐页母稿压缩为课堂可读对象，完整说明保留在讲义与教师备注。</a:t>
+              <a:t>任务契约建立可检查边界</a:t>
             </a:r>
           </a:p>
           <a:p xmlns:a="http://schemas.openxmlformats.org/drawingml/2006/main">
@@ -1459,17 +2349,92 @@
           </a:p>
           <a:p xmlns:a="http://schemas.openxmlformats.org/drawingml/2006/main">
             <a:r>
+              <a:t>讲义对应：§二·2 任务契约五字段</a:t>
+            </a:r>
+          </a:p>
+          <a:p xmlns:a="http://schemas.openxmlformats.org/drawingml/2006/main">
+            <a:r>
+              <a:t/>
+            </a:r>
+          </a:p>
+          <a:p xmlns:a="http://schemas.openxmlformats.org/drawingml/2006/main">
+            <a:r>
+              <a:t>[Teaching]</a:t>
+            </a:r>
+          </a:p>
+          <a:p xmlns:a="http://schemas.openxmlformats.org/drawingml/2006/main">
+            <a:r>
+              <a:t>五字段必须落到贯穿案例样例。重点演示：Context 不暴露最终 rubric 评分（防止 Agent 调整实现以迎合评分）；Permission 可写层只含 `src/generate.py`；Non-goal 防止任务膨胀；人工审核点是"停下来等确认"；失败恢复不重试到成功。任务契约写在项目里（`agent-tasks/&lt;task-id&gt;.md`），与 diff、日志、人工核验一起留存。</a:t>
+            </a:r>
+          </a:p>
+          <a:p xmlns:a="http://schemas.openxmlformats.org/drawingml/2006/main">
+            <a:r>
+              <a:t/>
+            </a:r>
+          </a:p>
+          <a:p xmlns:a="http://schemas.openxmlformats.org/drawingml/2006/main">
+            <a:r>
+              <a:t>[Student action]</a:t>
+            </a:r>
+          </a:p>
+          <a:p xmlns:a="http://schemas.openxmlformats.org/drawingml/2006/main">
+            <a:r>
+              <a:t>让学生用自己的"拟用 Agent"步骤尝试填写五字段。</a:t>
+            </a:r>
+          </a:p>
+          <a:p xmlns:a="http://schemas.openxmlformats.org/drawingml/2006/main">
+            <a:r>
+              <a:t/>
+            </a:r>
+          </a:p>
+          <a:p xmlns:a="http://schemas.openxmlformats.org/drawingml/2006/main">
+            <a:r>
+              <a:t>[Timing]</a:t>
+            </a:r>
+          </a:p>
+          <a:p xmlns:a="http://schemas.openxmlformats.org/drawingml/2006/main">
+            <a:r>
+              <a:t>4 分钟。</a:t>
+            </a:r>
+          </a:p>
+          <a:p xmlns:a="http://schemas.openxmlformats.org/drawingml/2006/main">
+            <a:r>
+              <a:t/>
+            </a:r>
+          </a:p>
+          <a:p xmlns:a="http://schemas.openxmlformats.org/drawingml/2006/main">
+            <a:r>
+              <a:t>[Evidence boundary]</a:t>
+            </a:r>
+          </a:p>
+          <a:p xmlns:a="http://schemas.openxmlformats.org/drawingml/2006/main">
+            <a:r>
+              <a:t>讲义 §二·2；Russell &amp; Norvig 2020 Ch 2（[reading-list.md](../../course/reading-list.md) 第 10 课）。</a:t>
+            </a:r>
+          </a:p>
+          <a:p xmlns:a="http://schemas.openxmlformats.org/drawingml/2006/main">
+            <a:r>
+              <a:t/>
+            </a:r>
+          </a:p>
+          <a:p xmlns:a="http://schemas.openxmlformats.org/drawingml/2006/main">
+            <a:r>
               <a:t>[Sources]</a:t>
             </a:r>
           </a:p>
           <a:p xmlns:a="http://schemas.openxmlformats.org/drawingml/2006/main">
             <a:r>
-              <a:t>- /Users/bright/Projects/courses/graduate/lessons/lesson-10/slides.md</a:t>
-            </a:r>
-          </a:p>
-          <a:p xmlns:a="http://schemas.openxmlformats.org/drawingml/2006/main">
-            <a:r>
-              <a:t>- /Users/bright/Projects/courses/graduate/lessons/lesson-10/handout.md</a:t>
+              <a:t>- lessons/lesson-10/slides.md P04</a:t>
+            </a:r>
+          </a:p>
+          <a:p xmlns:a="http://schemas.openxmlformats.org/drawingml/2006/main">
+            <a:r>
+              <a:t>- lessons/lesson-10/handout.md §二·2 任务契约五字段</a:t>
+            </a:r>
+          </a:p>
+          <a:p xmlns:a="http://schemas.openxmlformats.org/drawingml/2006/main">
+            <a:r>
+              <a:t>- lessons/lesson-10/teaching-plan.md</a:t>
             </a:r>
           </a:p>
           <a:p xmlns:a="http://schemas.openxmlformats.org/drawingml/2006/main">
@@ -1544,7 +2509,7 @@
           <a:lstStyle xmlns:a="http://schemas.openxmlformats.org/drawingml/2006/main"/>
           <a:p xmlns:a="http://schemas.openxmlformats.org/drawingml/2006/main">
             <a:r>
-              <a:t>第 10 课受限执行。屏显按现行逐页母稿压缩为课堂可读对象，完整说明保留在讲义与教师备注。</a:t>
+              <a:t>任务契约把请求改写为可追溯执行</a:t>
             </a:r>
           </a:p>
           <a:p xmlns:a="http://schemas.openxmlformats.org/drawingml/2006/main">
@@ -1554,17 +2519,92 @@
           </a:p>
           <a:p xmlns:a="http://schemas.openxmlformats.org/drawingml/2006/main">
             <a:r>
+              <a:t>讲义对应：§二·3 模糊 prompt 与任务契约的对照</a:t>
+            </a:r>
+          </a:p>
+          <a:p xmlns:a="http://schemas.openxmlformats.org/drawingml/2006/main">
+            <a:r>
+              <a:t/>
+            </a:r>
+          </a:p>
+          <a:p xmlns:a="http://schemas.openxmlformats.org/drawingml/2006/main">
+            <a:r>
+              <a:t>[Teaching]</a:t>
+            </a:r>
+          </a:p>
+          <a:p xmlns:a="http://schemas.openxmlformats.org/drawingml/2006/main">
+            <a:r>
+              <a:t>屏显按范围、权限、验收与失败处理四个方面比较原请求和任务契约；可追溯性由这些约束与日志共同建立。独立检查者应能从契约、diff、测试和失败记录复核本次执行。</a:t>
+            </a:r>
+          </a:p>
+          <a:p xmlns:a="http://schemas.openxmlformats.org/drawingml/2006/main">
+            <a:r>
+              <a:t/>
+            </a:r>
+          </a:p>
+          <a:p xmlns:a="http://schemas.openxmlformats.org/drawingml/2006/main">
+            <a:r>
+              <a:t>[Student action]</a:t>
+            </a:r>
+          </a:p>
+          <a:p xmlns:a="http://schemas.openxmlformats.org/drawingml/2006/main">
+            <a:r>
+              <a:t>让学生用对照表检查自己刚才写的五字段，标注哪些维度仍模糊。</a:t>
+            </a:r>
+          </a:p>
+          <a:p xmlns:a="http://schemas.openxmlformats.org/drawingml/2006/main">
+            <a:r>
+              <a:t/>
+            </a:r>
+          </a:p>
+          <a:p xmlns:a="http://schemas.openxmlformats.org/drawingml/2006/main">
+            <a:r>
+              <a:t>[Timing]</a:t>
+            </a:r>
+          </a:p>
+          <a:p xmlns:a="http://schemas.openxmlformats.org/drawingml/2006/main">
+            <a:r>
+              <a:t>4 分钟。</a:t>
+            </a:r>
+          </a:p>
+          <a:p xmlns:a="http://schemas.openxmlformats.org/drawingml/2006/main">
+            <a:r>
+              <a:t/>
+            </a:r>
+          </a:p>
+          <a:p xmlns:a="http://schemas.openxmlformats.org/drawingml/2006/main">
+            <a:r>
+              <a:t>[Evidence boundary]</a:t>
+            </a:r>
+          </a:p>
+          <a:p xmlns:a="http://schemas.openxmlformats.org/drawingml/2006/main">
+            <a:r>
+              <a:t>讲义 §二·3；Russell &amp; Norvig 2020 Ch 2（[reading-list.md](../../course/reading-list.md) 第 10 课）。</a:t>
+            </a:r>
+          </a:p>
+          <a:p xmlns:a="http://schemas.openxmlformats.org/drawingml/2006/main">
+            <a:r>
+              <a:t/>
+            </a:r>
+          </a:p>
+          <a:p xmlns:a="http://schemas.openxmlformats.org/drawingml/2006/main">
+            <a:r>
               <a:t>[Sources]</a:t>
             </a:r>
           </a:p>
           <a:p xmlns:a="http://schemas.openxmlformats.org/drawingml/2006/main">
             <a:r>
-              <a:t>- /Users/bright/Projects/courses/graduate/lessons/lesson-10/slides.md</a:t>
-            </a:r>
-          </a:p>
-          <a:p xmlns:a="http://schemas.openxmlformats.org/drawingml/2006/main">
-            <a:r>
-              <a:t>- /Users/bright/Projects/courses/graduate/lessons/lesson-10/handout.md</a:t>
+              <a:t>- lessons/lesson-10/slides.md P05</a:t>
+            </a:r>
+          </a:p>
+          <a:p xmlns:a="http://schemas.openxmlformats.org/drawingml/2006/main">
+            <a:r>
+              <a:t>- lessons/lesson-10/handout.md §二·3 模糊 prompt 与任务契约的对照</a:t>
+            </a:r>
+          </a:p>
+          <a:p xmlns:a="http://schemas.openxmlformats.org/drawingml/2006/main">
+            <a:r>
+              <a:t>- lessons/lesson-10/teaching-plan.md</a:t>
             </a:r>
           </a:p>
           <a:p xmlns:a="http://schemas.openxmlformats.org/drawingml/2006/main">
@@ -1639,7 +2679,7 @@
           <a:lstStyle xmlns:a="http://schemas.openxmlformats.org/drawingml/2006/main"/>
           <a:p xmlns:a="http://schemas.openxmlformats.org/drawingml/2006/main">
             <a:r>
-              <a:t>第 10 课受限执行。屏显按现行逐页母稿压缩为课堂可读对象，完整说明保留在讲义与教师备注。</a:t>
+              <a:t>任务级权限与真正停住的审核点</a:t>
             </a:r>
           </a:p>
           <a:p xmlns:a="http://schemas.openxmlformats.org/drawingml/2006/main">
@@ -1649,17 +2689,107 @@
           </a:p>
           <a:p xmlns:a="http://schemas.openxmlformats.org/drawingml/2006/main">
             <a:r>
+              <a:t>讲义对应：§三·1 最小权限原则的回归；§三·2 人工审核点的位置</a:t>
+            </a:r>
+          </a:p>
+          <a:p xmlns:a="http://schemas.openxmlformats.org/drawingml/2006/main">
+            <a:r>
+              <a:t/>
+            </a:r>
+          </a:p>
+          <a:p xmlns:a="http://schemas.openxmlformats.org/drawingml/2006/main">
+            <a:r>
+              <a:t>[Teaching]</a:t>
+            </a:r>
+          </a:p>
+          <a:p xmlns:a="http://schemas.openxmlformats.org/drawingml/2006/main">
+            <a:r>
+              <a:t>本课把最小权限从项目级落到任务级，任务结束后收回权限。屏显 configs/rubric 进入“需确认”表示提出变更时先停下：本次受限调试任务不能自行修改评价协议，获准变更也必须作为另一个研究决定更新规格并重新冻结，不能混入同一评价队列。结果、私有 notes 与外传仍属禁止范围。</a:t>
+            </a:r>
+          </a:p>
+          <a:p xmlns:a="http://schemas.openxmlformats.org/drawingml/2006/main">
+            <a:r>
+              <a:t/>
+            </a:r>
+          </a:p>
+          <a:p xmlns:a="http://schemas.openxmlformats.org/drawingml/2006/main">
+            <a:r>
+              <a:t>[Student action]</a:t>
+            </a:r>
+          </a:p>
+          <a:p xmlns:a="http://schemas.openxmlformats.org/drawingml/2006/main">
+            <a:r>
+              <a:t>让学生检查自己五字段中"可写"是否过宽——是否包含整个 `src/` 而不是具体文件？并标出至少四个审核点。</a:t>
+            </a:r>
+          </a:p>
+          <a:p xmlns:a="http://schemas.openxmlformats.org/drawingml/2006/main">
+            <a:r>
+              <a:t/>
+            </a:r>
+          </a:p>
+          <a:p xmlns:a="http://schemas.openxmlformats.org/drawingml/2006/main">
+            <a:r>
+              <a:t>[Timing]</a:t>
+            </a:r>
+          </a:p>
+          <a:p xmlns:a="http://schemas.openxmlformats.org/drawingml/2006/main">
+            <a:r>
+              <a:t>2 分钟。</a:t>
+            </a:r>
+          </a:p>
+          <a:p xmlns:a="http://schemas.openxmlformats.org/drawingml/2006/main">
+            <a:r>
+              <a:t/>
+            </a:r>
+          </a:p>
+          <a:p xmlns:a="http://schemas.openxmlformats.org/drawingml/2006/main">
+            <a:r>
+              <a:t>[Evidence boundary]</a:t>
+            </a:r>
+          </a:p>
+          <a:p xmlns:a="http://schemas.openxmlformats.org/drawingml/2006/main">
+            <a:r>
+              <a:t>直接来源：[正式来源](https://www.microsoft.com/en-us/research/publication/guidelines-for-human-ai-interaction/)。</a:t>
+            </a:r>
+          </a:p>
+          <a:p xmlns:a="http://schemas.openxmlformats.org/drawingml/2006/main">
+            <a:r>
+              <a:t/>
+            </a:r>
+          </a:p>
+          <a:p xmlns:a="http://schemas.openxmlformats.org/drawingml/2006/main">
+            <a:r>
+              <a:t>讲义 §三·1 与 §三·2；第 1 课 §四·3 最小权限原则；Amershi et al. CHI 2019（[reading-list.md](../../course/reading-list.md) 第 10 课）；第 9 课 §三·2 停止条件。</a:t>
+            </a:r>
+          </a:p>
+          <a:p xmlns:a="http://schemas.openxmlformats.org/drawingml/2006/main">
+            <a:r>
+              <a:t/>
+            </a:r>
+          </a:p>
+          <a:p xmlns:a="http://schemas.openxmlformats.org/drawingml/2006/main">
+            <a:r>
               <a:t>[Sources]</a:t>
             </a:r>
           </a:p>
           <a:p xmlns:a="http://schemas.openxmlformats.org/drawingml/2006/main">
             <a:r>
-              <a:t>- /Users/bright/Projects/courses/graduate/lessons/lesson-10/slides.md</a:t>
-            </a:r>
-          </a:p>
-          <a:p xmlns:a="http://schemas.openxmlformats.org/drawingml/2006/main">
-            <a:r>
-              <a:t>- /Users/bright/Projects/courses/graduate/lessons/lesson-10/handout.md</a:t>
+              <a:t>- lessons/lesson-10/slides.md P06</a:t>
+            </a:r>
+          </a:p>
+          <a:p xmlns:a="http://schemas.openxmlformats.org/drawingml/2006/main">
+            <a:r>
+              <a:t>- lessons/lesson-10/handout.md §三·1 最小权限原则的回归；§三·2 人工审核点的位置</a:t>
+            </a:r>
+          </a:p>
+          <a:p xmlns:a="http://schemas.openxmlformats.org/drawingml/2006/main">
+            <a:r>
+              <a:t>- lessons/lesson-10/teaching-plan.md</a:t>
+            </a:r>
+          </a:p>
+          <a:p xmlns:a="http://schemas.openxmlformats.org/drawingml/2006/main">
+            <a:r>
+              <a:t>- https://www.microsoft.com/en-us/research/publication/guidelines-for-human-ai-interaction/</a:t>
             </a:r>
           </a:p>
           <a:p xmlns:a="http://schemas.openxmlformats.org/drawingml/2006/main">
@@ -1734,7 +2864,7 @@
           <a:lstStyle xmlns:a="http://schemas.openxmlformats.org/drawingml/2006/main"/>
           <a:p xmlns:a="http://schemas.openxmlformats.org/drawingml/2006/main">
             <a:r>
-              <a:t>第 10 课受限执行。屏显按现行逐页母稿压缩为课堂可读对象，完整说明保留在讲义与教师备注。</a:t>
+              <a:t>错误循环需要可见的失败恢复</a:t>
             </a:r>
           </a:p>
           <a:p xmlns:a="http://schemas.openxmlformats.org/drawingml/2006/main">
@@ -1744,17 +2874,107 @@
           </a:p>
           <a:p xmlns:a="http://schemas.openxmlformats.org/drawingml/2006/main">
             <a:r>
+              <a:t>讲义对应：§二·4 ReAct 循环与错误传播；§三·3 为什么要预先写停止与确认；§三·4 失败恢复</a:t>
+            </a:r>
+          </a:p>
+          <a:p xmlns:a="http://schemas.openxmlformats.org/drawingml/2006/main">
+            <a:r>
+              <a:t/>
+            </a:r>
+          </a:p>
+          <a:p xmlns:a="http://schemas.openxmlformats.org/drawingml/2006/main">
+            <a:r>
+              <a:t>[Teaching]</a:t>
+            </a:r>
+          </a:p>
+          <a:p xmlns:a="http://schemas.openxmlformats.org/drawingml/2006/main">
+            <a:r>
+              <a:t>ReAct 循环说明 Agent 输出必须被核验：错误会在推理、行动、观察任一环节传播并自我强化。任务契约与日志让错误传播可被观察。失败恢复不重试到成功——失败日志与成功结果同等重要，删除失败日志等同于伪造实验记录（沿用 [assessment.md](../../course/assessment.md) 学术规范红线）。</a:t>
+            </a:r>
+          </a:p>
+          <a:p xmlns:a="http://schemas.openxmlformats.org/drawingml/2006/main">
+            <a:r>
+              <a:t/>
+            </a:r>
+          </a:p>
+          <a:p xmlns:a="http://schemas.openxmlformats.org/drawingml/2006/main">
+            <a:r>
+              <a:t>[Student action]</a:t>
+            </a:r>
+          </a:p>
+          <a:p xmlns:a="http://schemas.openxmlformats.org/drawingml/2006/main">
+            <a:r>
+              <a:t>让学生检查自己任务契约的失败恢复段是否覆盖超时、越权、测试失败三种情形。</a:t>
+            </a:r>
+          </a:p>
+          <a:p xmlns:a="http://schemas.openxmlformats.org/drawingml/2006/main">
+            <a:r>
+              <a:t/>
+            </a:r>
+          </a:p>
+          <a:p xmlns:a="http://schemas.openxmlformats.org/drawingml/2006/main">
+            <a:r>
+              <a:t>[Timing]</a:t>
+            </a:r>
+          </a:p>
+          <a:p xmlns:a="http://schemas.openxmlformats.org/drawingml/2006/main">
+            <a:r>
+              <a:t>2 分钟。</a:t>
+            </a:r>
+          </a:p>
+          <a:p xmlns:a="http://schemas.openxmlformats.org/drawingml/2006/main">
+            <a:r>
+              <a:t/>
+            </a:r>
+          </a:p>
+          <a:p xmlns:a="http://schemas.openxmlformats.org/drawingml/2006/main">
+            <a:r>
+              <a:t>[Evidence boundary]</a:t>
+            </a:r>
+          </a:p>
+          <a:p xmlns:a="http://schemas.openxmlformats.org/drawingml/2006/main">
+            <a:r>
+              <a:t>直接来源：[正式来源](https://iclr.cc/virtual/2023/poster/11003)。</a:t>
+            </a:r>
+          </a:p>
+          <a:p xmlns:a="http://schemas.openxmlformats.org/drawingml/2006/main">
+            <a:r>
+              <a:t/>
+            </a:r>
+          </a:p>
+          <a:p xmlns:a="http://schemas.openxmlformats.org/drawingml/2006/main">
+            <a:r>
+              <a:t>讲义 §二·4 与 §三·4；Yao et al. ReAct ICLR 2023（[reading-list.md](../../course/reading-list.md) 第 10 课）；[assessment.md](../../course/assessment.md) 学术规范红线。</a:t>
+            </a:r>
+          </a:p>
+          <a:p xmlns:a="http://schemas.openxmlformats.org/drawingml/2006/main">
+            <a:r>
+              <a:t/>
+            </a:r>
+          </a:p>
+          <a:p xmlns:a="http://schemas.openxmlformats.org/drawingml/2006/main">
+            <a:r>
               <a:t>[Sources]</a:t>
             </a:r>
           </a:p>
           <a:p xmlns:a="http://schemas.openxmlformats.org/drawingml/2006/main">
             <a:r>
-              <a:t>- /Users/bright/Projects/courses/graduate/lessons/lesson-10/slides.md</a:t>
-            </a:r>
-          </a:p>
-          <a:p xmlns:a="http://schemas.openxmlformats.org/drawingml/2006/main">
-            <a:r>
-              <a:t>- /Users/bright/Projects/courses/graduate/lessons/lesson-10/handout.md</a:t>
+              <a:t>- lessons/lesson-10/slides.md P07</a:t>
+            </a:r>
+          </a:p>
+          <a:p xmlns:a="http://schemas.openxmlformats.org/drawingml/2006/main">
+            <a:r>
+              <a:t>- lessons/lesson-10/handout.md §二·4 ReAct 循环与错误传播；§三·3 为什么要预先写停止与确认；§三·4 失败恢复</a:t>
+            </a:r>
+          </a:p>
+          <a:p xmlns:a="http://schemas.openxmlformats.org/drawingml/2006/main">
+            <a:r>
+              <a:t>- lessons/lesson-10/teaching-plan.md</a:t>
+            </a:r>
+          </a:p>
+          <a:p xmlns:a="http://schemas.openxmlformats.org/drawingml/2006/main">
+            <a:r>
+              <a:t>- https://iclr.cc/virtual/2023/poster/11003</a:t>
             </a:r>
           </a:p>
           <a:p xmlns:a="http://schemas.openxmlformats.org/drawingml/2006/main">
@@ -1829,7 +3049,7 @@
           <a:lstStyle xmlns:a="http://schemas.openxmlformats.org/drawingml/2006/main"/>
           <a:p xmlns:a="http://schemas.openxmlformats.org/drawingml/2006/main">
             <a:r>
-              <a:t>第 10 课受限执行。屏显按现行逐页母稿压缩为课堂可读对象，完整说明保留在讲义与教师备注。</a:t>
+              <a:t>用 diff 与测试审查候选实现</a:t>
             </a:r>
           </a:p>
           <a:p xmlns:a="http://schemas.openxmlformats.org/drawingml/2006/main">
@@ -1839,17 +3059,112 @@
           </a:p>
           <a:p xmlns:a="http://schemas.openxmlformats.org/drawingml/2006/main">
             <a:r>
+              <a:t>讲义对应：§四·1 Agent 输出是候选，不是事实；§四·3 diff 审查清单</a:t>
+            </a:r>
+          </a:p>
+          <a:p xmlns:a="http://schemas.openxmlformats.org/drawingml/2006/main">
+            <a:r>
+              <a:t/>
+            </a:r>
+          </a:p>
+          <a:p xmlns:a="http://schemas.openxmlformats.org/drawingml/2006/main">
+            <a:r>
+              <a:t>[Teaching]</a:t>
+            </a:r>
+          </a:p>
+          <a:p xmlns:a="http://schemas.openxmlformats.org/drawingml/2006/main">
+            <a:r>
+              <a:t>用本课真实 generate.diff 检查缺字段是否明确失败，再核对测试是否覆盖这一行为。屏显四项审核不能代替方法判断：baseline 公平性、指标定义与停止条件仍由研究者决定。后续 P14 的完整审查还会核对依赖、Non-goal 与提交说明是否只写事实。</a:t>
+            </a:r>
+          </a:p>
+          <a:p xmlns:a="http://schemas.openxmlformats.org/drawingml/2006/main">
+            <a:r>
+              <a:t/>
+            </a:r>
+          </a:p>
+          <a:p xmlns:a="http://schemas.openxmlformats.org/drawingml/2006/main">
+            <a:r>
+              <a:t>[Student action]</a:t>
+            </a:r>
+          </a:p>
+          <a:p xmlns:a="http://schemas.openxmlformats.org/drawingml/2006/main">
+            <a:r>
+              <a:t>让学生用贯穿案例的 diff 样例对照六项逐项检查。</a:t>
+            </a:r>
+          </a:p>
+          <a:p xmlns:a="http://schemas.openxmlformats.org/drawingml/2006/main">
+            <a:r>
+              <a:t/>
+            </a:r>
+          </a:p>
+          <a:p xmlns:a="http://schemas.openxmlformats.org/drawingml/2006/main">
+            <a:r>
+              <a:t>[Timing]</a:t>
+            </a:r>
+          </a:p>
+          <a:p xmlns:a="http://schemas.openxmlformats.org/drawingml/2006/main">
+            <a:r>
+              <a:t>3 分钟。</a:t>
+            </a:r>
+          </a:p>
+          <a:p xmlns:a="http://schemas.openxmlformats.org/drawingml/2006/main">
+            <a:r>
+              <a:t/>
+            </a:r>
+          </a:p>
+          <a:p xmlns:a="http://schemas.openxmlformats.org/drawingml/2006/main">
+            <a:r>
+              <a:t>[Evidence boundary]</a:t>
+            </a:r>
+          </a:p>
+          <a:p xmlns:a="http://schemas.openxmlformats.org/drawingml/2006/main">
+            <a:r>
+              <a:t>直接来源：[本课工件](assets/agent-task-example/generate.diff)；[本课工件](assets/agent-task-example/test-output.txt)。</a:t>
+            </a:r>
+          </a:p>
+          <a:p xmlns:a="http://schemas.openxmlformats.org/drawingml/2006/main">
+            <a:r>
+              <a:t/>
+            </a:r>
+          </a:p>
+          <a:p xmlns:a="http://schemas.openxmlformats.org/drawingml/2006/main">
+            <a:r>
+              <a:t>讲义 §四·1 与 §四·3；第 1 课 §一·2 哪些判断不能外包；[AGENTS.md](../../AGENTS.md) 证据标准。</a:t>
+            </a:r>
+          </a:p>
+          <a:p xmlns:a="http://schemas.openxmlformats.org/drawingml/2006/main">
+            <a:r>
+              <a:t/>
+            </a:r>
+          </a:p>
+          <a:p xmlns:a="http://schemas.openxmlformats.org/drawingml/2006/main">
+            <a:r>
               <a:t>[Sources]</a:t>
             </a:r>
           </a:p>
           <a:p xmlns:a="http://schemas.openxmlformats.org/drawingml/2006/main">
             <a:r>
-              <a:t>- /Users/bright/Projects/courses/graduate/lessons/lesson-10/slides.md</a:t>
-            </a:r>
-          </a:p>
-          <a:p xmlns:a="http://schemas.openxmlformats.org/drawingml/2006/main">
-            <a:r>
-              <a:t>- /Users/bright/Projects/courses/graduate/lessons/lesson-10/handout.md</a:t>
+              <a:t>- lessons/lesson-10/slides.md P08</a:t>
+            </a:r>
+          </a:p>
+          <a:p xmlns:a="http://schemas.openxmlformats.org/drawingml/2006/main">
+            <a:r>
+              <a:t>- lessons/lesson-10/handout.md §四·1 Agent 输出是候选，不是事实；§四·3 diff 审查清单</a:t>
+            </a:r>
+          </a:p>
+          <a:p xmlns:a="http://schemas.openxmlformats.org/drawingml/2006/main">
+            <a:r>
+              <a:t>- lessons/lesson-10/teaching-plan.md</a:t>
+            </a:r>
+          </a:p>
+          <a:p xmlns:a="http://schemas.openxmlformats.org/drawingml/2006/main">
+            <a:r>
+              <a:t>- assets/agent-task-example/generate.diff</a:t>
+            </a:r>
+          </a:p>
+          <a:p xmlns:a="http://schemas.openxmlformats.org/drawingml/2006/main">
+            <a:r>
+              <a:t>- assets/agent-task-example/test-output.txt</a:t>
             </a:r>
           </a:p>
           <a:p xmlns:a="http://schemas.openxmlformats.org/drawingml/2006/main">
@@ -1924,7 +3239,7 @@
           <a:lstStyle xmlns:a="http://schemas.openxmlformats.org/drawingml/2006/main"/>
           <a:p xmlns:a="http://schemas.openxmlformats.org/drawingml/2006/main">
             <a:r>
-              <a:t>第 10 课受限执行。屏显按现行逐页母稿压缩为课堂可读对象，完整说明保留在讲义与教师备注。</a:t>
+              <a:t>进入项目的修改需要根因与验证证据</a:t>
             </a:r>
           </a:p>
           <a:p xmlns:a="http://schemas.openxmlformats.org/drawingml/2006/main">
@@ -1934,17 +3249,92 @@
           </a:p>
           <a:p xmlns:a="http://schemas.openxmlformats.org/drawingml/2006/main">
             <a:r>
+              <a:t>讲义对应：§四·2 修复根因、绕过失败与污染实验</a:t>
+            </a:r>
+          </a:p>
+          <a:p xmlns:a="http://schemas.openxmlformats.org/drawingml/2006/main">
+            <a:r>
+              <a:t/>
+            </a:r>
+          </a:p>
+          <a:p xmlns:a="http://schemas.openxmlformats.org/drawingml/2006/main">
+            <a:r>
+              <a:t>[Teaching]</a:t>
+            </a:r>
+          </a:p>
+          <a:p xmlns:a="http://schemas.openxmlformats.org/drawingml/2006/main">
+            <a:r>
+              <a:t>三区分决定 Agent 提议能否进入当前实验版本。根因修复必须保留失败日志、diff 与根因分析；绕过建议应被拒绝并留痕；评价协议或 baseline 改动必须退出调试任务，作为新研究决定审核。强调技术失败与规范红线的边界。</a:t>
+            </a:r>
+          </a:p>
+          <a:p xmlns:a="http://schemas.openxmlformats.org/drawingml/2006/main">
+            <a:r>
+              <a:t/>
+            </a:r>
+          </a:p>
+          <a:p xmlns:a="http://schemas.openxmlformats.org/drawingml/2006/main">
+            <a:r>
+              <a:t>[Student action]</a:t>
+            </a:r>
+          </a:p>
+          <a:p xmlns:a="http://schemas.openxmlformats.org/drawingml/2006/main">
+            <a:r>
+              <a:t>让学生判断三段 diff 样例各属哪一类（教师提供）。</a:t>
+            </a:r>
+          </a:p>
+          <a:p xmlns:a="http://schemas.openxmlformats.org/drawingml/2006/main">
+            <a:r>
+              <a:t/>
+            </a:r>
+          </a:p>
+          <a:p xmlns:a="http://schemas.openxmlformats.org/drawingml/2006/main">
+            <a:r>
+              <a:t>[Timing]</a:t>
+            </a:r>
+          </a:p>
+          <a:p xmlns:a="http://schemas.openxmlformats.org/drawingml/2006/main">
+            <a:r>
+              <a:t>3 分钟。</a:t>
+            </a:r>
+          </a:p>
+          <a:p xmlns:a="http://schemas.openxmlformats.org/drawingml/2006/main">
+            <a:r>
+              <a:t/>
+            </a:r>
+          </a:p>
+          <a:p xmlns:a="http://schemas.openxmlformats.org/drawingml/2006/main">
+            <a:r>
+              <a:t>[Evidence boundary]</a:t>
+            </a:r>
+          </a:p>
+          <a:p xmlns:a="http://schemas.openxmlformats.org/drawingml/2006/main">
+            <a:r>
+              <a:t>讲义 §四·2；[assessment.md](../../course/assessment.md) 学术规范红线。</a:t>
+            </a:r>
+          </a:p>
+          <a:p xmlns:a="http://schemas.openxmlformats.org/drawingml/2006/main">
+            <a:r>
+              <a:t/>
+            </a:r>
+          </a:p>
+          <a:p xmlns:a="http://schemas.openxmlformats.org/drawingml/2006/main">
+            <a:r>
               <a:t>[Sources]</a:t>
             </a:r>
           </a:p>
           <a:p xmlns:a="http://schemas.openxmlformats.org/drawingml/2006/main">
             <a:r>
-              <a:t>- /Users/bright/Projects/courses/graduate/lessons/lesson-10/slides.md</a:t>
-            </a:r>
-          </a:p>
-          <a:p xmlns:a="http://schemas.openxmlformats.org/drawingml/2006/main">
-            <a:r>
-              <a:t>- /Users/bright/Projects/courses/graduate/lessons/lesson-10/handout.md</a:t>
+              <a:t>- lessons/lesson-10/slides.md P09</a:t>
+            </a:r>
+          </a:p>
+          <a:p xmlns:a="http://schemas.openxmlformats.org/drawingml/2006/main">
+            <a:r>
+              <a:t>- lessons/lesson-10/handout.md §四·2 修复根因、绕过失败与污染实验</a:t>
+            </a:r>
+          </a:p>
+          <a:p xmlns:a="http://schemas.openxmlformats.org/drawingml/2006/main">
+            <a:r>
+              <a:t>- lessons/lesson-10/teaching-plan.md</a:t>
             </a:r>
           </a:p>
           <a:p xmlns:a="http://schemas.openxmlformats.org/drawingml/2006/main">

--- a/lessons/lesson-10/slides.pptx
+++ b/lessons/lesson-10/slides.pptx
@@ -2,29 +2,29 @@
 <file path=ppt/presentation.xml><?xml version="1.0" encoding="utf-8"?>
 <p:presentation xmlns:p="http://schemas.openxmlformats.org/presentationml/2006/main">
   <p:sldMasterIdLst>
-    <p:sldMasterId xmlns:r="http://schemas.openxmlformats.org/officeDocument/2006/relationships" id="2147483648" r:id="R66c0c24c5ae74b41"/>
+    <p:sldMasterId xmlns:r="http://schemas.openxmlformats.org/officeDocument/2006/relationships" id="2147483648" r:id="R162a91966a8a4792"/>
   </p:sldMasterIdLst>
   <p:notesMasterIdLst>
-    <p:notesMasterId xmlns:r="http://schemas.openxmlformats.org/officeDocument/2006/relationships" r:id="R979b67a9c66f4dc4"/>
+    <p:notesMasterId xmlns:r="http://schemas.openxmlformats.org/officeDocument/2006/relationships" r:id="R6c07fa03ac8f4c26"/>
   </p:notesMasterIdLst>
   <p:sldIdLst>
-    <p:sldId xmlns:r="http://schemas.openxmlformats.org/officeDocument/2006/relationships" id="256" r:id="Rec29763324384c71"/>
-    <p:sldId xmlns:r="http://schemas.openxmlformats.org/officeDocument/2006/relationships" id="257" r:id="R07cfb0856d824eb5"/>
-    <p:sldId xmlns:r="http://schemas.openxmlformats.org/officeDocument/2006/relationships" id="258" r:id="R7498155206cc4041"/>
-    <p:sldId xmlns:r="http://schemas.openxmlformats.org/officeDocument/2006/relationships" id="259" r:id="Rea00bac4d04b449d"/>
-    <p:sldId xmlns:r="http://schemas.openxmlformats.org/officeDocument/2006/relationships" id="260" r:id="R073bc4028b5d432a"/>
-    <p:sldId xmlns:r="http://schemas.openxmlformats.org/officeDocument/2006/relationships" id="261" r:id="R7f2c6195ee1346ff"/>
-    <p:sldId xmlns:r="http://schemas.openxmlformats.org/officeDocument/2006/relationships" id="262" r:id="Ra1a3fb9e7d0d4030"/>
-    <p:sldId xmlns:r="http://schemas.openxmlformats.org/officeDocument/2006/relationships" id="263" r:id="Rc5104848285049a7"/>
-    <p:sldId xmlns:r="http://schemas.openxmlformats.org/officeDocument/2006/relationships" id="264" r:id="R6c7d32d0c2e84381"/>
-    <p:sldId xmlns:r="http://schemas.openxmlformats.org/officeDocument/2006/relationships" id="265" r:id="Rce28110fdcbb4f55"/>
-    <p:sldId xmlns:r="http://schemas.openxmlformats.org/officeDocument/2006/relationships" id="266" r:id="R00b118596b6549a8"/>
-    <p:sldId xmlns:r="http://schemas.openxmlformats.org/officeDocument/2006/relationships" id="267" r:id="R2011cf5a6f4d4044"/>
-    <p:sldId xmlns:r="http://schemas.openxmlformats.org/officeDocument/2006/relationships" id="268" r:id="R80dd0cb4e45d4f94"/>
-    <p:sldId xmlns:r="http://schemas.openxmlformats.org/officeDocument/2006/relationships" id="269" r:id="R769ecaf55f004f5f"/>
-    <p:sldId xmlns:r="http://schemas.openxmlformats.org/officeDocument/2006/relationships" id="270" r:id="Rc8ec043175ff43b1"/>
-    <p:sldId xmlns:r="http://schemas.openxmlformats.org/officeDocument/2006/relationships" id="271" r:id="R8387dce747f5445a"/>
-    <p:sldId xmlns:r="http://schemas.openxmlformats.org/officeDocument/2006/relationships" id="272" r:id="R86c97e362aaa4ecc"/>
+    <p:sldId xmlns:r="http://schemas.openxmlformats.org/officeDocument/2006/relationships" id="256" r:id="Rc49308b45d0c4bff"/>
+    <p:sldId xmlns:r="http://schemas.openxmlformats.org/officeDocument/2006/relationships" id="257" r:id="Rc0de3cdb36d84552"/>
+    <p:sldId xmlns:r="http://schemas.openxmlformats.org/officeDocument/2006/relationships" id="258" r:id="R98d0314f6689416c"/>
+    <p:sldId xmlns:r="http://schemas.openxmlformats.org/officeDocument/2006/relationships" id="259" r:id="R9fe9b8c4162c4ef9"/>
+    <p:sldId xmlns:r="http://schemas.openxmlformats.org/officeDocument/2006/relationships" id="260" r:id="R6a4e4b23ffeb41d4"/>
+    <p:sldId xmlns:r="http://schemas.openxmlformats.org/officeDocument/2006/relationships" id="261" r:id="R73dba1ebf1564e27"/>
+    <p:sldId xmlns:r="http://schemas.openxmlformats.org/officeDocument/2006/relationships" id="262" r:id="R7d7e36615b5646f9"/>
+    <p:sldId xmlns:r="http://schemas.openxmlformats.org/officeDocument/2006/relationships" id="263" r:id="R6750f2c640fe4f74"/>
+    <p:sldId xmlns:r="http://schemas.openxmlformats.org/officeDocument/2006/relationships" id="264" r:id="R1b8a703a76214a07"/>
+    <p:sldId xmlns:r="http://schemas.openxmlformats.org/officeDocument/2006/relationships" id="265" r:id="R80c4edeffac4443d"/>
+    <p:sldId xmlns:r="http://schemas.openxmlformats.org/officeDocument/2006/relationships" id="266" r:id="R4aac2e9fc8fe4976"/>
+    <p:sldId xmlns:r="http://schemas.openxmlformats.org/officeDocument/2006/relationships" id="267" r:id="R47f319b340a04c06"/>
+    <p:sldId xmlns:r="http://schemas.openxmlformats.org/officeDocument/2006/relationships" id="268" r:id="R0bb2c2b241d84b78"/>
+    <p:sldId xmlns:r="http://schemas.openxmlformats.org/officeDocument/2006/relationships" id="269" r:id="Rc32b17bcd50e467a"/>
+    <p:sldId xmlns:r="http://schemas.openxmlformats.org/officeDocument/2006/relationships" id="270" r:id="Rb250e9da6a0544e8"/>
+    <p:sldId xmlns:r="http://schemas.openxmlformats.org/officeDocument/2006/relationships" id="271" r:id="R7c173c20fbf84352"/>
+    <p:sldId xmlns:r="http://schemas.openxmlformats.org/officeDocument/2006/relationships" id="272" r:id="R46cf1d7086c04b41"/>
   </p:sldIdLst>
   <p:sldSz cx="12192000" cy="6858000"/>
   <p:notesSz cx="6858000" cy="9144000"/>
@@ -404,17 +404,57 @@
           <a:lstStyle xmlns:a="http://schemas.openxmlformats.org/drawingml/2006/main"/>
           <a:p xmlns:a="http://schemas.openxmlformats.org/drawingml/2006/main">
             <a:r>
+              <a:t>页面：P01 第10讲 AI 辅助编码、调试与受限 Agent 执行</a:t>
+            </a:r>
+          </a:p>
+          <a:p xmlns:a="http://schemas.openxmlformats.org/drawingml/2006/main">
+            <a:r>
+              <a:t/>
+            </a:r>
+          </a:p>
+          <a:p xmlns:a="http://schemas.openxmlformats.org/drawingml/2006/main">
+            <a:r>
+              <a:t>讲义位置：本课讲义；见逐页母稿映射表</a:t>
+            </a:r>
+          </a:p>
+          <a:p xmlns:a="http://schemas.openxmlformats.org/drawingml/2006/main">
+            <a:r>
+              <a:t/>
+            </a:r>
+          </a:p>
+          <a:p xmlns:a="http://schemas.openxmlformats.org/drawingml/2006/main">
+            <a:r>
+              <a:t>屏显核对：</a:t>
+            </a:r>
+          </a:p>
+          <a:p xmlns:a="http://schemas.openxmlformats.org/drawingml/2006/main">
+            <a:r>
+              <a:t>```text</a:t>
+            </a:r>
+          </a:p>
+          <a:p xmlns:a="http://schemas.openxmlformats.org/drawingml/2006/main">
+            <a:r>
               <a:t>第10讲 AI 辅助编码、调试与受限 Agent 执行</a:t>
             </a:r>
           </a:p>
           <a:p xmlns:a="http://schemas.openxmlformats.org/drawingml/2006/main">
             <a:r>
+              <a:t>```</a:t>
+            </a:r>
+          </a:p>
+          <a:p xmlns:a="http://schemas.openxmlformats.org/drawingml/2006/main">
+            <a:r>
               <a:t/>
             </a:r>
           </a:p>
           <a:p xmlns:a="http://schemas.openxmlformats.org/drawingml/2006/main">
             <a:r>
-              <a:t>讲义对应：§导读；课程入口</a:t>
+              <a:t>教师讲述：</a:t>
+            </a:r>
+          </a:p>
+          <a:p xmlns:a="http://schemas.openxmlformats.org/drawingml/2006/main">
+            <a:r>
+              <a:t>开场放下模糊 prompt。第 9 课判断门已过，项目进入阶段七原型验证。本课回答：Agent 帮忙改代码、跑测试、归因错误时，研究者在哪里审核、用什么权限、留什么记录，才能让"Agent 帮忙"不等于"Agent 替代判断"或"Agent 污染实验"。</a:t>
             </a:r>
           </a:p>
           <a:p xmlns:a="http://schemas.openxmlformats.org/drawingml/2006/main">
@@ -424,12 +464,12 @@
           </a:p>
           <a:p xmlns:a="http://schemas.openxmlformats.org/drawingml/2006/main">
             <a:r>
-              <a:t>[Teaching]</a:t>
-            </a:r>
-          </a:p>
-          <a:p xmlns:a="http://schemas.openxmlformats.org/drawingml/2006/main">
-            <a:r>
-              <a:t>开场放下模糊 prompt。第 9 课判断门已过，项目进入阶段七原型验证。本课回答：Agent 帮忙改代码、跑测试、归因错误时，研究者在哪里审核、用什么权限、留什么记录，才能让"Agent 帮忙"不等于"Agent 替代判断"或"Agent 污染实验"。</a:t>
+              <a:t>学生动作：</a:t>
+            </a:r>
+          </a:p>
+          <a:p xmlns:a="http://schemas.openxmlformats.org/drawingml/2006/main">
+            <a:r>
+              <a:t>不展开课程行政信息，直接进入下一页回扣。</a:t>
             </a:r>
           </a:p>
           <a:p xmlns:a="http://schemas.openxmlformats.org/drawingml/2006/main">
@@ -439,12 +479,12 @@
           </a:p>
           <a:p xmlns:a="http://schemas.openxmlformats.org/drawingml/2006/main">
             <a:r>
-              <a:t>[Student action]</a:t>
-            </a:r>
-          </a:p>
-          <a:p xmlns:a="http://schemas.openxmlformats.org/drawingml/2006/main">
-            <a:r>
-              <a:t>不展开课程行政信息，直接进入下一页回扣。</a:t>
+              <a:t>来源与边界：</a:t>
+            </a:r>
+          </a:p>
+          <a:p xmlns:a="http://schemas.openxmlformats.org/drawingml/2006/main">
+            <a:r>
+              <a:t>课程定位以 [syllabus.md](../../course/syllabus.md) 与 [备课规划.md](../备课规划.md) 第 10 课段为准。</a:t>
             </a:r>
           </a:p>
           <a:p xmlns:a="http://schemas.openxmlformats.org/drawingml/2006/main">
@@ -454,12 +494,7 @@
           </a:p>
           <a:p xmlns:a="http://schemas.openxmlformats.org/drawingml/2006/main">
             <a:r>
-              <a:t>[Timing]</a:t>
-            </a:r>
-          </a:p>
-          <a:p xmlns:a="http://schemas.openxmlformats.org/drawingml/2006/main">
-            <a:r>
-              <a:t>3 分钟。</a:t>
+              <a:t>---</a:t>
             </a:r>
           </a:p>
           <a:p xmlns:a="http://schemas.openxmlformats.org/drawingml/2006/main">
@@ -469,12 +504,7 @@
           </a:p>
           <a:p xmlns:a="http://schemas.openxmlformats.org/drawingml/2006/main">
             <a:r>
-              <a:t>[Evidence boundary]</a:t>
-            </a:r>
-          </a:p>
-          <a:p xmlns:a="http://schemas.openxmlformats.org/drawingml/2006/main">
-            <a:r>
-              <a:t>课程定位以 [syllabus.md](../../course/syllabus.md) 与 [备课规划.md](../备课规划.md) 第 10 课段为准。</a:t>
+              <a:t>[Sources]</a:t>
             </a:r>
           </a:p>
           <a:p xmlns:a="http://schemas.openxmlformats.org/drawingml/2006/main">
@@ -484,22 +514,22 @@
           </a:p>
           <a:p xmlns:a="http://schemas.openxmlformats.org/drawingml/2006/main">
             <a:r>
-              <a:t>[Sources]</a:t>
-            </a:r>
-          </a:p>
-          <a:p xmlns:a="http://schemas.openxmlformats.org/drawingml/2006/main">
-            <a:r>
-              <a:t>- lessons/lesson-10/slides.md P01</a:t>
-            </a:r>
-          </a:p>
-          <a:p xmlns:a="http://schemas.openxmlformats.org/drawingml/2006/main">
-            <a:r>
-              <a:t>- lessons/lesson-10/handout.md §导读；课程入口</a:t>
-            </a:r>
-          </a:p>
-          <a:p xmlns:a="http://schemas.openxmlformats.org/drawingml/2006/main">
-            <a:r>
-              <a:t>- lessons/lesson-10/teaching-plan.md</a:t>
+              <a:t>- 本课 handout.md 与 slides.md</a:t>
+            </a:r>
+          </a:p>
+          <a:p xmlns:a="http://schemas.openxmlformats.org/drawingml/2006/main">
+            <a:r>
+              <a:t/>
+            </a:r>
+          </a:p>
+          <a:p xmlns:a="http://schemas.openxmlformats.org/drawingml/2006/main">
+            <a:r>
+              <a:t>- ../../course/reading-card-case.md</a:t>
+            </a:r>
+          </a:p>
+          <a:p xmlns:a="http://schemas.openxmlformats.org/drawingml/2006/main">
+            <a:r>
+              <a:t/>
             </a:r>
           </a:p>
           <a:p xmlns:a="http://schemas.openxmlformats.org/drawingml/2006/main">
@@ -574,6 +604,36 @@
           <a:lstStyle xmlns:a="http://schemas.openxmlformats.org/drawingml/2006/main"/>
           <a:p xmlns:a="http://schemas.openxmlformats.org/drawingml/2006/main">
             <a:r>
+              <a:t>页面：P10 SWE-bench 的测试判定仍不充分</a:t>
+            </a:r>
+          </a:p>
+          <a:p xmlns:a="http://schemas.openxmlformats.org/drawingml/2006/main">
+            <a:r>
+              <a:t/>
+            </a:r>
+          </a:p>
+          <a:p xmlns:a="http://schemas.openxmlformats.org/drawingml/2006/main">
+            <a:r>
+              <a:t>讲义位置：本课讲义；见逐页母稿映射表</a:t>
+            </a:r>
+          </a:p>
+          <a:p xmlns:a="http://schemas.openxmlformats.org/drawingml/2006/main">
+            <a:r>
+              <a:t/>
+            </a:r>
+          </a:p>
+          <a:p xmlns:a="http://schemas.openxmlformats.org/drawingml/2006/main">
+            <a:r>
+              <a:t>屏显核对：</a:t>
+            </a:r>
+          </a:p>
+          <a:p xmlns:a="http://schemas.openxmlformats.org/drawingml/2006/main">
+            <a:r>
+              <a:t>```text</a:t>
+            </a:r>
+          </a:p>
+          <a:p xmlns:a="http://schemas.openxmlformats.org/drawingml/2006/main">
+            <a:r>
               <a:t>SWE-bench 的测试判定仍不充分</a:t>
             </a:r>
           </a:p>
@@ -584,7 +644,82 @@
           </a:p>
           <a:p xmlns:a="http://schemas.openxmlformats.org/drawingml/2006/main">
             <a:r>
-              <a:t>讲义对应：§四·4 SWE-bench 视角</a:t>
+              <a:t>真实 issue</a:t>
+            </a:r>
+          </a:p>
+          <a:p xmlns:a="http://schemas.openxmlformats.org/drawingml/2006/main">
+            <a:r>
+              <a:t>→</a:t>
+            </a:r>
+          </a:p>
+          <a:p xmlns:a="http://schemas.openxmlformats.org/drawingml/2006/main">
+            <a:r>
+              <a:t>问题身份</a:t>
+            </a:r>
+          </a:p>
+          <a:p xmlns:a="http://schemas.openxmlformats.org/drawingml/2006/main">
+            <a:r>
+              <a:t>仓库快照</a:t>
+            </a:r>
+          </a:p>
+          <a:p xmlns:a="http://schemas.openxmlformats.org/drawingml/2006/main">
+            <a:r>
+              <a:t>→</a:t>
+            </a:r>
+          </a:p>
+          <a:p xmlns:a="http://schemas.openxmlformats.org/drawingml/2006/main">
+            <a:r>
+              <a:t>固定输入</a:t>
+            </a:r>
+          </a:p>
+          <a:p xmlns:a="http://schemas.openxmlformats.org/drawingml/2006/main">
+            <a:r>
+              <a:t>候选 patch</a:t>
+            </a:r>
+          </a:p>
+          <a:p xmlns:a="http://schemas.openxmlformats.org/drawingml/2006/main">
+            <a:r>
+              <a:t>→</a:t>
+            </a:r>
+          </a:p>
+          <a:p xmlns:a="http://schemas.openxmlformats.org/drawingml/2006/main">
+            <a:r>
+              <a:t>Agent 输出</a:t>
+            </a:r>
+          </a:p>
+          <a:p xmlns:a="http://schemas.openxmlformats.org/drawingml/2006/main">
+            <a:r>
+              <a:t>指定 tests</a:t>
+            </a:r>
+          </a:p>
+          <a:p xmlns:a="http://schemas.openxmlformats.org/drawingml/2006/main">
+            <a:r>
+              <a:t>→</a:t>
+            </a:r>
+          </a:p>
+          <a:p xmlns:a="http://schemas.openxmlformats.org/drawingml/2006/main">
+            <a:r>
+              <a:t>是否解决</a:t>
+            </a:r>
+          </a:p>
+          <a:p xmlns:a="http://schemas.openxmlformats.org/drawingml/2006/main">
+            <a:r>
+              <a:t>人工核验</a:t>
+            </a:r>
+          </a:p>
+          <a:p xmlns:a="http://schemas.openxmlformats.org/drawingml/2006/main">
+            <a:r>
+              <a:t>课程项目额外需要</a:t>
+            </a:r>
+          </a:p>
+          <a:p xmlns:a="http://schemas.openxmlformats.org/drawingml/2006/main">
+            <a:r>
+              <a:t>测试通过 ≠ 方法正确 ≠ 未泄漏数据 ≠ 未污染评价协议</a:t>
+            </a:r>
+          </a:p>
+          <a:p xmlns:a="http://schemas.openxmlformats.org/drawingml/2006/main">
+            <a:r>
+              <a:t>```</a:t>
             </a:r>
           </a:p>
           <a:p xmlns:a="http://schemas.openxmlformats.org/drawingml/2006/main">
@@ -594,7 +729,17 @@
           </a:p>
           <a:p xmlns:a="http://schemas.openxmlformats.org/drawingml/2006/main">
             <a:r>
-              <a:t>[Teaching]</a:t>
+              <a:t>屏显来源页脚：来源：Jimenez et al., 2024（SWE-bench）；课程评价边界详见 speaker notes。</a:t>
+            </a:r>
+          </a:p>
+          <a:p xmlns:a="http://schemas.openxmlformats.org/drawingml/2006/main">
+            <a:r>
+              <a:t/>
+            </a:r>
+          </a:p>
+          <a:p xmlns:a="http://schemas.openxmlformats.org/drawingml/2006/main">
+            <a:r>
+              <a:t>教师讲述：</a:t>
             </a:r>
           </a:p>
           <a:p xmlns:a="http://schemas.openxmlformats.org/drawingml/2006/main">
@@ -609,7 +754,7 @@
           </a:p>
           <a:p xmlns:a="http://schemas.openxmlformats.org/drawingml/2006/main">
             <a:r>
-              <a:t>[Student action]</a:t>
+              <a:t>学生动作：</a:t>
             </a:r>
           </a:p>
           <a:p xmlns:a="http://schemas.openxmlformats.org/drawingml/2006/main">
@@ -624,12 +769,12 @@
           </a:p>
           <a:p xmlns:a="http://schemas.openxmlformats.org/drawingml/2006/main">
             <a:r>
-              <a:t>[Timing]</a:t>
-            </a:r>
-          </a:p>
-          <a:p xmlns:a="http://schemas.openxmlformats.org/drawingml/2006/main">
-            <a:r>
-              <a:t>3 分钟。</a:t>
+              <a:t>来源与边界：</a:t>
+            </a:r>
+          </a:p>
+          <a:p xmlns:a="http://schemas.openxmlformats.org/drawingml/2006/main">
+            <a:r>
+              <a:t>直接来源：[正式来源](https://www.swebench.com/original.html)。</a:t>
             </a:r>
           </a:p>
           <a:p xmlns:a="http://schemas.openxmlformats.org/drawingml/2006/main">
@@ -639,12 +784,7 @@
           </a:p>
           <a:p xmlns:a="http://schemas.openxmlformats.org/drawingml/2006/main">
             <a:r>
-              <a:t>[Evidence boundary]</a:t>
-            </a:r>
-          </a:p>
-          <a:p xmlns:a="http://schemas.openxmlformats.org/drawingml/2006/main">
-            <a:r>
-              <a:t>直接来源：[正式来源](https://www.swebench.com/original.html)。</a:t>
+              <a:t>讲义 §四·4；Jimenez et al. SWE-bench ICLR 2024（[reading-list.md](../../course/reading-list.md) 第 10 课）。</a:t>
             </a:r>
           </a:p>
           <a:p xmlns:a="http://schemas.openxmlformats.org/drawingml/2006/main">
@@ -654,7 +794,7 @@
           </a:p>
           <a:p xmlns:a="http://schemas.openxmlformats.org/drawingml/2006/main">
             <a:r>
-              <a:t>讲义 §四·4；Jimenez et al. SWE-bench ICLR 2024（[reading-list.md](../../course/reading-list.md) 第 10 课）。</a:t>
+              <a:t>---</a:t>
             </a:r>
           </a:p>
           <a:p xmlns:a="http://schemas.openxmlformats.org/drawingml/2006/main">
@@ -669,22 +809,37 @@
           </a:p>
           <a:p xmlns:a="http://schemas.openxmlformats.org/drawingml/2006/main">
             <a:r>
-              <a:t>- lessons/lesson-10/slides.md P10</a:t>
-            </a:r>
-          </a:p>
-          <a:p xmlns:a="http://schemas.openxmlformats.org/drawingml/2006/main">
-            <a:r>
-              <a:t>- lessons/lesson-10/handout.md §四·4 SWE-bench 视角</a:t>
-            </a:r>
-          </a:p>
-          <a:p xmlns:a="http://schemas.openxmlformats.org/drawingml/2006/main">
-            <a:r>
-              <a:t>- lessons/lesson-10/teaching-plan.md</a:t>
+              <a:t/>
             </a:r>
           </a:p>
           <a:p xmlns:a="http://schemas.openxmlformats.org/drawingml/2006/main">
             <a:r>
               <a:t>- https://www.swebench.com/original.html</a:t>
+            </a:r>
+          </a:p>
+          <a:p xmlns:a="http://schemas.openxmlformats.org/drawingml/2006/main">
+            <a:r>
+              <a:t/>
+            </a:r>
+          </a:p>
+          <a:p xmlns:a="http://schemas.openxmlformats.org/drawingml/2006/main">
+            <a:r>
+              <a:t>- 本课 handout.md 与 slides.md</a:t>
+            </a:r>
+          </a:p>
+          <a:p xmlns:a="http://schemas.openxmlformats.org/drawingml/2006/main">
+            <a:r>
+              <a:t/>
+            </a:r>
+          </a:p>
+          <a:p xmlns:a="http://schemas.openxmlformats.org/drawingml/2006/main">
+            <a:r>
+              <a:t>- ../../course/reading-card-case.md</a:t>
+            </a:r>
+          </a:p>
+          <a:p xmlns:a="http://schemas.openxmlformats.org/drawingml/2006/main">
+            <a:r>
+              <a:t/>
             </a:r>
           </a:p>
           <a:p xmlns:a="http://schemas.openxmlformats.org/drawingml/2006/main">
@@ -759,7 +914,7 @@
           <a:lstStyle xmlns:a="http://schemas.openxmlformats.org/drawingml/2006/main"/>
           <a:p xmlns:a="http://schemas.openxmlformats.org/drawingml/2006/main">
             <a:r>
-              <a:t>同一实验规格进入受限执行</a:t>
+              <a:t>页面：P11 工程检查与研究评价各管一件事</a:t>
             </a:r>
           </a:p>
           <a:p xmlns:a="http://schemas.openxmlformats.org/drawingml/2006/main">
@@ -769,7 +924,7 @@
           </a:p>
           <a:p xmlns:a="http://schemas.openxmlformats.org/drawingml/2006/main">
             <a:r>
-              <a:t>讲义对应：§五 贯穿案例第一至二步（实验规格标注 + 任务契约五字段）</a:t>
+              <a:t>讲义位置：handout.md §五、贯穿案例：把判断门实验规格的一步改写为受限 Agent 任务</a:t>
             </a:r>
           </a:p>
           <a:p xmlns:a="http://schemas.openxmlformats.org/drawingml/2006/main">
@@ -779,12 +934,22 @@
           </a:p>
           <a:p xmlns:a="http://schemas.openxmlformats.org/drawingml/2006/main">
             <a:r>
-              <a:t>[Teaching]</a:t>
-            </a:r>
-          </a:p>
-          <a:p xmlns:a="http://schemas.openxmlformats.org/drawingml/2006/main">
-            <a:r>
-              <a:t>演示如何从第 9 课实验规格中标注的"拟用 Agent"步骤选出本课的受限任务——以冻结配置分别生成。任务契约五字段已在 P04 展示，本页只固定样本、条件、配置、评价隔离与追踪口径。重点：Context 不暴露人工基准与最终评分；规模和 H1/A1/A2/A3 编号沿用第 9 课，不在本课改写。</a:t>
+              <a:t>屏显核对：</a:t>
+            </a:r>
+          </a:p>
+          <a:p xmlns:a="http://schemas.openxmlformats.org/drawingml/2006/main">
+            <a:r>
+              <a:t>normalize_record 测试：数据结构是否按契约处理？</a:t>
+            </a:r>
+          </a:p>
+          <a:p xmlns:a="http://schemas.openxmlformats.org/drawingml/2006/main">
+            <a:r>
+              <a:t>阅读卡标注：输出保留了哪些限定条件？</a:t>
+            </a:r>
+          </a:p>
+          <a:p xmlns:a="http://schemas.openxmlformats.org/drawingml/2006/main">
+            <a:r>
+              <a:t>实验判断：差异对应哪个命题，边界是什么？</a:t>
             </a:r>
           </a:p>
           <a:p xmlns:a="http://schemas.openxmlformats.org/drawingml/2006/main">
@@ -794,12 +959,7 @@
           </a:p>
           <a:p xmlns:a="http://schemas.openxmlformats.org/drawingml/2006/main">
             <a:r>
-              <a:t>[Student action]</a:t>
-            </a:r>
-          </a:p>
-          <a:p xmlns:a="http://schemas.openxmlformats.org/drawingml/2006/main">
-            <a:r>
-              <a:t>让学生用自己的实验规格标注"拟用 Agent"与"必须人工"步骤。</a:t>
+              <a:t>测试通过后，仍要检查语义证据。</a:t>
             </a:r>
           </a:p>
           <a:p xmlns:a="http://schemas.openxmlformats.org/drawingml/2006/main">
@@ -809,12 +969,12 @@
           </a:p>
           <a:p xmlns:a="http://schemas.openxmlformats.org/drawingml/2006/main">
             <a:r>
-              <a:t>[Timing]</a:t>
-            </a:r>
-          </a:p>
-          <a:p xmlns:a="http://schemas.openxmlformats.org/drawingml/2006/main">
-            <a:r>
-              <a:t>5 分钟。</a:t>
+              <a:t>教师讲述：</a:t>
+            </a:r>
+          </a:p>
+          <a:p xmlns:a="http://schemas.openxmlformats.org/drawingml/2006/main">
+            <a:r>
+              <a:t>把本课小函数接到后续输入规范化的概念位置，不声称它已集成进另一份实际脚本。贯穿数据包单独提供完整可运行入口。</a:t>
             </a:r>
           </a:p>
           <a:p xmlns:a="http://schemas.openxmlformats.org/drawingml/2006/main">
@@ -824,12 +984,12 @@
           </a:p>
           <a:p xmlns:a="http://schemas.openxmlformats.org/drawingml/2006/main">
             <a:r>
-              <a:t>[Evidence boundary]</a:t>
-            </a:r>
-          </a:p>
-          <a:p xmlns:a="http://schemas.openxmlformats.org/drawingml/2006/main">
-            <a:r>
-              <a:t>讲义 §五 第一步与第二步；第 9 课实验规格。</a:t>
+              <a:t>学生动作：</a:t>
+            </a:r>
+          </a:p>
+          <a:p xmlns:a="http://schemas.openxmlformats.org/drawingml/2006/main">
+            <a:r>
+              <a:t>说出一个“代码通过测试但研究结论仍不成立”的原因。</a:t>
             </a:r>
           </a:p>
           <a:p xmlns:a="http://schemas.openxmlformats.org/drawingml/2006/main">
@@ -839,22 +999,47 @@
           </a:p>
           <a:p xmlns:a="http://schemas.openxmlformats.org/drawingml/2006/main">
             <a:r>
+              <a:t>来源与边界：</a:t>
+            </a:r>
+          </a:p>
+          <a:p xmlns:a="http://schemas.openxmlformats.org/drawingml/2006/main">
+            <a:r>
+              <a:t>./handout.md；课堂示例与构造数据见 ../../course/reading-card-case.md</a:t>
+            </a:r>
+          </a:p>
+          <a:p xmlns:a="http://schemas.openxmlformats.org/drawingml/2006/main">
+            <a:r>
+              <a:t/>
+            </a:r>
+          </a:p>
+          <a:p xmlns:a="http://schemas.openxmlformats.org/drawingml/2006/main">
+            <a:r>
               <a:t>[Sources]</a:t>
             </a:r>
           </a:p>
           <a:p xmlns:a="http://schemas.openxmlformats.org/drawingml/2006/main">
             <a:r>
-              <a:t>- lessons/lesson-10/slides.md P11</a:t>
-            </a:r>
-          </a:p>
-          <a:p xmlns:a="http://schemas.openxmlformats.org/drawingml/2006/main">
-            <a:r>
-              <a:t>- lessons/lesson-10/handout.md §五 贯穿案例第一至二步（实验规格标注 + 任务契约五字段）</a:t>
-            </a:r>
-          </a:p>
-          <a:p xmlns:a="http://schemas.openxmlformats.org/drawingml/2006/main">
-            <a:r>
-              <a:t>- lessons/lesson-10/teaching-plan.md</a:t>
+              <a:t/>
+            </a:r>
+          </a:p>
+          <a:p xmlns:a="http://schemas.openxmlformats.org/drawingml/2006/main">
+            <a:r>
+              <a:t>- 本课 handout.md 与 slides.md</a:t>
+            </a:r>
+          </a:p>
+          <a:p xmlns:a="http://schemas.openxmlformats.org/drawingml/2006/main">
+            <a:r>
+              <a:t/>
+            </a:r>
+          </a:p>
+          <a:p xmlns:a="http://schemas.openxmlformats.org/drawingml/2006/main">
+            <a:r>
+              <a:t>- ../../course/reading-card-case.md</a:t>
+            </a:r>
+          </a:p>
+          <a:p xmlns:a="http://schemas.openxmlformats.org/drawingml/2006/main">
+            <a:r>
+              <a:t/>
             </a:r>
           </a:p>
           <a:p xmlns:a="http://schemas.openxmlformats.org/drawingml/2006/main">
@@ -929,6 +1114,36 @@
           <a:lstStyle xmlns:a="http://schemas.openxmlformats.org/drawingml/2006/main"/>
           <a:p xmlns:a="http://schemas.openxmlformats.org/drawingml/2006/main">
             <a:r>
+              <a:t>页面：P12 diff、测试和失败日志形成一次 trace</a:t>
+            </a:r>
+          </a:p>
+          <a:p xmlns:a="http://schemas.openxmlformats.org/drawingml/2006/main">
+            <a:r>
+              <a:t/>
+            </a:r>
+          </a:p>
+          <a:p xmlns:a="http://schemas.openxmlformats.org/drawingml/2006/main">
+            <a:r>
+              <a:t>讲义位置：本课讲义；见逐页母稿映射表</a:t>
+            </a:r>
+          </a:p>
+          <a:p xmlns:a="http://schemas.openxmlformats.org/drawingml/2006/main">
+            <a:r>
+              <a:t/>
+            </a:r>
+          </a:p>
+          <a:p xmlns:a="http://schemas.openxmlformats.org/drawingml/2006/main">
+            <a:r>
+              <a:t>屏显核对：</a:t>
+            </a:r>
+          </a:p>
+          <a:p xmlns:a="http://schemas.openxmlformats.org/drawingml/2006/main">
+            <a:r>
+              <a:t>```text</a:t>
+            </a:r>
+          </a:p>
+          <a:p xmlns:a="http://schemas.openxmlformats.org/drawingml/2006/main">
+            <a:r>
               <a:t>diff、测试和失败日志形成一次 trace</a:t>
             </a:r>
           </a:p>
@@ -939,7 +1154,97 @@
           </a:p>
           <a:p xmlns:a="http://schemas.openxmlformats.org/drawingml/2006/main">
             <a:r>
-              <a:t>讲义对应：§五 贯穿案例第三至四步（Agent 执行与人工核验 + 失败记录）；§五 第五步（写入项目）</a:t>
+              <a:t>generate.diff</a:t>
+            </a:r>
+          </a:p>
+          <a:p xmlns:a="http://schemas.openxmlformats.org/drawingml/2006/main">
+            <a:r>
+              <a:t>+ REQUIRED_FIELDS = ("paper_id", "summary")</a:t>
+            </a:r>
+          </a:p>
+          <a:p xmlns:a="http://schemas.openxmlformats.org/drawingml/2006/main">
+            <a:r>
+              <a:t>  def normalize_record(record):</a:t>
+            </a:r>
+          </a:p>
+          <a:p xmlns:a="http://schemas.openxmlformats.org/drawingml/2006/main">
+            <a:r>
+              <a:t>+     missing = [</a:t>
+            </a:r>
+          </a:p>
+          <a:p xmlns:a="http://schemas.openxmlformats.org/drawingml/2006/main">
+            <a:r>
+              <a:t>+         field for field in REQUIRED_FIELDS</a:t>
+            </a:r>
+          </a:p>
+          <a:p xmlns:a="http://schemas.openxmlformats.org/drawingml/2006/main">
+            <a:r>
+              <a:t>+         if field not in record</a:t>
+            </a:r>
+          </a:p>
+          <a:p xmlns:a="http://schemas.openxmlformats.org/drawingml/2006/main">
+            <a:r>
+              <a:t>+     ]</a:t>
+            </a:r>
+          </a:p>
+          <a:p xmlns:a="http://schemas.openxmlformats.org/drawingml/2006/main">
+            <a:r>
+              <a:t>+     if missing:</a:t>
+            </a:r>
+          </a:p>
+          <a:p xmlns:a="http://schemas.openxmlformats.org/drawingml/2006/main">
+            <a:r>
+              <a:t>+         raise ValueError(</a:t>
+            </a:r>
+          </a:p>
+          <a:p xmlns:a="http://schemas.openxmlformats.org/drawingml/2006/main">
+            <a:r>
+              <a:t>+             "missing required fields"</a:t>
+            </a:r>
+          </a:p>
+          <a:p xmlns:a="http://schemas.openxmlformats.org/drawingml/2006/main">
+            <a:r>
+              <a:t>+         )</a:t>
+            </a:r>
+          </a:p>
+          <a:p xmlns:a="http://schemas.openxmlformats.org/drawingml/2006/main">
+            <a:r>
+              <a:t>test-output.txt</a:t>
+            </a:r>
+          </a:p>
+          <a:p xmlns:a="http://schemas.openxmlformats.org/drawingml/2006/main">
+            <a:r>
+              <a:t>Ran 2 tests in 0.000s</a:t>
+            </a:r>
+          </a:p>
+          <a:p xmlns:a="http://schemas.openxmlformats.org/drawingml/2006/main">
+            <a:r>
+              <a:t>OK</a:t>
+            </a:r>
+          </a:p>
+          <a:p xmlns:a="http://schemas.openxmlformats.org/drawingml/2006/main">
+            <a:r>
+              <a:t>failure-log.md</a:t>
+            </a:r>
+          </a:p>
+          <a:p xmlns:a="http://schemas.openxmlformats.org/drawingml/2006/main">
+            <a:r>
+              <a:t>越权请求：修改 tests</a:t>
+            </a:r>
+          </a:p>
+          <a:p xmlns:a="http://schemas.openxmlformats.org/drawingml/2006/main">
+            <a:r>
+              <a:t>决定：拒绝</a:t>
+            </a:r>
+          </a:p>
+          <a:p xmlns:a="http://schemas.openxmlformats.org/drawingml/2006/main">
+            <a:r>
+              <a:t>原测试保持不变</a:t>
+            </a:r>
+          </a:p>
+          <a:p xmlns:a="http://schemas.openxmlformats.org/drawingml/2006/main">
+            <a:r>
+              <a:t>```</a:t>
             </a:r>
           </a:p>
           <a:p xmlns:a="http://schemas.openxmlformats.org/drawingml/2006/main">
@@ -949,7 +1254,17 @@
           </a:p>
           <a:p xmlns:a="http://schemas.openxmlformats.org/drawingml/2006/main">
             <a:r>
-              <a:t>[Teaching]</a:t>
+              <a:t>屏显来源页脚：来源：lesson-10/slides.md；课程工件与讲义见 speaker notes。</a:t>
+            </a:r>
+          </a:p>
+          <a:p xmlns:a="http://schemas.openxmlformats.org/drawingml/2006/main">
+            <a:r>
+              <a:t/>
+            </a:r>
+          </a:p>
+          <a:p xmlns:a="http://schemas.openxmlformats.org/drawingml/2006/main">
+            <a:r>
+              <a:t>教师讲述：</a:t>
             </a:r>
           </a:p>
           <a:p xmlns:a="http://schemas.openxmlformats.org/drawingml/2006/main">
@@ -964,7 +1279,7 @@
           </a:p>
           <a:p xmlns:a="http://schemas.openxmlformats.org/drawingml/2006/main">
             <a:r>
-              <a:t>[Student action]</a:t>
+              <a:t>学生动作：</a:t>
             </a:r>
           </a:p>
           <a:p xmlns:a="http://schemas.openxmlformats.org/drawingml/2006/main">
@@ -979,12 +1294,12 @@
           </a:p>
           <a:p xmlns:a="http://schemas.openxmlformats.org/drawingml/2006/main">
             <a:r>
-              <a:t>[Timing]</a:t>
-            </a:r>
-          </a:p>
-          <a:p xmlns:a="http://schemas.openxmlformats.org/drawingml/2006/main">
-            <a:r>
-              <a:t>7 分钟。</a:t>
+              <a:t>来源与边界：</a:t>
+            </a:r>
+          </a:p>
+          <a:p xmlns:a="http://schemas.openxmlformats.org/drawingml/2006/main">
+            <a:r>
+              <a:t>直接来源：[本课工件](assets/agent-task-example/generate.diff)；[本课工件](assets/agent-task-example/test-output.txt)；[本课工件](assets/agent-task-example/failure-log.md)。</a:t>
             </a:r>
           </a:p>
           <a:p xmlns:a="http://schemas.openxmlformats.org/drawingml/2006/main">
@@ -994,12 +1309,7 @@
           </a:p>
           <a:p xmlns:a="http://schemas.openxmlformats.org/drawingml/2006/main">
             <a:r>
-              <a:t>[Evidence boundary]</a:t>
-            </a:r>
-          </a:p>
-          <a:p xmlns:a="http://schemas.openxmlformats.org/drawingml/2006/main">
-            <a:r>
-              <a:t>直接来源：[本课工件](assets/agent-task-example/generate.diff)；[本课工件](assets/agent-task-example/test-output.txt)；[本课工件](assets/agent-task-example/failure-log.md)。</a:t>
+              <a:t>讲义 §五 第三步、第四步与第五步；[project-template.md](../../course/project-template.md) §6.1 任务契约；本课 `assets/agent-task-example/` 中的任务契约、真实 diff、测试输出与失败日志。</a:t>
             </a:r>
           </a:p>
           <a:p xmlns:a="http://schemas.openxmlformats.org/drawingml/2006/main">
@@ -1009,7 +1319,7 @@
           </a:p>
           <a:p xmlns:a="http://schemas.openxmlformats.org/drawingml/2006/main">
             <a:r>
-              <a:t>讲义 §五 第三步、第四步与第五步；[project-template.md](../../course/project-template.md) §6.1 任务契约；本课 `assets/agent-task-example/` 中的任务契约、真实 diff、测试输出与失败日志。</a:t>
+              <a:t>---</a:t>
             </a:r>
           </a:p>
           <a:p xmlns:a="http://schemas.openxmlformats.org/drawingml/2006/main">
@@ -1024,32 +1334,27 @@
           </a:p>
           <a:p xmlns:a="http://schemas.openxmlformats.org/drawingml/2006/main">
             <a:r>
-              <a:t>- lessons/lesson-10/slides.md P12</a:t>
-            </a:r>
-          </a:p>
-          <a:p xmlns:a="http://schemas.openxmlformats.org/drawingml/2006/main">
-            <a:r>
-              <a:t>- lessons/lesson-10/handout.md §五 贯穿案例第三至四步（Agent 执行与人工核验 + 失败记录）；§五 第五步（写入项目）</a:t>
-            </a:r>
-          </a:p>
-          <a:p xmlns:a="http://schemas.openxmlformats.org/drawingml/2006/main">
-            <a:r>
-              <a:t>- lessons/lesson-10/teaching-plan.md</a:t>
-            </a:r>
-          </a:p>
-          <a:p xmlns:a="http://schemas.openxmlformats.org/drawingml/2006/main">
-            <a:r>
-              <a:t>- assets/agent-task-example/generate.diff</a:t>
-            </a:r>
-          </a:p>
-          <a:p xmlns:a="http://schemas.openxmlformats.org/drawingml/2006/main">
-            <a:r>
-              <a:t>- assets/agent-task-example/test-output.txt</a:t>
-            </a:r>
-          </a:p>
-          <a:p xmlns:a="http://schemas.openxmlformats.org/drawingml/2006/main">
-            <a:r>
-              <a:t>- assets/agent-task-example/failure-log.md</a:t>
+              <a:t/>
+            </a:r>
+          </a:p>
+          <a:p xmlns:a="http://schemas.openxmlformats.org/drawingml/2006/main">
+            <a:r>
+              <a:t>- 本课 handout.md 与 slides.md</a:t>
+            </a:r>
+          </a:p>
+          <a:p xmlns:a="http://schemas.openxmlformats.org/drawingml/2006/main">
+            <a:r>
+              <a:t/>
+            </a:r>
+          </a:p>
+          <a:p xmlns:a="http://schemas.openxmlformats.org/drawingml/2006/main">
+            <a:r>
+              <a:t>- ../../course/reading-card-case.md</a:t>
+            </a:r>
+          </a:p>
+          <a:p xmlns:a="http://schemas.openxmlformats.org/drawingml/2006/main">
+            <a:r>
+              <a:t/>
             </a:r>
           </a:p>
           <a:p xmlns:a="http://schemas.openxmlformats.org/drawingml/2006/main">
@@ -1124,6 +1429,36 @@
           <a:lstStyle xmlns:a="http://schemas.openxmlformats.org/drawingml/2006/main"/>
           <a:p xmlns:a="http://schemas.openxmlformats.org/drawingml/2006/main">
             <a:r>
+              <a:t>页面：P13 把一个 Agent 步骤改写为受限任务</a:t>
+            </a:r>
+          </a:p>
+          <a:p xmlns:a="http://schemas.openxmlformats.org/drawingml/2006/main">
+            <a:r>
+              <a:t/>
+            </a:r>
+          </a:p>
+          <a:p xmlns:a="http://schemas.openxmlformats.org/drawingml/2006/main">
+            <a:r>
+              <a:t>讲义位置：本课讲义；见逐页母稿映射表</a:t>
+            </a:r>
+          </a:p>
+          <a:p xmlns:a="http://schemas.openxmlformats.org/drawingml/2006/main">
+            <a:r>
+              <a:t/>
+            </a:r>
+          </a:p>
+          <a:p xmlns:a="http://schemas.openxmlformats.org/drawingml/2006/main">
+            <a:r>
+              <a:t>屏显核对：</a:t>
+            </a:r>
+          </a:p>
+          <a:p xmlns:a="http://schemas.openxmlformats.org/drawingml/2006/main">
+            <a:r>
+              <a:t>```text</a:t>
+            </a:r>
+          </a:p>
+          <a:p xmlns:a="http://schemas.openxmlformats.org/drawingml/2006/main">
+            <a:r>
               <a:t>把一个 Agent 步骤改写为受限任务</a:t>
             </a:r>
           </a:p>
@@ -1134,7 +1469,62 @@
           </a:p>
           <a:p xmlns:a="http://schemas.openxmlformats.org/drawingml/2006/main">
             <a:r>
-              <a:t>讲义对应：个人实践第一段：契约与权限 | 契约初版</a:t>
+              <a:t>1</a:t>
+            </a:r>
+          </a:p>
+          <a:p xmlns:a="http://schemas.openxmlformats.org/drawingml/2006/main">
+            <a:r>
+              <a:t>选定一个“拟用 Agent”步骤</a:t>
+            </a:r>
+          </a:p>
+          <a:p xmlns:a="http://schemas.openxmlformats.org/drawingml/2006/main">
+            <a:r>
+              <a:t>2</a:t>
+            </a:r>
+          </a:p>
+          <a:p xmlns:a="http://schemas.openxmlformats.org/drawingml/2006/main">
+            <a:r>
+              <a:t>写五字段任务契约</a:t>
+            </a:r>
+          </a:p>
+          <a:p xmlns:a="http://schemas.openxmlformats.org/drawingml/2006/main">
+            <a:r>
+              <a:t>3</a:t>
+            </a:r>
+          </a:p>
+          <a:p xmlns:a="http://schemas.openxmlformats.org/drawingml/2006/main">
+            <a:r>
+              <a:t>审查真实或预置 diff</a:t>
+            </a:r>
+          </a:p>
+          <a:p xmlns:a="http://schemas.openxmlformats.org/drawingml/2006/main">
+            <a:r>
+              <a:t>4</a:t>
+            </a:r>
+          </a:p>
+          <a:p xmlns:a="http://schemas.openxmlformats.org/drawingml/2006/main">
+            <a:r>
+              <a:t>记录验证证据与失败决定</a:t>
+            </a:r>
+          </a:p>
+          <a:p xmlns:a="http://schemas.openxmlformats.org/drawingml/2006/main">
+            <a:r>
+              <a:t>输入路径</a:t>
+            </a:r>
+          </a:p>
+          <a:p xmlns:a="http://schemas.openxmlformats.org/drawingml/2006/main">
+            <a:r>
+              <a:t>本人真实项目</a:t>
+            </a:r>
+          </a:p>
+          <a:p xmlns:a="http://schemas.openxmlformats.org/drawingml/2006/main">
+            <a:r>
+              <a:t>或</a:t>
+            </a:r>
+          </a:p>
+          <a:p xmlns:a="http://schemas.openxmlformats.org/drawingml/2006/main">
+            <a:r>
+              <a:t>课次预置工件</a:t>
             </a:r>
           </a:p>
           <a:p xmlns:a="http://schemas.openxmlformats.org/drawingml/2006/main">
@@ -1144,7 +1534,32 @@
           </a:p>
           <a:p xmlns:a="http://schemas.openxmlformats.org/drawingml/2006/main">
             <a:r>
-              <a:t>[Teaching]</a:t>
+              <a:t>完成后回写个人项目</a:t>
+            </a:r>
+          </a:p>
+          <a:p xmlns:a="http://schemas.openxmlformats.org/drawingml/2006/main">
+            <a:r>
+              <a:t>```</a:t>
+            </a:r>
+          </a:p>
+          <a:p xmlns:a="http://schemas.openxmlformats.org/drawingml/2006/main">
+            <a:r>
+              <a:t/>
+            </a:r>
+          </a:p>
+          <a:p xmlns:a="http://schemas.openxmlformats.org/drawingml/2006/main">
+            <a:r>
+              <a:t>屏显来源页脚：来源：lesson-10/slides.md；课程工件与讲义见 speaker notes。</a:t>
+            </a:r>
+          </a:p>
+          <a:p xmlns:a="http://schemas.openxmlformats.org/drawingml/2006/main">
+            <a:r>
+              <a:t/>
+            </a:r>
+          </a:p>
+          <a:p xmlns:a="http://schemas.openxmlformats.org/drawingml/2006/main">
+            <a:r>
+              <a:t>教师讲述：</a:t>
             </a:r>
           </a:p>
           <a:p xmlns:a="http://schemas.openxmlformats.org/drawingml/2006/main">
@@ -1159,7 +1574,7 @@
           </a:p>
           <a:p xmlns:a="http://schemas.openxmlformats.org/drawingml/2006/main">
             <a:r>
-              <a:t>[Student action]</a:t>
+              <a:t>学生动作：</a:t>
             </a:r>
           </a:p>
           <a:p xmlns:a="http://schemas.openxmlformats.org/drawingml/2006/main">
@@ -1174,12 +1589,12 @@
           </a:p>
           <a:p xmlns:a="http://schemas.openxmlformats.org/drawingml/2006/main">
             <a:r>
-              <a:t>[Timing]</a:t>
-            </a:r>
-          </a:p>
-          <a:p xmlns:a="http://schemas.openxmlformats.org/drawingml/2006/main">
-            <a:r>
-              <a:t>10 分钟。</a:t>
+              <a:t>来源与边界：</a:t>
+            </a:r>
+          </a:p>
+          <a:p xmlns:a="http://schemas.openxmlformats.org/drawingml/2006/main">
+            <a:r>
+              <a:t>[project-template.md](../../course/project-template.md) 字段模板；第 9 课实验规格。</a:t>
             </a:r>
           </a:p>
           <a:p xmlns:a="http://schemas.openxmlformats.org/drawingml/2006/main">
@@ -1189,12 +1604,7 @@
           </a:p>
           <a:p xmlns:a="http://schemas.openxmlformats.org/drawingml/2006/main">
             <a:r>
-              <a:t>[Evidence boundary]</a:t>
-            </a:r>
-          </a:p>
-          <a:p xmlns:a="http://schemas.openxmlformats.org/drawingml/2006/main">
-            <a:r>
-              <a:t>[project-template.md](../../course/project-template.md) 字段模板；第 9 课实验规格。</a:t>
+              <a:t>---</a:t>
             </a:r>
           </a:p>
           <a:p xmlns:a="http://schemas.openxmlformats.org/drawingml/2006/main">
@@ -1209,17 +1619,27 @@
           </a:p>
           <a:p xmlns:a="http://schemas.openxmlformats.org/drawingml/2006/main">
             <a:r>
-              <a:t>- lessons/lesson-10/slides.md P13</a:t>
-            </a:r>
-          </a:p>
-          <a:p xmlns:a="http://schemas.openxmlformats.org/drawingml/2006/main">
-            <a:r>
-              <a:t>- lessons/lesson-10/handout.md 个人实践第一段：契约与权限 | 契约初版</a:t>
-            </a:r>
-          </a:p>
-          <a:p xmlns:a="http://schemas.openxmlformats.org/drawingml/2006/main">
-            <a:r>
-              <a:t>- lessons/lesson-10/teaching-plan.md</a:t>
+              <a:t/>
+            </a:r>
+          </a:p>
+          <a:p xmlns:a="http://schemas.openxmlformats.org/drawingml/2006/main">
+            <a:r>
+              <a:t>- 本课 handout.md 与 slides.md</a:t>
+            </a:r>
+          </a:p>
+          <a:p xmlns:a="http://schemas.openxmlformats.org/drawingml/2006/main">
+            <a:r>
+              <a:t/>
+            </a:r>
+          </a:p>
+          <a:p xmlns:a="http://schemas.openxmlformats.org/drawingml/2006/main">
+            <a:r>
+              <a:t>- ../../course/reading-card-case.md</a:t>
+            </a:r>
+          </a:p>
+          <a:p xmlns:a="http://schemas.openxmlformats.org/drawingml/2006/main">
+            <a:r>
+              <a:t/>
             </a:r>
           </a:p>
           <a:p xmlns:a="http://schemas.openxmlformats.org/drawingml/2006/main">
@@ -1294,6 +1714,36 @@
           <a:lstStyle xmlns:a="http://schemas.openxmlformats.org/drawingml/2006/main"/>
           <a:p xmlns:a="http://schemas.openxmlformats.org/drawingml/2006/main">
             <a:r>
+              <a:t>页面：P14 文件落点与 diff 审查</a:t>
+            </a:r>
+          </a:p>
+          <a:p xmlns:a="http://schemas.openxmlformats.org/drawingml/2006/main">
+            <a:r>
+              <a:t/>
+            </a:r>
+          </a:p>
+          <a:p xmlns:a="http://schemas.openxmlformats.org/drawingml/2006/main">
+            <a:r>
+              <a:t>讲义位置：本课讲义；见逐页母稿映射表</a:t>
+            </a:r>
+          </a:p>
+          <a:p xmlns:a="http://schemas.openxmlformats.org/drawingml/2006/main">
+            <a:r>
+              <a:t/>
+            </a:r>
+          </a:p>
+          <a:p xmlns:a="http://schemas.openxmlformats.org/drawingml/2006/main">
+            <a:r>
+              <a:t>屏显核对：</a:t>
+            </a:r>
+          </a:p>
+          <a:p xmlns:a="http://schemas.openxmlformats.org/drawingml/2006/main">
+            <a:r>
+              <a:t>```text</a:t>
+            </a:r>
+          </a:p>
+          <a:p xmlns:a="http://schemas.openxmlformats.org/drawingml/2006/main">
+            <a:r>
               <a:t>文件落点与 diff 审查</a:t>
             </a:r>
           </a:p>
@@ -1304,7 +1754,82 @@
           </a:p>
           <a:p xmlns:a="http://schemas.openxmlformats.org/drawingml/2006/main">
             <a:r>
-              <a:t>讲义对应：教师中点点评后继续实践：diff/测试审查与失败记录 | 审查与决定记录</a:t>
+              <a:t>project/</a:t>
+            </a:r>
+          </a:p>
+          <a:p xmlns:a="http://schemas.openxmlformats.org/drawingml/2006/main">
+            <a:r>
+              <a:t>agent-tasks/task-01.md</a:t>
+            </a:r>
+          </a:p>
+          <a:p xmlns:a="http://schemas.openxmlformats.org/drawingml/2006/main">
+            <a:r>
+              <a:t>src/generate.py</a:t>
+            </a:r>
+          </a:p>
+          <a:p xmlns:a="http://schemas.openxmlformats.org/drawingml/2006/main">
+            <a:r>
+              <a:t>experiments/exp01/agent-traces/</a:t>
+            </a:r>
+          </a:p>
+          <a:p xmlns:a="http://schemas.openxmlformats.org/drawingml/2006/main">
+            <a:r>
+              <a:t>  generate.diff</a:t>
+            </a:r>
+          </a:p>
+          <a:p xmlns:a="http://schemas.openxmlformats.org/drawingml/2006/main">
+            <a:r>
+              <a:t>  test-output.txt</a:t>
+            </a:r>
+          </a:p>
+          <a:p xmlns:a="http://schemas.openxmlformats.org/drawingml/2006/main">
+            <a:r>
+              <a:t>  failure-log.md</a:t>
+            </a:r>
+          </a:p>
+          <a:p xmlns:a="http://schemas.openxmlformats.org/drawingml/2006/main">
+            <a:r>
+              <a:t>ai-usage-log.md</a:t>
+            </a:r>
+          </a:p>
+          <a:p xmlns:a="http://schemas.openxmlformats.org/drawingml/2006/main">
+            <a:r>
+              <a:t>diff 写回前</a:t>
+            </a:r>
+          </a:p>
+          <a:p xmlns:a="http://schemas.openxmlformats.org/drawingml/2006/main">
+            <a:r>
+              <a:t>□ 只含可写文件</a:t>
+            </a:r>
+          </a:p>
+          <a:p xmlns:a="http://schemas.openxmlformats.org/drawingml/2006/main">
+            <a:r>
+              <a:t>□ 未引入未授权依赖</a:t>
+            </a:r>
+          </a:p>
+          <a:p xmlns:a="http://schemas.openxmlformats.org/drawingml/2006/main">
+            <a:r>
+              <a:t>□ 未修改禁止层</a:t>
+            </a:r>
+          </a:p>
+          <a:p xmlns:a="http://schemas.openxmlformats.org/drawingml/2006/main">
+            <a:r>
+              <a:t>□ 测试先被审查</a:t>
+            </a:r>
+          </a:p>
+          <a:p xmlns:a="http://schemas.openxmlformats.org/drawingml/2006/main">
+            <a:r>
+              <a:t>□ 未越过 Non-goal</a:t>
+            </a:r>
+          </a:p>
+          <a:p xmlns:a="http://schemas.openxmlformats.org/drawingml/2006/main">
+            <a:r>
+              <a:t>□ commit message 只写事实</a:t>
+            </a:r>
+          </a:p>
+          <a:p xmlns:a="http://schemas.openxmlformats.org/drawingml/2006/main">
+            <a:r>
+              <a:t>```</a:t>
             </a:r>
           </a:p>
           <a:p xmlns:a="http://schemas.openxmlformats.org/drawingml/2006/main">
@@ -1314,7 +1839,17 @@
           </a:p>
           <a:p xmlns:a="http://schemas.openxmlformats.org/drawingml/2006/main">
             <a:r>
-              <a:t>[Teaching]</a:t>
+              <a:t>屏显来源页脚：来源：lesson-10/slides.md；课程工件与讲义见 speaker notes。</a:t>
+            </a:r>
+          </a:p>
+          <a:p xmlns:a="http://schemas.openxmlformats.org/drawingml/2006/main">
+            <a:r>
+              <a:t/>
+            </a:r>
+          </a:p>
+          <a:p xmlns:a="http://schemas.openxmlformats.org/drawingml/2006/main">
+            <a:r>
+              <a:t>教师讲述：</a:t>
             </a:r>
           </a:p>
           <a:p xmlns:a="http://schemas.openxmlformats.org/drawingml/2006/main">
@@ -1329,7 +1864,7 @@
           </a:p>
           <a:p xmlns:a="http://schemas.openxmlformats.org/drawingml/2006/main">
             <a:r>
-              <a:t>[Student action]</a:t>
+              <a:t>学生动作：</a:t>
             </a:r>
           </a:p>
           <a:p xmlns:a="http://schemas.openxmlformats.org/drawingml/2006/main">
@@ -1344,12 +1879,12 @@
           </a:p>
           <a:p xmlns:a="http://schemas.openxmlformats.org/drawingml/2006/main">
             <a:r>
-              <a:t>[Timing]</a:t>
-            </a:r>
-          </a:p>
-          <a:p xmlns:a="http://schemas.openxmlformats.org/drawingml/2006/main">
-            <a:r>
-              <a:t>15 分钟（教师中点点评 5 分钟 + 个人实践 10 分钟）。</a:t>
+              <a:t>来源与边界：</a:t>
+            </a:r>
+          </a:p>
+          <a:p xmlns:a="http://schemas.openxmlformats.org/drawingml/2006/main">
+            <a:r>
+              <a:t>[project-template.md](../../course/project-template.md)；讲义 §五 第五步。</a:t>
             </a:r>
           </a:p>
           <a:p xmlns:a="http://schemas.openxmlformats.org/drawingml/2006/main">
@@ -1359,12 +1894,7 @@
           </a:p>
           <a:p xmlns:a="http://schemas.openxmlformats.org/drawingml/2006/main">
             <a:r>
-              <a:t>[Evidence boundary]</a:t>
-            </a:r>
-          </a:p>
-          <a:p xmlns:a="http://schemas.openxmlformats.org/drawingml/2006/main">
-            <a:r>
-              <a:t>[project-template.md](../../course/project-template.md)；讲义 §五 第五步。</a:t>
+              <a:t>---</a:t>
             </a:r>
           </a:p>
           <a:p xmlns:a="http://schemas.openxmlformats.org/drawingml/2006/main">
@@ -1379,17 +1909,27 @@
           </a:p>
           <a:p xmlns:a="http://schemas.openxmlformats.org/drawingml/2006/main">
             <a:r>
-              <a:t>- lessons/lesson-10/slides.md P14</a:t>
-            </a:r>
-          </a:p>
-          <a:p xmlns:a="http://schemas.openxmlformats.org/drawingml/2006/main">
-            <a:r>
-              <a:t>- lessons/lesson-10/handout.md 教师中点点评后继续实践：diff/测试审查与失败记录 | 审查与决定记录</a:t>
-            </a:r>
-          </a:p>
-          <a:p xmlns:a="http://schemas.openxmlformats.org/drawingml/2006/main">
-            <a:r>
-              <a:t>- lessons/lesson-10/teaching-plan.md</a:t>
+              <a:t/>
+            </a:r>
+          </a:p>
+          <a:p xmlns:a="http://schemas.openxmlformats.org/drawingml/2006/main">
+            <a:r>
+              <a:t>- 本课 handout.md 与 slides.md</a:t>
+            </a:r>
+          </a:p>
+          <a:p xmlns:a="http://schemas.openxmlformats.org/drawingml/2006/main">
+            <a:r>
+              <a:t/>
+            </a:r>
+          </a:p>
+          <a:p xmlns:a="http://schemas.openxmlformats.org/drawingml/2006/main">
+            <a:r>
+              <a:t>- ../../course/reading-card-case.md</a:t>
+            </a:r>
+          </a:p>
+          <a:p xmlns:a="http://schemas.openxmlformats.org/drawingml/2006/main">
+            <a:r>
+              <a:t/>
             </a:r>
           </a:p>
           <a:p xmlns:a="http://schemas.openxmlformats.org/drawingml/2006/main">
@@ -1464,6 +2004,36 @@
           <a:lstStyle xmlns:a="http://schemas.openxmlformats.org/drawingml/2006/main"/>
           <a:p xmlns:a="http://schemas.openxmlformats.org/drawingml/2006/main">
             <a:r>
+              <a:t>页面：P15 同伴提问，作者决定</a:t>
+            </a:r>
+          </a:p>
+          <a:p xmlns:a="http://schemas.openxmlformats.org/drawingml/2006/main">
+            <a:r>
+              <a:t/>
+            </a:r>
+          </a:p>
+          <a:p xmlns:a="http://schemas.openxmlformats.org/drawingml/2006/main">
+            <a:r>
+              <a:t>讲义位置：本课讲义；见逐页母稿映射表</a:t>
+            </a:r>
+          </a:p>
+          <a:p xmlns:a="http://schemas.openxmlformats.org/drawingml/2006/main">
+            <a:r>
+              <a:t/>
+            </a:r>
+          </a:p>
+          <a:p xmlns:a="http://schemas.openxmlformats.org/drawingml/2006/main">
+            <a:r>
+              <a:t>屏显核对：</a:t>
+            </a:r>
+          </a:p>
+          <a:p xmlns:a="http://schemas.openxmlformats.org/drawingml/2006/main">
+            <a:r>
+              <a:t>```text</a:t>
+            </a:r>
+          </a:p>
+          <a:p xmlns:a="http://schemas.openxmlformats.org/drawingml/2006/main">
+            <a:r>
               <a:t>同伴提问，作者决定</a:t>
             </a:r>
           </a:p>
@@ -1474,7 +2044,57 @@
           </a:p>
           <a:p xmlns:a="http://schemas.openxmlformats.org/drawingml/2006/main">
             <a:r>
-              <a:t>讲义对应：同伴互查 | 互查问题与作者决定</a:t>
+              <a:t>作者的 task-01.md + diff</a:t>
+            </a:r>
+          </a:p>
+          <a:p xmlns:a="http://schemas.openxmlformats.org/drawingml/2006/main">
+            <a:r>
+              <a:t>Context / Permission / Non-goal</a:t>
+            </a:r>
+          </a:p>
+          <a:p xmlns:a="http://schemas.openxmlformats.org/drawingml/2006/main">
+            <a:r>
+              <a:t>人工审核点 / 失败恢复</a:t>
+            </a:r>
+          </a:p>
+          <a:p xmlns:a="http://schemas.openxmlformats.org/drawingml/2006/main">
+            <a:r>
+              <a:t>diff 范围 / 测试 / 失败记录</a:t>
+            </a:r>
+          </a:p>
+          <a:p xmlns:a="http://schemas.openxmlformats.org/drawingml/2006/main">
+            <a:r>
+              <a:t>同伴只问：</a:t>
+            </a:r>
+          </a:p>
+          <a:p xmlns:a="http://schemas.openxmlformats.org/drawingml/2006/main">
+            <a:r>
+              <a:t>边界够窄吗？</a:t>
+            </a:r>
+          </a:p>
+          <a:p xmlns:a="http://schemas.openxmlformats.org/drawingml/2006/main">
+            <a:r>
+              <a:t>测试真的判定目标吗？</a:t>
+            </a:r>
+          </a:p>
+          <a:p xmlns:a="http://schemas.openxmlformats.org/drawingml/2006/main">
+            <a:r>
+              <a:t>作者记录：</a:t>
+            </a:r>
+          </a:p>
+          <a:p xmlns:a="http://schemas.openxmlformats.org/drawingml/2006/main">
+            <a:r>
+              <a:t>采纳 / 澄清 / 补证</a:t>
+            </a:r>
+          </a:p>
+          <a:p xmlns:a="http://schemas.openxmlformats.org/drawingml/2006/main">
+            <a:r>
+              <a:t>保留异议 / 暂缓</a:t>
+            </a:r>
+          </a:p>
+          <a:p xmlns:a="http://schemas.openxmlformats.org/drawingml/2006/main">
+            <a:r>
+              <a:t>```</a:t>
             </a:r>
           </a:p>
           <a:p xmlns:a="http://schemas.openxmlformats.org/drawingml/2006/main">
@@ -1484,7 +2104,17 @@
           </a:p>
           <a:p xmlns:a="http://schemas.openxmlformats.org/drawingml/2006/main">
             <a:r>
-              <a:t>[Teaching]</a:t>
+              <a:t>屏显来源页脚：来源：lesson-10/slides.md；课程工件与讲义见 speaker notes。</a:t>
+            </a:r>
+          </a:p>
+          <a:p xmlns:a="http://schemas.openxmlformats.org/drawingml/2006/main">
+            <a:r>
+              <a:t/>
+            </a:r>
+          </a:p>
+          <a:p xmlns:a="http://schemas.openxmlformats.org/drawingml/2006/main">
+            <a:r>
+              <a:t>教师讲述：</a:t>
             </a:r>
           </a:p>
           <a:p xmlns:a="http://schemas.openxmlformats.org/drawingml/2006/main">
@@ -1499,7 +2129,7 @@
           </a:p>
           <a:p xmlns:a="http://schemas.openxmlformats.org/drawingml/2006/main">
             <a:r>
-              <a:t>[Student action]</a:t>
+              <a:t>学生动作：</a:t>
             </a:r>
           </a:p>
           <a:p xmlns:a="http://schemas.openxmlformats.org/drawingml/2006/main">
@@ -1514,12 +2144,12 @@
           </a:p>
           <a:p xmlns:a="http://schemas.openxmlformats.org/drawingml/2006/main">
             <a:r>
-              <a:t>[Timing]</a:t>
-            </a:r>
-          </a:p>
-          <a:p xmlns:a="http://schemas.openxmlformats.org/drawingml/2006/main">
-            <a:r>
-              <a:t>15 分钟。</a:t>
+              <a:t>来源与边界：</a:t>
+            </a:r>
+          </a:p>
+          <a:p xmlns:a="http://schemas.openxmlformats.org/drawingml/2006/main">
+            <a:r>
+              <a:t>同伴反馈为形成性活动，不单独计分，不共同提交（[assignments.md](../../course/assignments.md)）。</a:t>
             </a:r>
           </a:p>
           <a:p xmlns:a="http://schemas.openxmlformats.org/drawingml/2006/main">
@@ -1529,12 +2159,7 @@
           </a:p>
           <a:p xmlns:a="http://schemas.openxmlformats.org/drawingml/2006/main">
             <a:r>
-              <a:t>[Evidence boundary]</a:t>
-            </a:r>
-          </a:p>
-          <a:p xmlns:a="http://schemas.openxmlformats.org/drawingml/2006/main">
-            <a:r>
-              <a:t>同伴反馈为形成性活动，不单独计分，不共同提交（[assignments.md](../../course/assignments.md)）。</a:t>
+              <a:t>---</a:t>
             </a:r>
           </a:p>
           <a:p xmlns:a="http://schemas.openxmlformats.org/drawingml/2006/main">
@@ -1549,17 +2174,27 @@
           </a:p>
           <a:p xmlns:a="http://schemas.openxmlformats.org/drawingml/2006/main">
             <a:r>
-              <a:t>- lessons/lesson-10/slides.md P15</a:t>
-            </a:r>
-          </a:p>
-          <a:p xmlns:a="http://schemas.openxmlformats.org/drawingml/2006/main">
-            <a:r>
-              <a:t>- lessons/lesson-10/handout.md 同伴互查 | 互查问题与作者决定</a:t>
-            </a:r>
-          </a:p>
-          <a:p xmlns:a="http://schemas.openxmlformats.org/drawingml/2006/main">
-            <a:r>
-              <a:t>- lessons/lesson-10/teaching-plan.md</a:t>
+              <a:t/>
+            </a:r>
+          </a:p>
+          <a:p xmlns:a="http://schemas.openxmlformats.org/drawingml/2006/main">
+            <a:r>
+              <a:t>- 本课 handout.md 与 slides.md</a:t>
+            </a:r>
+          </a:p>
+          <a:p xmlns:a="http://schemas.openxmlformats.org/drawingml/2006/main">
+            <a:r>
+              <a:t/>
+            </a:r>
+          </a:p>
+          <a:p xmlns:a="http://schemas.openxmlformats.org/drawingml/2006/main">
+            <a:r>
+              <a:t>- ../../course/reading-card-case.md</a:t>
+            </a:r>
+          </a:p>
+          <a:p xmlns:a="http://schemas.openxmlformats.org/drawingml/2006/main">
+            <a:r>
+              <a:t/>
             </a:r>
           </a:p>
           <a:p xmlns:a="http://schemas.openxmlformats.org/drawingml/2006/main">
@@ -1634,6 +2269,36 @@
           <a:lstStyle xmlns:a="http://schemas.openxmlformats.org/drawingml/2006/main"/>
           <a:p xmlns:a="http://schemas.openxmlformats.org/drawingml/2006/main">
             <a:r>
+              <a:t>页面：P16 本讲知识点总结</a:t>
+            </a:r>
+          </a:p>
+          <a:p xmlns:a="http://schemas.openxmlformats.org/drawingml/2006/main">
+            <a:r>
+              <a:t/>
+            </a:r>
+          </a:p>
+          <a:p xmlns:a="http://schemas.openxmlformats.org/drawingml/2006/main">
+            <a:r>
+              <a:t>讲义位置：本课讲义；见逐页母稿映射表</a:t>
+            </a:r>
+          </a:p>
+          <a:p xmlns:a="http://schemas.openxmlformats.org/drawingml/2006/main">
+            <a:r>
+              <a:t/>
+            </a:r>
+          </a:p>
+          <a:p xmlns:a="http://schemas.openxmlformats.org/drawingml/2006/main">
+            <a:r>
+              <a:t>屏显核对：</a:t>
+            </a:r>
+          </a:p>
+          <a:p xmlns:a="http://schemas.openxmlformats.org/drawingml/2006/main">
+            <a:r>
+              <a:t>```text</a:t>
+            </a:r>
+          </a:p>
+          <a:p xmlns:a="http://schemas.openxmlformats.org/drawingml/2006/main">
+            <a:r>
               <a:t>本讲知识点总结</a:t>
             </a:r>
           </a:p>
@@ -1644,7 +2309,62 @@
           </a:p>
           <a:p xmlns:a="http://schemas.openxmlformats.org/drawingml/2006/main">
             <a:r>
-              <a:t>讲义对应：§二-§六 本讲核心链路与边界总结</a:t>
+              <a:t>任务契约</a:t>
+            </a:r>
+          </a:p>
+          <a:p xmlns:a="http://schemas.openxmlformats.org/drawingml/2006/main">
+            <a:r>
+              <a:t>→</a:t>
+            </a:r>
+          </a:p>
+          <a:p xmlns:a="http://schemas.openxmlformats.org/drawingml/2006/main">
+            <a:r>
+              <a:t>本讲输入</a:t>
+            </a:r>
+          </a:p>
+          <a:p xmlns:a="http://schemas.openxmlformats.org/drawingml/2006/main">
+            <a:r>
+              <a:t>受限执行</a:t>
+            </a:r>
+          </a:p>
+          <a:p xmlns:a="http://schemas.openxmlformats.org/drawingml/2006/main">
+            <a:r>
+              <a:t>→</a:t>
+            </a:r>
+          </a:p>
+          <a:p xmlns:a="http://schemas.openxmlformats.org/drawingml/2006/main">
+            <a:r>
+              <a:t>本讲执行</a:t>
+            </a:r>
+          </a:p>
+          <a:p xmlns:a="http://schemas.openxmlformats.org/drawingml/2006/main">
+            <a:r>
+              <a:t>diff / 测试</a:t>
+            </a:r>
+          </a:p>
+          <a:p xmlns:a="http://schemas.openxmlformats.org/drawingml/2006/main">
+            <a:r>
+              <a:t>→</a:t>
+            </a:r>
+          </a:p>
+          <a:p xmlns:a="http://schemas.openxmlformats.org/drawingml/2006/main">
+            <a:r>
+              <a:t>本讲证据</a:t>
+            </a:r>
+          </a:p>
+          <a:p xmlns:a="http://schemas.openxmlformats.org/drawingml/2006/main">
+            <a:r>
+              <a:t>失败保留</a:t>
+            </a:r>
+          </a:p>
+          <a:p xmlns:a="http://schemas.openxmlformats.org/drawingml/2006/main">
+            <a:r>
+              <a:t>下一步</a:t>
+            </a:r>
+          </a:p>
+          <a:p xmlns:a="http://schemas.openxmlformats.org/drawingml/2006/main">
+            <a:r>
+              <a:t>```</a:t>
             </a:r>
           </a:p>
           <a:p xmlns:a="http://schemas.openxmlformats.org/drawingml/2006/main">
@@ -1654,7 +2374,17 @@
           </a:p>
           <a:p xmlns:a="http://schemas.openxmlformats.org/drawingml/2006/main">
             <a:r>
-              <a:t>[Teaching]</a:t>
+              <a:t>屏显来源页脚：来源：lesson-10/slides.md；课程工件与讲义见 speaker notes。</a:t>
+            </a:r>
+          </a:p>
+          <a:p xmlns:a="http://schemas.openxmlformats.org/drawingml/2006/main">
+            <a:r>
+              <a:t/>
+            </a:r>
+          </a:p>
+          <a:p xmlns:a="http://schemas.openxmlformats.org/drawingml/2006/main">
+            <a:r>
+              <a:t>教师讲述：</a:t>
             </a:r>
           </a:p>
           <a:p xmlns:a="http://schemas.openxmlformats.org/drawingml/2006/main">
@@ -1669,7 +2399,7 @@
           </a:p>
           <a:p xmlns:a="http://schemas.openxmlformats.org/drawingml/2006/main">
             <a:r>
-              <a:t>[Student action]</a:t>
+              <a:t>学生动作：</a:t>
             </a:r>
           </a:p>
           <a:p xmlns:a="http://schemas.openxmlformats.org/drawingml/2006/main">
@@ -1684,12 +2414,12 @@
           </a:p>
           <a:p xmlns:a="http://schemas.openxmlformats.org/drawingml/2006/main">
             <a:r>
-              <a:t>[Timing]</a:t>
-            </a:r>
-          </a:p>
-          <a:p xmlns:a="http://schemas.openxmlformats.org/drawingml/2006/main">
-            <a:r>
-              <a:t>2 分钟。</a:t>
+              <a:t>来源与边界：</a:t>
+            </a:r>
+          </a:p>
+          <a:p xmlns:a="http://schemas.openxmlformats.org/drawingml/2006/main">
+            <a:r>
+              <a:t>[handout.md](./handout.md) §二-§六；[teaching-plan.md](./teaching-plan.md) 第四至六节。</a:t>
             </a:r>
           </a:p>
           <a:p xmlns:a="http://schemas.openxmlformats.org/drawingml/2006/main">
@@ -1699,12 +2429,7 @@
           </a:p>
           <a:p xmlns:a="http://schemas.openxmlformats.org/drawingml/2006/main">
             <a:r>
-              <a:t>[Evidence boundary]</a:t>
-            </a:r>
-          </a:p>
-          <a:p xmlns:a="http://schemas.openxmlformats.org/drawingml/2006/main">
-            <a:r>
-              <a:t>[handout.md](./handout.md) §二-§六；[teaching-plan.md](./teaching-plan.md) 第四至六节。</a:t>
+              <a:t>---</a:t>
             </a:r>
           </a:p>
           <a:p xmlns:a="http://schemas.openxmlformats.org/drawingml/2006/main">
@@ -1719,17 +2444,27 @@
           </a:p>
           <a:p xmlns:a="http://schemas.openxmlformats.org/drawingml/2006/main">
             <a:r>
-              <a:t>- lessons/lesson-10/slides.md P16</a:t>
-            </a:r>
-          </a:p>
-          <a:p xmlns:a="http://schemas.openxmlformats.org/drawingml/2006/main">
-            <a:r>
-              <a:t>- lessons/lesson-10/handout.md §二-§六 本讲核心链路与边界总结</a:t>
-            </a:r>
-          </a:p>
-          <a:p xmlns:a="http://schemas.openxmlformats.org/drawingml/2006/main">
-            <a:r>
-              <a:t>- lessons/lesson-10/teaching-plan.md</a:t>
+              <a:t/>
+            </a:r>
+          </a:p>
+          <a:p xmlns:a="http://schemas.openxmlformats.org/drawingml/2006/main">
+            <a:r>
+              <a:t>- 本课 handout.md 与 slides.md</a:t>
+            </a:r>
+          </a:p>
+          <a:p xmlns:a="http://schemas.openxmlformats.org/drawingml/2006/main">
+            <a:r>
+              <a:t/>
+            </a:r>
+          </a:p>
+          <a:p xmlns:a="http://schemas.openxmlformats.org/drawingml/2006/main">
+            <a:r>
+              <a:t>- ../../course/reading-card-case.md</a:t>
+            </a:r>
+          </a:p>
+          <a:p xmlns:a="http://schemas.openxmlformats.org/drawingml/2006/main">
+            <a:r>
+              <a:t/>
             </a:r>
           </a:p>
           <a:p xmlns:a="http://schemas.openxmlformats.org/drawingml/2006/main">
@@ -1804,6 +2539,36 @@
           <a:lstStyle xmlns:a="http://schemas.openxmlformats.org/drawingml/2006/main"/>
           <a:p xmlns:a="http://schemas.openxmlformats.org/drawingml/2006/main">
             <a:r>
+              <a:t>页面：P17 受限执行能否安全重复？</a:t>
+            </a:r>
+          </a:p>
+          <a:p xmlns:a="http://schemas.openxmlformats.org/drawingml/2006/main">
+            <a:r>
+              <a:t/>
+            </a:r>
+          </a:p>
+          <a:p xmlns:a="http://schemas.openxmlformats.org/drawingml/2006/main">
+            <a:r>
+              <a:t>讲义位置：本课讲义；见逐页母稿映射表</a:t>
+            </a:r>
+          </a:p>
+          <a:p xmlns:a="http://schemas.openxmlformats.org/drawingml/2006/main">
+            <a:r>
+              <a:t/>
+            </a:r>
+          </a:p>
+          <a:p xmlns:a="http://schemas.openxmlformats.org/drawingml/2006/main">
+            <a:r>
+              <a:t>屏显核对：</a:t>
+            </a:r>
+          </a:p>
+          <a:p xmlns:a="http://schemas.openxmlformats.org/drawingml/2006/main">
+            <a:r>
+              <a:t>```text</a:t>
+            </a:r>
+          </a:p>
+          <a:p xmlns:a="http://schemas.openxmlformats.org/drawingml/2006/main">
+            <a:r>
               <a:t>受限执行能否安全重复？</a:t>
             </a:r>
           </a:p>
@@ -1814,7 +2579,72 @@
           </a:p>
           <a:p xmlns:a="http://schemas.openxmlformats.org/drawingml/2006/main">
             <a:r>
-              <a:t>讲义对应：§六 常见错误；§导读 第 11 课预告；退出卡</a:t>
+              <a:t>第 9 课</a:t>
+            </a:r>
+          </a:p>
+          <a:p xmlns:a="http://schemas.openxmlformats.org/drawingml/2006/main">
+            <a:r>
+              <a:t>实验规格</a:t>
+            </a:r>
+          </a:p>
+          <a:p xmlns:a="http://schemas.openxmlformats.org/drawingml/2006/main">
+            <a:r>
+              <a:t>→</a:t>
+            </a:r>
+          </a:p>
+          <a:p xmlns:a="http://schemas.openxmlformats.org/drawingml/2006/main">
+            <a:r>
+              <a:t>第 10 课</a:t>
+            </a:r>
+          </a:p>
+          <a:p xmlns:a="http://schemas.openxmlformats.org/drawingml/2006/main">
+            <a:r>
+              <a:t>受限执行</a:t>
+            </a:r>
+          </a:p>
+          <a:p xmlns:a="http://schemas.openxmlformats.org/drawingml/2006/main">
+            <a:r>
+              <a:t>→</a:t>
+            </a:r>
+          </a:p>
+          <a:p xmlns:a="http://schemas.openxmlformats.org/drawingml/2006/main">
+            <a:r>
+              <a:t>当前位置 / 输出</a:t>
+            </a:r>
+          </a:p>
+          <a:p xmlns:a="http://schemas.openxmlformats.org/drawingml/2006/main">
+            <a:r>
+              <a:t>第 11 课</a:t>
+            </a:r>
+          </a:p>
+          <a:p xmlns:a="http://schemas.openxmlformats.org/drawingml/2006/main">
+            <a:r>
+              <a:t>冻结循环</a:t>
+            </a:r>
+          </a:p>
+          <a:p xmlns:a="http://schemas.openxmlformats.org/drawingml/2006/main">
+            <a:r>
+              <a:t>→</a:t>
+            </a:r>
+          </a:p>
+          <a:p xmlns:a="http://schemas.openxmlformats.org/drawingml/2006/main">
+            <a:r>
+              <a:t>第 13 课</a:t>
+            </a:r>
+          </a:p>
+          <a:p xmlns:a="http://schemas.openxmlformats.org/drawingml/2006/main">
+            <a:r>
+              <a:t>评价证据</a:t>
+            </a:r>
+          </a:p>
+          <a:p xmlns:a="http://schemas.openxmlformats.org/drawingml/2006/main">
+            <a:r>
+              <a:t>保存：任务契约｜一次可核验 diff｜至少一条失败或越权记录</a:t>
+            </a:r>
+          </a:p>
+          <a:p xmlns:a="http://schemas.openxmlformats.org/drawingml/2006/main">
+            <a:r>
+              <a:t>```</a:t>
             </a:r>
           </a:p>
           <a:p xmlns:a="http://schemas.openxmlformats.org/drawingml/2006/main">
@@ -1824,7 +2654,17 @@
           </a:p>
           <a:p xmlns:a="http://schemas.openxmlformats.org/drawingml/2006/main">
             <a:r>
-              <a:t>[Teaching]</a:t>
+              <a:t>屏显来源页脚：来源：lesson-10/slides.md；课程工件与讲义见 speaker notes。</a:t>
+            </a:r>
+          </a:p>
+          <a:p xmlns:a="http://schemas.openxmlformats.org/drawingml/2006/main">
+            <a:r>
+              <a:t/>
+            </a:r>
+          </a:p>
+          <a:p xmlns:a="http://schemas.openxmlformats.org/drawingml/2006/main">
+            <a:r>
+              <a:t>教师讲述：</a:t>
             </a:r>
           </a:p>
           <a:p xmlns:a="http://schemas.openxmlformats.org/drawingml/2006/main">
@@ -1839,7 +2679,7 @@
           </a:p>
           <a:p xmlns:a="http://schemas.openxmlformats.org/drawingml/2006/main">
             <a:r>
-              <a:t>[Student action]</a:t>
+              <a:t>学生动作：</a:t>
             </a:r>
           </a:p>
           <a:p xmlns:a="http://schemas.openxmlformats.org/drawingml/2006/main">
@@ -1854,12 +2694,37 @@
           </a:p>
           <a:p xmlns:a="http://schemas.openxmlformats.org/drawingml/2006/main">
             <a:r>
-              <a:t>[Timing]</a:t>
-            </a:r>
-          </a:p>
-          <a:p xmlns:a="http://schemas.openxmlformats.org/drawingml/2006/main">
-            <a:r>
-              <a:t>3 分钟。</a:t>
+              <a:t>来源与边界：</a:t>
+            </a:r>
+          </a:p>
+          <a:p xmlns:a="http://schemas.openxmlformats.org/drawingml/2006/main">
+            <a:r>
+              <a:t>- Russell, S., &amp; Norvig, P. *Artificial Intelligence: A Modern Approach*, 4th ed. Pearson, 2020, Ch 2. [出版社页面](https://www.pearson.com/en-us/subject-catalog/p/artificial-intelligence-a-modern-approach/P200000003500/9780134610993)。</a:t>
+            </a:r>
+          </a:p>
+          <a:p xmlns:a="http://schemas.openxmlformats.org/drawingml/2006/main">
+            <a:r>
+              <a:t>- Yao, S. et al. "ReAct: Synergizing Reasoning and Acting in Language Models." *ICLR 2023*. [会议页面](https://iclr.cc/virtual/2023/poster/11003)。</a:t>
+            </a:r>
+          </a:p>
+          <a:p xmlns:a="http://schemas.openxmlformats.org/drawingml/2006/main">
+            <a:r>
+              <a:t>- Amershi, S. et al. "Guidelines for Human-AI Interaction." *CHI 2019*. DOI: [10.1145/3290605.3300233](https://www.microsoft.com/en-us/research/publication/guidelines-for-human-ai-interaction/)。</a:t>
+            </a:r>
+          </a:p>
+          <a:p xmlns:a="http://schemas.openxmlformats.org/drawingml/2006/main">
+            <a:r>
+              <a:t>- Jimenez, C. E. et al. *SWE-bench*, ICLR 2024. [项目页面](https://www.swebench.com/original.html)。</a:t>
+            </a:r>
+          </a:p>
+          <a:p xmlns:a="http://schemas.openxmlformats.org/drawingml/2006/main">
+            <a:r>
+              <a:t>- 阅读规则见 [reading-list.md](../../course/reading-list.md) 第 10 课。</a:t>
+            </a:r>
+          </a:p>
+          <a:p xmlns:a="http://schemas.openxmlformats.org/drawingml/2006/main">
+            <a:r>
+              <a:t>- 本课非正式提交门（[assignments.md](../../course/assignments.md)）。</a:t>
             </a:r>
           </a:p>
           <a:p xmlns:a="http://schemas.openxmlformats.org/drawingml/2006/main">
@@ -1869,37 +2734,7 @@
           </a:p>
           <a:p xmlns:a="http://schemas.openxmlformats.org/drawingml/2006/main">
             <a:r>
-              <a:t>[Evidence boundary]</a:t>
-            </a:r>
-          </a:p>
-          <a:p xmlns:a="http://schemas.openxmlformats.org/drawingml/2006/main">
-            <a:r>
-              <a:t>- Russell, S., &amp; Norvig, P. *Artificial Intelligence: A Modern Approach*, 4th ed. Pearson, 2020, Ch 2. [出版社页面](https://www.pearson.com/en-us/subject-catalog/p/artificial-intelligence-a-modern-approach/P200000003500/9780134610993)。</a:t>
-            </a:r>
-          </a:p>
-          <a:p xmlns:a="http://schemas.openxmlformats.org/drawingml/2006/main">
-            <a:r>
-              <a:t>- Yao, S. et al. "ReAct: Synergizing Reasoning and Acting in Language Models." *ICLR 2023*. [会议页面](https://iclr.cc/virtual/2023/poster/11003)。</a:t>
-            </a:r>
-          </a:p>
-          <a:p xmlns:a="http://schemas.openxmlformats.org/drawingml/2006/main">
-            <a:r>
-              <a:t>- Amershi, S. et al. "Guidelines for Human-AI Interaction." *CHI 2019*. DOI: [10.1145/3290605.3300233](https://www.microsoft.com/en-us/research/publication/guidelines-for-human-ai-interaction/)。</a:t>
-            </a:r>
-          </a:p>
-          <a:p xmlns:a="http://schemas.openxmlformats.org/drawingml/2006/main">
-            <a:r>
-              <a:t>- Jimenez, C. E. et al. *SWE-bench*, ICLR 2024. [项目页面](https://www.swebench.com/original.html)。</a:t>
-            </a:r>
-          </a:p>
-          <a:p xmlns:a="http://schemas.openxmlformats.org/drawingml/2006/main">
-            <a:r>
-              <a:t>- 阅读规则见 [reading-list.md](../../course/reading-list.md) 第 10 课。</a:t>
-            </a:r>
-          </a:p>
-          <a:p xmlns:a="http://schemas.openxmlformats.org/drawingml/2006/main">
-            <a:r>
-              <a:t>- 本课非正式提交门（[assignments.md](../../course/assignments.md)）。</a:t>
+              <a:t>[Sources]</a:t>
             </a:r>
           </a:p>
           <a:p xmlns:a="http://schemas.openxmlformats.org/drawingml/2006/main">
@@ -1909,22 +2744,62 @@
           </a:p>
           <a:p xmlns:a="http://schemas.openxmlformats.org/drawingml/2006/main">
             <a:r>
-              <a:t>[Sources]</a:t>
-            </a:r>
-          </a:p>
-          <a:p xmlns:a="http://schemas.openxmlformats.org/drawingml/2006/main">
-            <a:r>
-              <a:t>- lessons/lesson-10/slides.md P17</a:t>
-            </a:r>
-          </a:p>
-          <a:p xmlns:a="http://schemas.openxmlformats.org/drawingml/2006/main">
-            <a:r>
-              <a:t>- lessons/lesson-10/handout.md §六 常见错误；§导读 第 11 课预告；退出卡</a:t>
-            </a:r>
-          </a:p>
-          <a:p xmlns:a="http://schemas.openxmlformats.org/drawingml/2006/main">
-            <a:r>
-              <a:t>- lessons/lesson-10/teaching-plan.md</a:t>
+              <a:t>- https://www.pearson.com/en-us/subject-catalog/p/artificial-intelligence-a-modern-approach/P200000003500/9780134610993</a:t>
+            </a:r>
+          </a:p>
+          <a:p xmlns:a="http://schemas.openxmlformats.org/drawingml/2006/main">
+            <a:r>
+              <a:t/>
+            </a:r>
+          </a:p>
+          <a:p xmlns:a="http://schemas.openxmlformats.org/drawingml/2006/main">
+            <a:r>
+              <a:t>- https://iclr.cc/virtual/2023/poster/11003</a:t>
+            </a:r>
+          </a:p>
+          <a:p xmlns:a="http://schemas.openxmlformats.org/drawingml/2006/main">
+            <a:r>
+              <a:t/>
+            </a:r>
+          </a:p>
+          <a:p xmlns:a="http://schemas.openxmlformats.org/drawingml/2006/main">
+            <a:r>
+              <a:t>- https://www.microsoft.com/en-us/research/publication/guidelines-for-human-ai-interaction/</a:t>
+            </a:r>
+          </a:p>
+          <a:p xmlns:a="http://schemas.openxmlformats.org/drawingml/2006/main">
+            <a:r>
+              <a:t/>
+            </a:r>
+          </a:p>
+          <a:p xmlns:a="http://schemas.openxmlformats.org/drawingml/2006/main">
+            <a:r>
+              <a:t>- https://www.swebench.com/original.html</a:t>
+            </a:r>
+          </a:p>
+          <a:p xmlns:a="http://schemas.openxmlformats.org/drawingml/2006/main">
+            <a:r>
+              <a:t/>
+            </a:r>
+          </a:p>
+          <a:p xmlns:a="http://schemas.openxmlformats.org/drawingml/2006/main">
+            <a:r>
+              <a:t>- 本课 handout.md 与 slides.md</a:t>
+            </a:r>
+          </a:p>
+          <a:p xmlns:a="http://schemas.openxmlformats.org/drawingml/2006/main">
+            <a:r>
+              <a:t/>
+            </a:r>
+          </a:p>
+          <a:p xmlns:a="http://schemas.openxmlformats.org/drawingml/2006/main">
+            <a:r>
+              <a:t>- ../../course/reading-card-case.md</a:t>
+            </a:r>
+          </a:p>
+          <a:p xmlns:a="http://schemas.openxmlformats.org/drawingml/2006/main">
+            <a:r>
+              <a:t/>
             </a:r>
           </a:p>
           <a:p xmlns:a="http://schemas.openxmlformats.org/drawingml/2006/main">
@@ -1999,6 +2874,36 @@
           <a:lstStyle xmlns:a="http://schemas.openxmlformats.org/drawingml/2006/main"/>
           <a:p xmlns:a="http://schemas.openxmlformats.org/drawingml/2006/main">
             <a:r>
+              <a:t>页面：P02 实验规格还没有约束 Agent 执行</a:t>
+            </a:r>
+          </a:p>
+          <a:p xmlns:a="http://schemas.openxmlformats.org/drawingml/2006/main">
+            <a:r>
+              <a:t/>
+            </a:r>
+          </a:p>
+          <a:p xmlns:a="http://schemas.openxmlformats.org/drawingml/2006/main">
+            <a:r>
+              <a:t>讲义位置：本课讲义；见逐页母稿映射表</a:t>
+            </a:r>
+          </a:p>
+          <a:p xmlns:a="http://schemas.openxmlformats.org/drawingml/2006/main">
+            <a:r>
+              <a:t/>
+            </a:r>
+          </a:p>
+          <a:p xmlns:a="http://schemas.openxmlformats.org/drawingml/2006/main">
+            <a:r>
+              <a:t>屏显核对：</a:t>
+            </a:r>
+          </a:p>
+          <a:p xmlns:a="http://schemas.openxmlformats.org/drawingml/2006/main">
+            <a:r>
+              <a:t>```text</a:t>
+            </a:r>
+          </a:p>
+          <a:p xmlns:a="http://schemas.openxmlformats.org/drawingml/2006/main">
+            <a:r>
               <a:t>实验规格还没有约束 Agent 执行</a:t>
             </a:r>
           </a:p>
@@ -2009,7 +2914,62 @@
           </a:p>
           <a:p xmlns:a="http://schemas.openxmlformats.org/drawingml/2006/main">
             <a:r>
-              <a:t>讲义对应：§一 受限 Agent 执行在研究链路中的位置；§导读（承接第 9 课）；§学习目标</a:t>
+              <a:t>实验规格</a:t>
+            </a:r>
+          </a:p>
+          <a:p xmlns:a="http://schemas.openxmlformats.org/drawingml/2006/main">
+            <a:r>
+              <a:t>→</a:t>
+            </a:r>
+          </a:p>
+          <a:p xmlns:a="http://schemas.openxmlformats.org/drawingml/2006/main">
+            <a:r>
+              <a:t>第 9 课输入</a:t>
+            </a:r>
+          </a:p>
+          <a:p xmlns:a="http://schemas.openxmlformats.org/drawingml/2006/main">
+            <a:r>
+              <a:t>任务契约</a:t>
+            </a:r>
+          </a:p>
+          <a:p xmlns:a="http://schemas.openxmlformats.org/drawingml/2006/main">
+            <a:r>
+              <a:t>→</a:t>
+            </a:r>
+          </a:p>
+          <a:p xmlns:a="http://schemas.openxmlformats.org/drawingml/2006/main">
+            <a:r>
+              <a:t>本课边界</a:t>
+            </a:r>
+          </a:p>
+          <a:p xmlns:a="http://schemas.openxmlformats.org/drawingml/2006/main">
+            <a:r>
+              <a:t>diff / 日志</a:t>
+            </a:r>
+          </a:p>
+          <a:p xmlns:a="http://schemas.openxmlformats.org/drawingml/2006/main">
+            <a:r>
+              <a:t>→</a:t>
+            </a:r>
+          </a:p>
+          <a:p xmlns:a="http://schemas.openxmlformats.org/drawingml/2006/main">
+            <a:r>
+              <a:t>一次受限执行</a:t>
+            </a:r>
+          </a:p>
+          <a:p xmlns:a="http://schemas.openxmlformats.org/drawingml/2006/main">
+            <a:r>
+              <a:t>冻结队列</a:t>
+            </a:r>
+          </a:p>
+          <a:p xmlns:a="http://schemas.openxmlformats.org/drawingml/2006/main">
+            <a:r>
+              <a:t>交给第 11 课</a:t>
+            </a:r>
+          </a:p>
+          <a:p xmlns:a="http://schemas.openxmlformats.org/drawingml/2006/main">
+            <a:r>
+              <a:t>```</a:t>
             </a:r>
           </a:p>
           <a:p xmlns:a="http://schemas.openxmlformats.org/drawingml/2006/main">
@@ -2019,7 +2979,17 @@
           </a:p>
           <a:p xmlns:a="http://schemas.openxmlformats.org/drawingml/2006/main">
             <a:r>
-              <a:t>[Teaching]</a:t>
+              <a:t>屏显来源页脚：来源：lesson-10/slides.md；课程工件与讲义见 speaker notes。</a:t>
+            </a:r>
+          </a:p>
+          <a:p xmlns:a="http://schemas.openxmlformats.org/drawingml/2006/main">
+            <a:r>
+              <a:t/>
+            </a:r>
+          </a:p>
+          <a:p xmlns:a="http://schemas.openxmlformats.org/drawingml/2006/main">
+            <a:r>
+              <a:t>教师讲述：</a:t>
             </a:r>
           </a:p>
           <a:p xmlns:a="http://schemas.openxmlformats.org/drawingml/2006/main">
@@ -2034,7 +3004,7 @@
           </a:p>
           <a:p xmlns:a="http://schemas.openxmlformats.org/drawingml/2006/main">
             <a:r>
-              <a:t>[Student action]</a:t>
+              <a:t>学生动作：</a:t>
             </a:r>
           </a:p>
           <a:p xmlns:a="http://schemas.openxmlformats.org/drawingml/2006/main">
@@ -2049,12 +3019,12 @@
           </a:p>
           <a:p xmlns:a="http://schemas.openxmlformats.org/drawingml/2006/main">
             <a:r>
-              <a:t>[Timing]</a:t>
-            </a:r>
-          </a:p>
-          <a:p xmlns:a="http://schemas.openxmlformats.org/drawingml/2006/main">
-            <a:r>
-              <a:t>5 分钟。</a:t>
+              <a:t>本课板书、诊断与串词：</a:t>
+            </a:r>
+          </a:p>
+          <a:p xmlns:a="http://schemas.openxmlformats.org/drawingml/2006/main">
+            <a:r>
+              <a:t>本节替换同类口头提示，不增加既有时段。开场诊断嵌入现有开场/回顾，后续再沿原实践时段操作。</a:t>
             </a:r>
           </a:p>
           <a:p xmlns:a="http://schemas.openxmlformats.org/drawingml/2006/main">
@@ -2064,7 +3034,47 @@
           </a:p>
           <a:p xmlns:a="http://schemas.openxmlformats.org/drawingml/2006/main">
             <a:r>
-              <a:t>[Evidence boundary]</a:t>
+              <a:t>- **板书主线**：任务 → 权限 → diff → 测试 → 人工审核。</a:t>
+            </a:r>
+          </a:p>
+          <a:p xmlns:a="http://schemas.openxmlformats.org/drawingml/2006/main">
+            <a:r>
+              <a:t>- **诊断问题**：测试通过后还需核对什么？</a:t>
+            </a:r>
+          </a:p>
+          <a:p xmlns:a="http://schemas.openxmlformats.org/drawingml/2006/main">
+            <a:r>
+              <a:t>- **预期回答**：核对改动范围、测试覆盖与研究语义。</a:t>
+            </a:r>
+          </a:p>
+          <a:p xmlns:a="http://schemas.openxmlformats.org/drawingml/2006/main">
+            <a:r>
+              <a:t>- **常见误答后的追问**：若把AGENTS声明当沙箱，要求指出真正拒绝动作的控制点。</a:t>
+            </a:r>
+          </a:p>
+          <a:p xmlns:a="http://schemas.openxmlformats.org/drawingml/2006/main">
+            <a:r>
+              <a:t>- **过渡串词**：“一个受限改动可检查后，再讨论多轮执行与失败恢复。”</a:t>
+            </a:r>
+          </a:p>
+          <a:p xmlns:a="http://schemas.openxmlformats.org/drawingml/2006/main">
+            <a:r>
+              <a:t>- **当堂最小产出**：一个任务契约和一条diff/测试审核结论。</a:t>
+            </a:r>
+          </a:p>
+          <a:p xmlns:a="http://schemas.openxmlformats.org/drawingml/2006/main">
+            <a:r>
+              <a:t>- **退出记录**：写“已完成的动作、本人项目仍缺的证据/工件、下次补齐位置”。使用教师包时标明课堂方法练习，不能据此宣称本人研究门通过；正式提交课次仍为第 6、9、13、16 课。</a:t>
+            </a:r>
+          </a:p>
+          <a:p xmlns:a="http://schemas.openxmlformats.org/drawingml/2006/main">
+            <a:r>
+              <a:t/>
+            </a:r>
+          </a:p>
+          <a:p xmlns:a="http://schemas.openxmlformats.org/drawingml/2006/main">
+            <a:r>
+              <a:t>来源与边界：</a:t>
             </a:r>
           </a:p>
           <a:p xmlns:a="http://schemas.openxmlformats.org/drawingml/2006/main">
@@ -2079,22 +3089,42 @@
           </a:p>
           <a:p xmlns:a="http://schemas.openxmlformats.org/drawingml/2006/main">
             <a:r>
+              <a:t>---</a:t>
+            </a:r>
+          </a:p>
+          <a:p xmlns:a="http://schemas.openxmlformats.org/drawingml/2006/main">
+            <a:r>
+              <a:t/>
+            </a:r>
+          </a:p>
+          <a:p xmlns:a="http://schemas.openxmlformats.org/drawingml/2006/main">
+            <a:r>
               <a:t>[Sources]</a:t>
             </a:r>
           </a:p>
           <a:p xmlns:a="http://schemas.openxmlformats.org/drawingml/2006/main">
             <a:r>
-              <a:t>- lessons/lesson-10/slides.md P02</a:t>
-            </a:r>
-          </a:p>
-          <a:p xmlns:a="http://schemas.openxmlformats.org/drawingml/2006/main">
-            <a:r>
-              <a:t>- lessons/lesson-10/handout.md §一 受限 Agent 执行在研究链路中的位置；§导读（承接第 9 课）；§学习目标</a:t>
-            </a:r>
-          </a:p>
-          <a:p xmlns:a="http://schemas.openxmlformats.org/drawingml/2006/main">
-            <a:r>
-              <a:t>- lessons/lesson-10/teaching-plan.md</a:t>
+              <a:t/>
+            </a:r>
+          </a:p>
+          <a:p xmlns:a="http://schemas.openxmlformats.org/drawingml/2006/main">
+            <a:r>
+              <a:t>- 本课 handout.md 与 slides.md</a:t>
+            </a:r>
+          </a:p>
+          <a:p xmlns:a="http://schemas.openxmlformats.org/drawingml/2006/main">
+            <a:r>
+              <a:t/>
+            </a:r>
+          </a:p>
+          <a:p xmlns:a="http://schemas.openxmlformats.org/drawingml/2006/main">
+            <a:r>
+              <a:t>- ../../course/reading-card-case.md</a:t>
+            </a:r>
+          </a:p>
+          <a:p xmlns:a="http://schemas.openxmlformats.org/drawingml/2006/main">
+            <a:r>
+              <a:t/>
             </a:r>
           </a:p>
           <a:p xmlns:a="http://schemas.openxmlformats.org/drawingml/2006/main">
@@ -2169,6 +3199,36 @@
           <a:lstStyle xmlns:a="http://schemas.openxmlformats.org/drawingml/2006/main"/>
           <a:p xmlns:a="http://schemas.openxmlformats.org/drawingml/2006/main">
             <a:r>
+              <a:t>页面：P03 模糊 prompt 让错误无法追溯</a:t>
+            </a:r>
+          </a:p>
+          <a:p xmlns:a="http://schemas.openxmlformats.org/drawingml/2006/main">
+            <a:r>
+              <a:t/>
+            </a:r>
+          </a:p>
+          <a:p xmlns:a="http://schemas.openxmlformats.org/drawingml/2006/main">
+            <a:r>
+              <a:t>讲义位置：本课讲义；见逐页母稿映射表</a:t>
+            </a:r>
+          </a:p>
+          <a:p xmlns:a="http://schemas.openxmlformats.org/drawingml/2006/main">
+            <a:r>
+              <a:t/>
+            </a:r>
+          </a:p>
+          <a:p xmlns:a="http://schemas.openxmlformats.org/drawingml/2006/main">
+            <a:r>
+              <a:t>屏显核对：</a:t>
+            </a:r>
+          </a:p>
+          <a:p xmlns:a="http://schemas.openxmlformats.org/drawingml/2006/main">
+            <a:r>
+              <a:t>```text</a:t>
+            </a:r>
+          </a:p>
+          <a:p xmlns:a="http://schemas.openxmlformats.org/drawingml/2006/main">
+            <a:r>
               <a:t>模糊 prompt 让错误无法追溯</a:t>
             </a:r>
           </a:p>
@@ -2179,7 +3239,52 @@
           </a:p>
           <a:p xmlns:a="http://schemas.openxmlformats.org/drawingml/2006/main">
             <a:r>
-              <a:t>讲义对应：§二·1 模糊 prompt 的问题</a:t>
+              <a:t>“帮我把 baseline 跑通，看看结果怎么样，有问题就改一下。”</a:t>
+            </a:r>
+          </a:p>
+          <a:p xmlns:a="http://schemas.openxmlformats.org/drawingml/2006/main">
+            <a:r>
+              <a:t>跑通</a:t>
+            </a:r>
+          </a:p>
+          <a:p xmlns:a="http://schemas.openxmlformats.org/drawingml/2006/main">
+            <a:r>
+              <a:t>可能修改无关代码</a:t>
+            </a:r>
+          </a:p>
+          <a:p xmlns:a="http://schemas.openxmlformats.org/drawingml/2006/main">
+            <a:r>
+              <a:t>结果怎么样</a:t>
+            </a:r>
+          </a:p>
+          <a:p xmlns:a="http://schemas.openxmlformats.org/drawingml/2006/main">
+            <a:r>
+              <a:t>可能把单次运行写成方法效应</a:t>
+            </a:r>
+          </a:p>
+          <a:p xmlns:a="http://schemas.openxmlformats.org/drawingml/2006/main">
+            <a:r>
+              <a:t>有问题</a:t>
+            </a:r>
+          </a:p>
+          <a:p xmlns:a="http://schemas.openxmlformats.org/drawingml/2006/main">
+            <a:r>
+              <a:t>可能跳过失败测试</a:t>
+            </a:r>
+          </a:p>
+          <a:p xmlns:a="http://schemas.openxmlformats.org/drawingml/2006/main">
+            <a:r>
+              <a:t>改一下</a:t>
+            </a:r>
+          </a:p>
+          <a:p xmlns:a="http://schemas.openxmlformats.org/drawingml/2006/main">
+            <a:r>
+              <a:t>可能改评价协议而非方法</a:t>
+            </a:r>
+          </a:p>
+          <a:p xmlns:a="http://schemas.openxmlformats.org/drawingml/2006/main">
+            <a:r>
+              <a:t>```</a:t>
             </a:r>
           </a:p>
           <a:p xmlns:a="http://schemas.openxmlformats.org/drawingml/2006/main">
@@ -2189,7 +3294,17 @@
           </a:p>
           <a:p xmlns:a="http://schemas.openxmlformats.org/drawingml/2006/main">
             <a:r>
-              <a:t>[Teaching]</a:t>
+              <a:t>屏显来源页脚：来源：lesson-10/slides.md；课程工件与讲义见 speaker notes。</a:t>
+            </a:r>
+          </a:p>
+          <a:p xmlns:a="http://schemas.openxmlformats.org/drawingml/2006/main">
+            <a:r>
+              <a:t/>
+            </a:r>
+          </a:p>
+          <a:p xmlns:a="http://schemas.openxmlformats.org/drawingml/2006/main">
+            <a:r>
+              <a:t>教师讲述：</a:t>
             </a:r>
           </a:p>
           <a:p xmlns:a="http://schemas.openxmlformats.org/drawingml/2006/main">
@@ -2204,7 +3319,7 @@
           </a:p>
           <a:p xmlns:a="http://schemas.openxmlformats.org/drawingml/2006/main">
             <a:r>
-              <a:t>[Student action]</a:t>
+              <a:t>学生动作：</a:t>
             </a:r>
           </a:p>
           <a:p xmlns:a="http://schemas.openxmlformats.org/drawingml/2006/main">
@@ -2219,12 +3334,12 @@
           </a:p>
           <a:p xmlns:a="http://schemas.openxmlformats.org/drawingml/2006/main">
             <a:r>
-              <a:t>[Timing]</a:t>
-            </a:r>
-          </a:p>
-          <a:p xmlns:a="http://schemas.openxmlformats.org/drawingml/2006/main">
-            <a:r>
-              <a:t>4 分钟。</a:t>
+              <a:t>来源与边界：</a:t>
+            </a:r>
+          </a:p>
+          <a:p xmlns:a="http://schemas.openxmlformats.org/drawingml/2006/main">
+            <a:r>
+              <a:t>讲义 §二·1。</a:t>
             </a:r>
           </a:p>
           <a:p xmlns:a="http://schemas.openxmlformats.org/drawingml/2006/main">
@@ -2234,12 +3349,7 @@
           </a:p>
           <a:p xmlns:a="http://schemas.openxmlformats.org/drawingml/2006/main">
             <a:r>
-              <a:t>[Evidence boundary]</a:t>
-            </a:r>
-          </a:p>
-          <a:p xmlns:a="http://schemas.openxmlformats.org/drawingml/2006/main">
-            <a:r>
-              <a:t>讲义 §二·1。</a:t>
+              <a:t>---</a:t>
             </a:r>
           </a:p>
           <a:p xmlns:a="http://schemas.openxmlformats.org/drawingml/2006/main">
@@ -2254,17 +3364,27 @@
           </a:p>
           <a:p xmlns:a="http://schemas.openxmlformats.org/drawingml/2006/main">
             <a:r>
-              <a:t>- lessons/lesson-10/slides.md P03</a:t>
-            </a:r>
-          </a:p>
-          <a:p xmlns:a="http://schemas.openxmlformats.org/drawingml/2006/main">
-            <a:r>
-              <a:t>- lessons/lesson-10/handout.md §二·1 模糊 prompt 的问题</a:t>
-            </a:r>
-          </a:p>
-          <a:p xmlns:a="http://schemas.openxmlformats.org/drawingml/2006/main">
-            <a:r>
-              <a:t>- lessons/lesson-10/teaching-plan.md</a:t>
+              <a:t/>
+            </a:r>
+          </a:p>
+          <a:p xmlns:a="http://schemas.openxmlformats.org/drawingml/2006/main">
+            <a:r>
+              <a:t>- 本课 handout.md 与 slides.md</a:t>
+            </a:r>
+          </a:p>
+          <a:p xmlns:a="http://schemas.openxmlformats.org/drawingml/2006/main">
+            <a:r>
+              <a:t/>
+            </a:r>
+          </a:p>
+          <a:p xmlns:a="http://schemas.openxmlformats.org/drawingml/2006/main">
+            <a:r>
+              <a:t>- ../../course/reading-card-case.md</a:t>
+            </a:r>
+          </a:p>
+          <a:p xmlns:a="http://schemas.openxmlformats.org/drawingml/2006/main">
+            <a:r>
+              <a:t/>
             </a:r>
           </a:p>
           <a:p xmlns:a="http://schemas.openxmlformats.org/drawingml/2006/main">
@@ -2339,7 +3459,7 @@
           <a:lstStyle xmlns:a="http://schemas.openxmlformats.org/drawingml/2006/main"/>
           <a:p xmlns:a="http://schemas.openxmlformats.org/drawingml/2006/main">
             <a:r>
-              <a:t>任务契约建立可检查边界</a:t>
+              <a:t>页面：P04 任务契约先缩到一个可检查改动</a:t>
             </a:r>
           </a:p>
           <a:p xmlns:a="http://schemas.openxmlformats.org/drawingml/2006/main">
@@ -2349,7 +3469,7 @@
           </a:p>
           <a:p xmlns:a="http://schemas.openxmlformats.org/drawingml/2006/main">
             <a:r>
-              <a:t>讲义对应：§二·2 任务契约五字段</a:t>
+              <a:t>讲义位置：handout.md §五、贯穿案例：把判断门实验规格的一步改写为受限 Agent 任务</a:t>
             </a:r>
           </a:p>
           <a:p xmlns:a="http://schemas.openxmlformats.org/drawingml/2006/main">
@@ -2359,12 +3479,27 @@
           </a:p>
           <a:p xmlns:a="http://schemas.openxmlformats.org/drawingml/2006/main">
             <a:r>
-              <a:t>[Teaching]</a:t>
-            </a:r>
-          </a:p>
-          <a:p xmlns:a="http://schemas.openxmlformats.org/drawingml/2006/main">
-            <a:r>
-              <a:t>五字段必须落到贯穿案例样例。重点演示：Context 不暴露最终 rubric 评分（防止 Agent 调整实现以迎合评分）；Permission 可写层只含 `src/generate.py`；Non-goal 防止任务膨胀；人工审核点是"停下来等确认"；失败恢复不重试到成功。任务契约写在项目里（`agent-tasks/&lt;task-id&gt;.md`），与 diff、日志、人工核验一起留存。</a:t>
+              <a:t>屏显核对：</a:t>
+            </a:r>
+          </a:p>
+          <a:p xmlns:a="http://schemas.openxmlformats.org/drawingml/2006/main">
+            <a:r>
+              <a:t>任务：为 normalize_record 补缺失字段检查。</a:t>
+            </a:r>
+          </a:p>
+          <a:p xmlns:a="http://schemas.openxmlformats.org/drawingml/2006/main">
+            <a:r>
+              <a:t>只改：after/generate.py；测试与样例数据只读。</a:t>
+            </a:r>
+          </a:p>
+          <a:p xmlns:a="http://schemas.openxmlformats.org/drawingml/2006/main">
+            <a:r>
+              <a:t>成功：正常输入通过；缺字段给明确错误。</a:t>
+            </a:r>
+          </a:p>
+          <a:p xmlns:a="http://schemas.openxmlformats.org/drawingml/2006/main">
+            <a:r>
+              <a:t>审核：先看候选 diff，再运行既定测试并核对日志。</a:t>
             </a:r>
           </a:p>
           <a:p xmlns:a="http://schemas.openxmlformats.org/drawingml/2006/main">
@@ -2374,12 +3509,12 @@
           </a:p>
           <a:p xmlns:a="http://schemas.openxmlformats.org/drawingml/2006/main">
             <a:r>
-              <a:t>[Student action]</a:t>
-            </a:r>
-          </a:p>
-          <a:p xmlns:a="http://schemas.openxmlformats.org/drawingml/2006/main">
-            <a:r>
-              <a:t>让学生用自己的"拟用 Agent"步骤尝试填写五字段。</a:t>
+              <a:t>教师讲述：</a:t>
+            </a:r>
+          </a:p>
+          <a:p xmlns:a="http://schemas.openxmlformats.org/drawingml/2006/main">
+            <a:r>
+              <a:t>演示的是受限代码修改与测试回放。教师若接入真实Agent，要保留真实调用记录；使用预置diff时如实标为回放。此工程改动不证明阅读卡降低遗漏率。</a:t>
             </a:r>
           </a:p>
           <a:p xmlns:a="http://schemas.openxmlformats.org/drawingml/2006/main">
@@ -2389,12 +3524,12 @@
           </a:p>
           <a:p xmlns:a="http://schemas.openxmlformats.org/drawingml/2006/main">
             <a:r>
-              <a:t>[Timing]</a:t>
-            </a:r>
-          </a:p>
-          <a:p xmlns:a="http://schemas.openxmlformats.org/drawingml/2006/main">
-            <a:r>
-              <a:t>4 分钟。</a:t>
+              <a:t>学生动作：</a:t>
+            </a:r>
+          </a:p>
+          <a:p xmlns:a="http://schemas.openxmlformats.org/drawingml/2006/main">
+            <a:r>
+              <a:t>预测缺字段输入会在哪一步失败，并指定允许改动的位置。</a:t>
             </a:r>
           </a:p>
           <a:p xmlns:a="http://schemas.openxmlformats.org/drawingml/2006/main">
@@ -2404,12 +3539,12 @@
           </a:p>
           <a:p xmlns:a="http://schemas.openxmlformats.org/drawingml/2006/main">
             <a:r>
-              <a:t>[Evidence boundary]</a:t>
-            </a:r>
-          </a:p>
-          <a:p xmlns:a="http://schemas.openxmlformats.org/drawingml/2006/main">
-            <a:r>
-              <a:t>讲义 §二·2；Russell &amp; Norvig 2020 Ch 2（[reading-list.md](../../course/reading-list.md) 第 10 课）。</a:t>
+              <a:t>来源与边界：</a:t>
+            </a:r>
+          </a:p>
+          <a:p xmlns:a="http://schemas.openxmlformats.org/drawingml/2006/main">
+            <a:r>
+              <a:t>./handout.md；课堂示例与构造数据见 ../../course/reading-card-case.md</a:t>
             </a:r>
           </a:p>
           <a:p xmlns:a="http://schemas.openxmlformats.org/drawingml/2006/main">
@@ -2424,17 +3559,27 @@
           </a:p>
           <a:p xmlns:a="http://schemas.openxmlformats.org/drawingml/2006/main">
             <a:r>
-              <a:t>- lessons/lesson-10/slides.md P04</a:t>
-            </a:r>
-          </a:p>
-          <a:p xmlns:a="http://schemas.openxmlformats.org/drawingml/2006/main">
-            <a:r>
-              <a:t>- lessons/lesson-10/handout.md §二·2 任务契约五字段</a:t>
-            </a:r>
-          </a:p>
-          <a:p xmlns:a="http://schemas.openxmlformats.org/drawingml/2006/main">
-            <a:r>
-              <a:t>- lessons/lesson-10/teaching-plan.md</a:t>
+              <a:t/>
+            </a:r>
+          </a:p>
+          <a:p xmlns:a="http://schemas.openxmlformats.org/drawingml/2006/main">
+            <a:r>
+              <a:t>- 本课 handout.md 与 slides.md</a:t>
+            </a:r>
+          </a:p>
+          <a:p xmlns:a="http://schemas.openxmlformats.org/drawingml/2006/main">
+            <a:r>
+              <a:t/>
+            </a:r>
+          </a:p>
+          <a:p xmlns:a="http://schemas.openxmlformats.org/drawingml/2006/main">
+            <a:r>
+              <a:t>- ../../course/reading-card-case.md</a:t>
+            </a:r>
+          </a:p>
+          <a:p xmlns:a="http://schemas.openxmlformats.org/drawingml/2006/main">
+            <a:r>
+              <a:t/>
             </a:r>
           </a:p>
           <a:p xmlns:a="http://schemas.openxmlformats.org/drawingml/2006/main">
@@ -2509,7 +3654,7 @@
           <a:lstStyle xmlns:a="http://schemas.openxmlformats.org/drawingml/2006/main"/>
           <a:p xmlns:a="http://schemas.openxmlformats.org/drawingml/2006/main">
             <a:r>
-              <a:t>任务契约把请求改写为可追溯执行</a:t>
+              <a:t>页面：P05 任务契约把请求改写为可追溯执行</a:t>
             </a:r>
           </a:p>
           <a:p xmlns:a="http://schemas.openxmlformats.org/drawingml/2006/main">
@@ -2519,7 +3664,7 @@
           </a:p>
           <a:p xmlns:a="http://schemas.openxmlformats.org/drawingml/2006/main">
             <a:r>
-              <a:t>讲义对应：§二·3 模糊 prompt 与任务契约的对照</a:t>
+              <a:t>讲义位置：本课讲义；见逐页母稿映射表</a:t>
             </a:r>
           </a:p>
           <a:p xmlns:a="http://schemas.openxmlformats.org/drawingml/2006/main">
@@ -2529,7 +3674,57 @@
           </a:p>
           <a:p xmlns:a="http://schemas.openxmlformats.org/drawingml/2006/main">
             <a:r>
-              <a:t>[Teaching]</a:t>
+              <a:t>屏显核对：</a:t>
+            </a:r>
+          </a:p>
+          <a:p xmlns:a="http://schemas.openxmlformats.org/drawingml/2006/main">
+            <a:r>
+              <a:t>| 含混请求 | 可执行的任务契约 |</a:t>
+            </a:r>
+          </a:p>
+          <a:p xmlns:a="http://schemas.openxmlformats.org/drawingml/2006/main">
+            <a:r>
+              <a:t>| --- | --- |</a:t>
+            </a:r>
+          </a:p>
+          <a:p xmlns:a="http://schemas.openxmlformats.org/drawingml/2006/main">
+            <a:r>
+              <a:t>| “帮我把代码修好” | 补 normalize_record 的缺失字段检查 |</a:t>
+            </a:r>
+          </a:p>
+          <a:p xmlns:a="http://schemas.openxmlformats.org/drawingml/2006/main">
+            <a:r>
+              <a:t>| 没有修改范围 | 只改 after/generate.py |</a:t>
+            </a:r>
+          </a:p>
+          <a:p xmlns:a="http://schemas.openxmlformats.org/drawingml/2006/main">
+            <a:r>
+              <a:t>| “结果能用就行” | 既定两项测试通过，人工检查 diff |</a:t>
+            </a:r>
+          </a:p>
+          <a:p xmlns:a="http://schemas.openxmlformats.org/drawingml/2006/main">
+            <a:r>
+              <a:t>| 出错后继续尝试 | 越权或测试失败时停止并留日志 |</a:t>
+            </a:r>
+          </a:p>
+          <a:p xmlns:a="http://schemas.openxmlformats.org/drawingml/2006/main">
+            <a:r>
+              <a:t/>
+            </a:r>
+          </a:p>
+          <a:p xmlns:a="http://schemas.openxmlformats.org/drawingml/2006/main">
+            <a:r>
+              <a:t>测试、fixture 与评价标准保持只读。</a:t>
+            </a:r>
+          </a:p>
+          <a:p xmlns:a="http://schemas.openxmlformats.org/drawingml/2006/main">
+            <a:r>
+              <a:t/>
+            </a:r>
+          </a:p>
+          <a:p xmlns:a="http://schemas.openxmlformats.org/drawingml/2006/main">
+            <a:r>
+              <a:t>教师讲述：</a:t>
             </a:r>
           </a:p>
           <a:p xmlns:a="http://schemas.openxmlformats.org/drawingml/2006/main">
@@ -2544,7 +3739,7 @@
           </a:p>
           <a:p xmlns:a="http://schemas.openxmlformats.org/drawingml/2006/main">
             <a:r>
-              <a:t>[Student action]</a:t>
+              <a:t>学生动作：</a:t>
             </a:r>
           </a:p>
           <a:p xmlns:a="http://schemas.openxmlformats.org/drawingml/2006/main">
@@ -2559,12 +3754,12 @@
           </a:p>
           <a:p xmlns:a="http://schemas.openxmlformats.org/drawingml/2006/main">
             <a:r>
-              <a:t>[Timing]</a:t>
-            </a:r>
-          </a:p>
-          <a:p xmlns:a="http://schemas.openxmlformats.org/drawingml/2006/main">
-            <a:r>
-              <a:t>4 分钟。</a:t>
+              <a:t>来源与边界：</a:t>
+            </a:r>
+          </a:p>
+          <a:p xmlns:a="http://schemas.openxmlformats.org/drawingml/2006/main">
+            <a:r>
+              <a:t>讲义 §二·3；Russell &amp; Norvig 2020 Ch 2（[reading-list.md](../../course/reading-list.md) 第 10 课）。</a:t>
             </a:r>
           </a:p>
           <a:p xmlns:a="http://schemas.openxmlformats.org/drawingml/2006/main">
@@ -2574,12 +3769,7 @@
           </a:p>
           <a:p xmlns:a="http://schemas.openxmlformats.org/drawingml/2006/main">
             <a:r>
-              <a:t>[Evidence boundary]</a:t>
-            </a:r>
-          </a:p>
-          <a:p xmlns:a="http://schemas.openxmlformats.org/drawingml/2006/main">
-            <a:r>
-              <a:t>讲义 §二·3；Russell &amp; Norvig 2020 Ch 2（[reading-list.md](../../course/reading-list.md) 第 10 课）。</a:t>
+              <a:t>---</a:t>
             </a:r>
           </a:p>
           <a:p xmlns:a="http://schemas.openxmlformats.org/drawingml/2006/main">
@@ -2594,17 +3784,27 @@
           </a:p>
           <a:p xmlns:a="http://schemas.openxmlformats.org/drawingml/2006/main">
             <a:r>
-              <a:t>- lessons/lesson-10/slides.md P05</a:t>
-            </a:r>
-          </a:p>
-          <a:p xmlns:a="http://schemas.openxmlformats.org/drawingml/2006/main">
-            <a:r>
-              <a:t>- lessons/lesson-10/handout.md §二·3 模糊 prompt 与任务契约的对照</a:t>
-            </a:r>
-          </a:p>
-          <a:p xmlns:a="http://schemas.openxmlformats.org/drawingml/2006/main">
-            <a:r>
-              <a:t>- lessons/lesson-10/teaching-plan.md</a:t>
+              <a:t/>
+            </a:r>
+          </a:p>
+          <a:p xmlns:a="http://schemas.openxmlformats.org/drawingml/2006/main">
+            <a:r>
+              <a:t>- 本课 handout.md 与 slides.md</a:t>
+            </a:r>
+          </a:p>
+          <a:p xmlns:a="http://schemas.openxmlformats.org/drawingml/2006/main">
+            <a:r>
+              <a:t/>
+            </a:r>
+          </a:p>
+          <a:p xmlns:a="http://schemas.openxmlformats.org/drawingml/2006/main">
+            <a:r>
+              <a:t>- ../../course/reading-card-case.md</a:t>
+            </a:r>
+          </a:p>
+          <a:p xmlns:a="http://schemas.openxmlformats.org/drawingml/2006/main">
+            <a:r>
+              <a:t/>
             </a:r>
           </a:p>
           <a:p xmlns:a="http://schemas.openxmlformats.org/drawingml/2006/main">
@@ -2679,7 +3879,7 @@
           <a:lstStyle xmlns:a="http://schemas.openxmlformats.org/drawingml/2006/main"/>
           <a:p xmlns:a="http://schemas.openxmlformats.org/drawingml/2006/main">
             <a:r>
-              <a:t>任务级权限与真正停住的审核点</a:t>
+              <a:t>页面：P06 授权声明还要落实到执行检查</a:t>
             </a:r>
           </a:p>
           <a:p xmlns:a="http://schemas.openxmlformats.org/drawingml/2006/main">
@@ -2689,7 +3889,7 @@
           </a:p>
           <a:p xmlns:a="http://schemas.openxmlformats.org/drawingml/2006/main">
             <a:r>
-              <a:t>讲义对应：§三·1 最小权限原则的回归；§三·2 人工审核点的位置</a:t>
+              <a:t>讲义位置：handout.md §五、贯穿案例：把判断门实验规格的一步改写为受限 Agent 任务</a:t>
             </a:r>
           </a:p>
           <a:p xmlns:a="http://schemas.openxmlformats.org/drawingml/2006/main">
@@ -2699,12 +3899,22 @@
           </a:p>
           <a:p xmlns:a="http://schemas.openxmlformats.org/drawingml/2006/main">
             <a:r>
-              <a:t>[Teaching]</a:t>
-            </a:r>
-          </a:p>
-          <a:p xmlns:a="http://schemas.openxmlformats.org/drawingml/2006/main">
-            <a:r>
-              <a:t>本课把最小权限从项目级落到任务级，任务结束后收回权限。屏显 configs/rubric 进入“需确认”表示提出变更时先停下：本次受限调试任务不能自行修改评价协议，获准变更也必须作为另一个研究决定更新规格并重新冻结，不能混入同一评价队列。结果、私有 notes 与外传仍属禁止范围。</a:t>
+              <a:t>屏显核对：</a:t>
+            </a:r>
+          </a:p>
+          <a:p xmlns:a="http://schemas.openxmlformats.org/drawingml/2006/main">
+            <a:r>
+              <a:t>声明：允许读取、修改和执行的范围。</a:t>
+            </a:r>
+          </a:p>
+          <a:p xmlns:a="http://schemas.openxmlformats.org/drawingml/2006/main">
+            <a:r>
+              <a:t>控制：工具层限制与人工审核点。</a:t>
+            </a:r>
+          </a:p>
+          <a:p xmlns:a="http://schemas.openxmlformats.org/drawingml/2006/main">
+            <a:r>
+              <a:t>证据：实际 diff、执行命令、测试与事件记录。</a:t>
             </a:r>
           </a:p>
           <a:p xmlns:a="http://schemas.openxmlformats.org/drawingml/2006/main">
@@ -2714,12 +3924,7 @@
           </a:p>
           <a:p xmlns:a="http://schemas.openxmlformats.org/drawingml/2006/main">
             <a:r>
-              <a:t>[Student action]</a:t>
-            </a:r>
-          </a:p>
-          <a:p xmlns:a="http://schemas.openxmlformats.org/drawingml/2006/main">
-            <a:r>
-              <a:t>让学生检查自己五字段中"可写"是否过宽——是否包含整个 `src/` 而不是具体文件？并标出至少四个审核点。</a:t>
+              <a:t>写进 AGENTS.md，不等于自动获得隔离。</a:t>
             </a:r>
           </a:p>
           <a:p xmlns:a="http://schemas.openxmlformats.org/drawingml/2006/main">
@@ -2729,12 +3934,12 @@
           </a:p>
           <a:p xmlns:a="http://schemas.openxmlformats.org/drawingml/2006/main">
             <a:r>
-              <a:t>[Timing]</a:t>
-            </a:r>
-          </a:p>
-          <a:p xmlns:a="http://schemas.openxmlformats.org/drawingml/2006/main">
-            <a:r>
-              <a:t>2 分钟。</a:t>
+              <a:t>教师讲述：</a:t>
+            </a:r>
+          </a:p>
+          <a:p xmlns:a="http://schemas.openxmlformats.org/drawingml/2006/main">
+            <a:r>
+              <a:t>用本课实际unittest入口说明什么执行得到授权。要求学生指出真正会停住的控制点。预置脚本接口只能证明接口拒绝，不能声称阻止任意直接文件访问。</a:t>
             </a:r>
           </a:p>
           <a:p xmlns:a="http://schemas.openxmlformats.org/drawingml/2006/main">
@@ -2744,12 +3949,12 @@
           </a:p>
           <a:p xmlns:a="http://schemas.openxmlformats.org/drawingml/2006/main">
             <a:r>
-              <a:t>[Evidence boundary]</a:t>
-            </a:r>
-          </a:p>
-          <a:p xmlns:a="http://schemas.openxmlformats.org/drawingml/2006/main">
-            <a:r>
-              <a:t>直接来源：[正式来源](https://www.microsoft.com/en-us/research/publication/guidelines-for-human-ai-interaction/)。</a:t>
+              <a:t>学生动作：</a:t>
+            </a:r>
+          </a:p>
+          <a:p xmlns:a="http://schemas.openxmlformats.org/drawingml/2006/main">
+            <a:r>
+              <a:t>为一个动作分别指出声明、控制和观察证据。</a:t>
             </a:r>
           </a:p>
           <a:p xmlns:a="http://schemas.openxmlformats.org/drawingml/2006/main">
@@ -2759,7 +3964,12 @@
           </a:p>
           <a:p xmlns:a="http://schemas.openxmlformats.org/drawingml/2006/main">
             <a:r>
-              <a:t>讲义 §三·1 与 §三·2；第 1 课 §四·3 最小权限原则；Amershi et al. CHI 2019（[reading-list.md](../../course/reading-list.md) 第 10 课）；第 9 课 §三·2 停止条件。</a:t>
+              <a:t>来源与边界：</a:t>
+            </a:r>
+          </a:p>
+          <a:p xmlns:a="http://schemas.openxmlformats.org/drawingml/2006/main">
+            <a:r>
+              <a:t>./handout.md；课堂示例与构造数据见 ../../course/reading-card-case.md</a:t>
             </a:r>
           </a:p>
           <a:p xmlns:a="http://schemas.openxmlformats.org/drawingml/2006/main">
@@ -2774,22 +3984,37 @@
           </a:p>
           <a:p xmlns:a="http://schemas.openxmlformats.org/drawingml/2006/main">
             <a:r>
-              <a:t>- lessons/lesson-10/slides.md P06</a:t>
-            </a:r>
-          </a:p>
-          <a:p xmlns:a="http://schemas.openxmlformats.org/drawingml/2006/main">
-            <a:r>
-              <a:t>- lessons/lesson-10/handout.md §三·1 最小权限原则的回归；§三·2 人工审核点的位置</a:t>
-            </a:r>
-          </a:p>
-          <a:p xmlns:a="http://schemas.openxmlformats.org/drawingml/2006/main">
-            <a:r>
-              <a:t>- lessons/lesson-10/teaching-plan.md</a:t>
+              <a:t/>
             </a:r>
           </a:p>
           <a:p xmlns:a="http://schemas.openxmlformats.org/drawingml/2006/main">
             <a:r>
               <a:t>- https://www.microsoft.com/en-us/research/publication/guidelines-for-human-ai-interaction/</a:t>
+            </a:r>
+          </a:p>
+          <a:p xmlns:a="http://schemas.openxmlformats.org/drawingml/2006/main">
+            <a:r>
+              <a:t/>
+            </a:r>
+          </a:p>
+          <a:p xmlns:a="http://schemas.openxmlformats.org/drawingml/2006/main">
+            <a:r>
+              <a:t>- 本课 handout.md 与 slides.md</a:t>
+            </a:r>
+          </a:p>
+          <a:p xmlns:a="http://schemas.openxmlformats.org/drawingml/2006/main">
+            <a:r>
+              <a:t/>
+            </a:r>
+          </a:p>
+          <a:p xmlns:a="http://schemas.openxmlformats.org/drawingml/2006/main">
+            <a:r>
+              <a:t>- ../../course/reading-card-case.md</a:t>
+            </a:r>
+          </a:p>
+          <a:p xmlns:a="http://schemas.openxmlformats.org/drawingml/2006/main">
+            <a:r>
+              <a:t/>
             </a:r>
           </a:p>
           <a:p xmlns:a="http://schemas.openxmlformats.org/drawingml/2006/main">
@@ -2864,6 +4089,36 @@
           <a:lstStyle xmlns:a="http://schemas.openxmlformats.org/drawingml/2006/main"/>
           <a:p xmlns:a="http://schemas.openxmlformats.org/drawingml/2006/main">
             <a:r>
+              <a:t>页面：P07 错误循环需要可见的失败恢复</a:t>
+            </a:r>
+          </a:p>
+          <a:p xmlns:a="http://schemas.openxmlformats.org/drawingml/2006/main">
+            <a:r>
+              <a:t/>
+            </a:r>
+          </a:p>
+          <a:p xmlns:a="http://schemas.openxmlformats.org/drawingml/2006/main">
+            <a:r>
+              <a:t>讲义位置：本课讲义；见逐页母稿映射表</a:t>
+            </a:r>
+          </a:p>
+          <a:p xmlns:a="http://schemas.openxmlformats.org/drawingml/2006/main">
+            <a:r>
+              <a:t/>
+            </a:r>
+          </a:p>
+          <a:p xmlns:a="http://schemas.openxmlformats.org/drawingml/2006/main">
+            <a:r>
+              <a:t>屏显核对：</a:t>
+            </a:r>
+          </a:p>
+          <a:p xmlns:a="http://schemas.openxmlformats.org/drawingml/2006/main">
+            <a:r>
+              <a:t>```text</a:t>
+            </a:r>
+          </a:p>
+          <a:p xmlns:a="http://schemas.openxmlformats.org/drawingml/2006/main">
+            <a:r>
               <a:t>错误循环需要可见的失败恢复</a:t>
             </a:r>
           </a:p>
@@ -2874,7 +4129,72 @@
           </a:p>
           <a:p xmlns:a="http://schemas.openxmlformats.org/drawingml/2006/main">
             <a:r>
-              <a:t>讲义对应：§二·4 ReAct 循环与错误传播；§三·3 为什么要预先写停止与确认；§三·4 失败恢复</a:t>
+              <a:t>Reasoning</a:t>
+            </a:r>
+          </a:p>
+          <a:p xmlns:a="http://schemas.openxmlformats.org/drawingml/2006/main">
+            <a:r>
+              <a:t>→</a:t>
+            </a:r>
+          </a:p>
+          <a:p xmlns:a="http://schemas.openxmlformats.org/drawingml/2006/main">
+            <a:r>
+              <a:t>推理可能错</a:t>
+            </a:r>
+          </a:p>
+          <a:p xmlns:a="http://schemas.openxmlformats.org/drawingml/2006/main">
+            <a:r>
+              <a:t>Action</a:t>
+            </a:r>
+          </a:p>
+          <a:p xmlns:a="http://schemas.openxmlformats.org/drawingml/2006/main">
+            <a:r>
+              <a:t>→</a:t>
+            </a:r>
+          </a:p>
+          <a:p xmlns:a="http://schemas.openxmlformats.org/drawingml/2006/main">
+            <a:r>
+              <a:t>行动可能越权</a:t>
+            </a:r>
+          </a:p>
+          <a:p xmlns:a="http://schemas.openxmlformats.org/drawingml/2006/main">
+            <a:r>
+              <a:t>Observation</a:t>
+            </a:r>
+          </a:p>
+          <a:p xmlns:a="http://schemas.openxmlformats.org/drawingml/2006/main">
+            <a:r>
+              <a:t>→</a:t>
+            </a:r>
+          </a:p>
+          <a:p xmlns:a="http://schemas.openxmlformats.org/drawingml/2006/main">
+            <a:r>
+              <a:t>观察可能误导</a:t>
+            </a:r>
+          </a:p>
+          <a:p xmlns:a="http://schemas.openxmlformats.org/drawingml/2006/main">
+            <a:r>
+              <a:t>停止并记录</a:t>
+            </a:r>
+          </a:p>
+          <a:p xmlns:a="http://schemas.openxmlformats.org/drawingml/2006/main">
+            <a:r>
+              <a:t>阻断错误传播</a:t>
+            </a:r>
+          </a:p>
+          <a:p xmlns:a="http://schemas.openxmlformats.org/drawingml/2006/main">
+            <a:r>
+              <a:t>超时 / 无法解析 / 工具失败 / 越权 / 测试失败</a:t>
+            </a:r>
+          </a:p>
+          <a:p xmlns:a="http://schemas.openxmlformats.org/drawingml/2006/main">
+            <a:r>
+              <a:t>删除失败日志属于伪造实验记录。</a:t>
+            </a:r>
+          </a:p>
+          <a:p xmlns:a="http://schemas.openxmlformats.org/drawingml/2006/main">
+            <a:r>
+              <a:t>```</a:t>
             </a:r>
           </a:p>
           <a:p xmlns:a="http://schemas.openxmlformats.org/drawingml/2006/main">
@@ -2884,7 +4204,17 @@
           </a:p>
           <a:p xmlns:a="http://schemas.openxmlformats.org/drawingml/2006/main">
             <a:r>
-              <a:t>[Teaching]</a:t>
+              <a:t>屏显来源页脚：来源：Yao et al., 2023（ReAct）；课程处理口径详见 speaker notes。</a:t>
+            </a:r>
+          </a:p>
+          <a:p xmlns:a="http://schemas.openxmlformats.org/drawingml/2006/main">
+            <a:r>
+              <a:t/>
+            </a:r>
+          </a:p>
+          <a:p xmlns:a="http://schemas.openxmlformats.org/drawingml/2006/main">
+            <a:r>
+              <a:t>教师讲述：</a:t>
             </a:r>
           </a:p>
           <a:p xmlns:a="http://schemas.openxmlformats.org/drawingml/2006/main">
@@ -2899,7 +4229,7 @@
           </a:p>
           <a:p xmlns:a="http://schemas.openxmlformats.org/drawingml/2006/main">
             <a:r>
-              <a:t>[Student action]</a:t>
+              <a:t>学生动作：</a:t>
             </a:r>
           </a:p>
           <a:p xmlns:a="http://schemas.openxmlformats.org/drawingml/2006/main">
@@ -2914,12 +4244,12 @@
           </a:p>
           <a:p xmlns:a="http://schemas.openxmlformats.org/drawingml/2006/main">
             <a:r>
-              <a:t>[Timing]</a:t>
-            </a:r>
-          </a:p>
-          <a:p xmlns:a="http://schemas.openxmlformats.org/drawingml/2006/main">
-            <a:r>
-              <a:t>2 分钟。</a:t>
+              <a:t>来源与边界：</a:t>
+            </a:r>
+          </a:p>
+          <a:p xmlns:a="http://schemas.openxmlformats.org/drawingml/2006/main">
+            <a:r>
+              <a:t>直接来源：[正式来源](https://iclr.cc/virtual/2023/poster/11003)。</a:t>
             </a:r>
           </a:p>
           <a:p xmlns:a="http://schemas.openxmlformats.org/drawingml/2006/main">
@@ -2929,12 +4259,7 @@
           </a:p>
           <a:p xmlns:a="http://schemas.openxmlformats.org/drawingml/2006/main">
             <a:r>
-              <a:t>[Evidence boundary]</a:t>
-            </a:r>
-          </a:p>
-          <a:p xmlns:a="http://schemas.openxmlformats.org/drawingml/2006/main">
-            <a:r>
-              <a:t>直接来源：[正式来源](https://iclr.cc/virtual/2023/poster/11003)。</a:t>
+              <a:t>讲义 §二·4 与 §三·4；Yao et al. ReAct ICLR 2023（[reading-list.md](../../course/reading-list.md) 第 10 课）；[assessment.md](../../course/assessment.md) 学术规范红线。</a:t>
             </a:r>
           </a:p>
           <a:p xmlns:a="http://schemas.openxmlformats.org/drawingml/2006/main">
@@ -2944,7 +4269,7 @@
           </a:p>
           <a:p xmlns:a="http://schemas.openxmlformats.org/drawingml/2006/main">
             <a:r>
-              <a:t>讲义 §二·4 与 §三·4；Yao et al. ReAct ICLR 2023（[reading-list.md](../../course/reading-list.md) 第 10 课）；[assessment.md](../../course/assessment.md) 学术规范红线。</a:t>
+              <a:t>---</a:t>
             </a:r>
           </a:p>
           <a:p xmlns:a="http://schemas.openxmlformats.org/drawingml/2006/main">
@@ -2959,22 +4284,37 @@
           </a:p>
           <a:p xmlns:a="http://schemas.openxmlformats.org/drawingml/2006/main">
             <a:r>
-              <a:t>- lessons/lesson-10/slides.md P07</a:t>
-            </a:r>
-          </a:p>
-          <a:p xmlns:a="http://schemas.openxmlformats.org/drawingml/2006/main">
-            <a:r>
-              <a:t>- lessons/lesson-10/handout.md §二·4 ReAct 循环与错误传播；§三·3 为什么要预先写停止与确认；§三·4 失败恢复</a:t>
-            </a:r>
-          </a:p>
-          <a:p xmlns:a="http://schemas.openxmlformats.org/drawingml/2006/main">
-            <a:r>
-              <a:t>- lessons/lesson-10/teaching-plan.md</a:t>
+              <a:t/>
             </a:r>
           </a:p>
           <a:p xmlns:a="http://schemas.openxmlformats.org/drawingml/2006/main">
             <a:r>
               <a:t>- https://iclr.cc/virtual/2023/poster/11003</a:t>
+            </a:r>
+          </a:p>
+          <a:p xmlns:a="http://schemas.openxmlformats.org/drawingml/2006/main">
+            <a:r>
+              <a:t/>
+            </a:r>
+          </a:p>
+          <a:p xmlns:a="http://schemas.openxmlformats.org/drawingml/2006/main">
+            <a:r>
+              <a:t>- 本课 handout.md 与 slides.md</a:t>
+            </a:r>
+          </a:p>
+          <a:p xmlns:a="http://schemas.openxmlformats.org/drawingml/2006/main">
+            <a:r>
+              <a:t/>
+            </a:r>
+          </a:p>
+          <a:p xmlns:a="http://schemas.openxmlformats.org/drawingml/2006/main">
+            <a:r>
+              <a:t>- ../../course/reading-card-case.md</a:t>
+            </a:r>
+          </a:p>
+          <a:p xmlns:a="http://schemas.openxmlformats.org/drawingml/2006/main">
+            <a:r>
+              <a:t/>
             </a:r>
           </a:p>
           <a:p xmlns:a="http://schemas.openxmlformats.org/drawingml/2006/main">
@@ -3049,6 +4389,36 @@
           <a:lstStyle xmlns:a="http://schemas.openxmlformats.org/drawingml/2006/main"/>
           <a:p xmlns:a="http://schemas.openxmlformats.org/drawingml/2006/main">
             <a:r>
+              <a:t>页面：P08 用 diff 与测试审查候选实现</a:t>
+            </a:r>
+          </a:p>
+          <a:p xmlns:a="http://schemas.openxmlformats.org/drawingml/2006/main">
+            <a:r>
+              <a:t/>
+            </a:r>
+          </a:p>
+          <a:p xmlns:a="http://schemas.openxmlformats.org/drawingml/2006/main">
+            <a:r>
+              <a:t>讲义位置：本课讲义；见逐页母稿映射表</a:t>
+            </a:r>
+          </a:p>
+          <a:p xmlns:a="http://schemas.openxmlformats.org/drawingml/2006/main">
+            <a:r>
+              <a:t/>
+            </a:r>
+          </a:p>
+          <a:p xmlns:a="http://schemas.openxmlformats.org/drawingml/2006/main">
+            <a:r>
+              <a:t>屏显核对：</a:t>
+            </a:r>
+          </a:p>
+          <a:p xmlns:a="http://schemas.openxmlformats.org/drawingml/2006/main">
+            <a:r>
+              <a:t>```text</a:t>
+            </a:r>
+          </a:p>
+          <a:p xmlns:a="http://schemas.openxmlformats.org/drawingml/2006/main">
+            <a:r>
               <a:t>用 diff 与测试审查候选实现</a:t>
             </a:r>
           </a:p>
@@ -3059,7 +4429,72 @@
           </a:p>
           <a:p xmlns:a="http://schemas.openxmlformats.org/drawingml/2006/main">
             <a:r>
-              <a:t>讲义对应：§四·1 Agent 输出是候选，不是事实；§四·3 diff 审查清单</a:t>
+              <a:t>generate.diff｜真实代码</a:t>
+            </a:r>
+          </a:p>
+          <a:p xmlns:a="http://schemas.openxmlformats.org/drawingml/2006/main">
+            <a:r>
+              <a:t>+ REQUIRED_FIELDS = ("paper_id", "summary")</a:t>
+            </a:r>
+          </a:p>
+          <a:p xmlns:a="http://schemas.openxmlformats.org/drawingml/2006/main">
+            <a:r>
+              <a:t>  def normalize_record(record):</a:t>
+            </a:r>
+          </a:p>
+          <a:p xmlns:a="http://schemas.openxmlformats.org/drawingml/2006/main">
+            <a:r>
+              <a:t>+   missing = [field for field in REQUIRED_FIELDS</a:t>
+            </a:r>
+          </a:p>
+          <a:p xmlns:a="http://schemas.openxmlformats.org/drawingml/2006/main">
+            <a:r>
+              <a:t>+              if field not in record]</a:t>
+            </a:r>
+          </a:p>
+          <a:p xmlns:a="http://schemas.openxmlformats.org/drawingml/2006/main">
+            <a:r>
+              <a:t>+   if missing: raise ValueError("missing required fields")</a:t>
+            </a:r>
+          </a:p>
+          <a:p xmlns:a="http://schemas.openxmlformats.org/drawingml/2006/main">
+            <a:r>
+              <a:t>    return {"paper_id": record["paper_id"],</a:t>
+            </a:r>
+          </a:p>
+          <a:p xmlns:a="http://schemas.openxmlformats.org/drawingml/2006/main">
+            <a:r>
+              <a:t>            "summary": record["summary"].strip()}</a:t>
+            </a:r>
+          </a:p>
+          <a:p xmlns:a="http://schemas.openxmlformats.org/drawingml/2006/main">
+            <a:r>
+              <a:t>人工审核</a:t>
+            </a:r>
+          </a:p>
+          <a:p xmlns:a="http://schemas.openxmlformats.org/drawingml/2006/main">
+            <a:r>
+              <a:t>✓ 只改授权文件</a:t>
+            </a:r>
+          </a:p>
+          <a:p xmlns:a="http://schemas.openxmlformats.org/drawingml/2006/main">
+            <a:r>
+              <a:t>✓ 未改评价协议</a:t>
+            </a:r>
+          </a:p>
+          <a:p xmlns:a="http://schemas.openxmlformats.org/drawingml/2006/main">
+            <a:r>
+              <a:t>✓ 缺字段明确失败</a:t>
+            </a:r>
+          </a:p>
+          <a:p xmlns:a="http://schemas.openxmlformats.org/drawingml/2006/main">
+            <a:r>
+              <a:t>✓ 测试覆盖关键路径</a:t>
+            </a:r>
+          </a:p>
+          <a:p xmlns:a="http://schemas.openxmlformats.org/drawingml/2006/main">
+            <a:r>
+              <a:t>```</a:t>
             </a:r>
           </a:p>
           <a:p xmlns:a="http://schemas.openxmlformats.org/drawingml/2006/main">
@@ -3069,7 +4504,17 @@
           </a:p>
           <a:p xmlns:a="http://schemas.openxmlformats.org/drawingml/2006/main">
             <a:r>
-              <a:t>[Teaching]</a:t>
+              <a:t>屏显来源页脚：来源：lesson-10/slides.md；课程工件与讲义见 speaker notes。</a:t>
+            </a:r>
+          </a:p>
+          <a:p xmlns:a="http://schemas.openxmlformats.org/drawingml/2006/main">
+            <a:r>
+              <a:t/>
+            </a:r>
+          </a:p>
+          <a:p xmlns:a="http://schemas.openxmlformats.org/drawingml/2006/main">
+            <a:r>
+              <a:t>教师讲述：</a:t>
             </a:r>
           </a:p>
           <a:p xmlns:a="http://schemas.openxmlformats.org/drawingml/2006/main">
@@ -3084,7 +4529,7 @@
           </a:p>
           <a:p xmlns:a="http://schemas.openxmlformats.org/drawingml/2006/main">
             <a:r>
-              <a:t>[Student action]</a:t>
+              <a:t>学生动作：</a:t>
             </a:r>
           </a:p>
           <a:p xmlns:a="http://schemas.openxmlformats.org/drawingml/2006/main">
@@ -3099,12 +4544,12 @@
           </a:p>
           <a:p xmlns:a="http://schemas.openxmlformats.org/drawingml/2006/main">
             <a:r>
-              <a:t>[Timing]</a:t>
-            </a:r>
-          </a:p>
-          <a:p xmlns:a="http://schemas.openxmlformats.org/drawingml/2006/main">
-            <a:r>
-              <a:t>3 分钟。</a:t>
+              <a:t>来源与边界：</a:t>
+            </a:r>
+          </a:p>
+          <a:p xmlns:a="http://schemas.openxmlformats.org/drawingml/2006/main">
+            <a:r>
+              <a:t>直接来源：[本课工件](assets/agent-task-example/generate.diff)；[本课工件](assets/agent-task-example/test-output.txt)。</a:t>
             </a:r>
           </a:p>
           <a:p xmlns:a="http://schemas.openxmlformats.org/drawingml/2006/main">
@@ -3114,12 +4559,7 @@
           </a:p>
           <a:p xmlns:a="http://schemas.openxmlformats.org/drawingml/2006/main">
             <a:r>
-              <a:t>[Evidence boundary]</a:t>
-            </a:r>
-          </a:p>
-          <a:p xmlns:a="http://schemas.openxmlformats.org/drawingml/2006/main">
-            <a:r>
-              <a:t>直接来源：[本课工件](assets/agent-task-example/generate.diff)；[本课工件](assets/agent-task-example/test-output.txt)。</a:t>
+              <a:t>讲义 §四·1 与 §四·3；第 1 课 §一·2 哪些判断不能外包；[AGENTS.md](../../AGENTS.md) 证据标准。</a:t>
             </a:r>
           </a:p>
           <a:p xmlns:a="http://schemas.openxmlformats.org/drawingml/2006/main">
@@ -3129,7 +4569,7 @@
           </a:p>
           <a:p xmlns:a="http://schemas.openxmlformats.org/drawingml/2006/main">
             <a:r>
-              <a:t>讲义 §四·1 与 §四·3；第 1 课 §一·2 哪些判断不能外包；[AGENTS.md](../../AGENTS.md) 证据标准。</a:t>
+              <a:t>---</a:t>
             </a:r>
           </a:p>
           <a:p xmlns:a="http://schemas.openxmlformats.org/drawingml/2006/main">
@@ -3144,27 +4584,27 @@
           </a:p>
           <a:p xmlns:a="http://schemas.openxmlformats.org/drawingml/2006/main">
             <a:r>
-              <a:t>- lessons/lesson-10/slides.md P08</a:t>
-            </a:r>
-          </a:p>
-          <a:p xmlns:a="http://schemas.openxmlformats.org/drawingml/2006/main">
-            <a:r>
-              <a:t>- lessons/lesson-10/handout.md §四·1 Agent 输出是候选，不是事实；§四·3 diff 审查清单</a:t>
-            </a:r>
-          </a:p>
-          <a:p xmlns:a="http://schemas.openxmlformats.org/drawingml/2006/main">
-            <a:r>
-              <a:t>- lessons/lesson-10/teaching-plan.md</a:t>
-            </a:r>
-          </a:p>
-          <a:p xmlns:a="http://schemas.openxmlformats.org/drawingml/2006/main">
-            <a:r>
-              <a:t>- assets/agent-task-example/generate.diff</a:t>
-            </a:r>
-          </a:p>
-          <a:p xmlns:a="http://schemas.openxmlformats.org/drawingml/2006/main">
-            <a:r>
-              <a:t>- assets/agent-task-example/test-output.txt</a:t>
+              <a:t/>
+            </a:r>
+          </a:p>
+          <a:p xmlns:a="http://schemas.openxmlformats.org/drawingml/2006/main">
+            <a:r>
+              <a:t>- 本课 handout.md 与 slides.md</a:t>
+            </a:r>
+          </a:p>
+          <a:p xmlns:a="http://schemas.openxmlformats.org/drawingml/2006/main">
+            <a:r>
+              <a:t/>
+            </a:r>
+          </a:p>
+          <a:p xmlns:a="http://schemas.openxmlformats.org/drawingml/2006/main">
+            <a:r>
+              <a:t>- ../../course/reading-card-case.md</a:t>
+            </a:r>
+          </a:p>
+          <a:p xmlns:a="http://schemas.openxmlformats.org/drawingml/2006/main">
+            <a:r>
+              <a:t/>
             </a:r>
           </a:p>
           <a:p xmlns:a="http://schemas.openxmlformats.org/drawingml/2006/main">
@@ -3239,6 +4679,36 @@
           <a:lstStyle xmlns:a="http://schemas.openxmlformats.org/drawingml/2006/main"/>
           <a:p xmlns:a="http://schemas.openxmlformats.org/drawingml/2006/main">
             <a:r>
+              <a:t>页面：P09 进入项目的修改需要根因与验证证据</a:t>
+            </a:r>
+          </a:p>
+          <a:p xmlns:a="http://schemas.openxmlformats.org/drawingml/2006/main">
+            <a:r>
+              <a:t/>
+            </a:r>
+          </a:p>
+          <a:p xmlns:a="http://schemas.openxmlformats.org/drawingml/2006/main">
+            <a:r>
+              <a:t>讲义位置：本课讲义；见逐页母稿映射表</a:t>
+            </a:r>
+          </a:p>
+          <a:p xmlns:a="http://schemas.openxmlformats.org/drawingml/2006/main">
+            <a:r>
+              <a:t/>
+            </a:r>
+          </a:p>
+          <a:p xmlns:a="http://schemas.openxmlformats.org/drawingml/2006/main">
+            <a:r>
+              <a:t>屏显核对：</a:t>
+            </a:r>
+          </a:p>
+          <a:p xmlns:a="http://schemas.openxmlformats.org/drawingml/2006/main">
+            <a:r>
+              <a:t>```text</a:t>
+            </a:r>
+          </a:p>
+          <a:p xmlns:a="http://schemas.openxmlformats.org/drawingml/2006/main">
+            <a:r>
               <a:t>进入项目的修改需要根因与验证证据</a:t>
             </a:r>
           </a:p>
@@ -3249,7 +4719,92 @@
           </a:p>
           <a:p xmlns:a="http://schemas.openxmlformats.org/drawingml/2006/main">
             <a:r>
-              <a:t>讲义对应：§四·2 修复根因、绕过失败与污染实验</a:t>
+              <a:t>候选修改</a:t>
+            </a:r>
+          </a:p>
+          <a:p xmlns:a="http://schemas.openxmlformats.org/drawingml/2006/main">
+            <a:r>
+              <a:t>→</a:t>
+            </a:r>
+          </a:p>
+          <a:p xmlns:a="http://schemas.openxmlformats.org/drawingml/2006/main">
+            <a:r>
+              <a:t>Agent 建议</a:t>
+            </a:r>
+          </a:p>
+          <a:p xmlns:a="http://schemas.openxmlformats.org/drawingml/2006/main">
+            <a:r>
+              <a:t>根因修复</a:t>
+            </a:r>
+          </a:p>
+          <a:p xmlns:a="http://schemas.openxmlformats.org/drawingml/2006/main">
+            <a:r>
+              <a:t>→</a:t>
+            </a:r>
+          </a:p>
+          <a:p xmlns:a="http://schemas.openxmlformats.org/drawingml/2006/main">
+            <a:r>
+              <a:t>保留失败与 diff</a:t>
+            </a:r>
+          </a:p>
+          <a:p xmlns:a="http://schemas.openxmlformats.org/drawingml/2006/main">
+            <a:r>
+              <a:t>测试 + 人工核验</a:t>
+            </a:r>
+          </a:p>
+          <a:p xmlns:a="http://schemas.openxmlformats.org/drawingml/2006/main">
+            <a:r>
+              <a:t>→</a:t>
+            </a:r>
+          </a:p>
+          <a:p xmlns:a="http://schemas.openxmlformats.org/drawingml/2006/main">
+            <a:r>
+              <a:t>方法边界仍人工判断</a:t>
+            </a:r>
+          </a:p>
+          <a:p xmlns:a="http://schemas.openxmlformats.org/drawingml/2006/main">
+            <a:r>
+              <a:t>进入项目</a:t>
+            </a:r>
+          </a:p>
+          <a:p xmlns:a="http://schemas.openxmlformats.org/drawingml/2006/main">
+            <a:r>
+              <a:t>可追溯</a:t>
+            </a:r>
+          </a:p>
+          <a:p xmlns:a="http://schemas.openxmlformats.org/drawingml/2006/main">
+            <a:r>
+              <a:t>不能进入当前实验版本</a:t>
+            </a:r>
+          </a:p>
+          <a:p xmlns:a="http://schemas.openxmlformats.org/drawingml/2006/main">
+            <a:r>
+              <a:t>正确处置</a:t>
+            </a:r>
+          </a:p>
+          <a:p xmlns:a="http://schemas.openxmlformats.org/drawingml/2006/main">
+            <a:r>
+              <a:t>— 绕过失败：注释断言、跳过测试</a:t>
+            </a:r>
+          </a:p>
+          <a:p xmlns:a="http://schemas.openxmlformats.org/drawingml/2006/main">
+            <a:r>
+              <a:t>— 污染实验：改 rubric、数据划分或 baseline</a:t>
+            </a:r>
+          </a:p>
+          <a:p xmlns:a="http://schemas.openxmlformats.org/drawingml/2006/main">
+            <a:r>
+              <a:t>— 被拒绝候选仍留痕</a:t>
+            </a:r>
+          </a:p>
+          <a:p xmlns:a="http://schemas.openxmlformats.org/drawingml/2006/main">
+            <a:r>
+              <a:t>— 退出调试任务，进入研究决定审核</a:t>
+            </a:r>
+          </a:p>
+          <a:p xmlns:a="http://schemas.openxmlformats.org/drawingml/2006/main">
+            <a:r>
+              <a:t>```</a:t>
             </a:r>
           </a:p>
           <a:p xmlns:a="http://schemas.openxmlformats.org/drawingml/2006/main">
@@ -3259,7 +4814,17 @@
           </a:p>
           <a:p xmlns:a="http://schemas.openxmlformats.org/drawingml/2006/main">
             <a:r>
-              <a:t>[Teaching]</a:t>
+              <a:t>屏显来源页脚：来源：lesson-10/slides.md；课程工件与讲义见 speaker notes。</a:t>
+            </a:r>
+          </a:p>
+          <a:p xmlns:a="http://schemas.openxmlformats.org/drawingml/2006/main">
+            <a:r>
+              <a:t/>
+            </a:r>
+          </a:p>
+          <a:p xmlns:a="http://schemas.openxmlformats.org/drawingml/2006/main">
+            <a:r>
+              <a:t>教师讲述：</a:t>
             </a:r>
           </a:p>
           <a:p xmlns:a="http://schemas.openxmlformats.org/drawingml/2006/main">
@@ -3274,7 +4839,7 @@
           </a:p>
           <a:p xmlns:a="http://schemas.openxmlformats.org/drawingml/2006/main">
             <a:r>
-              <a:t>[Student action]</a:t>
+              <a:t>学生动作：</a:t>
             </a:r>
           </a:p>
           <a:p xmlns:a="http://schemas.openxmlformats.org/drawingml/2006/main">
@@ -3289,12 +4854,12 @@
           </a:p>
           <a:p xmlns:a="http://schemas.openxmlformats.org/drawingml/2006/main">
             <a:r>
-              <a:t>[Timing]</a:t>
-            </a:r>
-          </a:p>
-          <a:p xmlns:a="http://schemas.openxmlformats.org/drawingml/2006/main">
-            <a:r>
-              <a:t>3 分钟。</a:t>
+              <a:t>来源与边界：</a:t>
+            </a:r>
+          </a:p>
+          <a:p xmlns:a="http://schemas.openxmlformats.org/drawingml/2006/main">
+            <a:r>
+              <a:t>讲义 §四·2；[assessment.md](../../course/assessment.md) 学术规范红线。</a:t>
             </a:r>
           </a:p>
           <a:p xmlns:a="http://schemas.openxmlformats.org/drawingml/2006/main">
@@ -3304,12 +4869,7 @@
           </a:p>
           <a:p xmlns:a="http://schemas.openxmlformats.org/drawingml/2006/main">
             <a:r>
-              <a:t>[Evidence boundary]</a:t>
-            </a:r>
-          </a:p>
-          <a:p xmlns:a="http://schemas.openxmlformats.org/drawingml/2006/main">
-            <a:r>
-              <a:t>讲义 §四·2；[assessment.md](../../course/assessment.md) 学术规范红线。</a:t>
+              <a:t>---</a:t>
             </a:r>
           </a:p>
           <a:p xmlns:a="http://schemas.openxmlformats.org/drawingml/2006/main">
@@ -3324,17 +4884,27 @@
           </a:p>
           <a:p xmlns:a="http://schemas.openxmlformats.org/drawingml/2006/main">
             <a:r>
-              <a:t>- lessons/lesson-10/slides.md P09</a:t>
-            </a:r>
-          </a:p>
-          <a:p xmlns:a="http://schemas.openxmlformats.org/drawingml/2006/main">
-            <a:r>
-              <a:t>- lessons/lesson-10/handout.md §四·2 修复根因、绕过失败与污染实验</a:t>
-            </a:r>
-          </a:p>
-          <a:p xmlns:a="http://schemas.openxmlformats.org/drawingml/2006/main">
-            <a:r>
-              <a:t>- lessons/lesson-10/teaching-plan.md</a:t>
+              <a:t/>
+            </a:r>
+          </a:p>
+          <a:p xmlns:a="http://schemas.openxmlformats.org/drawingml/2006/main">
+            <a:r>
+              <a:t>- 本课 handout.md 与 slides.md</a:t>
+            </a:r>
+          </a:p>
+          <a:p xmlns:a="http://schemas.openxmlformats.org/drawingml/2006/main">
+            <a:r>
+              <a:t/>
+            </a:r>
+          </a:p>
+          <a:p xmlns:a="http://schemas.openxmlformats.org/drawingml/2006/main">
+            <a:r>
+              <a:t>- ../../course/reading-card-case.md</a:t>
+            </a:r>
+          </a:p>
+          <a:p xmlns:a="http://schemas.openxmlformats.org/drawingml/2006/main">
+            <a:r>
+              <a:t/>
             </a:r>
           </a:p>
           <a:p xmlns:a="http://schemas.openxmlformats.org/drawingml/2006/main">
@@ -3390,7 +4960,7 @@
           <p:nvPr/>
         </p:nvPicPr>
         <p:blipFill>
-          <a:blip xmlns:r="http://schemas.openxmlformats.org/officeDocument/2006/relationships" xmlns:a="http://schemas.openxmlformats.org/drawingml/2006/main" r:embed="R626ce63fdc484e69">
+          <a:blip xmlns:r="http://schemas.openxmlformats.org/officeDocument/2006/relationships" xmlns:a="http://schemas.openxmlformats.org/drawingml/2006/main" r:embed="R4b24f6465ef74d74">
             <a:duotone>
               <a:prstClr val="black"/>
               <a:schemeClr val="accent1">
@@ -3568,7 +5138,7 @@
           <p:nvPr/>
         </p:nvPicPr>
         <p:blipFill rotWithShape="1">
-          <a:blip xmlns:r="http://schemas.openxmlformats.org/officeDocument/2006/relationships" xmlns:a="http://schemas.openxmlformats.org/drawingml/2006/main" r:embed="Rcb51fcdf2adc43f2"/>
+          <a:blip xmlns:r="http://schemas.openxmlformats.org/officeDocument/2006/relationships" xmlns:a="http://schemas.openxmlformats.org/drawingml/2006/main" r:embed="R6aeee48998834bd6"/>
           <a:srcRect xmlns:a="http://schemas.openxmlformats.org/drawingml/2006/main" l="74359" t="0" r="1346" b="0"/>
           <a:stretch xmlns:a="http://schemas.openxmlformats.org/drawingml/2006/main"/>
         </p:blipFill>
@@ -3591,7 +5161,7 @@
           <p:nvPr/>
         </p:nvPicPr>
         <p:blipFill rotWithShape="1">
-          <a:blip xmlns:r="http://schemas.openxmlformats.org/officeDocument/2006/relationships" xmlns:a="http://schemas.openxmlformats.org/drawingml/2006/main" r:embed="R76d15c58ae5d4efc">
+          <a:blip xmlns:r="http://schemas.openxmlformats.org/officeDocument/2006/relationships" xmlns:a="http://schemas.openxmlformats.org/drawingml/2006/main" r:embed="R6aa074b616f34e8d">
             <a:alphaModFix amt="35000"/>
           </a:blip>
           <a:srcRect xmlns:a="http://schemas.openxmlformats.org/drawingml/2006/main" l="0" t="9831" r="0" b="36385"/>
@@ -3853,7 +5423,7 @@
           <p:nvPr/>
         </p:nvPicPr>
         <p:blipFill>
-          <a:blip xmlns:r="http://schemas.openxmlformats.org/officeDocument/2006/relationships" xmlns:a="http://schemas.openxmlformats.org/drawingml/2006/main" r:embed="R0edcf5ad952544ff"/>
+          <a:blip xmlns:r="http://schemas.openxmlformats.org/officeDocument/2006/relationships" xmlns:a="http://schemas.openxmlformats.org/drawingml/2006/main" r:embed="R36ca0db350ad4d05"/>
           <a:srcRect xmlns:a="http://schemas.openxmlformats.org/drawingml/2006/main" l="0" t="0" r="54251" b="0"/>
           <a:stretch xmlns:a="http://schemas.openxmlformats.org/drawingml/2006/main"/>
         </p:blipFill>
@@ -4110,7 +5680,7 @@
           <p:nvPr/>
         </p:nvPicPr>
         <p:blipFill rotWithShape="1">
-          <a:blip xmlns:r="http://schemas.openxmlformats.org/officeDocument/2006/relationships" xmlns:a="http://schemas.openxmlformats.org/drawingml/2006/main" r:embed="Rec040fcf8f2b4b53"/>
+          <a:blip xmlns:r="http://schemas.openxmlformats.org/officeDocument/2006/relationships" xmlns:a="http://schemas.openxmlformats.org/drawingml/2006/main" r:embed="R5f661671d5314209"/>
           <a:srcRect xmlns:a="http://schemas.openxmlformats.org/drawingml/2006/main" l="0" t="0" r="1346" b="0"/>
           <a:stretch xmlns:a="http://schemas.openxmlformats.org/drawingml/2006/main"/>
         </p:blipFill>
@@ -4293,7 +5863,7 @@
           <p:nvPr/>
         </p:nvPicPr>
         <p:blipFill>
-          <a:blip xmlns:r="http://schemas.openxmlformats.org/officeDocument/2006/relationships" xmlns:a="http://schemas.openxmlformats.org/drawingml/2006/main" r:embed="R225209dd3c584677"/>
+          <a:blip xmlns:r="http://schemas.openxmlformats.org/officeDocument/2006/relationships" xmlns:a="http://schemas.openxmlformats.org/drawingml/2006/main" r:embed="R97caba98431443eb"/>
           <a:stretch xmlns:a="http://schemas.openxmlformats.org/drawingml/2006/main">
             <a:fillRect l="0" t="0" r="0" b="0"/>
           </a:stretch>
@@ -4389,7 +5959,7 @@
           <p:nvPr/>
         </p:nvPicPr>
         <p:blipFill>
-          <a:blip xmlns:r="http://schemas.openxmlformats.org/officeDocument/2006/relationships" xmlns:a="http://schemas.openxmlformats.org/drawingml/2006/main" r:embed="R7cc5d347c3f849c7">
+          <a:blip xmlns:r="http://schemas.openxmlformats.org/officeDocument/2006/relationships" xmlns:a="http://schemas.openxmlformats.org/drawingml/2006/main" r:embed="R9fd855d7723a4bc5">
             <a:duotone>
               <a:prstClr val="black"/>
               <a:schemeClr val="accent1">
@@ -4556,7 +6126,7 @@
           <p:nvPr/>
         </p:nvPicPr>
         <p:blipFill rotWithShape="1">
-          <a:blip xmlns:r="http://schemas.openxmlformats.org/officeDocument/2006/relationships" xmlns:a="http://schemas.openxmlformats.org/drawingml/2006/main" r:embed="R9e4752aec1db4712">
+          <a:blip xmlns:r="http://schemas.openxmlformats.org/officeDocument/2006/relationships" xmlns:a="http://schemas.openxmlformats.org/drawingml/2006/main" r:embed="R4c5589a118044da4">
             <a:alphaModFix amt="20000"/>
             <a:duotone>
               <a:schemeClr val="accent4">
@@ -4654,10 +6224,10 @@
   </p:cSld>
   <p:clrMap bg1="lt1" tx1="dk1" bg2="lt2" tx2="dk2" accent1="accent1" accent2="accent2" accent3="accent3" accent4="accent4" accent5="accent5" accent6="accent6" hlink="hlink" folHlink="folHlink"/>
   <p:sldLayoutIdLst>
-    <p:sldLayoutId xmlns:r="http://schemas.openxmlformats.org/officeDocument/2006/relationships" id="2147483649" r:id="R7f7aab1557054808"/>
-    <p:sldLayoutId xmlns:r="http://schemas.openxmlformats.org/officeDocument/2006/relationships" id="2147483650" r:id="Rcf8a39b73de3466b"/>
-    <p:sldLayoutId xmlns:r="http://schemas.openxmlformats.org/officeDocument/2006/relationships" id="2147483651" r:id="Rc0085e5b39014b71"/>
-    <p:sldLayoutId xmlns:r="http://schemas.openxmlformats.org/officeDocument/2006/relationships" id="2147483652" r:id="R7cd0ffea0b824c4a"/>
+    <p:sldLayoutId xmlns:r="http://schemas.openxmlformats.org/officeDocument/2006/relationships" id="2147483649" r:id="R557186bd04174fc9"/>
+    <p:sldLayoutId xmlns:r="http://schemas.openxmlformats.org/officeDocument/2006/relationships" id="2147483650" r:id="R703d400ad6914a97"/>
+    <p:sldLayoutId xmlns:r="http://schemas.openxmlformats.org/officeDocument/2006/relationships" id="2147483651" r:id="R4d79546d879546af"/>
+    <p:sldLayoutId xmlns:r="http://schemas.openxmlformats.org/officeDocument/2006/relationships" id="2147483652" r:id="Raaaa7abc298a4c84"/>
   </p:sldLayoutIdLst>
   <p:hf hdr="0" ftr="0" dt="0"/>
   <p:txStyles>
@@ -5376,14 +6946,14 @@
       </p:sp>
       <p:pic>
         <p:nvPicPr>
-          <p:cNvPr id="33" name=""/>
+          <p:cNvPr id="34" name=""/>
           <p:cNvPicPr>
             <a:picLocks xmlns:a="http://schemas.openxmlformats.org/drawingml/2006/main" noChangeAspect="1"/>
           </p:cNvPicPr>
           <p:nvPr/>
         </p:nvPicPr>
         <p:blipFill>
-          <a:blip xmlns:r="http://schemas.openxmlformats.org/officeDocument/2006/relationships" xmlns:a="http://schemas.openxmlformats.org/drawingml/2006/main" r:embed="Re8ff8dad87454fbd"/>
+          <a:blip xmlns:r="http://schemas.openxmlformats.org/officeDocument/2006/relationships" xmlns:a="http://schemas.openxmlformats.org/drawingml/2006/main" r:embed="Rb85b59d5c65c443e"/>
           <a:stretch xmlns:a="http://schemas.openxmlformats.org/drawingml/2006/main"/>
         </p:blipFill>
         <p:spPr>
@@ -6612,7 +8182,7 @@
                 <a:ea typeface="微软雅黑"/>
                 <a:cs typeface="微软雅黑"/>
               </a:rPr>
-              <a:t>同一实验规格进入受限执行</a:t>
+              <a:t>工程检查与研究评价各管一件事</a:t>
             </a:r>
             <a:endParaRPr/>
           </a:p>
@@ -6648,74 +8218,22 @@
       </p:sp>
       <p:sp>
         <p:nvSpPr>
-          <p:cNvPr id="6" name="brand-header">
-            <a:extLst xmlns:a="http://schemas.openxmlformats.org/drawingml/2006/main">
-              <a:ext uri="{FF2B5EF4-FFF2-40B4-BE49-F238E27FC236}">
-                <a16:creationId xmlns:a16="http://schemas.microsoft.com/office/drawing/2014/main" id="{61DCA243-87AC-4495-A82C-024773CC20C1}"/>
-              </a:ext>
-            </a:extLst>
-          </p:cNvPr>
-          <p:cNvSpPr>
-            <a:spLocks xmlns:a="http://schemas.openxmlformats.org/drawingml/2006/main" noGrp="1"/>
-          </p:cNvSpPr>
-          <p:nvPr/>
-        </p:nvSpPr>
-        <p:spPr>
-          <a:xfrm xmlns:a="http://schemas.openxmlformats.org/drawingml/2006/main">
-            <a:off x="0" y="0"/>
-            <a:ext cx="11887200" cy="685800"/>
-          </a:xfrm>
-          <a:prstGeom xmlns:a="http://schemas.openxmlformats.org/drawingml/2006/main" prst="rect">
-            <a:avLst/>
-          </a:prstGeom>
-          <a:solidFill xmlns:a="http://schemas.openxmlformats.org/drawingml/2006/main">
-            <a:srgbClr val="C8161E"/>
-          </a:solidFill>
-          <a:ln xmlns:a="http://schemas.openxmlformats.org/drawingml/2006/main" w="0">
-            <a:noFill/>
-          </a:ln>
-        </p:spPr>
-      </p:sp>
-      <p:pic>
-        <p:nvPicPr>
-          <p:cNvPr id="31" name=""/>
-          <p:cNvPicPr>
-            <a:picLocks xmlns:a="http://schemas.openxmlformats.org/drawingml/2006/main" noChangeAspect="1"/>
-          </p:cNvPicPr>
-          <p:nvPr/>
-        </p:nvPicPr>
-        <p:blipFill>
-          <a:blip xmlns:r="http://schemas.openxmlformats.org/officeDocument/2006/relationships" xmlns:a="http://schemas.openxmlformats.org/drawingml/2006/main" r:embed="R1af6b49eeac7471a"/>
-          <a:stretch xmlns:a="http://schemas.openxmlformats.org/drawingml/2006/main"/>
-        </p:blipFill>
-        <p:spPr>
-          <a:xfrm xmlns:a="http://schemas.openxmlformats.org/drawingml/2006/main">
-            <a:off x="323850" y="76200"/>
-            <a:ext cx="533400" cy="533400"/>
-          </a:xfrm>
-          <a:prstGeom xmlns:a="http://schemas.openxmlformats.org/drawingml/2006/main" prst="rect">
-            <a:avLst/>
-          </a:prstGeom>
-        </p:spPr>
-      </p:pic>
-      <p:sp>
-        <p:nvSpPr>
-          <p:cNvPr id="8" name="brand-title">
-            <a:extLst xmlns:a="http://schemas.openxmlformats.org/drawingml/2006/main">
-              <a:ext uri="{FF2B5EF4-FFF2-40B4-BE49-F238E27FC236}">
-                <a16:creationId xmlns:a16="http://schemas.microsoft.com/office/drawing/2014/main" id="{6FDA8C0A-4A87-43F9-86BB-772EF9A3A0A3}"/>
-              </a:ext>
-            </a:extLst>
-          </p:cNvPr>
-          <p:cNvSpPr>
-            <a:spLocks xmlns:a="http://schemas.openxmlformats.org/drawingml/2006/main" noGrp="1"/>
-          </p:cNvSpPr>
-          <p:nvPr/>
-        </p:nvSpPr>
-        <p:spPr>
-          <a:xfrm xmlns:a="http://schemas.openxmlformats.org/drawingml/2006/main">
-            <a:off x="1028700" y="66675"/>
-            <a:ext cx="10477500" cy="552450"/>
+          <p:cNvPr id="6" name="content-305">
+            <a:extLst xmlns:a="http://schemas.openxmlformats.org/drawingml/2006/main">
+              <a:ext uri="{FF2B5EF4-FFF2-40B4-BE49-F238E27FC236}">
+                <a16:creationId xmlns:a16="http://schemas.microsoft.com/office/drawing/2014/main" id="{01C3A6B4-3CE0-4EB5-8D77-035B18612787}"/>
+              </a:ext>
+            </a:extLst>
+          </p:cNvPr>
+          <p:cNvSpPr>
+            <a:spLocks xmlns:a="http://schemas.openxmlformats.org/drawingml/2006/main" noGrp="1"/>
+          </p:cNvSpPr>
+          <p:nvPr/>
+        </p:nvSpPr>
+        <p:spPr>
+          <a:xfrm xmlns:a="http://schemas.openxmlformats.org/drawingml/2006/main">
+            <a:off x="609600" y="1571625"/>
+            <a:ext cx="10972800" cy="432435"/>
           </a:xfrm>
           <a:prstGeom xmlns:a="http://schemas.openxmlformats.org/drawingml/2006/main" prst="rect">
             <a:avLst/>
@@ -6726,7 +8244,7 @@
           </a:ln>
         </p:spPr>
         <p:txBody>
-          <a:bodyPr xmlns:a="http://schemas.openxmlformats.org/drawingml/2006/main" lIns="0" tIns="0" rIns="0" bIns="0" anchor="ctr"/>
+          <a:bodyPr xmlns:a="http://schemas.openxmlformats.org/drawingml/2006/main" lIns="0" tIns="0" rIns="0" bIns="0" anchor="t"/>
           <a:lstStyle xmlns:a="http://schemas.openxmlformats.org/drawingml/2006/main"/>
           <a:p xmlns:a="http://schemas.openxmlformats.org/drawingml/2006/main">
             <a:pPr algn="l">
@@ -6734,9 +8252,9 @@
                 <a:spcPct val="118000"/>
               </a:lnSpc>
               <a:buNone/>
-              <a:defRPr sz="3000" b="1">
-                <a:solidFill>
-                  <a:srgbClr val="FFFFFF"/>
+              <a:defRPr sz="2400" b="0">
+                <a:solidFill>
+                  <a:srgbClr val="27333D"/>
                 </a:solidFill>
                 <a:latin typeface="微软雅黑"/>
                 <a:ea typeface="微软雅黑"/>
@@ -6744,37 +8262,37 @@
               </a:defRPr>
             </a:pPr>
             <a:r>
-              <a:rPr sz="3000" b="1">
-                <a:solidFill>
-                  <a:srgbClr val="FFFFFF"/>
+              <a:rPr sz="2400" b="0">
+                <a:solidFill>
+                  <a:srgbClr val="27333D"/>
                 </a:solidFill>
                 <a:latin typeface="微软雅黑"/>
                 <a:ea typeface="微软雅黑"/>
                 <a:cs typeface="微软雅黑"/>
               </a:rPr>
-              <a:t>同一实验规格进入受限执行</a:t>
-            </a:r>
-          </a:p>
-        </p:txBody>
-      </p:sp>
-      <p:sp>
-        <p:nvSpPr>
-          <p:cNvPr id="9" name="source">
-            <a:extLst xmlns:a="http://schemas.openxmlformats.org/drawingml/2006/main">
-              <a:ext uri="{FF2B5EF4-FFF2-40B4-BE49-F238E27FC236}">
-                <a16:creationId xmlns:a16="http://schemas.microsoft.com/office/drawing/2014/main" id="{8DC12B46-F8A5-4ED3-9C78-D436BB57FC21}"/>
-              </a:ext>
-            </a:extLst>
-          </p:cNvPr>
-          <p:cNvSpPr>
-            <a:spLocks xmlns:a="http://schemas.openxmlformats.org/drawingml/2006/main" noGrp="1"/>
-          </p:cNvSpPr>
-          <p:nvPr/>
-        </p:nvSpPr>
-        <p:spPr>
-          <a:xfrm xmlns:a="http://schemas.openxmlformats.org/drawingml/2006/main">
-            <a:off x="609600" y="6067425"/>
-            <a:ext cx="10763250" cy="209550"/>
+              <a:t>normalize_record 测试：数据结构是否按契约处理？</a:t>
+            </a:r>
+          </a:p>
+        </p:txBody>
+      </p:sp>
+      <p:sp>
+        <p:nvSpPr>
+          <p:cNvPr id="7" name="content-306">
+            <a:extLst xmlns:a="http://schemas.openxmlformats.org/drawingml/2006/main">
+              <a:ext uri="{FF2B5EF4-FFF2-40B4-BE49-F238E27FC236}">
+                <a16:creationId xmlns:a16="http://schemas.microsoft.com/office/drawing/2014/main" id="{7257343F-7786-4783-888D-2323531D4FC6}"/>
+              </a:ext>
+            </a:extLst>
+          </p:cNvPr>
+          <p:cNvSpPr>
+            <a:spLocks xmlns:a="http://schemas.openxmlformats.org/drawingml/2006/main" noGrp="1"/>
+          </p:cNvSpPr>
+          <p:nvPr/>
+        </p:nvSpPr>
+        <p:spPr>
+          <a:xfrm xmlns:a="http://schemas.openxmlformats.org/drawingml/2006/main">
+            <a:off x="609600" y="2261235"/>
+            <a:ext cx="10972800" cy="432435"/>
           </a:xfrm>
           <a:prstGeom xmlns:a="http://schemas.openxmlformats.org/drawingml/2006/main" prst="rect">
             <a:avLst/>
@@ -6793,9 +8311,9 @@
                 <a:spcPct val="118000"/>
               </a:lnSpc>
               <a:buNone/>
-              <a:defRPr sz="1100" b="0">
-                <a:solidFill>
-                  <a:srgbClr val="66727D"/>
+              <a:defRPr sz="2400" b="0">
+                <a:solidFill>
+                  <a:srgbClr val="27333D"/>
                 </a:solidFill>
                 <a:latin typeface="微软雅黑"/>
                 <a:ea typeface="微软雅黑"/>
@@ -6803,37 +8321,37 @@
               </a:defRPr>
             </a:pPr>
             <a:r>
-              <a:rPr sz="1100" b="0">
-                <a:solidFill>
-                  <a:srgbClr val="66727D"/>
+              <a:rPr sz="2400" b="0">
+                <a:solidFill>
+                  <a:srgbClr val="27333D"/>
                 </a:solidFill>
                 <a:latin typeface="微软雅黑"/>
                 <a:ea typeface="微软雅黑"/>
                 <a:cs typeface="微软雅黑"/>
               </a:rPr>
-              <a:t>来源：lesson-10/slides.md；课程工件与讲义见 speaker notes</a:t>
-            </a:r>
-          </a:p>
-        </p:txBody>
-      </p:sp>
-      <p:sp>
-        <p:nvSpPr>
-          <p:cNvPr id="10" name="fiction">
-            <a:extLst xmlns:a="http://schemas.openxmlformats.org/drawingml/2006/main">
-              <a:ext uri="{FF2B5EF4-FFF2-40B4-BE49-F238E27FC236}">
-                <a16:creationId xmlns:a16="http://schemas.microsoft.com/office/drawing/2014/main" id="{01D7139D-F9D0-4B71-BFD1-781F498D842F}"/>
-              </a:ext>
-            </a:extLst>
-          </p:cNvPr>
-          <p:cNvSpPr>
-            <a:spLocks xmlns:a="http://schemas.openxmlformats.org/drawingml/2006/main" noGrp="1"/>
-          </p:cNvSpPr>
-          <p:nvPr/>
-        </p:nvSpPr>
-        <p:spPr>
-          <a:xfrm xmlns:a="http://schemas.openxmlformats.org/drawingml/2006/main">
-            <a:off x="609600" y="885825"/>
-            <a:ext cx="10572750" cy="314325"/>
+              <a:t>阅读卡标注：输出保留了哪些限定条件？</a:t>
+            </a:r>
+          </a:p>
+        </p:txBody>
+      </p:sp>
+      <p:sp>
+        <p:nvSpPr>
+          <p:cNvPr id="8" name="content-307">
+            <a:extLst xmlns:a="http://schemas.openxmlformats.org/drawingml/2006/main">
+              <a:ext uri="{FF2B5EF4-FFF2-40B4-BE49-F238E27FC236}">
+                <a16:creationId xmlns:a16="http://schemas.microsoft.com/office/drawing/2014/main" id="{41D31B89-D76E-49B0-903D-064D560272D0}"/>
+              </a:ext>
+            </a:extLst>
+          </p:cNvPr>
+          <p:cNvSpPr>
+            <a:spLocks xmlns:a="http://schemas.openxmlformats.org/drawingml/2006/main" noGrp="1"/>
+          </p:cNvSpPr>
+          <p:nvPr/>
+        </p:nvSpPr>
+        <p:spPr>
+          <a:xfrm xmlns:a="http://schemas.openxmlformats.org/drawingml/2006/main">
+            <a:off x="609600" y="2950845"/>
+            <a:ext cx="10972800" cy="432435"/>
           </a:xfrm>
           <a:prstGeom xmlns:a="http://schemas.openxmlformats.org/drawingml/2006/main" prst="rect">
             <a:avLst/>
@@ -6852,9 +8370,9 @@
                 <a:spcPct val="118000"/>
               </a:lnSpc>
               <a:buNone/>
-              <a:defRPr sz="1800" b="0">
-                <a:solidFill>
-                  <a:srgbClr val="A96510"/>
+              <a:defRPr sz="2400" b="0">
+                <a:solidFill>
+                  <a:srgbClr val="27333D"/>
                 </a:solidFill>
                 <a:latin typeface="微软雅黑"/>
                 <a:ea typeface="微软雅黑"/>
@@ -6862,37 +8380,37 @@
               </a:defRPr>
             </a:pPr>
             <a:r>
-              <a:rPr sz="1800" b="0">
-                <a:solidFill>
-                  <a:srgbClr val="A96510"/>
+              <a:rPr sz="2400" b="0">
+                <a:solidFill>
+                  <a:srgbClr val="27333D"/>
                 </a:solidFill>
                 <a:latin typeface="微软雅黑"/>
                 <a:ea typeface="微软雅黑"/>
                 <a:cs typeface="微软雅黑"/>
               </a:rPr>
-              <a:t>课程虚构教学案例</a:t>
-            </a:r>
-          </a:p>
-        </p:txBody>
-      </p:sp>
-      <p:sp>
-        <p:nvSpPr>
-          <p:cNvPr id="11" name="big120">
-            <a:extLst xmlns:a="http://schemas.openxmlformats.org/drawingml/2006/main">
-              <a:ext uri="{FF2B5EF4-FFF2-40B4-BE49-F238E27FC236}">
-                <a16:creationId xmlns:a16="http://schemas.microsoft.com/office/drawing/2014/main" id="{1DCB1B1F-454E-4FD4-85F6-85B853488EAA}"/>
-              </a:ext>
-            </a:extLst>
-          </p:cNvPr>
-          <p:cNvSpPr>
-            <a:spLocks xmlns:a="http://schemas.openxmlformats.org/drawingml/2006/main" noGrp="1"/>
-          </p:cNvSpPr>
-          <p:nvPr/>
-        </p:nvSpPr>
-        <p:spPr>
-          <a:xfrm xmlns:a="http://schemas.openxmlformats.org/drawingml/2006/main">
-            <a:off x="666750" y="1524000"/>
-            <a:ext cx="4953000" cy="762000"/>
+              <a:t>实验判断：差异对应哪个命题，边界是什么？</a:t>
+            </a:r>
+          </a:p>
+        </p:txBody>
+      </p:sp>
+      <p:sp>
+        <p:nvSpPr>
+          <p:cNvPr id="9" name="content-308">
+            <a:extLst xmlns:a="http://schemas.openxmlformats.org/drawingml/2006/main">
+              <a:ext uri="{FF2B5EF4-FFF2-40B4-BE49-F238E27FC236}">
+                <a16:creationId xmlns:a16="http://schemas.microsoft.com/office/drawing/2014/main" id="{A3B1A2D0-33FA-4FFA-92D1-943FF51CF513}"/>
+              </a:ext>
+            </a:extLst>
+          </p:cNvPr>
+          <p:cNvSpPr>
+            <a:spLocks xmlns:a="http://schemas.openxmlformats.org/drawingml/2006/main" noGrp="1"/>
+          </p:cNvSpPr>
+          <p:nvPr/>
+        </p:nvSpPr>
+        <p:spPr>
+          <a:xfrm xmlns:a="http://schemas.openxmlformats.org/drawingml/2006/main">
+            <a:off x="609600" y="3640455"/>
+            <a:ext cx="10972800" cy="432435"/>
           </a:xfrm>
           <a:prstGeom xmlns:a="http://schemas.openxmlformats.org/drawingml/2006/main" prst="rect">
             <a:avLst/>
@@ -6911,7 +8429,7 @@
                 <a:spcPct val="118000"/>
               </a:lnSpc>
               <a:buNone/>
-              <a:defRPr sz="3600" b="1">
+              <a:defRPr sz="2400" b="0">
                 <a:solidFill>
                   <a:srgbClr val="1F4D78"/>
                 </a:solidFill>
@@ -6921,7 +8439,7 @@
               </a:defRPr>
             </a:pPr>
             <a:r>
-              <a:rPr sz="3600" b="1">
+              <a:rPr sz="2400" b="0">
                 <a:solidFill>
                   <a:srgbClr val="1F4D78"/>
                 </a:solidFill>
@@ -6929,835 +8447,7 @@
                 <a:ea typeface="微软雅黑"/>
                 <a:cs typeface="微软雅黑"/>
               </a:rPr>
-              <a:t>20 × 2 × 3 = 120</a:t>
-            </a:r>
-          </a:p>
-        </p:txBody>
-      </p:sp>
-      <p:sp>
-        <p:nvSpPr>
-          <p:cNvPr id="12" name="chain-line-0">
-            <a:extLst xmlns:a="http://schemas.openxmlformats.org/drawingml/2006/main">
-              <a:ext uri="{FF2B5EF4-FFF2-40B4-BE49-F238E27FC236}">
-                <a16:creationId xmlns:a16="http://schemas.microsoft.com/office/drawing/2014/main" id="{9D3C4864-BDE5-4C80-A4CC-232CA504D6E7}"/>
-              </a:ext>
-            </a:extLst>
-          </p:cNvPr>
-          <p:cNvSpPr>
-            <a:spLocks xmlns:a="http://schemas.openxmlformats.org/drawingml/2006/main" noGrp="1"/>
-          </p:cNvSpPr>
-          <p:nvPr/>
-        </p:nvSpPr>
-        <p:spPr>
-          <a:xfrm xmlns:a="http://schemas.openxmlformats.org/drawingml/2006/main">
-            <a:off x="666750" y="3581400"/>
-            <a:ext cx="1952625" cy="14288"/>
-          </a:xfrm>
-          <a:prstGeom xmlns:a="http://schemas.openxmlformats.org/drawingml/2006/main" prst="rect">
-            <a:avLst/>
-          </a:prstGeom>
-          <a:solidFill xmlns:a="http://schemas.openxmlformats.org/drawingml/2006/main">
-            <a:srgbClr val="1F4D78"/>
-          </a:solidFill>
-          <a:ln xmlns:a="http://schemas.openxmlformats.org/drawingml/2006/main" w="0">
-            <a:noFill/>
-          </a:ln>
-        </p:spPr>
-      </p:sp>
-      <p:sp>
-        <p:nvSpPr>
-          <p:cNvPr id="13" name="chain-0">
-            <a:extLst xmlns:a="http://schemas.openxmlformats.org/drawingml/2006/main">
-              <a:ext uri="{FF2B5EF4-FFF2-40B4-BE49-F238E27FC236}">
-                <a16:creationId xmlns:a16="http://schemas.microsoft.com/office/drawing/2014/main" id="{FF9CDB2E-F022-4527-AA4B-3F60D3D96434}"/>
-              </a:ext>
-            </a:extLst>
-          </p:cNvPr>
-          <p:cNvSpPr>
-            <a:spLocks xmlns:a="http://schemas.openxmlformats.org/drawingml/2006/main" noGrp="1"/>
-          </p:cNvSpPr>
-          <p:nvPr/>
-        </p:nvSpPr>
-        <p:spPr>
-          <a:xfrm xmlns:a="http://schemas.openxmlformats.org/drawingml/2006/main">
-            <a:off x="666750" y="2857500"/>
-            <a:ext cx="1952625" cy="666750"/>
-          </a:xfrm>
-          <a:prstGeom xmlns:a="http://schemas.openxmlformats.org/drawingml/2006/main" prst="rect">
-            <a:avLst/>
-          </a:prstGeom>
-          <a:noFill xmlns:a="http://schemas.openxmlformats.org/drawingml/2006/main"/>
-          <a:ln xmlns:a="http://schemas.openxmlformats.org/drawingml/2006/main" w="0">
-            <a:noFill/>
-          </a:ln>
-        </p:spPr>
-        <p:txBody>
-          <a:bodyPr xmlns:a="http://schemas.openxmlformats.org/drawingml/2006/main" lIns="0" tIns="0" rIns="0" bIns="0" anchor="ctr"/>
-          <a:lstStyle xmlns:a="http://schemas.openxmlformats.org/drawingml/2006/main"/>
-          <a:p xmlns:a="http://schemas.openxmlformats.org/drawingml/2006/main">
-            <a:pPr algn="ctr">
-              <a:lnSpc>
-                <a:spcPct val="118000"/>
-              </a:lnSpc>
-              <a:buNone/>
-              <a:defRPr sz="2200" b="0">
-                <a:solidFill>
-                  <a:srgbClr val="1F4D78"/>
-                </a:solidFill>
-                <a:latin typeface="微软雅黑"/>
-                <a:ea typeface="微软雅黑"/>
-                <a:cs typeface="微软雅黑"/>
-              </a:defRPr>
-            </a:pPr>
-            <a:r>
-              <a:rPr sz="2200" b="0">
-                <a:solidFill>
-                  <a:srgbClr val="1F4D78"/>
-                </a:solidFill>
-                <a:latin typeface="微软雅黑"/>
-                <a:ea typeface="微软雅黑"/>
-                <a:cs typeface="微软雅黑"/>
-              </a:rPr>
-              <a:t>20 篇论文</a:t>
-            </a:r>
-          </a:p>
-        </p:txBody>
-      </p:sp>
-      <p:sp>
-        <p:nvSpPr>
-          <p:cNvPr id="14" name="chain-arrow-0">
-            <a:extLst xmlns:a="http://schemas.openxmlformats.org/drawingml/2006/main">
-              <a:ext uri="{FF2B5EF4-FFF2-40B4-BE49-F238E27FC236}">
-                <a16:creationId xmlns:a16="http://schemas.microsoft.com/office/drawing/2014/main" id="{2F7A7DA8-851F-4F6E-B41B-04EB45FB4DCE}"/>
-              </a:ext>
-            </a:extLst>
-          </p:cNvPr>
-          <p:cNvSpPr>
-            <a:spLocks xmlns:a="http://schemas.openxmlformats.org/drawingml/2006/main" noGrp="1"/>
-          </p:cNvSpPr>
-          <p:nvPr/>
-        </p:nvSpPr>
-        <p:spPr>
-          <a:xfrm xmlns:a="http://schemas.openxmlformats.org/drawingml/2006/main">
-            <a:off x="2619375" y="3028950"/>
-            <a:ext cx="952500" cy="323850"/>
-          </a:xfrm>
-          <a:prstGeom xmlns:a="http://schemas.openxmlformats.org/drawingml/2006/main" prst="rect">
-            <a:avLst/>
-          </a:prstGeom>
-          <a:noFill xmlns:a="http://schemas.openxmlformats.org/drawingml/2006/main"/>
-          <a:ln xmlns:a="http://schemas.openxmlformats.org/drawingml/2006/main" w="0">
-            <a:noFill/>
-          </a:ln>
-        </p:spPr>
-        <p:txBody>
-          <a:bodyPr xmlns:a="http://schemas.openxmlformats.org/drawingml/2006/main" lIns="0" tIns="0" rIns="0" bIns="0" anchor="ctr"/>
-          <a:lstStyle xmlns:a="http://schemas.openxmlformats.org/drawingml/2006/main"/>
-          <a:p xmlns:a="http://schemas.openxmlformats.org/drawingml/2006/main">
-            <a:pPr algn="ctr">
-              <a:lnSpc>
-                <a:spcPct val="118000"/>
-              </a:lnSpc>
-              <a:buNone/>
-              <a:defRPr sz="2400" b="0">
-                <a:solidFill>
-                  <a:srgbClr val="1F4D78"/>
-                </a:solidFill>
-                <a:latin typeface="微软雅黑"/>
-                <a:ea typeface="微软雅黑"/>
-                <a:cs typeface="微软雅黑"/>
-              </a:defRPr>
-            </a:pPr>
-            <a:r>
-              <a:rPr sz="2400" b="0">
-                <a:solidFill>
-                  <a:srgbClr val="1F4D78"/>
-                </a:solidFill>
-                <a:latin typeface="微软雅黑"/>
-                <a:ea typeface="微软雅黑"/>
-                <a:cs typeface="微软雅黑"/>
-              </a:rPr>
-              <a:t>→</a:t>
-            </a:r>
-          </a:p>
-        </p:txBody>
-      </p:sp>
-      <p:sp>
-        <p:nvSpPr>
-          <p:cNvPr id="15" name="chain-sub-0">
-            <a:extLst xmlns:a="http://schemas.openxmlformats.org/drawingml/2006/main">
-              <a:ext uri="{FF2B5EF4-FFF2-40B4-BE49-F238E27FC236}">
-                <a16:creationId xmlns:a16="http://schemas.microsoft.com/office/drawing/2014/main" id="{F4871866-FD1B-4016-96B1-82CA1AA26D58}"/>
-              </a:ext>
-            </a:extLst>
-          </p:cNvPr>
-          <p:cNvSpPr>
-            <a:spLocks xmlns:a="http://schemas.openxmlformats.org/drawingml/2006/main" noGrp="1"/>
-          </p:cNvSpPr>
-          <p:nvPr/>
-        </p:nvSpPr>
-        <p:spPr>
-          <a:xfrm xmlns:a="http://schemas.openxmlformats.org/drawingml/2006/main">
-            <a:off x="666750" y="3733800"/>
-            <a:ext cx="1952625" cy="571500"/>
-          </a:xfrm>
-          <a:prstGeom xmlns:a="http://schemas.openxmlformats.org/drawingml/2006/main" prst="rect">
-            <a:avLst/>
-          </a:prstGeom>
-          <a:noFill xmlns:a="http://schemas.openxmlformats.org/drawingml/2006/main"/>
-          <a:ln xmlns:a="http://schemas.openxmlformats.org/drawingml/2006/main" w="0">
-            <a:noFill/>
-          </a:ln>
-        </p:spPr>
-        <p:txBody>
-          <a:bodyPr xmlns:a="http://schemas.openxmlformats.org/drawingml/2006/main" lIns="0" tIns="0" rIns="0" bIns="0" anchor="t"/>
-          <a:lstStyle xmlns:a="http://schemas.openxmlformats.org/drawingml/2006/main"/>
-          <a:p xmlns:a="http://schemas.openxmlformats.org/drawingml/2006/main">
-            <a:pPr algn="ctr">
-              <a:lnSpc>
-                <a:spcPct val="118000"/>
-              </a:lnSpc>
-              <a:buNone/>
-              <a:defRPr sz="2000" b="0">
-                <a:solidFill>
-                  <a:srgbClr val="66727D"/>
-                </a:solidFill>
-                <a:latin typeface="微软雅黑"/>
-                <a:ea typeface="微软雅黑"/>
-                <a:cs typeface="微软雅黑"/>
-              </a:defRPr>
-            </a:pPr>
-            <a:r>
-              <a:rPr sz="2000" b="0">
-                <a:solidFill>
-                  <a:srgbClr val="66727D"/>
-                </a:solidFill>
-                <a:latin typeface="微软雅黑"/>
-                <a:ea typeface="微软雅黑"/>
-                <a:cs typeface="微软雅黑"/>
-              </a:rPr>
-              <a:t>同一批输入</a:t>
-            </a:r>
-          </a:p>
-        </p:txBody>
-      </p:sp>
-      <p:sp>
-        <p:nvSpPr>
-          <p:cNvPr id="16" name="chain-line-1">
-            <a:extLst xmlns:a="http://schemas.openxmlformats.org/drawingml/2006/main">
-              <a:ext uri="{FF2B5EF4-FFF2-40B4-BE49-F238E27FC236}">
-                <a16:creationId xmlns:a16="http://schemas.microsoft.com/office/drawing/2014/main" id="{EE316C49-36AB-48B4-BA6A-8A4A72063719}"/>
-              </a:ext>
-            </a:extLst>
-          </p:cNvPr>
-          <p:cNvSpPr>
-            <a:spLocks xmlns:a="http://schemas.openxmlformats.org/drawingml/2006/main" noGrp="1"/>
-          </p:cNvSpPr>
-          <p:nvPr/>
-        </p:nvSpPr>
-        <p:spPr>
-          <a:xfrm xmlns:a="http://schemas.openxmlformats.org/drawingml/2006/main">
-            <a:off x="3571875" y="3581400"/>
-            <a:ext cx="1952625" cy="14288"/>
-          </a:xfrm>
-          <a:prstGeom xmlns:a="http://schemas.openxmlformats.org/drawingml/2006/main" prst="rect">
-            <a:avLst/>
-          </a:prstGeom>
-          <a:solidFill xmlns:a="http://schemas.openxmlformats.org/drawingml/2006/main">
-            <a:srgbClr val="1F4D78"/>
-          </a:solidFill>
-          <a:ln xmlns:a="http://schemas.openxmlformats.org/drawingml/2006/main" w="0">
-            <a:noFill/>
-          </a:ln>
-        </p:spPr>
-      </p:sp>
-      <p:sp>
-        <p:nvSpPr>
-          <p:cNvPr id="17" name="chain-1">
-            <a:extLst xmlns:a="http://schemas.openxmlformats.org/drawingml/2006/main">
-              <a:ext uri="{FF2B5EF4-FFF2-40B4-BE49-F238E27FC236}">
-                <a16:creationId xmlns:a16="http://schemas.microsoft.com/office/drawing/2014/main" id="{E1268A6C-1A91-48A8-8DB1-12B4FAA91453}"/>
-              </a:ext>
-            </a:extLst>
-          </p:cNvPr>
-          <p:cNvSpPr>
-            <a:spLocks xmlns:a="http://schemas.openxmlformats.org/drawingml/2006/main" noGrp="1"/>
-          </p:cNvSpPr>
-          <p:nvPr/>
-        </p:nvSpPr>
-        <p:spPr>
-          <a:xfrm xmlns:a="http://schemas.openxmlformats.org/drawingml/2006/main">
-            <a:off x="3571875" y="2857500"/>
-            <a:ext cx="1952625" cy="666750"/>
-          </a:xfrm>
-          <a:prstGeom xmlns:a="http://schemas.openxmlformats.org/drawingml/2006/main" prst="rect">
-            <a:avLst/>
-          </a:prstGeom>
-          <a:noFill xmlns:a="http://schemas.openxmlformats.org/drawingml/2006/main"/>
-          <a:ln xmlns:a="http://schemas.openxmlformats.org/drawingml/2006/main" w="0">
-            <a:noFill/>
-          </a:ln>
-        </p:spPr>
-        <p:txBody>
-          <a:bodyPr xmlns:a="http://schemas.openxmlformats.org/drawingml/2006/main" lIns="0" tIns="0" rIns="0" bIns="0" anchor="ctr"/>
-          <a:lstStyle xmlns:a="http://schemas.openxmlformats.org/drawingml/2006/main"/>
-          <a:p xmlns:a="http://schemas.openxmlformats.org/drawingml/2006/main">
-            <a:pPr algn="ctr">
-              <a:lnSpc>
-                <a:spcPct val="118000"/>
-              </a:lnSpc>
-              <a:buNone/>
-              <a:defRPr sz="2200" b="0">
-                <a:solidFill>
-                  <a:srgbClr val="1F4D78"/>
-                </a:solidFill>
-                <a:latin typeface="微软雅黑"/>
-                <a:ea typeface="微软雅黑"/>
-                <a:cs typeface="微软雅黑"/>
-              </a:defRPr>
-            </a:pPr>
-            <a:r>
-              <a:rPr sz="2200" b="0">
-                <a:solidFill>
-                  <a:srgbClr val="1F4D78"/>
-                </a:solidFill>
-                <a:latin typeface="微软雅黑"/>
-                <a:ea typeface="微软雅黑"/>
-                <a:cs typeface="微软雅黑"/>
-              </a:rPr>
-              <a:t>阅读卡 / 自由摘要</a:t>
-            </a:r>
-          </a:p>
-        </p:txBody>
-      </p:sp>
-      <p:sp>
-        <p:nvSpPr>
-          <p:cNvPr id="18" name="chain-arrow-1">
-            <a:extLst xmlns:a="http://schemas.openxmlformats.org/drawingml/2006/main">
-              <a:ext uri="{FF2B5EF4-FFF2-40B4-BE49-F238E27FC236}">
-                <a16:creationId xmlns:a16="http://schemas.microsoft.com/office/drawing/2014/main" id="{1E6711B7-A023-488C-94AC-6E5BC07878EE}"/>
-              </a:ext>
-            </a:extLst>
-          </p:cNvPr>
-          <p:cNvSpPr>
-            <a:spLocks xmlns:a="http://schemas.openxmlformats.org/drawingml/2006/main" noGrp="1"/>
-          </p:cNvSpPr>
-          <p:nvPr/>
-        </p:nvSpPr>
-        <p:spPr>
-          <a:xfrm xmlns:a="http://schemas.openxmlformats.org/drawingml/2006/main">
-            <a:off x="5524500" y="3028950"/>
-            <a:ext cx="952500" cy="323850"/>
-          </a:xfrm>
-          <a:prstGeom xmlns:a="http://schemas.openxmlformats.org/drawingml/2006/main" prst="rect">
-            <a:avLst/>
-          </a:prstGeom>
-          <a:noFill xmlns:a="http://schemas.openxmlformats.org/drawingml/2006/main"/>
-          <a:ln xmlns:a="http://schemas.openxmlformats.org/drawingml/2006/main" w="0">
-            <a:noFill/>
-          </a:ln>
-        </p:spPr>
-        <p:txBody>
-          <a:bodyPr xmlns:a="http://schemas.openxmlformats.org/drawingml/2006/main" lIns="0" tIns="0" rIns="0" bIns="0" anchor="ctr"/>
-          <a:lstStyle xmlns:a="http://schemas.openxmlformats.org/drawingml/2006/main"/>
-          <a:p xmlns:a="http://schemas.openxmlformats.org/drawingml/2006/main">
-            <a:pPr algn="ctr">
-              <a:lnSpc>
-                <a:spcPct val="118000"/>
-              </a:lnSpc>
-              <a:buNone/>
-              <a:defRPr sz="2400" b="0">
-                <a:solidFill>
-                  <a:srgbClr val="1F4D78"/>
-                </a:solidFill>
-                <a:latin typeface="微软雅黑"/>
-                <a:ea typeface="微软雅黑"/>
-                <a:cs typeface="微软雅黑"/>
-              </a:defRPr>
-            </a:pPr>
-            <a:r>
-              <a:rPr sz="2400" b="0">
-                <a:solidFill>
-                  <a:srgbClr val="1F4D78"/>
-                </a:solidFill>
-                <a:latin typeface="微软雅黑"/>
-                <a:ea typeface="微软雅黑"/>
-                <a:cs typeface="微软雅黑"/>
-              </a:rPr>
-              <a:t>→</a:t>
-            </a:r>
-          </a:p>
-        </p:txBody>
-      </p:sp>
-      <p:sp>
-        <p:nvSpPr>
-          <p:cNvPr id="19" name="chain-sub-1">
-            <a:extLst xmlns:a="http://schemas.openxmlformats.org/drawingml/2006/main">
-              <a:ext uri="{FF2B5EF4-FFF2-40B4-BE49-F238E27FC236}">
-                <a16:creationId xmlns:a16="http://schemas.microsoft.com/office/drawing/2014/main" id="{A4B3F019-99DF-41B3-A771-2CB111149719}"/>
-              </a:ext>
-            </a:extLst>
-          </p:cNvPr>
-          <p:cNvSpPr>
-            <a:spLocks xmlns:a="http://schemas.openxmlformats.org/drawingml/2006/main" noGrp="1"/>
-          </p:cNvSpPr>
-          <p:nvPr/>
-        </p:nvSpPr>
-        <p:spPr>
-          <a:xfrm xmlns:a="http://schemas.openxmlformats.org/drawingml/2006/main">
-            <a:off x="3571875" y="3733800"/>
-            <a:ext cx="1952625" cy="571500"/>
-          </a:xfrm>
-          <a:prstGeom xmlns:a="http://schemas.openxmlformats.org/drawingml/2006/main" prst="rect">
-            <a:avLst/>
-          </a:prstGeom>
-          <a:noFill xmlns:a="http://schemas.openxmlformats.org/drawingml/2006/main"/>
-          <a:ln xmlns:a="http://schemas.openxmlformats.org/drawingml/2006/main" w="0">
-            <a:noFill/>
-          </a:ln>
-        </p:spPr>
-        <p:txBody>
-          <a:bodyPr xmlns:a="http://schemas.openxmlformats.org/drawingml/2006/main" lIns="0" tIns="0" rIns="0" bIns="0" anchor="t"/>
-          <a:lstStyle xmlns:a="http://schemas.openxmlformats.org/drawingml/2006/main"/>
-          <a:p xmlns:a="http://schemas.openxmlformats.org/drawingml/2006/main">
-            <a:pPr algn="ctr">
-              <a:lnSpc>
-                <a:spcPct val="118000"/>
-              </a:lnSpc>
-              <a:buNone/>
-              <a:defRPr sz="2000" b="0">
-                <a:solidFill>
-                  <a:srgbClr val="66727D"/>
-                </a:solidFill>
-                <a:latin typeface="微软雅黑"/>
-                <a:ea typeface="微软雅黑"/>
-                <a:cs typeface="微软雅黑"/>
-              </a:defRPr>
-            </a:pPr>
-            <a:r>
-              <a:rPr sz="2000" b="0">
-                <a:solidFill>
-                  <a:srgbClr val="66727D"/>
-                </a:solidFill>
-                <a:latin typeface="微软雅黑"/>
-                <a:ea typeface="微软雅黑"/>
-                <a:cs typeface="微软雅黑"/>
-              </a:rPr>
-              <a:t>两条件</a:t>
-            </a:r>
-          </a:p>
-        </p:txBody>
-      </p:sp>
-      <p:sp>
-        <p:nvSpPr>
-          <p:cNvPr id="20" name="chain-line-2">
-            <a:extLst xmlns:a="http://schemas.openxmlformats.org/drawingml/2006/main">
-              <a:ext uri="{FF2B5EF4-FFF2-40B4-BE49-F238E27FC236}">
-                <a16:creationId xmlns:a16="http://schemas.microsoft.com/office/drawing/2014/main" id="{D39713B4-D9A0-45C4-A270-8C3EAD7A03BF}"/>
-              </a:ext>
-            </a:extLst>
-          </p:cNvPr>
-          <p:cNvSpPr>
-            <a:spLocks xmlns:a="http://schemas.openxmlformats.org/drawingml/2006/main" noGrp="1"/>
-          </p:cNvSpPr>
-          <p:nvPr/>
-        </p:nvSpPr>
-        <p:spPr>
-          <a:xfrm xmlns:a="http://schemas.openxmlformats.org/drawingml/2006/main">
-            <a:off x="6477000" y="3581400"/>
-            <a:ext cx="1952625" cy="14288"/>
-          </a:xfrm>
-          <a:prstGeom xmlns:a="http://schemas.openxmlformats.org/drawingml/2006/main" prst="rect">
-            <a:avLst/>
-          </a:prstGeom>
-          <a:solidFill xmlns:a="http://schemas.openxmlformats.org/drawingml/2006/main">
-            <a:srgbClr val="1F4D78"/>
-          </a:solidFill>
-          <a:ln xmlns:a="http://schemas.openxmlformats.org/drawingml/2006/main" w="0">
-            <a:noFill/>
-          </a:ln>
-        </p:spPr>
-      </p:sp>
-      <p:sp>
-        <p:nvSpPr>
-          <p:cNvPr id="21" name="chain-2">
-            <a:extLst xmlns:a="http://schemas.openxmlformats.org/drawingml/2006/main">
-              <a:ext uri="{FF2B5EF4-FFF2-40B4-BE49-F238E27FC236}">
-                <a16:creationId xmlns:a16="http://schemas.microsoft.com/office/drawing/2014/main" id="{77345D58-D277-4996-B379-CB9FEB402DEC}"/>
-              </a:ext>
-            </a:extLst>
-          </p:cNvPr>
-          <p:cNvSpPr>
-            <a:spLocks xmlns:a="http://schemas.openxmlformats.org/drawingml/2006/main" noGrp="1"/>
-          </p:cNvSpPr>
-          <p:nvPr/>
-        </p:nvSpPr>
-        <p:spPr>
-          <a:xfrm xmlns:a="http://schemas.openxmlformats.org/drawingml/2006/main">
-            <a:off x="6477000" y="2857500"/>
-            <a:ext cx="1952625" cy="666750"/>
-          </a:xfrm>
-          <a:prstGeom xmlns:a="http://schemas.openxmlformats.org/drawingml/2006/main" prst="rect">
-            <a:avLst/>
-          </a:prstGeom>
-          <a:noFill xmlns:a="http://schemas.openxmlformats.org/drawingml/2006/main"/>
-          <a:ln xmlns:a="http://schemas.openxmlformats.org/drawingml/2006/main" w="0">
-            <a:noFill/>
-          </a:ln>
-        </p:spPr>
-        <p:txBody>
-          <a:bodyPr xmlns:a="http://schemas.openxmlformats.org/drawingml/2006/main" lIns="0" tIns="0" rIns="0" bIns="0" anchor="ctr"/>
-          <a:lstStyle xmlns:a="http://schemas.openxmlformats.org/drawingml/2006/main"/>
-          <a:p xmlns:a="http://schemas.openxmlformats.org/drawingml/2006/main">
-            <a:pPr algn="ctr">
-              <a:lnSpc>
-                <a:spcPct val="118000"/>
-              </a:lnSpc>
-              <a:buNone/>
-              <a:defRPr sz="2200" b="0">
-                <a:solidFill>
-                  <a:srgbClr val="1F4D78"/>
-                </a:solidFill>
-                <a:latin typeface="微软雅黑"/>
-                <a:ea typeface="微软雅黑"/>
-                <a:cs typeface="微软雅黑"/>
-              </a:defRPr>
-            </a:pPr>
-            <a:r>
-              <a:rPr sz="2200" b="0">
-                <a:solidFill>
-                  <a:srgbClr val="1F4D78"/>
-                </a:solidFill>
-                <a:latin typeface="微软雅黑"/>
-                <a:ea typeface="微软雅黑"/>
-                <a:cs typeface="微软雅黑"/>
-              </a:rPr>
-              <a:t>冻结配置</a:t>
-            </a:r>
-          </a:p>
-        </p:txBody>
-      </p:sp>
-      <p:sp>
-        <p:nvSpPr>
-          <p:cNvPr id="22" name="chain-arrow-2">
-            <a:extLst xmlns:a="http://schemas.openxmlformats.org/drawingml/2006/main">
-              <a:ext uri="{FF2B5EF4-FFF2-40B4-BE49-F238E27FC236}">
-                <a16:creationId xmlns:a16="http://schemas.microsoft.com/office/drawing/2014/main" id="{714EA59E-BFB2-4BAD-AF1E-F3FEBEA52721}"/>
-              </a:ext>
-            </a:extLst>
-          </p:cNvPr>
-          <p:cNvSpPr>
-            <a:spLocks xmlns:a="http://schemas.openxmlformats.org/drawingml/2006/main" noGrp="1"/>
-          </p:cNvSpPr>
-          <p:nvPr/>
-        </p:nvSpPr>
-        <p:spPr>
-          <a:xfrm xmlns:a="http://schemas.openxmlformats.org/drawingml/2006/main">
-            <a:off x="8429625" y="3028950"/>
-            <a:ext cx="952500" cy="323850"/>
-          </a:xfrm>
-          <a:prstGeom xmlns:a="http://schemas.openxmlformats.org/drawingml/2006/main" prst="rect">
-            <a:avLst/>
-          </a:prstGeom>
-          <a:noFill xmlns:a="http://schemas.openxmlformats.org/drawingml/2006/main"/>
-          <a:ln xmlns:a="http://schemas.openxmlformats.org/drawingml/2006/main" w="0">
-            <a:noFill/>
-          </a:ln>
-        </p:spPr>
-        <p:txBody>
-          <a:bodyPr xmlns:a="http://schemas.openxmlformats.org/drawingml/2006/main" lIns="0" tIns="0" rIns="0" bIns="0" anchor="ctr"/>
-          <a:lstStyle xmlns:a="http://schemas.openxmlformats.org/drawingml/2006/main"/>
-          <a:p xmlns:a="http://schemas.openxmlformats.org/drawingml/2006/main">
-            <a:pPr algn="ctr">
-              <a:lnSpc>
-                <a:spcPct val="118000"/>
-              </a:lnSpc>
-              <a:buNone/>
-              <a:defRPr sz="2400" b="0">
-                <a:solidFill>
-                  <a:srgbClr val="1F4D78"/>
-                </a:solidFill>
-                <a:latin typeface="微软雅黑"/>
-                <a:ea typeface="微软雅黑"/>
-                <a:cs typeface="微软雅黑"/>
-              </a:defRPr>
-            </a:pPr>
-            <a:r>
-              <a:rPr sz="2400" b="0">
-                <a:solidFill>
-                  <a:srgbClr val="1F4D78"/>
-                </a:solidFill>
-                <a:latin typeface="微软雅黑"/>
-                <a:ea typeface="微软雅黑"/>
-                <a:cs typeface="微软雅黑"/>
-              </a:rPr>
-              <a:t>→</a:t>
-            </a:r>
-          </a:p>
-        </p:txBody>
-      </p:sp>
-      <p:sp>
-        <p:nvSpPr>
-          <p:cNvPr id="23" name="chain-sub-2">
-            <a:extLst xmlns:a="http://schemas.openxmlformats.org/drawingml/2006/main">
-              <a:ext uri="{FF2B5EF4-FFF2-40B4-BE49-F238E27FC236}">
-                <a16:creationId xmlns:a16="http://schemas.microsoft.com/office/drawing/2014/main" id="{CC3DE256-40C7-44D7-A7E7-1E0F8871D8C8}"/>
-              </a:ext>
-            </a:extLst>
-          </p:cNvPr>
-          <p:cNvSpPr>
-            <a:spLocks xmlns:a="http://schemas.openxmlformats.org/drawingml/2006/main" noGrp="1"/>
-          </p:cNvSpPr>
-          <p:nvPr/>
-        </p:nvSpPr>
-        <p:spPr>
-          <a:xfrm xmlns:a="http://schemas.openxmlformats.org/drawingml/2006/main">
-            <a:off x="6477000" y="3733800"/>
-            <a:ext cx="1952625" cy="571500"/>
-          </a:xfrm>
-          <a:prstGeom xmlns:a="http://schemas.openxmlformats.org/drawingml/2006/main" prst="rect">
-            <a:avLst/>
-          </a:prstGeom>
-          <a:noFill xmlns:a="http://schemas.openxmlformats.org/drawingml/2006/main"/>
-          <a:ln xmlns:a="http://schemas.openxmlformats.org/drawingml/2006/main" w="0">
-            <a:noFill/>
-          </a:ln>
-        </p:spPr>
-        <p:txBody>
-          <a:bodyPr xmlns:a="http://schemas.openxmlformats.org/drawingml/2006/main" lIns="0" tIns="0" rIns="0" bIns="0" anchor="t"/>
-          <a:lstStyle xmlns:a="http://schemas.openxmlformats.org/drawingml/2006/main"/>
-          <a:p xmlns:a="http://schemas.openxmlformats.org/drawingml/2006/main">
-            <a:pPr algn="ctr">
-              <a:lnSpc>
-                <a:spcPct val="118000"/>
-              </a:lnSpc>
-              <a:buNone/>
-              <a:defRPr sz="2000" b="0">
-                <a:solidFill>
-                  <a:srgbClr val="66727D"/>
-                </a:solidFill>
-                <a:latin typeface="微软雅黑"/>
-                <a:ea typeface="微软雅黑"/>
-                <a:cs typeface="微软雅黑"/>
-              </a:defRPr>
-            </a:pPr>
-            <a:r>
-              <a:rPr sz="2000" b="0">
-                <a:solidFill>
-                  <a:srgbClr val="66727D"/>
-                </a:solidFill>
-                <a:latin typeface="微软雅黑"/>
-                <a:ea typeface="微软雅黑"/>
-                <a:cs typeface="微软雅黑"/>
-              </a:rPr>
-              <a:t>模型 / 解码 / 长度</a:t>
-            </a:r>
-          </a:p>
-        </p:txBody>
-      </p:sp>
-      <p:sp>
-        <p:nvSpPr>
-          <p:cNvPr id="24" name="chain-line-3">
-            <a:extLst xmlns:a="http://schemas.openxmlformats.org/drawingml/2006/main">
-              <a:ext uri="{FF2B5EF4-FFF2-40B4-BE49-F238E27FC236}">
-                <a16:creationId xmlns:a16="http://schemas.microsoft.com/office/drawing/2014/main" id="{A4DE946A-E6E7-49E1-89BC-E2D692E38ACA}"/>
-              </a:ext>
-            </a:extLst>
-          </p:cNvPr>
-          <p:cNvSpPr>
-            <a:spLocks xmlns:a="http://schemas.openxmlformats.org/drawingml/2006/main" noGrp="1"/>
-          </p:cNvSpPr>
-          <p:nvPr/>
-        </p:nvSpPr>
-        <p:spPr>
-          <a:xfrm xmlns:a="http://schemas.openxmlformats.org/drawingml/2006/main">
-            <a:off x="9382125" y="3581400"/>
-            <a:ext cx="1952625" cy="14288"/>
-          </a:xfrm>
-          <a:prstGeom xmlns:a="http://schemas.openxmlformats.org/drawingml/2006/main" prst="rect">
-            <a:avLst/>
-          </a:prstGeom>
-          <a:solidFill xmlns:a="http://schemas.openxmlformats.org/drawingml/2006/main">
-            <a:srgbClr val="2E7D5B"/>
-          </a:solidFill>
-          <a:ln xmlns:a="http://schemas.openxmlformats.org/drawingml/2006/main" w="0">
-            <a:noFill/>
-          </a:ln>
-        </p:spPr>
-      </p:sp>
-      <p:sp>
-        <p:nvSpPr>
-          <p:cNvPr id="25" name="chain-3">
-            <a:extLst xmlns:a="http://schemas.openxmlformats.org/drawingml/2006/main">
-              <a:ext uri="{FF2B5EF4-FFF2-40B4-BE49-F238E27FC236}">
-                <a16:creationId xmlns:a16="http://schemas.microsoft.com/office/drawing/2014/main" id="{0429DFEF-BD49-4595-AC4E-59D2DF22A145}"/>
-              </a:ext>
-            </a:extLst>
-          </p:cNvPr>
-          <p:cNvSpPr>
-            <a:spLocks xmlns:a="http://schemas.openxmlformats.org/drawingml/2006/main" noGrp="1"/>
-          </p:cNvSpPr>
-          <p:nvPr/>
-        </p:nvSpPr>
-        <p:spPr>
-          <a:xfrm xmlns:a="http://schemas.openxmlformats.org/drawingml/2006/main">
-            <a:off x="9382125" y="2857500"/>
-            <a:ext cx="1952625" cy="666750"/>
-          </a:xfrm>
-          <a:prstGeom xmlns:a="http://schemas.openxmlformats.org/drawingml/2006/main" prst="rect">
-            <a:avLst/>
-          </a:prstGeom>
-          <a:noFill xmlns:a="http://schemas.openxmlformats.org/drawingml/2006/main"/>
-          <a:ln xmlns:a="http://schemas.openxmlformats.org/drawingml/2006/main" w="0">
-            <a:noFill/>
-          </a:ln>
-        </p:spPr>
-        <p:txBody>
-          <a:bodyPr xmlns:a="http://schemas.openxmlformats.org/drawingml/2006/main" lIns="0" tIns="0" rIns="0" bIns="0" anchor="ctr"/>
-          <a:lstStyle xmlns:a="http://schemas.openxmlformats.org/drawingml/2006/main"/>
-          <a:p xmlns:a="http://schemas.openxmlformats.org/drawingml/2006/main">
-            <a:pPr algn="ctr">
-              <a:lnSpc>
-                <a:spcPct val="118000"/>
-              </a:lnSpc>
-              <a:buNone/>
-              <a:defRPr sz="2200" b="0">
-                <a:solidFill>
-                  <a:srgbClr val="2E7D5B"/>
-                </a:solidFill>
-                <a:latin typeface="微软雅黑"/>
-                <a:ea typeface="微软雅黑"/>
-                <a:cs typeface="微软雅黑"/>
-              </a:defRPr>
-            </a:pPr>
-            <a:r>
-              <a:rPr sz="2200" b="0">
-                <a:solidFill>
-                  <a:srgbClr val="2E7D5B"/>
-                </a:solidFill>
-                <a:latin typeface="微软雅黑"/>
-                <a:ea typeface="微软雅黑"/>
-                <a:cs typeface="微软雅黑"/>
-              </a:rPr>
-              <a:t>隔离评价</a:t>
-            </a:r>
-          </a:p>
-        </p:txBody>
-      </p:sp>
-      <p:sp>
-        <p:nvSpPr>
-          <p:cNvPr id="26" name="chain-sub-3">
-            <a:extLst xmlns:a="http://schemas.openxmlformats.org/drawingml/2006/main">
-              <a:ext uri="{FF2B5EF4-FFF2-40B4-BE49-F238E27FC236}">
-                <a16:creationId xmlns:a16="http://schemas.microsoft.com/office/drawing/2014/main" id="{98F8B2FC-0ABC-45A8-B967-7FEB692E41C3}"/>
-              </a:ext>
-            </a:extLst>
-          </p:cNvPr>
-          <p:cNvSpPr>
-            <a:spLocks xmlns:a="http://schemas.openxmlformats.org/drawingml/2006/main" noGrp="1"/>
-          </p:cNvSpPr>
-          <p:nvPr/>
-        </p:nvSpPr>
-        <p:spPr>
-          <a:xfrm xmlns:a="http://schemas.openxmlformats.org/drawingml/2006/main">
-            <a:off x="9382125" y="3733800"/>
-            <a:ext cx="1952625" cy="571500"/>
-          </a:xfrm>
-          <a:prstGeom xmlns:a="http://schemas.openxmlformats.org/drawingml/2006/main" prst="rect">
-            <a:avLst/>
-          </a:prstGeom>
-          <a:noFill xmlns:a="http://schemas.openxmlformats.org/drawingml/2006/main"/>
-          <a:ln xmlns:a="http://schemas.openxmlformats.org/drawingml/2006/main" w="0">
-            <a:noFill/>
-          </a:ln>
-        </p:spPr>
-        <p:txBody>
-          <a:bodyPr xmlns:a="http://schemas.openxmlformats.org/drawingml/2006/main" lIns="0" tIns="0" rIns="0" bIns="0" anchor="t"/>
-          <a:lstStyle xmlns:a="http://schemas.openxmlformats.org/drawingml/2006/main"/>
-          <a:p xmlns:a="http://schemas.openxmlformats.org/drawingml/2006/main">
-            <a:pPr algn="ctr">
-              <a:lnSpc>
-                <a:spcPct val="118000"/>
-              </a:lnSpc>
-              <a:buNone/>
-              <a:defRPr sz="2000" b="0">
-                <a:solidFill>
-                  <a:srgbClr val="66727D"/>
-                </a:solidFill>
-                <a:latin typeface="微软雅黑"/>
-                <a:ea typeface="微软雅黑"/>
-                <a:cs typeface="微软雅黑"/>
-              </a:defRPr>
-            </a:pPr>
-            <a:r>
-              <a:rPr sz="2000" b="0">
-                <a:solidFill>
-                  <a:srgbClr val="66727D"/>
-                </a:solidFill>
-                <a:latin typeface="微软雅黑"/>
-                <a:ea typeface="微软雅黑"/>
-                <a:cs typeface="微软雅黑"/>
-              </a:rPr>
-              <a:t>人工基准不暴露</a:t>
-            </a:r>
-          </a:p>
-        </p:txBody>
-      </p:sp>
-      <p:sp>
-        <p:nvSpPr>
-          <p:cNvPr id="27" name="hyp">
-            <a:extLst xmlns:a="http://schemas.openxmlformats.org/drawingml/2006/main">
-              <a:ext uri="{FF2B5EF4-FFF2-40B4-BE49-F238E27FC236}">
-                <a16:creationId xmlns:a16="http://schemas.microsoft.com/office/drawing/2014/main" id="{9CDF4968-5B87-42E3-8629-9A9F07412EBB}"/>
-              </a:ext>
-            </a:extLst>
-          </p:cNvPr>
-          <p:cNvSpPr>
-            <a:spLocks xmlns:a="http://schemas.openxmlformats.org/drawingml/2006/main" noGrp="1"/>
-          </p:cNvSpPr>
-          <p:nvPr/>
-        </p:nvSpPr>
-        <p:spPr>
-          <a:xfrm xmlns:a="http://schemas.openxmlformats.org/drawingml/2006/main">
-            <a:off x="1476375" y="4905375"/>
-            <a:ext cx="9239250" cy="523875"/>
-          </a:xfrm>
-          <a:prstGeom xmlns:a="http://schemas.openxmlformats.org/drawingml/2006/main" prst="rect">
-            <a:avLst/>
-          </a:prstGeom>
-          <a:noFill xmlns:a="http://schemas.openxmlformats.org/drawingml/2006/main"/>
-          <a:ln xmlns:a="http://schemas.openxmlformats.org/drawingml/2006/main" w="0">
-            <a:noFill/>
-          </a:ln>
-        </p:spPr>
-        <p:txBody>
-          <a:bodyPr xmlns:a="http://schemas.openxmlformats.org/drawingml/2006/main" lIns="0" tIns="0" rIns="0" bIns="0" anchor="t"/>
-          <a:lstStyle xmlns:a="http://schemas.openxmlformats.org/drawingml/2006/main"/>
-          <a:p xmlns:a="http://schemas.openxmlformats.org/drawingml/2006/main">
-            <a:pPr algn="ctr">
-              <a:lnSpc>
-                <a:spcPct val="118000"/>
-              </a:lnSpc>
-              <a:buNone/>
-              <a:defRPr sz="2200" b="0">
-                <a:solidFill>
-                  <a:srgbClr val="A96510"/>
-                </a:solidFill>
-                <a:latin typeface="微软雅黑"/>
-                <a:ea typeface="微软雅黑"/>
-                <a:cs typeface="微软雅黑"/>
-              </a:defRPr>
-            </a:pPr>
-            <a:r>
-              <a:rPr sz="2200" b="0">
-                <a:solidFill>
-                  <a:srgbClr val="A96510"/>
-                </a:solidFill>
-                <a:latin typeface="微软雅黑"/>
-                <a:ea typeface="微软雅黑"/>
-                <a:cs typeface="微软雅黑"/>
-              </a:rPr>
-              <a:t>H1 结构字段｜A1 任务转移｜A2 标注提示｜A3 文档结构</a:t>
+              <a:t>测试通过后，仍要检查语义证据。</a:t>
             </a:r>
           </a:p>
         </p:txBody>
@@ -7891,14 +8581,14 @@
       </p:sp>
       <p:pic>
         <p:nvPicPr>
-          <p:cNvPr id="37" name=""/>
+          <p:cNvPr id="38" name=""/>
           <p:cNvPicPr>
             <a:picLocks xmlns:a="http://schemas.openxmlformats.org/drawingml/2006/main" noChangeAspect="1"/>
           </p:cNvPicPr>
           <p:nvPr/>
         </p:nvPicPr>
         <p:blipFill>
-          <a:blip xmlns:r="http://schemas.openxmlformats.org/officeDocument/2006/relationships" xmlns:a="http://schemas.openxmlformats.org/drawingml/2006/main" r:embed="R23ec7fae4f854595"/>
+          <a:blip xmlns:r="http://schemas.openxmlformats.org/officeDocument/2006/relationships" xmlns:a="http://schemas.openxmlformats.org/drawingml/2006/main" r:embed="R8c3b6a83e0704447"/>
           <a:stretch xmlns:a="http://schemas.openxmlformats.org/drawingml/2006/main"/>
         </p:blipFill>
         <p:spPr>
@@ -9400,14 +10090,14 @@
       </p:sp>
       <p:pic>
         <p:nvPicPr>
-          <p:cNvPr id="27" name=""/>
+          <p:cNvPr id="28" name=""/>
           <p:cNvPicPr>
             <a:picLocks xmlns:a="http://schemas.openxmlformats.org/drawingml/2006/main" noChangeAspect="1"/>
           </p:cNvPicPr>
           <p:nvPr/>
         </p:nvPicPr>
         <p:blipFill>
-          <a:blip xmlns:r="http://schemas.openxmlformats.org/officeDocument/2006/relationships" xmlns:a="http://schemas.openxmlformats.org/drawingml/2006/main" r:embed="Rc53f9d4666354245"/>
+          <a:blip xmlns:r="http://schemas.openxmlformats.org/officeDocument/2006/relationships" xmlns:a="http://schemas.openxmlformats.org/drawingml/2006/main" r:embed="R3b3f3f50ab6c4a8a"/>
           <a:stretch xmlns:a="http://schemas.openxmlformats.org/drawingml/2006/main"/>
         </p:blipFill>
         <p:spPr>
@@ -10471,14 +11161,14 @@
       </p:sp>
       <p:pic>
         <p:nvPicPr>
-          <p:cNvPr id="30" name=""/>
+          <p:cNvPr id="31" name=""/>
           <p:cNvPicPr>
             <a:picLocks xmlns:a="http://schemas.openxmlformats.org/drawingml/2006/main" noChangeAspect="1"/>
           </p:cNvPicPr>
           <p:nvPr/>
         </p:nvPicPr>
         <p:blipFill>
-          <a:blip xmlns:r="http://schemas.openxmlformats.org/officeDocument/2006/relationships" xmlns:a="http://schemas.openxmlformats.org/drawingml/2006/main" r:embed="R944d7ac6de3e4e46"/>
+          <a:blip xmlns:r="http://schemas.openxmlformats.org/officeDocument/2006/relationships" xmlns:a="http://schemas.openxmlformats.org/drawingml/2006/main" r:embed="R8bc0ffcd7f2c4c8b"/>
           <a:stretch xmlns:a="http://schemas.openxmlformats.org/drawingml/2006/main"/>
         </p:blipFill>
         <p:spPr>
@@ -11683,14 +12373,14 @@
       </p:sp>
       <p:pic>
         <p:nvPicPr>
-          <p:cNvPr id="21" name=""/>
+          <p:cNvPr id="22" name=""/>
           <p:cNvPicPr>
             <a:picLocks xmlns:a="http://schemas.openxmlformats.org/drawingml/2006/main" noChangeAspect="1"/>
           </p:cNvPicPr>
           <p:nvPr/>
         </p:nvPicPr>
         <p:blipFill>
-          <a:blip xmlns:r="http://schemas.openxmlformats.org/officeDocument/2006/relationships" xmlns:a="http://schemas.openxmlformats.org/drawingml/2006/main" r:embed="Ra4c8bc39554a49e2"/>
+          <a:blip xmlns:r="http://schemas.openxmlformats.org/officeDocument/2006/relationships" xmlns:a="http://schemas.openxmlformats.org/drawingml/2006/main" r:embed="Rda507f76af78400e"/>
           <a:stretch xmlns:a="http://schemas.openxmlformats.org/drawingml/2006/main"/>
         </p:blipFill>
         <p:spPr>
@@ -12472,14 +13162,14 @@
       </p:sp>
       <p:pic>
         <p:nvPicPr>
-          <p:cNvPr id="28" name=""/>
+          <p:cNvPr id="29" name=""/>
           <p:cNvPicPr>
             <a:picLocks xmlns:a="http://schemas.openxmlformats.org/drawingml/2006/main" noChangeAspect="1"/>
           </p:cNvPicPr>
           <p:nvPr/>
         </p:nvPicPr>
         <p:blipFill>
-          <a:blip xmlns:r="http://schemas.openxmlformats.org/officeDocument/2006/relationships" xmlns:a="http://schemas.openxmlformats.org/drawingml/2006/main" r:embed="R98ced7a0d8f34370"/>
+          <a:blip xmlns:r="http://schemas.openxmlformats.org/officeDocument/2006/relationships" xmlns:a="http://schemas.openxmlformats.org/drawingml/2006/main" r:embed="R5e03b649304a4603"/>
           <a:stretch xmlns:a="http://schemas.openxmlformats.org/drawingml/2006/main"/>
         </p:blipFill>
         <p:spPr>
@@ -13508,14 +14198,14 @@
       </p:sp>
       <p:pic>
         <p:nvPicPr>
-          <p:cNvPr id="26" name=""/>
+          <p:cNvPr id="27" name=""/>
           <p:cNvPicPr>
             <a:picLocks xmlns:a="http://schemas.openxmlformats.org/drawingml/2006/main" noChangeAspect="1"/>
           </p:cNvPicPr>
           <p:nvPr/>
         </p:nvPicPr>
         <p:blipFill>
-          <a:blip xmlns:r="http://schemas.openxmlformats.org/officeDocument/2006/relationships" xmlns:a="http://schemas.openxmlformats.org/drawingml/2006/main" r:embed="Re38632d463b146ee"/>
+          <a:blip xmlns:r="http://schemas.openxmlformats.org/officeDocument/2006/relationships" xmlns:a="http://schemas.openxmlformats.org/drawingml/2006/main" r:embed="R77ffc45794fe4b63"/>
           <a:stretch xmlns:a="http://schemas.openxmlformats.org/drawingml/2006/main"/>
         </p:blipFill>
         <p:spPr>
@@ -14534,14 +15224,14 @@
       </p:sp>
       <p:pic>
         <p:nvPicPr>
-          <p:cNvPr id="28" name=""/>
+          <p:cNvPr id="29" name=""/>
           <p:cNvPicPr>
             <a:picLocks xmlns:a="http://schemas.openxmlformats.org/drawingml/2006/main" noChangeAspect="1"/>
           </p:cNvPicPr>
           <p:nvPr/>
         </p:nvPicPr>
         <p:blipFill>
-          <a:blip xmlns:r="http://schemas.openxmlformats.org/officeDocument/2006/relationships" xmlns:a="http://schemas.openxmlformats.org/drawingml/2006/main" r:embed="Rcdc460996445486d"/>
+          <a:blip xmlns:r="http://schemas.openxmlformats.org/officeDocument/2006/relationships" xmlns:a="http://schemas.openxmlformats.org/drawingml/2006/main" r:embed="Rd33a0b334e2c49af"/>
           <a:stretch xmlns:a="http://schemas.openxmlformats.org/drawingml/2006/main"/>
         </p:blipFill>
         <p:spPr>
@@ -15570,14 +16260,14 @@
       </p:sp>
       <p:pic>
         <p:nvPicPr>
-          <p:cNvPr id="26" name=""/>
+          <p:cNvPr id="27" name=""/>
           <p:cNvPicPr>
             <a:picLocks xmlns:a="http://schemas.openxmlformats.org/drawingml/2006/main" noChangeAspect="1"/>
           </p:cNvPicPr>
           <p:nvPr/>
         </p:nvPicPr>
         <p:blipFill>
-          <a:blip xmlns:r="http://schemas.openxmlformats.org/officeDocument/2006/relationships" xmlns:a="http://schemas.openxmlformats.org/drawingml/2006/main" r:embed="R163ac60eae524583"/>
+          <a:blip xmlns:r="http://schemas.openxmlformats.org/officeDocument/2006/relationships" xmlns:a="http://schemas.openxmlformats.org/drawingml/2006/main" r:embed="Rf6fb93cd7c824266"/>
           <a:stretch xmlns:a="http://schemas.openxmlformats.org/drawingml/2006/main"/>
         </p:blipFill>
         <p:spPr>
@@ -16422,7 +17112,7 @@
                 <a:ea typeface="微软雅黑"/>
                 <a:cs typeface="微软雅黑"/>
               </a:rPr>
-              <a:t>任务契约建立可检查边界</a:t>
+              <a:t>任务契约先缩到一个可检查改动</a:t>
             </a:r>
             <a:endParaRPr/>
           </a:p>
@@ -16458,74 +17148,22 @@
       </p:sp>
       <p:sp>
         <p:nvSpPr>
-          <p:cNvPr id="6" name="brand-header">
-            <a:extLst xmlns:a="http://schemas.openxmlformats.org/drawingml/2006/main">
-              <a:ext uri="{FF2B5EF4-FFF2-40B4-BE49-F238E27FC236}">
-                <a16:creationId xmlns:a16="http://schemas.microsoft.com/office/drawing/2014/main" id="{A5ACD03A-7FB3-46FD-93F1-A5426D46DFFE}"/>
-              </a:ext>
-            </a:extLst>
-          </p:cNvPr>
-          <p:cNvSpPr>
-            <a:spLocks xmlns:a="http://schemas.openxmlformats.org/drawingml/2006/main" noGrp="1"/>
-          </p:cNvSpPr>
-          <p:nvPr/>
-        </p:nvSpPr>
-        <p:spPr>
-          <a:xfrm xmlns:a="http://schemas.openxmlformats.org/drawingml/2006/main">
-            <a:off x="0" y="0"/>
-            <a:ext cx="11887200" cy="685800"/>
-          </a:xfrm>
-          <a:prstGeom xmlns:a="http://schemas.openxmlformats.org/drawingml/2006/main" prst="rect">
-            <a:avLst/>
-          </a:prstGeom>
-          <a:solidFill xmlns:a="http://schemas.openxmlformats.org/drawingml/2006/main">
-            <a:srgbClr val="C8161E"/>
-          </a:solidFill>
-          <a:ln xmlns:a="http://schemas.openxmlformats.org/drawingml/2006/main" w="0">
-            <a:noFill/>
-          </a:ln>
-        </p:spPr>
-      </p:sp>
-      <p:pic>
-        <p:nvPicPr>
-          <p:cNvPr id="22" name=""/>
-          <p:cNvPicPr>
-            <a:picLocks xmlns:a="http://schemas.openxmlformats.org/drawingml/2006/main" noChangeAspect="1"/>
-          </p:cNvPicPr>
-          <p:nvPr/>
-        </p:nvPicPr>
-        <p:blipFill>
-          <a:blip xmlns:r="http://schemas.openxmlformats.org/officeDocument/2006/relationships" xmlns:a="http://schemas.openxmlformats.org/drawingml/2006/main" r:embed="R3e0a84e4530f4475"/>
-          <a:stretch xmlns:a="http://schemas.openxmlformats.org/drawingml/2006/main"/>
-        </p:blipFill>
-        <p:spPr>
-          <a:xfrm xmlns:a="http://schemas.openxmlformats.org/drawingml/2006/main">
-            <a:off x="323850" y="76200"/>
-            <a:ext cx="533400" cy="533400"/>
-          </a:xfrm>
-          <a:prstGeom xmlns:a="http://schemas.openxmlformats.org/drawingml/2006/main" prst="rect">
-            <a:avLst/>
-          </a:prstGeom>
-        </p:spPr>
-      </p:pic>
-      <p:sp>
-        <p:nvSpPr>
-          <p:cNvPr id="8" name="brand-title">
-            <a:extLst xmlns:a="http://schemas.openxmlformats.org/drawingml/2006/main">
-              <a:ext uri="{FF2B5EF4-FFF2-40B4-BE49-F238E27FC236}">
-                <a16:creationId xmlns:a16="http://schemas.microsoft.com/office/drawing/2014/main" id="{016B17E0-ABDF-4B9A-8C63-3EAA4B41A362}"/>
-              </a:ext>
-            </a:extLst>
-          </p:cNvPr>
-          <p:cNvSpPr>
-            <a:spLocks xmlns:a="http://schemas.openxmlformats.org/drawingml/2006/main" noGrp="1"/>
-          </p:cNvSpPr>
-          <p:nvPr/>
-        </p:nvSpPr>
-        <p:spPr>
-          <a:xfrm xmlns:a="http://schemas.openxmlformats.org/drawingml/2006/main">
-            <a:off x="1028700" y="66675"/>
-            <a:ext cx="10477500" cy="552450"/>
+          <p:cNvPr id="6" name="content-287">
+            <a:extLst xmlns:a="http://schemas.openxmlformats.org/drawingml/2006/main">
+              <a:ext uri="{FF2B5EF4-FFF2-40B4-BE49-F238E27FC236}">
+                <a16:creationId xmlns:a16="http://schemas.microsoft.com/office/drawing/2014/main" id="{BEE38A52-AFA5-49D0-8B49-61366725A52A}"/>
+              </a:ext>
+            </a:extLst>
+          </p:cNvPr>
+          <p:cNvSpPr>
+            <a:spLocks xmlns:a="http://schemas.openxmlformats.org/drawingml/2006/main" noGrp="1"/>
+          </p:cNvSpPr>
+          <p:nvPr/>
+        </p:nvSpPr>
+        <p:spPr>
+          <a:xfrm xmlns:a="http://schemas.openxmlformats.org/drawingml/2006/main">
+            <a:off x="609600" y="1581150"/>
+            <a:ext cx="2333625" cy="609600"/>
           </a:xfrm>
           <a:prstGeom xmlns:a="http://schemas.openxmlformats.org/drawingml/2006/main" prst="rect">
             <a:avLst/>
@@ -16536,7 +17174,7 @@
           </a:ln>
         </p:spPr>
         <p:txBody>
-          <a:bodyPr xmlns:a="http://schemas.openxmlformats.org/drawingml/2006/main" lIns="0" tIns="0" rIns="0" bIns="0" anchor="ctr"/>
+          <a:bodyPr xmlns:a="http://schemas.openxmlformats.org/drawingml/2006/main" lIns="0" tIns="0" rIns="0" bIns="0" anchor="t"/>
           <a:lstStyle xmlns:a="http://schemas.openxmlformats.org/drawingml/2006/main"/>
           <a:p xmlns:a="http://schemas.openxmlformats.org/drawingml/2006/main">
             <a:pPr algn="l">
@@ -16544,9 +17182,9 @@
                 <a:spcPct val="118000"/>
               </a:lnSpc>
               <a:buNone/>
-              <a:defRPr sz="3000" b="1">
-                <a:solidFill>
-                  <a:srgbClr val="FFFFFF"/>
+              <a:defRPr sz="2400" b="1">
+                <a:solidFill>
+                  <a:srgbClr val="1F4D78"/>
                 </a:solidFill>
                 <a:latin typeface="微软雅黑"/>
                 <a:ea typeface="微软雅黑"/>
@@ -16554,37 +17192,37 @@
               </a:defRPr>
             </a:pPr>
             <a:r>
-              <a:rPr sz="3000" b="1">
-                <a:solidFill>
-                  <a:srgbClr val="FFFFFF"/>
+              <a:rPr sz="2400" b="1">
+                <a:solidFill>
+                  <a:srgbClr val="1F4D78"/>
                 </a:solidFill>
                 <a:latin typeface="微软雅黑"/>
                 <a:ea typeface="微软雅黑"/>
                 <a:cs typeface="微软雅黑"/>
               </a:rPr>
-              <a:t>任务契约建立可检查边界</a:t>
-            </a:r>
-          </a:p>
-        </p:txBody>
-      </p:sp>
-      <p:sp>
-        <p:nvSpPr>
-          <p:cNvPr id="9" name="source">
-            <a:extLst xmlns:a="http://schemas.openxmlformats.org/drawingml/2006/main">
-              <a:ext uri="{FF2B5EF4-FFF2-40B4-BE49-F238E27FC236}">
-                <a16:creationId xmlns:a16="http://schemas.microsoft.com/office/drawing/2014/main" id="{C7342F7A-7D28-4C8E-A155-6917A2CF3015}"/>
-              </a:ext>
-            </a:extLst>
-          </p:cNvPr>
-          <p:cNvSpPr>
-            <a:spLocks xmlns:a="http://schemas.openxmlformats.org/drawingml/2006/main" noGrp="1"/>
-          </p:cNvSpPr>
-          <p:nvPr/>
-        </p:nvSpPr>
-        <p:spPr>
-          <a:xfrm xmlns:a="http://schemas.openxmlformats.org/drawingml/2006/main">
-            <a:off x="609600" y="6067425"/>
-            <a:ext cx="10763250" cy="209550"/>
+              <a:t>任务</a:t>
+            </a:r>
+          </a:p>
+        </p:txBody>
+      </p:sp>
+      <p:sp>
+        <p:nvSpPr>
+          <p:cNvPr id="7" name="content-288">
+            <a:extLst xmlns:a="http://schemas.openxmlformats.org/drawingml/2006/main">
+              <a:ext uri="{FF2B5EF4-FFF2-40B4-BE49-F238E27FC236}">
+                <a16:creationId xmlns:a16="http://schemas.microsoft.com/office/drawing/2014/main" id="{6645814C-8827-43AE-A8CD-E6E4B90CB6F0}"/>
+              </a:ext>
+            </a:extLst>
+          </p:cNvPr>
+          <p:cNvSpPr>
+            <a:spLocks xmlns:a="http://schemas.openxmlformats.org/drawingml/2006/main" noGrp="1"/>
+          </p:cNvSpPr>
+          <p:nvPr/>
+        </p:nvSpPr>
+        <p:spPr>
+          <a:xfrm xmlns:a="http://schemas.openxmlformats.org/drawingml/2006/main">
+            <a:off x="3181350" y="1581150"/>
+            <a:ext cx="8286750" cy="666750"/>
           </a:xfrm>
           <a:prstGeom xmlns:a="http://schemas.openxmlformats.org/drawingml/2006/main" prst="rect">
             <a:avLst/>
@@ -16603,9 +17241,9 @@
                 <a:spcPct val="118000"/>
               </a:lnSpc>
               <a:buNone/>
-              <a:defRPr sz="1100" b="0">
-                <a:solidFill>
-                  <a:srgbClr val="66727D"/>
+              <a:defRPr sz="2300" b="0">
+                <a:solidFill>
+                  <a:srgbClr val="27333D"/>
                 </a:solidFill>
                 <a:latin typeface="微软雅黑"/>
                 <a:ea typeface="微软雅黑"/>
@@ -16613,43 +17251,43 @@
               </a:defRPr>
             </a:pPr>
             <a:r>
-              <a:rPr sz="1100" b="0">
-                <a:solidFill>
-                  <a:srgbClr val="66727D"/>
+              <a:rPr sz="2300" b="0">
+                <a:solidFill>
+                  <a:srgbClr val="27333D"/>
                 </a:solidFill>
                 <a:latin typeface="微软雅黑"/>
                 <a:ea typeface="微软雅黑"/>
                 <a:cs typeface="微软雅黑"/>
               </a:rPr>
-              <a:t>来源：lesson-10/slides.md；课程工件与讲义见 speaker notes</a:t>
-            </a:r>
-          </a:p>
-        </p:txBody>
-      </p:sp>
-      <p:sp>
-        <p:nvSpPr>
-          <p:cNvPr id="10" name="doc-1-bg">
-            <a:extLst xmlns:a="http://schemas.openxmlformats.org/drawingml/2006/main">
-              <a:ext uri="{FF2B5EF4-FFF2-40B4-BE49-F238E27FC236}">
-                <a16:creationId xmlns:a16="http://schemas.microsoft.com/office/drawing/2014/main" id="{64AE5329-86E4-4680-83D4-5CB305D9BEA1}"/>
-              </a:ext>
-            </a:extLst>
-          </p:cNvPr>
-          <p:cNvSpPr>
-            <a:spLocks xmlns:a="http://schemas.openxmlformats.org/drawingml/2006/main" noGrp="1"/>
-          </p:cNvSpPr>
-          <p:nvPr/>
-        </p:nvSpPr>
-        <p:spPr>
-          <a:xfrm xmlns:a="http://schemas.openxmlformats.org/drawingml/2006/main">
-            <a:off x="609600" y="1381125"/>
-            <a:ext cx="6858000" cy="4095750"/>
+              <a:t>为 normalize_record 补缺失字段检查。</a:t>
+            </a:r>
+          </a:p>
+        </p:txBody>
+      </p:sp>
+      <p:sp>
+        <p:nvSpPr>
+          <p:cNvPr id="8" name="rule-289">
+            <a:extLst xmlns:a="http://schemas.openxmlformats.org/drawingml/2006/main">
+              <a:ext uri="{FF2B5EF4-FFF2-40B4-BE49-F238E27FC236}">
+                <a16:creationId xmlns:a16="http://schemas.microsoft.com/office/drawing/2014/main" id="{3C6FB1DF-A7A2-46D5-A02C-86A17BE05B53}"/>
+              </a:ext>
+            </a:extLst>
+          </p:cNvPr>
+          <p:cNvSpPr>
+            <a:spLocks xmlns:a="http://schemas.openxmlformats.org/drawingml/2006/main" noGrp="1"/>
+          </p:cNvSpPr>
+          <p:nvPr/>
+        </p:nvSpPr>
+        <p:spPr>
+          <a:xfrm xmlns:a="http://schemas.openxmlformats.org/drawingml/2006/main">
+            <a:off x="609600" y="2343150"/>
+            <a:ext cx="10858500" cy="14288"/>
           </a:xfrm>
           <a:prstGeom xmlns:a="http://schemas.openxmlformats.org/drawingml/2006/main" prst="rect">
             <a:avLst/>
           </a:prstGeom>
           <a:solidFill xmlns:a="http://schemas.openxmlformats.org/drawingml/2006/main">
-            <a:srgbClr val="F4F6F8"/>
+            <a:srgbClr val="CDD5DB"/>
           </a:solidFill>
           <a:ln xmlns:a="http://schemas.openxmlformats.org/drawingml/2006/main" w="0">
             <a:noFill/>
@@ -16658,52 +17296,22 @@
       </p:sp>
       <p:sp>
         <p:nvSpPr>
-          <p:cNvPr id="11" name="doc-1-title-bg">
-            <a:extLst xmlns:a="http://schemas.openxmlformats.org/drawingml/2006/main">
-              <a:ext uri="{FF2B5EF4-FFF2-40B4-BE49-F238E27FC236}">
-                <a16:creationId xmlns:a16="http://schemas.microsoft.com/office/drawing/2014/main" id="{486619BD-8CCD-4DD9-8638-D47A92C66F75}"/>
-              </a:ext>
-            </a:extLst>
-          </p:cNvPr>
-          <p:cNvSpPr>
-            <a:spLocks xmlns:a="http://schemas.openxmlformats.org/drawingml/2006/main" noGrp="1"/>
-          </p:cNvSpPr>
-          <p:nvPr/>
-        </p:nvSpPr>
-        <p:spPr>
-          <a:xfrm xmlns:a="http://schemas.openxmlformats.org/drawingml/2006/main">
-            <a:off x="609600" y="1381125"/>
-            <a:ext cx="3429000" cy="323850"/>
-          </a:xfrm>
-          <a:prstGeom xmlns:a="http://schemas.openxmlformats.org/drawingml/2006/main" prst="rect">
-            <a:avLst/>
-          </a:prstGeom>
-          <a:solidFill xmlns:a="http://schemas.openxmlformats.org/drawingml/2006/main">
-            <a:srgbClr val="1F4D78"/>
-          </a:solidFill>
-          <a:ln xmlns:a="http://schemas.openxmlformats.org/drawingml/2006/main" w="0">
-            <a:noFill/>
-          </a:ln>
-        </p:spPr>
-      </p:sp>
-      <p:sp>
-        <p:nvSpPr>
-          <p:cNvPr id="12" name="doc-1-title">
-            <a:extLst xmlns:a="http://schemas.openxmlformats.org/drawingml/2006/main">
-              <a:ext uri="{FF2B5EF4-FFF2-40B4-BE49-F238E27FC236}">
-                <a16:creationId xmlns:a16="http://schemas.microsoft.com/office/drawing/2014/main" id="{A0FC54D1-997A-485F-9C53-A2A2B42D152B}"/>
-              </a:ext>
-            </a:extLst>
-          </p:cNvPr>
-          <p:cNvSpPr>
-            <a:spLocks xmlns:a="http://schemas.openxmlformats.org/drawingml/2006/main" noGrp="1"/>
-          </p:cNvSpPr>
-          <p:nvPr/>
-        </p:nvSpPr>
-        <p:spPr>
-          <a:xfrm xmlns:a="http://schemas.openxmlformats.org/drawingml/2006/main">
-            <a:off x="685800" y="1400175"/>
-            <a:ext cx="3276600" cy="285750"/>
+          <p:cNvPr id="9" name="content-290">
+            <a:extLst xmlns:a="http://schemas.openxmlformats.org/drawingml/2006/main">
+              <a:ext uri="{FF2B5EF4-FFF2-40B4-BE49-F238E27FC236}">
+                <a16:creationId xmlns:a16="http://schemas.microsoft.com/office/drawing/2014/main" id="{1023D8FB-ABE8-4812-AFAC-B34E5F59236C}"/>
+              </a:ext>
+            </a:extLst>
+          </p:cNvPr>
+          <p:cNvSpPr>
+            <a:spLocks xmlns:a="http://schemas.openxmlformats.org/drawingml/2006/main" noGrp="1"/>
+          </p:cNvSpPr>
+          <p:nvPr/>
+        </p:nvSpPr>
+        <p:spPr>
+          <a:xfrm xmlns:a="http://schemas.openxmlformats.org/drawingml/2006/main">
+            <a:off x="609600" y="2609850"/>
+            <a:ext cx="2333625" cy="609600"/>
           </a:xfrm>
           <a:prstGeom xmlns:a="http://schemas.openxmlformats.org/drawingml/2006/main" prst="rect">
             <a:avLst/>
@@ -16714,7 +17322,7 @@
           </a:ln>
         </p:spPr>
         <p:txBody>
-          <a:bodyPr xmlns:a="http://schemas.openxmlformats.org/drawingml/2006/main" lIns="0" tIns="0" rIns="0" bIns="0" anchor="ctr"/>
+          <a:bodyPr xmlns:a="http://schemas.openxmlformats.org/drawingml/2006/main" lIns="0" tIns="0" rIns="0" bIns="0" anchor="t"/>
           <a:lstStyle xmlns:a="http://schemas.openxmlformats.org/drawingml/2006/main"/>
           <a:p xmlns:a="http://schemas.openxmlformats.org/drawingml/2006/main">
             <a:pPr algn="l">
@@ -16722,9 +17330,9 @@
                 <a:spcPct val="118000"/>
               </a:lnSpc>
               <a:buNone/>
-              <a:defRPr sz="1800" b="1">
-                <a:solidFill>
-                  <a:srgbClr val="FFFFFF"/>
+              <a:defRPr sz="2400" b="1">
+                <a:solidFill>
+                  <a:srgbClr val="1F4D78"/>
                 </a:solidFill>
                 <a:latin typeface="微软雅黑"/>
                 <a:ea typeface="微软雅黑"/>
@@ -16732,37 +17340,37 @@
               </a:defRPr>
             </a:pPr>
             <a:r>
-              <a:rPr sz="1800" b="1">
-                <a:solidFill>
-                  <a:srgbClr val="FFFFFF"/>
+              <a:rPr sz="2400" b="1">
+                <a:solidFill>
+                  <a:srgbClr val="1F4D78"/>
                 </a:solidFill>
                 <a:latin typeface="微软雅黑"/>
                 <a:ea typeface="微软雅黑"/>
                 <a:cs typeface="微软雅黑"/>
               </a:rPr>
-              <a:t>agent-tasks/task-01.md</a:t>
-            </a:r>
-          </a:p>
-        </p:txBody>
-      </p:sp>
-      <p:sp>
-        <p:nvSpPr>
-          <p:cNvPr id="13" name="doc-1-line-0">
-            <a:extLst xmlns:a="http://schemas.openxmlformats.org/drawingml/2006/main">
-              <a:ext uri="{FF2B5EF4-FFF2-40B4-BE49-F238E27FC236}">
-                <a16:creationId xmlns:a16="http://schemas.microsoft.com/office/drawing/2014/main" id="{396C6C38-E4F5-49A0-A1CA-B7EE74A39448}"/>
-              </a:ext>
-            </a:extLst>
-          </p:cNvPr>
-          <p:cNvSpPr>
-            <a:spLocks xmlns:a="http://schemas.openxmlformats.org/drawingml/2006/main" noGrp="1"/>
-          </p:cNvSpPr>
-          <p:nvPr/>
-        </p:nvSpPr>
-        <p:spPr>
-          <a:xfrm xmlns:a="http://schemas.openxmlformats.org/drawingml/2006/main">
-            <a:off x="838200" y="1876425"/>
-            <a:ext cx="6400800" cy="670560"/>
+              <a:t>只改</a:t>
+            </a:r>
+          </a:p>
+        </p:txBody>
+      </p:sp>
+      <p:sp>
+        <p:nvSpPr>
+          <p:cNvPr id="10" name="content-291">
+            <a:extLst xmlns:a="http://schemas.openxmlformats.org/drawingml/2006/main">
+              <a:ext uri="{FF2B5EF4-FFF2-40B4-BE49-F238E27FC236}">
+                <a16:creationId xmlns:a16="http://schemas.microsoft.com/office/drawing/2014/main" id="{261CDF55-F59E-435B-887F-9BCF73BE9C82}"/>
+              </a:ext>
+            </a:extLst>
+          </p:cNvPr>
+          <p:cNvSpPr>
+            <a:spLocks xmlns:a="http://schemas.openxmlformats.org/drawingml/2006/main" noGrp="1"/>
+          </p:cNvSpPr>
+          <p:nvPr/>
+        </p:nvSpPr>
+        <p:spPr>
+          <a:xfrm xmlns:a="http://schemas.openxmlformats.org/drawingml/2006/main">
+            <a:off x="3181350" y="2609850"/>
+            <a:ext cx="8286750" cy="666750"/>
           </a:xfrm>
           <a:prstGeom xmlns:a="http://schemas.openxmlformats.org/drawingml/2006/main" prst="rect">
             <a:avLst/>
@@ -16773,7 +17381,7 @@
           </a:ln>
         </p:spPr>
         <p:txBody>
-          <a:bodyPr xmlns:a="http://schemas.openxmlformats.org/drawingml/2006/main" lIns="0" tIns="0" rIns="0" bIns="0" anchor="ctr"/>
+          <a:bodyPr xmlns:a="http://schemas.openxmlformats.org/drawingml/2006/main" lIns="0" tIns="0" rIns="0" bIns="0" anchor="t"/>
           <a:lstStyle xmlns:a="http://schemas.openxmlformats.org/drawingml/2006/main"/>
           <a:p xmlns:a="http://schemas.openxmlformats.org/drawingml/2006/main">
             <a:pPr algn="l">
@@ -16781,7 +17389,7 @@
                 <a:spcPct val="118000"/>
               </a:lnSpc>
               <a:buNone/>
-              <a:defRPr sz="2200" b="0">
+              <a:defRPr sz="2300" b="0">
                 <a:solidFill>
                   <a:srgbClr val="27333D"/>
                 </a:solidFill>
@@ -16791,7 +17399,7 @@
               </a:defRPr>
             </a:pPr>
             <a:r>
-              <a:rPr sz="2200" b="0">
+              <a:rPr sz="2300" b="0">
                 <a:solidFill>
                   <a:srgbClr val="27333D"/>
                 </a:solidFill>
@@ -16799,29 +17407,59 @@
                 <a:ea typeface="微软雅黑"/>
                 <a:cs typeface="微软雅黑"/>
               </a:rPr>
-              <a:t>Context｜generate_summary()；H1；不暴露人工基准</a:t>
-            </a:r>
-          </a:p>
-        </p:txBody>
-      </p:sp>
-      <p:sp>
-        <p:nvSpPr>
-          <p:cNvPr id="14" name="doc-1-line-1">
-            <a:extLst xmlns:a="http://schemas.openxmlformats.org/drawingml/2006/main">
-              <a:ext uri="{FF2B5EF4-FFF2-40B4-BE49-F238E27FC236}">
-                <a16:creationId xmlns:a16="http://schemas.microsoft.com/office/drawing/2014/main" id="{5A754CF5-77B1-4995-A784-F7A646A2F486}"/>
-              </a:ext>
-            </a:extLst>
-          </p:cNvPr>
-          <p:cNvSpPr>
-            <a:spLocks xmlns:a="http://schemas.openxmlformats.org/drawingml/2006/main" noGrp="1"/>
-          </p:cNvSpPr>
-          <p:nvPr/>
-        </p:nvSpPr>
-        <p:spPr>
-          <a:xfrm xmlns:a="http://schemas.openxmlformats.org/drawingml/2006/main">
-            <a:off x="838200" y="2558415"/>
-            <a:ext cx="6400800" cy="670560"/>
+              <a:t>after/generate.py；测试与样例数据只读。</a:t>
+            </a:r>
+          </a:p>
+        </p:txBody>
+      </p:sp>
+      <p:sp>
+        <p:nvSpPr>
+          <p:cNvPr id="11" name="rule-292">
+            <a:extLst xmlns:a="http://schemas.openxmlformats.org/drawingml/2006/main">
+              <a:ext uri="{FF2B5EF4-FFF2-40B4-BE49-F238E27FC236}">
+                <a16:creationId xmlns:a16="http://schemas.microsoft.com/office/drawing/2014/main" id="{DDD95EC8-132B-4B14-A4DE-24284DE92D1C}"/>
+              </a:ext>
+            </a:extLst>
+          </p:cNvPr>
+          <p:cNvSpPr>
+            <a:spLocks xmlns:a="http://schemas.openxmlformats.org/drawingml/2006/main" noGrp="1"/>
+          </p:cNvSpPr>
+          <p:nvPr/>
+        </p:nvSpPr>
+        <p:spPr>
+          <a:xfrm xmlns:a="http://schemas.openxmlformats.org/drawingml/2006/main">
+            <a:off x="609600" y="3371850"/>
+            <a:ext cx="10858500" cy="14288"/>
+          </a:xfrm>
+          <a:prstGeom xmlns:a="http://schemas.openxmlformats.org/drawingml/2006/main" prst="rect">
+            <a:avLst/>
+          </a:prstGeom>
+          <a:solidFill xmlns:a="http://schemas.openxmlformats.org/drawingml/2006/main">
+            <a:srgbClr val="CDD5DB"/>
+          </a:solidFill>
+          <a:ln xmlns:a="http://schemas.openxmlformats.org/drawingml/2006/main" w="0">
+            <a:noFill/>
+          </a:ln>
+        </p:spPr>
+      </p:sp>
+      <p:sp>
+        <p:nvSpPr>
+          <p:cNvPr id="12" name="content-293">
+            <a:extLst xmlns:a="http://schemas.openxmlformats.org/drawingml/2006/main">
+              <a:ext uri="{FF2B5EF4-FFF2-40B4-BE49-F238E27FC236}">
+                <a16:creationId xmlns:a16="http://schemas.microsoft.com/office/drawing/2014/main" id="{A9E6C55A-0108-4154-9EB6-68953BFB4D53}"/>
+              </a:ext>
+            </a:extLst>
+          </p:cNvPr>
+          <p:cNvSpPr>
+            <a:spLocks xmlns:a="http://schemas.openxmlformats.org/drawingml/2006/main" noGrp="1"/>
+          </p:cNvSpPr>
+          <p:nvPr/>
+        </p:nvSpPr>
+        <p:spPr>
+          <a:xfrm xmlns:a="http://schemas.openxmlformats.org/drawingml/2006/main">
+            <a:off x="609600" y="3638550"/>
+            <a:ext cx="2333625" cy="609600"/>
           </a:xfrm>
           <a:prstGeom xmlns:a="http://schemas.openxmlformats.org/drawingml/2006/main" prst="rect">
             <a:avLst/>
@@ -16832,7 +17470,7 @@
           </a:ln>
         </p:spPr>
         <p:txBody>
-          <a:bodyPr xmlns:a="http://schemas.openxmlformats.org/drawingml/2006/main" lIns="0" tIns="0" rIns="0" bIns="0" anchor="ctr"/>
+          <a:bodyPr xmlns:a="http://schemas.openxmlformats.org/drawingml/2006/main" lIns="0" tIns="0" rIns="0" bIns="0" anchor="t"/>
           <a:lstStyle xmlns:a="http://schemas.openxmlformats.org/drawingml/2006/main"/>
           <a:p xmlns:a="http://schemas.openxmlformats.org/drawingml/2006/main">
             <a:pPr algn="l">
@@ -16840,9 +17478,9 @@
                 <a:spcPct val="118000"/>
               </a:lnSpc>
               <a:buNone/>
-              <a:defRPr sz="2200" b="0">
-                <a:solidFill>
-                  <a:srgbClr val="27333D"/>
+              <a:defRPr sz="2400" b="1">
+                <a:solidFill>
+                  <a:srgbClr val="1F4D78"/>
                 </a:solidFill>
                 <a:latin typeface="微软雅黑"/>
                 <a:ea typeface="微软雅黑"/>
@@ -16850,37 +17488,37 @@
               </a:defRPr>
             </a:pPr>
             <a:r>
-              <a:rPr sz="2200" b="0">
-                <a:solidFill>
-                  <a:srgbClr val="27333D"/>
+              <a:rPr sz="2400" b="1">
+                <a:solidFill>
+                  <a:srgbClr val="1F4D78"/>
                 </a:solidFill>
                 <a:latin typeface="微软雅黑"/>
                 <a:ea typeface="微软雅黑"/>
                 <a:cs typeface="微软雅黑"/>
               </a:rPr>
-              <a:t>Permission｜只改 generate.py；只运行指定 pytest</a:t>
-            </a:r>
-          </a:p>
-        </p:txBody>
-      </p:sp>
-      <p:sp>
-        <p:nvSpPr>
-          <p:cNvPr id="15" name="doc-1-line-2">
-            <a:extLst xmlns:a="http://schemas.openxmlformats.org/drawingml/2006/main">
-              <a:ext uri="{FF2B5EF4-FFF2-40B4-BE49-F238E27FC236}">
-                <a16:creationId xmlns:a16="http://schemas.microsoft.com/office/drawing/2014/main" id="{076C9C53-AACB-4F3C-8C1C-36851195782D}"/>
-              </a:ext>
-            </a:extLst>
-          </p:cNvPr>
-          <p:cNvSpPr>
-            <a:spLocks xmlns:a="http://schemas.openxmlformats.org/drawingml/2006/main" noGrp="1"/>
-          </p:cNvSpPr>
-          <p:nvPr/>
-        </p:nvSpPr>
-        <p:spPr>
-          <a:xfrm xmlns:a="http://schemas.openxmlformats.org/drawingml/2006/main">
-            <a:off x="838200" y="3240405"/>
-            <a:ext cx="6400800" cy="670560"/>
+              <a:t>成功</a:t>
+            </a:r>
+          </a:p>
+        </p:txBody>
+      </p:sp>
+      <p:sp>
+        <p:nvSpPr>
+          <p:cNvPr id="13" name="content-294">
+            <a:extLst xmlns:a="http://schemas.openxmlformats.org/drawingml/2006/main">
+              <a:ext uri="{FF2B5EF4-FFF2-40B4-BE49-F238E27FC236}">
+                <a16:creationId xmlns:a16="http://schemas.microsoft.com/office/drawing/2014/main" id="{00E00D68-EBD5-47B5-B9FF-065D4153A5DE}"/>
+              </a:ext>
+            </a:extLst>
+          </p:cNvPr>
+          <p:cNvSpPr>
+            <a:spLocks xmlns:a="http://schemas.openxmlformats.org/drawingml/2006/main" noGrp="1"/>
+          </p:cNvSpPr>
+          <p:nvPr/>
+        </p:nvSpPr>
+        <p:spPr>
+          <a:xfrm xmlns:a="http://schemas.openxmlformats.org/drawingml/2006/main">
+            <a:off x="3181350" y="3638550"/>
+            <a:ext cx="8286750" cy="666750"/>
           </a:xfrm>
           <a:prstGeom xmlns:a="http://schemas.openxmlformats.org/drawingml/2006/main" prst="rect">
             <a:avLst/>
@@ -16891,7 +17529,7 @@
           </a:ln>
         </p:spPr>
         <p:txBody>
-          <a:bodyPr xmlns:a="http://schemas.openxmlformats.org/drawingml/2006/main" lIns="0" tIns="0" rIns="0" bIns="0" anchor="ctr"/>
+          <a:bodyPr xmlns:a="http://schemas.openxmlformats.org/drawingml/2006/main" lIns="0" tIns="0" rIns="0" bIns="0" anchor="t"/>
           <a:lstStyle xmlns:a="http://schemas.openxmlformats.org/drawingml/2006/main"/>
           <a:p xmlns:a="http://schemas.openxmlformats.org/drawingml/2006/main">
             <a:pPr algn="l">
@@ -16899,7 +17537,7 @@
                 <a:spcPct val="118000"/>
               </a:lnSpc>
               <a:buNone/>
-              <a:defRPr sz="2200" b="0">
+              <a:defRPr sz="2300" b="0">
                 <a:solidFill>
                   <a:srgbClr val="27333D"/>
                 </a:solidFill>
@@ -16909,7 +17547,7 @@
               </a:defRPr>
             </a:pPr>
             <a:r>
-              <a:rPr sz="2200" b="0">
+              <a:rPr sz="2300" b="0">
                 <a:solidFill>
                   <a:srgbClr val="27333D"/>
                 </a:solidFill>
@@ -16917,29 +17555,59 @@
                 <a:ea typeface="微软雅黑"/>
                 <a:cs typeface="微软雅黑"/>
               </a:rPr>
-              <a:t>Non-goal｜不换模型、不改 prompt、不重跑历史实验</a:t>
-            </a:r>
-          </a:p>
-        </p:txBody>
-      </p:sp>
-      <p:sp>
-        <p:nvSpPr>
-          <p:cNvPr id="16" name="doc-1-line-3">
-            <a:extLst xmlns:a="http://schemas.openxmlformats.org/drawingml/2006/main">
-              <a:ext uri="{FF2B5EF4-FFF2-40B4-BE49-F238E27FC236}">
-                <a16:creationId xmlns:a16="http://schemas.microsoft.com/office/drawing/2014/main" id="{B3E35EED-ADDC-464D-A72D-5CFC063FED14}"/>
-              </a:ext>
-            </a:extLst>
-          </p:cNvPr>
-          <p:cNvSpPr>
-            <a:spLocks xmlns:a="http://schemas.openxmlformats.org/drawingml/2006/main" noGrp="1"/>
-          </p:cNvSpPr>
-          <p:nvPr/>
-        </p:nvSpPr>
-        <p:spPr>
-          <a:xfrm xmlns:a="http://schemas.openxmlformats.org/drawingml/2006/main">
-            <a:off x="838200" y="3922395"/>
-            <a:ext cx="6400800" cy="670560"/>
+              <a:t>正常输入通过；缺字段给明确错误。</a:t>
+            </a:r>
+          </a:p>
+        </p:txBody>
+      </p:sp>
+      <p:sp>
+        <p:nvSpPr>
+          <p:cNvPr id="14" name="rule-295">
+            <a:extLst xmlns:a="http://schemas.openxmlformats.org/drawingml/2006/main">
+              <a:ext uri="{FF2B5EF4-FFF2-40B4-BE49-F238E27FC236}">
+                <a16:creationId xmlns:a16="http://schemas.microsoft.com/office/drawing/2014/main" id="{EB588CD4-657E-4EF7-AFAC-6F195E5A69FC}"/>
+              </a:ext>
+            </a:extLst>
+          </p:cNvPr>
+          <p:cNvSpPr>
+            <a:spLocks xmlns:a="http://schemas.openxmlformats.org/drawingml/2006/main" noGrp="1"/>
+          </p:cNvSpPr>
+          <p:nvPr/>
+        </p:nvSpPr>
+        <p:spPr>
+          <a:xfrm xmlns:a="http://schemas.openxmlformats.org/drawingml/2006/main">
+            <a:off x="609600" y="4400550"/>
+            <a:ext cx="10858500" cy="14288"/>
+          </a:xfrm>
+          <a:prstGeom xmlns:a="http://schemas.openxmlformats.org/drawingml/2006/main" prst="rect">
+            <a:avLst/>
+          </a:prstGeom>
+          <a:solidFill xmlns:a="http://schemas.openxmlformats.org/drawingml/2006/main">
+            <a:srgbClr val="CDD5DB"/>
+          </a:solidFill>
+          <a:ln xmlns:a="http://schemas.openxmlformats.org/drawingml/2006/main" w="0">
+            <a:noFill/>
+          </a:ln>
+        </p:spPr>
+      </p:sp>
+      <p:sp>
+        <p:nvSpPr>
+          <p:cNvPr id="15" name="content-296">
+            <a:extLst xmlns:a="http://schemas.openxmlformats.org/drawingml/2006/main">
+              <a:ext uri="{FF2B5EF4-FFF2-40B4-BE49-F238E27FC236}">
+                <a16:creationId xmlns:a16="http://schemas.microsoft.com/office/drawing/2014/main" id="{56EE58B0-57FD-47D2-A9EF-B36D08552F63}"/>
+              </a:ext>
+            </a:extLst>
+          </p:cNvPr>
+          <p:cNvSpPr>
+            <a:spLocks xmlns:a="http://schemas.openxmlformats.org/drawingml/2006/main" noGrp="1"/>
+          </p:cNvSpPr>
+          <p:nvPr/>
+        </p:nvSpPr>
+        <p:spPr>
+          <a:xfrm xmlns:a="http://schemas.openxmlformats.org/drawingml/2006/main">
+            <a:off x="609600" y="4667250"/>
+            <a:ext cx="2333625" cy="609600"/>
           </a:xfrm>
           <a:prstGeom xmlns:a="http://schemas.openxmlformats.org/drawingml/2006/main" prst="rect">
             <a:avLst/>
@@ -16950,7 +17618,7 @@
           </a:ln>
         </p:spPr>
         <p:txBody>
-          <a:bodyPr xmlns:a="http://schemas.openxmlformats.org/drawingml/2006/main" lIns="0" tIns="0" rIns="0" bIns="0" anchor="ctr"/>
+          <a:bodyPr xmlns:a="http://schemas.openxmlformats.org/drawingml/2006/main" lIns="0" tIns="0" rIns="0" bIns="0" anchor="t"/>
           <a:lstStyle xmlns:a="http://schemas.openxmlformats.org/drawingml/2006/main"/>
           <a:p xmlns:a="http://schemas.openxmlformats.org/drawingml/2006/main">
             <a:pPr algn="l">
@@ -16958,9 +17626,9 @@
                 <a:spcPct val="118000"/>
               </a:lnSpc>
               <a:buNone/>
-              <a:defRPr sz="2200" b="0">
-                <a:solidFill>
-                  <a:srgbClr val="27333D"/>
+              <a:defRPr sz="2400" b="1">
+                <a:solidFill>
+                  <a:srgbClr val="1F4D78"/>
                 </a:solidFill>
                 <a:latin typeface="微软雅黑"/>
                 <a:ea typeface="微软雅黑"/>
@@ -16968,37 +17636,37 @@
               </a:defRPr>
             </a:pPr>
             <a:r>
-              <a:rPr sz="2200" b="0">
-                <a:solidFill>
-                  <a:srgbClr val="27333D"/>
+              <a:rPr sz="2400" b="1">
+                <a:solidFill>
+                  <a:srgbClr val="1F4D78"/>
                 </a:solidFill>
                 <a:latin typeface="微软雅黑"/>
                 <a:ea typeface="微软雅黑"/>
                 <a:cs typeface="微软雅黑"/>
               </a:rPr>
-              <a:t>人工审核点｜diff 写回前；测试失败时；协议改动时</a:t>
-            </a:r>
-          </a:p>
-        </p:txBody>
-      </p:sp>
-      <p:sp>
-        <p:nvSpPr>
-          <p:cNvPr id="17" name="doc-1-line-4">
-            <a:extLst xmlns:a="http://schemas.openxmlformats.org/drawingml/2006/main">
-              <a:ext uri="{FF2B5EF4-FFF2-40B4-BE49-F238E27FC236}">
-                <a16:creationId xmlns:a16="http://schemas.microsoft.com/office/drawing/2014/main" id="{DBA5EB57-AB52-4F5F-B34E-D190FDBACBCA}"/>
-              </a:ext>
-            </a:extLst>
-          </p:cNvPr>
-          <p:cNvSpPr>
-            <a:spLocks xmlns:a="http://schemas.openxmlformats.org/drawingml/2006/main" noGrp="1"/>
-          </p:cNvSpPr>
-          <p:nvPr/>
-        </p:nvSpPr>
-        <p:spPr>
-          <a:xfrm xmlns:a="http://schemas.openxmlformats.org/drawingml/2006/main">
-            <a:off x="838200" y="4604385"/>
-            <a:ext cx="6400800" cy="670560"/>
+              <a:t>审核</a:t>
+            </a:r>
+          </a:p>
+        </p:txBody>
+      </p:sp>
+      <p:sp>
+        <p:nvSpPr>
+          <p:cNvPr id="16" name="content-297">
+            <a:extLst xmlns:a="http://schemas.openxmlformats.org/drawingml/2006/main">
+              <a:ext uri="{FF2B5EF4-FFF2-40B4-BE49-F238E27FC236}">
+                <a16:creationId xmlns:a16="http://schemas.microsoft.com/office/drawing/2014/main" id="{D2240AB9-048E-468E-A0E2-5F41AD2E24BF}"/>
+              </a:ext>
+            </a:extLst>
+          </p:cNvPr>
+          <p:cNvSpPr>
+            <a:spLocks xmlns:a="http://schemas.openxmlformats.org/drawingml/2006/main" noGrp="1"/>
+          </p:cNvSpPr>
+          <p:nvPr/>
+        </p:nvSpPr>
+        <p:spPr>
+          <a:xfrm xmlns:a="http://schemas.openxmlformats.org/drawingml/2006/main">
+            <a:off x="3181350" y="4667250"/>
+            <a:ext cx="8286750" cy="666750"/>
           </a:xfrm>
           <a:prstGeom xmlns:a="http://schemas.openxmlformats.org/drawingml/2006/main" prst="rect">
             <a:avLst/>
@@ -17009,7 +17677,7 @@
           </a:ln>
         </p:spPr>
         <p:txBody>
-          <a:bodyPr xmlns:a="http://schemas.openxmlformats.org/drawingml/2006/main" lIns="0" tIns="0" rIns="0" bIns="0" anchor="ctr"/>
+          <a:bodyPr xmlns:a="http://schemas.openxmlformats.org/drawingml/2006/main" lIns="0" tIns="0" rIns="0" bIns="0" anchor="t"/>
           <a:lstStyle xmlns:a="http://schemas.openxmlformats.org/drawingml/2006/main"/>
           <a:p xmlns:a="http://schemas.openxmlformats.org/drawingml/2006/main">
             <a:pPr algn="l">
@@ -17017,7 +17685,7 @@
                 <a:spcPct val="118000"/>
               </a:lnSpc>
               <a:buNone/>
-              <a:defRPr sz="2200" b="0">
+              <a:defRPr sz="2300" b="0">
                 <a:solidFill>
                   <a:srgbClr val="27333D"/>
                 </a:solidFill>
@@ -17027,7 +17695,7 @@
               </a:defRPr>
             </a:pPr>
             <a:r>
-              <a:rPr sz="2200" b="0">
+              <a:rPr sz="2300" b="0">
                 <a:solidFill>
                   <a:srgbClr val="27333D"/>
                 </a:solidFill>
@@ -17035,69 +17703,40 @@
                 <a:ea typeface="微软雅黑"/>
                 <a:cs typeface="微软雅黑"/>
               </a:rPr>
-              <a:t>失败恢复｜超时停止；保留原始输出；越权拒绝并记录</a:t>
-            </a:r>
-          </a:p>
-        </p:txBody>
-      </p:sp>
-      <p:sp>
-        <p:nvSpPr>
-          <p:cNvPr id="18" name="doc-decision">
-            <a:extLst xmlns:a="http://schemas.openxmlformats.org/drawingml/2006/main">
-              <a:ext uri="{FF2B5EF4-FFF2-40B4-BE49-F238E27FC236}">
-                <a16:creationId xmlns:a16="http://schemas.microsoft.com/office/drawing/2014/main" id="{365AD3B3-77E0-4F5E-B637-29131CEACC6E}"/>
-              </a:ext>
-            </a:extLst>
-          </p:cNvPr>
-          <p:cNvSpPr>
-            <a:spLocks xmlns:a="http://schemas.openxmlformats.org/drawingml/2006/main" noGrp="1"/>
-          </p:cNvSpPr>
-          <p:nvPr/>
-        </p:nvSpPr>
-        <p:spPr>
-          <a:xfrm xmlns:a="http://schemas.openxmlformats.org/drawingml/2006/main">
-            <a:off x="7858125" y="2095500"/>
-            <a:ext cx="3333750" cy="1428750"/>
-          </a:xfrm>
-          <a:prstGeom xmlns:a="http://schemas.openxmlformats.org/drawingml/2006/main" prst="rect">
-            <a:avLst/>
-          </a:prstGeom>
-          <a:noFill xmlns:a="http://schemas.openxmlformats.org/drawingml/2006/main"/>
-          <a:ln xmlns:a="http://schemas.openxmlformats.org/drawingml/2006/main" w="0">
-            <a:noFill/>
-          </a:ln>
-        </p:spPr>
-        <p:txBody>
-          <a:bodyPr xmlns:a="http://schemas.openxmlformats.org/drawingml/2006/main" lIns="0" tIns="0" rIns="0" bIns="0" anchor="t"/>
-          <a:lstStyle xmlns:a="http://schemas.openxmlformats.org/drawingml/2006/main"/>
-          <a:p xmlns:a="http://schemas.openxmlformats.org/drawingml/2006/main">
-            <a:pPr algn="l">
-              <a:lnSpc>
-                <a:spcPct val="118000"/>
-              </a:lnSpc>
-              <a:buNone/>
-              <a:defRPr sz="2600" b="1">
-                <a:solidFill>
-                  <a:srgbClr val="1F4D78"/>
-                </a:solidFill>
-                <a:latin typeface="微软雅黑"/>
-                <a:ea typeface="微软雅黑"/>
-                <a:cs typeface="微软雅黑"/>
-              </a:defRPr>
-            </a:pPr>
-            <a:r>
-              <a:rPr sz="2600" b="1">
-                <a:solidFill>
-                  <a:srgbClr val="1F4D78"/>
-                </a:solidFill>
-                <a:latin typeface="微软雅黑"/>
-                <a:ea typeface="微软雅黑"/>
-                <a:cs typeface="微软雅黑"/>
-              </a:rPr>
-              <a:t>独立检查者能据此复核本次执行。</a:t>
-            </a:r>
-          </a:p>
-        </p:txBody>
+              <a:t>先看候选 diff，再运行既定测试并核对日志。</a:t>
+            </a:r>
+          </a:p>
+        </p:txBody>
+      </p:sp>
+      <p:sp>
+        <p:nvSpPr>
+          <p:cNvPr id="17" name="rule-298">
+            <a:extLst xmlns:a="http://schemas.openxmlformats.org/drawingml/2006/main">
+              <a:ext uri="{FF2B5EF4-FFF2-40B4-BE49-F238E27FC236}">
+                <a16:creationId xmlns:a16="http://schemas.microsoft.com/office/drawing/2014/main" id="{A7EC56F8-CE06-477B-B570-3B415F975E1F}"/>
+              </a:ext>
+            </a:extLst>
+          </p:cNvPr>
+          <p:cNvSpPr>
+            <a:spLocks xmlns:a="http://schemas.openxmlformats.org/drawingml/2006/main" noGrp="1"/>
+          </p:cNvSpPr>
+          <p:nvPr/>
+        </p:nvSpPr>
+        <p:spPr>
+          <a:xfrm xmlns:a="http://schemas.openxmlformats.org/drawingml/2006/main">
+            <a:off x="609600" y="5429250"/>
+            <a:ext cx="10858500" cy="14288"/>
+          </a:xfrm>
+          <a:prstGeom xmlns:a="http://schemas.openxmlformats.org/drawingml/2006/main" prst="rect">
+            <a:avLst/>
+          </a:prstGeom>
+          <a:solidFill xmlns:a="http://schemas.openxmlformats.org/drawingml/2006/main">
+            <a:srgbClr val="CDD5DB"/>
+          </a:solidFill>
+          <a:ln xmlns:a="http://schemas.openxmlformats.org/drawingml/2006/main" w="0">
+            <a:noFill/>
+          </a:ln>
+        </p:spPr>
       </p:sp>
     </p:spTree>
     <p:extLst>
@@ -17196,76 +17835,296 @@
           </a:p>
         </p:txBody>
       </p:sp>
-      <p:sp>
-        <p:nvSpPr>
-          <p:cNvPr id="6" name="brand-header">
-            <a:extLst xmlns:a="http://schemas.openxmlformats.org/drawingml/2006/main">
-              <a:ext uri="{FF2B5EF4-FFF2-40B4-BE49-F238E27FC236}">
-                <a16:creationId xmlns:a16="http://schemas.microsoft.com/office/drawing/2014/main" id="{3FB4253F-7972-4510-B07D-41A87376FBA2}"/>
-              </a:ext>
-            </a:extLst>
-          </p:cNvPr>
-          <p:cNvSpPr>
-            <a:spLocks xmlns:a="http://schemas.openxmlformats.org/drawingml/2006/main" noGrp="1"/>
-          </p:cNvSpPr>
-          <p:nvPr/>
-        </p:nvSpPr>
-        <p:spPr>
-          <a:xfrm xmlns:a="http://schemas.openxmlformats.org/drawingml/2006/main">
-            <a:off x="0" y="0"/>
-            <a:ext cx="11887200" cy="685800"/>
-          </a:xfrm>
-          <a:prstGeom xmlns:a="http://schemas.openxmlformats.org/drawingml/2006/main" prst="rect">
-            <a:avLst/>
-          </a:prstGeom>
-          <a:solidFill xmlns:a="http://schemas.openxmlformats.org/drawingml/2006/main">
-            <a:srgbClr val="C8161E"/>
-          </a:solidFill>
-          <a:ln xmlns:a="http://schemas.openxmlformats.org/drawingml/2006/main" w="0">
-            <a:noFill/>
-          </a:ln>
-        </p:spPr>
-      </p:sp>
-      <p:pic>
-        <p:nvPicPr>
-          <p:cNvPr id="24" name=""/>
-          <p:cNvPicPr>
-            <a:picLocks xmlns:a="http://schemas.openxmlformats.org/drawingml/2006/main" noChangeAspect="1"/>
-          </p:cNvPicPr>
-          <p:nvPr/>
-        </p:nvPicPr>
-        <p:blipFill>
-          <a:blip xmlns:r="http://schemas.openxmlformats.org/officeDocument/2006/relationships" xmlns:a="http://schemas.openxmlformats.org/drawingml/2006/main" r:embed="R45fd24671cf84374"/>
-          <a:stretch xmlns:a="http://schemas.openxmlformats.org/drawingml/2006/main"/>
-        </p:blipFill>
-        <p:spPr>
-          <a:xfrm xmlns:a="http://schemas.openxmlformats.org/drawingml/2006/main">
-            <a:off x="323850" y="76200"/>
-            <a:ext cx="533400" cy="533400"/>
-          </a:xfrm>
-          <a:prstGeom xmlns:a="http://schemas.openxmlformats.org/drawingml/2006/main" prst="rect">
-            <a:avLst/>
-          </a:prstGeom>
-        </p:spPr>
-      </p:pic>
-      <p:sp>
-        <p:nvSpPr>
-          <p:cNvPr id="8" name="brand-title">
-            <a:extLst xmlns:a="http://schemas.openxmlformats.org/drawingml/2006/main">
-              <a:ext uri="{FF2B5EF4-FFF2-40B4-BE49-F238E27FC236}">
-                <a16:creationId xmlns:a16="http://schemas.microsoft.com/office/drawing/2014/main" id="{6E0A90B8-FBA2-430A-A0FB-FCA8A9478B57}"/>
-              </a:ext>
-            </a:extLst>
-          </p:cNvPr>
-          <p:cNvSpPr>
-            <a:spLocks xmlns:a="http://schemas.openxmlformats.org/drawingml/2006/main" noGrp="1"/>
-          </p:cNvSpPr>
-          <p:nvPr/>
-        </p:nvSpPr>
-        <p:spPr>
-          <a:xfrm xmlns:a="http://schemas.openxmlformats.org/drawingml/2006/main">
-            <a:off x="1028700" y="66675"/>
-            <a:ext cx="10477500" cy="552450"/>
+      <p:graphicFrame>
+        <p:nvGraphicFramePr>
+          <p:cNvPr id="10" name="native-table-299"/>
+          <p:cNvGraphicFramePr/>
+          <p:nvPr/>
+        </p:nvGraphicFramePr>
+        <p:xfrm>
+          <a:off xmlns:a="http://schemas.openxmlformats.org/drawingml/2006/main" x="609600" y="1476375"/>
+          <a:ext xmlns:a="http://schemas.openxmlformats.org/drawingml/2006/main" cx="10972800" cy="2714625"/>
+        </p:xfrm>
+        <a:graphic xmlns:a="http://schemas.openxmlformats.org/drawingml/2006/main">
+          <a:graphicData uri="http://schemas.openxmlformats.org/drawingml/2006/table">
+            <a:tbl>
+              <a:tblPr/>
+              <a:tblGrid>
+                <a:gridCol w="2781300"/>
+                <a:gridCol w="8191500"/>
+              </a:tblGrid>
+              <a:tr h="542925">
+                <a:tc>
+                  <a:txBody>
+                    <a:bodyPr/>
+                    <a:lstStyle/>
+                    <a:p>
+                      <a:r>
+                        <a:rPr sz="2000" b="1">
+                          <a:solidFill>
+                            <a:srgbClr val="1F4D78"/>
+                          </a:solidFill>
+                          <a:latin typeface="微软雅黑"/>
+                          <a:ea typeface="微软雅黑"/>
+                          <a:cs typeface="微软雅黑"/>
+                        </a:rPr>
+                        <a:t>含混请求</a:t>
+                      </a:r>
+                    </a:p>
+                  </a:txBody>
+                  <a:tcPr marL="123825" marR="123825" marT="85725" marB="85725" anchor="ctr">
+                    <a:solidFill>
+                      <a:srgbClr val="F4F6F8"/>
+                    </a:solidFill>
+                  </a:tcPr>
+                </a:tc>
+                <a:tc>
+                  <a:txBody>
+                    <a:bodyPr/>
+                    <a:lstStyle/>
+                    <a:p>
+                      <a:r>
+                        <a:rPr sz="2000" b="1">
+                          <a:solidFill>
+                            <a:srgbClr val="1F4D78"/>
+                          </a:solidFill>
+                          <a:latin typeface="微软雅黑"/>
+                          <a:ea typeface="微软雅黑"/>
+                          <a:cs typeface="微软雅黑"/>
+                        </a:rPr>
+                        <a:t>可执行的任务契约</a:t>
+                      </a:r>
+                    </a:p>
+                  </a:txBody>
+                  <a:tcPr marL="123825" marR="123825" marT="85725" marB="85725" anchor="ctr">
+                    <a:solidFill>
+                      <a:srgbClr val="F4F6F8"/>
+                    </a:solidFill>
+                  </a:tcPr>
+                </a:tc>
+              </a:tr>
+              <a:tr h="542925">
+                <a:tc>
+                  <a:txBody>
+                    <a:bodyPr/>
+                    <a:lstStyle/>
+                    <a:p>
+                      <a:r>
+                        <a:rPr sz="2000">
+                          <a:solidFill>
+                            <a:srgbClr val="27333D"/>
+                          </a:solidFill>
+                          <a:latin typeface="微软雅黑"/>
+                          <a:ea typeface="微软雅黑"/>
+                          <a:cs typeface="微软雅黑"/>
+                        </a:rPr>
+                        <a:t>“帮我把代码修好”</a:t>
+                      </a:r>
+                    </a:p>
+                  </a:txBody>
+                  <a:tcPr marL="123825" marR="123825" marT="85725" marB="85725" anchor="ctr">
+                    <a:solidFill>
+                      <a:srgbClr val="FFFFFF"/>
+                    </a:solidFill>
+                  </a:tcPr>
+                </a:tc>
+                <a:tc>
+                  <a:txBody>
+                    <a:bodyPr/>
+                    <a:lstStyle/>
+                    <a:p>
+                      <a:r>
+                        <a:rPr sz="2000">
+                          <a:solidFill>
+                            <a:srgbClr val="27333D"/>
+                          </a:solidFill>
+                          <a:latin typeface="微软雅黑"/>
+                          <a:ea typeface="微软雅黑"/>
+                          <a:cs typeface="微软雅黑"/>
+                        </a:rPr>
+                        <a:t>补 normalize_record 的缺失字段检查</a:t>
+                      </a:r>
+                    </a:p>
+                  </a:txBody>
+                  <a:tcPr marL="123825" marR="123825" marT="85725" marB="85725" anchor="ctr">
+                    <a:solidFill>
+                      <a:srgbClr val="FFFFFF"/>
+                    </a:solidFill>
+                  </a:tcPr>
+                </a:tc>
+              </a:tr>
+              <a:tr h="542925">
+                <a:tc>
+                  <a:txBody>
+                    <a:bodyPr/>
+                    <a:lstStyle/>
+                    <a:p>
+                      <a:r>
+                        <a:rPr sz="2000">
+                          <a:solidFill>
+                            <a:srgbClr val="27333D"/>
+                          </a:solidFill>
+                          <a:latin typeface="微软雅黑"/>
+                          <a:ea typeface="微软雅黑"/>
+                          <a:cs typeface="微软雅黑"/>
+                        </a:rPr>
+                        <a:t>没有修改范围</a:t>
+                      </a:r>
+                    </a:p>
+                  </a:txBody>
+                  <a:tcPr marL="123825" marR="123825" marT="85725" marB="85725" anchor="ctr">
+                    <a:solidFill>
+                      <a:srgbClr val="FFFFFF"/>
+                    </a:solidFill>
+                  </a:tcPr>
+                </a:tc>
+                <a:tc>
+                  <a:txBody>
+                    <a:bodyPr/>
+                    <a:lstStyle/>
+                    <a:p>
+                      <a:r>
+                        <a:rPr sz="2000">
+                          <a:solidFill>
+                            <a:srgbClr val="27333D"/>
+                          </a:solidFill>
+                          <a:latin typeface="微软雅黑"/>
+                          <a:ea typeface="微软雅黑"/>
+                          <a:cs typeface="微软雅黑"/>
+                        </a:rPr>
+                        <a:t>只改 after/generate.py</a:t>
+                      </a:r>
+                    </a:p>
+                  </a:txBody>
+                  <a:tcPr marL="123825" marR="123825" marT="85725" marB="85725" anchor="ctr">
+                    <a:solidFill>
+                      <a:srgbClr val="FFFFFF"/>
+                    </a:solidFill>
+                  </a:tcPr>
+                </a:tc>
+              </a:tr>
+              <a:tr h="542925">
+                <a:tc>
+                  <a:txBody>
+                    <a:bodyPr/>
+                    <a:lstStyle/>
+                    <a:p>
+                      <a:r>
+                        <a:rPr sz="2000">
+                          <a:solidFill>
+                            <a:srgbClr val="27333D"/>
+                          </a:solidFill>
+                          <a:latin typeface="微软雅黑"/>
+                          <a:ea typeface="微软雅黑"/>
+                          <a:cs typeface="微软雅黑"/>
+                        </a:rPr>
+                        <a:t>“结果能用就行”</a:t>
+                      </a:r>
+                    </a:p>
+                  </a:txBody>
+                  <a:tcPr marL="123825" marR="123825" marT="85725" marB="85725" anchor="ctr">
+                    <a:solidFill>
+                      <a:srgbClr val="FFFFFF"/>
+                    </a:solidFill>
+                  </a:tcPr>
+                </a:tc>
+                <a:tc>
+                  <a:txBody>
+                    <a:bodyPr/>
+                    <a:lstStyle/>
+                    <a:p>
+                      <a:r>
+                        <a:rPr sz="2000">
+                          <a:solidFill>
+                            <a:srgbClr val="27333D"/>
+                          </a:solidFill>
+                          <a:latin typeface="微软雅黑"/>
+                          <a:ea typeface="微软雅黑"/>
+                          <a:cs typeface="微软雅黑"/>
+                        </a:rPr>
+                        <a:t>既定两项测试通过，人工检查 diff</a:t>
+                      </a:r>
+                    </a:p>
+                  </a:txBody>
+                  <a:tcPr marL="123825" marR="123825" marT="85725" marB="85725" anchor="ctr">
+                    <a:solidFill>
+                      <a:srgbClr val="FFFFFF"/>
+                    </a:solidFill>
+                  </a:tcPr>
+                </a:tc>
+              </a:tr>
+              <a:tr h="542925">
+                <a:tc>
+                  <a:txBody>
+                    <a:bodyPr/>
+                    <a:lstStyle/>
+                    <a:p>
+                      <a:r>
+                        <a:rPr sz="2000">
+                          <a:solidFill>
+                            <a:srgbClr val="27333D"/>
+                          </a:solidFill>
+                          <a:latin typeface="微软雅黑"/>
+                          <a:ea typeface="微软雅黑"/>
+                          <a:cs typeface="微软雅黑"/>
+                        </a:rPr>
+                        <a:t>出错后继续尝试</a:t>
+                      </a:r>
+                    </a:p>
+                  </a:txBody>
+                  <a:tcPr marL="123825" marR="123825" marT="85725" marB="85725" anchor="ctr">
+                    <a:solidFill>
+                      <a:srgbClr val="FFFFFF"/>
+                    </a:solidFill>
+                  </a:tcPr>
+                </a:tc>
+                <a:tc>
+                  <a:txBody>
+                    <a:bodyPr/>
+                    <a:lstStyle/>
+                    <a:p>
+                      <a:r>
+                        <a:rPr sz="2000">
+                          <a:solidFill>
+                            <a:srgbClr val="27333D"/>
+                          </a:solidFill>
+                          <a:latin typeface="微软雅黑"/>
+                          <a:ea typeface="微软雅黑"/>
+                          <a:cs typeface="微软雅黑"/>
+                        </a:rPr>
+                        <a:t>越权或测试失败时停止并留日志</a:t>
+                      </a:r>
+                    </a:p>
+                  </a:txBody>
+                  <a:tcPr marL="123825" marR="123825" marT="85725" marB="85725" anchor="ctr">
+                    <a:solidFill>
+                      <a:srgbClr val="FFFFFF"/>
+                    </a:solidFill>
+                  </a:tcPr>
+                </a:tc>
+              </a:tr>
+            </a:tbl>
+          </a:graphicData>
+        </a:graphic>
+      </p:graphicFrame>
+      <p:sp>
+        <p:nvSpPr>
+          <p:cNvPr id="7" name="content-300">
+            <a:extLst xmlns:a="http://schemas.openxmlformats.org/drawingml/2006/main">
+              <a:ext uri="{FF2B5EF4-FFF2-40B4-BE49-F238E27FC236}">
+                <a16:creationId xmlns:a16="http://schemas.microsoft.com/office/drawing/2014/main" id="{484E1BD6-35BF-4C3D-A19E-3B5D111BCFF5}"/>
+              </a:ext>
+            </a:extLst>
+          </p:cNvPr>
+          <p:cNvSpPr>
+            <a:spLocks xmlns:a="http://schemas.openxmlformats.org/drawingml/2006/main" noGrp="1"/>
+          </p:cNvSpPr>
+          <p:nvPr/>
+        </p:nvSpPr>
+        <p:spPr>
+          <a:xfrm xmlns:a="http://schemas.openxmlformats.org/drawingml/2006/main">
+            <a:off x="609600" y="4476750"/>
+            <a:ext cx="10972800" cy="386715"/>
           </a:xfrm>
           <a:prstGeom xmlns:a="http://schemas.openxmlformats.org/drawingml/2006/main" prst="rect">
             <a:avLst/>
@@ -17276,7 +18135,7 @@
           </a:ln>
         </p:spPr>
         <p:txBody>
-          <a:bodyPr xmlns:a="http://schemas.openxmlformats.org/drawingml/2006/main" lIns="0" tIns="0" rIns="0" bIns="0" anchor="ctr"/>
+          <a:bodyPr xmlns:a="http://schemas.openxmlformats.org/drawingml/2006/main" lIns="0" tIns="0" rIns="0" bIns="0" anchor="t"/>
           <a:lstStyle xmlns:a="http://schemas.openxmlformats.org/drawingml/2006/main"/>
           <a:p xmlns:a="http://schemas.openxmlformats.org/drawingml/2006/main">
             <a:pPr algn="l">
@@ -17284,9 +18143,9 @@
                 <a:spcPct val="118000"/>
               </a:lnSpc>
               <a:buNone/>
-              <a:defRPr sz="3000" b="1">
-                <a:solidFill>
-                  <a:srgbClr val="FFFFFF"/>
+              <a:defRPr sz="2100" b="0">
+                <a:solidFill>
+                  <a:srgbClr val="27333D"/>
                 </a:solidFill>
                 <a:latin typeface="微软雅黑"/>
                 <a:ea typeface="微软雅黑"/>
@@ -17294,694 +18153,15 @@
               </a:defRPr>
             </a:pPr>
             <a:r>
-              <a:rPr sz="3000" b="1">
-                <a:solidFill>
-                  <a:srgbClr val="FFFFFF"/>
+              <a:rPr sz="2100" b="0">
+                <a:solidFill>
+                  <a:srgbClr val="27333D"/>
                 </a:solidFill>
                 <a:latin typeface="微软雅黑"/>
                 <a:ea typeface="微软雅黑"/>
                 <a:cs typeface="微软雅黑"/>
               </a:rPr>
-              <a:t>任务契约把请求改写为可追溯执行</a:t>
-            </a:r>
-          </a:p>
-        </p:txBody>
-      </p:sp>
-      <p:sp>
-        <p:nvSpPr>
-          <p:cNvPr id="9" name="source">
-            <a:extLst xmlns:a="http://schemas.openxmlformats.org/drawingml/2006/main">
-              <a:ext uri="{FF2B5EF4-FFF2-40B4-BE49-F238E27FC236}">
-                <a16:creationId xmlns:a16="http://schemas.microsoft.com/office/drawing/2014/main" id="{5CB1F602-BC9B-4B90-BEF2-5C2DAE789B11}"/>
-              </a:ext>
-            </a:extLst>
-          </p:cNvPr>
-          <p:cNvSpPr>
-            <a:spLocks xmlns:a="http://schemas.openxmlformats.org/drawingml/2006/main" noGrp="1"/>
-          </p:cNvSpPr>
-          <p:nvPr/>
-        </p:nvSpPr>
-        <p:spPr>
-          <a:xfrm xmlns:a="http://schemas.openxmlformats.org/drawingml/2006/main">
-            <a:off x="609600" y="6067425"/>
-            <a:ext cx="10763250" cy="209550"/>
-          </a:xfrm>
-          <a:prstGeom xmlns:a="http://schemas.openxmlformats.org/drawingml/2006/main" prst="rect">
-            <a:avLst/>
-          </a:prstGeom>
-          <a:noFill xmlns:a="http://schemas.openxmlformats.org/drawingml/2006/main"/>
-          <a:ln xmlns:a="http://schemas.openxmlformats.org/drawingml/2006/main" w="0">
-            <a:noFill/>
-          </a:ln>
-        </p:spPr>
-        <p:txBody>
-          <a:bodyPr xmlns:a="http://schemas.openxmlformats.org/drawingml/2006/main" lIns="0" tIns="0" rIns="0" bIns="0" anchor="t"/>
-          <a:lstStyle xmlns:a="http://schemas.openxmlformats.org/drawingml/2006/main"/>
-          <a:p xmlns:a="http://schemas.openxmlformats.org/drawingml/2006/main">
-            <a:pPr algn="l">
-              <a:lnSpc>
-                <a:spcPct val="118000"/>
-              </a:lnSpc>
-              <a:buNone/>
-              <a:defRPr sz="1100" b="0">
-                <a:solidFill>
-                  <a:srgbClr val="66727D"/>
-                </a:solidFill>
-                <a:latin typeface="微软雅黑"/>
-                <a:ea typeface="微软雅黑"/>
-                <a:cs typeface="微软雅黑"/>
-              </a:defRPr>
-            </a:pPr>
-            <a:r>
-              <a:rPr sz="1100" b="0">
-                <a:solidFill>
-                  <a:srgbClr val="66727D"/>
-                </a:solidFill>
-                <a:latin typeface="微软雅黑"/>
-                <a:ea typeface="微软雅黑"/>
-                <a:cs typeface="微软雅黑"/>
-              </a:rPr>
-              <a:t>来源：lesson-10/slides.md；课程工件与讲义见 speaker notes</a:t>
-            </a:r>
-          </a:p>
-        </p:txBody>
-      </p:sp>
-      <p:sp>
-        <p:nvSpPr>
-          <p:cNvPr id="10" name="left-h">
-            <a:extLst xmlns:a="http://schemas.openxmlformats.org/drawingml/2006/main">
-              <a:ext uri="{FF2B5EF4-FFF2-40B4-BE49-F238E27FC236}">
-                <a16:creationId xmlns:a16="http://schemas.microsoft.com/office/drawing/2014/main" id="{2EFF5DA1-1DE2-4B1E-B1F8-A288E52454AE}"/>
-              </a:ext>
-            </a:extLst>
-          </p:cNvPr>
-          <p:cNvSpPr>
-            <a:spLocks xmlns:a="http://schemas.openxmlformats.org/drawingml/2006/main" noGrp="1"/>
-          </p:cNvSpPr>
-          <p:nvPr/>
-        </p:nvSpPr>
-        <p:spPr>
-          <a:xfrm xmlns:a="http://schemas.openxmlformats.org/drawingml/2006/main">
-            <a:off x="609600" y="1476375"/>
-            <a:ext cx="4953000" cy="361950"/>
-          </a:xfrm>
-          <a:prstGeom xmlns:a="http://schemas.openxmlformats.org/drawingml/2006/main" prst="rect">
-            <a:avLst/>
-          </a:prstGeom>
-          <a:noFill xmlns:a="http://schemas.openxmlformats.org/drawingml/2006/main"/>
-          <a:ln xmlns:a="http://schemas.openxmlformats.org/drawingml/2006/main" w="0">
-            <a:noFill/>
-          </a:ln>
-        </p:spPr>
-        <p:txBody>
-          <a:bodyPr xmlns:a="http://schemas.openxmlformats.org/drawingml/2006/main" lIns="0" tIns="0" rIns="0" bIns="0" anchor="t"/>
-          <a:lstStyle xmlns:a="http://schemas.openxmlformats.org/drawingml/2006/main"/>
-          <a:p xmlns:a="http://schemas.openxmlformats.org/drawingml/2006/main">
-            <a:pPr algn="l">
-              <a:lnSpc>
-                <a:spcPct val="118000"/>
-              </a:lnSpc>
-              <a:buNone/>
-              <a:defRPr sz="2200" b="1">
-                <a:solidFill>
-                  <a:srgbClr val="66727D"/>
-                </a:solidFill>
-                <a:latin typeface="微软雅黑"/>
-                <a:ea typeface="微软雅黑"/>
-                <a:cs typeface="微软雅黑"/>
-              </a:defRPr>
-            </a:pPr>
-            <a:r>
-              <a:rPr sz="2200" b="1">
-                <a:solidFill>
-                  <a:srgbClr val="66727D"/>
-                </a:solidFill>
-                <a:latin typeface="微软雅黑"/>
-                <a:ea typeface="微软雅黑"/>
-                <a:cs typeface="微软雅黑"/>
-              </a:rPr>
-              <a:t>原请求</a:t>
-            </a:r>
-          </a:p>
-        </p:txBody>
-      </p:sp>
-      <p:sp>
-        <p:nvSpPr>
-          <p:cNvPr id="11" name="right-h">
-            <a:extLst xmlns:a="http://schemas.openxmlformats.org/drawingml/2006/main">
-              <a:ext uri="{FF2B5EF4-FFF2-40B4-BE49-F238E27FC236}">
-                <a16:creationId xmlns:a16="http://schemas.microsoft.com/office/drawing/2014/main" id="{8316530E-57FF-4165-9F81-4659E6B81165}"/>
-              </a:ext>
-            </a:extLst>
-          </p:cNvPr>
-          <p:cNvSpPr>
-            <a:spLocks xmlns:a="http://schemas.openxmlformats.org/drawingml/2006/main" noGrp="1"/>
-          </p:cNvSpPr>
-          <p:nvPr/>
-        </p:nvSpPr>
-        <p:spPr>
-          <a:xfrm xmlns:a="http://schemas.openxmlformats.org/drawingml/2006/main">
-            <a:off x="6629400" y="1476375"/>
-            <a:ext cx="4953000" cy="361950"/>
-          </a:xfrm>
-          <a:prstGeom xmlns:a="http://schemas.openxmlformats.org/drawingml/2006/main" prst="rect">
-            <a:avLst/>
-          </a:prstGeom>
-          <a:noFill xmlns:a="http://schemas.openxmlformats.org/drawingml/2006/main"/>
-          <a:ln xmlns:a="http://schemas.openxmlformats.org/drawingml/2006/main" w="0">
-            <a:noFill/>
-          </a:ln>
-        </p:spPr>
-        <p:txBody>
-          <a:bodyPr xmlns:a="http://schemas.openxmlformats.org/drawingml/2006/main" lIns="0" tIns="0" rIns="0" bIns="0" anchor="t"/>
-          <a:lstStyle xmlns:a="http://schemas.openxmlformats.org/drawingml/2006/main"/>
-          <a:p xmlns:a="http://schemas.openxmlformats.org/drawingml/2006/main">
-            <a:pPr algn="l">
-              <a:lnSpc>
-                <a:spcPct val="118000"/>
-              </a:lnSpc>
-              <a:buNone/>
-              <a:defRPr sz="2200" b="1">
-                <a:solidFill>
-                  <a:srgbClr val="2E7D5B"/>
-                </a:solidFill>
-                <a:latin typeface="微软雅黑"/>
-                <a:ea typeface="微软雅黑"/>
-                <a:cs typeface="微软雅黑"/>
-              </a:defRPr>
-            </a:pPr>
-            <a:r>
-              <a:rPr sz="2200" b="1">
-                <a:solidFill>
-                  <a:srgbClr val="2E7D5B"/>
-                </a:solidFill>
-                <a:latin typeface="微软雅黑"/>
-                <a:ea typeface="微软雅黑"/>
-                <a:cs typeface="微软雅黑"/>
-              </a:rPr>
-              <a:t>任务契约改写</a:t>
-            </a:r>
-          </a:p>
-        </p:txBody>
-      </p:sp>
-      <p:sp>
-        <p:nvSpPr>
-          <p:cNvPr id="12" name="split">
-            <a:extLst xmlns:a="http://schemas.openxmlformats.org/drawingml/2006/main">
-              <a:ext uri="{FF2B5EF4-FFF2-40B4-BE49-F238E27FC236}">
-                <a16:creationId xmlns:a16="http://schemas.microsoft.com/office/drawing/2014/main" id="{0C535F95-37EF-4B67-BEB2-4110F6AB47A4}"/>
-              </a:ext>
-            </a:extLst>
-          </p:cNvPr>
-          <p:cNvSpPr>
-            <a:spLocks xmlns:a="http://schemas.openxmlformats.org/drawingml/2006/main" noGrp="1"/>
-          </p:cNvSpPr>
-          <p:nvPr/>
-        </p:nvSpPr>
-        <p:spPr>
-          <a:xfrm xmlns:a="http://schemas.openxmlformats.org/drawingml/2006/main">
-            <a:off x="6096000" y="1476375"/>
-            <a:ext cx="9525" cy="14288"/>
-          </a:xfrm>
-          <a:prstGeom xmlns:a="http://schemas.openxmlformats.org/drawingml/2006/main" prst="rect">
-            <a:avLst/>
-          </a:prstGeom>
-          <a:solidFill xmlns:a="http://schemas.openxmlformats.org/drawingml/2006/main">
-            <a:srgbClr val="CDD5DB"/>
-          </a:solidFill>
-          <a:ln xmlns:a="http://schemas.openxmlformats.org/drawingml/2006/main" w="0">
-            <a:noFill/>
-          </a:ln>
-        </p:spPr>
-      </p:sp>
-      <p:sp>
-        <p:nvSpPr>
-          <p:cNvPr id="13" name="list-64-217-0">
-            <a:extLst xmlns:a="http://schemas.openxmlformats.org/drawingml/2006/main">
-              <a:ext uri="{FF2B5EF4-FFF2-40B4-BE49-F238E27FC236}">
-                <a16:creationId xmlns:a16="http://schemas.microsoft.com/office/drawing/2014/main" id="{22A13EC8-0603-4D53-A230-56127A156FDB}"/>
-              </a:ext>
-            </a:extLst>
-          </p:cNvPr>
-          <p:cNvSpPr>
-            <a:spLocks xmlns:a="http://schemas.openxmlformats.org/drawingml/2006/main" noGrp="1"/>
-          </p:cNvSpPr>
-          <p:nvPr/>
-        </p:nvSpPr>
-        <p:spPr>
-          <a:xfrm xmlns:a="http://schemas.openxmlformats.org/drawingml/2006/main">
-            <a:off x="609600" y="2066925"/>
-            <a:ext cx="4953000" cy="400050"/>
-          </a:xfrm>
-          <a:prstGeom xmlns:a="http://schemas.openxmlformats.org/drawingml/2006/main" prst="rect">
-            <a:avLst/>
-          </a:prstGeom>
-          <a:noFill xmlns:a="http://schemas.openxmlformats.org/drawingml/2006/main"/>
-          <a:ln xmlns:a="http://schemas.openxmlformats.org/drawingml/2006/main" w="0">
-            <a:noFill/>
-          </a:ln>
-        </p:spPr>
-        <p:txBody>
-          <a:bodyPr xmlns:a="http://schemas.openxmlformats.org/drawingml/2006/main" lIns="0" tIns="0" rIns="0" bIns="0" anchor="ctr"/>
-          <a:lstStyle xmlns:a="http://schemas.openxmlformats.org/drawingml/2006/main"/>
-          <a:p xmlns:a="http://schemas.openxmlformats.org/drawingml/2006/main">
-            <a:pPr algn="l">
-              <a:lnSpc>
-                <a:spcPct val="118000"/>
-              </a:lnSpc>
-              <a:buNone/>
-              <a:defRPr sz="2200" b="0">
-                <a:solidFill>
-                  <a:srgbClr val="27333D"/>
-                </a:solidFill>
-                <a:latin typeface="微软雅黑"/>
-                <a:ea typeface="微软雅黑"/>
-                <a:cs typeface="微软雅黑"/>
-              </a:defRPr>
-            </a:pPr>
-            <a:r>
-              <a:rPr sz="2200" b="0">
-                <a:solidFill>
-                  <a:srgbClr val="27333D"/>
-                </a:solidFill>
-                <a:latin typeface="微软雅黑"/>
-                <a:ea typeface="微软雅黑"/>
-                <a:cs typeface="微软雅黑"/>
-              </a:rPr>
-              <a:t>— 范围由 Agent 自行解释</a:t>
-            </a:r>
-          </a:p>
-        </p:txBody>
-      </p:sp>
-      <p:sp>
-        <p:nvSpPr>
-          <p:cNvPr id="14" name="list-64-217-1">
-            <a:extLst xmlns:a="http://schemas.openxmlformats.org/drawingml/2006/main">
-              <a:ext uri="{FF2B5EF4-FFF2-40B4-BE49-F238E27FC236}">
-                <a16:creationId xmlns:a16="http://schemas.microsoft.com/office/drawing/2014/main" id="{E0AB8C24-1BA2-4A42-9C6C-852DF5D70526}"/>
-              </a:ext>
-            </a:extLst>
-          </p:cNvPr>
-          <p:cNvSpPr>
-            <a:spLocks xmlns:a="http://schemas.openxmlformats.org/drawingml/2006/main" noGrp="1"/>
-          </p:cNvSpPr>
-          <p:nvPr/>
-        </p:nvSpPr>
-        <p:spPr>
-          <a:xfrm xmlns:a="http://schemas.openxmlformats.org/drawingml/2006/main">
-            <a:off x="609600" y="2524125"/>
-            <a:ext cx="4953000" cy="400050"/>
-          </a:xfrm>
-          <a:prstGeom xmlns:a="http://schemas.openxmlformats.org/drawingml/2006/main" prst="rect">
-            <a:avLst/>
-          </a:prstGeom>
-          <a:noFill xmlns:a="http://schemas.openxmlformats.org/drawingml/2006/main"/>
-          <a:ln xmlns:a="http://schemas.openxmlformats.org/drawingml/2006/main" w="0">
-            <a:noFill/>
-          </a:ln>
-        </p:spPr>
-        <p:txBody>
-          <a:bodyPr xmlns:a="http://schemas.openxmlformats.org/drawingml/2006/main" lIns="0" tIns="0" rIns="0" bIns="0" anchor="ctr"/>
-          <a:lstStyle xmlns:a="http://schemas.openxmlformats.org/drawingml/2006/main"/>
-          <a:p xmlns:a="http://schemas.openxmlformats.org/drawingml/2006/main">
-            <a:pPr algn="l">
-              <a:lnSpc>
-                <a:spcPct val="118000"/>
-              </a:lnSpc>
-              <a:buNone/>
-              <a:defRPr sz="2200" b="0">
-                <a:solidFill>
-                  <a:srgbClr val="27333D"/>
-                </a:solidFill>
-                <a:latin typeface="微软雅黑"/>
-                <a:ea typeface="微软雅黑"/>
-                <a:cs typeface="微软雅黑"/>
-              </a:defRPr>
-            </a:pPr>
-            <a:r>
-              <a:rPr sz="2200" b="0">
-                <a:solidFill>
-                  <a:srgbClr val="27333D"/>
-                </a:solidFill>
-                <a:latin typeface="微软雅黑"/>
-                <a:ea typeface="微软雅黑"/>
-                <a:cs typeface="微软雅黑"/>
-              </a:rPr>
-              <a:t>— 权限未声明</a:t>
-            </a:r>
-          </a:p>
-        </p:txBody>
-      </p:sp>
-      <p:sp>
-        <p:nvSpPr>
-          <p:cNvPr id="15" name="list-64-217-2">
-            <a:extLst xmlns:a="http://schemas.openxmlformats.org/drawingml/2006/main">
-              <a:ext uri="{FF2B5EF4-FFF2-40B4-BE49-F238E27FC236}">
-                <a16:creationId xmlns:a16="http://schemas.microsoft.com/office/drawing/2014/main" id="{F1567938-AB9B-4788-ACB4-0E4DAFD2F2CD}"/>
-              </a:ext>
-            </a:extLst>
-          </p:cNvPr>
-          <p:cNvSpPr>
-            <a:spLocks xmlns:a="http://schemas.openxmlformats.org/drawingml/2006/main" noGrp="1"/>
-          </p:cNvSpPr>
-          <p:nvPr/>
-        </p:nvSpPr>
-        <p:spPr>
-          <a:xfrm xmlns:a="http://schemas.openxmlformats.org/drawingml/2006/main">
-            <a:off x="609600" y="2981325"/>
-            <a:ext cx="4953000" cy="400050"/>
-          </a:xfrm>
-          <a:prstGeom xmlns:a="http://schemas.openxmlformats.org/drawingml/2006/main" prst="rect">
-            <a:avLst/>
-          </a:prstGeom>
-          <a:noFill xmlns:a="http://schemas.openxmlformats.org/drawingml/2006/main"/>
-          <a:ln xmlns:a="http://schemas.openxmlformats.org/drawingml/2006/main" w="0">
-            <a:noFill/>
-          </a:ln>
-        </p:spPr>
-        <p:txBody>
-          <a:bodyPr xmlns:a="http://schemas.openxmlformats.org/drawingml/2006/main" lIns="0" tIns="0" rIns="0" bIns="0" anchor="ctr"/>
-          <a:lstStyle xmlns:a="http://schemas.openxmlformats.org/drawingml/2006/main"/>
-          <a:p xmlns:a="http://schemas.openxmlformats.org/drawingml/2006/main">
-            <a:pPr algn="l">
-              <a:lnSpc>
-                <a:spcPct val="118000"/>
-              </a:lnSpc>
-              <a:buNone/>
-              <a:defRPr sz="2200" b="0">
-                <a:solidFill>
-                  <a:srgbClr val="27333D"/>
-                </a:solidFill>
-                <a:latin typeface="微软雅黑"/>
-                <a:ea typeface="微软雅黑"/>
-                <a:cs typeface="微软雅黑"/>
-              </a:defRPr>
-            </a:pPr>
-            <a:r>
-              <a:rPr sz="2200" b="0">
-                <a:solidFill>
-                  <a:srgbClr val="27333D"/>
-                </a:solidFill>
-                <a:latin typeface="微软雅黑"/>
-                <a:ea typeface="微软雅黑"/>
-                <a:cs typeface="微软雅黑"/>
-              </a:rPr>
-              <a:t>— 验收是“结果怎么样”</a:t>
-            </a:r>
-          </a:p>
-        </p:txBody>
-      </p:sp>
-      <p:sp>
-        <p:nvSpPr>
-          <p:cNvPr id="16" name="list-64-217-3">
-            <a:extLst xmlns:a="http://schemas.openxmlformats.org/drawingml/2006/main">
-              <a:ext uri="{FF2B5EF4-FFF2-40B4-BE49-F238E27FC236}">
-                <a16:creationId xmlns:a16="http://schemas.microsoft.com/office/drawing/2014/main" id="{EEEC74CC-5ACB-4CE5-B5E4-7152D9099F97}"/>
-              </a:ext>
-            </a:extLst>
-          </p:cNvPr>
-          <p:cNvSpPr>
-            <a:spLocks xmlns:a="http://schemas.openxmlformats.org/drawingml/2006/main" noGrp="1"/>
-          </p:cNvSpPr>
-          <p:nvPr/>
-        </p:nvSpPr>
-        <p:spPr>
-          <a:xfrm xmlns:a="http://schemas.openxmlformats.org/drawingml/2006/main">
-            <a:off x="609600" y="3438525"/>
-            <a:ext cx="4953000" cy="400050"/>
-          </a:xfrm>
-          <a:prstGeom xmlns:a="http://schemas.openxmlformats.org/drawingml/2006/main" prst="rect">
-            <a:avLst/>
-          </a:prstGeom>
-          <a:noFill xmlns:a="http://schemas.openxmlformats.org/drawingml/2006/main"/>
-          <a:ln xmlns:a="http://schemas.openxmlformats.org/drawingml/2006/main" w="0">
-            <a:noFill/>
-          </a:ln>
-        </p:spPr>
-        <p:txBody>
-          <a:bodyPr xmlns:a="http://schemas.openxmlformats.org/drawingml/2006/main" lIns="0" tIns="0" rIns="0" bIns="0" anchor="ctr"/>
-          <a:lstStyle xmlns:a="http://schemas.openxmlformats.org/drawingml/2006/main"/>
-          <a:p xmlns:a="http://schemas.openxmlformats.org/drawingml/2006/main">
-            <a:pPr algn="l">
-              <a:lnSpc>
-                <a:spcPct val="118000"/>
-              </a:lnSpc>
-              <a:buNone/>
-              <a:defRPr sz="2200" b="0">
-                <a:solidFill>
-                  <a:srgbClr val="27333D"/>
-                </a:solidFill>
-                <a:latin typeface="微软雅黑"/>
-                <a:ea typeface="微软雅黑"/>
-                <a:cs typeface="微软雅黑"/>
-              </a:defRPr>
-            </a:pPr>
-            <a:r>
-              <a:rPr sz="2200" b="0">
-                <a:solidFill>
-                  <a:srgbClr val="27333D"/>
-                </a:solidFill>
-                <a:latin typeface="微软雅黑"/>
-                <a:ea typeface="微软雅黑"/>
-                <a:cs typeface="微软雅黑"/>
-              </a:rPr>
-              <a:t>— 失败时继续改</a:t>
-            </a:r>
-          </a:p>
-        </p:txBody>
-      </p:sp>
-      <p:sp>
-        <p:nvSpPr>
-          <p:cNvPr id="17" name="list-696-217-0">
-            <a:extLst xmlns:a="http://schemas.openxmlformats.org/drawingml/2006/main">
-              <a:ext uri="{FF2B5EF4-FFF2-40B4-BE49-F238E27FC236}">
-                <a16:creationId xmlns:a16="http://schemas.microsoft.com/office/drawing/2014/main" id="{A6A92FF0-72D4-4BE6-9005-A7B98940F7A5}"/>
-              </a:ext>
-            </a:extLst>
-          </p:cNvPr>
-          <p:cNvSpPr>
-            <a:spLocks xmlns:a="http://schemas.openxmlformats.org/drawingml/2006/main" noGrp="1"/>
-          </p:cNvSpPr>
-          <p:nvPr/>
-        </p:nvSpPr>
-        <p:spPr>
-          <a:xfrm xmlns:a="http://schemas.openxmlformats.org/drawingml/2006/main">
-            <a:off x="6629400" y="2066925"/>
-            <a:ext cx="4953000" cy="400050"/>
-          </a:xfrm>
-          <a:prstGeom xmlns:a="http://schemas.openxmlformats.org/drawingml/2006/main" prst="rect">
-            <a:avLst/>
-          </a:prstGeom>
-          <a:noFill xmlns:a="http://schemas.openxmlformats.org/drawingml/2006/main"/>
-          <a:ln xmlns:a="http://schemas.openxmlformats.org/drawingml/2006/main" w="0">
-            <a:noFill/>
-          </a:ln>
-        </p:spPr>
-        <p:txBody>
-          <a:bodyPr xmlns:a="http://schemas.openxmlformats.org/drawingml/2006/main" lIns="0" tIns="0" rIns="0" bIns="0" anchor="ctr"/>
-          <a:lstStyle xmlns:a="http://schemas.openxmlformats.org/drawingml/2006/main"/>
-          <a:p xmlns:a="http://schemas.openxmlformats.org/drawingml/2006/main">
-            <a:pPr algn="l">
-              <a:lnSpc>
-                <a:spcPct val="118000"/>
-              </a:lnSpc>
-              <a:buNone/>
-              <a:defRPr sz="2200" b="0">
-                <a:solidFill>
-                  <a:srgbClr val="27333D"/>
-                </a:solidFill>
-                <a:latin typeface="微软雅黑"/>
-                <a:ea typeface="微软雅黑"/>
-                <a:cs typeface="微软雅黑"/>
-              </a:defRPr>
-            </a:pPr>
-            <a:r>
-              <a:rPr sz="2200" b="0">
-                <a:solidFill>
-                  <a:srgbClr val="27333D"/>
-                </a:solidFill>
-                <a:latin typeface="微软雅黑"/>
-                <a:ea typeface="微软雅黑"/>
-                <a:cs typeface="微软雅黑"/>
-              </a:rPr>
-              <a:t>— 只改 generate_summary()</a:t>
-            </a:r>
-          </a:p>
-        </p:txBody>
-      </p:sp>
-      <p:sp>
-        <p:nvSpPr>
-          <p:cNvPr id="18" name="list-696-217-1">
-            <a:extLst xmlns:a="http://schemas.openxmlformats.org/drawingml/2006/main">
-              <a:ext uri="{FF2B5EF4-FFF2-40B4-BE49-F238E27FC236}">
-                <a16:creationId xmlns:a16="http://schemas.microsoft.com/office/drawing/2014/main" id="{1D51731A-307A-4C00-B251-89109017B1C5}"/>
-              </a:ext>
-            </a:extLst>
-          </p:cNvPr>
-          <p:cNvSpPr>
-            <a:spLocks xmlns:a="http://schemas.openxmlformats.org/drawingml/2006/main" noGrp="1"/>
-          </p:cNvSpPr>
-          <p:nvPr/>
-        </p:nvSpPr>
-        <p:spPr>
-          <a:xfrm xmlns:a="http://schemas.openxmlformats.org/drawingml/2006/main">
-            <a:off x="6629400" y="2524125"/>
-            <a:ext cx="4953000" cy="400050"/>
-          </a:xfrm>
-          <a:prstGeom xmlns:a="http://schemas.openxmlformats.org/drawingml/2006/main" prst="rect">
-            <a:avLst/>
-          </a:prstGeom>
-          <a:noFill xmlns:a="http://schemas.openxmlformats.org/drawingml/2006/main"/>
-          <a:ln xmlns:a="http://schemas.openxmlformats.org/drawingml/2006/main" w="0">
-            <a:noFill/>
-          </a:ln>
-        </p:spPr>
-        <p:txBody>
-          <a:bodyPr xmlns:a="http://schemas.openxmlformats.org/drawingml/2006/main" lIns="0" tIns="0" rIns="0" bIns="0" anchor="ctr"/>
-          <a:lstStyle xmlns:a="http://schemas.openxmlformats.org/drawingml/2006/main"/>
-          <a:p xmlns:a="http://schemas.openxmlformats.org/drawingml/2006/main">
-            <a:pPr algn="l">
-              <a:lnSpc>
-                <a:spcPct val="118000"/>
-              </a:lnSpc>
-              <a:buNone/>
-              <a:defRPr sz="2200" b="0">
-                <a:solidFill>
-                  <a:srgbClr val="27333D"/>
-                </a:solidFill>
-                <a:latin typeface="微软雅黑"/>
-                <a:ea typeface="微软雅黑"/>
-                <a:cs typeface="微软雅黑"/>
-              </a:defRPr>
-            </a:pPr>
-            <a:r>
-              <a:rPr sz="2200" b="0">
-                <a:solidFill>
-                  <a:srgbClr val="27333D"/>
-                </a:solidFill>
-                <a:latin typeface="微软雅黑"/>
-                <a:ea typeface="微软雅黑"/>
-                <a:cs typeface="微软雅黑"/>
-              </a:rPr>
-              <a:t>— 五档权限写入契约</a:t>
-            </a:r>
-          </a:p>
-        </p:txBody>
-      </p:sp>
-      <p:sp>
-        <p:nvSpPr>
-          <p:cNvPr id="19" name="list-696-217-2">
-            <a:extLst xmlns:a="http://schemas.openxmlformats.org/drawingml/2006/main">
-              <a:ext uri="{FF2B5EF4-FFF2-40B4-BE49-F238E27FC236}">
-                <a16:creationId xmlns:a16="http://schemas.microsoft.com/office/drawing/2014/main" id="{E845B8D7-40CB-42FE-92A3-0A98D155D04F}"/>
-              </a:ext>
-            </a:extLst>
-          </p:cNvPr>
-          <p:cNvSpPr>
-            <a:spLocks xmlns:a="http://schemas.openxmlformats.org/drawingml/2006/main" noGrp="1"/>
-          </p:cNvSpPr>
-          <p:nvPr/>
-        </p:nvSpPr>
-        <p:spPr>
-          <a:xfrm xmlns:a="http://schemas.openxmlformats.org/drawingml/2006/main">
-            <a:off x="6629400" y="2981325"/>
-            <a:ext cx="4953000" cy="400050"/>
-          </a:xfrm>
-          <a:prstGeom xmlns:a="http://schemas.openxmlformats.org/drawingml/2006/main" prst="rect">
-            <a:avLst/>
-          </a:prstGeom>
-          <a:noFill xmlns:a="http://schemas.openxmlformats.org/drawingml/2006/main"/>
-          <a:ln xmlns:a="http://schemas.openxmlformats.org/drawingml/2006/main" w="0">
-            <a:noFill/>
-          </a:ln>
-        </p:spPr>
-        <p:txBody>
-          <a:bodyPr xmlns:a="http://schemas.openxmlformats.org/drawingml/2006/main" lIns="0" tIns="0" rIns="0" bIns="0" anchor="ctr"/>
-          <a:lstStyle xmlns:a="http://schemas.openxmlformats.org/drawingml/2006/main"/>
-          <a:p xmlns:a="http://schemas.openxmlformats.org/drawingml/2006/main">
-            <a:pPr algn="l">
-              <a:lnSpc>
-                <a:spcPct val="118000"/>
-              </a:lnSpc>
-              <a:buNone/>
-              <a:defRPr sz="2200" b="0">
-                <a:solidFill>
-                  <a:srgbClr val="27333D"/>
-                </a:solidFill>
-                <a:latin typeface="微软雅黑"/>
-                <a:ea typeface="微软雅黑"/>
-                <a:cs typeface="微软雅黑"/>
-              </a:defRPr>
-            </a:pPr>
-            <a:r>
-              <a:rPr sz="2200" b="0">
-                <a:solidFill>
-                  <a:srgbClr val="27333D"/>
-                </a:solidFill>
-                <a:latin typeface="微软雅黑"/>
-                <a:ea typeface="微软雅黑"/>
-                <a:cs typeface="微软雅黑"/>
-              </a:rPr>
-              <a:t>— 测试 + diff + 人工核验</a:t>
-            </a:r>
-          </a:p>
-        </p:txBody>
-      </p:sp>
-      <p:sp>
-        <p:nvSpPr>
-          <p:cNvPr id="20" name="list-696-217-3">
-            <a:extLst xmlns:a="http://schemas.openxmlformats.org/drawingml/2006/main">
-              <a:ext uri="{FF2B5EF4-FFF2-40B4-BE49-F238E27FC236}">
-                <a16:creationId xmlns:a16="http://schemas.microsoft.com/office/drawing/2014/main" id="{48DFBC84-C7A7-4267-9FCE-17FE48841A64}"/>
-              </a:ext>
-            </a:extLst>
-          </p:cNvPr>
-          <p:cNvSpPr>
-            <a:spLocks xmlns:a="http://schemas.openxmlformats.org/drawingml/2006/main" noGrp="1"/>
-          </p:cNvSpPr>
-          <p:nvPr/>
-        </p:nvSpPr>
-        <p:spPr>
-          <a:xfrm xmlns:a="http://schemas.openxmlformats.org/drawingml/2006/main">
-            <a:off x="6629400" y="3438525"/>
-            <a:ext cx="4953000" cy="400050"/>
-          </a:xfrm>
-          <a:prstGeom xmlns:a="http://schemas.openxmlformats.org/drawingml/2006/main" prst="rect">
-            <a:avLst/>
-          </a:prstGeom>
-          <a:noFill xmlns:a="http://schemas.openxmlformats.org/drawingml/2006/main"/>
-          <a:ln xmlns:a="http://schemas.openxmlformats.org/drawingml/2006/main" w="0">
-            <a:noFill/>
-          </a:ln>
-        </p:spPr>
-        <p:txBody>
-          <a:bodyPr xmlns:a="http://schemas.openxmlformats.org/drawingml/2006/main" lIns="0" tIns="0" rIns="0" bIns="0" anchor="ctr"/>
-          <a:lstStyle xmlns:a="http://schemas.openxmlformats.org/drawingml/2006/main"/>
-          <a:p xmlns:a="http://schemas.openxmlformats.org/drawingml/2006/main">
-            <a:pPr algn="l">
-              <a:lnSpc>
-                <a:spcPct val="118000"/>
-              </a:lnSpc>
-              <a:buNone/>
-              <a:defRPr sz="2200" b="0">
-                <a:solidFill>
-                  <a:srgbClr val="27333D"/>
-                </a:solidFill>
-                <a:latin typeface="微软雅黑"/>
-                <a:ea typeface="微软雅黑"/>
-                <a:cs typeface="微软雅黑"/>
-              </a:defRPr>
-            </a:pPr>
-            <a:r>
-              <a:rPr sz="2200" b="0">
-                <a:solidFill>
-                  <a:srgbClr val="27333D"/>
-                </a:solidFill>
-                <a:latin typeface="微软雅黑"/>
-                <a:ea typeface="微软雅黑"/>
-                <a:cs typeface="微软雅黑"/>
-              </a:rPr>
-              <a:t>— 超时、越权和失败都留痕</a:t>
+              <a:t>测试、fixture 与评价标准保持只读。</a:t>
             </a:r>
           </a:p>
         </p:txBody>
@@ -18049,7 +18229,7 @@
                 <a:ea typeface="微软雅黑"/>
                 <a:cs typeface="微软雅黑"/>
               </a:rPr>
-              <a:t>任务级权限与真正停住的审核点</a:t>
+              <a:t>授权声明还要落实到执行检查</a:t>
             </a:r>
             <a:endParaRPr/>
           </a:p>
@@ -18085,74 +18265,22 @@
       </p:sp>
       <p:sp>
         <p:nvSpPr>
-          <p:cNvPr id="6" name="brand-header">
-            <a:extLst xmlns:a="http://schemas.openxmlformats.org/drawingml/2006/main">
-              <a:ext uri="{FF2B5EF4-FFF2-40B4-BE49-F238E27FC236}">
-                <a16:creationId xmlns:a16="http://schemas.microsoft.com/office/drawing/2014/main" id="{26BBF4AA-C2B6-4FF1-98CC-B906D0A24E6B}"/>
-              </a:ext>
-            </a:extLst>
-          </p:cNvPr>
-          <p:cNvSpPr>
-            <a:spLocks xmlns:a="http://schemas.openxmlformats.org/drawingml/2006/main" noGrp="1"/>
-          </p:cNvSpPr>
-          <p:nvPr/>
-        </p:nvSpPr>
-        <p:spPr>
-          <a:xfrm xmlns:a="http://schemas.openxmlformats.org/drawingml/2006/main">
-            <a:off x="0" y="0"/>
-            <a:ext cx="11887200" cy="685800"/>
-          </a:xfrm>
-          <a:prstGeom xmlns:a="http://schemas.openxmlformats.org/drawingml/2006/main" prst="rect">
-            <a:avLst/>
-          </a:prstGeom>
-          <a:solidFill xmlns:a="http://schemas.openxmlformats.org/drawingml/2006/main">
-            <a:srgbClr val="C8161E"/>
-          </a:solidFill>
-          <a:ln xmlns:a="http://schemas.openxmlformats.org/drawingml/2006/main" w="0">
-            <a:noFill/>
-          </a:ln>
-        </p:spPr>
-      </p:sp>
-      <p:pic>
-        <p:nvPicPr>
-          <p:cNvPr id="44" name=""/>
-          <p:cNvPicPr>
-            <a:picLocks xmlns:a="http://schemas.openxmlformats.org/drawingml/2006/main" noChangeAspect="1"/>
-          </p:cNvPicPr>
-          <p:nvPr/>
-        </p:nvPicPr>
-        <p:blipFill>
-          <a:blip xmlns:r="http://schemas.openxmlformats.org/officeDocument/2006/relationships" xmlns:a="http://schemas.openxmlformats.org/drawingml/2006/main" r:embed="R527ced206b714292"/>
-          <a:stretch xmlns:a="http://schemas.openxmlformats.org/drawingml/2006/main"/>
-        </p:blipFill>
-        <p:spPr>
-          <a:xfrm xmlns:a="http://schemas.openxmlformats.org/drawingml/2006/main">
-            <a:off x="323850" y="76200"/>
-            <a:ext cx="533400" cy="533400"/>
-          </a:xfrm>
-          <a:prstGeom xmlns:a="http://schemas.openxmlformats.org/drawingml/2006/main" prst="rect">
-            <a:avLst/>
-          </a:prstGeom>
-        </p:spPr>
-      </p:pic>
-      <p:sp>
-        <p:nvSpPr>
-          <p:cNvPr id="8" name="brand-title">
-            <a:extLst xmlns:a="http://schemas.openxmlformats.org/drawingml/2006/main">
-              <a:ext uri="{FF2B5EF4-FFF2-40B4-BE49-F238E27FC236}">
-                <a16:creationId xmlns:a16="http://schemas.microsoft.com/office/drawing/2014/main" id="{F150515D-89C3-4061-B7BA-72800A996331}"/>
-              </a:ext>
-            </a:extLst>
-          </p:cNvPr>
-          <p:cNvSpPr>
-            <a:spLocks xmlns:a="http://schemas.openxmlformats.org/drawingml/2006/main" noGrp="1"/>
-          </p:cNvSpPr>
-          <p:nvPr/>
-        </p:nvSpPr>
-        <p:spPr>
-          <a:xfrm xmlns:a="http://schemas.openxmlformats.org/drawingml/2006/main">
-            <a:off x="1028700" y="66675"/>
-            <a:ext cx="10477500" cy="552450"/>
+          <p:cNvPr id="6" name="content-301">
+            <a:extLst xmlns:a="http://schemas.openxmlformats.org/drawingml/2006/main">
+              <a:ext uri="{FF2B5EF4-FFF2-40B4-BE49-F238E27FC236}">
+                <a16:creationId xmlns:a16="http://schemas.microsoft.com/office/drawing/2014/main" id="{8BF5491B-2F37-4D7D-B8C2-F4CB97E3F704}"/>
+              </a:ext>
+            </a:extLst>
+          </p:cNvPr>
+          <p:cNvSpPr>
+            <a:spLocks xmlns:a="http://schemas.openxmlformats.org/drawingml/2006/main" noGrp="1"/>
+          </p:cNvSpPr>
+          <p:nvPr/>
+        </p:nvSpPr>
+        <p:spPr>
+          <a:xfrm xmlns:a="http://schemas.openxmlformats.org/drawingml/2006/main">
+            <a:off x="609600" y="1571625"/>
+            <a:ext cx="10972800" cy="432435"/>
           </a:xfrm>
           <a:prstGeom xmlns:a="http://schemas.openxmlformats.org/drawingml/2006/main" prst="rect">
             <a:avLst/>
@@ -18163,7 +18291,7 @@
           </a:ln>
         </p:spPr>
         <p:txBody>
-          <a:bodyPr xmlns:a="http://schemas.openxmlformats.org/drawingml/2006/main" lIns="0" tIns="0" rIns="0" bIns="0" anchor="ctr"/>
+          <a:bodyPr xmlns:a="http://schemas.openxmlformats.org/drawingml/2006/main" lIns="0" tIns="0" rIns="0" bIns="0" anchor="t"/>
           <a:lstStyle xmlns:a="http://schemas.openxmlformats.org/drawingml/2006/main"/>
           <a:p xmlns:a="http://schemas.openxmlformats.org/drawingml/2006/main">
             <a:pPr algn="l">
@@ -18171,9 +18299,9 @@
                 <a:spcPct val="118000"/>
               </a:lnSpc>
               <a:buNone/>
-              <a:defRPr sz="3000" b="1">
-                <a:solidFill>
-                  <a:srgbClr val="FFFFFF"/>
+              <a:defRPr sz="2400" b="0">
+                <a:solidFill>
+                  <a:srgbClr val="27333D"/>
                 </a:solidFill>
                 <a:latin typeface="微软雅黑"/>
                 <a:ea typeface="微软雅黑"/>
@@ -18181,37 +18309,37 @@
               </a:defRPr>
             </a:pPr>
             <a:r>
-              <a:rPr sz="3000" b="1">
-                <a:solidFill>
-                  <a:srgbClr val="FFFFFF"/>
+              <a:rPr sz="2400" b="0">
+                <a:solidFill>
+                  <a:srgbClr val="27333D"/>
                 </a:solidFill>
                 <a:latin typeface="微软雅黑"/>
                 <a:ea typeface="微软雅黑"/>
                 <a:cs typeface="微软雅黑"/>
               </a:rPr>
-              <a:t>任务级权限与真正停住的审核点</a:t>
-            </a:r>
-          </a:p>
-        </p:txBody>
-      </p:sp>
-      <p:sp>
-        <p:nvSpPr>
-          <p:cNvPr id="9" name="source">
-            <a:extLst xmlns:a="http://schemas.openxmlformats.org/drawingml/2006/main">
-              <a:ext uri="{FF2B5EF4-FFF2-40B4-BE49-F238E27FC236}">
-                <a16:creationId xmlns:a16="http://schemas.microsoft.com/office/drawing/2014/main" id="{660BCB63-3206-47C3-8888-577580ECD685}"/>
-              </a:ext>
-            </a:extLst>
-          </p:cNvPr>
-          <p:cNvSpPr>
-            <a:spLocks xmlns:a="http://schemas.openxmlformats.org/drawingml/2006/main" noGrp="1"/>
-          </p:cNvSpPr>
-          <p:nvPr/>
-        </p:nvSpPr>
-        <p:spPr>
-          <a:xfrm xmlns:a="http://schemas.openxmlformats.org/drawingml/2006/main">
-            <a:off x="609600" y="6067425"/>
-            <a:ext cx="10763250" cy="209550"/>
+              <a:t>声明：允许读取、修改和执行的范围。</a:t>
+            </a:r>
+          </a:p>
+        </p:txBody>
+      </p:sp>
+      <p:sp>
+        <p:nvSpPr>
+          <p:cNvPr id="7" name="content-302">
+            <a:extLst xmlns:a="http://schemas.openxmlformats.org/drawingml/2006/main">
+              <a:ext uri="{FF2B5EF4-FFF2-40B4-BE49-F238E27FC236}">
+                <a16:creationId xmlns:a16="http://schemas.microsoft.com/office/drawing/2014/main" id="{C836678F-C76A-4A1E-9376-07191A8938DF}"/>
+              </a:ext>
+            </a:extLst>
+          </p:cNvPr>
+          <p:cNvSpPr>
+            <a:spLocks xmlns:a="http://schemas.openxmlformats.org/drawingml/2006/main" noGrp="1"/>
+          </p:cNvSpPr>
+          <p:nvPr/>
+        </p:nvSpPr>
+        <p:spPr>
+          <a:xfrm xmlns:a="http://schemas.openxmlformats.org/drawingml/2006/main">
+            <a:off x="609600" y="2261235"/>
+            <a:ext cx="10972800" cy="432435"/>
           </a:xfrm>
           <a:prstGeom xmlns:a="http://schemas.openxmlformats.org/drawingml/2006/main" prst="rect">
             <a:avLst/>
@@ -18230,9 +18358,9 @@
                 <a:spcPct val="118000"/>
               </a:lnSpc>
               <a:buNone/>
-              <a:defRPr sz="1100" b="0">
-                <a:solidFill>
-                  <a:srgbClr val="66727D"/>
+              <a:defRPr sz="2400" b="0">
+                <a:solidFill>
+                  <a:srgbClr val="27333D"/>
                 </a:solidFill>
                 <a:latin typeface="微软雅黑"/>
                 <a:ea typeface="微软雅黑"/>
@@ -18240,1040 +18368,37 @@
               </a:defRPr>
             </a:pPr>
             <a:r>
-              <a:rPr sz="1100" b="0">
-                <a:solidFill>
-                  <a:srgbClr val="66727D"/>
+              <a:rPr sz="2400" b="0">
+                <a:solidFill>
+                  <a:srgbClr val="27333D"/>
                 </a:solidFill>
                 <a:latin typeface="微软雅黑"/>
                 <a:ea typeface="微软雅黑"/>
                 <a:cs typeface="微软雅黑"/>
               </a:rPr>
-              <a:t>来源：lesson-10/slides.md；课程工件与讲义见 speaker notes</a:t>
-            </a:r>
-          </a:p>
-        </p:txBody>
-      </p:sp>
-      <p:sp>
-        <p:nvSpPr>
-          <p:cNvPr id="10" name="chain-line-0">
-            <a:extLst xmlns:a="http://schemas.openxmlformats.org/drawingml/2006/main">
-              <a:ext uri="{FF2B5EF4-FFF2-40B4-BE49-F238E27FC236}">
-                <a16:creationId xmlns:a16="http://schemas.microsoft.com/office/drawing/2014/main" id="{CBFCB12C-3A02-4759-A00E-4F050A1FBF48}"/>
-              </a:ext>
-            </a:extLst>
-          </p:cNvPr>
-          <p:cNvSpPr>
-            <a:spLocks xmlns:a="http://schemas.openxmlformats.org/drawingml/2006/main" noGrp="1"/>
-          </p:cNvSpPr>
-          <p:nvPr/>
-        </p:nvSpPr>
-        <p:spPr>
-          <a:xfrm xmlns:a="http://schemas.openxmlformats.org/drawingml/2006/main">
-            <a:off x="609600" y="2247900"/>
-            <a:ext cx="1666875" cy="14288"/>
-          </a:xfrm>
-          <a:prstGeom xmlns:a="http://schemas.openxmlformats.org/drawingml/2006/main" prst="rect">
-            <a:avLst/>
-          </a:prstGeom>
-          <a:solidFill xmlns:a="http://schemas.openxmlformats.org/drawingml/2006/main">
-            <a:srgbClr val="1F4D78"/>
-          </a:solidFill>
-          <a:ln xmlns:a="http://schemas.openxmlformats.org/drawingml/2006/main" w="0">
-            <a:noFill/>
-          </a:ln>
-        </p:spPr>
-      </p:sp>
-      <p:sp>
-        <p:nvSpPr>
-          <p:cNvPr id="11" name="chain-0">
-            <a:extLst xmlns:a="http://schemas.openxmlformats.org/drawingml/2006/main">
-              <a:ext uri="{FF2B5EF4-FFF2-40B4-BE49-F238E27FC236}">
-                <a16:creationId xmlns:a16="http://schemas.microsoft.com/office/drawing/2014/main" id="{5293EB8B-3EDE-4D0B-9448-DB01F6A0462C}"/>
-              </a:ext>
-            </a:extLst>
-          </p:cNvPr>
-          <p:cNvSpPr>
-            <a:spLocks xmlns:a="http://schemas.openxmlformats.org/drawingml/2006/main" noGrp="1"/>
-          </p:cNvSpPr>
-          <p:nvPr/>
-        </p:nvSpPr>
-        <p:spPr>
-          <a:xfrm xmlns:a="http://schemas.openxmlformats.org/drawingml/2006/main">
-            <a:off x="609600" y="1524000"/>
-            <a:ext cx="1666875" cy="666750"/>
-          </a:xfrm>
-          <a:prstGeom xmlns:a="http://schemas.openxmlformats.org/drawingml/2006/main" prst="rect">
-            <a:avLst/>
-          </a:prstGeom>
-          <a:noFill xmlns:a="http://schemas.openxmlformats.org/drawingml/2006/main"/>
-          <a:ln xmlns:a="http://schemas.openxmlformats.org/drawingml/2006/main" w="0">
-            <a:noFill/>
-          </a:ln>
-        </p:spPr>
-        <p:txBody>
-          <a:bodyPr xmlns:a="http://schemas.openxmlformats.org/drawingml/2006/main" lIns="0" tIns="0" rIns="0" bIns="0" anchor="ctr"/>
-          <a:lstStyle xmlns:a="http://schemas.openxmlformats.org/drawingml/2006/main"/>
-          <a:p xmlns:a="http://schemas.openxmlformats.org/drawingml/2006/main">
-            <a:pPr algn="ctr">
-              <a:lnSpc>
-                <a:spcPct val="118000"/>
-              </a:lnSpc>
-              <a:buNone/>
-              <a:defRPr sz="2200" b="0">
-                <a:solidFill>
-                  <a:srgbClr val="1F4D78"/>
-                </a:solidFill>
-                <a:latin typeface="微软雅黑"/>
-                <a:ea typeface="微软雅黑"/>
-                <a:cs typeface="微软雅黑"/>
-              </a:defRPr>
-            </a:pPr>
-            <a:r>
-              <a:rPr sz="2200" b="0">
-                <a:solidFill>
-                  <a:srgbClr val="1F4D78"/>
-                </a:solidFill>
-                <a:latin typeface="微软雅黑"/>
-                <a:ea typeface="微软雅黑"/>
-                <a:cs typeface="微软雅黑"/>
-              </a:rPr>
-              <a:t>只读</a:t>
-            </a:r>
-          </a:p>
-        </p:txBody>
-      </p:sp>
-      <p:sp>
-        <p:nvSpPr>
-          <p:cNvPr id="12" name="chain-arrow-0">
-            <a:extLst xmlns:a="http://schemas.openxmlformats.org/drawingml/2006/main">
-              <a:ext uri="{FF2B5EF4-FFF2-40B4-BE49-F238E27FC236}">
-                <a16:creationId xmlns:a16="http://schemas.microsoft.com/office/drawing/2014/main" id="{09EC89A9-FAC6-4C9C-9FBC-210237F7C698}"/>
-              </a:ext>
-            </a:extLst>
-          </p:cNvPr>
-          <p:cNvSpPr>
-            <a:spLocks xmlns:a="http://schemas.openxmlformats.org/drawingml/2006/main" noGrp="1"/>
-          </p:cNvSpPr>
-          <p:nvPr/>
-        </p:nvSpPr>
-        <p:spPr>
-          <a:xfrm xmlns:a="http://schemas.openxmlformats.org/drawingml/2006/main">
-            <a:off x="2276475" y="1695450"/>
-            <a:ext cx="659606" cy="323850"/>
-          </a:xfrm>
-          <a:prstGeom xmlns:a="http://schemas.openxmlformats.org/drawingml/2006/main" prst="rect">
-            <a:avLst/>
-          </a:prstGeom>
-          <a:noFill xmlns:a="http://schemas.openxmlformats.org/drawingml/2006/main"/>
-          <a:ln xmlns:a="http://schemas.openxmlformats.org/drawingml/2006/main" w="0">
-            <a:noFill/>
-          </a:ln>
-        </p:spPr>
-        <p:txBody>
-          <a:bodyPr xmlns:a="http://schemas.openxmlformats.org/drawingml/2006/main" lIns="0" tIns="0" rIns="0" bIns="0" anchor="ctr"/>
-          <a:lstStyle xmlns:a="http://schemas.openxmlformats.org/drawingml/2006/main"/>
-          <a:p xmlns:a="http://schemas.openxmlformats.org/drawingml/2006/main">
-            <a:pPr algn="ctr">
-              <a:lnSpc>
-                <a:spcPct val="118000"/>
-              </a:lnSpc>
-              <a:buNone/>
-              <a:defRPr sz="2400" b="0">
-                <a:solidFill>
-                  <a:srgbClr val="1F4D78"/>
-                </a:solidFill>
-                <a:latin typeface="微软雅黑"/>
-                <a:ea typeface="微软雅黑"/>
-                <a:cs typeface="微软雅黑"/>
-              </a:defRPr>
-            </a:pPr>
-            <a:r>
-              <a:rPr sz="2400" b="0">
-                <a:solidFill>
-                  <a:srgbClr val="1F4D78"/>
-                </a:solidFill>
-                <a:latin typeface="微软雅黑"/>
-                <a:ea typeface="微软雅黑"/>
-                <a:cs typeface="微软雅黑"/>
-              </a:rPr>
-              <a:t>→</a:t>
-            </a:r>
-          </a:p>
-        </p:txBody>
-      </p:sp>
-      <p:sp>
-        <p:nvSpPr>
-          <p:cNvPr id="13" name="chain-sub-0">
-            <a:extLst xmlns:a="http://schemas.openxmlformats.org/drawingml/2006/main">
-              <a:ext uri="{FF2B5EF4-FFF2-40B4-BE49-F238E27FC236}">
-                <a16:creationId xmlns:a16="http://schemas.microsoft.com/office/drawing/2014/main" id="{110A7C83-B60F-45E5-8CC7-0DACCAB33008}"/>
-              </a:ext>
-            </a:extLst>
-          </p:cNvPr>
-          <p:cNvSpPr>
-            <a:spLocks xmlns:a="http://schemas.openxmlformats.org/drawingml/2006/main" noGrp="1"/>
-          </p:cNvSpPr>
-          <p:nvPr/>
-        </p:nvSpPr>
-        <p:spPr>
-          <a:xfrm xmlns:a="http://schemas.openxmlformats.org/drawingml/2006/main">
-            <a:off x="609600" y="2400300"/>
-            <a:ext cx="1666875" cy="571500"/>
-          </a:xfrm>
-          <a:prstGeom xmlns:a="http://schemas.openxmlformats.org/drawingml/2006/main" prst="rect">
-            <a:avLst/>
-          </a:prstGeom>
-          <a:noFill xmlns:a="http://schemas.openxmlformats.org/drawingml/2006/main"/>
-          <a:ln xmlns:a="http://schemas.openxmlformats.org/drawingml/2006/main" w="0">
-            <a:noFill/>
-          </a:ln>
-        </p:spPr>
-        <p:txBody>
-          <a:bodyPr xmlns:a="http://schemas.openxmlformats.org/drawingml/2006/main" lIns="0" tIns="0" rIns="0" bIns="0" anchor="t"/>
-          <a:lstStyle xmlns:a="http://schemas.openxmlformats.org/drawingml/2006/main"/>
-          <a:p xmlns:a="http://schemas.openxmlformats.org/drawingml/2006/main">
-            <a:pPr algn="ctr">
-              <a:lnSpc>
-                <a:spcPct val="118000"/>
-              </a:lnSpc>
-              <a:buNone/>
-              <a:defRPr sz="2000" b="0">
-                <a:solidFill>
-                  <a:srgbClr val="66727D"/>
-                </a:solidFill>
-                <a:latin typeface="微软雅黑"/>
-                <a:ea typeface="微软雅黑"/>
-                <a:cs typeface="微软雅黑"/>
-              </a:defRPr>
-            </a:pPr>
-            <a:r>
-              <a:rPr sz="2000" b="0">
-                <a:solidFill>
-                  <a:srgbClr val="66727D"/>
-                </a:solidFill>
-                <a:latin typeface="微软雅黑"/>
-                <a:ea typeface="微软雅黑"/>
-                <a:cs typeface="微软雅黑"/>
-              </a:rPr>
-              <a:t>规格 / 证据地图</a:t>
-            </a:r>
-          </a:p>
-        </p:txBody>
-      </p:sp>
-      <p:sp>
-        <p:nvSpPr>
-          <p:cNvPr id="14" name="chain-line-1">
-            <a:extLst xmlns:a="http://schemas.openxmlformats.org/drawingml/2006/main">
-              <a:ext uri="{FF2B5EF4-FFF2-40B4-BE49-F238E27FC236}">
-                <a16:creationId xmlns:a16="http://schemas.microsoft.com/office/drawing/2014/main" id="{1FCE97E0-9EED-43EF-BD2A-453E079BE4A6}"/>
-              </a:ext>
-            </a:extLst>
-          </p:cNvPr>
-          <p:cNvSpPr>
-            <a:spLocks xmlns:a="http://schemas.openxmlformats.org/drawingml/2006/main" noGrp="1"/>
-          </p:cNvSpPr>
-          <p:nvPr/>
-        </p:nvSpPr>
-        <p:spPr>
-          <a:xfrm xmlns:a="http://schemas.openxmlformats.org/drawingml/2006/main">
-            <a:off x="2936081" y="2247900"/>
-            <a:ext cx="1666875" cy="14288"/>
-          </a:xfrm>
-          <a:prstGeom xmlns:a="http://schemas.openxmlformats.org/drawingml/2006/main" prst="rect">
-            <a:avLst/>
-          </a:prstGeom>
-          <a:solidFill xmlns:a="http://schemas.openxmlformats.org/drawingml/2006/main">
-            <a:srgbClr val="1F4D78"/>
-          </a:solidFill>
-          <a:ln xmlns:a="http://schemas.openxmlformats.org/drawingml/2006/main" w="0">
-            <a:noFill/>
-          </a:ln>
-        </p:spPr>
-      </p:sp>
-      <p:sp>
-        <p:nvSpPr>
-          <p:cNvPr id="15" name="chain-1">
-            <a:extLst xmlns:a="http://schemas.openxmlformats.org/drawingml/2006/main">
-              <a:ext uri="{FF2B5EF4-FFF2-40B4-BE49-F238E27FC236}">
-                <a16:creationId xmlns:a16="http://schemas.microsoft.com/office/drawing/2014/main" id="{3CCC048C-93F9-447C-99E8-C4CDAA4EF2F7}"/>
-              </a:ext>
-            </a:extLst>
-          </p:cNvPr>
-          <p:cNvSpPr>
-            <a:spLocks xmlns:a="http://schemas.openxmlformats.org/drawingml/2006/main" noGrp="1"/>
-          </p:cNvSpPr>
-          <p:nvPr/>
-        </p:nvSpPr>
-        <p:spPr>
-          <a:xfrm xmlns:a="http://schemas.openxmlformats.org/drawingml/2006/main">
-            <a:off x="2936081" y="1524000"/>
-            <a:ext cx="1666875" cy="666750"/>
-          </a:xfrm>
-          <a:prstGeom xmlns:a="http://schemas.openxmlformats.org/drawingml/2006/main" prst="rect">
-            <a:avLst/>
-          </a:prstGeom>
-          <a:noFill xmlns:a="http://schemas.openxmlformats.org/drawingml/2006/main"/>
-          <a:ln xmlns:a="http://schemas.openxmlformats.org/drawingml/2006/main" w="0">
-            <a:noFill/>
-          </a:ln>
-        </p:spPr>
-        <p:txBody>
-          <a:bodyPr xmlns:a="http://schemas.openxmlformats.org/drawingml/2006/main" lIns="0" tIns="0" rIns="0" bIns="0" anchor="ctr"/>
-          <a:lstStyle xmlns:a="http://schemas.openxmlformats.org/drawingml/2006/main"/>
-          <a:p xmlns:a="http://schemas.openxmlformats.org/drawingml/2006/main">
-            <a:pPr algn="ctr">
-              <a:lnSpc>
-                <a:spcPct val="118000"/>
-              </a:lnSpc>
-              <a:buNone/>
-              <a:defRPr sz="2200" b="0">
-                <a:solidFill>
-                  <a:srgbClr val="1F4D78"/>
-                </a:solidFill>
-                <a:latin typeface="微软雅黑"/>
-                <a:ea typeface="微软雅黑"/>
-                <a:cs typeface="微软雅黑"/>
-              </a:defRPr>
-            </a:pPr>
-            <a:r>
-              <a:rPr sz="2200" b="0">
-                <a:solidFill>
-                  <a:srgbClr val="1F4D78"/>
-                </a:solidFill>
-                <a:latin typeface="微软雅黑"/>
-                <a:ea typeface="微软雅黑"/>
-                <a:cs typeface="微软雅黑"/>
-              </a:rPr>
-              <a:t>可写</a:t>
-            </a:r>
-          </a:p>
-        </p:txBody>
-      </p:sp>
-      <p:sp>
-        <p:nvSpPr>
-          <p:cNvPr id="16" name="chain-arrow-1">
-            <a:extLst xmlns:a="http://schemas.openxmlformats.org/drawingml/2006/main">
-              <a:ext uri="{FF2B5EF4-FFF2-40B4-BE49-F238E27FC236}">
-                <a16:creationId xmlns:a16="http://schemas.microsoft.com/office/drawing/2014/main" id="{3C182583-29B4-4170-B86B-B88559E83AE1}"/>
-              </a:ext>
-            </a:extLst>
-          </p:cNvPr>
-          <p:cNvSpPr>
-            <a:spLocks xmlns:a="http://schemas.openxmlformats.org/drawingml/2006/main" noGrp="1"/>
-          </p:cNvSpPr>
-          <p:nvPr/>
-        </p:nvSpPr>
-        <p:spPr>
-          <a:xfrm xmlns:a="http://schemas.openxmlformats.org/drawingml/2006/main">
-            <a:off x="4602956" y="1695450"/>
-            <a:ext cx="659606" cy="323850"/>
-          </a:xfrm>
-          <a:prstGeom xmlns:a="http://schemas.openxmlformats.org/drawingml/2006/main" prst="rect">
-            <a:avLst/>
-          </a:prstGeom>
-          <a:noFill xmlns:a="http://schemas.openxmlformats.org/drawingml/2006/main"/>
-          <a:ln xmlns:a="http://schemas.openxmlformats.org/drawingml/2006/main" w="0">
-            <a:noFill/>
-          </a:ln>
-        </p:spPr>
-        <p:txBody>
-          <a:bodyPr xmlns:a="http://schemas.openxmlformats.org/drawingml/2006/main" lIns="0" tIns="0" rIns="0" bIns="0" anchor="ctr"/>
-          <a:lstStyle xmlns:a="http://schemas.openxmlformats.org/drawingml/2006/main"/>
-          <a:p xmlns:a="http://schemas.openxmlformats.org/drawingml/2006/main">
-            <a:pPr algn="ctr">
-              <a:lnSpc>
-                <a:spcPct val="118000"/>
-              </a:lnSpc>
-              <a:buNone/>
-              <a:defRPr sz="2400" b="0">
-                <a:solidFill>
-                  <a:srgbClr val="1F4D78"/>
-                </a:solidFill>
-                <a:latin typeface="微软雅黑"/>
-                <a:ea typeface="微软雅黑"/>
-                <a:cs typeface="微软雅黑"/>
-              </a:defRPr>
-            </a:pPr>
-            <a:r>
-              <a:rPr sz="2400" b="0">
-                <a:solidFill>
-                  <a:srgbClr val="1F4D78"/>
-                </a:solidFill>
-                <a:latin typeface="微软雅黑"/>
-                <a:ea typeface="微软雅黑"/>
-                <a:cs typeface="微软雅黑"/>
-              </a:rPr>
-              <a:t>→</a:t>
-            </a:r>
-          </a:p>
-        </p:txBody>
-      </p:sp>
-      <p:sp>
-        <p:nvSpPr>
-          <p:cNvPr id="17" name="chain-sub-1">
-            <a:extLst xmlns:a="http://schemas.openxmlformats.org/drawingml/2006/main">
-              <a:ext uri="{FF2B5EF4-FFF2-40B4-BE49-F238E27FC236}">
-                <a16:creationId xmlns:a16="http://schemas.microsoft.com/office/drawing/2014/main" id="{E6350E0E-8373-42DC-87FF-CC2BAA99AD3D}"/>
-              </a:ext>
-            </a:extLst>
-          </p:cNvPr>
-          <p:cNvSpPr>
-            <a:spLocks xmlns:a="http://schemas.openxmlformats.org/drawingml/2006/main" noGrp="1"/>
-          </p:cNvSpPr>
-          <p:nvPr/>
-        </p:nvSpPr>
-        <p:spPr>
-          <a:xfrm xmlns:a="http://schemas.openxmlformats.org/drawingml/2006/main">
-            <a:off x="2936081" y="2400300"/>
-            <a:ext cx="1666875" cy="571500"/>
-          </a:xfrm>
-          <a:prstGeom xmlns:a="http://schemas.openxmlformats.org/drawingml/2006/main" prst="rect">
-            <a:avLst/>
-          </a:prstGeom>
-          <a:noFill xmlns:a="http://schemas.openxmlformats.org/drawingml/2006/main"/>
-          <a:ln xmlns:a="http://schemas.openxmlformats.org/drawingml/2006/main" w="0">
-            <a:noFill/>
-          </a:ln>
-        </p:spPr>
-        <p:txBody>
-          <a:bodyPr xmlns:a="http://schemas.openxmlformats.org/drawingml/2006/main" lIns="0" tIns="0" rIns="0" bIns="0" anchor="t"/>
-          <a:lstStyle xmlns:a="http://schemas.openxmlformats.org/drawingml/2006/main"/>
-          <a:p xmlns:a="http://schemas.openxmlformats.org/drawingml/2006/main">
-            <a:pPr algn="ctr">
-              <a:lnSpc>
-                <a:spcPct val="118000"/>
-              </a:lnSpc>
-              <a:buNone/>
-              <a:defRPr sz="2000" b="0">
-                <a:solidFill>
-                  <a:srgbClr val="66727D"/>
-                </a:solidFill>
-                <a:latin typeface="微软雅黑"/>
-                <a:ea typeface="微软雅黑"/>
-                <a:cs typeface="微软雅黑"/>
-              </a:defRPr>
-            </a:pPr>
-            <a:r>
-              <a:rPr sz="2000" b="0">
-                <a:solidFill>
-                  <a:srgbClr val="66727D"/>
-                </a:solidFill>
-                <a:latin typeface="微软雅黑"/>
-                <a:ea typeface="微软雅黑"/>
-                <a:cs typeface="微软雅黑"/>
-              </a:rPr>
-              <a:t>src/</a:t>
-            </a:r>
-          </a:p>
-          <a:p xmlns:a="http://schemas.openxmlformats.org/drawingml/2006/main">
-            <a:pPr algn="ctr">
-              <a:lnSpc>
-                <a:spcPct val="118000"/>
-              </a:lnSpc>
-              <a:buNone/>
-              <a:defRPr sz="2000" b="0">
-                <a:solidFill>
-                  <a:srgbClr val="66727D"/>
-                </a:solidFill>
-                <a:latin typeface="微软雅黑"/>
-                <a:ea typeface="微软雅黑"/>
-                <a:cs typeface="微软雅黑"/>
-              </a:defRPr>
-            </a:pPr>
-            <a:r>
-              <a:rPr sz="2000" b="0">
-                <a:solidFill>
-                  <a:srgbClr val="66727D"/>
-                </a:solidFill>
-                <a:latin typeface="微软雅黑"/>
-                <a:ea typeface="微软雅黑"/>
-                <a:cs typeface="微软雅黑"/>
-              </a:rPr>
-              <a:t>generate.py</a:t>
-            </a:r>
-          </a:p>
-        </p:txBody>
-      </p:sp>
-      <p:sp>
-        <p:nvSpPr>
-          <p:cNvPr id="18" name="chain-line-2">
-            <a:extLst xmlns:a="http://schemas.openxmlformats.org/drawingml/2006/main">
-              <a:ext uri="{FF2B5EF4-FFF2-40B4-BE49-F238E27FC236}">
-                <a16:creationId xmlns:a16="http://schemas.microsoft.com/office/drawing/2014/main" id="{5D39A05A-5451-4639-BCA4-73438E2641E4}"/>
-              </a:ext>
-            </a:extLst>
-          </p:cNvPr>
-          <p:cNvSpPr>
-            <a:spLocks xmlns:a="http://schemas.openxmlformats.org/drawingml/2006/main" noGrp="1"/>
-          </p:cNvSpPr>
-          <p:nvPr/>
-        </p:nvSpPr>
-        <p:spPr>
-          <a:xfrm xmlns:a="http://schemas.openxmlformats.org/drawingml/2006/main">
-            <a:off x="5262563" y="2247900"/>
-            <a:ext cx="1666875" cy="14288"/>
-          </a:xfrm>
-          <a:prstGeom xmlns:a="http://schemas.openxmlformats.org/drawingml/2006/main" prst="rect">
-            <a:avLst/>
-          </a:prstGeom>
-          <a:solidFill xmlns:a="http://schemas.openxmlformats.org/drawingml/2006/main">
-            <a:srgbClr val="1F4D78"/>
-          </a:solidFill>
-          <a:ln xmlns:a="http://schemas.openxmlformats.org/drawingml/2006/main" w="0">
-            <a:noFill/>
-          </a:ln>
-        </p:spPr>
-      </p:sp>
-      <p:sp>
-        <p:nvSpPr>
-          <p:cNvPr id="19" name="chain-2">
-            <a:extLst xmlns:a="http://schemas.openxmlformats.org/drawingml/2006/main">
-              <a:ext uri="{FF2B5EF4-FFF2-40B4-BE49-F238E27FC236}">
-                <a16:creationId xmlns:a16="http://schemas.microsoft.com/office/drawing/2014/main" id="{8B086713-7165-485F-A81E-7429D4B286B4}"/>
-              </a:ext>
-            </a:extLst>
-          </p:cNvPr>
-          <p:cNvSpPr>
-            <a:spLocks xmlns:a="http://schemas.openxmlformats.org/drawingml/2006/main" noGrp="1"/>
-          </p:cNvSpPr>
-          <p:nvPr/>
-        </p:nvSpPr>
-        <p:spPr>
-          <a:xfrm xmlns:a="http://schemas.openxmlformats.org/drawingml/2006/main">
-            <a:off x="5262563" y="1524000"/>
-            <a:ext cx="1666875" cy="666750"/>
-          </a:xfrm>
-          <a:prstGeom xmlns:a="http://schemas.openxmlformats.org/drawingml/2006/main" prst="rect">
-            <a:avLst/>
-          </a:prstGeom>
-          <a:noFill xmlns:a="http://schemas.openxmlformats.org/drawingml/2006/main"/>
-          <a:ln xmlns:a="http://schemas.openxmlformats.org/drawingml/2006/main" w="0">
-            <a:noFill/>
-          </a:ln>
-        </p:spPr>
-        <p:txBody>
-          <a:bodyPr xmlns:a="http://schemas.openxmlformats.org/drawingml/2006/main" lIns="0" tIns="0" rIns="0" bIns="0" anchor="ctr"/>
-          <a:lstStyle xmlns:a="http://schemas.openxmlformats.org/drawingml/2006/main"/>
-          <a:p xmlns:a="http://schemas.openxmlformats.org/drawingml/2006/main">
-            <a:pPr algn="ctr">
-              <a:lnSpc>
-                <a:spcPct val="118000"/>
-              </a:lnSpc>
-              <a:buNone/>
-              <a:defRPr sz="2200" b="0">
-                <a:solidFill>
-                  <a:srgbClr val="1F4D78"/>
-                </a:solidFill>
-                <a:latin typeface="微软雅黑"/>
-                <a:ea typeface="微软雅黑"/>
-                <a:cs typeface="微软雅黑"/>
-              </a:defRPr>
-            </a:pPr>
-            <a:r>
-              <a:rPr sz="2200" b="0">
-                <a:solidFill>
-                  <a:srgbClr val="1F4D78"/>
-                </a:solidFill>
-                <a:latin typeface="微软雅黑"/>
-                <a:ea typeface="微软雅黑"/>
-                <a:cs typeface="微软雅黑"/>
-              </a:rPr>
-              <a:t>可执行</a:t>
-            </a:r>
-          </a:p>
-        </p:txBody>
-      </p:sp>
-      <p:sp>
-        <p:nvSpPr>
-          <p:cNvPr id="20" name="chain-arrow-2">
-            <a:extLst xmlns:a="http://schemas.openxmlformats.org/drawingml/2006/main">
-              <a:ext uri="{FF2B5EF4-FFF2-40B4-BE49-F238E27FC236}">
-                <a16:creationId xmlns:a16="http://schemas.microsoft.com/office/drawing/2014/main" id="{B6D50B1C-E239-49E7-A284-B94CBC53DC6F}"/>
-              </a:ext>
-            </a:extLst>
-          </p:cNvPr>
-          <p:cNvSpPr>
-            <a:spLocks xmlns:a="http://schemas.openxmlformats.org/drawingml/2006/main" noGrp="1"/>
-          </p:cNvSpPr>
-          <p:nvPr/>
-        </p:nvSpPr>
-        <p:spPr>
-          <a:xfrm xmlns:a="http://schemas.openxmlformats.org/drawingml/2006/main">
-            <a:off x="6929438" y="1695450"/>
-            <a:ext cx="659606" cy="323850"/>
-          </a:xfrm>
-          <a:prstGeom xmlns:a="http://schemas.openxmlformats.org/drawingml/2006/main" prst="rect">
-            <a:avLst/>
-          </a:prstGeom>
-          <a:noFill xmlns:a="http://schemas.openxmlformats.org/drawingml/2006/main"/>
-          <a:ln xmlns:a="http://schemas.openxmlformats.org/drawingml/2006/main" w="0">
-            <a:noFill/>
-          </a:ln>
-        </p:spPr>
-        <p:txBody>
-          <a:bodyPr xmlns:a="http://schemas.openxmlformats.org/drawingml/2006/main" lIns="0" tIns="0" rIns="0" bIns="0" anchor="ctr"/>
-          <a:lstStyle xmlns:a="http://schemas.openxmlformats.org/drawingml/2006/main"/>
-          <a:p xmlns:a="http://schemas.openxmlformats.org/drawingml/2006/main">
-            <a:pPr algn="ctr">
-              <a:lnSpc>
-                <a:spcPct val="118000"/>
-              </a:lnSpc>
-              <a:buNone/>
-              <a:defRPr sz="2400" b="0">
-                <a:solidFill>
-                  <a:srgbClr val="1F4D78"/>
-                </a:solidFill>
-                <a:latin typeface="微软雅黑"/>
-                <a:ea typeface="微软雅黑"/>
-                <a:cs typeface="微软雅黑"/>
-              </a:defRPr>
-            </a:pPr>
-            <a:r>
-              <a:rPr sz="2400" b="0">
-                <a:solidFill>
-                  <a:srgbClr val="1F4D78"/>
-                </a:solidFill>
-                <a:latin typeface="微软雅黑"/>
-                <a:ea typeface="微软雅黑"/>
-                <a:cs typeface="微软雅黑"/>
-              </a:rPr>
-              <a:t>→</a:t>
-            </a:r>
-          </a:p>
-        </p:txBody>
-      </p:sp>
-      <p:sp>
-        <p:nvSpPr>
-          <p:cNvPr id="21" name="chain-sub-2">
-            <a:extLst xmlns:a="http://schemas.openxmlformats.org/drawingml/2006/main">
-              <a:ext uri="{FF2B5EF4-FFF2-40B4-BE49-F238E27FC236}">
-                <a16:creationId xmlns:a16="http://schemas.microsoft.com/office/drawing/2014/main" id="{9781DBD3-5670-4AA1-8ED5-721FC48E214F}"/>
-              </a:ext>
-            </a:extLst>
-          </p:cNvPr>
-          <p:cNvSpPr>
-            <a:spLocks xmlns:a="http://schemas.openxmlformats.org/drawingml/2006/main" noGrp="1"/>
-          </p:cNvSpPr>
-          <p:nvPr/>
-        </p:nvSpPr>
-        <p:spPr>
-          <a:xfrm xmlns:a="http://schemas.openxmlformats.org/drawingml/2006/main">
-            <a:off x="5262563" y="2400300"/>
-            <a:ext cx="1666875" cy="571500"/>
-          </a:xfrm>
-          <a:prstGeom xmlns:a="http://schemas.openxmlformats.org/drawingml/2006/main" prst="rect">
-            <a:avLst/>
-          </a:prstGeom>
-          <a:noFill xmlns:a="http://schemas.openxmlformats.org/drawingml/2006/main"/>
-          <a:ln xmlns:a="http://schemas.openxmlformats.org/drawingml/2006/main" w="0">
-            <a:noFill/>
-          </a:ln>
-        </p:spPr>
-        <p:txBody>
-          <a:bodyPr xmlns:a="http://schemas.openxmlformats.org/drawingml/2006/main" lIns="0" tIns="0" rIns="0" bIns="0" anchor="t"/>
-          <a:lstStyle xmlns:a="http://schemas.openxmlformats.org/drawingml/2006/main"/>
-          <a:p xmlns:a="http://schemas.openxmlformats.org/drawingml/2006/main">
-            <a:pPr algn="ctr">
-              <a:lnSpc>
-                <a:spcPct val="118000"/>
-              </a:lnSpc>
-              <a:buNone/>
-              <a:defRPr sz="2000" b="0">
-                <a:solidFill>
-                  <a:srgbClr val="66727D"/>
-                </a:solidFill>
-                <a:latin typeface="微软雅黑"/>
-                <a:ea typeface="微软雅黑"/>
-                <a:cs typeface="微软雅黑"/>
-              </a:defRPr>
-            </a:pPr>
-            <a:r>
-              <a:rPr sz="2000" b="0">
-                <a:solidFill>
-                  <a:srgbClr val="66727D"/>
-                </a:solidFill>
-                <a:latin typeface="微软雅黑"/>
-                <a:ea typeface="微软雅黑"/>
-                <a:cs typeface="微软雅黑"/>
-              </a:rPr>
-              <a:t>指定 pytest</a:t>
-            </a:r>
-          </a:p>
-        </p:txBody>
-      </p:sp>
-      <p:sp>
-        <p:nvSpPr>
-          <p:cNvPr id="22" name="chain-line-3">
-            <a:extLst xmlns:a="http://schemas.openxmlformats.org/drawingml/2006/main">
-              <a:ext uri="{FF2B5EF4-FFF2-40B4-BE49-F238E27FC236}">
-                <a16:creationId xmlns:a16="http://schemas.microsoft.com/office/drawing/2014/main" id="{52CA160F-B8D6-4BFC-A3AE-A2CCF1721460}"/>
-              </a:ext>
-            </a:extLst>
-          </p:cNvPr>
-          <p:cNvSpPr>
-            <a:spLocks xmlns:a="http://schemas.openxmlformats.org/drawingml/2006/main" noGrp="1"/>
-          </p:cNvSpPr>
-          <p:nvPr/>
-        </p:nvSpPr>
-        <p:spPr>
-          <a:xfrm xmlns:a="http://schemas.openxmlformats.org/drawingml/2006/main">
-            <a:off x="7589044" y="2247900"/>
-            <a:ext cx="1666875" cy="14288"/>
-          </a:xfrm>
-          <a:prstGeom xmlns:a="http://schemas.openxmlformats.org/drawingml/2006/main" prst="rect">
-            <a:avLst/>
-          </a:prstGeom>
-          <a:solidFill xmlns:a="http://schemas.openxmlformats.org/drawingml/2006/main">
-            <a:srgbClr val="1F4D78"/>
-          </a:solidFill>
-          <a:ln xmlns:a="http://schemas.openxmlformats.org/drawingml/2006/main" w="0">
-            <a:noFill/>
-          </a:ln>
-        </p:spPr>
-      </p:sp>
-      <p:sp>
-        <p:nvSpPr>
-          <p:cNvPr id="23" name="chain-3">
-            <a:extLst xmlns:a="http://schemas.openxmlformats.org/drawingml/2006/main">
-              <a:ext uri="{FF2B5EF4-FFF2-40B4-BE49-F238E27FC236}">
-                <a16:creationId xmlns:a16="http://schemas.microsoft.com/office/drawing/2014/main" id="{B73565FA-83BE-4243-9A23-D4DB2D8CE985}"/>
-              </a:ext>
-            </a:extLst>
-          </p:cNvPr>
-          <p:cNvSpPr>
-            <a:spLocks xmlns:a="http://schemas.openxmlformats.org/drawingml/2006/main" noGrp="1"/>
-          </p:cNvSpPr>
-          <p:nvPr/>
-        </p:nvSpPr>
-        <p:spPr>
-          <a:xfrm xmlns:a="http://schemas.openxmlformats.org/drawingml/2006/main">
-            <a:off x="7589044" y="1524000"/>
-            <a:ext cx="1666875" cy="666750"/>
-          </a:xfrm>
-          <a:prstGeom xmlns:a="http://schemas.openxmlformats.org/drawingml/2006/main" prst="rect">
-            <a:avLst/>
-          </a:prstGeom>
-          <a:noFill xmlns:a="http://schemas.openxmlformats.org/drawingml/2006/main"/>
-          <a:ln xmlns:a="http://schemas.openxmlformats.org/drawingml/2006/main" w="0">
-            <a:noFill/>
-          </a:ln>
-        </p:spPr>
-        <p:txBody>
-          <a:bodyPr xmlns:a="http://schemas.openxmlformats.org/drawingml/2006/main" lIns="0" tIns="0" rIns="0" bIns="0" anchor="ctr"/>
-          <a:lstStyle xmlns:a="http://schemas.openxmlformats.org/drawingml/2006/main"/>
-          <a:p xmlns:a="http://schemas.openxmlformats.org/drawingml/2006/main">
-            <a:pPr algn="ctr">
-              <a:lnSpc>
-                <a:spcPct val="118000"/>
-              </a:lnSpc>
-              <a:buNone/>
-              <a:defRPr sz="2200" b="0">
-                <a:solidFill>
-                  <a:srgbClr val="1F4D78"/>
-                </a:solidFill>
-                <a:latin typeface="微软雅黑"/>
-                <a:ea typeface="微软雅黑"/>
-                <a:cs typeface="微软雅黑"/>
-              </a:defRPr>
-            </a:pPr>
-            <a:r>
-              <a:rPr sz="2200" b="0">
-                <a:solidFill>
-                  <a:srgbClr val="1F4D78"/>
-                </a:solidFill>
-                <a:latin typeface="微软雅黑"/>
-                <a:ea typeface="微软雅黑"/>
-                <a:cs typeface="微软雅黑"/>
-              </a:rPr>
-              <a:t>需确认</a:t>
-            </a:r>
-          </a:p>
-        </p:txBody>
-      </p:sp>
-      <p:sp>
-        <p:nvSpPr>
-          <p:cNvPr id="24" name="chain-arrow-3">
-            <a:extLst xmlns:a="http://schemas.openxmlformats.org/drawingml/2006/main">
-              <a:ext uri="{FF2B5EF4-FFF2-40B4-BE49-F238E27FC236}">
-                <a16:creationId xmlns:a16="http://schemas.microsoft.com/office/drawing/2014/main" id="{3051A9D1-50D0-42B8-90D0-4F8A66856AC3}"/>
-              </a:ext>
-            </a:extLst>
-          </p:cNvPr>
-          <p:cNvSpPr>
-            <a:spLocks xmlns:a="http://schemas.openxmlformats.org/drawingml/2006/main" noGrp="1"/>
-          </p:cNvSpPr>
-          <p:nvPr/>
-        </p:nvSpPr>
-        <p:spPr>
-          <a:xfrm xmlns:a="http://schemas.openxmlformats.org/drawingml/2006/main">
-            <a:off x="9255919" y="1695450"/>
-            <a:ext cx="659606" cy="323850"/>
-          </a:xfrm>
-          <a:prstGeom xmlns:a="http://schemas.openxmlformats.org/drawingml/2006/main" prst="rect">
-            <a:avLst/>
-          </a:prstGeom>
-          <a:noFill xmlns:a="http://schemas.openxmlformats.org/drawingml/2006/main"/>
-          <a:ln xmlns:a="http://schemas.openxmlformats.org/drawingml/2006/main" w="0">
-            <a:noFill/>
-          </a:ln>
-        </p:spPr>
-        <p:txBody>
-          <a:bodyPr xmlns:a="http://schemas.openxmlformats.org/drawingml/2006/main" lIns="0" tIns="0" rIns="0" bIns="0" anchor="ctr"/>
-          <a:lstStyle xmlns:a="http://schemas.openxmlformats.org/drawingml/2006/main"/>
-          <a:p xmlns:a="http://schemas.openxmlformats.org/drawingml/2006/main">
-            <a:pPr algn="ctr">
-              <a:lnSpc>
-                <a:spcPct val="118000"/>
-              </a:lnSpc>
-              <a:buNone/>
-              <a:defRPr sz="2400" b="0">
-                <a:solidFill>
-                  <a:srgbClr val="1F4D78"/>
-                </a:solidFill>
-                <a:latin typeface="微软雅黑"/>
-                <a:ea typeface="微软雅黑"/>
-                <a:cs typeface="微软雅黑"/>
-              </a:defRPr>
-            </a:pPr>
-            <a:r>
-              <a:rPr sz="2400" b="0">
-                <a:solidFill>
-                  <a:srgbClr val="1F4D78"/>
-                </a:solidFill>
-                <a:latin typeface="微软雅黑"/>
-                <a:ea typeface="微软雅黑"/>
-                <a:cs typeface="微软雅黑"/>
-              </a:rPr>
-              <a:t>→</a:t>
-            </a:r>
-          </a:p>
-        </p:txBody>
-      </p:sp>
-      <p:sp>
-        <p:nvSpPr>
-          <p:cNvPr id="25" name="chain-sub-3">
-            <a:extLst xmlns:a="http://schemas.openxmlformats.org/drawingml/2006/main">
-              <a:ext uri="{FF2B5EF4-FFF2-40B4-BE49-F238E27FC236}">
-                <a16:creationId xmlns:a16="http://schemas.microsoft.com/office/drawing/2014/main" id="{3DB921D0-8785-4C83-A73C-E4B001B12E90}"/>
-              </a:ext>
-            </a:extLst>
-          </p:cNvPr>
-          <p:cNvSpPr>
-            <a:spLocks xmlns:a="http://schemas.openxmlformats.org/drawingml/2006/main" noGrp="1"/>
-          </p:cNvSpPr>
-          <p:nvPr/>
-        </p:nvSpPr>
-        <p:spPr>
-          <a:xfrm xmlns:a="http://schemas.openxmlformats.org/drawingml/2006/main">
-            <a:off x="7589044" y="2400300"/>
-            <a:ext cx="1666875" cy="571500"/>
-          </a:xfrm>
-          <a:prstGeom xmlns:a="http://schemas.openxmlformats.org/drawingml/2006/main" prst="rect">
-            <a:avLst/>
-          </a:prstGeom>
-          <a:noFill xmlns:a="http://schemas.openxmlformats.org/drawingml/2006/main"/>
-          <a:ln xmlns:a="http://schemas.openxmlformats.org/drawingml/2006/main" w="0">
-            <a:noFill/>
-          </a:ln>
-        </p:spPr>
-        <p:txBody>
-          <a:bodyPr xmlns:a="http://schemas.openxmlformats.org/drawingml/2006/main" lIns="0" tIns="0" rIns="0" bIns="0" anchor="t"/>
-          <a:lstStyle xmlns:a="http://schemas.openxmlformats.org/drawingml/2006/main"/>
-          <a:p xmlns:a="http://schemas.openxmlformats.org/drawingml/2006/main">
-            <a:pPr algn="ctr">
-              <a:lnSpc>
-                <a:spcPct val="118000"/>
-              </a:lnSpc>
-              <a:buNone/>
-              <a:defRPr sz="2000" b="0">
-                <a:solidFill>
-                  <a:srgbClr val="A96510"/>
-                </a:solidFill>
-                <a:latin typeface="微软雅黑"/>
-                <a:ea typeface="微软雅黑"/>
-                <a:cs typeface="微软雅黑"/>
-              </a:defRPr>
-            </a:pPr>
-            <a:r>
-              <a:rPr sz="2000" b="0">
-                <a:solidFill>
-                  <a:srgbClr val="A96510"/>
-                </a:solidFill>
-                <a:latin typeface="微软雅黑"/>
-                <a:ea typeface="微软雅黑"/>
-                <a:cs typeface="微软雅黑"/>
-              </a:rPr>
-              <a:t>configs / rubric</a:t>
-            </a:r>
-          </a:p>
-        </p:txBody>
-      </p:sp>
-      <p:sp>
-        <p:nvSpPr>
-          <p:cNvPr id="26" name="chain-line-4">
-            <a:extLst xmlns:a="http://schemas.openxmlformats.org/drawingml/2006/main">
-              <a:ext uri="{FF2B5EF4-FFF2-40B4-BE49-F238E27FC236}">
-                <a16:creationId xmlns:a16="http://schemas.microsoft.com/office/drawing/2014/main" id="{0953EB8A-14FB-4DF0-9E70-A6545054C783}"/>
-              </a:ext>
-            </a:extLst>
-          </p:cNvPr>
-          <p:cNvSpPr>
-            <a:spLocks xmlns:a="http://schemas.openxmlformats.org/drawingml/2006/main" noGrp="1"/>
-          </p:cNvSpPr>
-          <p:nvPr/>
-        </p:nvSpPr>
-        <p:spPr>
-          <a:xfrm xmlns:a="http://schemas.openxmlformats.org/drawingml/2006/main">
-            <a:off x="9915525" y="2247900"/>
-            <a:ext cx="1666875" cy="14288"/>
-          </a:xfrm>
-          <a:prstGeom xmlns:a="http://schemas.openxmlformats.org/drawingml/2006/main" prst="rect">
-            <a:avLst/>
-          </a:prstGeom>
-          <a:solidFill xmlns:a="http://schemas.openxmlformats.org/drawingml/2006/main">
-            <a:srgbClr val="C8161E"/>
-          </a:solidFill>
-          <a:ln xmlns:a="http://schemas.openxmlformats.org/drawingml/2006/main" w="0">
-            <a:noFill/>
-          </a:ln>
-        </p:spPr>
-      </p:sp>
-      <p:sp>
-        <p:nvSpPr>
-          <p:cNvPr id="27" name="chain-4">
-            <a:extLst xmlns:a="http://schemas.openxmlformats.org/drawingml/2006/main">
-              <a:ext uri="{FF2B5EF4-FFF2-40B4-BE49-F238E27FC236}">
-                <a16:creationId xmlns:a16="http://schemas.microsoft.com/office/drawing/2014/main" id="{D7ADF1B2-E9C6-4F86-AB81-2F1E21B86601}"/>
-              </a:ext>
-            </a:extLst>
-          </p:cNvPr>
-          <p:cNvSpPr>
-            <a:spLocks xmlns:a="http://schemas.openxmlformats.org/drawingml/2006/main" noGrp="1"/>
-          </p:cNvSpPr>
-          <p:nvPr/>
-        </p:nvSpPr>
-        <p:spPr>
-          <a:xfrm xmlns:a="http://schemas.openxmlformats.org/drawingml/2006/main">
-            <a:off x="9915525" y="1524000"/>
-            <a:ext cx="1666875" cy="666750"/>
-          </a:xfrm>
-          <a:prstGeom xmlns:a="http://schemas.openxmlformats.org/drawingml/2006/main" prst="rect">
-            <a:avLst/>
-          </a:prstGeom>
-          <a:noFill xmlns:a="http://schemas.openxmlformats.org/drawingml/2006/main"/>
-          <a:ln xmlns:a="http://schemas.openxmlformats.org/drawingml/2006/main" w="0">
-            <a:noFill/>
-          </a:ln>
-        </p:spPr>
-        <p:txBody>
-          <a:bodyPr xmlns:a="http://schemas.openxmlformats.org/drawingml/2006/main" lIns="0" tIns="0" rIns="0" bIns="0" anchor="ctr"/>
-          <a:lstStyle xmlns:a="http://schemas.openxmlformats.org/drawingml/2006/main"/>
-          <a:p xmlns:a="http://schemas.openxmlformats.org/drawingml/2006/main">
-            <a:pPr algn="ctr">
-              <a:lnSpc>
-                <a:spcPct val="118000"/>
-              </a:lnSpc>
-              <a:buNone/>
-              <a:defRPr sz="2200" b="0">
-                <a:solidFill>
-                  <a:srgbClr val="C8161E"/>
-                </a:solidFill>
-                <a:latin typeface="微软雅黑"/>
-                <a:ea typeface="微软雅黑"/>
-                <a:cs typeface="微软雅黑"/>
-              </a:defRPr>
-            </a:pPr>
-            <a:r>
-              <a:rPr sz="2200" b="0">
-                <a:solidFill>
-                  <a:srgbClr val="C8161E"/>
-                </a:solidFill>
-                <a:latin typeface="微软雅黑"/>
-                <a:ea typeface="微软雅黑"/>
-                <a:cs typeface="微软雅黑"/>
-              </a:rPr>
-              <a:t>禁止</a:t>
-            </a:r>
-          </a:p>
-        </p:txBody>
-      </p:sp>
-      <p:sp>
-        <p:nvSpPr>
-          <p:cNvPr id="28" name="chain-sub-4">
-            <a:extLst xmlns:a="http://schemas.openxmlformats.org/drawingml/2006/main">
-              <a:ext uri="{FF2B5EF4-FFF2-40B4-BE49-F238E27FC236}">
-                <a16:creationId xmlns:a16="http://schemas.microsoft.com/office/drawing/2014/main" id="{6A6048C8-EF56-4D7B-B89B-6008BA9C1E83}"/>
-              </a:ext>
-            </a:extLst>
-          </p:cNvPr>
-          <p:cNvSpPr>
-            <a:spLocks xmlns:a="http://schemas.openxmlformats.org/drawingml/2006/main" noGrp="1"/>
-          </p:cNvSpPr>
-          <p:nvPr/>
-        </p:nvSpPr>
-        <p:spPr>
-          <a:xfrm xmlns:a="http://schemas.openxmlformats.org/drawingml/2006/main">
-            <a:off x="9915525" y="2400300"/>
-            <a:ext cx="1666875" cy="571500"/>
-          </a:xfrm>
-          <a:prstGeom xmlns:a="http://schemas.openxmlformats.org/drawingml/2006/main" prst="rect">
-            <a:avLst/>
-          </a:prstGeom>
-          <a:noFill xmlns:a="http://schemas.openxmlformats.org/drawingml/2006/main"/>
-          <a:ln xmlns:a="http://schemas.openxmlformats.org/drawingml/2006/main" w="0">
-            <a:noFill/>
-          </a:ln>
-        </p:spPr>
-        <p:txBody>
-          <a:bodyPr xmlns:a="http://schemas.openxmlformats.org/drawingml/2006/main" lIns="0" tIns="0" rIns="0" bIns="0" anchor="t"/>
-          <a:lstStyle xmlns:a="http://schemas.openxmlformats.org/drawingml/2006/main"/>
-          <a:p xmlns:a="http://schemas.openxmlformats.org/drawingml/2006/main">
-            <a:pPr algn="ctr">
-              <a:lnSpc>
-                <a:spcPct val="118000"/>
-              </a:lnSpc>
-              <a:buNone/>
-              <a:defRPr sz="2000" b="0">
-                <a:solidFill>
-                  <a:srgbClr val="C8161E"/>
-                </a:solidFill>
-                <a:latin typeface="微软雅黑"/>
-                <a:ea typeface="微软雅黑"/>
-                <a:cs typeface="微软雅黑"/>
-              </a:defRPr>
-            </a:pPr>
-            <a:r>
-              <a:rPr sz="2000" b="0">
-                <a:solidFill>
-                  <a:srgbClr val="C8161E"/>
-                </a:solidFill>
-                <a:latin typeface="微软雅黑"/>
-                <a:ea typeface="微软雅黑"/>
-                <a:cs typeface="微软雅黑"/>
-              </a:rPr>
-              <a:t>结果 / notes / 外传</a:t>
-            </a:r>
-          </a:p>
-        </p:txBody>
-      </p:sp>
-      <p:sp>
-        <p:nvSpPr>
-          <p:cNvPr id="29" name="stops">
-            <a:extLst xmlns:a="http://schemas.openxmlformats.org/drawingml/2006/main">
-              <a:ext uri="{FF2B5EF4-FFF2-40B4-BE49-F238E27FC236}">
-                <a16:creationId xmlns:a16="http://schemas.microsoft.com/office/drawing/2014/main" id="{EBC3122E-F0F9-4C1E-B62E-C14CF6583169}"/>
-              </a:ext>
-            </a:extLst>
-          </p:cNvPr>
-          <p:cNvSpPr>
-            <a:spLocks xmlns:a="http://schemas.openxmlformats.org/drawingml/2006/main" noGrp="1"/>
-          </p:cNvSpPr>
-          <p:nvPr/>
-        </p:nvSpPr>
-        <p:spPr>
-          <a:xfrm xmlns:a="http://schemas.openxmlformats.org/drawingml/2006/main">
-            <a:off x="609600" y="3619500"/>
-            <a:ext cx="3810000" cy="361950"/>
+              <a:t>控制：工具层限制与人工审核点。</a:t>
+            </a:r>
+          </a:p>
+        </p:txBody>
+      </p:sp>
+      <p:sp>
+        <p:nvSpPr>
+          <p:cNvPr id="8" name="content-303">
+            <a:extLst xmlns:a="http://schemas.openxmlformats.org/drawingml/2006/main">
+              <a:ext uri="{FF2B5EF4-FFF2-40B4-BE49-F238E27FC236}">
+                <a16:creationId xmlns:a16="http://schemas.microsoft.com/office/drawing/2014/main" id="{6AA8E6E2-4034-4B20-A57A-88D7A92F543C}"/>
+              </a:ext>
+            </a:extLst>
+          </p:cNvPr>
+          <p:cNvSpPr>
+            <a:spLocks xmlns:a="http://schemas.openxmlformats.org/drawingml/2006/main" noGrp="1"/>
+          </p:cNvSpPr>
+          <p:nvPr/>
+        </p:nvSpPr>
+        <p:spPr>
+          <a:xfrm xmlns:a="http://schemas.openxmlformats.org/drawingml/2006/main">
+            <a:off x="609600" y="2950845"/>
+            <a:ext cx="10972800" cy="432435"/>
           </a:xfrm>
           <a:prstGeom xmlns:a="http://schemas.openxmlformats.org/drawingml/2006/main" prst="rect">
             <a:avLst/>
@@ -19292,9 +18417,9 @@
                 <a:spcPct val="118000"/>
               </a:lnSpc>
               <a:buNone/>
-              <a:defRPr sz="2200" b="1">
-                <a:solidFill>
-                  <a:srgbClr val="C8161E"/>
+              <a:defRPr sz="2400" b="0">
+                <a:solidFill>
+                  <a:srgbClr val="27333D"/>
                 </a:solidFill>
                 <a:latin typeface="微软雅黑"/>
                 <a:ea typeface="微软雅黑"/>
@@ -19302,67 +18427,37 @@
               </a:defRPr>
             </a:pPr>
             <a:r>
-              <a:rPr sz="2200" b="1">
-                <a:solidFill>
-                  <a:srgbClr val="C8161E"/>
+              <a:rPr sz="2400" b="0">
+                <a:solidFill>
+                  <a:srgbClr val="27333D"/>
                 </a:solidFill>
                 <a:latin typeface="微软雅黑"/>
                 <a:ea typeface="微软雅黑"/>
                 <a:cs typeface="微软雅黑"/>
               </a:rPr>
-              <a:t>运行中的审核门</a:t>
-            </a:r>
-          </a:p>
-        </p:txBody>
-      </p:sp>
-      <p:sp>
-        <p:nvSpPr>
-          <p:cNvPr id="30" name="chain-line-0">
-            <a:extLst xmlns:a="http://schemas.openxmlformats.org/drawingml/2006/main">
-              <a:ext uri="{FF2B5EF4-FFF2-40B4-BE49-F238E27FC236}">
-                <a16:creationId xmlns:a16="http://schemas.microsoft.com/office/drawing/2014/main" id="{354CE4CC-8179-4F19-96B6-6F404730D73B}"/>
-              </a:ext>
-            </a:extLst>
-          </p:cNvPr>
-          <p:cNvSpPr>
-            <a:spLocks xmlns:a="http://schemas.openxmlformats.org/drawingml/2006/main" noGrp="1"/>
-          </p:cNvSpPr>
-          <p:nvPr/>
-        </p:nvSpPr>
-        <p:spPr>
-          <a:xfrm xmlns:a="http://schemas.openxmlformats.org/drawingml/2006/main">
-            <a:off x="1428750" y="4914900"/>
-            <a:ext cx="2286000" cy="14288"/>
-          </a:xfrm>
-          <a:prstGeom xmlns:a="http://schemas.openxmlformats.org/drawingml/2006/main" prst="rect">
-            <a:avLst/>
-          </a:prstGeom>
-          <a:solidFill xmlns:a="http://schemas.openxmlformats.org/drawingml/2006/main">
-            <a:srgbClr val="1F4D78"/>
-          </a:solidFill>
-          <a:ln xmlns:a="http://schemas.openxmlformats.org/drawingml/2006/main" w="0">
-            <a:noFill/>
-          </a:ln>
-        </p:spPr>
-      </p:sp>
-      <p:sp>
-        <p:nvSpPr>
-          <p:cNvPr id="31" name="chain-0">
-            <a:extLst xmlns:a="http://schemas.openxmlformats.org/drawingml/2006/main">
-              <a:ext uri="{FF2B5EF4-FFF2-40B4-BE49-F238E27FC236}">
-                <a16:creationId xmlns:a16="http://schemas.microsoft.com/office/drawing/2014/main" id="{54129A0D-B7F8-430D-92D9-B9F673241251}"/>
-              </a:ext>
-            </a:extLst>
-          </p:cNvPr>
-          <p:cNvSpPr>
-            <a:spLocks xmlns:a="http://schemas.openxmlformats.org/drawingml/2006/main" noGrp="1"/>
-          </p:cNvSpPr>
-          <p:nvPr/>
-        </p:nvSpPr>
-        <p:spPr>
-          <a:xfrm xmlns:a="http://schemas.openxmlformats.org/drawingml/2006/main">
-            <a:off x="1428750" y="4191000"/>
-            <a:ext cx="2286000" cy="666750"/>
+              <a:t>证据：实际 diff、执行命令、测试与事件记录。</a:t>
+            </a:r>
+          </a:p>
+        </p:txBody>
+      </p:sp>
+      <p:sp>
+        <p:nvSpPr>
+          <p:cNvPr id="9" name="content-304">
+            <a:extLst xmlns:a="http://schemas.openxmlformats.org/drawingml/2006/main">
+              <a:ext uri="{FF2B5EF4-FFF2-40B4-BE49-F238E27FC236}">
+                <a16:creationId xmlns:a16="http://schemas.microsoft.com/office/drawing/2014/main" id="{074F0CCE-34FE-4D98-8970-D19601065CD6}"/>
+              </a:ext>
+            </a:extLst>
+          </p:cNvPr>
+          <p:cNvSpPr>
+            <a:spLocks xmlns:a="http://schemas.openxmlformats.org/drawingml/2006/main" noGrp="1"/>
+          </p:cNvSpPr>
+          <p:nvPr/>
+        </p:nvSpPr>
+        <p:spPr>
+          <a:xfrm xmlns:a="http://schemas.openxmlformats.org/drawingml/2006/main">
+            <a:off x="609600" y="3640455"/>
+            <a:ext cx="10972800" cy="432435"/>
           </a:xfrm>
           <a:prstGeom xmlns:a="http://schemas.openxmlformats.org/drawingml/2006/main" prst="rect">
             <a:avLst/>
@@ -19373,15 +18468,15 @@
           </a:ln>
         </p:spPr>
         <p:txBody>
-          <a:bodyPr xmlns:a="http://schemas.openxmlformats.org/drawingml/2006/main" lIns="0" tIns="0" rIns="0" bIns="0" anchor="ctr"/>
-          <a:lstStyle xmlns:a="http://schemas.openxmlformats.org/drawingml/2006/main"/>
-          <a:p xmlns:a="http://schemas.openxmlformats.org/drawingml/2006/main">
-            <a:pPr algn="ctr">
+          <a:bodyPr xmlns:a="http://schemas.openxmlformats.org/drawingml/2006/main" lIns="0" tIns="0" rIns="0" bIns="0" anchor="t"/>
+          <a:lstStyle xmlns:a="http://schemas.openxmlformats.org/drawingml/2006/main"/>
+          <a:p xmlns:a="http://schemas.openxmlformats.org/drawingml/2006/main">
+            <a:pPr algn="l">
               <a:lnSpc>
                 <a:spcPct val="118000"/>
               </a:lnSpc>
               <a:buNone/>
-              <a:defRPr sz="2200" b="0">
+              <a:defRPr sz="2400" b="0">
                 <a:solidFill>
                   <a:srgbClr val="1F4D78"/>
                 </a:solidFill>
@@ -19391,7 +18486,7 @@
               </a:defRPr>
             </a:pPr>
             <a:r>
-              <a:rPr sz="2200" b="0">
+              <a:rPr sz="2400" b="0">
                 <a:solidFill>
                   <a:srgbClr val="1F4D78"/>
                 </a:solidFill>
@@ -19399,480 +18494,7 @@
                 <a:ea typeface="微软雅黑"/>
                 <a:cs typeface="微软雅黑"/>
               </a:rPr>
-              <a:t>diff 写回前</a:t>
-            </a:r>
-          </a:p>
-        </p:txBody>
-      </p:sp>
-      <p:sp>
-        <p:nvSpPr>
-          <p:cNvPr id="32" name="chain-arrow-0">
-            <a:extLst xmlns:a="http://schemas.openxmlformats.org/drawingml/2006/main">
-              <a:ext uri="{FF2B5EF4-FFF2-40B4-BE49-F238E27FC236}">
-                <a16:creationId xmlns:a16="http://schemas.microsoft.com/office/drawing/2014/main" id="{AD5148DA-B45B-469B-B63B-5FC5171250EE}"/>
-              </a:ext>
-            </a:extLst>
-          </p:cNvPr>
-          <p:cNvSpPr>
-            <a:spLocks xmlns:a="http://schemas.openxmlformats.org/drawingml/2006/main" noGrp="1"/>
-          </p:cNvSpPr>
-          <p:nvPr/>
-        </p:nvSpPr>
-        <p:spPr>
-          <a:xfrm xmlns:a="http://schemas.openxmlformats.org/drawingml/2006/main">
-            <a:off x="3714750" y="4362450"/>
-            <a:ext cx="1000125" cy="323850"/>
-          </a:xfrm>
-          <a:prstGeom xmlns:a="http://schemas.openxmlformats.org/drawingml/2006/main" prst="rect">
-            <a:avLst/>
-          </a:prstGeom>
-          <a:noFill xmlns:a="http://schemas.openxmlformats.org/drawingml/2006/main"/>
-          <a:ln xmlns:a="http://schemas.openxmlformats.org/drawingml/2006/main" w="0">
-            <a:noFill/>
-          </a:ln>
-        </p:spPr>
-        <p:txBody>
-          <a:bodyPr xmlns:a="http://schemas.openxmlformats.org/drawingml/2006/main" lIns="0" tIns="0" rIns="0" bIns="0" anchor="ctr"/>
-          <a:lstStyle xmlns:a="http://schemas.openxmlformats.org/drawingml/2006/main"/>
-          <a:p xmlns:a="http://schemas.openxmlformats.org/drawingml/2006/main">
-            <a:pPr algn="ctr">
-              <a:lnSpc>
-                <a:spcPct val="118000"/>
-              </a:lnSpc>
-              <a:buNone/>
-              <a:defRPr sz="2400" b="0">
-                <a:solidFill>
-                  <a:srgbClr val="1F4D78"/>
-                </a:solidFill>
-                <a:latin typeface="微软雅黑"/>
-                <a:ea typeface="微软雅黑"/>
-                <a:cs typeface="微软雅黑"/>
-              </a:defRPr>
-            </a:pPr>
-            <a:r>
-              <a:rPr sz="2400" b="0">
-                <a:solidFill>
-                  <a:srgbClr val="1F4D78"/>
-                </a:solidFill>
-                <a:latin typeface="微软雅黑"/>
-                <a:ea typeface="微软雅黑"/>
-                <a:cs typeface="微软雅黑"/>
-              </a:rPr>
-              <a:t>→</a:t>
-            </a:r>
-          </a:p>
-        </p:txBody>
-      </p:sp>
-      <p:sp>
-        <p:nvSpPr>
-          <p:cNvPr id="33" name="chain-sub-0">
-            <a:extLst xmlns:a="http://schemas.openxmlformats.org/drawingml/2006/main">
-              <a:ext uri="{FF2B5EF4-FFF2-40B4-BE49-F238E27FC236}">
-                <a16:creationId xmlns:a16="http://schemas.microsoft.com/office/drawing/2014/main" id="{624D37A7-FA67-41CE-8FBA-6E2E9706E6D8}"/>
-              </a:ext>
-            </a:extLst>
-          </p:cNvPr>
-          <p:cNvSpPr>
-            <a:spLocks xmlns:a="http://schemas.openxmlformats.org/drawingml/2006/main" noGrp="1"/>
-          </p:cNvSpPr>
-          <p:nvPr/>
-        </p:nvSpPr>
-        <p:spPr>
-          <a:xfrm xmlns:a="http://schemas.openxmlformats.org/drawingml/2006/main">
-            <a:off x="1428750" y="5067300"/>
-            <a:ext cx="2286000" cy="571500"/>
-          </a:xfrm>
-          <a:prstGeom xmlns:a="http://schemas.openxmlformats.org/drawingml/2006/main" prst="rect">
-            <a:avLst/>
-          </a:prstGeom>
-          <a:noFill xmlns:a="http://schemas.openxmlformats.org/drawingml/2006/main"/>
-          <a:ln xmlns:a="http://schemas.openxmlformats.org/drawingml/2006/main" w="0">
-            <a:noFill/>
-          </a:ln>
-        </p:spPr>
-        <p:txBody>
-          <a:bodyPr xmlns:a="http://schemas.openxmlformats.org/drawingml/2006/main" lIns="0" tIns="0" rIns="0" bIns="0" anchor="t"/>
-          <a:lstStyle xmlns:a="http://schemas.openxmlformats.org/drawingml/2006/main"/>
-          <a:p xmlns:a="http://schemas.openxmlformats.org/drawingml/2006/main">
-            <a:pPr algn="ctr">
-              <a:lnSpc>
-                <a:spcPct val="118000"/>
-              </a:lnSpc>
-              <a:buNone/>
-              <a:defRPr sz="2000" b="0">
-                <a:solidFill>
-                  <a:srgbClr val="66727D"/>
-                </a:solidFill>
-                <a:latin typeface="微软雅黑"/>
-                <a:ea typeface="微软雅黑"/>
-                <a:cs typeface="微软雅黑"/>
-              </a:defRPr>
-            </a:pPr>
-            <a:r>
-              <a:rPr sz="2000" b="0">
-                <a:solidFill>
-                  <a:srgbClr val="66727D"/>
-                </a:solidFill>
-                <a:latin typeface="微软雅黑"/>
-                <a:ea typeface="微软雅黑"/>
-                <a:cs typeface="微软雅黑"/>
-              </a:rPr>
-              <a:t>核验范围</a:t>
-            </a:r>
-          </a:p>
-        </p:txBody>
-      </p:sp>
-      <p:sp>
-        <p:nvSpPr>
-          <p:cNvPr id="34" name="chain-line-1">
-            <a:extLst xmlns:a="http://schemas.openxmlformats.org/drawingml/2006/main">
-              <a:ext uri="{FF2B5EF4-FFF2-40B4-BE49-F238E27FC236}">
-                <a16:creationId xmlns:a16="http://schemas.microsoft.com/office/drawing/2014/main" id="{0E61AD10-3FDA-4F1F-B908-2A7600534D76}"/>
-              </a:ext>
-            </a:extLst>
-          </p:cNvPr>
-          <p:cNvSpPr>
-            <a:spLocks xmlns:a="http://schemas.openxmlformats.org/drawingml/2006/main" noGrp="1"/>
-          </p:cNvSpPr>
-          <p:nvPr/>
-        </p:nvSpPr>
-        <p:spPr>
-          <a:xfrm xmlns:a="http://schemas.openxmlformats.org/drawingml/2006/main">
-            <a:off x="4714875" y="4914900"/>
-            <a:ext cx="2286000" cy="14288"/>
-          </a:xfrm>
-          <a:prstGeom xmlns:a="http://schemas.openxmlformats.org/drawingml/2006/main" prst="rect">
-            <a:avLst/>
-          </a:prstGeom>
-          <a:solidFill xmlns:a="http://schemas.openxmlformats.org/drawingml/2006/main">
-            <a:srgbClr val="1F4D78"/>
-          </a:solidFill>
-          <a:ln xmlns:a="http://schemas.openxmlformats.org/drawingml/2006/main" w="0">
-            <a:noFill/>
-          </a:ln>
-        </p:spPr>
-      </p:sp>
-      <p:sp>
-        <p:nvSpPr>
-          <p:cNvPr id="35" name="chain-1">
-            <a:extLst xmlns:a="http://schemas.openxmlformats.org/drawingml/2006/main">
-              <a:ext uri="{FF2B5EF4-FFF2-40B4-BE49-F238E27FC236}">
-                <a16:creationId xmlns:a16="http://schemas.microsoft.com/office/drawing/2014/main" id="{F7201ACA-C9EF-4594-8CD1-CB414AA8CA3C}"/>
-              </a:ext>
-            </a:extLst>
-          </p:cNvPr>
-          <p:cNvSpPr>
-            <a:spLocks xmlns:a="http://schemas.openxmlformats.org/drawingml/2006/main" noGrp="1"/>
-          </p:cNvSpPr>
-          <p:nvPr/>
-        </p:nvSpPr>
-        <p:spPr>
-          <a:xfrm xmlns:a="http://schemas.openxmlformats.org/drawingml/2006/main">
-            <a:off x="4714875" y="4191000"/>
-            <a:ext cx="2286000" cy="666750"/>
-          </a:xfrm>
-          <a:prstGeom xmlns:a="http://schemas.openxmlformats.org/drawingml/2006/main" prst="rect">
-            <a:avLst/>
-          </a:prstGeom>
-          <a:noFill xmlns:a="http://schemas.openxmlformats.org/drawingml/2006/main"/>
-          <a:ln xmlns:a="http://schemas.openxmlformats.org/drawingml/2006/main" w="0">
-            <a:noFill/>
-          </a:ln>
-        </p:spPr>
-        <p:txBody>
-          <a:bodyPr xmlns:a="http://schemas.openxmlformats.org/drawingml/2006/main" lIns="0" tIns="0" rIns="0" bIns="0" anchor="ctr"/>
-          <a:lstStyle xmlns:a="http://schemas.openxmlformats.org/drawingml/2006/main"/>
-          <a:p xmlns:a="http://schemas.openxmlformats.org/drawingml/2006/main">
-            <a:pPr algn="ctr">
-              <a:lnSpc>
-                <a:spcPct val="118000"/>
-              </a:lnSpc>
-              <a:buNone/>
-              <a:defRPr sz="2200" b="0">
-                <a:solidFill>
-                  <a:srgbClr val="1F4D78"/>
-                </a:solidFill>
-                <a:latin typeface="微软雅黑"/>
-                <a:ea typeface="微软雅黑"/>
-                <a:cs typeface="微软雅黑"/>
-              </a:defRPr>
-            </a:pPr>
-            <a:r>
-              <a:rPr sz="2200" b="0">
-                <a:solidFill>
-                  <a:srgbClr val="1F4D78"/>
-                </a:solidFill>
-                <a:latin typeface="微软雅黑"/>
-                <a:ea typeface="微软雅黑"/>
-                <a:cs typeface="微软雅黑"/>
-              </a:rPr>
-              <a:t>测试失败时</a:t>
-            </a:r>
-          </a:p>
-        </p:txBody>
-      </p:sp>
-      <p:sp>
-        <p:nvSpPr>
-          <p:cNvPr id="36" name="chain-arrow-1">
-            <a:extLst xmlns:a="http://schemas.openxmlformats.org/drawingml/2006/main">
-              <a:ext uri="{FF2B5EF4-FFF2-40B4-BE49-F238E27FC236}">
-                <a16:creationId xmlns:a16="http://schemas.microsoft.com/office/drawing/2014/main" id="{A56E51CA-8617-4AC7-963C-B2ED775F0087}"/>
-              </a:ext>
-            </a:extLst>
-          </p:cNvPr>
-          <p:cNvSpPr>
-            <a:spLocks xmlns:a="http://schemas.openxmlformats.org/drawingml/2006/main" noGrp="1"/>
-          </p:cNvSpPr>
-          <p:nvPr/>
-        </p:nvSpPr>
-        <p:spPr>
-          <a:xfrm xmlns:a="http://schemas.openxmlformats.org/drawingml/2006/main">
-            <a:off x="7000875" y="4362450"/>
-            <a:ext cx="1000125" cy="323850"/>
-          </a:xfrm>
-          <a:prstGeom xmlns:a="http://schemas.openxmlformats.org/drawingml/2006/main" prst="rect">
-            <a:avLst/>
-          </a:prstGeom>
-          <a:noFill xmlns:a="http://schemas.openxmlformats.org/drawingml/2006/main"/>
-          <a:ln xmlns:a="http://schemas.openxmlformats.org/drawingml/2006/main" w="0">
-            <a:noFill/>
-          </a:ln>
-        </p:spPr>
-        <p:txBody>
-          <a:bodyPr xmlns:a="http://schemas.openxmlformats.org/drawingml/2006/main" lIns="0" tIns="0" rIns="0" bIns="0" anchor="ctr"/>
-          <a:lstStyle xmlns:a="http://schemas.openxmlformats.org/drawingml/2006/main"/>
-          <a:p xmlns:a="http://schemas.openxmlformats.org/drawingml/2006/main">
-            <a:pPr algn="ctr">
-              <a:lnSpc>
-                <a:spcPct val="118000"/>
-              </a:lnSpc>
-              <a:buNone/>
-              <a:defRPr sz="2400" b="0">
-                <a:solidFill>
-                  <a:srgbClr val="1F4D78"/>
-                </a:solidFill>
-                <a:latin typeface="微软雅黑"/>
-                <a:ea typeface="微软雅黑"/>
-                <a:cs typeface="微软雅黑"/>
-              </a:defRPr>
-            </a:pPr>
-            <a:r>
-              <a:rPr sz="2400" b="0">
-                <a:solidFill>
-                  <a:srgbClr val="1F4D78"/>
-                </a:solidFill>
-                <a:latin typeface="微软雅黑"/>
-                <a:ea typeface="微软雅黑"/>
-                <a:cs typeface="微软雅黑"/>
-              </a:rPr>
-              <a:t>→</a:t>
-            </a:r>
-          </a:p>
-        </p:txBody>
-      </p:sp>
-      <p:sp>
-        <p:nvSpPr>
-          <p:cNvPr id="37" name="chain-sub-1">
-            <a:extLst xmlns:a="http://schemas.openxmlformats.org/drawingml/2006/main">
-              <a:ext uri="{FF2B5EF4-FFF2-40B4-BE49-F238E27FC236}">
-                <a16:creationId xmlns:a16="http://schemas.microsoft.com/office/drawing/2014/main" id="{BE737633-2F23-4CBB-B648-FCE703EC6F1A}"/>
-              </a:ext>
-            </a:extLst>
-          </p:cNvPr>
-          <p:cNvSpPr>
-            <a:spLocks xmlns:a="http://schemas.openxmlformats.org/drawingml/2006/main" noGrp="1"/>
-          </p:cNvSpPr>
-          <p:nvPr/>
-        </p:nvSpPr>
-        <p:spPr>
-          <a:xfrm xmlns:a="http://schemas.openxmlformats.org/drawingml/2006/main">
-            <a:off x="4714875" y="5067300"/>
-            <a:ext cx="2286000" cy="571500"/>
-          </a:xfrm>
-          <a:prstGeom xmlns:a="http://schemas.openxmlformats.org/drawingml/2006/main" prst="rect">
-            <a:avLst/>
-          </a:prstGeom>
-          <a:noFill xmlns:a="http://schemas.openxmlformats.org/drawingml/2006/main"/>
-          <a:ln xmlns:a="http://schemas.openxmlformats.org/drawingml/2006/main" w="0">
-            <a:noFill/>
-          </a:ln>
-        </p:spPr>
-        <p:txBody>
-          <a:bodyPr xmlns:a="http://schemas.openxmlformats.org/drawingml/2006/main" lIns="0" tIns="0" rIns="0" bIns="0" anchor="t"/>
-          <a:lstStyle xmlns:a="http://schemas.openxmlformats.org/drawingml/2006/main"/>
-          <a:p xmlns:a="http://schemas.openxmlformats.org/drawingml/2006/main">
-            <a:pPr algn="ctr">
-              <a:lnSpc>
-                <a:spcPct val="118000"/>
-              </a:lnSpc>
-              <a:buNone/>
-              <a:defRPr sz="2000" b="0">
-                <a:solidFill>
-                  <a:srgbClr val="66727D"/>
-                </a:solidFill>
-                <a:latin typeface="微软雅黑"/>
-                <a:ea typeface="微软雅黑"/>
-                <a:cs typeface="微软雅黑"/>
-              </a:defRPr>
-            </a:pPr>
-            <a:r>
-              <a:rPr sz="2000" b="0">
-                <a:solidFill>
-                  <a:srgbClr val="66727D"/>
-                </a:solidFill>
-                <a:latin typeface="微软雅黑"/>
-                <a:ea typeface="微软雅黑"/>
-                <a:cs typeface="微软雅黑"/>
-              </a:rPr>
-              <a:t>停并记录</a:t>
-            </a:r>
-          </a:p>
-        </p:txBody>
-      </p:sp>
-      <p:sp>
-        <p:nvSpPr>
-          <p:cNvPr id="38" name="chain-line-2">
-            <a:extLst xmlns:a="http://schemas.openxmlformats.org/drawingml/2006/main">
-              <a:ext uri="{FF2B5EF4-FFF2-40B4-BE49-F238E27FC236}">
-                <a16:creationId xmlns:a16="http://schemas.microsoft.com/office/drawing/2014/main" id="{F525DFA5-E06C-4755-817D-0698B8778B4E}"/>
-              </a:ext>
-            </a:extLst>
-          </p:cNvPr>
-          <p:cNvSpPr>
-            <a:spLocks xmlns:a="http://schemas.openxmlformats.org/drawingml/2006/main" noGrp="1"/>
-          </p:cNvSpPr>
-          <p:nvPr/>
-        </p:nvSpPr>
-        <p:spPr>
-          <a:xfrm xmlns:a="http://schemas.openxmlformats.org/drawingml/2006/main">
-            <a:off x="8001000" y="4914900"/>
-            <a:ext cx="2286000" cy="14288"/>
-          </a:xfrm>
-          <a:prstGeom xmlns:a="http://schemas.openxmlformats.org/drawingml/2006/main" prst="rect">
-            <a:avLst/>
-          </a:prstGeom>
-          <a:solidFill xmlns:a="http://schemas.openxmlformats.org/drawingml/2006/main">
-            <a:srgbClr val="C8161E"/>
-          </a:solidFill>
-          <a:ln xmlns:a="http://schemas.openxmlformats.org/drawingml/2006/main" w="0">
-            <a:noFill/>
-          </a:ln>
-        </p:spPr>
-      </p:sp>
-      <p:sp>
-        <p:nvSpPr>
-          <p:cNvPr id="39" name="chain-2">
-            <a:extLst xmlns:a="http://schemas.openxmlformats.org/drawingml/2006/main">
-              <a:ext uri="{FF2B5EF4-FFF2-40B4-BE49-F238E27FC236}">
-                <a16:creationId xmlns:a16="http://schemas.microsoft.com/office/drawing/2014/main" id="{F09CC51F-F9E3-4CDF-A533-3784AD8696BF}"/>
-              </a:ext>
-            </a:extLst>
-          </p:cNvPr>
-          <p:cNvSpPr>
-            <a:spLocks xmlns:a="http://schemas.openxmlformats.org/drawingml/2006/main" noGrp="1"/>
-          </p:cNvSpPr>
-          <p:nvPr/>
-        </p:nvSpPr>
-        <p:spPr>
-          <a:xfrm xmlns:a="http://schemas.openxmlformats.org/drawingml/2006/main">
-            <a:off x="8001000" y="4191000"/>
-            <a:ext cx="2286000" cy="666750"/>
-          </a:xfrm>
-          <a:prstGeom xmlns:a="http://schemas.openxmlformats.org/drawingml/2006/main" prst="rect">
-            <a:avLst/>
-          </a:prstGeom>
-          <a:noFill xmlns:a="http://schemas.openxmlformats.org/drawingml/2006/main"/>
-          <a:ln xmlns:a="http://schemas.openxmlformats.org/drawingml/2006/main" w="0">
-            <a:noFill/>
-          </a:ln>
-        </p:spPr>
-        <p:txBody>
-          <a:bodyPr xmlns:a="http://schemas.openxmlformats.org/drawingml/2006/main" lIns="0" tIns="0" rIns="0" bIns="0" anchor="ctr"/>
-          <a:lstStyle xmlns:a="http://schemas.openxmlformats.org/drawingml/2006/main"/>
-          <a:p xmlns:a="http://schemas.openxmlformats.org/drawingml/2006/main">
-            <a:pPr algn="ctr">
-              <a:lnSpc>
-                <a:spcPct val="118000"/>
-              </a:lnSpc>
-              <a:buNone/>
-              <a:defRPr sz="2200" b="0">
-                <a:solidFill>
-                  <a:srgbClr val="C8161E"/>
-                </a:solidFill>
-                <a:latin typeface="微软雅黑"/>
-                <a:ea typeface="微软雅黑"/>
-                <a:cs typeface="微软雅黑"/>
-              </a:defRPr>
-            </a:pPr>
-            <a:r>
-              <a:rPr sz="2200" b="0">
-                <a:solidFill>
-                  <a:srgbClr val="C8161E"/>
-                </a:solidFill>
-                <a:latin typeface="微软雅黑"/>
-                <a:ea typeface="微软雅黑"/>
-                <a:cs typeface="微软雅黑"/>
-              </a:rPr>
-              <a:t>评价协议改动时</a:t>
-            </a:r>
-          </a:p>
-        </p:txBody>
-      </p:sp>
-      <p:sp>
-        <p:nvSpPr>
-          <p:cNvPr id="40" name="chain-sub-2">
-            <a:extLst xmlns:a="http://schemas.openxmlformats.org/drawingml/2006/main">
-              <a:ext uri="{FF2B5EF4-FFF2-40B4-BE49-F238E27FC236}">
-                <a16:creationId xmlns:a16="http://schemas.microsoft.com/office/drawing/2014/main" id="{1F556B82-3C5D-4ADE-8741-32DE42EB5A16}"/>
-              </a:ext>
-            </a:extLst>
-          </p:cNvPr>
-          <p:cNvSpPr>
-            <a:spLocks xmlns:a="http://schemas.openxmlformats.org/drawingml/2006/main" noGrp="1"/>
-          </p:cNvSpPr>
-          <p:nvPr/>
-        </p:nvSpPr>
-        <p:spPr>
-          <a:xfrm xmlns:a="http://schemas.openxmlformats.org/drawingml/2006/main">
-            <a:off x="8001000" y="5067300"/>
-            <a:ext cx="2286000" cy="571500"/>
-          </a:xfrm>
-          <a:prstGeom xmlns:a="http://schemas.openxmlformats.org/drawingml/2006/main" prst="rect">
-            <a:avLst/>
-          </a:prstGeom>
-          <a:noFill xmlns:a="http://schemas.openxmlformats.org/drawingml/2006/main"/>
-          <a:ln xmlns:a="http://schemas.openxmlformats.org/drawingml/2006/main" w="0">
-            <a:noFill/>
-          </a:ln>
-        </p:spPr>
-        <p:txBody>
-          <a:bodyPr xmlns:a="http://schemas.openxmlformats.org/drawingml/2006/main" lIns="0" tIns="0" rIns="0" bIns="0" anchor="t"/>
-          <a:lstStyle xmlns:a="http://schemas.openxmlformats.org/drawingml/2006/main"/>
-          <a:p xmlns:a="http://schemas.openxmlformats.org/drawingml/2006/main">
-            <a:pPr algn="ctr">
-              <a:lnSpc>
-                <a:spcPct val="118000"/>
-              </a:lnSpc>
-              <a:buNone/>
-              <a:defRPr sz="2000" b="0">
-                <a:solidFill>
-                  <a:srgbClr val="66727D"/>
-                </a:solidFill>
-                <a:latin typeface="微软雅黑"/>
-                <a:ea typeface="微软雅黑"/>
-                <a:cs typeface="微软雅黑"/>
-              </a:defRPr>
-            </a:pPr>
-            <a:r>
-              <a:rPr sz="2000" b="0">
-                <a:solidFill>
-                  <a:srgbClr val="66727D"/>
-                </a:solidFill>
-                <a:latin typeface="微软雅黑"/>
-                <a:ea typeface="微软雅黑"/>
-                <a:cs typeface="微软雅黑"/>
-              </a:rPr>
-              <a:t>必须人工确认</a:t>
+              <a:t>写进 AGENTS.md，不等于自动获得隔离。</a:t>
             </a:r>
           </a:p>
         </p:txBody>
@@ -20006,14 +18628,14 @@
       </p:sp>
       <p:pic>
         <p:nvPicPr>
-          <p:cNvPr id="30" name=""/>
+          <p:cNvPr id="31" name=""/>
           <p:cNvPicPr>
             <a:picLocks xmlns:a="http://schemas.openxmlformats.org/drawingml/2006/main" noChangeAspect="1"/>
           </p:cNvPicPr>
           <p:nvPr/>
         </p:nvPicPr>
         <p:blipFill>
-          <a:blip xmlns:r="http://schemas.openxmlformats.org/officeDocument/2006/relationships" xmlns:a="http://schemas.openxmlformats.org/drawingml/2006/main" r:embed="Re5b9a44ed9d64c38"/>
+          <a:blip xmlns:r="http://schemas.openxmlformats.org/officeDocument/2006/relationships" xmlns:a="http://schemas.openxmlformats.org/drawingml/2006/main" r:embed="Rd797935cf4184437"/>
           <a:stretch xmlns:a="http://schemas.openxmlformats.org/drawingml/2006/main"/>
         </p:blipFill>
         <p:spPr>
@@ -21160,14 +19782,14 @@
       </p:sp>
       <p:pic>
         <p:nvPicPr>
-          <p:cNvPr id="28" name=""/>
+          <p:cNvPr id="29" name=""/>
           <p:cNvPicPr>
             <a:picLocks xmlns:a="http://schemas.openxmlformats.org/drawingml/2006/main" noChangeAspect="1"/>
           </p:cNvPicPr>
           <p:nvPr/>
         </p:nvPicPr>
         <p:blipFill>
-          <a:blip xmlns:r="http://schemas.openxmlformats.org/officeDocument/2006/relationships" xmlns:a="http://schemas.openxmlformats.org/drawingml/2006/main" r:embed="Rfc135dfe52434991"/>
+          <a:blip xmlns:r="http://schemas.openxmlformats.org/officeDocument/2006/relationships" xmlns:a="http://schemas.openxmlformats.org/drawingml/2006/main" r:embed="R31a7d849a9e44f87"/>
           <a:stretch xmlns:a="http://schemas.openxmlformats.org/drawingml/2006/main"/>
         </p:blipFill>
         <p:spPr>
@@ -22254,14 +20876,14 @@
       </p:sp>
       <p:pic>
         <p:nvPicPr>
-          <p:cNvPr id="35" name=""/>
+          <p:cNvPr id="36" name=""/>
           <p:cNvPicPr>
             <a:picLocks xmlns:a="http://schemas.openxmlformats.org/drawingml/2006/main" noChangeAspect="1"/>
           </p:cNvPicPr>
           <p:nvPr/>
         </p:nvPicPr>
         <p:blipFill>
-          <a:blip xmlns:r="http://schemas.openxmlformats.org/officeDocument/2006/relationships" xmlns:a="http://schemas.openxmlformats.org/drawingml/2006/main" r:embed="R5404c8c7f7b94da1"/>
+          <a:blip xmlns:r="http://schemas.openxmlformats.org/officeDocument/2006/relationships" xmlns:a="http://schemas.openxmlformats.org/drawingml/2006/main" r:embed="Redd478adba1d43c5"/>
           <a:stretch xmlns:a="http://schemas.openxmlformats.org/drawingml/2006/main"/>
         </p:blipFill>
         <p:spPr>

--- a/lessons/lesson-10/slides.pptx
+++ b/lessons/lesson-10/slides.pptx
@@ -414,7 +414,12 @@
           </a:p>
           <a:p xmlns:a="http://schemas.openxmlformats.org/drawingml/2006/main">
             <a:r>
-              <a:t>讲义位置：本课讲义；见逐页母稿映射表</a:t>
+              <a:t>讲述与校准：</a:t>
+            </a:r>
+          </a:p>
+          <a:p xmlns:a="http://schemas.openxmlformats.org/drawingml/2006/main">
+            <a:r>
+              <a:t>开场放下模糊 prompt。第 9 课判断门已过，项目进入阶段七原型验证。本课回答：Agent 帮忙改代码、跑测试、归因错误时，研究者在哪里审核、用什么权限、留什么记录，才能让"Agent 帮忙"不等于"Agent 替代判断"或"Agent 污染实验"。</a:t>
             </a:r>
           </a:p>
           <a:p xmlns:a="http://schemas.openxmlformats.org/drawingml/2006/main">
@@ -424,22 +429,12 @@
           </a:p>
           <a:p xmlns:a="http://schemas.openxmlformats.org/drawingml/2006/main">
             <a:r>
-              <a:t>屏显核对：</a:t>
-            </a:r>
-          </a:p>
-          <a:p xmlns:a="http://schemas.openxmlformats.org/drawingml/2006/main">
-            <a:r>
-              <a:t>```text</a:t>
-            </a:r>
-          </a:p>
-          <a:p xmlns:a="http://schemas.openxmlformats.org/drawingml/2006/main">
-            <a:r>
-              <a:t>第10讲 AI 辅助编码、调试与受限 Agent 执行</a:t>
-            </a:r>
-          </a:p>
-          <a:p xmlns:a="http://schemas.openxmlformats.org/drawingml/2006/main">
-            <a:r>
-              <a:t>```</a:t>
+              <a:t>学生动作：</a:t>
+            </a:r>
+          </a:p>
+          <a:p xmlns:a="http://schemas.openxmlformats.org/drawingml/2006/main">
+            <a:r>
+              <a:t>不展开课程行政信息，直接进入下一页回扣。</a:t>
             </a:r>
           </a:p>
           <a:p xmlns:a="http://schemas.openxmlformats.org/drawingml/2006/main">
@@ -449,12 +444,7 @@
           </a:p>
           <a:p xmlns:a="http://schemas.openxmlformats.org/drawingml/2006/main">
             <a:r>
-              <a:t>教师讲述：</a:t>
-            </a:r>
-          </a:p>
-          <a:p xmlns:a="http://schemas.openxmlformats.org/drawingml/2006/main">
-            <a:r>
-              <a:t>开场放下模糊 prompt。第 9 课判断门已过，项目进入阶段七原型验证。本课回答：Agent 帮忙改代码、跑测试、归因错误时，研究者在哪里审核、用什么权限、留什么记录，才能让"Agent 帮忙"不等于"Agent 替代判断"或"Agent 污染实验"。</a:t>
+              <a:t>课堂安排：按本稿下方 90 分钟教学路由安排；此页不另占独立时段。</a:t>
             </a:r>
           </a:p>
           <a:p xmlns:a="http://schemas.openxmlformats.org/drawingml/2006/main">
@@ -464,12 +454,12 @@
           </a:p>
           <a:p xmlns:a="http://schemas.openxmlformats.org/drawingml/2006/main">
             <a:r>
-              <a:t>学生动作：</a:t>
-            </a:r>
-          </a:p>
-          <a:p xmlns:a="http://schemas.openxmlformats.org/drawingml/2006/main">
-            <a:r>
-              <a:t>不展开课程行政信息，直接进入下一页回扣。</a:t>
+              <a:t>[Sources]</a:t>
+            </a:r>
+          </a:p>
+          <a:p xmlns:a="http://schemas.openxmlformats.org/drawingml/2006/main">
+            <a:r>
+              <a:t>课程定位以 [syllabus.md](../../course/syllabus.md) 与 [备课规划.md](../备课规划.md) 第 10 课段为准。</a:t>
             </a:r>
           </a:p>
           <a:p xmlns:a="http://schemas.openxmlformats.org/drawingml/2006/main">
@@ -479,57 +469,7 @@
           </a:p>
           <a:p xmlns:a="http://schemas.openxmlformats.org/drawingml/2006/main">
             <a:r>
-              <a:t>来源与边界：</a:t>
-            </a:r>
-          </a:p>
-          <a:p xmlns:a="http://schemas.openxmlformats.org/drawingml/2006/main">
-            <a:r>
-              <a:t>课程定位以 [syllabus.md](../../course/syllabus.md) 与 [备课规划.md](../备课规划.md) 第 10 课段为准。</a:t>
-            </a:r>
-          </a:p>
-          <a:p xmlns:a="http://schemas.openxmlformats.org/drawingml/2006/main">
-            <a:r>
-              <a:t/>
-            </a:r>
-          </a:p>
-          <a:p xmlns:a="http://schemas.openxmlformats.org/drawingml/2006/main">
-            <a:r>
-              <a:t>---</a:t>
-            </a:r>
-          </a:p>
-          <a:p xmlns:a="http://schemas.openxmlformats.org/drawingml/2006/main">
-            <a:r>
-              <a:t/>
-            </a:r>
-          </a:p>
-          <a:p xmlns:a="http://schemas.openxmlformats.org/drawingml/2006/main">
-            <a:r>
-              <a:t>[Sources]</a:t>
-            </a:r>
-          </a:p>
-          <a:p xmlns:a="http://schemas.openxmlformats.org/drawingml/2006/main">
-            <a:r>
-              <a:t/>
-            </a:r>
-          </a:p>
-          <a:p xmlns:a="http://schemas.openxmlformats.org/drawingml/2006/main">
-            <a:r>
-              <a:t>- 本课 handout.md 与 slides.md</a:t>
-            </a:r>
-          </a:p>
-          <a:p xmlns:a="http://schemas.openxmlformats.org/drawingml/2006/main">
-            <a:r>
-              <a:t/>
-            </a:r>
-          </a:p>
-          <a:p xmlns:a="http://schemas.openxmlformats.org/drawingml/2006/main">
-            <a:r>
-              <a:t>- ../../course/reading-card-case.md</a:t>
-            </a:r>
-          </a:p>
-          <a:p xmlns:a="http://schemas.openxmlformats.org/drawingml/2006/main">
-            <a:r>
-              <a:t/>
+              <a:t>本课 handout.md、judgment-task.md；../../course/judgment-path.md。</a:t>
             </a:r>
           </a:p>
           <a:p xmlns:a="http://schemas.openxmlformats.org/drawingml/2006/main">
@@ -614,7 +554,12 @@
           </a:p>
           <a:p xmlns:a="http://schemas.openxmlformats.org/drawingml/2006/main">
             <a:r>
-              <a:t>讲义位置：本课讲义；见逐页母稿映射表</a:t>
+              <a:t>讲述与校准：</a:t>
+            </a:r>
+          </a:p>
+          <a:p xmlns:a="http://schemas.openxmlformats.org/drawingml/2006/main">
+            <a:r>
+              <a:t>SWE-bench 把"解决"定义为"测试通过"而非"代码看起来合理"，本课沿用这一判定。课程项目往往没有 SWE-bench 级别的测试集，因此研究者必须额外人工核验。测试通过不等于方法正确、不等于未引入数据泄漏、不等于未污染评价协议。SWE-bench 只分析任务构造与测试判定。</a:t>
             </a:r>
           </a:p>
           <a:p xmlns:a="http://schemas.openxmlformats.org/drawingml/2006/main">
@@ -624,17 +569,12 @@
           </a:p>
           <a:p xmlns:a="http://schemas.openxmlformats.org/drawingml/2006/main">
             <a:r>
-              <a:t>屏显核对：</a:t>
-            </a:r>
-          </a:p>
-          <a:p xmlns:a="http://schemas.openxmlformats.org/drawingml/2006/main">
-            <a:r>
-              <a:t>```text</a:t>
-            </a:r>
-          </a:p>
-          <a:p xmlns:a="http://schemas.openxmlformats.org/drawingml/2006/main">
-            <a:r>
-              <a:t>SWE-bench 的测试判定仍不充分</a:t>
+              <a:t>学生动作：</a:t>
+            </a:r>
+          </a:p>
+          <a:p xmlns:a="http://schemas.openxmlformats.org/drawingml/2006/main">
+            <a:r>
+              <a:t>无。</a:t>
             </a:r>
           </a:p>
           <a:p xmlns:a="http://schemas.openxmlformats.org/drawingml/2006/main">
@@ -644,82 +584,7 @@
           </a:p>
           <a:p xmlns:a="http://schemas.openxmlformats.org/drawingml/2006/main">
             <a:r>
-              <a:t>真实 issue</a:t>
-            </a:r>
-          </a:p>
-          <a:p xmlns:a="http://schemas.openxmlformats.org/drawingml/2006/main">
-            <a:r>
-              <a:t>→</a:t>
-            </a:r>
-          </a:p>
-          <a:p xmlns:a="http://schemas.openxmlformats.org/drawingml/2006/main">
-            <a:r>
-              <a:t>问题身份</a:t>
-            </a:r>
-          </a:p>
-          <a:p xmlns:a="http://schemas.openxmlformats.org/drawingml/2006/main">
-            <a:r>
-              <a:t>仓库快照</a:t>
-            </a:r>
-          </a:p>
-          <a:p xmlns:a="http://schemas.openxmlformats.org/drawingml/2006/main">
-            <a:r>
-              <a:t>→</a:t>
-            </a:r>
-          </a:p>
-          <a:p xmlns:a="http://schemas.openxmlformats.org/drawingml/2006/main">
-            <a:r>
-              <a:t>固定输入</a:t>
-            </a:r>
-          </a:p>
-          <a:p xmlns:a="http://schemas.openxmlformats.org/drawingml/2006/main">
-            <a:r>
-              <a:t>候选 patch</a:t>
-            </a:r>
-          </a:p>
-          <a:p xmlns:a="http://schemas.openxmlformats.org/drawingml/2006/main">
-            <a:r>
-              <a:t>→</a:t>
-            </a:r>
-          </a:p>
-          <a:p xmlns:a="http://schemas.openxmlformats.org/drawingml/2006/main">
-            <a:r>
-              <a:t>Agent 输出</a:t>
-            </a:r>
-          </a:p>
-          <a:p xmlns:a="http://schemas.openxmlformats.org/drawingml/2006/main">
-            <a:r>
-              <a:t>指定 tests</a:t>
-            </a:r>
-          </a:p>
-          <a:p xmlns:a="http://schemas.openxmlformats.org/drawingml/2006/main">
-            <a:r>
-              <a:t>→</a:t>
-            </a:r>
-          </a:p>
-          <a:p xmlns:a="http://schemas.openxmlformats.org/drawingml/2006/main">
-            <a:r>
-              <a:t>是否解决</a:t>
-            </a:r>
-          </a:p>
-          <a:p xmlns:a="http://schemas.openxmlformats.org/drawingml/2006/main">
-            <a:r>
-              <a:t>人工核验</a:t>
-            </a:r>
-          </a:p>
-          <a:p xmlns:a="http://schemas.openxmlformats.org/drawingml/2006/main">
-            <a:r>
-              <a:t>课程项目额外需要</a:t>
-            </a:r>
-          </a:p>
-          <a:p xmlns:a="http://schemas.openxmlformats.org/drawingml/2006/main">
-            <a:r>
-              <a:t>测试通过 ≠ 方法正确 ≠ 未泄漏数据 ≠ 未污染评价协议</a:t>
-            </a:r>
-          </a:p>
-          <a:p xmlns:a="http://schemas.openxmlformats.org/drawingml/2006/main">
-            <a:r>
-              <a:t>```</a:t>
+              <a:t>课堂安排：按本稿下方 90 分钟教学路由安排；此页不另占独立时段。</a:t>
             </a:r>
           </a:p>
           <a:p xmlns:a="http://schemas.openxmlformats.org/drawingml/2006/main">
@@ -729,7 +594,12 @@
           </a:p>
           <a:p xmlns:a="http://schemas.openxmlformats.org/drawingml/2006/main">
             <a:r>
-              <a:t>屏显来源页脚：来源：Jimenez et al., 2024（SWE-bench）；课程评价边界详见 speaker notes。</a:t>
+              <a:t>[Sources]</a:t>
+            </a:r>
+          </a:p>
+          <a:p xmlns:a="http://schemas.openxmlformats.org/drawingml/2006/main">
+            <a:r>
+              <a:t>直接来源：[正式来源](https://www.swebench.com/original.html)。</a:t>
             </a:r>
           </a:p>
           <a:p xmlns:a="http://schemas.openxmlformats.org/drawingml/2006/main">
@@ -739,12 +609,7 @@
           </a:p>
           <a:p xmlns:a="http://schemas.openxmlformats.org/drawingml/2006/main">
             <a:r>
-              <a:t>教师讲述：</a:t>
-            </a:r>
-          </a:p>
-          <a:p xmlns:a="http://schemas.openxmlformats.org/drawingml/2006/main">
-            <a:r>
-              <a:t>SWE-bench 把"解决"定义为"测试通过"而非"代码看起来合理"，本课沿用这一判定。课程项目往往没有 SWE-bench 级别的测试集，因此研究者必须额外人工核验。测试通过不等于方法正确、不等于未引入数据泄漏、不等于未污染评价协议。SWE-bench 只分析任务构造与测试判定。</a:t>
+              <a:t>讲义 §四·4；Jimenez et al. SWE-bench ICLR 2024（[reading-list.md](../../course/reading-list.md) 第 10 课）。</a:t>
             </a:r>
           </a:p>
           <a:p xmlns:a="http://schemas.openxmlformats.org/drawingml/2006/main">
@@ -754,92 +619,7 @@
           </a:p>
           <a:p xmlns:a="http://schemas.openxmlformats.org/drawingml/2006/main">
             <a:r>
-              <a:t>学生动作：</a:t>
-            </a:r>
-          </a:p>
-          <a:p xmlns:a="http://schemas.openxmlformats.org/drawingml/2006/main">
-            <a:r>
-              <a:t>无。</a:t>
-            </a:r>
-          </a:p>
-          <a:p xmlns:a="http://schemas.openxmlformats.org/drawingml/2006/main">
-            <a:r>
-              <a:t/>
-            </a:r>
-          </a:p>
-          <a:p xmlns:a="http://schemas.openxmlformats.org/drawingml/2006/main">
-            <a:r>
-              <a:t>来源与边界：</a:t>
-            </a:r>
-          </a:p>
-          <a:p xmlns:a="http://schemas.openxmlformats.org/drawingml/2006/main">
-            <a:r>
-              <a:t>直接来源：[正式来源](https://www.swebench.com/original.html)。</a:t>
-            </a:r>
-          </a:p>
-          <a:p xmlns:a="http://schemas.openxmlformats.org/drawingml/2006/main">
-            <a:r>
-              <a:t/>
-            </a:r>
-          </a:p>
-          <a:p xmlns:a="http://schemas.openxmlformats.org/drawingml/2006/main">
-            <a:r>
-              <a:t>讲义 §四·4；Jimenez et al. SWE-bench ICLR 2024（[reading-list.md](../../course/reading-list.md) 第 10 课）。</a:t>
-            </a:r>
-          </a:p>
-          <a:p xmlns:a="http://schemas.openxmlformats.org/drawingml/2006/main">
-            <a:r>
-              <a:t/>
-            </a:r>
-          </a:p>
-          <a:p xmlns:a="http://schemas.openxmlformats.org/drawingml/2006/main">
-            <a:r>
-              <a:t>---</a:t>
-            </a:r>
-          </a:p>
-          <a:p xmlns:a="http://schemas.openxmlformats.org/drawingml/2006/main">
-            <a:r>
-              <a:t/>
-            </a:r>
-          </a:p>
-          <a:p xmlns:a="http://schemas.openxmlformats.org/drawingml/2006/main">
-            <a:r>
-              <a:t>[Sources]</a:t>
-            </a:r>
-          </a:p>
-          <a:p xmlns:a="http://schemas.openxmlformats.org/drawingml/2006/main">
-            <a:r>
-              <a:t/>
-            </a:r>
-          </a:p>
-          <a:p xmlns:a="http://schemas.openxmlformats.org/drawingml/2006/main">
-            <a:r>
-              <a:t>- https://www.swebench.com/original.html</a:t>
-            </a:r>
-          </a:p>
-          <a:p xmlns:a="http://schemas.openxmlformats.org/drawingml/2006/main">
-            <a:r>
-              <a:t/>
-            </a:r>
-          </a:p>
-          <a:p xmlns:a="http://schemas.openxmlformats.org/drawingml/2006/main">
-            <a:r>
-              <a:t>- 本课 handout.md 与 slides.md</a:t>
-            </a:r>
-          </a:p>
-          <a:p xmlns:a="http://schemas.openxmlformats.org/drawingml/2006/main">
-            <a:r>
-              <a:t/>
-            </a:r>
-          </a:p>
-          <a:p xmlns:a="http://schemas.openxmlformats.org/drawingml/2006/main">
-            <a:r>
-              <a:t>- ../../course/reading-card-case.md</a:t>
-            </a:r>
-          </a:p>
-          <a:p xmlns:a="http://schemas.openxmlformats.org/drawingml/2006/main">
-            <a:r>
-              <a:t/>
+              <a:t>本课 handout.md、judgment-task.md；../../course/judgment-path.md。</a:t>
             </a:r>
           </a:p>
           <a:p xmlns:a="http://schemas.openxmlformats.org/drawingml/2006/main">
@@ -924,7 +704,12 @@
           </a:p>
           <a:p xmlns:a="http://schemas.openxmlformats.org/drawingml/2006/main">
             <a:r>
-              <a:t>讲义位置：handout.md §五、贯穿案例：把判断门实验规格的一步改写为受限 Agent 任务</a:t>
+              <a:t>讲述与校准：</a:t>
+            </a:r>
+          </a:p>
+          <a:p xmlns:a="http://schemas.openxmlformats.org/drawingml/2006/main">
+            <a:r>
+              <a:t>把本课小函数接到后续输入规范化的概念位置，不声称它已集成进另一份实际脚本。贯穿数据包单独提供完整可运行入口。</a:t>
             </a:r>
           </a:p>
           <a:p xmlns:a="http://schemas.openxmlformats.org/drawingml/2006/main">
@@ -934,22 +719,12 @@
           </a:p>
           <a:p xmlns:a="http://schemas.openxmlformats.org/drawingml/2006/main">
             <a:r>
-              <a:t>屏显核对：</a:t>
-            </a:r>
-          </a:p>
-          <a:p xmlns:a="http://schemas.openxmlformats.org/drawingml/2006/main">
-            <a:r>
-              <a:t>normalize_record 测试：数据结构是否按契约处理？</a:t>
-            </a:r>
-          </a:p>
-          <a:p xmlns:a="http://schemas.openxmlformats.org/drawingml/2006/main">
-            <a:r>
-              <a:t>阅读卡标注：输出保留了哪些限定条件？</a:t>
-            </a:r>
-          </a:p>
-          <a:p xmlns:a="http://schemas.openxmlformats.org/drawingml/2006/main">
-            <a:r>
-              <a:t>实验判断：差异对应哪个命题，边界是什么？</a:t>
+              <a:t>学生动作：</a:t>
+            </a:r>
+          </a:p>
+          <a:p xmlns:a="http://schemas.openxmlformats.org/drawingml/2006/main">
+            <a:r>
+              <a:t>说出一个“代码通过测试但研究结论仍不成立”的原因。</a:t>
             </a:r>
           </a:p>
           <a:p xmlns:a="http://schemas.openxmlformats.org/drawingml/2006/main">
@@ -959,7 +734,7 @@
           </a:p>
           <a:p xmlns:a="http://schemas.openxmlformats.org/drawingml/2006/main">
             <a:r>
-              <a:t>测试通过后，仍要检查语义证据。</a:t>
+              <a:t>课堂安排：按本稿下方 90 分钟教学路由安排；此页不另占独立时段。</a:t>
             </a:r>
           </a:p>
           <a:p xmlns:a="http://schemas.openxmlformats.org/drawingml/2006/main">
@@ -969,12 +744,12 @@
           </a:p>
           <a:p xmlns:a="http://schemas.openxmlformats.org/drawingml/2006/main">
             <a:r>
-              <a:t>教师讲述：</a:t>
-            </a:r>
-          </a:p>
-          <a:p xmlns:a="http://schemas.openxmlformats.org/drawingml/2006/main">
-            <a:r>
-              <a:t>把本课小函数接到后续输入规范化的概念位置，不声称它已集成进另一份实际脚本。贯穿数据包单独提供完整可运行入口。</a:t>
+              <a:t>[Sources]</a:t>
+            </a:r>
+          </a:p>
+          <a:p xmlns:a="http://schemas.openxmlformats.org/drawingml/2006/main">
+            <a:r>
+              <a:t>./handout.md；课堂示例与构造数据见 ../../course/reading-card-case.md</a:t>
             </a:r>
           </a:p>
           <a:p xmlns:a="http://schemas.openxmlformats.org/drawingml/2006/main">
@@ -984,62 +759,7 @@
           </a:p>
           <a:p xmlns:a="http://schemas.openxmlformats.org/drawingml/2006/main">
             <a:r>
-              <a:t>学生动作：</a:t>
-            </a:r>
-          </a:p>
-          <a:p xmlns:a="http://schemas.openxmlformats.org/drawingml/2006/main">
-            <a:r>
-              <a:t>说出一个“代码通过测试但研究结论仍不成立”的原因。</a:t>
-            </a:r>
-          </a:p>
-          <a:p xmlns:a="http://schemas.openxmlformats.org/drawingml/2006/main">
-            <a:r>
-              <a:t/>
-            </a:r>
-          </a:p>
-          <a:p xmlns:a="http://schemas.openxmlformats.org/drawingml/2006/main">
-            <a:r>
-              <a:t>来源与边界：</a:t>
-            </a:r>
-          </a:p>
-          <a:p xmlns:a="http://schemas.openxmlformats.org/drawingml/2006/main">
-            <a:r>
-              <a:t>./handout.md；课堂示例与构造数据见 ../../course/reading-card-case.md</a:t>
-            </a:r>
-          </a:p>
-          <a:p xmlns:a="http://schemas.openxmlformats.org/drawingml/2006/main">
-            <a:r>
-              <a:t/>
-            </a:r>
-          </a:p>
-          <a:p xmlns:a="http://schemas.openxmlformats.org/drawingml/2006/main">
-            <a:r>
-              <a:t>[Sources]</a:t>
-            </a:r>
-          </a:p>
-          <a:p xmlns:a="http://schemas.openxmlformats.org/drawingml/2006/main">
-            <a:r>
-              <a:t/>
-            </a:r>
-          </a:p>
-          <a:p xmlns:a="http://schemas.openxmlformats.org/drawingml/2006/main">
-            <a:r>
-              <a:t>- 本课 handout.md 与 slides.md</a:t>
-            </a:r>
-          </a:p>
-          <a:p xmlns:a="http://schemas.openxmlformats.org/drawingml/2006/main">
-            <a:r>
-              <a:t/>
-            </a:r>
-          </a:p>
-          <a:p xmlns:a="http://schemas.openxmlformats.org/drawingml/2006/main">
-            <a:r>
-              <a:t>- ../../course/reading-card-case.md</a:t>
-            </a:r>
-          </a:p>
-          <a:p xmlns:a="http://schemas.openxmlformats.org/drawingml/2006/main">
-            <a:r>
-              <a:t/>
+              <a:t>本课 handout.md、judgment-task.md；../../course/judgment-path.md。</a:t>
             </a:r>
           </a:p>
           <a:p xmlns:a="http://schemas.openxmlformats.org/drawingml/2006/main">
@@ -1124,7 +844,12 @@
           </a:p>
           <a:p xmlns:a="http://schemas.openxmlformats.org/drawingml/2006/main">
             <a:r>
-              <a:t>讲义位置：本课讲义；见逐页母稿映射表</a:t>
+              <a:t>讲述与校准：</a:t>
+            </a:r>
+          </a:p>
+          <a:p xmlns:a="http://schemas.openxmlformats.org/drawingml/2006/main">
+            <a:r>
+              <a:t>直接打开本课资产 `generate.diff`、`test-output.txt`与 `failure-log.md`，而不只讲虚构结果。三者分别对应代码候选、真实运行证据和越权决策。第五步：本课产出回写个人项目，任务契约写入 `agent-tasks/`，失败记录写入 `experiments/*/agent-traces/`，AI 使用记录沿用完整披露字段。</a:t>
             </a:r>
           </a:p>
           <a:p xmlns:a="http://schemas.openxmlformats.org/drawingml/2006/main">
@@ -1134,17 +859,12 @@
           </a:p>
           <a:p xmlns:a="http://schemas.openxmlformats.org/drawingml/2006/main">
             <a:r>
-              <a:t>屏显核对：</a:t>
-            </a:r>
-          </a:p>
-          <a:p xmlns:a="http://schemas.openxmlformats.org/drawingml/2006/main">
-            <a:r>
-              <a:t>```text</a:t>
-            </a:r>
-          </a:p>
-          <a:p xmlns:a="http://schemas.openxmlformats.org/drawingml/2006/main">
-            <a:r>
-              <a:t>diff、测试和失败日志形成一次 trace</a:t>
+              <a:t>学生动作：</a:t>
+            </a:r>
+          </a:p>
+          <a:p xmlns:a="http://schemas.openxmlformats.org/drawingml/2006/main">
+            <a:r>
+              <a:t>让学生尝试为自己的任务写一条失败记录。</a:t>
             </a:r>
           </a:p>
           <a:p xmlns:a="http://schemas.openxmlformats.org/drawingml/2006/main">
@@ -1154,97 +874,7 @@
           </a:p>
           <a:p xmlns:a="http://schemas.openxmlformats.org/drawingml/2006/main">
             <a:r>
-              <a:t>generate.diff</a:t>
-            </a:r>
-          </a:p>
-          <a:p xmlns:a="http://schemas.openxmlformats.org/drawingml/2006/main">
-            <a:r>
-              <a:t>+ REQUIRED_FIELDS = ("paper_id", "summary")</a:t>
-            </a:r>
-          </a:p>
-          <a:p xmlns:a="http://schemas.openxmlformats.org/drawingml/2006/main">
-            <a:r>
-              <a:t>  def normalize_record(record):</a:t>
-            </a:r>
-          </a:p>
-          <a:p xmlns:a="http://schemas.openxmlformats.org/drawingml/2006/main">
-            <a:r>
-              <a:t>+     missing = [</a:t>
-            </a:r>
-          </a:p>
-          <a:p xmlns:a="http://schemas.openxmlformats.org/drawingml/2006/main">
-            <a:r>
-              <a:t>+         field for field in REQUIRED_FIELDS</a:t>
-            </a:r>
-          </a:p>
-          <a:p xmlns:a="http://schemas.openxmlformats.org/drawingml/2006/main">
-            <a:r>
-              <a:t>+         if field not in record</a:t>
-            </a:r>
-          </a:p>
-          <a:p xmlns:a="http://schemas.openxmlformats.org/drawingml/2006/main">
-            <a:r>
-              <a:t>+     ]</a:t>
-            </a:r>
-          </a:p>
-          <a:p xmlns:a="http://schemas.openxmlformats.org/drawingml/2006/main">
-            <a:r>
-              <a:t>+     if missing:</a:t>
-            </a:r>
-          </a:p>
-          <a:p xmlns:a="http://schemas.openxmlformats.org/drawingml/2006/main">
-            <a:r>
-              <a:t>+         raise ValueError(</a:t>
-            </a:r>
-          </a:p>
-          <a:p xmlns:a="http://schemas.openxmlformats.org/drawingml/2006/main">
-            <a:r>
-              <a:t>+             "missing required fields"</a:t>
-            </a:r>
-          </a:p>
-          <a:p xmlns:a="http://schemas.openxmlformats.org/drawingml/2006/main">
-            <a:r>
-              <a:t>+         )</a:t>
-            </a:r>
-          </a:p>
-          <a:p xmlns:a="http://schemas.openxmlformats.org/drawingml/2006/main">
-            <a:r>
-              <a:t>test-output.txt</a:t>
-            </a:r>
-          </a:p>
-          <a:p xmlns:a="http://schemas.openxmlformats.org/drawingml/2006/main">
-            <a:r>
-              <a:t>Ran 2 tests in 0.000s</a:t>
-            </a:r>
-          </a:p>
-          <a:p xmlns:a="http://schemas.openxmlformats.org/drawingml/2006/main">
-            <a:r>
-              <a:t>OK</a:t>
-            </a:r>
-          </a:p>
-          <a:p xmlns:a="http://schemas.openxmlformats.org/drawingml/2006/main">
-            <a:r>
-              <a:t>failure-log.md</a:t>
-            </a:r>
-          </a:p>
-          <a:p xmlns:a="http://schemas.openxmlformats.org/drawingml/2006/main">
-            <a:r>
-              <a:t>越权请求：修改 tests</a:t>
-            </a:r>
-          </a:p>
-          <a:p xmlns:a="http://schemas.openxmlformats.org/drawingml/2006/main">
-            <a:r>
-              <a:t>决定：拒绝</a:t>
-            </a:r>
-          </a:p>
-          <a:p xmlns:a="http://schemas.openxmlformats.org/drawingml/2006/main">
-            <a:r>
-              <a:t>原测试保持不变</a:t>
-            </a:r>
-          </a:p>
-          <a:p xmlns:a="http://schemas.openxmlformats.org/drawingml/2006/main">
-            <a:r>
-              <a:t>```</a:t>
+              <a:t>课堂安排：按本稿下方 90 分钟教学路由安排；此页不另占独立时段。</a:t>
             </a:r>
           </a:p>
           <a:p xmlns:a="http://schemas.openxmlformats.org/drawingml/2006/main">
@@ -1254,7 +884,12 @@
           </a:p>
           <a:p xmlns:a="http://schemas.openxmlformats.org/drawingml/2006/main">
             <a:r>
-              <a:t>屏显来源页脚：来源：lesson-10/slides.md；课程工件与讲义见 speaker notes。</a:t>
+              <a:t>[Sources]</a:t>
+            </a:r>
+          </a:p>
+          <a:p xmlns:a="http://schemas.openxmlformats.org/drawingml/2006/main">
+            <a:r>
+              <a:t>直接来源：[本课工件](assets/agent-task-example/generate.diff)；[本课工件](assets/agent-task-example/test-output.txt)；[本课工件](assets/agent-task-example/failure-log.md)。</a:t>
             </a:r>
           </a:p>
           <a:p xmlns:a="http://schemas.openxmlformats.org/drawingml/2006/main">
@@ -1264,12 +899,7 @@
           </a:p>
           <a:p xmlns:a="http://schemas.openxmlformats.org/drawingml/2006/main">
             <a:r>
-              <a:t>教师讲述：</a:t>
-            </a:r>
-          </a:p>
-          <a:p xmlns:a="http://schemas.openxmlformats.org/drawingml/2006/main">
-            <a:r>
-              <a:t>直接打开本课资产 `generate.diff`、`test-output.txt`与 `failure-log.md`，而不只讲虚构结果。三者分别对应代码候选、真实运行证据和越权决策。第五步：本课产出回写个人项目，任务契约写入 `agent-tasks/`，失败记录写入 `experiments/*/agent-traces/`，AI 使用记录沿用完整披露字段。</a:t>
+              <a:t>讲义 §五 第三步、第四步与第五步；[project-template.md](../../course/project-template.md) §6.1 任务契约；本课 `assets/agent-task-example/` 中的任务契约、真实 diff、测试输出与失败日志。</a:t>
             </a:r>
           </a:p>
           <a:p xmlns:a="http://schemas.openxmlformats.org/drawingml/2006/main">
@@ -1279,82 +909,7 @@
           </a:p>
           <a:p xmlns:a="http://schemas.openxmlformats.org/drawingml/2006/main">
             <a:r>
-              <a:t>学生动作：</a:t>
-            </a:r>
-          </a:p>
-          <a:p xmlns:a="http://schemas.openxmlformats.org/drawingml/2006/main">
-            <a:r>
-              <a:t>让学生尝试为自己的任务写一条失败记录。</a:t>
-            </a:r>
-          </a:p>
-          <a:p xmlns:a="http://schemas.openxmlformats.org/drawingml/2006/main">
-            <a:r>
-              <a:t/>
-            </a:r>
-          </a:p>
-          <a:p xmlns:a="http://schemas.openxmlformats.org/drawingml/2006/main">
-            <a:r>
-              <a:t>来源与边界：</a:t>
-            </a:r>
-          </a:p>
-          <a:p xmlns:a="http://schemas.openxmlformats.org/drawingml/2006/main">
-            <a:r>
-              <a:t>直接来源：[本课工件](assets/agent-task-example/generate.diff)；[本课工件](assets/agent-task-example/test-output.txt)；[本课工件](assets/agent-task-example/failure-log.md)。</a:t>
-            </a:r>
-          </a:p>
-          <a:p xmlns:a="http://schemas.openxmlformats.org/drawingml/2006/main">
-            <a:r>
-              <a:t/>
-            </a:r>
-          </a:p>
-          <a:p xmlns:a="http://schemas.openxmlformats.org/drawingml/2006/main">
-            <a:r>
-              <a:t>讲义 §五 第三步、第四步与第五步；[project-template.md](../../course/project-template.md) §6.1 任务契约；本课 `assets/agent-task-example/` 中的任务契约、真实 diff、测试输出与失败日志。</a:t>
-            </a:r>
-          </a:p>
-          <a:p xmlns:a="http://schemas.openxmlformats.org/drawingml/2006/main">
-            <a:r>
-              <a:t/>
-            </a:r>
-          </a:p>
-          <a:p xmlns:a="http://schemas.openxmlformats.org/drawingml/2006/main">
-            <a:r>
-              <a:t>---</a:t>
-            </a:r>
-          </a:p>
-          <a:p xmlns:a="http://schemas.openxmlformats.org/drawingml/2006/main">
-            <a:r>
-              <a:t/>
-            </a:r>
-          </a:p>
-          <a:p xmlns:a="http://schemas.openxmlformats.org/drawingml/2006/main">
-            <a:r>
-              <a:t>[Sources]</a:t>
-            </a:r>
-          </a:p>
-          <a:p xmlns:a="http://schemas.openxmlformats.org/drawingml/2006/main">
-            <a:r>
-              <a:t/>
-            </a:r>
-          </a:p>
-          <a:p xmlns:a="http://schemas.openxmlformats.org/drawingml/2006/main">
-            <a:r>
-              <a:t>- 本课 handout.md 与 slides.md</a:t>
-            </a:r>
-          </a:p>
-          <a:p xmlns:a="http://schemas.openxmlformats.org/drawingml/2006/main">
-            <a:r>
-              <a:t/>
-            </a:r>
-          </a:p>
-          <a:p xmlns:a="http://schemas.openxmlformats.org/drawingml/2006/main">
-            <a:r>
-              <a:t>- ../../course/reading-card-case.md</a:t>
-            </a:r>
-          </a:p>
-          <a:p xmlns:a="http://schemas.openxmlformats.org/drawingml/2006/main">
-            <a:r>
-              <a:t/>
+              <a:t>本课 handout.md、judgment-task.md；../../course/judgment-path.md。</a:t>
             </a:r>
           </a:p>
           <a:p xmlns:a="http://schemas.openxmlformats.org/drawingml/2006/main">
@@ -1429,7 +984,7 @@
           <a:lstStyle xmlns:a="http://schemas.openxmlformats.org/drawingml/2006/main"/>
           <a:p xmlns:a="http://schemas.openxmlformats.org/drawingml/2006/main">
             <a:r>
-              <a:t>页面：P13 把一个 Agent 步骤改写为受限任务</a:t>
+              <a:t>页面：P13 本人项目：决定、核验与回写</a:t>
             </a:r>
           </a:p>
           <a:p xmlns:a="http://schemas.openxmlformats.org/drawingml/2006/main">
@@ -1439,7 +994,12 @@
           </a:p>
           <a:p xmlns:a="http://schemas.openxmlformats.org/drawingml/2006/main">
             <a:r>
-              <a:t>讲义位置：本课讲义；见逐页母稿映射表</a:t>
+              <a:t>讲述与校准：</a:t>
+            </a:r>
+          </a:p>
+          <a:p xmlns:a="http://schemas.openxmlformats.org/drawingml/2006/main">
+            <a:r>
+              <a:t>第一段作决定并查证据；中点处理共性卡点；第二段实际回写并验证。A 是已公开示例中的局部修复，满足旧缺字段契约而不满足本题完整契约；C 为适当方向，但具体实现需验证。B 吞异常可能降低分母。好测试需正常记录通过、坏输入明确拒绝且记录失败原因；全拒绝实现不能达标。不能为了新补丁修改旧评价口径。</a:t>
             </a:r>
           </a:p>
           <a:p xmlns:a="http://schemas.openxmlformats.org/drawingml/2006/main">
@@ -1449,17 +1009,12 @@
           </a:p>
           <a:p xmlns:a="http://schemas.openxmlformats.org/drawingml/2006/main">
             <a:r>
-              <a:t>屏显核对：</a:t>
-            </a:r>
-          </a:p>
-          <a:p xmlns:a="http://schemas.openxmlformats.org/drawingml/2006/main">
-            <a:r>
-              <a:t>```text</a:t>
-            </a:r>
-          </a:p>
-          <a:p xmlns:a="http://schemas.openxmlformats.org/drawingml/2006/main">
-            <a:r>
-              <a:t>把一个 Agent 步骤改写为受限任务</a:t>
+              <a:t>学生动作：</a:t>
+            </a:r>
+          </a:p>
+          <a:p xmlns:a="http://schemas.openxmlformats.org/drawingml/2006/main">
+            <a:r>
+              <a:t>从现有 normalize_record 示例或本人同规模动作出发，先冻结正常/缺字段/空值/类型用例，再实际修改一个模块。与 baseline 在相同输入上比较，保留旧失败和新结果。</a:t>
             </a:r>
           </a:p>
           <a:p xmlns:a="http://schemas.openxmlformats.org/drawingml/2006/main">
@@ -1469,62 +1024,7 @@
           </a:p>
           <a:p xmlns:a="http://schemas.openxmlformats.org/drawingml/2006/main">
             <a:r>
-              <a:t>1</a:t>
-            </a:r>
-          </a:p>
-          <a:p xmlns:a="http://schemas.openxmlformats.org/drawingml/2006/main">
-            <a:r>
-              <a:t>选定一个“拟用 Agent”步骤</a:t>
-            </a:r>
-          </a:p>
-          <a:p xmlns:a="http://schemas.openxmlformats.org/drawingml/2006/main">
-            <a:r>
-              <a:t>2</a:t>
-            </a:r>
-          </a:p>
-          <a:p xmlns:a="http://schemas.openxmlformats.org/drawingml/2006/main">
-            <a:r>
-              <a:t>写五字段任务契约</a:t>
-            </a:r>
-          </a:p>
-          <a:p xmlns:a="http://schemas.openxmlformats.org/drawingml/2006/main">
-            <a:r>
-              <a:t>3</a:t>
-            </a:r>
-          </a:p>
-          <a:p xmlns:a="http://schemas.openxmlformats.org/drawingml/2006/main">
-            <a:r>
-              <a:t>审查真实或预置 diff</a:t>
-            </a:r>
-          </a:p>
-          <a:p xmlns:a="http://schemas.openxmlformats.org/drawingml/2006/main">
-            <a:r>
-              <a:t>4</a:t>
-            </a:r>
-          </a:p>
-          <a:p xmlns:a="http://schemas.openxmlformats.org/drawingml/2006/main">
-            <a:r>
-              <a:t>记录验证证据与失败决定</a:t>
-            </a:r>
-          </a:p>
-          <a:p xmlns:a="http://schemas.openxmlformats.org/drawingml/2006/main">
-            <a:r>
-              <a:t>输入路径</a:t>
-            </a:r>
-          </a:p>
-          <a:p xmlns:a="http://schemas.openxmlformats.org/drawingml/2006/main">
-            <a:r>
-              <a:t>本人真实项目</a:t>
-            </a:r>
-          </a:p>
-          <a:p xmlns:a="http://schemas.openxmlformats.org/drawingml/2006/main">
-            <a:r>
-              <a:t>或</a:t>
-            </a:r>
-          </a:p>
-          <a:p xmlns:a="http://schemas.openxmlformats.org/drawingml/2006/main">
-            <a:r>
-              <a:t>课次预置工件</a:t>
+              <a:t>课堂安排：按本稿下方 90 分钟教学路由安排；此页不另占独立时段。</a:t>
             </a:r>
           </a:p>
           <a:p xmlns:a="http://schemas.openxmlformats.org/drawingml/2006/main">
@@ -1534,12 +1034,12 @@
           </a:p>
           <a:p xmlns:a="http://schemas.openxmlformats.org/drawingml/2006/main">
             <a:r>
-              <a:t>完成后回写个人项目</a:t>
-            </a:r>
-          </a:p>
-          <a:p xmlns:a="http://schemas.openxmlformats.org/drawingml/2006/main">
-            <a:r>
-              <a:t>```</a:t>
+              <a:t>[Sources]</a:t>
+            </a:r>
+          </a:p>
+          <a:p xmlns:a="http://schemas.openxmlformats.org/drawingml/2006/main">
+            <a:r>
+              <a:t>[project-template.md](../../course/project-template.md) 字段模板；第 9 课实验规格。</a:t>
             </a:r>
           </a:p>
           <a:p xmlns:a="http://schemas.openxmlformats.org/drawingml/2006/main">
@@ -1549,97 +1049,7 @@
           </a:p>
           <a:p xmlns:a="http://schemas.openxmlformats.org/drawingml/2006/main">
             <a:r>
-              <a:t>屏显来源页脚：来源：lesson-10/slides.md；课程工件与讲义见 speaker notes。</a:t>
-            </a:r>
-          </a:p>
-          <a:p xmlns:a="http://schemas.openxmlformats.org/drawingml/2006/main">
-            <a:r>
-              <a:t/>
-            </a:r>
-          </a:p>
-          <a:p xmlns:a="http://schemas.openxmlformats.org/drawingml/2006/main">
-            <a:r>
-              <a:t>教师讲述：</a:t>
-            </a:r>
-          </a:p>
-          <a:p xmlns:a="http://schemas.openxmlformats.org/drawingml/2006/main">
-            <a:r>
-              <a:t>验收不再要求所有学生当场运行 Agent。环境就绪者审查自己的真实 diff 与测试输出；备用路径直接使用本课预置工件。两条路径都必须产出：任务契约、权限边界、diff 审查、一条验证证据、一条失败/越权决策与 AI 披露记录开头。</a:t>
-            </a:r>
-          </a:p>
-          <a:p xmlns:a="http://schemas.openxmlformats.org/drawingml/2006/main">
-            <a:r>
-              <a:t/>
-            </a:r>
-          </a:p>
-          <a:p xmlns:a="http://schemas.openxmlformats.org/drawingml/2006/main">
-            <a:r>
-              <a:t>学生动作：</a:t>
-            </a:r>
-          </a:p>
-          <a:p xmlns:a="http://schemas.openxmlformats.org/drawingml/2006/main">
-            <a:r>
-              <a:t>本页用于第一段个人实践。教师巡视只记录共性卡点，不逐台代为修正。</a:t>
-            </a:r>
-          </a:p>
-          <a:p xmlns:a="http://schemas.openxmlformats.org/drawingml/2006/main">
-            <a:r>
-              <a:t/>
-            </a:r>
-          </a:p>
-          <a:p xmlns:a="http://schemas.openxmlformats.org/drawingml/2006/main">
-            <a:r>
-              <a:t>来源与边界：</a:t>
-            </a:r>
-          </a:p>
-          <a:p xmlns:a="http://schemas.openxmlformats.org/drawingml/2006/main">
-            <a:r>
-              <a:t>[project-template.md](../../course/project-template.md) 字段模板；第 9 课实验规格。</a:t>
-            </a:r>
-          </a:p>
-          <a:p xmlns:a="http://schemas.openxmlformats.org/drawingml/2006/main">
-            <a:r>
-              <a:t/>
-            </a:r>
-          </a:p>
-          <a:p xmlns:a="http://schemas.openxmlformats.org/drawingml/2006/main">
-            <a:r>
-              <a:t>---</a:t>
-            </a:r>
-          </a:p>
-          <a:p xmlns:a="http://schemas.openxmlformats.org/drawingml/2006/main">
-            <a:r>
-              <a:t/>
-            </a:r>
-          </a:p>
-          <a:p xmlns:a="http://schemas.openxmlformats.org/drawingml/2006/main">
-            <a:r>
-              <a:t>[Sources]</a:t>
-            </a:r>
-          </a:p>
-          <a:p xmlns:a="http://schemas.openxmlformats.org/drawingml/2006/main">
-            <a:r>
-              <a:t/>
-            </a:r>
-          </a:p>
-          <a:p xmlns:a="http://schemas.openxmlformats.org/drawingml/2006/main">
-            <a:r>
-              <a:t>- 本课 handout.md 与 slides.md</a:t>
-            </a:r>
-          </a:p>
-          <a:p xmlns:a="http://schemas.openxmlformats.org/drawingml/2006/main">
-            <a:r>
-              <a:t/>
-            </a:r>
-          </a:p>
-          <a:p xmlns:a="http://schemas.openxmlformats.org/drawingml/2006/main">
-            <a:r>
-              <a:t>- ../../course/reading-card-case.md</a:t>
-            </a:r>
-          </a:p>
-          <a:p xmlns:a="http://schemas.openxmlformats.org/drawingml/2006/main">
-            <a:r>
-              <a:t/>
+              <a:t>本课 handout.md、judgment-task.md；../../course/judgment-path.md。教学构造仅用于方法判断；本人结果以实际记录为准。</a:t>
             </a:r>
           </a:p>
           <a:p xmlns:a="http://schemas.openxmlformats.org/drawingml/2006/main">
@@ -1724,7 +1134,12 @@
           </a:p>
           <a:p xmlns:a="http://schemas.openxmlformats.org/drawingml/2006/main">
             <a:r>
-              <a:t>讲义位置：本课讲义；见逐页母稿映射表</a:t>
+              <a:t>讲述与校准：</a:t>
+            </a:r>
+          </a:p>
+          <a:p xmlns:a="http://schemas.openxmlformats.org/drawingml/2006/main">
+            <a:r>
+              <a:t>模板投屏停留。学生可照抄文件结构。本课产出任务契约、代码 diff、验证记录与失败记录，回写个人项目。Agent 执行可在课后用合规环境补做，但任务契约与失败记录必须在课堂内启动。</a:t>
             </a:r>
           </a:p>
           <a:p xmlns:a="http://schemas.openxmlformats.org/drawingml/2006/main">
@@ -1734,17 +1149,12 @@
           </a:p>
           <a:p xmlns:a="http://schemas.openxmlformats.org/drawingml/2006/main">
             <a:r>
-              <a:t>屏显核对：</a:t>
-            </a:r>
-          </a:p>
-          <a:p xmlns:a="http://schemas.openxmlformats.org/drawingml/2006/main">
-            <a:r>
-              <a:t>```text</a:t>
-            </a:r>
-          </a:p>
-          <a:p xmlns:a="http://schemas.openxmlformats.org/drawingml/2006/main">
-            <a:r>
-              <a:t>文件落点与 diff 审查</a:t>
+              <a:t>学生动作：</a:t>
+            </a:r>
+          </a:p>
+          <a:p xmlns:a="http://schemas.openxmlformats.org/drawingml/2006/main">
+            <a:r>
+              <a:t>教师先点评权限过宽、验收不可测、评价代码未隔离三类共性问题；学生再继续第二段个人实践。</a:t>
             </a:r>
           </a:p>
           <a:p xmlns:a="http://schemas.openxmlformats.org/drawingml/2006/main">
@@ -1754,82 +1164,7 @@
           </a:p>
           <a:p xmlns:a="http://schemas.openxmlformats.org/drawingml/2006/main">
             <a:r>
-              <a:t>project/</a:t>
-            </a:r>
-          </a:p>
-          <a:p xmlns:a="http://schemas.openxmlformats.org/drawingml/2006/main">
-            <a:r>
-              <a:t>agent-tasks/task-01.md</a:t>
-            </a:r>
-          </a:p>
-          <a:p xmlns:a="http://schemas.openxmlformats.org/drawingml/2006/main">
-            <a:r>
-              <a:t>src/generate.py</a:t>
-            </a:r>
-          </a:p>
-          <a:p xmlns:a="http://schemas.openxmlformats.org/drawingml/2006/main">
-            <a:r>
-              <a:t>experiments/exp01/agent-traces/</a:t>
-            </a:r>
-          </a:p>
-          <a:p xmlns:a="http://schemas.openxmlformats.org/drawingml/2006/main">
-            <a:r>
-              <a:t>  generate.diff</a:t>
-            </a:r>
-          </a:p>
-          <a:p xmlns:a="http://schemas.openxmlformats.org/drawingml/2006/main">
-            <a:r>
-              <a:t>  test-output.txt</a:t>
-            </a:r>
-          </a:p>
-          <a:p xmlns:a="http://schemas.openxmlformats.org/drawingml/2006/main">
-            <a:r>
-              <a:t>  failure-log.md</a:t>
-            </a:r>
-          </a:p>
-          <a:p xmlns:a="http://schemas.openxmlformats.org/drawingml/2006/main">
-            <a:r>
-              <a:t>ai-usage-log.md</a:t>
-            </a:r>
-          </a:p>
-          <a:p xmlns:a="http://schemas.openxmlformats.org/drawingml/2006/main">
-            <a:r>
-              <a:t>diff 写回前</a:t>
-            </a:r>
-          </a:p>
-          <a:p xmlns:a="http://schemas.openxmlformats.org/drawingml/2006/main">
-            <a:r>
-              <a:t>□ 只含可写文件</a:t>
-            </a:r>
-          </a:p>
-          <a:p xmlns:a="http://schemas.openxmlformats.org/drawingml/2006/main">
-            <a:r>
-              <a:t>□ 未引入未授权依赖</a:t>
-            </a:r>
-          </a:p>
-          <a:p xmlns:a="http://schemas.openxmlformats.org/drawingml/2006/main">
-            <a:r>
-              <a:t>□ 未修改禁止层</a:t>
-            </a:r>
-          </a:p>
-          <a:p xmlns:a="http://schemas.openxmlformats.org/drawingml/2006/main">
-            <a:r>
-              <a:t>□ 测试先被审查</a:t>
-            </a:r>
-          </a:p>
-          <a:p xmlns:a="http://schemas.openxmlformats.org/drawingml/2006/main">
-            <a:r>
-              <a:t>□ 未越过 Non-goal</a:t>
-            </a:r>
-          </a:p>
-          <a:p xmlns:a="http://schemas.openxmlformats.org/drawingml/2006/main">
-            <a:r>
-              <a:t>□ commit message 只写事实</a:t>
-            </a:r>
-          </a:p>
-          <a:p xmlns:a="http://schemas.openxmlformats.org/drawingml/2006/main">
-            <a:r>
-              <a:t>```</a:t>
+              <a:t>课堂安排：按本稿下方 90 分钟教学路由安排；此页不另占独立时段。</a:t>
             </a:r>
           </a:p>
           <a:p xmlns:a="http://schemas.openxmlformats.org/drawingml/2006/main">
@@ -1839,7 +1174,12 @@
           </a:p>
           <a:p xmlns:a="http://schemas.openxmlformats.org/drawingml/2006/main">
             <a:r>
-              <a:t>屏显来源页脚：来源：lesson-10/slides.md；课程工件与讲义见 speaker notes。</a:t>
+              <a:t>[Sources]</a:t>
+            </a:r>
+          </a:p>
+          <a:p xmlns:a="http://schemas.openxmlformats.org/drawingml/2006/main">
+            <a:r>
+              <a:t>[project-template.md](../../course/project-template.md)；讲义 §五 第五步。</a:t>
             </a:r>
           </a:p>
           <a:p xmlns:a="http://schemas.openxmlformats.org/drawingml/2006/main">
@@ -1849,87 +1189,7 @@
           </a:p>
           <a:p xmlns:a="http://schemas.openxmlformats.org/drawingml/2006/main">
             <a:r>
-              <a:t>教师讲述：</a:t>
-            </a:r>
-          </a:p>
-          <a:p xmlns:a="http://schemas.openxmlformats.org/drawingml/2006/main">
-            <a:r>
-              <a:t>模板投屏停留。学生可照抄文件结构。本课产出任务契约、代码 diff、验证记录与失败记录，回写个人项目。Agent 执行可在课后用合规环境补做，但任务契约与失败记录必须在课堂内启动。</a:t>
-            </a:r>
-          </a:p>
-          <a:p xmlns:a="http://schemas.openxmlformats.org/drawingml/2006/main">
-            <a:r>
-              <a:t/>
-            </a:r>
-          </a:p>
-          <a:p xmlns:a="http://schemas.openxmlformats.org/drawingml/2006/main">
-            <a:r>
-              <a:t>学生动作：</a:t>
-            </a:r>
-          </a:p>
-          <a:p xmlns:a="http://schemas.openxmlformats.org/drawingml/2006/main">
-            <a:r>
-              <a:t>教师先点评权限过宽、验收不可测、评价代码未隔离三类共性问题；学生再继续第二段个人实践。</a:t>
-            </a:r>
-          </a:p>
-          <a:p xmlns:a="http://schemas.openxmlformats.org/drawingml/2006/main">
-            <a:r>
-              <a:t/>
-            </a:r>
-          </a:p>
-          <a:p xmlns:a="http://schemas.openxmlformats.org/drawingml/2006/main">
-            <a:r>
-              <a:t>来源与边界：</a:t>
-            </a:r>
-          </a:p>
-          <a:p xmlns:a="http://schemas.openxmlformats.org/drawingml/2006/main">
-            <a:r>
-              <a:t>[project-template.md](../../course/project-template.md)；讲义 §五 第五步。</a:t>
-            </a:r>
-          </a:p>
-          <a:p xmlns:a="http://schemas.openxmlformats.org/drawingml/2006/main">
-            <a:r>
-              <a:t/>
-            </a:r>
-          </a:p>
-          <a:p xmlns:a="http://schemas.openxmlformats.org/drawingml/2006/main">
-            <a:r>
-              <a:t>---</a:t>
-            </a:r>
-          </a:p>
-          <a:p xmlns:a="http://schemas.openxmlformats.org/drawingml/2006/main">
-            <a:r>
-              <a:t/>
-            </a:r>
-          </a:p>
-          <a:p xmlns:a="http://schemas.openxmlformats.org/drawingml/2006/main">
-            <a:r>
-              <a:t>[Sources]</a:t>
-            </a:r>
-          </a:p>
-          <a:p xmlns:a="http://schemas.openxmlformats.org/drawingml/2006/main">
-            <a:r>
-              <a:t/>
-            </a:r>
-          </a:p>
-          <a:p xmlns:a="http://schemas.openxmlformats.org/drawingml/2006/main">
-            <a:r>
-              <a:t>- 本课 handout.md 与 slides.md</a:t>
-            </a:r>
-          </a:p>
-          <a:p xmlns:a="http://schemas.openxmlformats.org/drawingml/2006/main">
-            <a:r>
-              <a:t/>
-            </a:r>
-          </a:p>
-          <a:p xmlns:a="http://schemas.openxmlformats.org/drawingml/2006/main">
-            <a:r>
-              <a:t>- ../../course/reading-card-case.md</a:t>
-            </a:r>
-          </a:p>
-          <a:p xmlns:a="http://schemas.openxmlformats.org/drawingml/2006/main">
-            <a:r>
-              <a:t/>
+              <a:t>本课 handout.md、judgment-task.md；../../course/judgment-path.md。</a:t>
             </a:r>
           </a:p>
           <a:p xmlns:a="http://schemas.openxmlformats.org/drawingml/2006/main">
@@ -2014,7 +1274,12 @@
           </a:p>
           <a:p xmlns:a="http://schemas.openxmlformats.org/drawingml/2006/main">
             <a:r>
-              <a:t>讲义位置：本课讲义；见逐页母稿映射表</a:t>
+              <a:t>讲述与校准：</a:t>
+            </a:r>
+          </a:p>
+          <a:p xmlns:a="http://schemas.openxmlformats.org/drawingml/2006/main">
+            <a:r>
+              <a:t>作者先说明任务契约与 diff，同伴围绕五字段、修改范围、测试和失败记录提问。优先检查权限边界、人工审核是否真的停住、测试是否判定了目标行为。作者记录采纳、澄清、补证、保留异议或暂缓及真实理由；反馈不要求立即改写，也不形成共同提交。人数为奇数时组成三人组，适当缩短每人的说明。</a:t>
             </a:r>
           </a:p>
           <a:p xmlns:a="http://schemas.openxmlformats.org/drawingml/2006/main">
@@ -2024,17 +1289,12 @@
           </a:p>
           <a:p xmlns:a="http://schemas.openxmlformats.org/drawingml/2006/main">
             <a:r>
-              <a:t>屏显核对：</a:t>
-            </a:r>
-          </a:p>
-          <a:p xmlns:a="http://schemas.openxmlformats.org/drawingml/2006/main">
-            <a:r>
-              <a:t>```text</a:t>
-            </a:r>
-          </a:p>
-          <a:p xmlns:a="http://schemas.openxmlformats.org/drawingml/2006/main">
-            <a:r>
-              <a:t>同伴提问，作者决定</a:t>
+              <a:t>学生动作：</a:t>
+            </a:r>
+          </a:p>
+          <a:p xmlns:a="http://schemas.openxmlformats.org/drawingml/2006/main">
+            <a:r>
+              <a:t>同伴互查。</a:t>
             </a:r>
           </a:p>
           <a:p xmlns:a="http://schemas.openxmlformats.org/drawingml/2006/main">
@@ -2044,57 +1304,7 @@
           </a:p>
           <a:p xmlns:a="http://schemas.openxmlformats.org/drawingml/2006/main">
             <a:r>
-              <a:t>作者的 task-01.md + diff</a:t>
-            </a:r>
-          </a:p>
-          <a:p xmlns:a="http://schemas.openxmlformats.org/drawingml/2006/main">
-            <a:r>
-              <a:t>Context / Permission / Non-goal</a:t>
-            </a:r>
-          </a:p>
-          <a:p xmlns:a="http://schemas.openxmlformats.org/drawingml/2006/main">
-            <a:r>
-              <a:t>人工审核点 / 失败恢复</a:t>
-            </a:r>
-          </a:p>
-          <a:p xmlns:a="http://schemas.openxmlformats.org/drawingml/2006/main">
-            <a:r>
-              <a:t>diff 范围 / 测试 / 失败记录</a:t>
-            </a:r>
-          </a:p>
-          <a:p xmlns:a="http://schemas.openxmlformats.org/drawingml/2006/main">
-            <a:r>
-              <a:t>同伴只问：</a:t>
-            </a:r>
-          </a:p>
-          <a:p xmlns:a="http://schemas.openxmlformats.org/drawingml/2006/main">
-            <a:r>
-              <a:t>边界够窄吗？</a:t>
-            </a:r>
-          </a:p>
-          <a:p xmlns:a="http://schemas.openxmlformats.org/drawingml/2006/main">
-            <a:r>
-              <a:t>测试真的判定目标吗？</a:t>
-            </a:r>
-          </a:p>
-          <a:p xmlns:a="http://schemas.openxmlformats.org/drawingml/2006/main">
-            <a:r>
-              <a:t>作者记录：</a:t>
-            </a:r>
-          </a:p>
-          <a:p xmlns:a="http://schemas.openxmlformats.org/drawingml/2006/main">
-            <a:r>
-              <a:t>采纳 / 澄清 / 补证</a:t>
-            </a:r>
-          </a:p>
-          <a:p xmlns:a="http://schemas.openxmlformats.org/drawingml/2006/main">
-            <a:r>
-              <a:t>保留异议 / 暂缓</a:t>
-            </a:r>
-          </a:p>
-          <a:p xmlns:a="http://schemas.openxmlformats.org/drawingml/2006/main">
-            <a:r>
-              <a:t>```</a:t>
+              <a:t>课堂安排：按本稿下方 90 分钟教学路由安排；此页不另占独立时段。</a:t>
             </a:r>
           </a:p>
           <a:p xmlns:a="http://schemas.openxmlformats.org/drawingml/2006/main">
@@ -2104,7 +1314,12 @@
           </a:p>
           <a:p xmlns:a="http://schemas.openxmlformats.org/drawingml/2006/main">
             <a:r>
-              <a:t>屏显来源页脚：来源：lesson-10/slides.md；课程工件与讲义见 speaker notes。</a:t>
+              <a:t>[Sources]</a:t>
+            </a:r>
+          </a:p>
+          <a:p xmlns:a="http://schemas.openxmlformats.org/drawingml/2006/main">
+            <a:r>
+              <a:t>同伴反馈为形成性活动，不单独计分，不共同提交（[assignments.md](../../course/assignments.md)）。</a:t>
             </a:r>
           </a:p>
           <a:p xmlns:a="http://schemas.openxmlformats.org/drawingml/2006/main">
@@ -2114,87 +1329,7 @@
           </a:p>
           <a:p xmlns:a="http://schemas.openxmlformats.org/drawingml/2006/main">
             <a:r>
-              <a:t>教师讲述：</a:t>
-            </a:r>
-          </a:p>
-          <a:p xmlns:a="http://schemas.openxmlformats.org/drawingml/2006/main">
-            <a:r>
-              <a:t>作者先说明任务契约与 diff，同伴围绕五字段、修改范围、测试和失败记录提问。优先检查权限边界、人工审核是否真的停住、测试是否判定了目标行为。作者记录采纳、澄清、补证、保留异议或暂缓及真实理由；反馈不要求立即改写，也不形成共同提交。人数为奇数时组成三人组，适当缩短每人的说明。</a:t>
-            </a:r>
-          </a:p>
-          <a:p xmlns:a="http://schemas.openxmlformats.org/drawingml/2006/main">
-            <a:r>
-              <a:t/>
-            </a:r>
-          </a:p>
-          <a:p xmlns:a="http://schemas.openxmlformats.org/drawingml/2006/main">
-            <a:r>
-              <a:t>学生动作：</a:t>
-            </a:r>
-          </a:p>
-          <a:p xmlns:a="http://schemas.openxmlformats.org/drawingml/2006/main">
-            <a:r>
-              <a:t>同伴互查。</a:t>
-            </a:r>
-          </a:p>
-          <a:p xmlns:a="http://schemas.openxmlformats.org/drawingml/2006/main">
-            <a:r>
-              <a:t/>
-            </a:r>
-          </a:p>
-          <a:p xmlns:a="http://schemas.openxmlformats.org/drawingml/2006/main">
-            <a:r>
-              <a:t>来源与边界：</a:t>
-            </a:r>
-          </a:p>
-          <a:p xmlns:a="http://schemas.openxmlformats.org/drawingml/2006/main">
-            <a:r>
-              <a:t>同伴反馈为形成性活动，不单独计分，不共同提交（[assignments.md](../../course/assignments.md)）。</a:t>
-            </a:r>
-          </a:p>
-          <a:p xmlns:a="http://schemas.openxmlformats.org/drawingml/2006/main">
-            <a:r>
-              <a:t/>
-            </a:r>
-          </a:p>
-          <a:p xmlns:a="http://schemas.openxmlformats.org/drawingml/2006/main">
-            <a:r>
-              <a:t>---</a:t>
-            </a:r>
-          </a:p>
-          <a:p xmlns:a="http://schemas.openxmlformats.org/drawingml/2006/main">
-            <a:r>
-              <a:t/>
-            </a:r>
-          </a:p>
-          <a:p xmlns:a="http://schemas.openxmlformats.org/drawingml/2006/main">
-            <a:r>
-              <a:t>[Sources]</a:t>
-            </a:r>
-          </a:p>
-          <a:p xmlns:a="http://schemas.openxmlformats.org/drawingml/2006/main">
-            <a:r>
-              <a:t/>
-            </a:r>
-          </a:p>
-          <a:p xmlns:a="http://schemas.openxmlformats.org/drawingml/2006/main">
-            <a:r>
-              <a:t>- 本课 handout.md 与 slides.md</a:t>
-            </a:r>
-          </a:p>
-          <a:p xmlns:a="http://schemas.openxmlformats.org/drawingml/2006/main">
-            <a:r>
-              <a:t/>
-            </a:r>
-          </a:p>
-          <a:p xmlns:a="http://schemas.openxmlformats.org/drawingml/2006/main">
-            <a:r>
-              <a:t>- ../../course/reading-card-case.md</a:t>
-            </a:r>
-          </a:p>
-          <a:p xmlns:a="http://schemas.openxmlformats.org/drawingml/2006/main">
-            <a:r>
-              <a:t/>
+              <a:t>本课 handout.md、judgment-task.md；../../course/judgment-path.md。</a:t>
             </a:r>
           </a:p>
           <a:p xmlns:a="http://schemas.openxmlformats.org/drawingml/2006/main">
@@ -2279,7 +1414,12 @@
           </a:p>
           <a:p xmlns:a="http://schemas.openxmlformats.org/drawingml/2006/main">
             <a:r>
-              <a:t>讲义位置：本课讲义；见逐页母稿映射表</a:t>
+              <a:t>讲述与校准：</a:t>
+            </a:r>
+          </a:p>
+          <a:p xmlns:a="http://schemas.openxmlformats.org/drawingml/2006/main">
+            <a:r>
+              <a:t>回收任务契约、受限执行、diff/验证与失败保留的关系。本页不新增任务，要求学生用边界句检查自己的任务契约和执行记录。</a:t>
             </a:r>
           </a:p>
           <a:p xmlns:a="http://schemas.openxmlformats.org/drawingml/2006/main">
@@ -2289,17 +1429,12 @@
           </a:p>
           <a:p xmlns:a="http://schemas.openxmlformats.org/drawingml/2006/main">
             <a:r>
-              <a:t>屏显核对：</a:t>
-            </a:r>
-          </a:p>
-          <a:p xmlns:a="http://schemas.openxmlformats.org/drawingml/2006/main">
-            <a:r>
-              <a:t>```text</a:t>
-            </a:r>
-          </a:p>
-          <a:p xmlns:a="http://schemas.openxmlformats.org/drawingml/2006/main">
-            <a:r>
-              <a:t>本讲知识点总结</a:t>
+              <a:t>学生动作：</a:t>
+            </a:r>
+          </a:p>
+          <a:p xmlns:a="http://schemas.openxmlformats.org/drawingml/2006/main">
+            <a:r>
+              <a:t>学生快速指出自己当前最薄弱的一张卡。</a:t>
             </a:r>
           </a:p>
           <a:p xmlns:a="http://schemas.openxmlformats.org/drawingml/2006/main">
@@ -2309,62 +1444,7 @@
           </a:p>
           <a:p xmlns:a="http://schemas.openxmlformats.org/drawingml/2006/main">
             <a:r>
-              <a:t>任务契约</a:t>
-            </a:r>
-          </a:p>
-          <a:p xmlns:a="http://schemas.openxmlformats.org/drawingml/2006/main">
-            <a:r>
-              <a:t>→</a:t>
-            </a:r>
-          </a:p>
-          <a:p xmlns:a="http://schemas.openxmlformats.org/drawingml/2006/main">
-            <a:r>
-              <a:t>本讲输入</a:t>
-            </a:r>
-          </a:p>
-          <a:p xmlns:a="http://schemas.openxmlformats.org/drawingml/2006/main">
-            <a:r>
-              <a:t>受限执行</a:t>
-            </a:r>
-          </a:p>
-          <a:p xmlns:a="http://schemas.openxmlformats.org/drawingml/2006/main">
-            <a:r>
-              <a:t>→</a:t>
-            </a:r>
-          </a:p>
-          <a:p xmlns:a="http://schemas.openxmlformats.org/drawingml/2006/main">
-            <a:r>
-              <a:t>本讲执行</a:t>
-            </a:r>
-          </a:p>
-          <a:p xmlns:a="http://schemas.openxmlformats.org/drawingml/2006/main">
-            <a:r>
-              <a:t>diff / 测试</a:t>
-            </a:r>
-          </a:p>
-          <a:p xmlns:a="http://schemas.openxmlformats.org/drawingml/2006/main">
-            <a:r>
-              <a:t>→</a:t>
-            </a:r>
-          </a:p>
-          <a:p xmlns:a="http://schemas.openxmlformats.org/drawingml/2006/main">
-            <a:r>
-              <a:t>本讲证据</a:t>
-            </a:r>
-          </a:p>
-          <a:p xmlns:a="http://schemas.openxmlformats.org/drawingml/2006/main">
-            <a:r>
-              <a:t>失败保留</a:t>
-            </a:r>
-          </a:p>
-          <a:p xmlns:a="http://schemas.openxmlformats.org/drawingml/2006/main">
-            <a:r>
-              <a:t>下一步</a:t>
-            </a:r>
-          </a:p>
-          <a:p xmlns:a="http://schemas.openxmlformats.org/drawingml/2006/main">
-            <a:r>
-              <a:t>```</a:t>
+              <a:t>课堂安排：按本稿下方 90 分钟教学路由安排；此页不另占独立时段。</a:t>
             </a:r>
           </a:p>
           <a:p xmlns:a="http://schemas.openxmlformats.org/drawingml/2006/main">
@@ -2374,7 +1454,12 @@
           </a:p>
           <a:p xmlns:a="http://schemas.openxmlformats.org/drawingml/2006/main">
             <a:r>
-              <a:t>屏显来源页脚：来源：lesson-10/slides.md；课程工件与讲义见 speaker notes。</a:t>
+              <a:t>[Sources]</a:t>
+            </a:r>
+          </a:p>
+          <a:p xmlns:a="http://schemas.openxmlformats.org/drawingml/2006/main">
+            <a:r>
+              <a:t>[handout.md](./handout.md) §二-§六；[teaching-plan.md](./teaching-plan.md) 第四至六节。</a:t>
             </a:r>
           </a:p>
           <a:p xmlns:a="http://schemas.openxmlformats.org/drawingml/2006/main">
@@ -2384,87 +1469,7 @@
           </a:p>
           <a:p xmlns:a="http://schemas.openxmlformats.org/drawingml/2006/main">
             <a:r>
-              <a:t>教师讲述：</a:t>
-            </a:r>
-          </a:p>
-          <a:p xmlns:a="http://schemas.openxmlformats.org/drawingml/2006/main">
-            <a:r>
-              <a:t>回收任务契约、受限执行、diff/验证与失败保留的关系。本页不新增任务，要求学生用边界句检查自己的任务契约和执行记录。</a:t>
-            </a:r>
-          </a:p>
-          <a:p xmlns:a="http://schemas.openxmlformats.org/drawingml/2006/main">
-            <a:r>
-              <a:t/>
-            </a:r>
-          </a:p>
-          <a:p xmlns:a="http://schemas.openxmlformats.org/drawingml/2006/main">
-            <a:r>
-              <a:t>学生动作：</a:t>
-            </a:r>
-          </a:p>
-          <a:p xmlns:a="http://schemas.openxmlformats.org/drawingml/2006/main">
-            <a:r>
-              <a:t>学生快速指出自己当前最薄弱的一张卡。</a:t>
-            </a:r>
-          </a:p>
-          <a:p xmlns:a="http://schemas.openxmlformats.org/drawingml/2006/main">
-            <a:r>
-              <a:t/>
-            </a:r>
-          </a:p>
-          <a:p xmlns:a="http://schemas.openxmlformats.org/drawingml/2006/main">
-            <a:r>
-              <a:t>来源与边界：</a:t>
-            </a:r>
-          </a:p>
-          <a:p xmlns:a="http://schemas.openxmlformats.org/drawingml/2006/main">
-            <a:r>
-              <a:t>[handout.md](./handout.md) §二-§六；[teaching-plan.md](./teaching-plan.md) 第四至六节。</a:t>
-            </a:r>
-          </a:p>
-          <a:p xmlns:a="http://schemas.openxmlformats.org/drawingml/2006/main">
-            <a:r>
-              <a:t/>
-            </a:r>
-          </a:p>
-          <a:p xmlns:a="http://schemas.openxmlformats.org/drawingml/2006/main">
-            <a:r>
-              <a:t>---</a:t>
-            </a:r>
-          </a:p>
-          <a:p xmlns:a="http://schemas.openxmlformats.org/drawingml/2006/main">
-            <a:r>
-              <a:t/>
-            </a:r>
-          </a:p>
-          <a:p xmlns:a="http://schemas.openxmlformats.org/drawingml/2006/main">
-            <a:r>
-              <a:t>[Sources]</a:t>
-            </a:r>
-          </a:p>
-          <a:p xmlns:a="http://schemas.openxmlformats.org/drawingml/2006/main">
-            <a:r>
-              <a:t/>
-            </a:r>
-          </a:p>
-          <a:p xmlns:a="http://schemas.openxmlformats.org/drawingml/2006/main">
-            <a:r>
-              <a:t>- 本课 handout.md 与 slides.md</a:t>
-            </a:r>
-          </a:p>
-          <a:p xmlns:a="http://schemas.openxmlformats.org/drawingml/2006/main">
-            <a:r>
-              <a:t/>
-            </a:r>
-          </a:p>
-          <a:p xmlns:a="http://schemas.openxmlformats.org/drawingml/2006/main">
-            <a:r>
-              <a:t>- ../../course/reading-card-case.md</a:t>
-            </a:r>
-          </a:p>
-          <a:p xmlns:a="http://schemas.openxmlformats.org/drawingml/2006/main">
-            <a:r>
-              <a:t/>
+              <a:t>本课 handout.md、judgment-task.md；../../course/judgment-path.md。</a:t>
             </a:r>
           </a:p>
           <a:p xmlns:a="http://schemas.openxmlformats.org/drawingml/2006/main">
@@ -2539,7 +1544,7 @@
           <a:lstStyle xmlns:a="http://schemas.openxmlformats.org/drawingml/2006/main"/>
           <a:p xmlns:a="http://schemas.openxmlformats.org/drawingml/2006/main">
             <a:r>
-              <a:t>页面：P17 受限执行能否安全重复？</a:t>
+              <a:t>页面：P17 保留本课决定，准备下一课输入</a:t>
             </a:r>
           </a:p>
           <a:p xmlns:a="http://schemas.openxmlformats.org/drawingml/2006/main">
@@ -2549,7 +1554,12 @@
           </a:p>
           <a:p xmlns:a="http://schemas.openxmlformats.org/drawingml/2006/main">
             <a:r>
-              <a:t>讲义位置：本课讲义；见逐页母稿映射表</a:t>
+              <a:t>讲述与校准：</a:t>
+            </a:r>
+          </a:p>
+          <a:p xmlns:a="http://schemas.openxmlformats.org/drawingml/2006/main">
+            <a:r>
+              <a:t>修课堂发现的一个边界用例，整理补丁理由；不另开新功能。 每课课外最多60分钟；详见讲义。</a:t>
             </a:r>
           </a:p>
           <a:p xmlns:a="http://schemas.openxmlformats.org/drawingml/2006/main">
@@ -2559,17 +1569,12 @@
           </a:p>
           <a:p xmlns:a="http://schemas.openxmlformats.org/drawingml/2006/main">
             <a:r>
-              <a:t>屏显核对：</a:t>
-            </a:r>
-          </a:p>
-          <a:p xmlns:a="http://schemas.openxmlformats.org/drawingml/2006/main">
-            <a:r>
-              <a:t>```text</a:t>
-            </a:r>
-          </a:p>
-          <a:p xmlns:a="http://schemas.openxmlformats.org/drawingml/2006/main">
-            <a:r>
-              <a:t>受限执行能否安全重复？</a:t>
+              <a:t>学生动作：</a:t>
+            </a:r>
+          </a:p>
+          <a:p xmlns:a="http://schemas.openxmlformats.org/drawingml/2006/main">
+            <a:r>
+              <a:t>定位实际工件与下一项动作；按既定预算收口。</a:t>
             </a:r>
           </a:p>
           <a:p xmlns:a="http://schemas.openxmlformats.org/drawingml/2006/main">
@@ -2579,72 +1584,7 @@
           </a:p>
           <a:p xmlns:a="http://schemas.openxmlformats.org/drawingml/2006/main">
             <a:r>
-              <a:t>第 9 课</a:t>
-            </a:r>
-          </a:p>
-          <a:p xmlns:a="http://schemas.openxmlformats.org/drawingml/2006/main">
-            <a:r>
-              <a:t>实验规格</a:t>
-            </a:r>
-          </a:p>
-          <a:p xmlns:a="http://schemas.openxmlformats.org/drawingml/2006/main">
-            <a:r>
-              <a:t>→</a:t>
-            </a:r>
-          </a:p>
-          <a:p xmlns:a="http://schemas.openxmlformats.org/drawingml/2006/main">
-            <a:r>
-              <a:t>第 10 课</a:t>
-            </a:r>
-          </a:p>
-          <a:p xmlns:a="http://schemas.openxmlformats.org/drawingml/2006/main">
-            <a:r>
-              <a:t>受限执行</a:t>
-            </a:r>
-          </a:p>
-          <a:p xmlns:a="http://schemas.openxmlformats.org/drawingml/2006/main">
-            <a:r>
-              <a:t>→</a:t>
-            </a:r>
-          </a:p>
-          <a:p xmlns:a="http://schemas.openxmlformats.org/drawingml/2006/main">
-            <a:r>
-              <a:t>当前位置 / 输出</a:t>
-            </a:r>
-          </a:p>
-          <a:p xmlns:a="http://schemas.openxmlformats.org/drawingml/2006/main">
-            <a:r>
-              <a:t>第 11 课</a:t>
-            </a:r>
-          </a:p>
-          <a:p xmlns:a="http://schemas.openxmlformats.org/drawingml/2006/main">
-            <a:r>
-              <a:t>冻结循环</a:t>
-            </a:r>
-          </a:p>
-          <a:p xmlns:a="http://schemas.openxmlformats.org/drawingml/2006/main">
-            <a:r>
-              <a:t>→</a:t>
-            </a:r>
-          </a:p>
-          <a:p xmlns:a="http://schemas.openxmlformats.org/drawingml/2006/main">
-            <a:r>
-              <a:t>第 13 课</a:t>
-            </a:r>
-          </a:p>
-          <a:p xmlns:a="http://schemas.openxmlformats.org/drawingml/2006/main">
-            <a:r>
-              <a:t>评价证据</a:t>
-            </a:r>
-          </a:p>
-          <a:p xmlns:a="http://schemas.openxmlformats.org/drawingml/2006/main">
-            <a:r>
-              <a:t>保存：任务契约｜一次可核验 diff｜至少一条失败或越权记录</a:t>
-            </a:r>
-          </a:p>
-          <a:p xmlns:a="http://schemas.openxmlformats.org/drawingml/2006/main">
-            <a:r>
-              <a:t>```</a:t>
+              <a:t>课堂安排：按本稿下方 90 分钟教学路由安排；此页不另占独立时段。</a:t>
             </a:r>
           </a:p>
           <a:p xmlns:a="http://schemas.openxmlformats.org/drawingml/2006/main">
@@ -2654,7 +1594,37 @@
           </a:p>
           <a:p xmlns:a="http://schemas.openxmlformats.org/drawingml/2006/main">
             <a:r>
-              <a:t>屏显来源页脚：来源：lesson-10/slides.md；课程工件与讲义见 speaker notes。</a:t>
+              <a:t>[Sources]</a:t>
+            </a:r>
+          </a:p>
+          <a:p xmlns:a="http://schemas.openxmlformats.org/drawingml/2006/main">
+            <a:r>
+              <a:t>- Russell, S., &amp; Norvig, P. *Artificial Intelligence: A Modern Approach*, 4th ed. Pearson, 2020, Ch 2. [出版社页面](https://www.pearson.com/en-us/subject-catalog/p/artificial-intelligence-a-modern-approach/P200000003500/9780134610993)。</a:t>
+            </a:r>
+          </a:p>
+          <a:p xmlns:a="http://schemas.openxmlformats.org/drawingml/2006/main">
+            <a:r>
+              <a:t>- Yao, S. et al. "ReAct: Synergizing Reasoning and Acting in Language Models." *ICLR 2023*. [会议页面](https://iclr.cc/virtual/2023/poster/11003)。</a:t>
+            </a:r>
+          </a:p>
+          <a:p xmlns:a="http://schemas.openxmlformats.org/drawingml/2006/main">
+            <a:r>
+              <a:t>- Amershi, S. et al. "Guidelines for Human-AI Interaction." *CHI 2019*. DOI: [10.1145/3290605.3300233](https://www.microsoft.com/en-us/research/publication/guidelines-for-human-ai-interaction/)。</a:t>
+            </a:r>
+          </a:p>
+          <a:p xmlns:a="http://schemas.openxmlformats.org/drawingml/2006/main">
+            <a:r>
+              <a:t>- Jimenez, C. E. et al. *SWE-bench*, ICLR 2024. [项目页面](https://www.swebench.com/original.html)。</a:t>
+            </a:r>
+          </a:p>
+          <a:p xmlns:a="http://schemas.openxmlformats.org/drawingml/2006/main">
+            <a:r>
+              <a:t>- 阅读规则见 [reading-list.md](../../course/reading-list.md) 第 10 课。</a:t>
+            </a:r>
+          </a:p>
+          <a:p xmlns:a="http://schemas.openxmlformats.org/drawingml/2006/main">
+            <a:r>
+              <a:t>- 本课非正式提交门（[assignments.md](../../course/assignments.md)）。</a:t>
             </a:r>
           </a:p>
           <a:p xmlns:a="http://schemas.openxmlformats.org/drawingml/2006/main">
@@ -2664,142 +1634,7 @@
           </a:p>
           <a:p xmlns:a="http://schemas.openxmlformats.org/drawingml/2006/main">
             <a:r>
-              <a:t>教师讲述：</a:t>
-            </a:r>
-          </a:p>
-          <a:p xmlns:a="http://schemas.openxmlformats.org/drawingml/2006/main">
-            <a:r>
-              <a:t>回扣本课目标：任务契约、可核验 diff、验证证据、失败或越权处理和 AI 使用记录共同构成第 11 课输入。第 11 课将一次受限执行扩展为冻结运行队列，约束固定指标、预算、停止条件和失败恢复；另行分析优化循环的 Keep/Discard，不能据结果筛除冻结评价队列的输出。本课非正式提交门，产出回写个人项目。</a:t>
-            </a:r>
-          </a:p>
-          <a:p xmlns:a="http://schemas.openxmlformats.org/drawingml/2006/main">
-            <a:r>
-              <a:t/>
-            </a:r>
-          </a:p>
-          <a:p xmlns:a="http://schemas.openxmlformats.org/drawingml/2006/main">
-            <a:r>
-              <a:t>学生动作：</a:t>
-            </a:r>
-          </a:p>
-          <a:p xmlns:a="http://schemas.openxmlformats.org/drawingml/2006/main">
-            <a:r>
-              <a:t>学生提交退出卡或保存在个人项目。教师收集共性问题，用于第 11 课前调整。</a:t>
-            </a:r>
-          </a:p>
-          <a:p xmlns:a="http://schemas.openxmlformats.org/drawingml/2006/main">
-            <a:r>
-              <a:t/>
-            </a:r>
-          </a:p>
-          <a:p xmlns:a="http://schemas.openxmlformats.org/drawingml/2006/main">
-            <a:r>
-              <a:t>来源与边界：</a:t>
-            </a:r>
-          </a:p>
-          <a:p xmlns:a="http://schemas.openxmlformats.org/drawingml/2006/main">
-            <a:r>
-              <a:t>- Russell, S., &amp; Norvig, P. *Artificial Intelligence: A Modern Approach*, 4th ed. Pearson, 2020, Ch 2. [出版社页面](https://www.pearson.com/en-us/subject-catalog/p/artificial-intelligence-a-modern-approach/P200000003500/9780134610993)。</a:t>
-            </a:r>
-          </a:p>
-          <a:p xmlns:a="http://schemas.openxmlformats.org/drawingml/2006/main">
-            <a:r>
-              <a:t>- Yao, S. et al. "ReAct: Synergizing Reasoning and Acting in Language Models." *ICLR 2023*. [会议页面](https://iclr.cc/virtual/2023/poster/11003)。</a:t>
-            </a:r>
-          </a:p>
-          <a:p xmlns:a="http://schemas.openxmlformats.org/drawingml/2006/main">
-            <a:r>
-              <a:t>- Amershi, S. et al. "Guidelines for Human-AI Interaction." *CHI 2019*. DOI: [10.1145/3290605.3300233](https://www.microsoft.com/en-us/research/publication/guidelines-for-human-ai-interaction/)。</a:t>
-            </a:r>
-          </a:p>
-          <a:p xmlns:a="http://schemas.openxmlformats.org/drawingml/2006/main">
-            <a:r>
-              <a:t>- Jimenez, C. E. et al. *SWE-bench*, ICLR 2024. [项目页面](https://www.swebench.com/original.html)。</a:t>
-            </a:r>
-          </a:p>
-          <a:p xmlns:a="http://schemas.openxmlformats.org/drawingml/2006/main">
-            <a:r>
-              <a:t>- 阅读规则见 [reading-list.md](../../course/reading-list.md) 第 10 课。</a:t>
-            </a:r>
-          </a:p>
-          <a:p xmlns:a="http://schemas.openxmlformats.org/drawingml/2006/main">
-            <a:r>
-              <a:t>- 本课非正式提交门（[assignments.md](../../course/assignments.md)）。</a:t>
-            </a:r>
-          </a:p>
-          <a:p xmlns:a="http://schemas.openxmlformats.org/drawingml/2006/main">
-            <a:r>
-              <a:t/>
-            </a:r>
-          </a:p>
-          <a:p xmlns:a="http://schemas.openxmlformats.org/drawingml/2006/main">
-            <a:r>
-              <a:t>[Sources]</a:t>
-            </a:r>
-          </a:p>
-          <a:p xmlns:a="http://schemas.openxmlformats.org/drawingml/2006/main">
-            <a:r>
-              <a:t/>
-            </a:r>
-          </a:p>
-          <a:p xmlns:a="http://schemas.openxmlformats.org/drawingml/2006/main">
-            <a:r>
-              <a:t>- https://www.pearson.com/en-us/subject-catalog/p/artificial-intelligence-a-modern-approach/P200000003500/9780134610993</a:t>
-            </a:r>
-          </a:p>
-          <a:p xmlns:a="http://schemas.openxmlformats.org/drawingml/2006/main">
-            <a:r>
-              <a:t/>
-            </a:r>
-          </a:p>
-          <a:p xmlns:a="http://schemas.openxmlformats.org/drawingml/2006/main">
-            <a:r>
-              <a:t>- https://iclr.cc/virtual/2023/poster/11003</a:t>
-            </a:r>
-          </a:p>
-          <a:p xmlns:a="http://schemas.openxmlformats.org/drawingml/2006/main">
-            <a:r>
-              <a:t/>
-            </a:r>
-          </a:p>
-          <a:p xmlns:a="http://schemas.openxmlformats.org/drawingml/2006/main">
-            <a:r>
-              <a:t>- https://www.microsoft.com/en-us/research/publication/guidelines-for-human-ai-interaction/</a:t>
-            </a:r>
-          </a:p>
-          <a:p xmlns:a="http://schemas.openxmlformats.org/drawingml/2006/main">
-            <a:r>
-              <a:t/>
-            </a:r>
-          </a:p>
-          <a:p xmlns:a="http://schemas.openxmlformats.org/drawingml/2006/main">
-            <a:r>
-              <a:t>- https://www.swebench.com/original.html</a:t>
-            </a:r>
-          </a:p>
-          <a:p xmlns:a="http://schemas.openxmlformats.org/drawingml/2006/main">
-            <a:r>
-              <a:t/>
-            </a:r>
-          </a:p>
-          <a:p xmlns:a="http://schemas.openxmlformats.org/drawingml/2006/main">
-            <a:r>
-              <a:t>- 本课 handout.md 与 slides.md</a:t>
-            </a:r>
-          </a:p>
-          <a:p xmlns:a="http://schemas.openxmlformats.org/drawingml/2006/main">
-            <a:r>
-              <a:t/>
-            </a:r>
-          </a:p>
-          <a:p xmlns:a="http://schemas.openxmlformats.org/drawingml/2006/main">
-            <a:r>
-              <a:t>- ../../course/reading-card-case.md</a:t>
-            </a:r>
-          </a:p>
-          <a:p xmlns:a="http://schemas.openxmlformats.org/drawingml/2006/main">
-            <a:r>
-              <a:t/>
+              <a:t>本课 handout.md、judgment-task.md；../../course/judgment-path.md。教学构造仅用于方法判断；本人结果以实际记录为准。</a:t>
             </a:r>
           </a:p>
           <a:p xmlns:a="http://schemas.openxmlformats.org/drawingml/2006/main">
@@ -2884,7 +1719,12 @@
           </a:p>
           <a:p xmlns:a="http://schemas.openxmlformats.org/drawingml/2006/main">
             <a:r>
-              <a:t>讲义位置：本课讲义；见逐页母稿映射表</a:t>
+              <a:t>讲述与校准：</a:t>
+            </a:r>
+          </a:p>
+          <a:p xmlns:a="http://schemas.openxmlformats.org/drawingml/2006/main">
+            <a:r>
+              <a:t>回扣第 9 课：判断门已过，实验规格中"哪些步骤拟用 Agent、哪些步骤必须人工"是本课任务契约的直接输入。本课把"拟用 Agent"步骤改写为带验收标准的任务契约，让 Agent 在受限权限下执行一次。明确边界：目标是完成一次受限 Agent 执行的可复盘链路，不要求把 baseline 跑到最优；产出回写个人项目，作为第 13 课验证门材料的过程证据。第 11 课把本课的"一次执行"扩展为冻结队列执行与失败恢复。</a:t>
             </a:r>
           </a:p>
           <a:p xmlns:a="http://schemas.openxmlformats.org/drawingml/2006/main">
@@ -2894,17 +1734,12 @@
           </a:p>
           <a:p xmlns:a="http://schemas.openxmlformats.org/drawingml/2006/main">
             <a:r>
-              <a:t>屏显核对：</a:t>
-            </a:r>
-          </a:p>
-          <a:p xmlns:a="http://schemas.openxmlformats.org/drawingml/2006/main">
-            <a:r>
-              <a:t>```text</a:t>
-            </a:r>
-          </a:p>
-          <a:p xmlns:a="http://schemas.openxmlformats.org/drawingml/2006/main">
-            <a:r>
-              <a:t>实验规格还没有约束 Agent 执行</a:t>
+              <a:t>学生动作：</a:t>
+            </a:r>
+          </a:p>
+          <a:p xmlns:a="http://schemas.openxmlformats.org/drawingml/2006/main">
+            <a:r>
+              <a:t>快问：你第 9 课实验规格中标注了几个"拟用 Agent"步骤？只听回答，不评价。</a:t>
             </a:r>
           </a:p>
           <a:p xmlns:a="http://schemas.openxmlformats.org/drawingml/2006/main">
@@ -2914,62 +1749,7 @@
           </a:p>
           <a:p xmlns:a="http://schemas.openxmlformats.org/drawingml/2006/main">
             <a:r>
-              <a:t>实验规格</a:t>
-            </a:r>
-          </a:p>
-          <a:p xmlns:a="http://schemas.openxmlformats.org/drawingml/2006/main">
-            <a:r>
-              <a:t>→</a:t>
-            </a:r>
-          </a:p>
-          <a:p xmlns:a="http://schemas.openxmlformats.org/drawingml/2006/main">
-            <a:r>
-              <a:t>第 9 课输入</a:t>
-            </a:r>
-          </a:p>
-          <a:p xmlns:a="http://schemas.openxmlformats.org/drawingml/2006/main">
-            <a:r>
-              <a:t>任务契约</a:t>
-            </a:r>
-          </a:p>
-          <a:p xmlns:a="http://schemas.openxmlformats.org/drawingml/2006/main">
-            <a:r>
-              <a:t>→</a:t>
-            </a:r>
-          </a:p>
-          <a:p xmlns:a="http://schemas.openxmlformats.org/drawingml/2006/main">
-            <a:r>
-              <a:t>本课边界</a:t>
-            </a:r>
-          </a:p>
-          <a:p xmlns:a="http://schemas.openxmlformats.org/drawingml/2006/main">
-            <a:r>
-              <a:t>diff / 日志</a:t>
-            </a:r>
-          </a:p>
-          <a:p xmlns:a="http://schemas.openxmlformats.org/drawingml/2006/main">
-            <a:r>
-              <a:t>→</a:t>
-            </a:r>
-          </a:p>
-          <a:p xmlns:a="http://schemas.openxmlformats.org/drawingml/2006/main">
-            <a:r>
-              <a:t>一次受限执行</a:t>
-            </a:r>
-          </a:p>
-          <a:p xmlns:a="http://schemas.openxmlformats.org/drawingml/2006/main">
-            <a:r>
-              <a:t>冻结队列</a:t>
-            </a:r>
-          </a:p>
-          <a:p xmlns:a="http://schemas.openxmlformats.org/drawingml/2006/main">
-            <a:r>
-              <a:t>交给第 11 课</a:t>
-            </a:r>
-          </a:p>
-          <a:p xmlns:a="http://schemas.openxmlformats.org/drawingml/2006/main">
-            <a:r>
-              <a:t>```</a:t>
+              <a:t>课堂安排：按本稿下方 90 分钟教学路由安排；此页不另占独立时段。</a:t>
             </a:r>
           </a:p>
           <a:p xmlns:a="http://schemas.openxmlformats.org/drawingml/2006/main">
@@ -2979,7 +1759,12 @@
           </a:p>
           <a:p xmlns:a="http://schemas.openxmlformats.org/drawingml/2006/main">
             <a:r>
-              <a:t>屏显来源页脚：来源：lesson-10/slides.md；课程工件与讲义见 speaker notes。</a:t>
+              <a:t>[Sources]</a:t>
+            </a:r>
+          </a:p>
+          <a:p xmlns:a="http://schemas.openxmlformats.org/drawingml/2006/main">
+            <a:r>
+              <a:t>回扣第 9 课讲义 §三·5 与 §五；[备课规划.md](../备课规划.md) 第 10 课目标段；[assignments.md](../../course/assignments.md)（第 10 课非正式提交门）；[AGENTS.md](../../AGENTS.md) 证据标准。</a:t>
             </a:r>
           </a:p>
           <a:p xmlns:a="http://schemas.openxmlformats.org/drawingml/2006/main">
@@ -2989,142 +1774,7 @@
           </a:p>
           <a:p xmlns:a="http://schemas.openxmlformats.org/drawingml/2006/main">
             <a:r>
-              <a:t>教师讲述：</a:t>
-            </a:r>
-          </a:p>
-          <a:p xmlns:a="http://schemas.openxmlformats.org/drawingml/2006/main">
-            <a:r>
-              <a:t>回扣第 9 课：判断门已过，实验规格中"哪些步骤拟用 Agent、哪些步骤必须人工"是本课任务契约的直接输入。本课把"拟用 Agent"步骤改写为带验收标准的任务契约，让 Agent 在受限权限下执行一次。明确边界：目标是完成一次受限 Agent 执行的可复盘链路，不要求把 baseline 跑到最优；产出回写个人项目，作为第 13 课验证门材料的过程证据。第 11 课把本课的"一次执行"扩展为冻结队列执行与失败恢复。</a:t>
-            </a:r>
-          </a:p>
-          <a:p xmlns:a="http://schemas.openxmlformats.org/drawingml/2006/main">
-            <a:r>
-              <a:t/>
-            </a:r>
-          </a:p>
-          <a:p xmlns:a="http://schemas.openxmlformats.org/drawingml/2006/main">
-            <a:r>
-              <a:t>学生动作：</a:t>
-            </a:r>
-          </a:p>
-          <a:p xmlns:a="http://schemas.openxmlformats.org/drawingml/2006/main">
-            <a:r>
-              <a:t>快问：你第 9 课实验规格中标注了几个"拟用 Agent"步骤？只听回答，不评价。</a:t>
-            </a:r>
-          </a:p>
-          <a:p xmlns:a="http://schemas.openxmlformats.org/drawingml/2006/main">
-            <a:r>
-              <a:t/>
-            </a:r>
-          </a:p>
-          <a:p xmlns:a="http://schemas.openxmlformats.org/drawingml/2006/main">
-            <a:r>
-              <a:t>本课板书、诊断与串词：</a:t>
-            </a:r>
-          </a:p>
-          <a:p xmlns:a="http://schemas.openxmlformats.org/drawingml/2006/main">
-            <a:r>
-              <a:t>本节替换同类口头提示，不增加既有时段。开场诊断嵌入现有开场/回顾，后续再沿原实践时段操作。</a:t>
-            </a:r>
-          </a:p>
-          <a:p xmlns:a="http://schemas.openxmlformats.org/drawingml/2006/main">
-            <a:r>
-              <a:t/>
-            </a:r>
-          </a:p>
-          <a:p xmlns:a="http://schemas.openxmlformats.org/drawingml/2006/main">
-            <a:r>
-              <a:t>- **板书主线**：任务 → 权限 → diff → 测试 → 人工审核。</a:t>
-            </a:r>
-          </a:p>
-          <a:p xmlns:a="http://schemas.openxmlformats.org/drawingml/2006/main">
-            <a:r>
-              <a:t>- **诊断问题**：测试通过后还需核对什么？</a:t>
-            </a:r>
-          </a:p>
-          <a:p xmlns:a="http://schemas.openxmlformats.org/drawingml/2006/main">
-            <a:r>
-              <a:t>- **预期回答**：核对改动范围、测试覆盖与研究语义。</a:t>
-            </a:r>
-          </a:p>
-          <a:p xmlns:a="http://schemas.openxmlformats.org/drawingml/2006/main">
-            <a:r>
-              <a:t>- **常见误答后的追问**：若把AGENTS声明当沙箱，要求指出真正拒绝动作的控制点。</a:t>
-            </a:r>
-          </a:p>
-          <a:p xmlns:a="http://schemas.openxmlformats.org/drawingml/2006/main">
-            <a:r>
-              <a:t>- **过渡串词**：“一个受限改动可检查后，再讨论多轮执行与失败恢复。”</a:t>
-            </a:r>
-          </a:p>
-          <a:p xmlns:a="http://schemas.openxmlformats.org/drawingml/2006/main">
-            <a:r>
-              <a:t>- **当堂最小产出**：一个任务契约和一条diff/测试审核结论。</a:t>
-            </a:r>
-          </a:p>
-          <a:p xmlns:a="http://schemas.openxmlformats.org/drawingml/2006/main">
-            <a:r>
-              <a:t>- **退出记录**：写“已完成的动作、本人项目仍缺的证据/工件、下次补齐位置”。使用教师包时标明课堂方法练习，不能据此宣称本人研究门通过；正式提交课次仍为第 6、9、13、16 课。</a:t>
-            </a:r>
-          </a:p>
-          <a:p xmlns:a="http://schemas.openxmlformats.org/drawingml/2006/main">
-            <a:r>
-              <a:t/>
-            </a:r>
-          </a:p>
-          <a:p xmlns:a="http://schemas.openxmlformats.org/drawingml/2006/main">
-            <a:r>
-              <a:t>来源与边界：</a:t>
-            </a:r>
-          </a:p>
-          <a:p xmlns:a="http://schemas.openxmlformats.org/drawingml/2006/main">
-            <a:r>
-              <a:t>回扣第 9 课讲义 §三·5 与 §五；[备课规划.md](../备课规划.md) 第 10 课目标段；[assignments.md](../../course/assignments.md)（第 10 课非正式提交门）；[AGENTS.md](../../AGENTS.md) 证据标准。</a:t>
-            </a:r>
-          </a:p>
-          <a:p xmlns:a="http://schemas.openxmlformats.org/drawingml/2006/main">
-            <a:r>
-              <a:t/>
-            </a:r>
-          </a:p>
-          <a:p xmlns:a="http://schemas.openxmlformats.org/drawingml/2006/main">
-            <a:r>
-              <a:t>---</a:t>
-            </a:r>
-          </a:p>
-          <a:p xmlns:a="http://schemas.openxmlformats.org/drawingml/2006/main">
-            <a:r>
-              <a:t/>
-            </a:r>
-          </a:p>
-          <a:p xmlns:a="http://schemas.openxmlformats.org/drawingml/2006/main">
-            <a:r>
-              <a:t>[Sources]</a:t>
-            </a:r>
-          </a:p>
-          <a:p xmlns:a="http://schemas.openxmlformats.org/drawingml/2006/main">
-            <a:r>
-              <a:t/>
-            </a:r>
-          </a:p>
-          <a:p xmlns:a="http://schemas.openxmlformats.org/drawingml/2006/main">
-            <a:r>
-              <a:t>- 本课 handout.md 与 slides.md</a:t>
-            </a:r>
-          </a:p>
-          <a:p xmlns:a="http://schemas.openxmlformats.org/drawingml/2006/main">
-            <a:r>
-              <a:t/>
-            </a:r>
-          </a:p>
-          <a:p xmlns:a="http://schemas.openxmlformats.org/drawingml/2006/main">
-            <a:r>
-              <a:t>- ../../course/reading-card-case.md</a:t>
-            </a:r>
-          </a:p>
-          <a:p xmlns:a="http://schemas.openxmlformats.org/drawingml/2006/main">
-            <a:r>
-              <a:t/>
+              <a:t>本课 handout.md、judgment-task.md；../../course/judgment-path.md。</a:t>
             </a:r>
           </a:p>
           <a:p xmlns:a="http://schemas.openxmlformats.org/drawingml/2006/main">
@@ -3199,7 +1849,7 @@
           <a:lstStyle xmlns:a="http://schemas.openxmlformats.org/drawingml/2006/main"/>
           <a:p xmlns:a="http://schemas.openxmlformats.org/drawingml/2006/main">
             <a:r>
-              <a:t>页面：P03 模糊 prompt 让错误无法追溯</a:t>
+              <a:t>页面：P03 测试通过，补丁就合格吗</a:t>
             </a:r>
           </a:p>
           <a:p xmlns:a="http://schemas.openxmlformats.org/drawingml/2006/main">
@@ -3209,7 +1859,12 @@
           </a:p>
           <a:p xmlns:a="http://schemas.openxmlformats.org/drawingml/2006/main">
             <a:r>
-              <a:t>讲义位置：本课讲义；见逐页母稿映射表</a:t>
+              <a:t>讲述与校准：</a:t>
+            </a:r>
+          </a:p>
+          <a:p xmlns:a="http://schemas.openxmlformats.org/drawingml/2006/main">
+            <a:r>
+              <a:t>先独立作答，再同伴比较；以下依据只在校准时揭示。</a:t>
             </a:r>
           </a:p>
           <a:p xmlns:a="http://schemas.openxmlformats.org/drawingml/2006/main">
@@ -3219,17 +1874,7 @@
           </a:p>
           <a:p xmlns:a="http://schemas.openxmlformats.org/drawingml/2006/main">
             <a:r>
-              <a:t>屏显核对：</a:t>
-            </a:r>
-          </a:p>
-          <a:p xmlns:a="http://schemas.openxmlformats.org/drawingml/2006/main">
-            <a:r>
-              <a:t>```text</a:t>
-            </a:r>
-          </a:p>
-          <a:p xmlns:a="http://schemas.openxmlformats.org/drawingml/2006/main">
-            <a:r>
-              <a:t>模糊 prompt 让错误无法追溯</a:t>
+              <a:t>A 是已公开示例中的局部修复，满足旧缺字段契约而不满足本题完整契约；C 为适当方向，但具体实现需验证。B 吞异常可能降低分母。好测试需正常记录通过、坏输入明确拒绝且记录失败原因；全拒绝实现不能达标。不能为了新补丁修改旧评价口径。</a:t>
             </a:r>
           </a:p>
           <a:p xmlns:a="http://schemas.openxmlformats.org/drawingml/2006/main">
@@ -3239,52 +1884,12 @@
           </a:p>
           <a:p xmlns:a="http://schemas.openxmlformats.org/drawingml/2006/main">
             <a:r>
-              <a:t>“帮我把 baseline 跑通，看看结果怎么样，有问题就改一下。”</a:t>
-            </a:r>
-          </a:p>
-          <a:p xmlns:a="http://schemas.openxmlformats.org/drawingml/2006/main">
-            <a:r>
-              <a:t>跑通</a:t>
-            </a:r>
-          </a:p>
-          <a:p xmlns:a="http://schemas.openxmlformats.org/drawingml/2006/main">
-            <a:r>
-              <a:t>可能修改无关代码</a:t>
-            </a:r>
-          </a:p>
-          <a:p xmlns:a="http://schemas.openxmlformats.org/drawingml/2006/main">
-            <a:r>
-              <a:t>结果怎么样</a:t>
-            </a:r>
-          </a:p>
-          <a:p xmlns:a="http://schemas.openxmlformats.org/drawingml/2006/main">
-            <a:r>
-              <a:t>可能把单次运行写成方法效应</a:t>
-            </a:r>
-          </a:p>
-          <a:p xmlns:a="http://schemas.openxmlformats.org/drawingml/2006/main">
-            <a:r>
-              <a:t>有问题</a:t>
-            </a:r>
-          </a:p>
-          <a:p xmlns:a="http://schemas.openxmlformats.org/drawingml/2006/main">
-            <a:r>
-              <a:t>可能跳过失败测试</a:t>
-            </a:r>
-          </a:p>
-          <a:p xmlns:a="http://schemas.openxmlformats.org/drawingml/2006/main">
-            <a:r>
-              <a:t>改一下</a:t>
-            </a:r>
-          </a:p>
-          <a:p xmlns:a="http://schemas.openxmlformats.org/drawingml/2006/main">
-            <a:r>
-              <a:t>可能改评价协议而非方法</a:t>
-            </a:r>
-          </a:p>
-          <a:p xmlns:a="http://schemas.openxmlformats.org/drawingml/2006/main">
-            <a:r>
-              <a:t>```</a:t>
+              <a:t>学生动作：</a:t>
+            </a:r>
+          </a:p>
+          <a:p xmlns:a="http://schemas.openxmlformats.org/drawingml/2006/main">
+            <a:r>
+              <a:t>先独立写决定和证据，后同伴比较；校准后再回写。</a:t>
             </a:r>
           </a:p>
           <a:p xmlns:a="http://schemas.openxmlformats.org/drawingml/2006/main">
@@ -3294,7 +1899,7 @@
           </a:p>
           <a:p xmlns:a="http://schemas.openxmlformats.org/drawingml/2006/main">
             <a:r>
-              <a:t>屏显来源页脚：来源：lesson-10/slides.md；课程工件与讲义见 speaker notes。</a:t>
+              <a:t>课堂安排：按本稿下方 90 分钟教学路由安排；此页不另占独立时段。</a:t>
             </a:r>
           </a:p>
           <a:p xmlns:a="http://schemas.openxmlformats.org/drawingml/2006/main">
@@ -3304,12 +1909,12 @@
           </a:p>
           <a:p xmlns:a="http://schemas.openxmlformats.org/drawingml/2006/main">
             <a:r>
-              <a:t>教师讲述：</a:t>
-            </a:r>
-          </a:p>
-          <a:p xmlns:a="http://schemas.openxmlformats.org/drawingml/2006/main">
-            <a:r>
-              <a:t>模糊 prompt 把范围、权限、验收、失败处理都交给 Agent 解释。核心问题是出错后无法追溯——研究者不知道 Agent 做了什么、为什么做、依据什么标准，因此无法判断结果是否仍属于当前实验。本课的起点是把模糊 prompt 改写为任务契约。</a:t>
+              <a:t>[Sources]</a:t>
+            </a:r>
+          </a:p>
+          <a:p xmlns:a="http://schemas.openxmlformats.org/drawingml/2006/main">
+            <a:r>
+              <a:t>讲义 §二·1。</a:t>
             </a:r>
           </a:p>
           <a:p xmlns:a="http://schemas.openxmlformats.org/drawingml/2006/main">
@@ -3319,72 +1924,7 @@
           </a:p>
           <a:p xmlns:a="http://schemas.openxmlformats.org/drawingml/2006/main">
             <a:r>
-              <a:t>学生动作：</a:t>
-            </a:r>
-          </a:p>
-          <a:p xmlns:a="http://schemas.openxmlformats.org/drawingml/2006/main">
-            <a:r>
-              <a:t>让学生说出自己最近一次给 Agent 的 prompt 属于模糊 prompt 的哪些特征。</a:t>
-            </a:r>
-          </a:p>
-          <a:p xmlns:a="http://schemas.openxmlformats.org/drawingml/2006/main">
-            <a:r>
-              <a:t/>
-            </a:r>
-          </a:p>
-          <a:p xmlns:a="http://schemas.openxmlformats.org/drawingml/2006/main">
-            <a:r>
-              <a:t>来源与边界：</a:t>
-            </a:r>
-          </a:p>
-          <a:p xmlns:a="http://schemas.openxmlformats.org/drawingml/2006/main">
-            <a:r>
-              <a:t>讲义 §二·1。</a:t>
-            </a:r>
-          </a:p>
-          <a:p xmlns:a="http://schemas.openxmlformats.org/drawingml/2006/main">
-            <a:r>
-              <a:t/>
-            </a:r>
-          </a:p>
-          <a:p xmlns:a="http://schemas.openxmlformats.org/drawingml/2006/main">
-            <a:r>
-              <a:t>---</a:t>
-            </a:r>
-          </a:p>
-          <a:p xmlns:a="http://schemas.openxmlformats.org/drawingml/2006/main">
-            <a:r>
-              <a:t/>
-            </a:r>
-          </a:p>
-          <a:p xmlns:a="http://schemas.openxmlformats.org/drawingml/2006/main">
-            <a:r>
-              <a:t>[Sources]</a:t>
-            </a:r>
-          </a:p>
-          <a:p xmlns:a="http://schemas.openxmlformats.org/drawingml/2006/main">
-            <a:r>
-              <a:t/>
-            </a:r>
-          </a:p>
-          <a:p xmlns:a="http://schemas.openxmlformats.org/drawingml/2006/main">
-            <a:r>
-              <a:t>- 本课 handout.md 与 slides.md</a:t>
-            </a:r>
-          </a:p>
-          <a:p xmlns:a="http://schemas.openxmlformats.org/drawingml/2006/main">
-            <a:r>
-              <a:t/>
-            </a:r>
-          </a:p>
-          <a:p xmlns:a="http://schemas.openxmlformats.org/drawingml/2006/main">
-            <a:r>
-              <a:t>- ../../course/reading-card-case.md</a:t>
-            </a:r>
-          </a:p>
-          <a:p xmlns:a="http://schemas.openxmlformats.org/drawingml/2006/main">
-            <a:r>
-              <a:t/>
+              <a:t>本课 handout.md、judgment-task.md；../../course/judgment-path.md。教学构造仅用于方法判断；本人结果以实际记录为准。</a:t>
             </a:r>
           </a:p>
           <a:p xmlns:a="http://schemas.openxmlformats.org/drawingml/2006/main">
@@ -3469,7 +2009,12 @@
           </a:p>
           <a:p xmlns:a="http://schemas.openxmlformats.org/drawingml/2006/main">
             <a:r>
-              <a:t>讲义位置：handout.md §五、贯穿案例：把判断门实验规格的一步改写为受限 Agent 任务</a:t>
+              <a:t>讲述与校准：</a:t>
+            </a:r>
+          </a:p>
+          <a:p xmlns:a="http://schemas.openxmlformats.org/drawingml/2006/main">
+            <a:r>
+              <a:t>演示的是受限代码修改与测试回放。教师若接入真实Agent，要保留真实调用记录；使用预置diff时如实标为回放。此工程改动不证明阅读卡降低遗漏率。</a:t>
             </a:r>
           </a:p>
           <a:p xmlns:a="http://schemas.openxmlformats.org/drawingml/2006/main">
@@ -3479,27 +2024,12 @@
           </a:p>
           <a:p xmlns:a="http://schemas.openxmlformats.org/drawingml/2006/main">
             <a:r>
-              <a:t>屏显核对：</a:t>
-            </a:r>
-          </a:p>
-          <a:p xmlns:a="http://schemas.openxmlformats.org/drawingml/2006/main">
-            <a:r>
-              <a:t>任务：为 normalize_record 补缺失字段检查。</a:t>
-            </a:r>
-          </a:p>
-          <a:p xmlns:a="http://schemas.openxmlformats.org/drawingml/2006/main">
-            <a:r>
-              <a:t>只改：after/generate.py；测试与样例数据只读。</a:t>
-            </a:r>
-          </a:p>
-          <a:p xmlns:a="http://schemas.openxmlformats.org/drawingml/2006/main">
-            <a:r>
-              <a:t>成功：正常输入通过；缺字段给明确错误。</a:t>
-            </a:r>
-          </a:p>
-          <a:p xmlns:a="http://schemas.openxmlformats.org/drawingml/2006/main">
-            <a:r>
-              <a:t>审核：先看候选 diff，再运行既定测试并核对日志。</a:t>
+              <a:t>学生动作：</a:t>
+            </a:r>
+          </a:p>
+          <a:p xmlns:a="http://schemas.openxmlformats.org/drawingml/2006/main">
+            <a:r>
+              <a:t>预测缺字段输入会在哪一步失败，并指定允许改动的位置。</a:t>
             </a:r>
           </a:p>
           <a:p xmlns:a="http://schemas.openxmlformats.org/drawingml/2006/main">
@@ -3509,12 +2039,7 @@
           </a:p>
           <a:p xmlns:a="http://schemas.openxmlformats.org/drawingml/2006/main">
             <a:r>
-              <a:t>教师讲述：</a:t>
-            </a:r>
-          </a:p>
-          <a:p xmlns:a="http://schemas.openxmlformats.org/drawingml/2006/main">
-            <a:r>
-              <a:t>演示的是受限代码修改与测试回放。教师若接入真实Agent，要保留真实调用记录；使用预置diff时如实标为回放。此工程改动不证明阅读卡降低遗漏率。</a:t>
+              <a:t>课堂安排：按本稿下方 90 分钟教学路由安排；此页不另占独立时段。</a:t>
             </a:r>
           </a:p>
           <a:p xmlns:a="http://schemas.openxmlformats.org/drawingml/2006/main">
@@ -3524,12 +2049,12 @@
           </a:p>
           <a:p xmlns:a="http://schemas.openxmlformats.org/drawingml/2006/main">
             <a:r>
-              <a:t>学生动作：</a:t>
-            </a:r>
-          </a:p>
-          <a:p xmlns:a="http://schemas.openxmlformats.org/drawingml/2006/main">
-            <a:r>
-              <a:t>预测缺字段输入会在哪一步失败，并指定允许改动的位置。</a:t>
+              <a:t>[Sources]</a:t>
+            </a:r>
+          </a:p>
+          <a:p xmlns:a="http://schemas.openxmlformats.org/drawingml/2006/main">
+            <a:r>
+              <a:t>./handout.md；课堂示例与构造数据见 ../../course/reading-card-case.md</a:t>
             </a:r>
           </a:p>
           <a:p xmlns:a="http://schemas.openxmlformats.org/drawingml/2006/main">
@@ -3539,47 +2064,7 @@
           </a:p>
           <a:p xmlns:a="http://schemas.openxmlformats.org/drawingml/2006/main">
             <a:r>
-              <a:t>来源与边界：</a:t>
-            </a:r>
-          </a:p>
-          <a:p xmlns:a="http://schemas.openxmlformats.org/drawingml/2006/main">
-            <a:r>
-              <a:t>./handout.md；课堂示例与构造数据见 ../../course/reading-card-case.md</a:t>
-            </a:r>
-          </a:p>
-          <a:p xmlns:a="http://schemas.openxmlformats.org/drawingml/2006/main">
-            <a:r>
-              <a:t/>
-            </a:r>
-          </a:p>
-          <a:p xmlns:a="http://schemas.openxmlformats.org/drawingml/2006/main">
-            <a:r>
-              <a:t>[Sources]</a:t>
-            </a:r>
-          </a:p>
-          <a:p xmlns:a="http://schemas.openxmlformats.org/drawingml/2006/main">
-            <a:r>
-              <a:t/>
-            </a:r>
-          </a:p>
-          <a:p xmlns:a="http://schemas.openxmlformats.org/drawingml/2006/main">
-            <a:r>
-              <a:t>- 本课 handout.md 与 slides.md</a:t>
-            </a:r>
-          </a:p>
-          <a:p xmlns:a="http://schemas.openxmlformats.org/drawingml/2006/main">
-            <a:r>
-              <a:t/>
-            </a:r>
-          </a:p>
-          <a:p xmlns:a="http://schemas.openxmlformats.org/drawingml/2006/main">
-            <a:r>
-              <a:t>- ../../course/reading-card-case.md</a:t>
-            </a:r>
-          </a:p>
-          <a:p xmlns:a="http://schemas.openxmlformats.org/drawingml/2006/main">
-            <a:r>
-              <a:t/>
+              <a:t>本课 handout.md、judgment-task.md；../../course/judgment-path.md。</a:t>
             </a:r>
           </a:p>
           <a:p xmlns:a="http://schemas.openxmlformats.org/drawingml/2006/main">
@@ -3664,7 +2149,12 @@
           </a:p>
           <a:p xmlns:a="http://schemas.openxmlformats.org/drawingml/2006/main">
             <a:r>
-              <a:t>讲义位置：本课讲义；见逐页母稿映射表</a:t>
+              <a:t>讲述与校准：</a:t>
+            </a:r>
+          </a:p>
+          <a:p xmlns:a="http://schemas.openxmlformats.org/drawingml/2006/main">
+            <a:r>
+              <a:t>屏显按范围、权限、验收与失败处理四个方面比较原请求和任务契约；可追溯性由这些约束与日志共同建立。独立检查者应能从契约、diff、测试和失败记录复核本次执行。</a:t>
             </a:r>
           </a:p>
           <a:p xmlns:a="http://schemas.openxmlformats.org/drawingml/2006/main">
@@ -3674,37 +2164,12 @@
           </a:p>
           <a:p xmlns:a="http://schemas.openxmlformats.org/drawingml/2006/main">
             <a:r>
-              <a:t>屏显核对：</a:t>
-            </a:r>
-          </a:p>
-          <a:p xmlns:a="http://schemas.openxmlformats.org/drawingml/2006/main">
-            <a:r>
-              <a:t>| 含混请求 | 可执行的任务契约 |</a:t>
-            </a:r>
-          </a:p>
-          <a:p xmlns:a="http://schemas.openxmlformats.org/drawingml/2006/main">
-            <a:r>
-              <a:t>| --- | --- |</a:t>
-            </a:r>
-          </a:p>
-          <a:p xmlns:a="http://schemas.openxmlformats.org/drawingml/2006/main">
-            <a:r>
-              <a:t>| “帮我把代码修好” | 补 normalize_record 的缺失字段检查 |</a:t>
-            </a:r>
-          </a:p>
-          <a:p xmlns:a="http://schemas.openxmlformats.org/drawingml/2006/main">
-            <a:r>
-              <a:t>| 没有修改范围 | 只改 after/generate.py |</a:t>
-            </a:r>
-          </a:p>
-          <a:p xmlns:a="http://schemas.openxmlformats.org/drawingml/2006/main">
-            <a:r>
-              <a:t>| “结果能用就行” | 既定两项测试通过，人工检查 diff |</a:t>
-            </a:r>
-          </a:p>
-          <a:p xmlns:a="http://schemas.openxmlformats.org/drawingml/2006/main">
-            <a:r>
-              <a:t>| 出错后继续尝试 | 越权或测试失败时停止并留日志 |</a:t>
+              <a:t>学生动作：</a:t>
+            </a:r>
+          </a:p>
+          <a:p xmlns:a="http://schemas.openxmlformats.org/drawingml/2006/main">
+            <a:r>
+              <a:t>让学生用对照表检查自己刚才写的五字段，标注哪些维度仍模糊。</a:t>
             </a:r>
           </a:p>
           <a:p xmlns:a="http://schemas.openxmlformats.org/drawingml/2006/main">
@@ -3714,7 +2179,7 @@
           </a:p>
           <a:p xmlns:a="http://schemas.openxmlformats.org/drawingml/2006/main">
             <a:r>
-              <a:t>测试、fixture 与评价标准保持只读。</a:t>
+              <a:t>课堂安排：按本稿下方 90 分钟教学路由安排；此页不另占独立时段。</a:t>
             </a:r>
           </a:p>
           <a:p xmlns:a="http://schemas.openxmlformats.org/drawingml/2006/main">
@@ -3724,12 +2189,12 @@
           </a:p>
           <a:p xmlns:a="http://schemas.openxmlformats.org/drawingml/2006/main">
             <a:r>
-              <a:t>教师讲述：</a:t>
-            </a:r>
-          </a:p>
-          <a:p xmlns:a="http://schemas.openxmlformats.org/drawingml/2006/main">
-            <a:r>
-              <a:t>屏显按范围、权限、验收与失败处理四个方面比较原请求和任务契约；可追溯性由这些约束与日志共同建立。独立检查者应能从契约、diff、测试和失败记录复核本次执行。</a:t>
+              <a:t>[Sources]</a:t>
+            </a:r>
+          </a:p>
+          <a:p xmlns:a="http://schemas.openxmlformats.org/drawingml/2006/main">
+            <a:r>
+              <a:t>讲义 §二·3；Russell &amp; Norvig 2020 Ch 2（[reading-list.md](../../course/reading-list.md) 第 10 课）。</a:t>
             </a:r>
           </a:p>
           <a:p xmlns:a="http://schemas.openxmlformats.org/drawingml/2006/main">
@@ -3739,72 +2204,7 @@
           </a:p>
           <a:p xmlns:a="http://schemas.openxmlformats.org/drawingml/2006/main">
             <a:r>
-              <a:t>学生动作：</a:t>
-            </a:r>
-          </a:p>
-          <a:p xmlns:a="http://schemas.openxmlformats.org/drawingml/2006/main">
-            <a:r>
-              <a:t>让学生用对照表检查自己刚才写的五字段，标注哪些维度仍模糊。</a:t>
-            </a:r>
-          </a:p>
-          <a:p xmlns:a="http://schemas.openxmlformats.org/drawingml/2006/main">
-            <a:r>
-              <a:t/>
-            </a:r>
-          </a:p>
-          <a:p xmlns:a="http://schemas.openxmlformats.org/drawingml/2006/main">
-            <a:r>
-              <a:t>来源与边界：</a:t>
-            </a:r>
-          </a:p>
-          <a:p xmlns:a="http://schemas.openxmlformats.org/drawingml/2006/main">
-            <a:r>
-              <a:t>讲义 §二·3；Russell &amp; Norvig 2020 Ch 2（[reading-list.md](../../course/reading-list.md) 第 10 课）。</a:t>
-            </a:r>
-          </a:p>
-          <a:p xmlns:a="http://schemas.openxmlformats.org/drawingml/2006/main">
-            <a:r>
-              <a:t/>
-            </a:r>
-          </a:p>
-          <a:p xmlns:a="http://schemas.openxmlformats.org/drawingml/2006/main">
-            <a:r>
-              <a:t>---</a:t>
-            </a:r>
-          </a:p>
-          <a:p xmlns:a="http://schemas.openxmlformats.org/drawingml/2006/main">
-            <a:r>
-              <a:t/>
-            </a:r>
-          </a:p>
-          <a:p xmlns:a="http://schemas.openxmlformats.org/drawingml/2006/main">
-            <a:r>
-              <a:t>[Sources]</a:t>
-            </a:r>
-          </a:p>
-          <a:p xmlns:a="http://schemas.openxmlformats.org/drawingml/2006/main">
-            <a:r>
-              <a:t/>
-            </a:r>
-          </a:p>
-          <a:p xmlns:a="http://schemas.openxmlformats.org/drawingml/2006/main">
-            <a:r>
-              <a:t>- 本课 handout.md 与 slides.md</a:t>
-            </a:r>
-          </a:p>
-          <a:p xmlns:a="http://schemas.openxmlformats.org/drawingml/2006/main">
-            <a:r>
-              <a:t/>
-            </a:r>
-          </a:p>
-          <a:p xmlns:a="http://schemas.openxmlformats.org/drawingml/2006/main">
-            <a:r>
-              <a:t>- ../../course/reading-card-case.md</a:t>
-            </a:r>
-          </a:p>
-          <a:p xmlns:a="http://schemas.openxmlformats.org/drawingml/2006/main">
-            <a:r>
-              <a:t/>
+              <a:t>本课 handout.md、judgment-task.md；../../course/judgment-path.md。</a:t>
             </a:r>
           </a:p>
           <a:p xmlns:a="http://schemas.openxmlformats.org/drawingml/2006/main">
@@ -3889,7 +2289,12 @@
           </a:p>
           <a:p xmlns:a="http://schemas.openxmlformats.org/drawingml/2006/main">
             <a:r>
-              <a:t>讲义位置：handout.md §五、贯穿案例：把判断门实验规格的一步改写为受限 Agent 任务</a:t>
+              <a:t>讲述与校准：</a:t>
+            </a:r>
+          </a:p>
+          <a:p xmlns:a="http://schemas.openxmlformats.org/drawingml/2006/main">
+            <a:r>
+              <a:t>用本课实际unittest入口说明什么执行得到授权。要求学生指出真正会停住的控制点。预置脚本接口只能证明接口拒绝，不能声称阻止任意直接文件访问。</a:t>
             </a:r>
           </a:p>
           <a:p xmlns:a="http://schemas.openxmlformats.org/drawingml/2006/main">
@@ -3899,22 +2304,12 @@
           </a:p>
           <a:p xmlns:a="http://schemas.openxmlformats.org/drawingml/2006/main">
             <a:r>
-              <a:t>屏显核对：</a:t>
-            </a:r>
-          </a:p>
-          <a:p xmlns:a="http://schemas.openxmlformats.org/drawingml/2006/main">
-            <a:r>
-              <a:t>声明：允许读取、修改和执行的范围。</a:t>
-            </a:r>
-          </a:p>
-          <a:p xmlns:a="http://schemas.openxmlformats.org/drawingml/2006/main">
-            <a:r>
-              <a:t>控制：工具层限制与人工审核点。</a:t>
-            </a:r>
-          </a:p>
-          <a:p xmlns:a="http://schemas.openxmlformats.org/drawingml/2006/main">
-            <a:r>
-              <a:t>证据：实际 diff、执行命令、测试与事件记录。</a:t>
+              <a:t>学生动作：</a:t>
+            </a:r>
+          </a:p>
+          <a:p xmlns:a="http://schemas.openxmlformats.org/drawingml/2006/main">
+            <a:r>
+              <a:t>为一个动作分别指出声明、控制和观察证据。</a:t>
             </a:r>
           </a:p>
           <a:p xmlns:a="http://schemas.openxmlformats.org/drawingml/2006/main">
@@ -3924,7 +2319,7 @@
           </a:p>
           <a:p xmlns:a="http://schemas.openxmlformats.org/drawingml/2006/main">
             <a:r>
-              <a:t>写进 AGENTS.md，不等于自动获得隔离。</a:t>
+              <a:t>课堂安排：按本稿下方 90 分钟教学路由安排；此页不另占独立时段。</a:t>
             </a:r>
           </a:p>
           <a:p xmlns:a="http://schemas.openxmlformats.org/drawingml/2006/main">
@@ -3934,12 +2329,12 @@
           </a:p>
           <a:p xmlns:a="http://schemas.openxmlformats.org/drawingml/2006/main">
             <a:r>
-              <a:t>教师讲述：</a:t>
-            </a:r>
-          </a:p>
-          <a:p xmlns:a="http://schemas.openxmlformats.org/drawingml/2006/main">
-            <a:r>
-              <a:t>用本课实际unittest入口说明什么执行得到授权。要求学生指出真正会停住的控制点。预置脚本接口只能证明接口拒绝，不能声称阻止任意直接文件访问。</a:t>
+              <a:t>[Sources]</a:t>
+            </a:r>
+          </a:p>
+          <a:p xmlns:a="http://schemas.openxmlformats.org/drawingml/2006/main">
+            <a:r>
+              <a:t>./handout.md；课堂示例与构造数据见 ../../course/reading-card-case.md</a:t>
             </a:r>
           </a:p>
           <a:p xmlns:a="http://schemas.openxmlformats.org/drawingml/2006/main">
@@ -3949,72 +2344,7 @@
           </a:p>
           <a:p xmlns:a="http://schemas.openxmlformats.org/drawingml/2006/main">
             <a:r>
-              <a:t>学生动作：</a:t>
-            </a:r>
-          </a:p>
-          <a:p xmlns:a="http://schemas.openxmlformats.org/drawingml/2006/main">
-            <a:r>
-              <a:t>为一个动作分别指出声明、控制和观察证据。</a:t>
-            </a:r>
-          </a:p>
-          <a:p xmlns:a="http://schemas.openxmlformats.org/drawingml/2006/main">
-            <a:r>
-              <a:t/>
-            </a:r>
-          </a:p>
-          <a:p xmlns:a="http://schemas.openxmlformats.org/drawingml/2006/main">
-            <a:r>
-              <a:t>来源与边界：</a:t>
-            </a:r>
-          </a:p>
-          <a:p xmlns:a="http://schemas.openxmlformats.org/drawingml/2006/main">
-            <a:r>
-              <a:t>./handout.md；课堂示例与构造数据见 ../../course/reading-card-case.md</a:t>
-            </a:r>
-          </a:p>
-          <a:p xmlns:a="http://schemas.openxmlformats.org/drawingml/2006/main">
-            <a:r>
-              <a:t/>
-            </a:r>
-          </a:p>
-          <a:p xmlns:a="http://schemas.openxmlformats.org/drawingml/2006/main">
-            <a:r>
-              <a:t>[Sources]</a:t>
-            </a:r>
-          </a:p>
-          <a:p xmlns:a="http://schemas.openxmlformats.org/drawingml/2006/main">
-            <a:r>
-              <a:t/>
-            </a:r>
-          </a:p>
-          <a:p xmlns:a="http://schemas.openxmlformats.org/drawingml/2006/main">
-            <a:r>
-              <a:t>- https://www.microsoft.com/en-us/research/publication/guidelines-for-human-ai-interaction/</a:t>
-            </a:r>
-          </a:p>
-          <a:p xmlns:a="http://schemas.openxmlformats.org/drawingml/2006/main">
-            <a:r>
-              <a:t/>
-            </a:r>
-          </a:p>
-          <a:p xmlns:a="http://schemas.openxmlformats.org/drawingml/2006/main">
-            <a:r>
-              <a:t>- 本课 handout.md 与 slides.md</a:t>
-            </a:r>
-          </a:p>
-          <a:p xmlns:a="http://schemas.openxmlformats.org/drawingml/2006/main">
-            <a:r>
-              <a:t/>
-            </a:r>
-          </a:p>
-          <a:p xmlns:a="http://schemas.openxmlformats.org/drawingml/2006/main">
-            <a:r>
-              <a:t>- ../../course/reading-card-case.md</a:t>
-            </a:r>
-          </a:p>
-          <a:p xmlns:a="http://schemas.openxmlformats.org/drawingml/2006/main">
-            <a:r>
-              <a:t/>
+              <a:t>本课 handout.md、judgment-task.md；../../course/judgment-path.md。</a:t>
             </a:r>
           </a:p>
           <a:p xmlns:a="http://schemas.openxmlformats.org/drawingml/2006/main">
@@ -4099,7 +2429,12 @@
           </a:p>
           <a:p xmlns:a="http://schemas.openxmlformats.org/drawingml/2006/main">
             <a:r>
-              <a:t>讲义位置：本课讲义；见逐页母稿映射表</a:t>
+              <a:t>讲述与校准：</a:t>
+            </a:r>
+          </a:p>
+          <a:p xmlns:a="http://schemas.openxmlformats.org/drawingml/2006/main">
+            <a:r>
+              <a:t>ReAct 循环说明 Agent 输出必须被核验：错误会在推理、行动、观察任一环节传播并自我强化。任务契约与日志让错误传播可被观察。失败恢复不重试到成功——失败日志与成功结果同等重要，删除失败日志等同于伪造实验记录（沿用 [assessment.md](../../course/assessment.md) 学术规范红线）。</a:t>
             </a:r>
           </a:p>
           <a:p xmlns:a="http://schemas.openxmlformats.org/drawingml/2006/main">
@@ -4109,17 +2444,12 @@
           </a:p>
           <a:p xmlns:a="http://schemas.openxmlformats.org/drawingml/2006/main">
             <a:r>
-              <a:t>屏显核对：</a:t>
-            </a:r>
-          </a:p>
-          <a:p xmlns:a="http://schemas.openxmlformats.org/drawingml/2006/main">
-            <a:r>
-              <a:t>```text</a:t>
-            </a:r>
-          </a:p>
-          <a:p xmlns:a="http://schemas.openxmlformats.org/drawingml/2006/main">
-            <a:r>
-              <a:t>错误循环需要可见的失败恢复</a:t>
+              <a:t>学生动作：</a:t>
+            </a:r>
+          </a:p>
+          <a:p xmlns:a="http://schemas.openxmlformats.org/drawingml/2006/main">
+            <a:r>
+              <a:t>让学生检查自己任务契约的失败恢复段是否覆盖超时、越权、测试失败三种情形。</a:t>
             </a:r>
           </a:p>
           <a:p xmlns:a="http://schemas.openxmlformats.org/drawingml/2006/main">
@@ -4129,72 +2459,7 @@
           </a:p>
           <a:p xmlns:a="http://schemas.openxmlformats.org/drawingml/2006/main">
             <a:r>
-              <a:t>Reasoning</a:t>
-            </a:r>
-          </a:p>
-          <a:p xmlns:a="http://schemas.openxmlformats.org/drawingml/2006/main">
-            <a:r>
-              <a:t>→</a:t>
-            </a:r>
-          </a:p>
-          <a:p xmlns:a="http://schemas.openxmlformats.org/drawingml/2006/main">
-            <a:r>
-              <a:t>推理可能错</a:t>
-            </a:r>
-          </a:p>
-          <a:p xmlns:a="http://schemas.openxmlformats.org/drawingml/2006/main">
-            <a:r>
-              <a:t>Action</a:t>
-            </a:r>
-          </a:p>
-          <a:p xmlns:a="http://schemas.openxmlformats.org/drawingml/2006/main">
-            <a:r>
-              <a:t>→</a:t>
-            </a:r>
-          </a:p>
-          <a:p xmlns:a="http://schemas.openxmlformats.org/drawingml/2006/main">
-            <a:r>
-              <a:t>行动可能越权</a:t>
-            </a:r>
-          </a:p>
-          <a:p xmlns:a="http://schemas.openxmlformats.org/drawingml/2006/main">
-            <a:r>
-              <a:t>Observation</a:t>
-            </a:r>
-          </a:p>
-          <a:p xmlns:a="http://schemas.openxmlformats.org/drawingml/2006/main">
-            <a:r>
-              <a:t>→</a:t>
-            </a:r>
-          </a:p>
-          <a:p xmlns:a="http://schemas.openxmlformats.org/drawingml/2006/main">
-            <a:r>
-              <a:t>观察可能误导</a:t>
-            </a:r>
-          </a:p>
-          <a:p xmlns:a="http://schemas.openxmlformats.org/drawingml/2006/main">
-            <a:r>
-              <a:t>停止并记录</a:t>
-            </a:r>
-          </a:p>
-          <a:p xmlns:a="http://schemas.openxmlformats.org/drawingml/2006/main">
-            <a:r>
-              <a:t>阻断错误传播</a:t>
-            </a:r>
-          </a:p>
-          <a:p xmlns:a="http://schemas.openxmlformats.org/drawingml/2006/main">
-            <a:r>
-              <a:t>超时 / 无法解析 / 工具失败 / 越权 / 测试失败</a:t>
-            </a:r>
-          </a:p>
-          <a:p xmlns:a="http://schemas.openxmlformats.org/drawingml/2006/main">
-            <a:r>
-              <a:t>删除失败日志属于伪造实验记录。</a:t>
-            </a:r>
-          </a:p>
-          <a:p xmlns:a="http://schemas.openxmlformats.org/drawingml/2006/main">
-            <a:r>
-              <a:t>```</a:t>
+              <a:t>课堂安排：按本稿下方 90 分钟教学路由安排；此页不另占独立时段。</a:t>
             </a:r>
           </a:p>
           <a:p xmlns:a="http://schemas.openxmlformats.org/drawingml/2006/main">
@@ -4204,7 +2469,12 @@
           </a:p>
           <a:p xmlns:a="http://schemas.openxmlformats.org/drawingml/2006/main">
             <a:r>
-              <a:t>屏显来源页脚：来源：Yao et al., 2023（ReAct）；课程处理口径详见 speaker notes。</a:t>
+              <a:t>[Sources]</a:t>
+            </a:r>
+          </a:p>
+          <a:p xmlns:a="http://schemas.openxmlformats.org/drawingml/2006/main">
+            <a:r>
+              <a:t>直接来源：[正式来源](https://iclr.cc/virtual/2023/poster/11003)。</a:t>
             </a:r>
           </a:p>
           <a:p xmlns:a="http://schemas.openxmlformats.org/drawingml/2006/main">
@@ -4214,12 +2484,7 @@
           </a:p>
           <a:p xmlns:a="http://schemas.openxmlformats.org/drawingml/2006/main">
             <a:r>
-              <a:t>教师讲述：</a:t>
-            </a:r>
-          </a:p>
-          <a:p xmlns:a="http://schemas.openxmlformats.org/drawingml/2006/main">
-            <a:r>
-              <a:t>ReAct 循环说明 Agent 输出必须被核验：错误会在推理、行动、观察任一环节传播并自我强化。任务契约与日志让错误传播可被观察。失败恢复不重试到成功——失败日志与成功结果同等重要，删除失败日志等同于伪造实验记录（沿用 [assessment.md](../../course/assessment.md) 学术规范红线）。</a:t>
+              <a:t>讲义 §二·4 与 §三·4；Yao et al. ReAct ICLR 2023（[reading-list.md](../../course/reading-list.md) 第 10 课）；[assessment.md](../../course/assessment.md) 学术规范红线。</a:t>
             </a:r>
           </a:p>
           <a:p xmlns:a="http://schemas.openxmlformats.org/drawingml/2006/main">
@@ -4229,92 +2494,7 @@
           </a:p>
           <a:p xmlns:a="http://schemas.openxmlformats.org/drawingml/2006/main">
             <a:r>
-              <a:t>学生动作：</a:t>
-            </a:r>
-          </a:p>
-          <a:p xmlns:a="http://schemas.openxmlformats.org/drawingml/2006/main">
-            <a:r>
-              <a:t>让学生检查自己任务契约的失败恢复段是否覆盖超时、越权、测试失败三种情形。</a:t>
-            </a:r>
-          </a:p>
-          <a:p xmlns:a="http://schemas.openxmlformats.org/drawingml/2006/main">
-            <a:r>
-              <a:t/>
-            </a:r>
-          </a:p>
-          <a:p xmlns:a="http://schemas.openxmlformats.org/drawingml/2006/main">
-            <a:r>
-              <a:t>来源与边界：</a:t>
-            </a:r>
-          </a:p>
-          <a:p xmlns:a="http://schemas.openxmlformats.org/drawingml/2006/main">
-            <a:r>
-              <a:t>直接来源：[正式来源](https://iclr.cc/virtual/2023/poster/11003)。</a:t>
-            </a:r>
-          </a:p>
-          <a:p xmlns:a="http://schemas.openxmlformats.org/drawingml/2006/main">
-            <a:r>
-              <a:t/>
-            </a:r>
-          </a:p>
-          <a:p xmlns:a="http://schemas.openxmlformats.org/drawingml/2006/main">
-            <a:r>
-              <a:t>讲义 §二·4 与 §三·4；Yao et al. ReAct ICLR 2023（[reading-list.md](../../course/reading-list.md) 第 10 课）；[assessment.md](../../course/assessment.md) 学术规范红线。</a:t>
-            </a:r>
-          </a:p>
-          <a:p xmlns:a="http://schemas.openxmlformats.org/drawingml/2006/main">
-            <a:r>
-              <a:t/>
-            </a:r>
-          </a:p>
-          <a:p xmlns:a="http://schemas.openxmlformats.org/drawingml/2006/main">
-            <a:r>
-              <a:t>---</a:t>
-            </a:r>
-          </a:p>
-          <a:p xmlns:a="http://schemas.openxmlformats.org/drawingml/2006/main">
-            <a:r>
-              <a:t/>
-            </a:r>
-          </a:p>
-          <a:p xmlns:a="http://schemas.openxmlformats.org/drawingml/2006/main">
-            <a:r>
-              <a:t>[Sources]</a:t>
-            </a:r>
-          </a:p>
-          <a:p xmlns:a="http://schemas.openxmlformats.org/drawingml/2006/main">
-            <a:r>
-              <a:t/>
-            </a:r>
-          </a:p>
-          <a:p xmlns:a="http://schemas.openxmlformats.org/drawingml/2006/main">
-            <a:r>
-              <a:t>- https://iclr.cc/virtual/2023/poster/11003</a:t>
-            </a:r>
-          </a:p>
-          <a:p xmlns:a="http://schemas.openxmlformats.org/drawingml/2006/main">
-            <a:r>
-              <a:t/>
-            </a:r>
-          </a:p>
-          <a:p xmlns:a="http://schemas.openxmlformats.org/drawingml/2006/main">
-            <a:r>
-              <a:t>- 本课 handout.md 与 slides.md</a:t>
-            </a:r>
-          </a:p>
-          <a:p xmlns:a="http://schemas.openxmlformats.org/drawingml/2006/main">
-            <a:r>
-              <a:t/>
-            </a:r>
-          </a:p>
-          <a:p xmlns:a="http://schemas.openxmlformats.org/drawingml/2006/main">
-            <a:r>
-              <a:t>- ../../course/reading-card-case.md</a:t>
-            </a:r>
-          </a:p>
-          <a:p xmlns:a="http://schemas.openxmlformats.org/drawingml/2006/main">
-            <a:r>
-              <a:t/>
+              <a:t>本课 handout.md、judgment-task.md；../../course/judgment-path.md。</a:t>
             </a:r>
           </a:p>
           <a:p xmlns:a="http://schemas.openxmlformats.org/drawingml/2006/main">
@@ -4399,7 +2579,12 @@
           </a:p>
           <a:p xmlns:a="http://schemas.openxmlformats.org/drawingml/2006/main">
             <a:r>
-              <a:t>讲义位置：本课讲义；见逐页母稿映射表</a:t>
+              <a:t>讲述与校准：</a:t>
+            </a:r>
+          </a:p>
+          <a:p xmlns:a="http://schemas.openxmlformats.org/drawingml/2006/main">
+            <a:r>
+              <a:t>用本课真实 generate.diff 检查缺字段是否明确失败，再核对测试是否覆盖这一行为。屏显四项审核不能代替方法判断：baseline 公平性、指标定义与停止条件仍由研究者决定。后续 P14 的完整审查还会核对依赖、Non-goal 与提交说明是否只写事实。</a:t>
             </a:r>
           </a:p>
           <a:p xmlns:a="http://schemas.openxmlformats.org/drawingml/2006/main">
@@ -4409,17 +2594,12 @@
           </a:p>
           <a:p xmlns:a="http://schemas.openxmlformats.org/drawingml/2006/main">
             <a:r>
-              <a:t>屏显核对：</a:t>
-            </a:r>
-          </a:p>
-          <a:p xmlns:a="http://schemas.openxmlformats.org/drawingml/2006/main">
-            <a:r>
-              <a:t>```text</a:t>
-            </a:r>
-          </a:p>
-          <a:p xmlns:a="http://schemas.openxmlformats.org/drawingml/2006/main">
-            <a:r>
-              <a:t>用 diff 与测试审查候选实现</a:t>
+              <a:t>学生动作：</a:t>
+            </a:r>
+          </a:p>
+          <a:p xmlns:a="http://schemas.openxmlformats.org/drawingml/2006/main">
+            <a:r>
+              <a:t>让学生用贯穿案例的 diff 样例对照六项逐项检查。</a:t>
             </a:r>
           </a:p>
           <a:p xmlns:a="http://schemas.openxmlformats.org/drawingml/2006/main">
@@ -4429,72 +2609,7 @@
           </a:p>
           <a:p xmlns:a="http://schemas.openxmlformats.org/drawingml/2006/main">
             <a:r>
-              <a:t>generate.diff｜真实代码</a:t>
-            </a:r>
-          </a:p>
-          <a:p xmlns:a="http://schemas.openxmlformats.org/drawingml/2006/main">
-            <a:r>
-              <a:t>+ REQUIRED_FIELDS = ("paper_id", "summary")</a:t>
-            </a:r>
-          </a:p>
-          <a:p xmlns:a="http://schemas.openxmlformats.org/drawingml/2006/main">
-            <a:r>
-              <a:t>  def normalize_record(record):</a:t>
-            </a:r>
-          </a:p>
-          <a:p xmlns:a="http://schemas.openxmlformats.org/drawingml/2006/main">
-            <a:r>
-              <a:t>+   missing = [field for field in REQUIRED_FIELDS</a:t>
-            </a:r>
-          </a:p>
-          <a:p xmlns:a="http://schemas.openxmlformats.org/drawingml/2006/main">
-            <a:r>
-              <a:t>+              if field not in record]</a:t>
-            </a:r>
-          </a:p>
-          <a:p xmlns:a="http://schemas.openxmlformats.org/drawingml/2006/main">
-            <a:r>
-              <a:t>+   if missing: raise ValueError("missing required fields")</a:t>
-            </a:r>
-          </a:p>
-          <a:p xmlns:a="http://schemas.openxmlformats.org/drawingml/2006/main">
-            <a:r>
-              <a:t>    return {"paper_id": record["paper_id"],</a:t>
-            </a:r>
-          </a:p>
-          <a:p xmlns:a="http://schemas.openxmlformats.org/drawingml/2006/main">
-            <a:r>
-              <a:t>            "summary": record["summary"].strip()}</a:t>
-            </a:r>
-          </a:p>
-          <a:p xmlns:a="http://schemas.openxmlformats.org/drawingml/2006/main">
-            <a:r>
-              <a:t>人工审核</a:t>
-            </a:r>
-          </a:p>
-          <a:p xmlns:a="http://schemas.openxmlformats.org/drawingml/2006/main">
-            <a:r>
-              <a:t>✓ 只改授权文件</a:t>
-            </a:r>
-          </a:p>
-          <a:p xmlns:a="http://schemas.openxmlformats.org/drawingml/2006/main">
-            <a:r>
-              <a:t>✓ 未改评价协议</a:t>
-            </a:r>
-          </a:p>
-          <a:p xmlns:a="http://schemas.openxmlformats.org/drawingml/2006/main">
-            <a:r>
-              <a:t>✓ 缺字段明确失败</a:t>
-            </a:r>
-          </a:p>
-          <a:p xmlns:a="http://schemas.openxmlformats.org/drawingml/2006/main">
-            <a:r>
-              <a:t>✓ 测试覆盖关键路径</a:t>
-            </a:r>
-          </a:p>
-          <a:p xmlns:a="http://schemas.openxmlformats.org/drawingml/2006/main">
-            <a:r>
-              <a:t>```</a:t>
+              <a:t>课堂安排：按本稿下方 90 分钟教学路由安排；此页不另占独立时段。</a:t>
             </a:r>
           </a:p>
           <a:p xmlns:a="http://schemas.openxmlformats.org/drawingml/2006/main">
@@ -4504,7 +2619,12 @@
           </a:p>
           <a:p xmlns:a="http://schemas.openxmlformats.org/drawingml/2006/main">
             <a:r>
-              <a:t>屏显来源页脚：来源：lesson-10/slides.md；课程工件与讲义见 speaker notes。</a:t>
+              <a:t>[Sources]</a:t>
+            </a:r>
+          </a:p>
+          <a:p xmlns:a="http://schemas.openxmlformats.org/drawingml/2006/main">
+            <a:r>
+              <a:t>直接来源：[本课工件](assets/agent-task-example/generate.diff)；[本课工件](assets/agent-task-example/test-output.txt)。</a:t>
             </a:r>
           </a:p>
           <a:p xmlns:a="http://schemas.openxmlformats.org/drawingml/2006/main">
@@ -4514,12 +2634,7 @@
           </a:p>
           <a:p xmlns:a="http://schemas.openxmlformats.org/drawingml/2006/main">
             <a:r>
-              <a:t>教师讲述：</a:t>
-            </a:r>
-          </a:p>
-          <a:p xmlns:a="http://schemas.openxmlformats.org/drawingml/2006/main">
-            <a:r>
-              <a:t>用本课真实 generate.diff 检查缺字段是否明确失败，再核对测试是否覆盖这一行为。屏显四项审核不能代替方法判断：baseline 公平性、指标定义与停止条件仍由研究者决定。后续 P14 的完整审查还会核对依赖、Non-goal 与提交说明是否只写事实。</a:t>
+              <a:t>讲义 §四·1 与 §四·3；第 1 课 §一·2 哪些判断不能外包；[AGENTS.md](../../AGENTS.md) 证据标准。</a:t>
             </a:r>
           </a:p>
           <a:p xmlns:a="http://schemas.openxmlformats.org/drawingml/2006/main">
@@ -4529,82 +2644,7 @@
           </a:p>
           <a:p xmlns:a="http://schemas.openxmlformats.org/drawingml/2006/main">
             <a:r>
-              <a:t>学生动作：</a:t>
-            </a:r>
-          </a:p>
-          <a:p xmlns:a="http://schemas.openxmlformats.org/drawingml/2006/main">
-            <a:r>
-              <a:t>让学生用贯穿案例的 diff 样例对照六项逐项检查。</a:t>
-            </a:r>
-          </a:p>
-          <a:p xmlns:a="http://schemas.openxmlformats.org/drawingml/2006/main">
-            <a:r>
-              <a:t/>
-            </a:r>
-          </a:p>
-          <a:p xmlns:a="http://schemas.openxmlformats.org/drawingml/2006/main">
-            <a:r>
-              <a:t>来源与边界：</a:t>
-            </a:r>
-          </a:p>
-          <a:p xmlns:a="http://schemas.openxmlformats.org/drawingml/2006/main">
-            <a:r>
-              <a:t>直接来源：[本课工件](assets/agent-task-example/generate.diff)；[本课工件](assets/agent-task-example/test-output.txt)。</a:t>
-            </a:r>
-          </a:p>
-          <a:p xmlns:a="http://schemas.openxmlformats.org/drawingml/2006/main">
-            <a:r>
-              <a:t/>
-            </a:r>
-          </a:p>
-          <a:p xmlns:a="http://schemas.openxmlformats.org/drawingml/2006/main">
-            <a:r>
-              <a:t>讲义 §四·1 与 §四·3；第 1 课 §一·2 哪些判断不能外包；[AGENTS.md](../../AGENTS.md) 证据标准。</a:t>
-            </a:r>
-          </a:p>
-          <a:p xmlns:a="http://schemas.openxmlformats.org/drawingml/2006/main">
-            <a:r>
-              <a:t/>
-            </a:r>
-          </a:p>
-          <a:p xmlns:a="http://schemas.openxmlformats.org/drawingml/2006/main">
-            <a:r>
-              <a:t>---</a:t>
-            </a:r>
-          </a:p>
-          <a:p xmlns:a="http://schemas.openxmlformats.org/drawingml/2006/main">
-            <a:r>
-              <a:t/>
-            </a:r>
-          </a:p>
-          <a:p xmlns:a="http://schemas.openxmlformats.org/drawingml/2006/main">
-            <a:r>
-              <a:t>[Sources]</a:t>
-            </a:r>
-          </a:p>
-          <a:p xmlns:a="http://schemas.openxmlformats.org/drawingml/2006/main">
-            <a:r>
-              <a:t/>
-            </a:r>
-          </a:p>
-          <a:p xmlns:a="http://schemas.openxmlformats.org/drawingml/2006/main">
-            <a:r>
-              <a:t>- 本课 handout.md 与 slides.md</a:t>
-            </a:r>
-          </a:p>
-          <a:p xmlns:a="http://schemas.openxmlformats.org/drawingml/2006/main">
-            <a:r>
-              <a:t/>
-            </a:r>
-          </a:p>
-          <a:p xmlns:a="http://schemas.openxmlformats.org/drawingml/2006/main">
-            <a:r>
-              <a:t>- ../../course/reading-card-case.md</a:t>
-            </a:r>
-          </a:p>
-          <a:p xmlns:a="http://schemas.openxmlformats.org/drawingml/2006/main">
-            <a:r>
-              <a:t/>
+              <a:t>本课 handout.md、judgment-task.md；../../course/judgment-path.md。</a:t>
             </a:r>
           </a:p>
           <a:p xmlns:a="http://schemas.openxmlformats.org/drawingml/2006/main">
@@ -4689,7 +2729,12 @@
           </a:p>
           <a:p xmlns:a="http://schemas.openxmlformats.org/drawingml/2006/main">
             <a:r>
-              <a:t>讲义位置：本课讲义；见逐页母稿映射表</a:t>
+              <a:t>讲述与校准：</a:t>
+            </a:r>
+          </a:p>
+          <a:p xmlns:a="http://schemas.openxmlformats.org/drawingml/2006/main">
+            <a:r>
+              <a:t>三区分决定 Agent 提议能否进入当前实验版本。根因修复必须保留失败日志、diff 与根因分析；绕过建议应被拒绝并留痕；评价协议或 baseline 改动必须退出调试任务，作为新研究决定审核。强调技术失败与规范红线的边界。</a:t>
             </a:r>
           </a:p>
           <a:p xmlns:a="http://schemas.openxmlformats.org/drawingml/2006/main">
@@ -4699,17 +2744,12 @@
           </a:p>
           <a:p xmlns:a="http://schemas.openxmlformats.org/drawingml/2006/main">
             <a:r>
-              <a:t>屏显核对：</a:t>
-            </a:r>
-          </a:p>
-          <a:p xmlns:a="http://schemas.openxmlformats.org/drawingml/2006/main">
-            <a:r>
-              <a:t>```text</a:t>
-            </a:r>
-          </a:p>
-          <a:p xmlns:a="http://schemas.openxmlformats.org/drawingml/2006/main">
-            <a:r>
-              <a:t>进入项目的修改需要根因与验证证据</a:t>
+              <a:t>学生动作：</a:t>
+            </a:r>
+          </a:p>
+          <a:p xmlns:a="http://schemas.openxmlformats.org/drawingml/2006/main">
+            <a:r>
+              <a:t>让学生判断三段 diff 样例各属哪一类（教师提供）。</a:t>
             </a:r>
           </a:p>
           <a:p xmlns:a="http://schemas.openxmlformats.org/drawingml/2006/main">
@@ -4719,92 +2759,7 @@
           </a:p>
           <a:p xmlns:a="http://schemas.openxmlformats.org/drawingml/2006/main">
             <a:r>
-              <a:t>候选修改</a:t>
-            </a:r>
-          </a:p>
-          <a:p xmlns:a="http://schemas.openxmlformats.org/drawingml/2006/main">
-            <a:r>
-              <a:t>→</a:t>
-            </a:r>
-          </a:p>
-          <a:p xmlns:a="http://schemas.openxmlformats.org/drawingml/2006/main">
-            <a:r>
-              <a:t>Agent 建议</a:t>
-            </a:r>
-          </a:p>
-          <a:p xmlns:a="http://schemas.openxmlformats.org/drawingml/2006/main">
-            <a:r>
-              <a:t>根因修复</a:t>
-            </a:r>
-          </a:p>
-          <a:p xmlns:a="http://schemas.openxmlformats.org/drawingml/2006/main">
-            <a:r>
-              <a:t>→</a:t>
-            </a:r>
-          </a:p>
-          <a:p xmlns:a="http://schemas.openxmlformats.org/drawingml/2006/main">
-            <a:r>
-              <a:t>保留失败与 diff</a:t>
-            </a:r>
-          </a:p>
-          <a:p xmlns:a="http://schemas.openxmlformats.org/drawingml/2006/main">
-            <a:r>
-              <a:t>测试 + 人工核验</a:t>
-            </a:r>
-          </a:p>
-          <a:p xmlns:a="http://schemas.openxmlformats.org/drawingml/2006/main">
-            <a:r>
-              <a:t>→</a:t>
-            </a:r>
-          </a:p>
-          <a:p xmlns:a="http://schemas.openxmlformats.org/drawingml/2006/main">
-            <a:r>
-              <a:t>方法边界仍人工判断</a:t>
-            </a:r>
-          </a:p>
-          <a:p xmlns:a="http://schemas.openxmlformats.org/drawingml/2006/main">
-            <a:r>
-              <a:t>进入项目</a:t>
-            </a:r>
-          </a:p>
-          <a:p xmlns:a="http://schemas.openxmlformats.org/drawingml/2006/main">
-            <a:r>
-              <a:t>可追溯</a:t>
-            </a:r>
-          </a:p>
-          <a:p xmlns:a="http://schemas.openxmlformats.org/drawingml/2006/main">
-            <a:r>
-              <a:t>不能进入当前实验版本</a:t>
-            </a:r>
-          </a:p>
-          <a:p xmlns:a="http://schemas.openxmlformats.org/drawingml/2006/main">
-            <a:r>
-              <a:t>正确处置</a:t>
-            </a:r>
-          </a:p>
-          <a:p xmlns:a="http://schemas.openxmlformats.org/drawingml/2006/main">
-            <a:r>
-              <a:t>— 绕过失败：注释断言、跳过测试</a:t>
-            </a:r>
-          </a:p>
-          <a:p xmlns:a="http://schemas.openxmlformats.org/drawingml/2006/main">
-            <a:r>
-              <a:t>— 污染实验：改 rubric、数据划分或 baseline</a:t>
-            </a:r>
-          </a:p>
-          <a:p xmlns:a="http://schemas.openxmlformats.org/drawingml/2006/main">
-            <a:r>
-              <a:t>— 被拒绝候选仍留痕</a:t>
-            </a:r>
-          </a:p>
-          <a:p xmlns:a="http://schemas.openxmlformats.org/drawingml/2006/main">
-            <a:r>
-              <a:t>— 退出调试任务，进入研究决定审核</a:t>
-            </a:r>
-          </a:p>
-          <a:p xmlns:a="http://schemas.openxmlformats.org/drawingml/2006/main">
-            <a:r>
-              <a:t>```</a:t>
+              <a:t>课堂安排：按本稿下方 90 分钟教学路由安排；此页不另占独立时段。</a:t>
             </a:r>
           </a:p>
           <a:p xmlns:a="http://schemas.openxmlformats.org/drawingml/2006/main">
@@ -4814,7 +2769,12 @@
           </a:p>
           <a:p xmlns:a="http://schemas.openxmlformats.org/drawingml/2006/main">
             <a:r>
-              <a:t>屏显来源页脚：来源：lesson-10/slides.md；课程工件与讲义见 speaker notes。</a:t>
+              <a:t>[Sources]</a:t>
+            </a:r>
+          </a:p>
+          <a:p xmlns:a="http://schemas.openxmlformats.org/drawingml/2006/main">
+            <a:r>
+              <a:t>讲义 §四·2；[assessment.md](../../course/assessment.md) 学术规范红线。</a:t>
             </a:r>
           </a:p>
           <a:p xmlns:a="http://schemas.openxmlformats.org/drawingml/2006/main">
@@ -4824,87 +2784,7 @@
           </a:p>
           <a:p xmlns:a="http://schemas.openxmlformats.org/drawingml/2006/main">
             <a:r>
-              <a:t>教师讲述：</a:t>
-            </a:r>
-          </a:p>
-          <a:p xmlns:a="http://schemas.openxmlformats.org/drawingml/2006/main">
-            <a:r>
-              <a:t>三区分决定 Agent 提议能否进入当前实验版本。根因修复必须保留失败日志、diff 与根因分析；绕过建议应被拒绝并留痕；评价协议或 baseline 改动必须退出调试任务，作为新研究决定审核。强调技术失败与规范红线的边界。</a:t>
-            </a:r>
-          </a:p>
-          <a:p xmlns:a="http://schemas.openxmlformats.org/drawingml/2006/main">
-            <a:r>
-              <a:t/>
-            </a:r>
-          </a:p>
-          <a:p xmlns:a="http://schemas.openxmlformats.org/drawingml/2006/main">
-            <a:r>
-              <a:t>学生动作：</a:t>
-            </a:r>
-          </a:p>
-          <a:p xmlns:a="http://schemas.openxmlformats.org/drawingml/2006/main">
-            <a:r>
-              <a:t>让学生判断三段 diff 样例各属哪一类（教师提供）。</a:t>
-            </a:r>
-          </a:p>
-          <a:p xmlns:a="http://schemas.openxmlformats.org/drawingml/2006/main">
-            <a:r>
-              <a:t/>
-            </a:r>
-          </a:p>
-          <a:p xmlns:a="http://schemas.openxmlformats.org/drawingml/2006/main">
-            <a:r>
-              <a:t>来源与边界：</a:t>
-            </a:r>
-          </a:p>
-          <a:p xmlns:a="http://schemas.openxmlformats.org/drawingml/2006/main">
-            <a:r>
-              <a:t>讲义 §四·2；[assessment.md](../../course/assessment.md) 学术规范红线。</a:t>
-            </a:r>
-          </a:p>
-          <a:p xmlns:a="http://schemas.openxmlformats.org/drawingml/2006/main">
-            <a:r>
-              <a:t/>
-            </a:r>
-          </a:p>
-          <a:p xmlns:a="http://schemas.openxmlformats.org/drawingml/2006/main">
-            <a:r>
-              <a:t>---</a:t>
-            </a:r>
-          </a:p>
-          <a:p xmlns:a="http://schemas.openxmlformats.org/drawingml/2006/main">
-            <a:r>
-              <a:t/>
-            </a:r>
-          </a:p>
-          <a:p xmlns:a="http://schemas.openxmlformats.org/drawingml/2006/main">
-            <a:r>
-              <a:t>[Sources]</a:t>
-            </a:r>
-          </a:p>
-          <a:p xmlns:a="http://schemas.openxmlformats.org/drawingml/2006/main">
-            <a:r>
-              <a:t/>
-            </a:r>
-          </a:p>
-          <a:p xmlns:a="http://schemas.openxmlformats.org/drawingml/2006/main">
-            <a:r>
-              <a:t>- 本课 handout.md 与 slides.md</a:t>
-            </a:r>
-          </a:p>
-          <a:p xmlns:a="http://schemas.openxmlformats.org/drawingml/2006/main">
-            <a:r>
-              <a:t/>
-            </a:r>
-          </a:p>
-          <a:p xmlns:a="http://schemas.openxmlformats.org/drawingml/2006/main">
-            <a:r>
-              <a:t>- ../../course/reading-card-case.md</a:t>
-            </a:r>
-          </a:p>
-          <a:p xmlns:a="http://schemas.openxmlformats.org/drawingml/2006/main">
-            <a:r>
-              <a:t/>
+              <a:t>本课 handout.md、judgment-task.md；../../course/judgment-path.md。</a:t>
             </a:r>
           </a:p>
           <a:p xmlns:a="http://schemas.openxmlformats.org/drawingml/2006/main">
@@ -9985,35 +7865,55 @@
       </p:grpSpPr>
       <p:sp>
         <p:nvSpPr>
-          <p:cNvPr id="4" name="Text Placeholder 3">
-            <a:extLst xmlns:a="http://schemas.openxmlformats.org/drawingml/2006/main">
-              <a:ext uri="{FF2B5EF4-FFF2-40B4-BE49-F238E27FC236}">
-                <a16:creationId xmlns:a16="http://schemas.microsoft.com/office/drawing/2014/main" id="{4D941B40-7A0A-534E-3563-CA11753C8E3F}"/>
-              </a:ext>
-            </a:extLst>
-          </p:cNvPr>
-          <p:cNvSpPr>
-            <a:spLocks xmlns:a="http://schemas.openxmlformats.org/drawingml/2006/main" noGrp="1"/>
-          </p:cNvSpPr>
-          <p:nvPr>
-            <p:ph type="body" idx="14"/>
-          </p:nvPr>
-        </p:nvSpPr>
-        <p:spPr>
-          <a:xfrm xmlns:a="http://schemas.openxmlformats.org/drawingml/2006/main">
-            <a:off x="1028700" y="57150"/>
-            <a:ext cx="10668000" cy="571500"/>
-          </a:xfrm>
-        </p:spPr>
-        <p:txBody>
-          <a:bodyPr xmlns:a="http://schemas.openxmlformats.org/drawingml/2006/main" lIns="0" tIns="0" rIns="0" bIns="0" anchor="ctr"/>
-          <a:lstStyle xmlns:a="http://schemas.openxmlformats.org/drawingml/2006/main"/>
+          <p:cNvPr id="7" name="judgment-title">
+            <a:extLst xmlns:a="http://schemas.openxmlformats.org/drawingml/2006/main">
+              <a:ext uri="{FF2B5EF4-FFF2-40B4-BE49-F238E27FC236}">
+                <a16:creationId xmlns:a16="http://schemas.microsoft.com/office/drawing/2014/main" id="{0A91B0B9-4E4A-4366-9CDC-12658DA8B8FA}"/>
+              </a:ext>
+            </a:extLst>
+          </p:cNvPr>
+          <p:cNvSpPr>
+            <a:spLocks xmlns:a="http://schemas.openxmlformats.org/drawingml/2006/main" noGrp="1"/>
+          </p:cNvSpPr>
+          <p:nvPr/>
+        </p:nvSpPr>
+        <p:spPr>
+          <a:xfrm xmlns:a="http://schemas.openxmlformats.org/drawingml/2006/main">
+            <a:off x="1028700" y="76200"/>
+            <a:ext cx="10687050" cy="514350"/>
+          </a:xfrm>
+          <a:prstGeom xmlns:a="http://schemas.openxmlformats.org/drawingml/2006/main" prst="rect">
+            <a:avLst/>
+          </a:prstGeom>
+          <a:noFill xmlns:a="http://schemas.openxmlformats.org/drawingml/2006/main"/>
+          <a:ln xmlns:a="http://schemas.openxmlformats.org/drawingml/2006/main" w="0">
+            <a:noFill/>
+          </a:ln>
+        </p:spPr>
+        <p:txBody>
+          <a:bodyPr xmlns:a="http://schemas.openxmlformats.org/drawingml/2006/main" lIns="0" tIns="0" rIns="0" bIns="0" anchor="t"/>
+          <a:lstStyle xmlns:a="http://schemas.openxmlformats.org/drawingml/2006/main">
+            <a:defPPr algn="l">
+              <a:defRPr sz="3000" b="1">
+                <a:solidFill>
+                  <a:srgbClr val="FFFFFF"/>
+                </a:solidFill>
+                <a:latin typeface="微软雅黑"/>
+                <a:ea typeface="微软雅黑"/>
+                <a:cs typeface="微软雅黑"/>
+              </a:defRPr>
+            </a:defPPr>
+          </a:lstStyle>
           <a:p xmlns:a="http://schemas.openxmlformats.org/drawingml/2006/main">
             <a:pPr algn="l">
-              <a:lnSpc>
-                <a:spcPct val="118000"/>
-              </a:lnSpc>
-              <a:buNone/>
+              <a:defRPr sz="3000" b="1">
+                <a:solidFill>
+                  <a:srgbClr val="FFFFFF"/>
+                </a:solidFill>
+                <a:latin typeface="微软雅黑"/>
+                <a:ea typeface="微软雅黑"/>
+                <a:cs typeface="微软雅黑"/>
+              </a:defRPr>
             </a:pPr>
             <a:r>
               <a:rPr sz="3000" b="1">
@@ -10024,1010 +7924,337 @@
                 <a:ea typeface="微软雅黑"/>
                 <a:cs typeface="微软雅黑"/>
               </a:rPr>
-              <a:t>把一个 Agent 步骤改写为受限任务</a:t>
-            </a:r>
-            <a:endParaRPr/>
-          </a:p>
-        </p:txBody>
-      </p:sp>
-      <p:sp>
-        <p:nvSpPr>
-          <p:cNvPr id="5" name="Slide Number Placeholder 4">
-            <a:extLst xmlns:a="http://schemas.openxmlformats.org/drawingml/2006/main">
-              <a:ext uri="{FF2B5EF4-FFF2-40B4-BE49-F238E27FC236}">
-                <a16:creationId xmlns:a16="http://schemas.microsoft.com/office/drawing/2014/main" id="{EBA5909F-738E-F60C-BE8C-B3F1D94548E5}"/>
-              </a:ext>
-            </a:extLst>
-          </p:cNvPr>
-          <p:cNvSpPr>
-            <a:spLocks xmlns:a="http://schemas.openxmlformats.org/drawingml/2006/main" noGrp="1"/>
-          </p:cNvSpPr>
-          <p:nvPr>
-            <p:ph type="sldNum" idx="10"/>
-          </p:nvPr>
-        </p:nvSpPr>
-        <p:spPr/>
-        <p:txBody>
-          <a:bodyPr xmlns:a="http://schemas.openxmlformats.org/drawingml/2006/main"/>
-          <a:lstStyle xmlns:a="http://schemas.openxmlformats.org/drawingml/2006/main"/>
-          <a:p xmlns:a="http://schemas.openxmlformats.org/drawingml/2006/main">
-            <a:fld id="{2DD23107-4986-8758-3A93-3D74F35908CC}" type="slidenum">
+              <a:t>本人项目：决定、核验与回写</a:t>
+            </a:r>
+          </a:p>
+        </p:txBody>
+      </p:sp>
+      <p:sp>
+        <p:nvSpPr>
+          <p:cNvPr id="2" name="judgment-body-0">
+            <a:extLst xmlns:a="http://schemas.openxmlformats.org/drawingml/2006/main">
+              <a:ext uri="{FF2B5EF4-FFF2-40B4-BE49-F238E27FC236}">
+                <a16:creationId xmlns:a16="http://schemas.microsoft.com/office/drawing/2014/main" id="{B2EEE9E9-B64B-459A-ABDF-8B57E83897B8}"/>
+              </a:ext>
+            </a:extLst>
+          </p:cNvPr>
+          <p:cNvSpPr>
+            <a:spLocks xmlns:a="http://schemas.openxmlformats.org/drawingml/2006/main" noGrp="1"/>
+          </p:cNvSpPr>
+          <p:nvPr/>
+        </p:nvSpPr>
+        <p:spPr>
+          <a:xfrm xmlns:a="http://schemas.openxmlformats.org/drawingml/2006/main">
+            <a:off x="666750" y="1066800"/>
+            <a:ext cx="10858500" cy="1476375"/>
+          </a:xfrm>
+          <a:prstGeom xmlns:a="http://schemas.openxmlformats.org/drawingml/2006/main" prst="rect">
+            <a:avLst/>
+          </a:prstGeom>
+          <a:noFill xmlns:a="http://schemas.openxmlformats.org/drawingml/2006/main"/>
+          <a:ln xmlns:a="http://schemas.openxmlformats.org/drawingml/2006/main" w="0">
+            <a:noFill/>
+          </a:ln>
+        </p:spPr>
+        <p:txBody>
+          <a:bodyPr xmlns:a="http://schemas.openxmlformats.org/drawingml/2006/main" lIns="0" tIns="0" rIns="0" bIns="0" anchor="t"/>
+          <a:lstStyle xmlns:a="http://schemas.openxmlformats.org/drawingml/2006/main">
+            <a:defPPr algn="l">
+              <a:defRPr sz="2400" b="0">
+                <a:solidFill>
+                  <a:srgbClr val="263746"/>
+                </a:solidFill>
+                <a:latin typeface="微软雅黑"/>
+                <a:ea typeface="微软雅黑"/>
+                <a:cs typeface="微软雅黑"/>
+              </a:defRPr>
+            </a:defPPr>
+          </a:lstStyle>
+          <a:p xmlns:a="http://schemas.openxmlformats.org/drawingml/2006/main">
+            <a:pPr algn="l">
+              <a:defRPr sz="2400" b="0">
+                <a:solidFill>
+                  <a:srgbClr val="263746"/>
+                </a:solidFill>
+                <a:latin typeface="微软雅黑"/>
+                <a:ea typeface="微软雅黑"/>
+                <a:cs typeface="微软雅黑"/>
+              </a:defRPr>
+            </a:pPr>
+            <a:r>
+              <a:rPr sz="2400" b="0">
+                <a:solidFill>
+                  <a:srgbClr val="263746"/>
+                </a:solidFill>
+                <a:latin typeface="微软雅黑"/>
+                <a:ea typeface="微软雅黑"/>
+                <a:cs typeface="微软雅黑"/>
+              </a:rPr>
+              <a:t>从现有 normalize_record 示例或本人同规模动作出发，先冻结正常/缺字段/空值/类型用例，再实际修改一个模块。与 baseline 在相同输入上比较，保留旧失败和新结果。</a:t>
+            </a:r>
+          </a:p>
+        </p:txBody>
+      </p:sp>
+      <p:sp>
+        <p:nvSpPr>
+          <p:cNvPr id="3" name="judgment-body-1">
+            <a:extLst xmlns:a="http://schemas.openxmlformats.org/drawingml/2006/main">
+              <a:ext uri="{FF2B5EF4-FFF2-40B4-BE49-F238E27FC236}">
+                <a16:creationId xmlns:a16="http://schemas.microsoft.com/office/drawing/2014/main" id="{256C5C81-8AC2-4F27-A644-890BD3D17CF0}"/>
+              </a:ext>
+            </a:extLst>
+          </p:cNvPr>
+          <p:cNvSpPr>
+            <a:spLocks xmlns:a="http://schemas.openxmlformats.org/drawingml/2006/main" noGrp="1"/>
+          </p:cNvSpPr>
+          <p:nvPr/>
+        </p:nvSpPr>
+        <p:spPr>
+          <a:xfrm xmlns:a="http://schemas.openxmlformats.org/drawingml/2006/main">
+            <a:off x="666750" y="2724150"/>
+            <a:ext cx="10858500" cy="1524000"/>
+          </a:xfrm>
+          <a:prstGeom xmlns:a="http://schemas.openxmlformats.org/drawingml/2006/main" prst="rect">
+            <a:avLst/>
+          </a:prstGeom>
+          <a:noFill xmlns:a="http://schemas.openxmlformats.org/drawingml/2006/main"/>
+          <a:ln xmlns:a="http://schemas.openxmlformats.org/drawingml/2006/main" w="0">
+            <a:noFill/>
+          </a:ln>
+        </p:spPr>
+        <p:txBody>
+          <a:bodyPr xmlns:a="http://schemas.openxmlformats.org/drawingml/2006/main" lIns="0" tIns="0" rIns="0" bIns="0" anchor="t"/>
+          <a:lstStyle xmlns:a="http://schemas.openxmlformats.org/drawingml/2006/main">
+            <a:defPPr algn="l">
+              <a:defRPr sz="2400" b="0">
+                <a:solidFill>
+                  <a:srgbClr val="263746"/>
+                </a:solidFill>
+                <a:latin typeface="微软雅黑"/>
+                <a:ea typeface="微软雅黑"/>
+                <a:cs typeface="微软雅黑"/>
+              </a:defRPr>
+            </a:defPPr>
+          </a:lstStyle>
+          <a:p xmlns:a="http://schemas.openxmlformats.org/drawingml/2006/main">
+            <a:pPr algn="l">
+              <a:defRPr sz="2400" b="0">
+                <a:solidFill>
+                  <a:srgbClr val="263746"/>
+                </a:solidFill>
+                <a:latin typeface="微软雅黑"/>
+                <a:ea typeface="微软雅黑"/>
+                <a:cs typeface="微软雅黑"/>
+              </a:defRPr>
+            </a:pPr>
+            <a:r>
+              <a:rPr sz="2400" b="0">
+                <a:solidFill>
+                  <a:srgbClr val="263746"/>
+                </a:solidFill>
+                <a:latin typeface="微软雅黑"/>
+                <a:ea typeface="微软雅黑"/>
+                <a:cs typeface="微软雅黑"/>
+              </a:rPr>
+              <a:t>检查 diff 仅在授权实现与本人新增行为测试内；gold/既有评价只读。若 AI 给出补丁，人工逐项审核；仅抄 after 示例不足以覆盖空值与类型。</a:t>
+            </a:r>
+          </a:p>
+        </p:txBody>
+      </p:sp>
+      <p:sp>
+        <p:nvSpPr>
+          <p:cNvPr id="4" name="judgment-body-2">
+            <a:extLst xmlns:a="http://schemas.openxmlformats.org/drawingml/2006/main">
+              <a:ext uri="{FF2B5EF4-FFF2-40B4-BE49-F238E27FC236}">
+                <a16:creationId xmlns:a16="http://schemas.microsoft.com/office/drawing/2014/main" id="{5EC8F7D3-6E30-4077-B864-C83C1DAF27B4}"/>
+              </a:ext>
+            </a:extLst>
+          </p:cNvPr>
+          <p:cNvSpPr>
+            <a:spLocks xmlns:a="http://schemas.openxmlformats.org/drawingml/2006/main" noGrp="1"/>
+          </p:cNvSpPr>
+          <p:nvPr/>
+        </p:nvSpPr>
+        <p:spPr>
+          <a:xfrm xmlns:a="http://schemas.openxmlformats.org/drawingml/2006/main">
+            <a:off x="666750" y="4457700"/>
+            <a:ext cx="10858500" cy="1466850"/>
+          </a:xfrm>
+          <a:prstGeom xmlns:a="http://schemas.openxmlformats.org/drawingml/2006/main" prst="rect">
+            <a:avLst/>
+          </a:prstGeom>
+          <a:noFill xmlns:a="http://schemas.openxmlformats.org/drawingml/2006/main"/>
+          <a:ln xmlns:a="http://schemas.openxmlformats.org/drawingml/2006/main" w="0">
+            <a:noFill/>
+          </a:ln>
+        </p:spPr>
+        <p:txBody>
+          <a:bodyPr xmlns:a="http://schemas.openxmlformats.org/drawingml/2006/main" lIns="0" tIns="0" rIns="0" bIns="0" anchor="t"/>
+          <a:lstStyle xmlns:a="http://schemas.openxmlformats.org/drawingml/2006/main">
+            <a:defPPr algn="l">
+              <a:defRPr sz="2200" b="0">
+                <a:solidFill>
+                  <a:srgbClr val="1F4D78"/>
+                </a:solidFill>
+                <a:latin typeface="微软雅黑"/>
+                <a:ea typeface="微软雅黑"/>
+                <a:cs typeface="微软雅黑"/>
+              </a:defRPr>
+            </a:defPPr>
+          </a:lstStyle>
+          <a:p xmlns:a="http://schemas.openxmlformats.org/drawingml/2006/main">
+            <a:pPr algn="l">
+              <a:defRPr sz="2200" b="0">
+                <a:solidFill>
+                  <a:srgbClr val="1F4D78"/>
+                </a:solidFill>
+                <a:latin typeface="微软雅黑"/>
+                <a:ea typeface="微软雅黑"/>
+                <a:cs typeface="微软雅黑"/>
+              </a:defRPr>
+            </a:pPr>
+            <a:r>
+              <a:rPr sz="2200" b="0">
+                <a:solidFill>
+                  <a:srgbClr val="1F4D78"/>
+                </a:solidFill>
+                <a:latin typeface="微软雅黑"/>
+                <a:ea typeface="微软雅黑"/>
+                <a:cs typeface="微软雅黑"/>
+              </a:rPr>
+              <a:t>保存：受限补丁、失败用例、测试结果、trace 与人工决定</a:t>
+            </a:r>
+          </a:p>
+        </p:txBody>
+      </p:sp>
+      <p:sp>
+        <p:nvSpPr>
+          <p:cNvPr id="5" name="judgment-source">
+            <a:extLst xmlns:a="http://schemas.openxmlformats.org/drawingml/2006/main">
+              <a:ext uri="{FF2B5EF4-FFF2-40B4-BE49-F238E27FC236}">
+                <a16:creationId xmlns:a16="http://schemas.microsoft.com/office/drawing/2014/main" id="{5DB9C838-0CFC-4B48-8ED0-7A30849A17A8}"/>
+              </a:ext>
+            </a:extLst>
+          </p:cNvPr>
+          <p:cNvSpPr>
+            <a:spLocks xmlns:a="http://schemas.openxmlformats.org/drawingml/2006/main" noGrp="1"/>
+          </p:cNvSpPr>
+          <p:nvPr/>
+        </p:nvSpPr>
+        <p:spPr>
+          <a:xfrm xmlns:a="http://schemas.openxmlformats.org/drawingml/2006/main">
+            <a:off x="666750" y="6276975"/>
+            <a:ext cx="10572750" cy="209550"/>
+          </a:xfrm>
+          <a:prstGeom xmlns:a="http://schemas.openxmlformats.org/drawingml/2006/main" prst="rect">
+            <a:avLst/>
+          </a:prstGeom>
+          <a:noFill xmlns:a="http://schemas.openxmlformats.org/drawingml/2006/main"/>
+          <a:ln xmlns:a="http://schemas.openxmlformats.org/drawingml/2006/main" w="0">
+            <a:noFill/>
+          </a:ln>
+        </p:spPr>
+        <p:txBody>
+          <a:bodyPr xmlns:a="http://schemas.openxmlformats.org/drawingml/2006/main" lIns="0" tIns="0" rIns="0" bIns="0" anchor="t"/>
+          <a:lstStyle xmlns:a="http://schemas.openxmlformats.org/drawingml/2006/main">
+            <a:defPPr algn="l">
+              <a:defRPr sz="1100" b="0">
+                <a:solidFill>
+                  <a:srgbClr val="667684"/>
+                </a:solidFill>
+                <a:latin typeface="微软雅黑"/>
+                <a:ea typeface="微软雅黑"/>
+                <a:cs typeface="微软雅黑"/>
+              </a:defRPr>
+            </a:defPPr>
+          </a:lstStyle>
+          <a:p xmlns:a="http://schemas.openxmlformats.org/drawingml/2006/main">
+            <a:pPr algn="l">
+              <a:defRPr sz="1100" b="0">
+                <a:solidFill>
+                  <a:srgbClr val="667684"/>
+                </a:solidFill>
+                <a:latin typeface="微软雅黑"/>
+                <a:ea typeface="微软雅黑"/>
+                <a:cs typeface="微软雅黑"/>
+              </a:defRPr>
+            </a:pPr>
+            <a:r>
+              <a:rPr sz="1100" b="0">
+                <a:solidFill>
+                  <a:srgbClr val="667684"/>
+                </a:solidFill>
+                <a:latin typeface="微软雅黑"/>
+                <a:ea typeface="微软雅黑"/>
+                <a:cs typeface="微软雅黑"/>
+              </a:rPr>
+              <a:t>来源：本课判断任务与讲义；构造材料及真实来源按材料包标识</a:t>
+            </a:r>
+          </a:p>
+        </p:txBody>
+      </p:sp>
+      <p:sp>
+        <p:nvSpPr>
+          <p:cNvPr id="6" name="judgment-page">
+            <a:extLst xmlns:a="http://schemas.openxmlformats.org/drawingml/2006/main">
+              <a:ext uri="{FF2B5EF4-FFF2-40B4-BE49-F238E27FC236}">
+                <a16:creationId xmlns:a16="http://schemas.microsoft.com/office/drawing/2014/main" id="{EDA78CCC-7014-47DE-943B-C46441D44886}"/>
+              </a:ext>
+            </a:extLst>
+          </p:cNvPr>
+          <p:cNvSpPr>
+            <a:spLocks xmlns:a="http://schemas.openxmlformats.org/drawingml/2006/main" noGrp="1"/>
+          </p:cNvSpPr>
+          <p:nvPr/>
+        </p:nvSpPr>
+        <p:spPr>
+          <a:xfrm xmlns:a="http://schemas.openxmlformats.org/drawingml/2006/main">
+            <a:off x="11715750" y="6562725"/>
+            <a:ext cx="238125" cy="171450"/>
+          </a:xfrm>
+          <a:prstGeom xmlns:a="http://schemas.openxmlformats.org/drawingml/2006/main" prst="rect">
+            <a:avLst/>
+          </a:prstGeom>
+          <a:noFill xmlns:a="http://schemas.openxmlformats.org/drawingml/2006/main"/>
+          <a:ln xmlns:a="http://schemas.openxmlformats.org/drawingml/2006/main" w="0">
+            <a:noFill/>
+          </a:ln>
+        </p:spPr>
+        <p:txBody>
+          <a:bodyPr xmlns:a="http://schemas.openxmlformats.org/drawingml/2006/main" lIns="0" tIns="0" rIns="0" bIns="0" anchor="t"/>
+          <a:lstStyle xmlns:a="http://schemas.openxmlformats.org/drawingml/2006/main">
+            <a:defPPr algn="l">
+              <a:defRPr sz="900" b="0">
+                <a:solidFill>
+                  <a:srgbClr val="A5A5A5"/>
+                </a:solidFill>
+                <a:latin typeface="微软雅黑"/>
+                <a:ea typeface="微软雅黑"/>
+                <a:cs typeface="微软雅黑"/>
+              </a:defRPr>
+            </a:defPPr>
+          </a:lstStyle>
+          <a:p xmlns:a="http://schemas.openxmlformats.org/drawingml/2006/main">
+            <a:pPr algn="l">
+              <a:defRPr sz="900" b="0">
+                <a:solidFill>
+                  <a:srgbClr val="A5A5A5"/>
+                </a:solidFill>
+                <a:latin typeface="微软雅黑"/>
+                <a:ea typeface="微软雅黑"/>
+                <a:cs typeface="微软雅黑"/>
+              </a:defRPr>
+            </a:pPr>
+            <a:r>
+              <a:rPr sz="900" b="0">
+                <a:solidFill>
+                  <a:srgbClr val="A5A5A5"/>
+                </a:solidFill>
+                <a:latin typeface="微软雅黑"/>
+                <a:ea typeface="微软雅黑"/>
+                <a:cs typeface="微软雅黑"/>
+              </a:rPr>
               <a:t>13</a:t>
-            </a:fld>
-            <a:endParaRPr/>
-          </a:p>
-        </p:txBody>
-      </p:sp>
-      <p:sp>
-        <p:nvSpPr>
-          <p:cNvPr id="6" name="brand-header">
-            <a:extLst xmlns:a="http://schemas.openxmlformats.org/drawingml/2006/main">
-              <a:ext uri="{FF2B5EF4-FFF2-40B4-BE49-F238E27FC236}">
-                <a16:creationId xmlns:a16="http://schemas.microsoft.com/office/drawing/2014/main" id="{100DA78C-614B-497D-9E0B-65878D4B2905}"/>
-              </a:ext>
-            </a:extLst>
-          </p:cNvPr>
-          <p:cNvSpPr>
-            <a:spLocks xmlns:a="http://schemas.openxmlformats.org/drawingml/2006/main" noGrp="1"/>
-          </p:cNvSpPr>
-          <p:nvPr/>
-        </p:nvSpPr>
-        <p:spPr>
-          <a:xfrm xmlns:a="http://schemas.openxmlformats.org/drawingml/2006/main">
-            <a:off x="0" y="0"/>
-            <a:ext cx="11887200" cy="685800"/>
-          </a:xfrm>
-          <a:prstGeom xmlns:a="http://schemas.openxmlformats.org/drawingml/2006/main" prst="rect">
-            <a:avLst/>
-          </a:prstGeom>
-          <a:solidFill xmlns:a="http://schemas.openxmlformats.org/drawingml/2006/main">
-            <a:srgbClr val="C8161E"/>
-          </a:solidFill>
-          <a:ln xmlns:a="http://schemas.openxmlformats.org/drawingml/2006/main" w="0">
-            <a:noFill/>
-          </a:ln>
-        </p:spPr>
-      </p:sp>
-      <p:pic>
-        <p:nvPicPr>
-          <p:cNvPr id="28" name=""/>
-          <p:cNvPicPr>
-            <a:picLocks xmlns:a="http://schemas.openxmlformats.org/drawingml/2006/main" noChangeAspect="1"/>
-          </p:cNvPicPr>
-          <p:nvPr/>
-        </p:nvPicPr>
-        <p:blipFill>
-          <a:blip xmlns:r="http://schemas.openxmlformats.org/officeDocument/2006/relationships" xmlns:a="http://schemas.openxmlformats.org/drawingml/2006/main" r:embed="R3b3f3f50ab6c4a8a"/>
-          <a:stretch xmlns:a="http://schemas.openxmlformats.org/drawingml/2006/main"/>
-        </p:blipFill>
-        <p:spPr>
-          <a:xfrm xmlns:a="http://schemas.openxmlformats.org/drawingml/2006/main">
-            <a:off x="323850" y="76200"/>
-            <a:ext cx="533400" cy="533400"/>
-          </a:xfrm>
-          <a:prstGeom xmlns:a="http://schemas.openxmlformats.org/drawingml/2006/main" prst="rect">
-            <a:avLst/>
-          </a:prstGeom>
-        </p:spPr>
-      </p:pic>
-      <p:sp>
-        <p:nvSpPr>
-          <p:cNvPr id="8" name="brand-title">
-            <a:extLst xmlns:a="http://schemas.openxmlformats.org/drawingml/2006/main">
-              <a:ext uri="{FF2B5EF4-FFF2-40B4-BE49-F238E27FC236}">
-                <a16:creationId xmlns:a16="http://schemas.microsoft.com/office/drawing/2014/main" id="{AC6C7A9E-4639-437E-9991-E65AFC0B294E}"/>
-              </a:ext>
-            </a:extLst>
-          </p:cNvPr>
-          <p:cNvSpPr>
-            <a:spLocks xmlns:a="http://schemas.openxmlformats.org/drawingml/2006/main" noGrp="1"/>
-          </p:cNvSpPr>
-          <p:nvPr/>
-        </p:nvSpPr>
-        <p:spPr>
-          <a:xfrm xmlns:a="http://schemas.openxmlformats.org/drawingml/2006/main">
-            <a:off x="1028700" y="66675"/>
-            <a:ext cx="10477500" cy="552450"/>
-          </a:xfrm>
-          <a:prstGeom xmlns:a="http://schemas.openxmlformats.org/drawingml/2006/main" prst="rect">
-            <a:avLst/>
-          </a:prstGeom>
-          <a:noFill xmlns:a="http://schemas.openxmlformats.org/drawingml/2006/main"/>
-          <a:ln xmlns:a="http://schemas.openxmlformats.org/drawingml/2006/main" w="0">
-            <a:noFill/>
-          </a:ln>
-        </p:spPr>
-        <p:txBody>
-          <a:bodyPr xmlns:a="http://schemas.openxmlformats.org/drawingml/2006/main" lIns="0" tIns="0" rIns="0" bIns="0" anchor="ctr"/>
-          <a:lstStyle xmlns:a="http://schemas.openxmlformats.org/drawingml/2006/main"/>
-          <a:p xmlns:a="http://schemas.openxmlformats.org/drawingml/2006/main">
-            <a:pPr algn="l">
-              <a:lnSpc>
-                <a:spcPct val="118000"/>
-              </a:lnSpc>
-              <a:buNone/>
-              <a:defRPr sz="3000" b="1">
-                <a:solidFill>
-                  <a:srgbClr val="FFFFFF"/>
-                </a:solidFill>
-                <a:latin typeface="微软雅黑"/>
-                <a:ea typeface="微软雅黑"/>
-                <a:cs typeface="微软雅黑"/>
-              </a:defRPr>
-            </a:pPr>
-            <a:r>
-              <a:rPr sz="3000" b="1">
-                <a:solidFill>
-                  <a:srgbClr val="FFFFFF"/>
-                </a:solidFill>
-                <a:latin typeface="微软雅黑"/>
-                <a:ea typeface="微软雅黑"/>
-                <a:cs typeface="微软雅黑"/>
-              </a:rPr>
-              <a:t>把一个 Agent 步骤改写为受限任务</a:t>
-            </a:r>
-          </a:p>
-        </p:txBody>
-      </p:sp>
-      <p:sp>
-        <p:nvSpPr>
-          <p:cNvPr id="9" name="source">
-            <a:extLst xmlns:a="http://schemas.openxmlformats.org/drawingml/2006/main">
-              <a:ext uri="{FF2B5EF4-FFF2-40B4-BE49-F238E27FC236}">
-                <a16:creationId xmlns:a16="http://schemas.microsoft.com/office/drawing/2014/main" id="{308946A3-B744-4E7A-98F8-66613246EE1C}"/>
-              </a:ext>
-            </a:extLst>
-          </p:cNvPr>
-          <p:cNvSpPr>
-            <a:spLocks xmlns:a="http://schemas.openxmlformats.org/drawingml/2006/main" noGrp="1"/>
-          </p:cNvSpPr>
-          <p:nvPr/>
-        </p:nvSpPr>
-        <p:spPr>
-          <a:xfrm xmlns:a="http://schemas.openxmlformats.org/drawingml/2006/main">
-            <a:off x="609600" y="6067425"/>
-            <a:ext cx="10763250" cy="209550"/>
-          </a:xfrm>
-          <a:prstGeom xmlns:a="http://schemas.openxmlformats.org/drawingml/2006/main" prst="rect">
-            <a:avLst/>
-          </a:prstGeom>
-          <a:noFill xmlns:a="http://schemas.openxmlformats.org/drawingml/2006/main"/>
-          <a:ln xmlns:a="http://schemas.openxmlformats.org/drawingml/2006/main" w="0">
-            <a:noFill/>
-          </a:ln>
-        </p:spPr>
-        <p:txBody>
-          <a:bodyPr xmlns:a="http://schemas.openxmlformats.org/drawingml/2006/main" lIns="0" tIns="0" rIns="0" bIns="0" anchor="t"/>
-          <a:lstStyle xmlns:a="http://schemas.openxmlformats.org/drawingml/2006/main"/>
-          <a:p xmlns:a="http://schemas.openxmlformats.org/drawingml/2006/main">
-            <a:pPr algn="l">
-              <a:lnSpc>
-                <a:spcPct val="118000"/>
-              </a:lnSpc>
-              <a:buNone/>
-              <a:defRPr sz="1100" b="0">
-                <a:solidFill>
-                  <a:srgbClr val="66727D"/>
-                </a:solidFill>
-                <a:latin typeface="微软雅黑"/>
-                <a:ea typeface="微软雅黑"/>
-                <a:cs typeface="微软雅黑"/>
-              </a:defRPr>
-            </a:pPr>
-            <a:r>
-              <a:rPr sz="1100" b="0">
-                <a:solidFill>
-                  <a:srgbClr val="66727D"/>
-                </a:solidFill>
-                <a:latin typeface="微软雅黑"/>
-                <a:ea typeface="微软雅黑"/>
-                <a:cs typeface="微软雅黑"/>
-              </a:rPr>
-              <a:t>来源：lesson-10/slides.md；课程工件与讲义见 speaker notes</a:t>
-            </a:r>
-          </a:p>
-        </p:txBody>
-      </p:sp>
-      <p:sp>
-        <p:nvSpPr>
-          <p:cNvPr id="10" name="num-0">
-            <a:extLst xmlns:a="http://schemas.openxmlformats.org/drawingml/2006/main">
-              <a:ext uri="{FF2B5EF4-FFF2-40B4-BE49-F238E27FC236}">
-                <a16:creationId xmlns:a16="http://schemas.microsoft.com/office/drawing/2014/main" id="{590B285B-C53B-4E69-A504-AF9E7B3A21A7}"/>
-              </a:ext>
-            </a:extLst>
-          </p:cNvPr>
-          <p:cNvSpPr>
-            <a:spLocks xmlns:a="http://schemas.openxmlformats.org/drawingml/2006/main" noGrp="1"/>
-          </p:cNvSpPr>
-          <p:nvPr/>
-        </p:nvSpPr>
-        <p:spPr>
-          <a:xfrm xmlns:a="http://schemas.openxmlformats.org/drawingml/2006/main">
-            <a:off x="666750" y="1524000"/>
-            <a:ext cx="323850" cy="738188"/>
-          </a:xfrm>
-          <a:prstGeom xmlns:a="http://schemas.openxmlformats.org/drawingml/2006/main" prst="rect">
-            <a:avLst/>
-          </a:prstGeom>
-          <a:solidFill xmlns:a="http://schemas.openxmlformats.org/drawingml/2006/main">
-            <a:srgbClr val="1F4D78"/>
-          </a:solidFill>
-          <a:ln xmlns:a="http://schemas.openxmlformats.org/drawingml/2006/main" w="0">
-            <a:noFill/>
-          </a:ln>
-        </p:spPr>
-        <p:txBody>
-          <a:bodyPr xmlns:a="http://schemas.openxmlformats.org/drawingml/2006/main" lIns="0" tIns="0" rIns="0" bIns="0" anchor="ctr"/>
-          <a:lstStyle xmlns:a="http://schemas.openxmlformats.org/drawingml/2006/main"/>
-          <a:p xmlns:a="http://schemas.openxmlformats.org/drawingml/2006/main">
-            <a:pPr algn="ctr">
-              <a:lnSpc>
-                <a:spcPct val="118000"/>
-              </a:lnSpc>
-              <a:buNone/>
-              <a:defRPr sz="1800" b="1">
-                <a:solidFill>
-                  <a:srgbClr val="FFFFFF"/>
-                </a:solidFill>
-                <a:latin typeface="微软雅黑"/>
-                <a:ea typeface="微软雅黑"/>
-                <a:cs typeface="微软雅黑"/>
-              </a:defRPr>
-            </a:pPr>
-            <a:r>
-              <a:rPr sz="1800" b="1">
-                <a:solidFill>
-                  <a:srgbClr val="FFFFFF"/>
-                </a:solidFill>
-                <a:latin typeface="微软雅黑"/>
-                <a:ea typeface="微软雅黑"/>
-                <a:cs typeface="微软雅黑"/>
-              </a:rPr>
-              <a:t>1</a:t>
-            </a:r>
-          </a:p>
-        </p:txBody>
-      </p:sp>
-      <p:sp>
-        <p:nvSpPr>
-          <p:cNvPr id="11" name="row-0">
-            <a:extLst xmlns:a="http://schemas.openxmlformats.org/drawingml/2006/main">
-              <a:ext uri="{FF2B5EF4-FFF2-40B4-BE49-F238E27FC236}">
-                <a16:creationId xmlns:a16="http://schemas.microsoft.com/office/drawing/2014/main" id="{F7447679-3552-48C9-8F5D-41B8FD45FB9E}"/>
-              </a:ext>
-            </a:extLst>
-          </p:cNvPr>
-          <p:cNvSpPr>
-            <a:spLocks xmlns:a="http://schemas.openxmlformats.org/drawingml/2006/main" noGrp="1"/>
-          </p:cNvSpPr>
-          <p:nvPr/>
-        </p:nvSpPr>
-        <p:spPr>
-          <a:xfrm xmlns:a="http://schemas.openxmlformats.org/drawingml/2006/main">
-            <a:off x="1143000" y="1524000"/>
-            <a:ext cx="6191250" cy="738188"/>
-          </a:xfrm>
-          <a:prstGeom xmlns:a="http://schemas.openxmlformats.org/drawingml/2006/main" prst="rect">
-            <a:avLst/>
-          </a:prstGeom>
-          <a:noFill xmlns:a="http://schemas.openxmlformats.org/drawingml/2006/main"/>
-          <a:ln xmlns:a="http://schemas.openxmlformats.org/drawingml/2006/main" w="0">
-            <a:noFill/>
-          </a:ln>
-        </p:spPr>
-        <p:txBody>
-          <a:bodyPr xmlns:a="http://schemas.openxmlformats.org/drawingml/2006/main" lIns="0" tIns="0" rIns="0" bIns="0" anchor="ctr"/>
-          <a:lstStyle xmlns:a="http://schemas.openxmlformats.org/drawingml/2006/main"/>
-          <a:p xmlns:a="http://schemas.openxmlformats.org/drawingml/2006/main">
-            <a:pPr algn="l">
-              <a:lnSpc>
-                <a:spcPct val="118000"/>
-              </a:lnSpc>
-              <a:buNone/>
-              <a:defRPr sz="2200" b="0">
-                <a:solidFill>
-                  <a:srgbClr val="27333D"/>
-                </a:solidFill>
-                <a:latin typeface="微软雅黑"/>
-                <a:ea typeface="微软雅黑"/>
-                <a:cs typeface="微软雅黑"/>
-              </a:defRPr>
-            </a:pPr>
-            <a:r>
-              <a:rPr sz="2200" b="0">
-                <a:solidFill>
-                  <a:srgbClr val="27333D"/>
-                </a:solidFill>
-                <a:latin typeface="微软雅黑"/>
-                <a:ea typeface="微软雅黑"/>
-                <a:cs typeface="微软雅黑"/>
-              </a:rPr>
-              <a:t>选定一个“拟用 Agent”步骤</a:t>
-            </a:r>
-          </a:p>
-        </p:txBody>
-      </p:sp>
-      <p:sp>
-        <p:nvSpPr>
-          <p:cNvPr id="12" name="row-rule-0">
-            <a:extLst xmlns:a="http://schemas.openxmlformats.org/drawingml/2006/main">
-              <a:ext uri="{FF2B5EF4-FFF2-40B4-BE49-F238E27FC236}">
-                <a16:creationId xmlns:a16="http://schemas.microsoft.com/office/drawing/2014/main" id="{35E87B04-291E-460B-8FDC-3345ECD6276E}"/>
-              </a:ext>
-            </a:extLst>
-          </p:cNvPr>
-          <p:cNvSpPr>
-            <a:spLocks xmlns:a="http://schemas.openxmlformats.org/drawingml/2006/main" noGrp="1"/>
-          </p:cNvSpPr>
-          <p:nvPr/>
-        </p:nvSpPr>
-        <p:spPr>
-          <a:xfrm xmlns:a="http://schemas.openxmlformats.org/drawingml/2006/main">
-            <a:off x="1143000" y="2300288"/>
-            <a:ext cx="6191250" cy="14288"/>
-          </a:xfrm>
-          <a:prstGeom xmlns:a="http://schemas.openxmlformats.org/drawingml/2006/main" prst="rect">
-            <a:avLst/>
-          </a:prstGeom>
-          <a:solidFill xmlns:a="http://schemas.openxmlformats.org/drawingml/2006/main">
-            <a:srgbClr val="CDD5DB"/>
-          </a:solidFill>
-          <a:ln xmlns:a="http://schemas.openxmlformats.org/drawingml/2006/main" w="0">
-            <a:noFill/>
-          </a:ln>
-        </p:spPr>
-      </p:sp>
-      <p:sp>
-        <p:nvSpPr>
-          <p:cNvPr id="13" name="num-1">
-            <a:extLst xmlns:a="http://schemas.openxmlformats.org/drawingml/2006/main">
-              <a:ext uri="{FF2B5EF4-FFF2-40B4-BE49-F238E27FC236}">
-                <a16:creationId xmlns:a16="http://schemas.microsoft.com/office/drawing/2014/main" id="{9710CA7E-A2B1-49C7-A375-A4CCA0B05765}"/>
-              </a:ext>
-            </a:extLst>
-          </p:cNvPr>
-          <p:cNvSpPr>
-            <a:spLocks xmlns:a="http://schemas.openxmlformats.org/drawingml/2006/main" noGrp="1"/>
-          </p:cNvSpPr>
-          <p:nvPr/>
-        </p:nvSpPr>
-        <p:spPr>
-          <a:xfrm xmlns:a="http://schemas.openxmlformats.org/drawingml/2006/main">
-            <a:off x="666750" y="2357438"/>
-            <a:ext cx="323850" cy="738188"/>
-          </a:xfrm>
-          <a:prstGeom xmlns:a="http://schemas.openxmlformats.org/drawingml/2006/main" prst="rect">
-            <a:avLst/>
-          </a:prstGeom>
-          <a:solidFill xmlns:a="http://schemas.openxmlformats.org/drawingml/2006/main">
-            <a:srgbClr val="1F4D78"/>
-          </a:solidFill>
-          <a:ln xmlns:a="http://schemas.openxmlformats.org/drawingml/2006/main" w="0">
-            <a:noFill/>
-          </a:ln>
-        </p:spPr>
-        <p:txBody>
-          <a:bodyPr xmlns:a="http://schemas.openxmlformats.org/drawingml/2006/main" lIns="0" tIns="0" rIns="0" bIns="0" anchor="ctr"/>
-          <a:lstStyle xmlns:a="http://schemas.openxmlformats.org/drawingml/2006/main"/>
-          <a:p xmlns:a="http://schemas.openxmlformats.org/drawingml/2006/main">
-            <a:pPr algn="ctr">
-              <a:lnSpc>
-                <a:spcPct val="118000"/>
-              </a:lnSpc>
-              <a:buNone/>
-              <a:defRPr sz="1800" b="1">
-                <a:solidFill>
-                  <a:srgbClr val="FFFFFF"/>
-                </a:solidFill>
-                <a:latin typeface="微软雅黑"/>
-                <a:ea typeface="微软雅黑"/>
-                <a:cs typeface="微软雅黑"/>
-              </a:defRPr>
-            </a:pPr>
-            <a:r>
-              <a:rPr sz="1800" b="1">
-                <a:solidFill>
-                  <a:srgbClr val="FFFFFF"/>
-                </a:solidFill>
-                <a:latin typeface="微软雅黑"/>
-                <a:ea typeface="微软雅黑"/>
-                <a:cs typeface="微软雅黑"/>
-              </a:rPr>
-              <a:t>2</a:t>
-            </a:r>
-          </a:p>
-        </p:txBody>
-      </p:sp>
-      <p:sp>
-        <p:nvSpPr>
-          <p:cNvPr id="14" name="row-1">
-            <a:extLst xmlns:a="http://schemas.openxmlformats.org/drawingml/2006/main">
-              <a:ext uri="{FF2B5EF4-FFF2-40B4-BE49-F238E27FC236}">
-                <a16:creationId xmlns:a16="http://schemas.microsoft.com/office/drawing/2014/main" id="{877AFA74-AF8F-4ED4-B546-9C44343C4EEE}"/>
-              </a:ext>
-            </a:extLst>
-          </p:cNvPr>
-          <p:cNvSpPr>
-            <a:spLocks xmlns:a="http://schemas.openxmlformats.org/drawingml/2006/main" noGrp="1"/>
-          </p:cNvSpPr>
-          <p:nvPr/>
-        </p:nvSpPr>
-        <p:spPr>
-          <a:xfrm xmlns:a="http://schemas.openxmlformats.org/drawingml/2006/main">
-            <a:off x="1143000" y="2357438"/>
-            <a:ext cx="6191250" cy="738188"/>
-          </a:xfrm>
-          <a:prstGeom xmlns:a="http://schemas.openxmlformats.org/drawingml/2006/main" prst="rect">
-            <a:avLst/>
-          </a:prstGeom>
-          <a:noFill xmlns:a="http://schemas.openxmlformats.org/drawingml/2006/main"/>
-          <a:ln xmlns:a="http://schemas.openxmlformats.org/drawingml/2006/main" w="0">
-            <a:noFill/>
-          </a:ln>
-        </p:spPr>
-        <p:txBody>
-          <a:bodyPr xmlns:a="http://schemas.openxmlformats.org/drawingml/2006/main" lIns="0" tIns="0" rIns="0" bIns="0" anchor="ctr"/>
-          <a:lstStyle xmlns:a="http://schemas.openxmlformats.org/drawingml/2006/main"/>
-          <a:p xmlns:a="http://schemas.openxmlformats.org/drawingml/2006/main">
-            <a:pPr algn="l">
-              <a:lnSpc>
-                <a:spcPct val="118000"/>
-              </a:lnSpc>
-              <a:buNone/>
-              <a:defRPr sz="2200" b="0">
-                <a:solidFill>
-                  <a:srgbClr val="27333D"/>
-                </a:solidFill>
-                <a:latin typeface="微软雅黑"/>
-                <a:ea typeface="微软雅黑"/>
-                <a:cs typeface="微软雅黑"/>
-              </a:defRPr>
-            </a:pPr>
-            <a:r>
-              <a:rPr sz="2200" b="0">
-                <a:solidFill>
-                  <a:srgbClr val="27333D"/>
-                </a:solidFill>
-                <a:latin typeface="微软雅黑"/>
-                <a:ea typeface="微软雅黑"/>
-                <a:cs typeface="微软雅黑"/>
-              </a:rPr>
-              <a:t>写五字段任务契约</a:t>
-            </a:r>
-          </a:p>
-        </p:txBody>
-      </p:sp>
-      <p:sp>
-        <p:nvSpPr>
-          <p:cNvPr id="15" name="row-rule-1">
-            <a:extLst xmlns:a="http://schemas.openxmlformats.org/drawingml/2006/main">
-              <a:ext uri="{FF2B5EF4-FFF2-40B4-BE49-F238E27FC236}">
-                <a16:creationId xmlns:a16="http://schemas.microsoft.com/office/drawing/2014/main" id="{BA096C3D-EEF7-4BFA-9209-A3B993651740}"/>
-              </a:ext>
-            </a:extLst>
-          </p:cNvPr>
-          <p:cNvSpPr>
-            <a:spLocks xmlns:a="http://schemas.openxmlformats.org/drawingml/2006/main" noGrp="1"/>
-          </p:cNvSpPr>
-          <p:nvPr/>
-        </p:nvSpPr>
-        <p:spPr>
-          <a:xfrm xmlns:a="http://schemas.openxmlformats.org/drawingml/2006/main">
-            <a:off x="1143000" y="3133725"/>
-            <a:ext cx="6191250" cy="14288"/>
-          </a:xfrm>
-          <a:prstGeom xmlns:a="http://schemas.openxmlformats.org/drawingml/2006/main" prst="rect">
-            <a:avLst/>
-          </a:prstGeom>
-          <a:solidFill xmlns:a="http://schemas.openxmlformats.org/drawingml/2006/main">
-            <a:srgbClr val="CDD5DB"/>
-          </a:solidFill>
-          <a:ln xmlns:a="http://schemas.openxmlformats.org/drawingml/2006/main" w="0">
-            <a:noFill/>
-          </a:ln>
-        </p:spPr>
-      </p:sp>
-      <p:sp>
-        <p:nvSpPr>
-          <p:cNvPr id="16" name="num-2">
-            <a:extLst xmlns:a="http://schemas.openxmlformats.org/drawingml/2006/main">
-              <a:ext uri="{FF2B5EF4-FFF2-40B4-BE49-F238E27FC236}">
-                <a16:creationId xmlns:a16="http://schemas.microsoft.com/office/drawing/2014/main" id="{20F93348-E19C-4CBB-A59B-D9EFD85E0D53}"/>
-              </a:ext>
-            </a:extLst>
-          </p:cNvPr>
-          <p:cNvSpPr>
-            <a:spLocks xmlns:a="http://schemas.openxmlformats.org/drawingml/2006/main" noGrp="1"/>
-          </p:cNvSpPr>
-          <p:nvPr/>
-        </p:nvSpPr>
-        <p:spPr>
-          <a:xfrm xmlns:a="http://schemas.openxmlformats.org/drawingml/2006/main">
-            <a:off x="666750" y="3190875"/>
-            <a:ext cx="323850" cy="738188"/>
-          </a:xfrm>
-          <a:prstGeom xmlns:a="http://schemas.openxmlformats.org/drawingml/2006/main" prst="rect">
-            <a:avLst/>
-          </a:prstGeom>
-          <a:solidFill xmlns:a="http://schemas.openxmlformats.org/drawingml/2006/main">
-            <a:srgbClr val="1F4D78"/>
-          </a:solidFill>
-          <a:ln xmlns:a="http://schemas.openxmlformats.org/drawingml/2006/main" w="0">
-            <a:noFill/>
-          </a:ln>
-        </p:spPr>
-        <p:txBody>
-          <a:bodyPr xmlns:a="http://schemas.openxmlformats.org/drawingml/2006/main" lIns="0" tIns="0" rIns="0" bIns="0" anchor="ctr"/>
-          <a:lstStyle xmlns:a="http://schemas.openxmlformats.org/drawingml/2006/main"/>
-          <a:p xmlns:a="http://schemas.openxmlformats.org/drawingml/2006/main">
-            <a:pPr algn="ctr">
-              <a:lnSpc>
-                <a:spcPct val="118000"/>
-              </a:lnSpc>
-              <a:buNone/>
-              <a:defRPr sz="1800" b="1">
-                <a:solidFill>
-                  <a:srgbClr val="FFFFFF"/>
-                </a:solidFill>
-                <a:latin typeface="微软雅黑"/>
-                <a:ea typeface="微软雅黑"/>
-                <a:cs typeface="微软雅黑"/>
-              </a:defRPr>
-            </a:pPr>
-            <a:r>
-              <a:rPr sz="1800" b="1">
-                <a:solidFill>
-                  <a:srgbClr val="FFFFFF"/>
-                </a:solidFill>
-                <a:latin typeface="微软雅黑"/>
-                <a:ea typeface="微软雅黑"/>
-                <a:cs typeface="微软雅黑"/>
-              </a:rPr>
-              <a:t>3</a:t>
-            </a:r>
-          </a:p>
-        </p:txBody>
-      </p:sp>
-      <p:sp>
-        <p:nvSpPr>
-          <p:cNvPr id="17" name="row-2">
-            <a:extLst xmlns:a="http://schemas.openxmlformats.org/drawingml/2006/main">
-              <a:ext uri="{FF2B5EF4-FFF2-40B4-BE49-F238E27FC236}">
-                <a16:creationId xmlns:a16="http://schemas.microsoft.com/office/drawing/2014/main" id="{8CABB825-80A9-486A-818A-DED7E47B8148}"/>
-              </a:ext>
-            </a:extLst>
-          </p:cNvPr>
-          <p:cNvSpPr>
-            <a:spLocks xmlns:a="http://schemas.openxmlformats.org/drawingml/2006/main" noGrp="1"/>
-          </p:cNvSpPr>
-          <p:nvPr/>
-        </p:nvSpPr>
-        <p:spPr>
-          <a:xfrm xmlns:a="http://schemas.openxmlformats.org/drawingml/2006/main">
-            <a:off x="1143000" y="3190875"/>
-            <a:ext cx="6191250" cy="738188"/>
-          </a:xfrm>
-          <a:prstGeom xmlns:a="http://schemas.openxmlformats.org/drawingml/2006/main" prst="rect">
-            <a:avLst/>
-          </a:prstGeom>
-          <a:noFill xmlns:a="http://schemas.openxmlformats.org/drawingml/2006/main"/>
-          <a:ln xmlns:a="http://schemas.openxmlformats.org/drawingml/2006/main" w="0">
-            <a:noFill/>
-          </a:ln>
-        </p:spPr>
-        <p:txBody>
-          <a:bodyPr xmlns:a="http://schemas.openxmlformats.org/drawingml/2006/main" lIns="0" tIns="0" rIns="0" bIns="0" anchor="ctr"/>
-          <a:lstStyle xmlns:a="http://schemas.openxmlformats.org/drawingml/2006/main"/>
-          <a:p xmlns:a="http://schemas.openxmlformats.org/drawingml/2006/main">
-            <a:pPr algn="l">
-              <a:lnSpc>
-                <a:spcPct val="118000"/>
-              </a:lnSpc>
-              <a:buNone/>
-              <a:defRPr sz="2200" b="0">
-                <a:solidFill>
-                  <a:srgbClr val="27333D"/>
-                </a:solidFill>
-                <a:latin typeface="微软雅黑"/>
-                <a:ea typeface="微软雅黑"/>
-                <a:cs typeface="微软雅黑"/>
-              </a:defRPr>
-            </a:pPr>
-            <a:r>
-              <a:rPr sz="2200" b="0">
-                <a:solidFill>
-                  <a:srgbClr val="27333D"/>
-                </a:solidFill>
-                <a:latin typeface="微软雅黑"/>
-                <a:ea typeface="微软雅黑"/>
-                <a:cs typeface="微软雅黑"/>
-              </a:rPr>
-              <a:t>审查真实或预置 diff</a:t>
-            </a:r>
-          </a:p>
-        </p:txBody>
-      </p:sp>
-      <p:sp>
-        <p:nvSpPr>
-          <p:cNvPr id="18" name="row-rule-2">
-            <a:extLst xmlns:a="http://schemas.openxmlformats.org/drawingml/2006/main">
-              <a:ext uri="{FF2B5EF4-FFF2-40B4-BE49-F238E27FC236}">
-                <a16:creationId xmlns:a16="http://schemas.microsoft.com/office/drawing/2014/main" id="{1F879126-3132-4F89-8778-2FE9C9289DF5}"/>
-              </a:ext>
-            </a:extLst>
-          </p:cNvPr>
-          <p:cNvSpPr>
-            <a:spLocks xmlns:a="http://schemas.openxmlformats.org/drawingml/2006/main" noGrp="1"/>
-          </p:cNvSpPr>
-          <p:nvPr/>
-        </p:nvSpPr>
-        <p:spPr>
-          <a:xfrm xmlns:a="http://schemas.openxmlformats.org/drawingml/2006/main">
-            <a:off x="1143000" y="3967163"/>
-            <a:ext cx="6191250" cy="14288"/>
-          </a:xfrm>
-          <a:prstGeom xmlns:a="http://schemas.openxmlformats.org/drawingml/2006/main" prst="rect">
-            <a:avLst/>
-          </a:prstGeom>
-          <a:solidFill xmlns:a="http://schemas.openxmlformats.org/drawingml/2006/main">
-            <a:srgbClr val="CDD5DB"/>
-          </a:solidFill>
-          <a:ln xmlns:a="http://schemas.openxmlformats.org/drawingml/2006/main" w="0">
-            <a:noFill/>
-          </a:ln>
-        </p:spPr>
-      </p:sp>
-      <p:sp>
-        <p:nvSpPr>
-          <p:cNvPr id="19" name="num-3">
-            <a:extLst xmlns:a="http://schemas.openxmlformats.org/drawingml/2006/main">
-              <a:ext uri="{FF2B5EF4-FFF2-40B4-BE49-F238E27FC236}">
-                <a16:creationId xmlns:a16="http://schemas.microsoft.com/office/drawing/2014/main" id="{F3843DC3-9F56-4270-BF9E-1B22148DA772}"/>
-              </a:ext>
-            </a:extLst>
-          </p:cNvPr>
-          <p:cNvSpPr>
-            <a:spLocks xmlns:a="http://schemas.openxmlformats.org/drawingml/2006/main" noGrp="1"/>
-          </p:cNvSpPr>
-          <p:nvPr/>
-        </p:nvSpPr>
-        <p:spPr>
-          <a:xfrm xmlns:a="http://schemas.openxmlformats.org/drawingml/2006/main">
-            <a:off x="666750" y="4024313"/>
-            <a:ext cx="323850" cy="738188"/>
-          </a:xfrm>
-          <a:prstGeom xmlns:a="http://schemas.openxmlformats.org/drawingml/2006/main" prst="rect">
-            <a:avLst/>
-          </a:prstGeom>
-          <a:solidFill xmlns:a="http://schemas.openxmlformats.org/drawingml/2006/main">
-            <a:srgbClr val="C8161E"/>
-          </a:solidFill>
-          <a:ln xmlns:a="http://schemas.openxmlformats.org/drawingml/2006/main" w="0">
-            <a:noFill/>
-          </a:ln>
-        </p:spPr>
-        <p:txBody>
-          <a:bodyPr xmlns:a="http://schemas.openxmlformats.org/drawingml/2006/main" lIns="0" tIns="0" rIns="0" bIns="0" anchor="ctr"/>
-          <a:lstStyle xmlns:a="http://schemas.openxmlformats.org/drawingml/2006/main"/>
-          <a:p xmlns:a="http://schemas.openxmlformats.org/drawingml/2006/main">
-            <a:pPr algn="ctr">
-              <a:lnSpc>
-                <a:spcPct val="118000"/>
-              </a:lnSpc>
-              <a:buNone/>
-              <a:defRPr sz="1800" b="1">
-                <a:solidFill>
-                  <a:srgbClr val="C8161E"/>
-                </a:solidFill>
-                <a:latin typeface="微软雅黑"/>
-                <a:ea typeface="微软雅黑"/>
-                <a:cs typeface="微软雅黑"/>
-              </a:defRPr>
-            </a:pPr>
-            <a:r>
-              <a:rPr sz="1800" b="1">
-                <a:solidFill>
-                  <a:srgbClr val="C8161E"/>
-                </a:solidFill>
-                <a:latin typeface="微软雅黑"/>
-                <a:ea typeface="微软雅黑"/>
-                <a:cs typeface="微软雅黑"/>
-              </a:rPr>
-              <a:t>4</a:t>
-            </a:r>
-          </a:p>
-        </p:txBody>
-      </p:sp>
-      <p:sp>
-        <p:nvSpPr>
-          <p:cNvPr id="20" name="row-3">
-            <a:extLst xmlns:a="http://schemas.openxmlformats.org/drawingml/2006/main">
-              <a:ext uri="{FF2B5EF4-FFF2-40B4-BE49-F238E27FC236}">
-                <a16:creationId xmlns:a16="http://schemas.microsoft.com/office/drawing/2014/main" id="{B349EA15-E7D5-4575-9151-E0E1C5CD1C27}"/>
-              </a:ext>
-            </a:extLst>
-          </p:cNvPr>
-          <p:cNvSpPr>
-            <a:spLocks xmlns:a="http://schemas.openxmlformats.org/drawingml/2006/main" noGrp="1"/>
-          </p:cNvSpPr>
-          <p:nvPr/>
-        </p:nvSpPr>
-        <p:spPr>
-          <a:xfrm xmlns:a="http://schemas.openxmlformats.org/drawingml/2006/main">
-            <a:off x="1143000" y="4024313"/>
-            <a:ext cx="6191250" cy="738188"/>
-          </a:xfrm>
-          <a:prstGeom xmlns:a="http://schemas.openxmlformats.org/drawingml/2006/main" prst="rect">
-            <a:avLst/>
-          </a:prstGeom>
-          <a:noFill xmlns:a="http://schemas.openxmlformats.org/drawingml/2006/main"/>
-          <a:ln xmlns:a="http://schemas.openxmlformats.org/drawingml/2006/main" w="0">
-            <a:noFill/>
-          </a:ln>
-        </p:spPr>
-        <p:txBody>
-          <a:bodyPr xmlns:a="http://schemas.openxmlformats.org/drawingml/2006/main" lIns="0" tIns="0" rIns="0" bIns="0" anchor="ctr"/>
-          <a:lstStyle xmlns:a="http://schemas.openxmlformats.org/drawingml/2006/main"/>
-          <a:p xmlns:a="http://schemas.openxmlformats.org/drawingml/2006/main">
-            <a:pPr algn="l">
-              <a:lnSpc>
-                <a:spcPct val="118000"/>
-              </a:lnSpc>
-              <a:buNone/>
-              <a:defRPr sz="2200" b="0">
-                <a:solidFill>
-                  <a:srgbClr val="27333D"/>
-                </a:solidFill>
-                <a:latin typeface="微软雅黑"/>
-                <a:ea typeface="微软雅黑"/>
-                <a:cs typeface="微软雅黑"/>
-              </a:defRPr>
-            </a:pPr>
-            <a:r>
-              <a:rPr sz="2200" b="0">
-                <a:solidFill>
-                  <a:srgbClr val="27333D"/>
-                </a:solidFill>
-                <a:latin typeface="微软雅黑"/>
-                <a:ea typeface="微软雅黑"/>
-                <a:cs typeface="微软雅黑"/>
-              </a:rPr>
-              <a:t>记录验证证据与失败决定</a:t>
-            </a:r>
-          </a:p>
-        </p:txBody>
-      </p:sp>
-      <p:sp>
-        <p:nvSpPr>
-          <p:cNvPr id="21" name="practice-side">
-            <a:extLst xmlns:a="http://schemas.openxmlformats.org/drawingml/2006/main">
-              <a:ext uri="{FF2B5EF4-FFF2-40B4-BE49-F238E27FC236}">
-                <a16:creationId xmlns:a16="http://schemas.microsoft.com/office/drawing/2014/main" id="{0D9A5564-038F-4982-B3E1-011683F864B0}"/>
-              </a:ext>
-            </a:extLst>
-          </p:cNvPr>
-          <p:cNvSpPr>
-            <a:spLocks xmlns:a="http://schemas.openxmlformats.org/drawingml/2006/main" noGrp="1"/>
-          </p:cNvSpPr>
-          <p:nvPr/>
-        </p:nvSpPr>
-        <p:spPr>
-          <a:xfrm xmlns:a="http://schemas.openxmlformats.org/drawingml/2006/main">
-            <a:off x="7905750" y="1666875"/>
-            <a:ext cx="3429000" cy="2619375"/>
-          </a:xfrm>
-          <a:prstGeom xmlns:a="http://schemas.openxmlformats.org/drawingml/2006/main" prst="rect">
-            <a:avLst/>
-          </a:prstGeom>
-          <a:solidFill xmlns:a="http://schemas.openxmlformats.org/drawingml/2006/main">
-            <a:srgbClr val="F4F6F8"/>
-          </a:solidFill>
-          <a:ln xmlns:a="http://schemas.openxmlformats.org/drawingml/2006/main" w="0">
-            <a:noFill/>
-          </a:ln>
-        </p:spPr>
-      </p:sp>
-      <p:sp>
-        <p:nvSpPr>
-          <p:cNvPr id="22" name="practice-h">
-            <a:extLst xmlns:a="http://schemas.openxmlformats.org/drawingml/2006/main">
-              <a:ext uri="{FF2B5EF4-FFF2-40B4-BE49-F238E27FC236}">
-                <a16:creationId xmlns:a16="http://schemas.microsoft.com/office/drawing/2014/main" id="{F5361B8B-A7BB-4494-97A2-27E6BED0025A}"/>
-              </a:ext>
-            </a:extLst>
-          </p:cNvPr>
-          <p:cNvSpPr>
-            <a:spLocks xmlns:a="http://schemas.openxmlformats.org/drawingml/2006/main" noGrp="1"/>
-          </p:cNvSpPr>
-          <p:nvPr/>
-        </p:nvSpPr>
-        <p:spPr>
-          <a:xfrm xmlns:a="http://schemas.openxmlformats.org/drawingml/2006/main">
-            <a:off x="8191500" y="1952625"/>
-            <a:ext cx="2857500" cy="361950"/>
-          </a:xfrm>
-          <a:prstGeom xmlns:a="http://schemas.openxmlformats.org/drawingml/2006/main" prst="rect">
-            <a:avLst/>
-          </a:prstGeom>
-          <a:noFill xmlns:a="http://schemas.openxmlformats.org/drawingml/2006/main"/>
-          <a:ln xmlns:a="http://schemas.openxmlformats.org/drawingml/2006/main" w="0">
-            <a:noFill/>
-          </a:ln>
-        </p:spPr>
-        <p:txBody>
-          <a:bodyPr xmlns:a="http://schemas.openxmlformats.org/drawingml/2006/main" lIns="0" tIns="0" rIns="0" bIns="0" anchor="t"/>
-          <a:lstStyle xmlns:a="http://schemas.openxmlformats.org/drawingml/2006/main"/>
-          <a:p xmlns:a="http://schemas.openxmlformats.org/drawingml/2006/main">
-            <a:pPr algn="l">
-              <a:lnSpc>
-                <a:spcPct val="118000"/>
-              </a:lnSpc>
-              <a:buNone/>
-              <a:defRPr sz="2200" b="1">
-                <a:solidFill>
-                  <a:srgbClr val="1F4D78"/>
-                </a:solidFill>
-                <a:latin typeface="微软雅黑"/>
-                <a:ea typeface="微软雅黑"/>
-                <a:cs typeface="微软雅黑"/>
-              </a:defRPr>
-            </a:pPr>
-            <a:r>
-              <a:rPr sz="2200" b="1">
-                <a:solidFill>
-                  <a:srgbClr val="1F4D78"/>
-                </a:solidFill>
-                <a:latin typeface="微软雅黑"/>
-                <a:ea typeface="微软雅黑"/>
-                <a:cs typeface="微软雅黑"/>
-              </a:rPr>
-              <a:t>输入路径</a:t>
-            </a:r>
-          </a:p>
-        </p:txBody>
-      </p:sp>
-      <p:sp>
-        <p:nvSpPr>
-          <p:cNvPr id="23" name="practice-note">
-            <a:extLst xmlns:a="http://schemas.openxmlformats.org/drawingml/2006/main">
-              <a:ext uri="{FF2B5EF4-FFF2-40B4-BE49-F238E27FC236}">
-                <a16:creationId xmlns:a16="http://schemas.microsoft.com/office/drawing/2014/main" id="{26572219-BB8D-407C-ABE1-267F2F845FA7}"/>
-              </a:ext>
-            </a:extLst>
-          </p:cNvPr>
-          <p:cNvSpPr>
-            <a:spLocks xmlns:a="http://schemas.openxmlformats.org/drawingml/2006/main" noGrp="1"/>
-          </p:cNvSpPr>
-          <p:nvPr/>
-        </p:nvSpPr>
-        <p:spPr>
-          <a:xfrm xmlns:a="http://schemas.openxmlformats.org/drawingml/2006/main">
-            <a:off x="8191500" y="2619375"/>
-            <a:ext cx="2762250" cy="1428750"/>
-          </a:xfrm>
-          <a:prstGeom xmlns:a="http://schemas.openxmlformats.org/drawingml/2006/main" prst="rect">
-            <a:avLst/>
-          </a:prstGeom>
-          <a:noFill xmlns:a="http://schemas.openxmlformats.org/drawingml/2006/main"/>
-          <a:ln xmlns:a="http://schemas.openxmlformats.org/drawingml/2006/main" w="0">
-            <a:noFill/>
-          </a:ln>
-        </p:spPr>
-        <p:txBody>
-          <a:bodyPr xmlns:a="http://schemas.openxmlformats.org/drawingml/2006/main" lIns="0" tIns="0" rIns="0" bIns="0" anchor="t"/>
-          <a:lstStyle xmlns:a="http://schemas.openxmlformats.org/drawingml/2006/main"/>
-          <a:p xmlns:a="http://schemas.openxmlformats.org/drawingml/2006/main">
-            <a:pPr algn="l">
-              <a:lnSpc>
-                <a:spcPct val="118000"/>
-              </a:lnSpc>
-              <a:buNone/>
-              <a:defRPr sz="2200" b="0">
-                <a:solidFill>
-                  <a:srgbClr val="27333D"/>
-                </a:solidFill>
-                <a:latin typeface="微软雅黑"/>
-                <a:ea typeface="微软雅黑"/>
-                <a:cs typeface="微软雅黑"/>
-              </a:defRPr>
-            </a:pPr>
-            <a:r>
-              <a:rPr sz="2200" b="0">
-                <a:solidFill>
-                  <a:srgbClr val="27333D"/>
-                </a:solidFill>
-                <a:latin typeface="微软雅黑"/>
-                <a:ea typeface="微软雅黑"/>
-                <a:cs typeface="微软雅黑"/>
-              </a:rPr>
-              <a:t>本人真实项目</a:t>
-            </a:r>
-          </a:p>
-          <a:p xmlns:a="http://schemas.openxmlformats.org/drawingml/2006/main">
-            <a:pPr algn="l">
-              <a:lnSpc>
-                <a:spcPct val="118000"/>
-              </a:lnSpc>
-              <a:buNone/>
-              <a:defRPr sz="2200" b="0">
-                <a:solidFill>
-                  <a:srgbClr val="27333D"/>
-                </a:solidFill>
-                <a:latin typeface="微软雅黑"/>
-                <a:ea typeface="微软雅黑"/>
-                <a:cs typeface="微软雅黑"/>
-              </a:defRPr>
-            </a:pPr>
-            <a:r>
-              <a:rPr sz="2200" b="0">
-                <a:solidFill>
-                  <a:srgbClr val="27333D"/>
-                </a:solidFill>
-                <a:latin typeface="微软雅黑"/>
-                <a:ea typeface="微软雅黑"/>
-                <a:cs typeface="微软雅黑"/>
-              </a:rPr>
-              <a:t>或</a:t>
-            </a:r>
-          </a:p>
-          <a:p xmlns:a="http://schemas.openxmlformats.org/drawingml/2006/main">
-            <a:pPr algn="l">
-              <a:lnSpc>
-                <a:spcPct val="118000"/>
-              </a:lnSpc>
-              <a:buNone/>
-              <a:defRPr sz="2200" b="0">
-                <a:solidFill>
-                  <a:srgbClr val="27333D"/>
-                </a:solidFill>
-                <a:latin typeface="微软雅黑"/>
-                <a:ea typeface="微软雅黑"/>
-                <a:cs typeface="微软雅黑"/>
-              </a:defRPr>
-            </a:pPr>
-            <a:r>
-              <a:rPr sz="2200" b="0">
-                <a:solidFill>
-                  <a:srgbClr val="27333D"/>
-                </a:solidFill>
-                <a:latin typeface="微软雅黑"/>
-                <a:ea typeface="微软雅黑"/>
-                <a:cs typeface="微软雅黑"/>
-              </a:rPr>
-              <a:t>课次预置工件</a:t>
-            </a:r>
-          </a:p>
-          <a:p xmlns:a="http://schemas.openxmlformats.org/drawingml/2006/main">
-            <a:r>
-              <a:t/>
-            </a:r>
-          </a:p>
-          <a:p xmlns:a="http://schemas.openxmlformats.org/drawingml/2006/main">
-            <a:pPr algn="l">
-              <a:lnSpc>
-                <a:spcPct val="118000"/>
-              </a:lnSpc>
-              <a:buNone/>
-              <a:defRPr sz="2200" b="0">
-                <a:solidFill>
-                  <a:srgbClr val="27333D"/>
-                </a:solidFill>
-                <a:latin typeface="微软雅黑"/>
-                <a:ea typeface="微软雅黑"/>
-                <a:cs typeface="微软雅黑"/>
-              </a:defRPr>
-            </a:pPr>
-            <a:r>
-              <a:rPr sz="2200" b="0">
-                <a:solidFill>
-                  <a:srgbClr val="27333D"/>
-                </a:solidFill>
-                <a:latin typeface="微软雅黑"/>
-                <a:ea typeface="微软雅黑"/>
-                <a:cs typeface="微软雅黑"/>
-              </a:rPr>
-              <a:t>完成后回写个人项目</a:t>
             </a:r>
           </a:p>
         </p:txBody>
@@ -14093,35 +11320,55 @@
       </p:grpSpPr>
       <p:sp>
         <p:nvSpPr>
-          <p:cNvPr id="4" name="Text Placeholder 3">
-            <a:extLst xmlns:a="http://schemas.openxmlformats.org/drawingml/2006/main">
-              <a:ext uri="{FF2B5EF4-FFF2-40B4-BE49-F238E27FC236}">
-                <a16:creationId xmlns:a16="http://schemas.microsoft.com/office/drawing/2014/main" id="{4D941B40-7A0A-534E-3563-CA11753C8E3F}"/>
-              </a:ext>
-            </a:extLst>
-          </p:cNvPr>
-          <p:cNvSpPr>
-            <a:spLocks xmlns:a="http://schemas.openxmlformats.org/drawingml/2006/main" noGrp="1"/>
-          </p:cNvSpPr>
-          <p:nvPr>
-            <p:ph type="body" idx="14"/>
-          </p:nvPr>
-        </p:nvSpPr>
-        <p:spPr>
-          <a:xfrm xmlns:a="http://schemas.openxmlformats.org/drawingml/2006/main">
-            <a:off x="1028700" y="57150"/>
-            <a:ext cx="10668000" cy="571500"/>
-          </a:xfrm>
-        </p:spPr>
-        <p:txBody>
-          <a:bodyPr xmlns:a="http://schemas.openxmlformats.org/drawingml/2006/main" lIns="0" tIns="0" rIns="0" bIns="0" anchor="ctr"/>
-          <a:lstStyle xmlns:a="http://schemas.openxmlformats.org/drawingml/2006/main"/>
+          <p:cNvPr id="7" name="judgment-title">
+            <a:extLst xmlns:a="http://schemas.openxmlformats.org/drawingml/2006/main">
+              <a:ext uri="{FF2B5EF4-FFF2-40B4-BE49-F238E27FC236}">
+                <a16:creationId xmlns:a16="http://schemas.microsoft.com/office/drawing/2014/main" id="{5B851759-019F-4FC0-96EC-12553B475CA1}"/>
+              </a:ext>
+            </a:extLst>
+          </p:cNvPr>
+          <p:cNvSpPr>
+            <a:spLocks xmlns:a="http://schemas.openxmlformats.org/drawingml/2006/main" noGrp="1"/>
+          </p:cNvSpPr>
+          <p:nvPr/>
+        </p:nvSpPr>
+        <p:spPr>
+          <a:xfrm xmlns:a="http://schemas.openxmlformats.org/drawingml/2006/main">
+            <a:off x="1028700" y="76200"/>
+            <a:ext cx="10687050" cy="514350"/>
+          </a:xfrm>
+          <a:prstGeom xmlns:a="http://schemas.openxmlformats.org/drawingml/2006/main" prst="rect">
+            <a:avLst/>
+          </a:prstGeom>
+          <a:noFill xmlns:a="http://schemas.openxmlformats.org/drawingml/2006/main"/>
+          <a:ln xmlns:a="http://schemas.openxmlformats.org/drawingml/2006/main" w="0">
+            <a:noFill/>
+          </a:ln>
+        </p:spPr>
+        <p:txBody>
+          <a:bodyPr xmlns:a="http://schemas.openxmlformats.org/drawingml/2006/main" lIns="0" tIns="0" rIns="0" bIns="0" anchor="t"/>
+          <a:lstStyle xmlns:a="http://schemas.openxmlformats.org/drawingml/2006/main">
+            <a:defPPr algn="l">
+              <a:defRPr sz="3000" b="1">
+                <a:solidFill>
+                  <a:srgbClr val="FFFFFF"/>
+                </a:solidFill>
+                <a:latin typeface="微软雅黑"/>
+                <a:ea typeface="微软雅黑"/>
+                <a:cs typeface="微软雅黑"/>
+              </a:defRPr>
+            </a:defPPr>
+          </a:lstStyle>
           <a:p xmlns:a="http://schemas.openxmlformats.org/drawingml/2006/main">
             <a:pPr algn="l">
-              <a:lnSpc>
-                <a:spcPct val="118000"/>
-              </a:lnSpc>
-              <a:buNone/>
+              <a:defRPr sz="3000" b="1">
+                <a:solidFill>
+                  <a:srgbClr val="FFFFFF"/>
+                </a:solidFill>
+                <a:latin typeface="微软雅黑"/>
+                <a:ea typeface="微软雅黑"/>
+                <a:cs typeface="微软雅黑"/>
+              </a:defRPr>
             </a:pPr>
             <a:r>
               <a:rPr sz="3000" b="1">
@@ -14132,965 +11379,337 @@
                 <a:ea typeface="微软雅黑"/>
                 <a:cs typeface="微软雅黑"/>
               </a:rPr>
-              <a:t>受限执行能否安全重复？</a:t>
-            </a:r>
-            <a:endParaRPr/>
-          </a:p>
-        </p:txBody>
-      </p:sp>
-      <p:sp>
-        <p:nvSpPr>
-          <p:cNvPr id="5" name="Slide Number Placeholder 4">
-            <a:extLst xmlns:a="http://schemas.openxmlformats.org/drawingml/2006/main">
-              <a:ext uri="{FF2B5EF4-FFF2-40B4-BE49-F238E27FC236}">
-                <a16:creationId xmlns:a16="http://schemas.microsoft.com/office/drawing/2014/main" id="{EBA5909F-738E-F60C-BE8C-B3F1D94548E5}"/>
-              </a:ext>
-            </a:extLst>
-          </p:cNvPr>
-          <p:cNvSpPr>
-            <a:spLocks xmlns:a="http://schemas.openxmlformats.org/drawingml/2006/main" noGrp="1"/>
-          </p:cNvSpPr>
-          <p:nvPr>
-            <p:ph type="sldNum" idx="10"/>
-          </p:nvPr>
-        </p:nvSpPr>
-        <p:spPr/>
-        <p:txBody>
-          <a:bodyPr xmlns:a="http://schemas.openxmlformats.org/drawingml/2006/main"/>
-          <a:lstStyle xmlns:a="http://schemas.openxmlformats.org/drawingml/2006/main"/>
-          <a:p xmlns:a="http://schemas.openxmlformats.org/drawingml/2006/main">
-            <a:fld id="{90F7333B-44AC-F7E9-D49D-FE92F45E0477}" type="slidenum">
+              <a:t>保留本课决定，准备下一课输入</a:t>
+            </a:r>
+          </a:p>
+        </p:txBody>
+      </p:sp>
+      <p:sp>
+        <p:nvSpPr>
+          <p:cNvPr id="2" name="judgment-body-0">
+            <a:extLst xmlns:a="http://schemas.openxmlformats.org/drawingml/2006/main">
+              <a:ext uri="{FF2B5EF4-FFF2-40B4-BE49-F238E27FC236}">
+                <a16:creationId xmlns:a16="http://schemas.microsoft.com/office/drawing/2014/main" id="{07CB3B1D-7471-4E6E-ACF8-2DAD438619D3}"/>
+              </a:ext>
+            </a:extLst>
+          </p:cNvPr>
+          <p:cNvSpPr>
+            <a:spLocks xmlns:a="http://schemas.openxmlformats.org/drawingml/2006/main" noGrp="1"/>
+          </p:cNvSpPr>
+          <p:nvPr/>
+        </p:nvSpPr>
+        <p:spPr>
+          <a:xfrm xmlns:a="http://schemas.openxmlformats.org/drawingml/2006/main">
+            <a:off x="666750" y="1066800"/>
+            <a:ext cx="10858500" cy="1009650"/>
+          </a:xfrm>
+          <a:prstGeom xmlns:a="http://schemas.openxmlformats.org/drawingml/2006/main" prst="rect">
+            <a:avLst/>
+          </a:prstGeom>
+          <a:noFill xmlns:a="http://schemas.openxmlformats.org/drawingml/2006/main"/>
+          <a:ln xmlns:a="http://schemas.openxmlformats.org/drawingml/2006/main" w="0">
+            <a:noFill/>
+          </a:ln>
+        </p:spPr>
+        <p:txBody>
+          <a:bodyPr xmlns:a="http://schemas.openxmlformats.org/drawingml/2006/main" lIns="0" tIns="0" rIns="0" bIns="0" anchor="t"/>
+          <a:lstStyle xmlns:a="http://schemas.openxmlformats.org/drawingml/2006/main">
+            <a:defPPr algn="l">
+              <a:defRPr sz="2400" b="0">
+                <a:solidFill>
+                  <a:srgbClr val="263746"/>
+                </a:solidFill>
+                <a:latin typeface="微软雅黑"/>
+                <a:ea typeface="微软雅黑"/>
+                <a:cs typeface="微软雅黑"/>
+              </a:defRPr>
+            </a:defPPr>
+          </a:lstStyle>
+          <a:p xmlns:a="http://schemas.openxmlformats.org/drawingml/2006/main">
+            <a:pPr algn="l">
+              <a:defRPr sz="2400" b="0">
+                <a:solidFill>
+                  <a:srgbClr val="263746"/>
+                </a:solidFill>
+                <a:latin typeface="微软雅黑"/>
+                <a:ea typeface="微软雅黑"/>
+                <a:cs typeface="微软雅黑"/>
+              </a:defRPr>
+            </a:pPr>
+            <a:r>
+              <a:rPr sz="2400" b="0">
+                <a:solidFill>
+                  <a:srgbClr val="263746"/>
+                </a:solidFill>
+                <a:latin typeface="微软雅黑"/>
+                <a:ea typeface="微软雅黑"/>
+                <a:cs typeface="微软雅黑"/>
+              </a:rPr>
+              <a:t>L11 把已核准动作接到小队列，检验恢复与停止。</a:t>
+            </a:r>
+          </a:p>
+        </p:txBody>
+      </p:sp>
+      <p:sp>
+        <p:nvSpPr>
+          <p:cNvPr id="3" name="judgment-body-1">
+            <a:extLst xmlns:a="http://schemas.openxmlformats.org/drawingml/2006/main">
+              <a:ext uri="{FF2B5EF4-FFF2-40B4-BE49-F238E27FC236}">
+                <a16:creationId xmlns:a16="http://schemas.microsoft.com/office/drawing/2014/main" id="{CAB84FAB-6636-4666-881B-E5718D864C56}"/>
+              </a:ext>
+            </a:extLst>
+          </p:cNvPr>
+          <p:cNvSpPr>
+            <a:spLocks xmlns:a="http://schemas.openxmlformats.org/drawingml/2006/main" noGrp="1"/>
+          </p:cNvSpPr>
+          <p:nvPr/>
+        </p:nvSpPr>
+        <p:spPr>
+          <a:xfrm xmlns:a="http://schemas.openxmlformats.org/drawingml/2006/main">
+            <a:off x="666750" y="2238375"/>
+            <a:ext cx="10858500" cy="2076450"/>
+          </a:xfrm>
+          <a:prstGeom xmlns:a="http://schemas.openxmlformats.org/drawingml/2006/main" prst="rect">
+            <a:avLst/>
+          </a:prstGeom>
+          <a:noFill xmlns:a="http://schemas.openxmlformats.org/drawingml/2006/main"/>
+          <a:ln xmlns:a="http://schemas.openxmlformats.org/drawingml/2006/main" w="0">
+            <a:noFill/>
+          </a:ln>
+        </p:spPr>
+        <p:txBody>
+          <a:bodyPr xmlns:a="http://schemas.openxmlformats.org/drawingml/2006/main" lIns="0" tIns="0" rIns="0" bIns="0" anchor="t"/>
+          <a:lstStyle xmlns:a="http://schemas.openxmlformats.org/drawingml/2006/main">
+            <a:defPPr algn="l">
+              <a:defRPr sz="2400" b="0">
+                <a:solidFill>
+                  <a:srgbClr val="263746"/>
+                </a:solidFill>
+                <a:latin typeface="微软雅黑"/>
+                <a:ea typeface="微软雅黑"/>
+                <a:cs typeface="微软雅黑"/>
+              </a:defRPr>
+            </a:defPPr>
+          </a:lstStyle>
+          <a:p xmlns:a="http://schemas.openxmlformats.org/drawingml/2006/main">
+            <a:pPr algn="l">
+              <a:defRPr sz="2400" b="0">
+                <a:solidFill>
+                  <a:srgbClr val="263746"/>
+                </a:solidFill>
+                <a:latin typeface="微软雅黑"/>
+                <a:ea typeface="微软雅黑"/>
+                <a:cs typeface="微软雅黑"/>
+              </a:defRPr>
+            </a:pPr>
+            <a:r>
+              <a:rPr sz="2400" b="0">
+                <a:solidFill>
+                  <a:srgbClr val="263746"/>
+                </a:solidFill>
+                <a:latin typeface="微软雅黑"/>
+                <a:ea typeface="微软雅黑"/>
+                <a:cs typeface="微软雅黑"/>
+              </a:rPr>
+              <a:t>回写已有项目：受限补丁、失败用例、测试结果、trace 与人工决定</a:t>
+            </a:r>
+          </a:p>
+        </p:txBody>
+      </p:sp>
+      <p:sp>
+        <p:nvSpPr>
+          <p:cNvPr id="4" name="judgment-body-2">
+            <a:extLst xmlns:a="http://schemas.openxmlformats.org/drawingml/2006/main">
+              <a:ext uri="{FF2B5EF4-FFF2-40B4-BE49-F238E27FC236}">
+                <a16:creationId xmlns:a16="http://schemas.microsoft.com/office/drawing/2014/main" id="{88A2BAB7-E36B-4A3C-8B1F-ECC4E9C0A6A1}"/>
+              </a:ext>
+            </a:extLst>
+          </p:cNvPr>
+          <p:cNvSpPr>
+            <a:spLocks xmlns:a="http://schemas.openxmlformats.org/drawingml/2006/main" noGrp="1"/>
+          </p:cNvSpPr>
+          <p:nvPr/>
+        </p:nvSpPr>
+        <p:spPr>
+          <a:xfrm xmlns:a="http://schemas.openxmlformats.org/drawingml/2006/main">
+            <a:off x="666750" y="4495800"/>
+            <a:ext cx="10858500" cy="1409700"/>
+          </a:xfrm>
+          <a:prstGeom xmlns:a="http://schemas.openxmlformats.org/drawingml/2006/main" prst="rect">
+            <a:avLst/>
+          </a:prstGeom>
+          <a:noFill xmlns:a="http://schemas.openxmlformats.org/drawingml/2006/main"/>
+          <a:ln xmlns:a="http://schemas.openxmlformats.org/drawingml/2006/main" w="0">
+            <a:noFill/>
+          </a:ln>
+        </p:spPr>
+        <p:txBody>
+          <a:bodyPr xmlns:a="http://schemas.openxmlformats.org/drawingml/2006/main" lIns="0" tIns="0" rIns="0" bIns="0" anchor="t"/>
+          <a:lstStyle xmlns:a="http://schemas.openxmlformats.org/drawingml/2006/main">
+            <a:defPPr algn="l">
+              <a:defRPr sz="2200" b="0">
+                <a:solidFill>
+                  <a:srgbClr val="1F4D78"/>
+                </a:solidFill>
+                <a:latin typeface="微软雅黑"/>
+                <a:ea typeface="微软雅黑"/>
+                <a:cs typeface="微软雅黑"/>
+              </a:defRPr>
+            </a:defPPr>
+          </a:lstStyle>
+          <a:p xmlns:a="http://schemas.openxmlformats.org/drawingml/2006/main">
+            <a:pPr algn="l">
+              <a:defRPr sz="2200" b="0">
+                <a:solidFill>
+                  <a:srgbClr val="1F4D78"/>
+                </a:solidFill>
+                <a:latin typeface="微软雅黑"/>
+                <a:ea typeface="微软雅黑"/>
+                <a:cs typeface="微软雅黑"/>
+              </a:defRPr>
+            </a:pPr>
+            <a:r>
+              <a:rPr sz="2200" b="0">
+                <a:solidFill>
+                  <a:srgbClr val="1F4D78"/>
+                </a:solidFill>
+                <a:latin typeface="微软雅黑"/>
+                <a:ea typeface="微软雅黑"/>
+                <a:cs typeface="微软雅黑"/>
+              </a:rPr>
+              <a:t>只读指定段落，补课堂留下的真实缺口。安装与排障计入课外总预算。</a:t>
+            </a:r>
+          </a:p>
+        </p:txBody>
+      </p:sp>
+      <p:sp>
+        <p:nvSpPr>
+          <p:cNvPr id="5" name="judgment-source">
+            <a:extLst xmlns:a="http://schemas.openxmlformats.org/drawingml/2006/main">
+              <a:ext uri="{FF2B5EF4-FFF2-40B4-BE49-F238E27FC236}">
+                <a16:creationId xmlns:a16="http://schemas.microsoft.com/office/drawing/2014/main" id="{6FABD6E4-1852-48E4-911A-971733613969}"/>
+              </a:ext>
+            </a:extLst>
+          </p:cNvPr>
+          <p:cNvSpPr>
+            <a:spLocks xmlns:a="http://schemas.openxmlformats.org/drawingml/2006/main" noGrp="1"/>
+          </p:cNvSpPr>
+          <p:nvPr/>
+        </p:nvSpPr>
+        <p:spPr>
+          <a:xfrm xmlns:a="http://schemas.openxmlformats.org/drawingml/2006/main">
+            <a:off x="666750" y="6276975"/>
+            <a:ext cx="10572750" cy="209550"/>
+          </a:xfrm>
+          <a:prstGeom xmlns:a="http://schemas.openxmlformats.org/drawingml/2006/main" prst="rect">
+            <a:avLst/>
+          </a:prstGeom>
+          <a:noFill xmlns:a="http://schemas.openxmlformats.org/drawingml/2006/main"/>
+          <a:ln xmlns:a="http://schemas.openxmlformats.org/drawingml/2006/main" w="0">
+            <a:noFill/>
+          </a:ln>
+        </p:spPr>
+        <p:txBody>
+          <a:bodyPr xmlns:a="http://schemas.openxmlformats.org/drawingml/2006/main" lIns="0" tIns="0" rIns="0" bIns="0" anchor="t"/>
+          <a:lstStyle xmlns:a="http://schemas.openxmlformats.org/drawingml/2006/main">
+            <a:defPPr algn="l">
+              <a:defRPr sz="1100" b="0">
+                <a:solidFill>
+                  <a:srgbClr val="667684"/>
+                </a:solidFill>
+                <a:latin typeface="微软雅黑"/>
+                <a:ea typeface="微软雅黑"/>
+                <a:cs typeface="微软雅黑"/>
+              </a:defRPr>
+            </a:defPPr>
+          </a:lstStyle>
+          <a:p xmlns:a="http://schemas.openxmlformats.org/drawingml/2006/main">
+            <a:pPr algn="l">
+              <a:defRPr sz="1100" b="0">
+                <a:solidFill>
+                  <a:srgbClr val="667684"/>
+                </a:solidFill>
+                <a:latin typeface="微软雅黑"/>
+                <a:ea typeface="微软雅黑"/>
+                <a:cs typeface="微软雅黑"/>
+              </a:defRPr>
+            </a:pPr>
+            <a:r>
+              <a:rPr sz="1100" b="0">
+                <a:solidFill>
+                  <a:srgbClr val="667684"/>
+                </a:solidFill>
+                <a:latin typeface="微软雅黑"/>
+                <a:ea typeface="微软雅黑"/>
+                <a:cs typeface="微软雅黑"/>
+              </a:rPr>
+              <a:t>来源：本课判断任务与讲义；构造材料及真实来源按材料包标识</a:t>
+            </a:r>
+          </a:p>
+        </p:txBody>
+      </p:sp>
+      <p:sp>
+        <p:nvSpPr>
+          <p:cNvPr id="6" name="judgment-page">
+            <a:extLst xmlns:a="http://schemas.openxmlformats.org/drawingml/2006/main">
+              <a:ext uri="{FF2B5EF4-FFF2-40B4-BE49-F238E27FC236}">
+                <a16:creationId xmlns:a16="http://schemas.microsoft.com/office/drawing/2014/main" id="{43DB3094-6641-47C9-ABA1-0D1876A177E2}"/>
+              </a:ext>
+            </a:extLst>
+          </p:cNvPr>
+          <p:cNvSpPr>
+            <a:spLocks xmlns:a="http://schemas.openxmlformats.org/drawingml/2006/main" noGrp="1"/>
+          </p:cNvSpPr>
+          <p:nvPr/>
+        </p:nvSpPr>
+        <p:spPr>
+          <a:xfrm xmlns:a="http://schemas.openxmlformats.org/drawingml/2006/main">
+            <a:off x="11715750" y="6562725"/>
+            <a:ext cx="238125" cy="171450"/>
+          </a:xfrm>
+          <a:prstGeom xmlns:a="http://schemas.openxmlformats.org/drawingml/2006/main" prst="rect">
+            <a:avLst/>
+          </a:prstGeom>
+          <a:noFill xmlns:a="http://schemas.openxmlformats.org/drawingml/2006/main"/>
+          <a:ln xmlns:a="http://schemas.openxmlformats.org/drawingml/2006/main" w="0">
+            <a:noFill/>
+          </a:ln>
+        </p:spPr>
+        <p:txBody>
+          <a:bodyPr xmlns:a="http://schemas.openxmlformats.org/drawingml/2006/main" lIns="0" tIns="0" rIns="0" bIns="0" anchor="t"/>
+          <a:lstStyle xmlns:a="http://schemas.openxmlformats.org/drawingml/2006/main">
+            <a:defPPr algn="l">
+              <a:defRPr sz="900" b="0">
+                <a:solidFill>
+                  <a:srgbClr val="A5A5A5"/>
+                </a:solidFill>
+                <a:latin typeface="微软雅黑"/>
+                <a:ea typeface="微软雅黑"/>
+                <a:cs typeface="微软雅黑"/>
+              </a:defRPr>
+            </a:defPPr>
+          </a:lstStyle>
+          <a:p xmlns:a="http://schemas.openxmlformats.org/drawingml/2006/main">
+            <a:pPr algn="l">
+              <a:defRPr sz="900" b="0">
+                <a:solidFill>
+                  <a:srgbClr val="A5A5A5"/>
+                </a:solidFill>
+                <a:latin typeface="微软雅黑"/>
+                <a:ea typeface="微软雅黑"/>
+                <a:cs typeface="微软雅黑"/>
+              </a:defRPr>
+            </a:pPr>
+            <a:r>
+              <a:rPr sz="900" b="0">
+                <a:solidFill>
+                  <a:srgbClr val="A5A5A5"/>
+                </a:solidFill>
+                <a:latin typeface="微软雅黑"/>
+                <a:ea typeface="微软雅黑"/>
+                <a:cs typeface="微软雅黑"/>
+              </a:rPr>
               <a:t>17</a:t>
-            </a:fld>
-            <a:endParaRPr/>
-          </a:p>
-        </p:txBody>
-      </p:sp>
-      <p:sp>
-        <p:nvSpPr>
-          <p:cNvPr id="6" name="brand-header">
-            <a:extLst xmlns:a="http://schemas.openxmlformats.org/drawingml/2006/main">
-              <a:ext uri="{FF2B5EF4-FFF2-40B4-BE49-F238E27FC236}">
-                <a16:creationId xmlns:a16="http://schemas.microsoft.com/office/drawing/2014/main" id="{C4AD80DF-04DD-48B0-AC60-337290BD71F1}"/>
-              </a:ext>
-            </a:extLst>
-          </p:cNvPr>
-          <p:cNvSpPr>
-            <a:spLocks xmlns:a="http://schemas.openxmlformats.org/drawingml/2006/main" noGrp="1"/>
-          </p:cNvSpPr>
-          <p:nvPr/>
-        </p:nvSpPr>
-        <p:spPr>
-          <a:xfrm xmlns:a="http://schemas.openxmlformats.org/drawingml/2006/main">
-            <a:off x="0" y="0"/>
-            <a:ext cx="11887200" cy="685800"/>
-          </a:xfrm>
-          <a:prstGeom xmlns:a="http://schemas.openxmlformats.org/drawingml/2006/main" prst="rect">
-            <a:avLst/>
-          </a:prstGeom>
-          <a:solidFill xmlns:a="http://schemas.openxmlformats.org/drawingml/2006/main">
-            <a:srgbClr val="C8161E"/>
-          </a:solidFill>
-          <a:ln xmlns:a="http://schemas.openxmlformats.org/drawingml/2006/main" w="0">
-            <a:noFill/>
-          </a:ln>
-        </p:spPr>
-      </p:sp>
-      <p:pic>
-        <p:nvPicPr>
-          <p:cNvPr id="27" name=""/>
-          <p:cNvPicPr>
-            <a:picLocks xmlns:a="http://schemas.openxmlformats.org/drawingml/2006/main" noChangeAspect="1"/>
-          </p:cNvPicPr>
-          <p:nvPr/>
-        </p:nvPicPr>
-        <p:blipFill>
-          <a:blip xmlns:r="http://schemas.openxmlformats.org/officeDocument/2006/relationships" xmlns:a="http://schemas.openxmlformats.org/drawingml/2006/main" r:embed="R77ffc45794fe4b63"/>
-          <a:stretch xmlns:a="http://schemas.openxmlformats.org/drawingml/2006/main"/>
-        </p:blipFill>
-        <p:spPr>
-          <a:xfrm xmlns:a="http://schemas.openxmlformats.org/drawingml/2006/main">
-            <a:off x="323850" y="76200"/>
-            <a:ext cx="533400" cy="533400"/>
-          </a:xfrm>
-          <a:prstGeom xmlns:a="http://schemas.openxmlformats.org/drawingml/2006/main" prst="rect">
-            <a:avLst/>
-          </a:prstGeom>
-        </p:spPr>
-      </p:pic>
-      <p:sp>
-        <p:nvSpPr>
-          <p:cNvPr id="8" name="brand-title">
-            <a:extLst xmlns:a="http://schemas.openxmlformats.org/drawingml/2006/main">
-              <a:ext uri="{FF2B5EF4-FFF2-40B4-BE49-F238E27FC236}">
-                <a16:creationId xmlns:a16="http://schemas.microsoft.com/office/drawing/2014/main" id="{0541CA39-6AB1-4629-AD4D-355D1E5882D2}"/>
-              </a:ext>
-            </a:extLst>
-          </p:cNvPr>
-          <p:cNvSpPr>
-            <a:spLocks xmlns:a="http://schemas.openxmlformats.org/drawingml/2006/main" noGrp="1"/>
-          </p:cNvSpPr>
-          <p:nvPr/>
-        </p:nvSpPr>
-        <p:spPr>
-          <a:xfrm xmlns:a="http://schemas.openxmlformats.org/drawingml/2006/main">
-            <a:off x="1028700" y="66675"/>
-            <a:ext cx="10477500" cy="552450"/>
-          </a:xfrm>
-          <a:prstGeom xmlns:a="http://schemas.openxmlformats.org/drawingml/2006/main" prst="rect">
-            <a:avLst/>
-          </a:prstGeom>
-          <a:noFill xmlns:a="http://schemas.openxmlformats.org/drawingml/2006/main"/>
-          <a:ln xmlns:a="http://schemas.openxmlformats.org/drawingml/2006/main" w="0">
-            <a:noFill/>
-          </a:ln>
-        </p:spPr>
-        <p:txBody>
-          <a:bodyPr xmlns:a="http://schemas.openxmlformats.org/drawingml/2006/main" lIns="0" tIns="0" rIns="0" bIns="0" anchor="ctr"/>
-          <a:lstStyle xmlns:a="http://schemas.openxmlformats.org/drawingml/2006/main"/>
-          <a:p xmlns:a="http://schemas.openxmlformats.org/drawingml/2006/main">
-            <a:pPr algn="l">
-              <a:lnSpc>
-                <a:spcPct val="118000"/>
-              </a:lnSpc>
-              <a:buNone/>
-              <a:defRPr sz="3000" b="1">
-                <a:solidFill>
-                  <a:srgbClr val="FFFFFF"/>
-                </a:solidFill>
-                <a:latin typeface="微软雅黑"/>
-                <a:ea typeface="微软雅黑"/>
-                <a:cs typeface="微软雅黑"/>
-              </a:defRPr>
-            </a:pPr>
-            <a:r>
-              <a:rPr sz="3000" b="1">
-                <a:solidFill>
-                  <a:srgbClr val="FFFFFF"/>
-                </a:solidFill>
-                <a:latin typeface="微软雅黑"/>
-                <a:ea typeface="微软雅黑"/>
-                <a:cs typeface="微软雅黑"/>
-              </a:rPr>
-              <a:t>受限执行能否安全重复？</a:t>
-            </a:r>
-          </a:p>
-        </p:txBody>
-      </p:sp>
-      <p:sp>
-        <p:nvSpPr>
-          <p:cNvPr id="9" name="source">
-            <a:extLst xmlns:a="http://schemas.openxmlformats.org/drawingml/2006/main">
-              <a:ext uri="{FF2B5EF4-FFF2-40B4-BE49-F238E27FC236}">
-                <a16:creationId xmlns:a16="http://schemas.microsoft.com/office/drawing/2014/main" id="{975D47BE-11FE-4C4D-8793-F79E354A429C}"/>
-              </a:ext>
-            </a:extLst>
-          </p:cNvPr>
-          <p:cNvSpPr>
-            <a:spLocks xmlns:a="http://schemas.openxmlformats.org/drawingml/2006/main" noGrp="1"/>
-          </p:cNvSpPr>
-          <p:nvPr/>
-        </p:nvSpPr>
-        <p:spPr>
-          <a:xfrm xmlns:a="http://schemas.openxmlformats.org/drawingml/2006/main">
-            <a:off x="609600" y="6067425"/>
-            <a:ext cx="10763250" cy="209550"/>
-          </a:xfrm>
-          <a:prstGeom xmlns:a="http://schemas.openxmlformats.org/drawingml/2006/main" prst="rect">
-            <a:avLst/>
-          </a:prstGeom>
-          <a:noFill xmlns:a="http://schemas.openxmlformats.org/drawingml/2006/main"/>
-          <a:ln xmlns:a="http://schemas.openxmlformats.org/drawingml/2006/main" w="0">
-            <a:noFill/>
-          </a:ln>
-        </p:spPr>
-        <p:txBody>
-          <a:bodyPr xmlns:a="http://schemas.openxmlformats.org/drawingml/2006/main" lIns="0" tIns="0" rIns="0" bIns="0" anchor="t"/>
-          <a:lstStyle xmlns:a="http://schemas.openxmlformats.org/drawingml/2006/main"/>
-          <a:p xmlns:a="http://schemas.openxmlformats.org/drawingml/2006/main">
-            <a:pPr algn="l">
-              <a:lnSpc>
-                <a:spcPct val="118000"/>
-              </a:lnSpc>
-              <a:buNone/>
-              <a:defRPr sz="1100" b="0">
-                <a:solidFill>
-                  <a:srgbClr val="66727D"/>
-                </a:solidFill>
-                <a:latin typeface="微软雅黑"/>
-                <a:ea typeface="微软雅黑"/>
-                <a:cs typeface="微软雅黑"/>
-              </a:defRPr>
-            </a:pPr>
-            <a:r>
-              <a:rPr sz="1100" b="0">
-                <a:solidFill>
-                  <a:srgbClr val="66727D"/>
-                </a:solidFill>
-                <a:latin typeface="微软雅黑"/>
-                <a:ea typeface="微软雅黑"/>
-                <a:cs typeface="微软雅黑"/>
-              </a:rPr>
-              <a:t>来源：lesson-10/slides.md；课程工件与讲义见 speaker notes</a:t>
-            </a:r>
-          </a:p>
-        </p:txBody>
-      </p:sp>
-      <p:sp>
-        <p:nvSpPr>
-          <p:cNvPr id="10" name="chain-line-0">
-            <a:extLst xmlns:a="http://schemas.openxmlformats.org/drawingml/2006/main">
-              <a:ext uri="{FF2B5EF4-FFF2-40B4-BE49-F238E27FC236}">
-                <a16:creationId xmlns:a16="http://schemas.microsoft.com/office/drawing/2014/main" id="{46695E5F-EAAF-4081-A96E-AC96A2ADF3FB}"/>
-              </a:ext>
-            </a:extLst>
-          </p:cNvPr>
-          <p:cNvSpPr>
-            <a:spLocks xmlns:a="http://schemas.openxmlformats.org/drawingml/2006/main" noGrp="1"/>
-          </p:cNvSpPr>
-          <p:nvPr/>
-        </p:nvSpPr>
-        <p:spPr>
-          <a:xfrm xmlns:a="http://schemas.openxmlformats.org/drawingml/2006/main">
-            <a:off x="666750" y="3105150"/>
-            <a:ext cx="2095500" cy="14288"/>
-          </a:xfrm>
-          <a:prstGeom xmlns:a="http://schemas.openxmlformats.org/drawingml/2006/main" prst="rect">
-            <a:avLst/>
-          </a:prstGeom>
-          <a:solidFill xmlns:a="http://schemas.openxmlformats.org/drawingml/2006/main">
-            <a:srgbClr val="1F4D78"/>
-          </a:solidFill>
-          <a:ln xmlns:a="http://schemas.openxmlformats.org/drawingml/2006/main" w="0">
-            <a:noFill/>
-          </a:ln>
-        </p:spPr>
-      </p:sp>
-      <p:sp>
-        <p:nvSpPr>
-          <p:cNvPr id="11" name="chain-0">
-            <a:extLst xmlns:a="http://schemas.openxmlformats.org/drawingml/2006/main">
-              <a:ext uri="{FF2B5EF4-FFF2-40B4-BE49-F238E27FC236}">
-                <a16:creationId xmlns:a16="http://schemas.microsoft.com/office/drawing/2014/main" id="{3CEE13E4-4C5E-47FB-A591-C4ED6B331C14}"/>
-              </a:ext>
-            </a:extLst>
-          </p:cNvPr>
-          <p:cNvSpPr>
-            <a:spLocks xmlns:a="http://schemas.openxmlformats.org/drawingml/2006/main" noGrp="1"/>
-          </p:cNvSpPr>
-          <p:nvPr/>
-        </p:nvSpPr>
-        <p:spPr>
-          <a:xfrm xmlns:a="http://schemas.openxmlformats.org/drawingml/2006/main">
-            <a:off x="666750" y="2381250"/>
-            <a:ext cx="2095500" cy="666750"/>
-          </a:xfrm>
-          <a:prstGeom xmlns:a="http://schemas.openxmlformats.org/drawingml/2006/main" prst="rect">
-            <a:avLst/>
-          </a:prstGeom>
-          <a:noFill xmlns:a="http://schemas.openxmlformats.org/drawingml/2006/main"/>
-          <a:ln xmlns:a="http://schemas.openxmlformats.org/drawingml/2006/main" w="0">
-            <a:noFill/>
-          </a:ln>
-        </p:spPr>
-        <p:txBody>
-          <a:bodyPr xmlns:a="http://schemas.openxmlformats.org/drawingml/2006/main" lIns="0" tIns="0" rIns="0" bIns="0" anchor="ctr"/>
-          <a:lstStyle xmlns:a="http://schemas.openxmlformats.org/drawingml/2006/main"/>
-          <a:p xmlns:a="http://schemas.openxmlformats.org/drawingml/2006/main">
-            <a:pPr algn="ctr">
-              <a:lnSpc>
-                <a:spcPct val="118000"/>
-              </a:lnSpc>
-              <a:buNone/>
-              <a:defRPr sz="2200" b="0">
-                <a:solidFill>
-                  <a:srgbClr val="1F4D78"/>
-                </a:solidFill>
-                <a:latin typeface="微软雅黑"/>
-                <a:ea typeface="微软雅黑"/>
-                <a:cs typeface="微软雅黑"/>
-              </a:defRPr>
-            </a:pPr>
-            <a:r>
-              <a:rPr sz="2200" b="0">
-                <a:solidFill>
-                  <a:srgbClr val="1F4D78"/>
-                </a:solidFill>
-                <a:latin typeface="微软雅黑"/>
-                <a:ea typeface="微软雅黑"/>
-                <a:cs typeface="微软雅黑"/>
-              </a:rPr>
-              <a:t>第 9 课</a:t>
-            </a:r>
-          </a:p>
-          <a:p xmlns:a="http://schemas.openxmlformats.org/drawingml/2006/main">
-            <a:pPr algn="ctr">
-              <a:lnSpc>
-                <a:spcPct val="118000"/>
-              </a:lnSpc>
-              <a:buNone/>
-              <a:defRPr sz="2200" b="0">
-                <a:solidFill>
-                  <a:srgbClr val="1F4D78"/>
-                </a:solidFill>
-                <a:latin typeface="微软雅黑"/>
-                <a:ea typeface="微软雅黑"/>
-                <a:cs typeface="微软雅黑"/>
-              </a:defRPr>
-            </a:pPr>
-            <a:r>
-              <a:rPr sz="2200" b="0">
-                <a:solidFill>
-                  <a:srgbClr val="1F4D78"/>
-                </a:solidFill>
-                <a:latin typeface="微软雅黑"/>
-                <a:ea typeface="微软雅黑"/>
-                <a:cs typeface="微软雅黑"/>
-              </a:rPr>
-              <a:t>实验规格</a:t>
-            </a:r>
-          </a:p>
-        </p:txBody>
-      </p:sp>
-      <p:sp>
-        <p:nvSpPr>
-          <p:cNvPr id="12" name="chain-arrow-0">
-            <a:extLst xmlns:a="http://schemas.openxmlformats.org/drawingml/2006/main">
-              <a:ext uri="{FF2B5EF4-FFF2-40B4-BE49-F238E27FC236}">
-                <a16:creationId xmlns:a16="http://schemas.microsoft.com/office/drawing/2014/main" id="{2AB5892A-44A6-4CB7-938C-B91F3C0ADA0F}"/>
-              </a:ext>
-            </a:extLst>
-          </p:cNvPr>
-          <p:cNvSpPr>
-            <a:spLocks xmlns:a="http://schemas.openxmlformats.org/drawingml/2006/main" noGrp="1"/>
-          </p:cNvSpPr>
-          <p:nvPr/>
-        </p:nvSpPr>
-        <p:spPr>
-          <a:xfrm xmlns:a="http://schemas.openxmlformats.org/drawingml/2006/main">
-            <a:off x="2762250" y="2552700"/>
-            <a:ext cx="762000" cy="323850"/>
-          </a:xfrm>
-          <a:prstGeom xmlns:a="http://schemas.openxmlformats.org/drawingml/2006/main" prst="rect">
-            <a:avLst/>
-          </a:prstGeom>
-          <a:noFill xmlns:a="http://schemas.openxmlformats.org/drawingml/2006/main"/>
-          <a:ln xmlns:a="http://schemas.openxmlformats.org/drawingml/2006/main" w="0">
-            <a:noFill/>
-          </a:ln>
-        </p:spPr>
-        <p:txBody>
-          <a:bodyPr xmlns:a="http://schemas.openxmlformats.org/drawingml/2006/main" lIns="0" tIns="0" rIns="0" bIns="0" anchor="ctr"/>
-          <a:lstStyle xmlns:a="http://schemas.openxmlformats.org/drawingml/2006/main"/>
-          <a:p xmlns:a="http://schemas.openxmlformats.org/drawingml/2006/main">
-            <a:pPr algn="ctr">
-              <a:lnSpc>
-                <a:spcPct val="118000"/>
-              </a:lnSpc>
-              <a:buNone/>
-              <a:defRPr sz="2400" b="0">
-                <a:solidFill>
-                  <a:srgbClr val="1F4D78"/>
-                </a:solidFill>
-                <a:latin typeface="微软雅黑"/>
-                <a:ea typeface="微软雅黑"/>
-                <a:cs typeface="微软雅黑"/>
-              </a:defRPr>
-            </a:pPr>
-            <a:r>
-              <a:rPr sz="2400" b="0">
-                <a:solidFill>
-                  <a:srgbClr val="1F4D78"/>
-                </a:solidFill>
-                <a:latin typeface="微软雅黑"/>
-                <a:ea typeface="微软雅黑"/>
-                <a:cs typeface="微软雅黑"/>
-              </a:rPr>
-              <a:t>→</a:t>
-            </a:r>
-          </a:p>
-        </p:txBody>
-      </p:sp>
-      <p:sp>
-        <p:nvSpPr>
-          <p:cNvPr id="13" name="chain-line-1">
-            <a:extLst xmlns:a="http://schemas.openxmlformats.org/drawingml/2006/main">
-              <a:ext uri="{FF2B5EF4-FFF2-40B4-BE49-F238E27FC236}">
-                <a16:creationId xmlns:a16="http://schemas.microsoft.com/office/drawing/2014/main" id="{D5E3C18E-6FC9-45C0-B824-A6821DDBE976}"/>
-              </a:ext>
-            </a:extLst>
-          </p:cNvPr>
-          <p:cNvSpPr>
-            <a:spLocks xmlns:a="http://schemas.openxmlformats.org/drawingml/2006/main" noGrp="1"/>
-          </p:cNvSpPr>
-          <p:nvPr/>
-        </p:nvSpPr>
-        <p:spPr>
-          <a:xfrm xmlns:a="http://schemas.openxmlformats.org/drawingml/2006/main">
-            <a:off x="3524250" y="3105150"/>
-            <a:ext cx="2095500" cy="14288"/>
-          </a:xfrm>
-          <a:prstGeom xmlns:a="http://schemas.openxmlformats.org/drawingml/2006/main" prst="rect">
-            <a:avLst/>
-          </a:prstGeom>
-          <a:solidFill xmlns:a="http://schemas.openxmlformats.org/drawingml/2006/main">
-            <a:srgbClr val="1F4D78"/>
-          </a:solidFill>
-          <a:ln xmlns:a="http://schemas.openxmlformats.org/drawingml/2006/main" w="0">
-            <a:noFill/>
-          </a:ln>
-        </p:spPr>
-      </p:sp>
-      <p:sp>
-        <p:nvSpPr>
-          <p:cNvPr id="14" name="chain-1">
-            <a:extLst xmlns:a="http://schemas.openxmlformats.org/drawingml/2006/main">
-              <a:ext uri="{FF2B5EF4-FFF2-40B4-BE49-F238E27FC236}">
-                <a16:creationId xmlns:a16="http://schemas.microsoft.com/office/drawing/2014/main" id="{F399C082-838A-4F22-98B3-A289E5E32C2D}"/>
-              </a:ext>
-            </a:extLst>
-          </p:cNvPr>
-          <p:cNvSpPr>
-            <a:spLocks xmlns:a="http://schemas.openxmlformats.org/drawingml/2006/main" noGrp="1"/>
-          </p:cNvSpPr>
-          <p:nvPr/>
-        </p:nvSpPr>
-        <p:spPr>
-          <a:xfrm xmlns:a="http://schemas.openxmlformats.org/drawingml/2006/main">
-            <a:off x="3524250" y="2381250"/>
-            <a:ext cx="2095500" cy="666750"/>
-          </a:xfrm>
-          <a:prstGeom xmlns:a="http://schemas.openxmlformats.org/drawingml/2006/main" prst="rect">
-            <a:avLst/>
-          </a:prstGeom>
-          <a:noFill xmlns:a="http://schemas.openxmlformats.org/drawingml/2006/main"/>
-          <a:ln xmlns:a="http://schemas.openxmlformats.org/drawingml/2006/main" w="0">
-            <a:noFill/>
-          </a:ln>
-        </p:spPr>
-        <p:txBody>
-          <a:bodyPr xmlns:a="http://schemas.openxmlformats.org/drawingml/2006/main" lIns="0" tIns="0" rIns="0" bIns="0" anchor="ctr"/>
-          <a:lstStyle xmlns:a="http://schemas.openxmlformats.org/drawingml/2006/main"/>
-          <a:p xmlns:a="http://schemas.openxmlformats.org/drawingml/2006/main">
-            <a:pPr algn="ctr">
-              <a:lnSpc>
-                <a:spcPct val="118000"/>
-              </a:lnSpc>
-              <a:buNone/>
-              <a:defRPr sz="2200" b="0">
-                <a:solidFill>
-                  <a:srgbClr val="1F4D78"/>
-                </a:solidFill>
-                <a:latin typeface="微软雅黑"/>
-                <a:ea typeface="微软雅黑"/>
-                <a:cs typeface="微软雅黑"/>
-              </a:defRPr>
-            </a:pPr>
-            <a:r>
-              <a:rPr sz="2200" b="0">
-                <a:solidFill>
-                  <a:srgbClr val="1F4D78"/>
-                </a:solidFill>
-                <a:latin typeface="微软雅黑"/>
-                <a:ea typeface="微软雅黑"/>
-                <a:cs typeface="微软雅黑"/>
-              </a:rPr>
-              <a:t>第 10 课</a:t>
-            </a:r>
-          </a:p>
-          <a:p xmlns:a="http://schemas.openxmlformats.org/drawingml/2006/main">
-            <a:pPr algn="ctr">
-              <a:lnSpc>
-                <a:spcPct val="118000"/>
-              </a:lnSpc>
-              <a:buNone/>
-              <a:defRPr sz="2200" b="0">
-                <a:solidFill>
-                  <a:srgbClr val="1F4D78"/>
-                </a:solidFill>
-                <a:latin typeface="微软雅黑"/>
-                <a:ea typeface="微软雅黑"/>
-                <a:cs typeface="微软雅黑"/>
-              </a:defRPr>
-            </a:pPr>
-            <a:r>
-              <a:rPr sz="2200" b="0">
-                <a:solidFill>
-                  <a:srgbClr val="1F4D78"/>
-                </a:solidFill>
-                <a:latin typeface="微软雅黑"/>
-                <a:ea typeface="微软雅黑"/>
-                <a:cs typeface="微软雅黑"/>
-              </a:rPr>
-              <a:t>受限执行</a:t>
-            </a:r>
-          </a:p>
-        </p:txBody>
-      </p:sp>
-      <p:sp>
-        <p:nvSpPr>
-          <p:cNvPr id="15" name="chain-arrow-1">
-            <a:extLst xmlns:a="http://schemas.openxmlformats.org/drawingml/2006/main">
-              <a:ext uri="{FF2B5EF4-FFF2-40B4-BE49-F238E27FC236}">
-                <a16:creationId xmlns:a16="http://schemas.microsoft.com/office/drawing/2014/main" id="{A16D2DB7-4C9A-46DB-8C62-CFA94E1D385D}"/>
-              </a:ext>
-            </a:extLst>
-          </p:cNvPr>
-          <p:cNvSpPr>
-            <a:spLocks xmlns:a="http://schemas.openxmlformats.org/drawingml/2006/main" noGrp="1"/>
-          </p:cNvSpPr>
-          <p:nvPr/>
-        </p:nvSpPr>
-        <p:spPr>
-          <a:xfrm xmlns:a="http://schemas.openxmlformats.org/drawingml/2006/main">
-            <a:off x="5619750" y="2552700"/>
-            <a:ext cx="762000" cy="323850"/>
-          </a:xfrm>
-          <a:prstGeom xmlns:a="http://schemas.openxmlformats.org/drawingml/2006/main" prst="rect">
-            <a:avLst/>
-          </a:prstGeom>
-          <a:noFill xmlns:a="http://schemas.openxmlformats.org/drawingml/2006/main"/>
-          <a:ln xmlns:a="http://schemas.openxmlformats.org/drawingml/2006/main" w="0">
-            <a:noFill/>
-          </a:ln>
-        </p:spPr>
-        <p:txBody>
-          <a:bodyPr xmlns:a="http://schemas.openxmlformats.org/drawingml/2006/main" lIns="0" tIns="0" rIns="0" bIns="0" anchor="ctr"/>
-          <a:lstStyle xmlns:a="http://schemas.openxmlformats.org/drawingml/2006/main"/>
-          <a:p xmlns:a="http://schemas.openxmlformats.org/drawingml/2006/main">
-            <a:pPr algn="ctr">
-              <a:lnSpc>
-                <a:spcPct val="118000"/>
-              </a:lnSpc>
-              <a:buNone/>
-              <a:defRPr sz="2400" b="0">
-                <a:solidFill>
-                  <a:srgbClr val="1F4D78"/>
-                </a:solidFill>
-                <a:latin typeface="微软雅黑"/>
-                <a:ea typeface="微软雅黑"/>
-                <a:cs typeface="微软雅黑"/>
-              </a:defRPr>
-            </a:pPr>
-            <a:r>
-              <a:rPr sz="2400" b="0">
-                <a:solidFill>
-                  <a:srgbClr val="1F4D78"/>
-                </a:solidFill>
-                <a:latin typeface="微软雅黑"/>
-                <a:ea typeface="微软雅黑"/>
-                <a:cs typeface="微软雅黑"/>
-              </a:rPr>
-              <a:t>→</a:t>
-            </a:r>
-          </a:p>
-        </p:txBody>
-      </p:sp>
-      <p:sp>
-        <p:nvSpPr>
-          <p:cNvPr id="16" name="chain-sub-1">
-            <a:extLst xmlns:a="http://schemas.openxmlformats.org/drawingml/2006/main">
-              <a:ext uri="{FF2B5EF4-FFF2-40B4-BE49-F238E27FC236}">
-                <a16:creationId xmlns:a16="http://schemas.microsoft.com/office/drawing/2014/main" id="{515D3CDB-9B93-42A9-86CE-E5C3F3A72F46}"/>
-              </a:ext>
-            </a:extLst>
-          </p:cNvPr>
-          <p:cNvSpPr>
-            <a:spLocks xmlns:a="http://schemas.openxmlformats.org/drawingml/2006/main" noGrp="1"/>
-          </p:cNvSpPr>
-          <p:nvPr/>
-        </p:nvSpPr>
-        <p:spPr>
-          <a:xfrm xmlns:a="http://schemas.openxmlformats.org/drawingml/2006/main">
-            <a:off x="3524250" y="3257550"/>
-            <a:ext cx="2095500" cy="571500"/>
-          </a:xfrm>
-          <a:prstGeom xmlns:a="http://schemas.openxmlformats.org/drawingml/2006/main" prst="rect">
-            <a:avLst/>
-          </a:prstGeom>
-          <a:noFill xmlns:a="http://schemas.openxmlformats.org/drawingml/2006/main"/>
-          <a:ln xmlns:a="http://schemas.openxmlformats.org/drawingml/2006/main" w="0">
-            <a:noFill/>
-          </a:ln>
-        </p:spPr>
-        <p:txBody>
-          <a:bodyPr xmlns:a="http://schemas.openxmlformats.org/drawingml/2006/main" lIns="0" tIns="0" rIns="0" bIns="0" anchor="t"/>
-          <a:lstStyle xmlns:a="http://schemas.openxmlformats.org/drawingml/2006/main"/>
-          <a:p xmlns:a="http://schemas.openxmlformats.org/drawingml/2006/main">
-            <a:pPr algn="ctr">
-              <a:lnSpc>
-                <a:spcPct val="118000"/>
-              </a:lnSpc>
-              <a:buNone/>
-              <a:defRPr sz="2000" b="0">
-                <a:solidFill>
-                  <a:srgbClr val="66727D"/>
-                </a:solidFill>
-                <a:latin typeface="微软雅黑"/>
-                <a:ea typeface="微软雅黑"/>
-                <a:cs typeface="微软雅黑"/>
-              </a:defRPr>
-            </a:pPr>
-            <a:r>
-              <a:rPr sz="2000" b="0">
-                <a:solidFill>
-                  <a:srgbClr val="66727D"/>
-                </a:solidFill>
-                <a:latin typeface="微软雅黑"/>
-                <a:ea typeface="微软雅黑"/>
-                <a:cs typeface="微软雅黑"/>
-              </a:rPr>
-              <a:t>当前位置 / 输出</a:t>
-            </a:r>
-          </a:p>
-        </p:txBody>
-      </p:sp>
-      <p:sp>
-        <p:nvSpPr>
-          <p:cNvPr id="17" name="chain-line-2">
-            <a:extLst xmlns:a="http://schemas.openxmlformats.org/drawingml/2006/main">
-              <a:ext uri="{FF2B5EF4-FFF2-40B4-BE49-F238E27FC236}">
-                <a16:creationId xmlns:a16="http://schemas.microsoft.com/office/drawing/2014/main" id="{C3E3E332-9C63-47F3-85DD-1D0FB329D53B}"/>
-              </a:ext>
-            </a:extLst>
-          </p:cNvPr>
-          <p:cNvSpPr>
-            <a:spLocks xmlns:a="http://schemas.openxmlformats.org/drawingml/2006/main" noGrp="1"/>
-          </p:cNvSpPr>
-          <p:nvPr/>
-        </p:nvSpPr>
-        <p:spPr>
-          <a:xfrm xmlns:a="http://schemas.openxmlformats.org/drawingml/2006/main">
-            <a:off x="6381750" y="3105150"/>
-            <a:ext cx="2095500" cy="14288"/>
-          </a:xfrm>
-          <a:prstGeom xmlns:a="http://schemas.openxmlformats.org/drawingml/2006/main" prst="rect">
-            <a:avLst/>
-          </a:prstGeom>
-          <a:solidFill xmlns:a="http://schemas.openxmlformats.org/drawingml/2006/main">
-            <a:srgbClr val="1F4D78"/>
-          </a:solidFill>
-          <a:ln xmlns:a="http://schemas.openxmlformats.org/drawingml/2006/main" w="0">
-            <a:noFill/>
-          </a:ln>
-        </p:spPr>
-      </p:sp>
-      <p:sp>
-        <p:nvSpPr>
-          <p:cNvPr id="18" name="chain-2">
-            <a:extLst xmlns:a="http://schemas.openxmlformats.org/drawingml/2006/main">
-              <a:ext uri="{FF2B5EF4-FFF2-40B4-BE49-F238E27FC236}">
-                <a16:creationId xmlns:a16="http://schemas.microsoft.com/office/drawing/2014/main" id="{73F0DFCE-71A7-4D59-BC91-B9DCF97FB1F4}"/>
-              </a:ext>
-            </a:extLst>
-          </p:cNvPr>
-          <p:cNvSpPr>
-            <a:spLocks xmlns:a="http://schemas.openxmlformats.org/drawingml/2006/main" noGrp="1"/>
-          </p:cNvSpPr>
-          <p:nvPr/>
-        </p:nvSpPr>
-        <p:spPr>
-          <a:xfrm xmlns:a="http://schemas.openxmlformats.org/drawingml/2006/main">
-            <a:off x="6381750" y="2381250"/>
-            <a:ext cx="2095500" cy="666750"/>
-          </a:xfrm>
-          <a:prstGeom xmlns:a="http://schemas.openxmlformats.org/drawingml/2006/main" prst="rect">
-            <a:avLst/>
-          </a:prstGeom>
-          <a:noFill xmlns:a="http://schemas.openxmlformats.org/drawingml/2006/main"/>
-          <a:ln xmlns:a="http://schemas.openxmlformats.org/drawingml/2006/main" w="0">
-            <a:noFill/>
-          </a:ln>
-        </p:spPr>
-        <p:txBody>
-          <a:bodyPr xmlns:a="http://schemas.openxmlformats.org/drawingml/2006/main" lIns="0" tIns="0" rIns="0" bIns="0" anchor="ctr"/>
-          <a:lstStyle xmlns:a="http://schemas.openxmlformats.org/drawingml/2006/main"/>
-          <a:p xmlns:a="http://schemas.openxmlformats.org/drawingml/2006/main">
-            <a:pPr algn="ctr">
-              <a:lnSpc>
-                <a:spcPct val="118000"/>
-              </a:lnSpc>
-              <a:buNone/>
-              <a:defRPr sz="2200" b="0">
-                <a:solidFill>
-                  <a:srgbClr val="1F4D78"/>
-                </a:solidFill>
-                <a:latin typeface="微软雅黑"/>
-                <a:ea typeface="微软雅黑"/>
-                <a:cs typeface="微软雅黑"/>
-              </a:defRPr>
-            </a:pPr>
-            <a:r>
-              <a:rPr sz="2200" b="0">
-                <a:solidFill>
-                  <a:srgbClr val="1F4D78"/>
-                </a:solidFill>
-                <a:latin typeface="微软雅黑"/>
-                <a:ea typeface="微软雅黑"/>
-                <a:cs typeface="微软雅黑"/>
-              </a:rPr>
-              <a:t>第 11 课</a:t>
-            </a:r>
-          </a:p>
-          <a:p xmlns:a="http://schemas.openxmlformats.org/drawingml/2006/main">
-            <a:pPr algn="ctr">
-              <a:lnSpc>
-                <a:spcPct val="118000"/>
-              </a:lnSpc>
-              <a:buNone/>
-              <a:defRPr sz="2200" b="0">
-                <a:solidFill>
-                  <a:srgbClr val="1F4D78"/>
-                </a:solidFill>
-                <a:latin typeface="微软雅黑"/>
-                <a:ea typeface="微软雅黑"/>
-                <a:cs typeface="微软雅黑"/>
-              </a:defRPr>
-            </a:pPr>
-            <a:r>
-              <a:rPr sz="2200" b="0">
-                <a:solidFill>
-                  <a:srgbClr val="1F4D78"/>
-                </a:solidFill>
-                <a:latin typeface="微软雅黑"/>
-                <a:ea typeface="微软雅黑"/>
-                <a:cs typeface="微软雅黑"/>
-              </a:rPr>
-              <a:t>冻结循环</a:t>
-            </a:r>
-          </a:p>
-        </p:txBody>
-      </p:sp>
-      <p:sp>
-        <p:nvSpPr>
-          <p:cNvPr id="19" name="chain-arrow-2">
-            <a:extLst xmlns:a="http://schemas.openxmlformats.org/drawingml/2006/main">
-              <a:ext uri="{FF2B5EF4-FFF2-40B4-BE49-F238E27FC236}">
-                <a16:creationId xmlns:a16="http://schemas.microsoft.com/office/drawing/2014/main" id="{9756F2D4-2B00-46AB-91E8-DA9A7DD558DB}"/>
-              </a:ext>
-            </a:extLst>
-          </p:cNvPr>
-          <p:cNvSpPr>
-            <a:spLocks xmlns:a="http://schemas.openxmlformats.org/drawingml/2006/main" noGrp="1"/>
-          </p:cNvSpPr>
-          <p:nvPr/>
-        </p:nvSpPr>
-        <p:spPr>
-          <a:xfrm xmlns:a="http://schemas.openxmlformats.org/drawingml/2006/main">
-            <a:off x="8477250" y="2552700"/>
-            <a:ext cx="762000" cy="323850"/>
-          </a:xfrm>
-          <a:prstGeom xmlns:a="http://schemas.openxmlformats.org/drawingml/2006/main" prst="rect">
-            <a:avLst/>
-          </a:prstGeom>
-          <a:noFill xmlns:a="http://schemas.openxmlformats.org/drawingml/2006/main"/>
-          <a:ln xmlns:a="http://schemas.openxmlformats.org/drawingml/2006/main" w="0">
-            <a:noFill/>
-          </a:ln>
-        </p:spPr>
-        <p:txBody>
-          <a:bodyPr xmlns:a="http://schemas.openxmlformats.org/drawingml/2006/main" lIns="0" tIns="0" rIns="0" bIns="0" anchor="ctr"/>
-          <a:lstStyle xmlns:a="http://schemas.openxmlformats.org/drawingml/2006/main"/>
-          <a:p xmlns:a="http://schemas.openxmlformats.org/drawingml/2006/main">
-            <a:pPr algn="ctr">
-              <a:lnSpc>
-                <a:spcPct val="118000"/>
-              </a:lnSpc>
-              <a:buNone/>
-              <a:defRPr sz="2400" b="0">
-                <a:solidFill>
-                  <a:srgbClr val="1F4D78"/>
-                </a:solidFill>
-                <a:latin typeface="微软雅黑"/>
-                <a:ea typeface="微软雅黑"/>
-                <a:cs typeface="微软雅黑"/>
-              </a:defRPr>
-            </a:pPr>
-            <a:r>
-              <a:rPr sz="2400" b="0">
-                <a:solidFill>
-                  <a:srgbClr val="1F4D78"/>
-                </a:solidFill>
-                <a:latin typeface="微软雅黑"/>
-                <a:ea typeface="微软雅黑"/>
-                <a:cs typeface="微软雅黑"/>
-              </a:rPr>
-              <a:t>→</a:t>
-            </a:r>
-          </a:p>
-        </p:txBody>
-      </p:sp>
-      <p:sp>
-        <p:nvSpPr>
-          <p:cNvPr id="20" name="chain-line-3">
-            <a:extLst xmlns:a="http://schemas.openxmlformats.org/drawingml/2006/main">
-              <a:ext uri="{FF2B5EF4-FFF2-40B4-BE49-F238E27FC236}">
-                <a16:creationId xmlns:a16="http://schemas.microsoft.com/office/drawing/2014/main" id="{895DEBCB-E9BB-43BF-8635-938B8E30DA3B}"/>
-              </a:ext>
-            </a:extLst>
-          </p:cNvPr>
-          <p:cNvSpPr>
-            <a:spLocks xmlns:a="http://schemas.openxmlformats.org/drawingml/2006/main" noGrp="1"/>
-          </p:cNvSpPr>
-          <p:nvPr/>
-        </p:nvSpPr>
-        <p:spPr>
-          <a:xfrm xmlns:a="http://schemas.openxmlformats.org/drawingml/2006/main">
-            <a:off x="9239250" y="3105150"/>
-            <a:ext cx="2095500" cy="14288"/>
-          </a:xfrm>
-          <a:prstGeom xmlns:a="http://schemas.openxmlformats.org/drawingml/2006/main" prst="rect">
-            <a:avLst/>
-          </a:prstGeom>
-          <a:solidFill xmlns:a="http://schemas.openxmlformats.org/drawingml/2006/main">
-            <a:srgbClr val="1F4D78"/>
-          </a:solidFill>
-          <a:ln xmlns:a="http://schemas.openxmlformats.org/drawingml/2006/main" w="0">
-            <a:noFill/>
-          </a:ln>
-        </p:spPr>
-      </p:sp>
-      <p:sp>
-        <p:nvSpPr>
-          <p:cNvPr id="21" name="chain-3">
-            <a:extLst xmlns:a="http://schemas.openxmlformats.org/drawingml/2006/main">
-              <a:ext uri="{FF2B5EF4-FFF2-40B4-BE49-F238E27FC236}">
-                <a16:creationId xmlns:a16="http://schemas.microsoft.com/office/drawing/2014/main" id="{09F0D7AF-420A-4B67-BE55-6661DAE8ABB5}"/>
-              </a:ext>
-            </a:extLst>
-          </p:cNvPr>
-          <p:cNvSpPr>
-            <a:spLocks xmlns:a="http://schemas.openxmlformats.org/drawingml/2006/main" noGrp="1"/>
-          </p:cNvSpPr>
-          <p:nvPr/>
-        </p:nvSpPr>
-        <p:spPr>
-          <a:xfrm xmlns:a="http://schemas.openxmlformats.org/drawingml/2006/main">
-            <a:off x="9239250" y="2381250"/>
-            <a:ext cx="2095500" cy="666750"/>
-          </a:xfrm>
-          <a:prstGeom xmlns:a="http://schemas.openxmlformats.org/drawingml/2006/main" prst="rect">
-            <a:avLst/>
-          </a:prstGeom>
-          <a:noFill xmlns:a="http://schemas.openxmlformats.org/drawingml/2006/main"/>
-          <a:ln xmlns:a="http://schemas.openxmlformats.org/drawingml/2006/main" w="0">
-            <a:noFill/>
-          </a:ln>
-        </p:spPr>
-        <p:txBody>
-          <a:bodyPr xmlns:a="http://schemas.openxmlformats.org/drawingml/2006/main" lIns="0" tIns="0" rIns="0" bIns="0" anchor="ctr"/>
-          <a:lstStyle xmlns:a="http://schemas.openxmlformats.org/drawingml/2006/main"/>
-          <a:p xmlns:a="http://schemas.openxmlformats.org/drawingml/2006/main">
-            <a:pPr algn="ctr">
-              <a:lnSpc>
-                <a:spcPct val="118000"/>
-              </a:lnSpc>
-              <a:buNone/>
-              <a:defRPr sz="2200" b="0">
-                <a:solidFill>
-                  <a:srgbClr val="1F4D78"/>
-                </a:solidFill>
-                <a:latin typeface="微软雅黑"/>
-                <a:ea typeface="微软雅黑"/>
-                <a:cs typeface="微软雅黑"/>
-              </a:defRPr>
-            </a:pPr>
-            <a:r>
-              <a:rPr sz="2200" b="0">
-                <a:solidFill>
-                  <a:srgbClr val="1F4D78"/>
-                </a:solidFill>
-                <a:latin typeface="微软雅黑"/>
-                <a:ea typeface="微软雅黑"/>
-                <a:cs typeface="微软雅黑"/>
-              </a:rPr>
-              <a:t>第 13 课</a:t>
-            </a:r>
-          </a:p>
-          <a:p xmlns:a="http://schemas.openxmlformats.org/drawingml/2006/main">
-            <a:pPr algn="ctr">
-              <a:lnSpc>
-                <a:spcPct val="118000"/>
-              </a:lnSpc>
-              <a:buNone/>
-              <a:defRPr sz="2200" b="0">
-                <a:solidFill>
-                  <a:srgbClr val="1F4D78"/>
-                </a:solidFill>
-                <a:latin typeface="微软雅黑"/>
-                <a:ea typeface="微软雅黑"/>
-                <a:cs typeface="微软雅黑"/>
-              </a:defRPr>
-            </a:pPr>
-            <a:r>
-              <a:rPr sz="2200" b="0">
-                <a:solidFill>
-                  <a:srgbClr val="1F4D78"/>
-                </a:solidFill>
-                <a:latin typeface="微软雅黑"/>
-                <a:ea typeface="微软雅黑"/>
-                <a:cs typeface="微软雅黑"/>
-              </a:rPr>
-              <a:t>评价证据</a:t>
-            </a:r>
-          </a:p>
-        </p:txBody>
-      </p:sp>
-      <p:sp>
-        <p:nvSpPr>
-          <p:cNvPr id="22" name="exit">
-            <a:extLst xmlns:a="http://schemas.openxmlformats.org/drawingml/2006/main">
-              <a:ext uri="{FF2B5EF4-FFF2-40B4-BE49-F238E27FC236}">
-                <a16:creationId xmlns:a16="http://schemas.microsoft.com/office/drawing/2014/main" id="{26B08DB9-24A7-4348-8ED1-0993BB739DAB}"/>
-              </a:ext>
-            </a:extLst>
-          </p:cNvPr>
-          <p:cNvSpPr>
-            <a:spLocks xmlns:a="http://schemas.openxmlformats.org/drawingml/2006/main" noGrp="1"/>
-          </p:cNvSpPr>
-          <p:nvPr/>
-        </p:nvSpPr>
-        <p:spPr>
-          <a:xfrm xmlns:a="http://schemas.openxmlformats.org/drawingml/2006/main">
-            <a:off x="1428750" y="4476750"/>
-            <a:ext cx="9334500" cy="762000"/>
-          </a:xfrm>
-          <a:prstGeom xmlns:a="http://schemas.openxmlformats.org/drawingml/2006/main" prst="rect">
-            <a:avLst/>
-          </a:prstGeom>
-          <a:noFill xmlns:a="http://schemas.openxmlformats.org/drawingml/2006/main"/>
-          <a:ln xmlns:a="http://schemas.openxmlformats.org/drawingml/2006/main" w="0">
-            <a:noFill/>
-          </a:ln>
-        </p:spPr>
-        <p:txBody>
-          <a:bodyPr xmlns:a="http://schemas.openxmlformats.org/drawingml/2006/main" lIns="0" tIns="0" rIns="0" bIns="0" anchor="t"/>
-          <a:lstStyle xmlns:a="http://schemas.openxmlformats.org/drawingml/2006/main"/>
-          <a:p xmlns:a="http://schemas.openxmlformats.org/drawingml/2006/main">
-            <a:pPr algn="ctr">
-              <a:lnSpc>
-                <a:spcPct val="118000"/>
-              </a:lnSpc>
-              <a:buNone/>
-              <a:defRPr sz="2400" b="0">
-                <a:solidFill>
-                  <a:srgbClr val="1F4D78"/>
-                </a:solidFill>
-                <a:latin typeface="微软雅黑"/>
-                <a:ea typeface="微软雅黑"/>
-                <a:cs typeface="微软雅黑"/>
-              </a:defRPr>
-            </a:pPr>
-            <a:r>
-              <a:rPr sz="2400" b="0">
-                <a:solidFill>
-                  <a:srgbClr val="1F4D78"/>
-                </a:solidFill>
-                <a:latin typeface="微软雅黑"/>
-                <a:ea typeface="微软雅黑"/>
-                <a:cs typeface="微软雅黑"/>
-              </a:rPr>
-              <a:t>保存：任务契约｜一次可核验 diff｜至少一条失败或越权记录</a:t>
             </a:r>
           </a:p>
         </p:txBody>
@@ -16155,35 +12774,55 @@
       </p:grpSpPr>
       <p:sp>
         <p:nvSpPr>
-          <p:cNvPr id="4" name="Text Placeholder 3">
-            <a:extLst xmlns:a="http://schemas.openxmlformats.org/drawingml/2006/main">
-              <a:ext uri="{FF2B5EF4-FFF2-40B4-BE49-F238E27FC236}">
-                <a16:creationId xmlns:a16="http://schemas.microsoft.com/office/drawing/2014/main" id="{4D941B40-7A0A-534E-3563-CA11753C8E3F}"/>
-              </a:ext>
-            </a:extLst>
-          </p:cNvPr>
-          <p:cNvSpPr>
-            <a:spLocks xmlns:a="http://schemas.openxmlformats.org/drawingml/2006/main" noGrp="1"/>
-          </p:cNvSpPr>
-          <p:nvPr>
-            <p:ph type="body" idx="14"/>
-          </p:nvPr>
-        </p:nvSpPr>
-        <p:spPr>
-          <a:xfrm xmlns:a="http://schemas.openxmlformats.org/drawingml/2006/main">
-            <a:off x="1028700" y="57150"/>
-            <a:ext cx="10668000" cy="571500"/>
-          </a:xfrm>
-        </p:spPr>
-        <p:txBody>
-          <a:bodyPr xmlns:a="http://schemas.openxmlformats.org/drawingml/2006/main" lIns="0" tIns="0" rIns="0" bIns="0" anchor="ctr"/>
-          <a:lstStyle xmlns:a="http://schemas.openxmlformats.org/drawingml/2006/main"/>
+          <p:cNvPr id="7" name="judgment-title">
+            <a:extLst xmlns:a="http://schemas.openxmlformats.org/drawingml/2006/main">
+              <a:ext uri="{FF2B5EF4-FFF2-40B4-BE49-F238E27FC236}">
+                <a16:creationId xmlns:a16="http://schemas.microsoft.com/office/drawing/2014/main" id="{78B9E473-E540-4104-BF35-523431439C13}"/>
+              </a:ext>
+            </a:extLst>
+          </p:cNvPr>
+          <p:cNvSpPr>
+            <a:spLocks xmlns:a="http://schemas.openxmlformats.org/drawingml/2006/main" noGrp="1"/>
+          </p:cNvSpPr>
+          <p:nvPr/>
+        </p:nvSpPr>
+        <p:spPr>
+          <a:xfrm xmlns:a="http://schemas.openxmlformats.org/drawingml/2006/main">
+            <a:off x="1028700" y="76200"/>
+            <a:ext cx="10687050" cy="514350"/>
+          </a:xfrm>
+          <a:prstGeom xmlns:a="http://schemas.openxmlformats.org/drawingml/2006/main" prst="rect">
+            <a:avLst/>
+          </a:prstGeom>
+          <a:noFill xmlns:a="http://schemas.openxmlformats.org/drawingml/2006/main"/>
+          <a:ln xmlns:a="http://schemas.openxmlformats.org/drawingml/2006/main" w="0">
+            <a:noFill/>
+          </a:ln>
+        </p:spPr>
+        <p:txBody>
+          <a:bodyPr xmlns:a="http://schemas.openxmlformats.org/drawingml/2006/main" lIns="0" tIns="0" rIns="0" bIns="0" anchor="t"/>
+          <a:lstStyle xmlns:a="http://schemas.openxmlformats.org/drawingml/2006/main">
+            <a:defPPr algn="l">
+              <a:defRPr sz="3000" b="1">
+                <a:solidFill>
+                  <a:srgbClr val="FFFFFF"/>
+                </a:solidFill>
+                <a:latin typeface="微软雅黑"/>
+                <a:ea typeface="微软雅黑"/>
+                <a:cs typeface="微软雅黑"/>
+              </a:defRPr>
+            </a:defPPr>
+          </a:lstStyle>
           <a:p xmlns:a="http://schemas.openxmlformats.org/drawingml/2006/main">
             <a:pPr algn="l">
-              <a:lnSpc>
-                <a:spcPct val="118000"/>
-              </a:lnSpc>
-              <a:buNone/>
+              <a:defRPr sz="3000" b="1">
+                <a:solidFill>
+                  <a:srgbClr val="FFFFFF"/>
+                </a:solidFill>
+                <a:latin typeface="微软雅黑"/>
+                <a:ea typeface="微软雅黑"/>
+                <a:cs typeface="微软雅黑"/>
+              </a:defRPr>
             </a:pPr>
             <a:r>
               <a:rPr sz="3000" b="1">
@@ -16194,860 +12833,386 @@
                 <a:ea typeface="微软雅黑"/>
                 <a:cs typeface="微软雅黑"/>
               </a:rPr>
-              <a:t>模糊 prompt 让错误无法追溯</a:t>
-            </a:r>
-            <a:endParaRPr/>
-          </a:p>
-        </p:txBody>
-      </p:sp>
-      <p:sp>
-        <p:nvSpPr>
-          <p:cNvPr id="5" name="Slide Number Placeholder 4">
-            <a:extLst xmlns:a="http://schemas.openxmlformats.org/drawingml/2006/main">
-              <a:ext uri="{FF2B5EF4-FFF2-40B4-BE49-F238E27FC236}">
-                <a16:creationId xmlns:a16="http://schemas.microsoft.com/office/drawing/2014/main" id="{EBA5909F-738E-F60C-BE8C-B3F1D94548E5}"/>
-              </a:ext>
-            </a:extLst>
-          </p:cNvPr>
-          <p:cNvSpPr>
-            <a:spLocks xmlns:a="http://schemas.openxmlformats.org/drawingml/2006/main" noGrp="1"/>
-          </p:cNvSpPr>
-          <p:nvPr>
-            <p:ph type="sldNum" idx="10"/>
-          </p:nvPr>
-        </p:nvSpPr>
-        <p:spPr/>
-        <p:txBody>
-          <a:bodyPr xmlns:a="http://schemas.openxmlformats.org/drawingml/2006/main"/>
-          <a:lstStyle xmlns:a="http://schemas.openxmlformats.org/drawingml/2006/main"/>
-          <a:p xmlns:a="http://schemas.openxmlformats.org/drawingml/2006/main">
-            <a:fld id="{202359C0-8A7A-196E-DD58-8E6569619F09}" type="slidenum">
+              <a:t>测试通过，补丁就合格吗</a:t>
+            </a:r>
+          </a:p>
+        </p:txBody>
+      </p:sp>
+      <p:sp>
+        <p:nvSpPr>
+          <p:cNvPr id="2" name="judgment-body-0">
+            <a:extLst xmlns:a="http://schemas.openxmlformats.org/drawingml/2006/main">
+              <a:ext uri="{FF2B5EF4-FFF2-40B4-BE49-F238E27FC236}">
+                <a16:creationId xmlns:a16="http://schemas.microsoft.com/office/drawing/2014/main" id="{5417726D-4064-4BAD-9563-6BBF7F1B4273}"/>
+              </a:ext>
+            </a:extLst>
+          </p:cNvPr>
+          <p:cNvSpPr>
+            <a:spLocks xmlns:a="http://schemas.openxmlformats.org/drawingml/2006/main" noGrp="1"/>
+          </p:cNvSpPr>
+          <p:nvPr/>
+        </p:nvSpPr>
+        <p:spPr>
+          <a:xfrm xmlns:a="http://schemas.openxmlformats.org/drawingml/2006/main">
+            <a:off x="666750" y="1066800"/>
+            <a:ext cx="10858500" cy="1009650"/>
+          </a:xfrm>
+          <a:prstGeom xmlns:a="http://schemas.openxmlformats.org/drawingml/2006/main" prst="rect">
+            <a:avLst/>
+          </a:prstGeom>
+          <a:noFill xmlns:a="http://schemas.openxmlformats.org/drawingml/2006/main"/>
+          <a:ln xmlns:a="http://schemas.openxmlformats.org/drawingml/2006/main" w="0">
+            <a:noFill/>
+          </a:ln>
+        </p:spPr>
+        <p:txBody>
+          <a:bodyPr xmlns:a="http://schemas.openxmlformats.org/drawingml/2006/main" lIns="0" tIns="0" rIns="0" bIns="0" anchor="t"/>
+          <a:lstStyle xmlns:a="http://schemas.openxmlformats.org/drawingml/2006/main">
+            <a:defPPr algn="l">
+              <a:defRPr sz="2400" b="0">
+                <a:solidFill>
+                  <a:srgbClr val="263746"/>
+                </a:solidFill>
+                <a:latin typeface="微软雅黑"/>
+                <a:ea typeface="微软雅黑"/>
+                <a:cs typeface="微软雅黑"/>
+              </a:defRPr>
+            </a:defPPr>
+          </a:lstStyle>
+          <a:p xmlns:a="http://schemas.openxmlformats.org/drawingml/2006/main">
+            <a:pPr algn="l">
+              <a:defRPr sz="2400" b="0">
+                <a:solidFill>
+                  <a:srgbClr val="263746"/>
+                </a:solidFill>
+                <a:latin typeface="微软雅黑"/>
+                <a:ea typeface="微软雅黑"/>
+                <a:cs typeface="微软雅黑"/>
+              </a:defRPr>
+            </a:pPr>
+            <a:r>
+              <a:rPr sz="2400" b="0">
+                <a:solidFill>
+                  <a:srgbClr val="263746"/>
+                </a:solidFill>
+                <a:latin typeface="微软雅黑"/>
+                <a:ea typeface="微软雅黑"/>
+                <a:cs typeface="微软雅黑"/>
+              </a:rPr>
+              <a:t>契约：两个字段均为非空字符串；正常记录保留</a:t>
+            </a:r>
+          </a:p>
+        </p:txBody>
+      </p:sp>
+      <p:sp>
+        <p:nvSpPr>
+          <p:cNvPr id="3" name="judgment-body-1">
+            <a:extLst xmlns:a="http://schemas.openxmlformats.org/drawingml/2006/main">
+              <a:ext uri="{FF2B5EF4-FFF2-40B4-BE49-F238E27FC236}">
+                <a16:creationId xmlns:a16="http://schemas.microsoft.com/office/drawing/2014/main" id="{08529109-C69C-4C6D-9DA9-9F93D999D737}"/>
+              </a:ext>
+            </a:extLst>
+          </p:cNvPr>
+          <p:cNvSpPr>
+            <a:spLocks xmlns:a="http://schemas.openxmlformats.org/drawingml/2006/main" noGrp="1"/>
+          </p:cNvSpPr>
+          <p:nvPr/>
+        </p:nvSpPr>
+        <p:spPr>
+          <a:xfrm xmlns:a="http://schemas.openxmlformats.org/drawingml/2006/main">
+            <a:off x="666750" y="2238375"/>
+            <a:ext cx="10858500" cy="2076450"/>
+          </a:xfrm>
+          <a:prstGeom xmlns:a="http://schemas.openxmlformats.org/drawingml/2006/main" prst="rect">
+            <a:avLst/>
+          </a:prstGeom>
+          <a:noFill xmlns:a="http://schemas.openxmlformats.org/drawingml/2006/main"/>
+          <a:ln xmlns:a="http://schemas.openxmlformats.org/drawingml/2006/main" w="0">
+            <a:noFill/>
+          </a:ln>
+        </p:spPr>
+        <p:txBody>
+          <a:bodyPr xmlns:a="http://schemas.openxmlformats.org/drawingml/2006/main" lIns="0" tIns="0" rIns="0" bIns="0" anchor="t"/>
+          <a:lstStyle xmlns:a="http://schemas.openxmlformats.org/drawingml/2006/main">
+            <a:defPPr algn="l">
+              <a:defRPr sz="2400" b="0">
+                <a:solidFill>
+                  <a:srgbClr val="263746"/>
+                </a:solidFill>
+                <a:latin typeface="微软雅黑"/>
+                <a:ea typeface="微软雅黑"/>
+                <a:cs typeface="微软雅黑"/>
+              </a:defRPr>
+            </a:defPPr>
+          </a:lstStyle>
+          <a:p xmlns:a="http://schemas.openxmlformats.org/drawingml/2006/main">
+            <a:pPr algn="l">
+              <a:defRPr sz="2400" b="0">
+                <a:solidFill>
+                  <a:srgbClr val="263746"/>
+                </a:solidFill>
+                <a:latin typeface="微软雅黑"/>
+                <a:ea typeface="微软雅黑"/>
+                <a:cs typeface="微软雅黑"/>
+              </a:defRPr>
+            </a:pPr>
+            <a:r>
+              <a:rPr sz="2400" b="0">
+                <a:solidFill>
+                  <a:srgbClr val="263746"/>
+                </a:solidFill>
+                <a:latin typeface="微软雅黑"/>
+                <a:ea typeface="微软雅黑"/>
+                <a:cs typeface="微软雅黑"/>
+              </a:rPr>
+              <a:t>A｜只查缺字段</a:t>
+            </a:r>
+          </a:p>
+          <a:p xmlns:a="http://schemas.openxmlformats.org/drawingml/2006/main">
+            <a:pPr algn="l">
+              <a:defRPr sz="2400" b="0">
+                <a:solidFill>
+                  <a:srgbClr val="263746"/>
+                </a:solidFill>
+                <a:latin typeface="微软雅黑"/>
+                <a:ea typeface="微软雅黑"/>
+                <a:cs typeface="微软雅黑"/>
+              </a:defRPr>
+            </a:pPr>
+            <a:r>
+              <a:rPr sz="2400" b="0">
+                <a:solidFill>
+                  <a:srgbClr val="263746"/>
+                </a:solidFill>
+                <a:latin typeface="微软雅黑"/>
+                <a:ea typeface="微软雅黑"/>
+                <a:cs typeface="微软雅黑"/>
+              </a:rPr>
+              <a:t>B｜异常返回空对象，下游跳过</a:t>
+            </a:r>
+          </a:p>
+          <a:p xmlns:a="http://schemas.openxmlformats.org/drawingml/2006/main">
+            <a:pPr algn="l">
+              <a:defRPr sz="2400" b="0">
+                <a:solidFill>
+                  <a:srgbClr val="263746"/>
+                </a:solidFill>
+                <a:latin typeface="微软雅黑"/>
+                <a:ea typeface="微软雅黑"/>
+                <a:cs typeface="微软雅黑"/>
+              </a:defRPr>
+            </a:pPr>
+            <a:r>
+              <a:rPr sz="2400" b="0">
+                <a:solidFill>
+                  <a:srgbClr val="263746"/>
+                </a:solidFill>
+                <a:latin typeface="微软雅黑"/>
+                <a:ea typeface="微软雅黑"/>
+                <a:cs typeface="微软雅黑"/>
+              </a:rPr>
+              <a:t>C｜检查类型与去空白后非空，保留失败</a:t>
+            </a:r>
+          </a:p>
+        </p:txBody>
+      </p:sp>
+      <p:sp>
+        <p:nvSpPr>
+          <p:cNvPr id="4" name="judgment-body-2">
+            <a:extLst xmlns:a="http://schemas.openxmlformats.org/drawingml/2006/main">
+              <a:ext uri="{FF2B5EF4-FFF2-40B4-BE49-F238E27FC236}">
+                <a16:creationId xmlns:a16="http://schemas.microsoft.com/office/drawing/2014/main" id="{84C8D2CE-00F0-48AA-948F-E1C11CE8B481}"/>
+              </a:ext>
+            </a:extLst>
+          </p:cNvPr>
+          <p:cNvSpPr>
+            <a:spLocks xmlns:a="http://schemas.openxmlformats.org/drawingml/2006/main" noGrp="1"/>
+          </p:cNvSpPr>
+          <p:nvPr/>
+        </p:nvSpPr>
+        <p:spPr>
+          <a:xfrm xmlns:a="http://schemas.openxmlformats.org/drawingml/2006/main">
+            <a:off x="666750" y="4495800"/>
+            <a:ext cx="10858500" cy="1409700"/>
+          </a:xfrm>
+          <a:prstGeom xmlns:a="http://schemas.openxmlformats.org/drawingml/2006/main" prst="rect">
+            <a:avLst/>
+          </a:prstGeom>
+          <a:noFill xmlns:a="http://schemas.openxmlformats.org/drawingml/2006/main"/>
+          <a:ln xmlns:a="http://schemas.openxmlformats.org/drawingml/2006/main" w="0">
+            <a:noFill/>
+          </a:ln>
+        </p:spPr>
+        <p:txBody>
+          <a:bodyPr xmlns:a="http://schemas.openxmlformats.org/drawingml/2006/main" lIns="0" tIns="0" rIns="0" bIns="0" anchor="t"/>
+          <a:lstStyle xmlns:a="http://schemas.openxmlformats.org/drawingml/2006/main">
+            <a:defPPr algn="l">
+              <a:defRPr sz="2200" b="0">
+                <a:solidFill>
+                  <a:srgbClr val="1F4D78"/>
+                </a:solidFill>
+                <a:latin typeface="微软雅黑"/>
+                <a:ea typeface="微软雅黑"/>
+                <a:cs typeface="微软雅黑"/>
+              </a:defRPr>
+            </a:defPPr>
+          </a:lstStyle>
+          <a:p xmlns:a="http://schemas.openxmlformats.org/drawingml/2006/main">
+            <a:pPr algn="l">
+              <a:defRPr sz="2200" b="0">
+                <a:solidFill>
+                  <a:srgbClr val="1F4D78"/>
+                </a:solidFill>
+                <a:latin typeface="微软雅黑"/>
+                <a:ea typeface="微软雅黑"/>
+                <a:cs typeface="微软雅黑"/>
+              </a:defRPr>
+            </a:pPr>
+            <a:r>
+              <a:rPr sz="2200" b="0">
+                <a:solidFill>
+                  <a:srgbClr val="1F4D78"/>
+                </a:solidFill>
+                <a:latin typeface="微软雅黑"/>
+                <a:ea typeface="微软雅黑"/>
+                <a:cs typeface="微软雅黑"/>
+              </a:rPr>
+              <a:t>用 None、全空白、正常输入区分候选补丁；评价口径保持只读。</a:t>
+            </a:r>
+          </a:p>
+        </p:txBody>
+      </p:sp>
+      <p:sp>
+        <p:nvSpPr>
+          <p:cNvPr id="5" name="judgment-source">
+            <a:extLst xmlns:a="http://schemas.openxmlformats.org/drawingml/2006/main">
+              <a:ext uri="{FF2B5EF4-FFF2-40B4-BE49-F238E27FC236}">
+                <a16:creationId xmlns:a16="http://schemas.microsoft.com/office/drawing/2014/main" id="{3728DEB8-7E32-4995-B11E-073776091889}"/>
+              </a:ext>
+            </a:extLst>
+          </p:cNvPr>
+          <p:cNvSpPr>
+            <a:spLocks xmlns:a="http://schemas.openxmlformats.org/drawingml/2006/main" noGrp="1"/>
+          </p:cNvSpPr>
+          <p:nvPr/>
+        </p:nvSpPr>
+        <p:spPr>
+          <a:xfrm xmlns:a="http://schemas.openxmlformats.org/drawingml/2006/main">
+            <a:off x="666750" y="6276975"/>
+            <a:ext cx="10572750" cy="209550"/>
+          </a:xfrm>
+          <a:prstGeom xmlns:a="http://schemas.openxmlformats.org/drawingml/2006/main" prst="rect">
+            <a:avLst/>
+          </a:prstGeom>
+          <a:noFill xmlns:a="http://schemas.openxmlformats.org/drawingml/2006/main"/>
+          <a:ln xmlns:a="http://schemas.openxmlformats.org/drawingml/2006/main" w="0">
+            <a:noFill/>
+          </a:ln>
+        </p:spPr>
+        <p:txBody>
+          <a:bodyPr xmlns:a="http://schemas.openxmlformats.org/drawingml/2006/main" lIns="0" tIns="0" rIns="0" bIns="0" anchor="t"/>
+          <a:lstStyle xmlns:a="http://schemas.openxmlformats.org/drawingml/2006/main">
+            <a:defPPr algn="l">
+              <a:defRPr sz="1100" b="0">
+                <a:solidFill>
+                  <a:srgbClr val="667684"/>
+                </a:solidFill>
+                <a:latin typeface="微软雅黑"/>
+                <a:ea typeface="微软雅黑"/>
+                <a:cs typeface="微软雅黑"/>
+              </a:defRPr>
+            </a:defPPr>
+          </a:lstStyle>
+          <a:p xmlns:a="http://schemas.openxmlformats.org/drawingml/2006/main">
+            <a:pPr algn="l">
+              <a:defRPr sz="1100" b="0">
+                <a:solidFill>
+                  <a:srgbClr val="667684"/>
+                </a:solidFill>
+                <a:latin typeface="微软雅黑"/>
+                <a:ea typeface="微软雅黑"/>
+                <a:cs typeface="微软雅黑"/>
+              </a:defRPr>
+            </a:pPr>
+            <a:r>
+              <a:rPr sz="1100" b="0">
+                <a:solidFill>
+                  <a:srgbClr val="667684"/>
+                </a:solidFill>
+                <a:latin typeface="微软雅黑"/>
+                <a:ea typeface="微软雅黑"/>
+                <a:cs typeface="微软雅黑"/>
+              </a:rPr>
+              <a:t>来源：本课判断任务与讲义；构造材料及真实来源按材料包标识</a:t>
+            </a:r>
+          </a:p>
+        </p:txBody>
+      </p:sp>
+      <p:sp>
+        <p:nvSpPr>
+          <p:cNvPr id="6" name="judgment-page">
+            <a:extLst xmlns:a="http://schemas.openxmlformats.org/drawingml/2006/main">
+              <a:ext uri="{FF2B5EF4-FFF2-40B4-BE49-F238E27FC236}">
+                <a16:creationId xmlns:a16="http://schemas.microsoft.com/office/drawing/2014/main" id="{FF3F29B2-82C1-4514-B5E7-165A3BD9BA7C}"/>
+              </a:ext>
+            </a:extLst>
+          </p:cNvPr>
+          <p:cNvSpPr>
+            <a:spLocks xmlns:a="http://schemas.openxmlformats.org/drawingml/2006/main" noGrp="1"/>
+          </p:cNvSpPr>
+          <p:nvPr/>
+        </p:nvSpPr>
+        <p:spPr>
+          <a:xfrm xmlns:a="http://schemas.openxmlformats.org/drawingml/2006/main">
+            <a:off x="11715750" y="6562725"/>
+            <a:ext cx="238125" cy="171450"/>
+          </a:xfrm>
+          <a:prstGeom xmlns:a="http://schemas.openxmlformats.org/drawingml/2006/main" prst="rect">
+            <a:avLst/>
+          </a:prstGeom>
+          <a:noFill xmlns:a="http://schemas.openxmlformats.org/drawingml/2006/main"/>
+          <a:ln xmlns:a="http://schemas.openxmlformats.org/drawingml/2006/main" w="0">
+            <a:noFill/>
+          </a:ln>
+        </p:spPr>
+        <p:txBody>
+          <a:bodyPr xmlns:a="http://schemas.openxmlformats.org/drawingml/2006/main" lIns="0" tIns="0" rIns="0" bIns="0" anchor="t"/>
+          <a:lstStyle xmlns:a="http://schemas.openxmlformats.org/drawingml/2006/main">
+            <a:defPPr algn="l">
+              <a:defRPr sz="900" b="0">
+                <a:solidFill>
+                  <a:srgbClr val="A5A5A5"/>
+                </a:solidFill>
+                <a:latin typeface="微软雅黑"/>
+                <a:ea typeface="微软雅黑"/>
+                <a:cs typeface="微软雅黑"/>
+              </a:defRPr>
+            </a:defPPr>
+          </a:lstStyle>
+          <a:p xmlns:a="http://schemas.openxmlformats.org/drawingml/2006/main">
+            <a:pPr algn="l">
+              <a:defRPr sz="900" b="0">
+                <a:solidFill>
+                  <a:srgbClr val="A5A5A5"/>
+                </a:solidFill>
+                <a:latin typeface="微软雅黑"/>
+                <a:ea typeface="微软雅黑"/>
+                <a:cs typeface="微软雅黑"/>
+              </a:defRPr>
+            </a:pPr>
+            <a:r>
+              <a:rPr sz="900" b="0">
+                <a:solidFill>
+                  <a:srgbClr val="A5A5A5"/>
+                </a:solidFill>
+                <a:latin typeface="微软雅黑"/>
+                <a:ea typeface="微软雅黑"/>
+                <a:cs typeface="微软雅黑"/>
+              </a:rPr>
               <a:t>3</a:t>
-            </a:fld>
-            <a:endParaRPr/>
-          </a:p>
-        </p:txBody>
-      </p:sp>
-      <p:sp>
-        <p:nvSpPr>
-          <p:cNvPr id="6" name="brand-header">
-            <a:extLst xmlns:a="http://schemas.openxmlformats.org/drawingml/2006/main">
-              <a:ext uri="{FF2B5EF4-FFF2-40B4-BE49-F238E27FC236}">
-                <a16:creationId xmlns:a16="http://schemas.microsoft.com/office/drawing/2014/main" id="{E88A9EA5-6364-4320-A72B-93BFCD2A7E90}"/>
-              </a:ext>
-            </a:extLst>
-          </p:cNvPr>
-          <p:cNvSpPr>
-            <a:spLocks xmlns:a="http://schemas.openxmlformats.org/drawingml/2006/main" noGrp="1"/>
-          </p:cNvSpPr>
-          <p:nvPr/>
-        </p:nvSpPr>
-        <p:spPr>
-          <a:xfrm xmlns:a="http://schemas.openxmlformats.org/drawingml/2006/main">
-            <a:off x="0" y="0"/>
-            <a:ext cx="11887200" cy="685800"/>
-          </a:xfrm>
-          <a:prstGeom xmlns:a="http://schemas.openxmlformats.org/drawingml/2006/main" prst="rect">
-            <a:avLst/>
-          </a:prstGeom>
-          <a:solidFill xmlns:a="http://schemas.openxmlformats.org/drawingml/2006/main">
-            <a:srgbClr val="C8161E"/>
-          </a:solidFill>
-          <a:ln xmlns:a="http://schemas.openxmlformats.org/drawingml/2006/main" w="0">
-            <a:noFill/>
-          </a:ln>
-        </p:spPr>
-      </p:sp>
-      <p:pic>
-        <p:nvPicPr>
-          <p:cNvPr id="27" name=""/>
-          <p:cNvPicPr>
-            <a:picLocks xmlns:a="http://schemas.openxmlformats.org/drawingml/2006/main" noChangeAspect="1"/>
-          </p:cNvPicPr>
-          <p:nvPr/>
-        </p:nvPicPr>
-        <p:blipFill>
-          <a:blip xmlns:r="http://schemas.openxmlformats.org/officeDocument/2006/relationships" xmlns:a="http://schemas.openxmlformats.org/drawingml/2006/main" r:embed="Rf6fb93cd7c824266"/>
-          <a:stretch xmlns:a="http://schemas.openxmlformats.org/drawingml/2006/main"/>
-        </p:blipFill>
-        <p:spPr>
-          <a:xfrm xmlns:a="http://schemas.openxmlformats.org/drawingml/2006/main">
-            <a:off x="323850" y="76200"/>
-            <a:ext cx="533400" cy="533400"/>
-          </a:xfrm>
-          <a:prstGeom xmlns:a="http://schemas.openxmlformats.org/drawingml/2006/main" prst="rect">
-            <a:avLst/>
-          </a:prstGeom>
-        </p:spPr>
-      </p:pic>
-      <p:sp>
-        <p:nvSpPr>
-          <p:cNvPr id="8" name="brand-title">
-            <a:extLst xmlns:a="http://schemas.openxmlformats.org/drawingml/2006/main">
-              <a:ext uri="{FF2B5EF4-FFF2-40B4-BE49-F238E27FC236}">
-                <a16:creationId xmlns:a16="http://schemas.microsoft.com/office/drawing/2014/main" id="{FC612FED-623D-4813-A59A-AE047B2461AA}"/>
-              </a:ext>
-            </a:extLst>
-          </p:cNvPr>
-          <p:cNvSpPr>
-            <a:spLocks xmlns:a="http://schemas.openxmlformats.org/drawingml/2006/main" noGrp="1"/>
-          </p:cNvSpPr>
-          <p:nvPr/>
-        </p:nvSpPr>
-        <p:spPr>
-          <a:xfrm xmlns:a="http://schemas.openxmlformats.org/drawingml/2006/main">
-            <a:off x="1028700" y="66675"/>
-            <a:ext cx="10477500" cy="552450"/>
-          </a:xfrm>
-          <a:prstGeom xmlns:a="http://schemas.openxmlformats.org/drawingml/2006/main" prst="rect">
-            <a:avLst/>
-          </a:prstGeom>
-          <a:noFill xmlns:a="http://schemas.openxmlformats.org/drawingml/2006/main"/>
-          <a:ln xmlns:a="http://schemas.openxmlformats.org/drawingml/2006/main" w="0">
-            <a:noFill/>
-          </a:ln>
-        </p:spPr>
-        <p:txBody>
-          <a:bodyPr xmlns:a="http://schemas.openxmlformats.org/drawingml/2006/main" lIns="0" tIns="0" rIns="0" bIns="0" anchor="ctr"/>
-          <a:lstStyle xmlns:a="http://schemas.openxmlformats.org/drawingml/2006/main"/>
-          <a:p xmlns:a="http://schemas.openxmlformats.org/drawingml/2006/main">
-            <a:pPr algn="l">
-              <a:lnSpc>
-                <a:spcPct val="118000"/>
-              </a:lnSpc>
-              <a:buNone/>
-              <a:defRPr sz="3000" b="1">
-                <a:solidFill>
-                  <a:srgbClr val="FFFFFF"/>
-                </a:solidFill>
-                <a:latin typeface="微软雅黑"/>
-                <a:ea typeface="微软雅黑"/>
-                <a:cs typeface="微软雅黑"/>
-              </a:defRPr>
-            </a:pPr>
-            <a:r>
-              <a:rPr sz="3000" b="1">
-                <a:solidFill>
-                  <a:srgbClr val="FFFFFF"/>
-                </a:solidFill>
-                <a:latin typeface="微软雅黑"/>
-                <a:ea typeface="微软雅黑"/>
-                <a:cs typeface="微软雅黑"/>
-              </a:rPr>
-              <a:t>模糊 prompt 让错误无法追溯</a:t>
-            </a:r>
-          </a:p>
-        </p:txBody>
-      </p:sp>
-      <p:sp>
-        <p:nvSpPr>
-          <p:cNvPr id="9" name="source">
-            <a:extLst xmlns:a="http://schemas.openxmlformats.org/drawingml/2006/main">
-              <a:ext uri="{FF2B5EF4-FFF2-40B4-BE49-F238E27FC236}">
-                <a16:creationId xmlns:a16="http://schemas.microsoft.com/office/drawing/2014/main" id="{D24C8462-F540-475C-AAB6-BC974121385C}"/>
-              </a:ext>
-            </a:extLst>
-          </p:cNvPr>
-          <p:cNvSpPr>
-            <a:spLocks xmlns:a="http://schemas.openxmlformats.org/drawingml/2006/main" noGrp="1"/>
-          </p:cNvSpPr>
-          <p:nvPr/>
-        </p:nvSpPr>
-        <p:spPr>
-          <a:xfrm xmlns:a="http://schemas.openxmlformats.org/drawingml/2006/main">
-            <a:off x="609600" y="6067425"/>
-            <a:ext cx="10763250" cy="209550"/>
-          </a:xfrm>
-          <a:prstGeom xmlns:a="http://schemas.openxmlformats.org/drawingml/2006/main" prst="rect">
-            <a:avLst/>
-          </a:prstGeom>
-          <a:noFill xmlns:a="http://schemas.openxmlformats.org/drawingml/2006/main"/>
-          <a:ln xmlns:a="http://schemas.openxmlformats.org/drawingml/2006/main" w="0">
-            <a:noFill/>
-          </a:ln>
-        </p:spPr>
-        <p:txBody>
-          <a:bodyPr xmlns:a="http://schemas.openxmlformats.org/drawingml/2006/main" lIns="0" tIns="0" rIns="0" bIns="0" anchor="t"/>
-          <a:lstStyle xmlns:a="http://schemas.openxmlformats.org/drawingml/2006/main"/>
-          <a:p xmlns:a="http://schemas.openxmlformats.org/drawingml/2006/main">
-            <a:pPr algn="l">
-              <a:lnSpc>
-                <a:spcPct val="118000"/>
-              </a:lnSpc>
-              <a:buNone/>
-              <a:defRPr sz="1100" b="0">
-                <a:solidFill>
-                  <a:srgbClr val="66727D"/>
-                </a:solidFill>
-                <a:latin typeface="微软雅黑"/>
-                <a:ea typeface="微软雅黑"/>
-                <a:cs typeface="微软雅黑"/>
-              </a:defRPr>
-            </a:pPr>
-            <a:r>
-              <a:rPr sz="1100" b="0">
-                <a:solidFill>
-                  <a:srgbClr val="66727D"/>
-                </a:solidFill>
-                <a:latin typeface="微软雅黑"/>
-                <a:ea typeface="微软雅黑"/>
-                <a:cs typeface="微软雅黑"/>
-              </a:rPr>
-              <a:t>来源：lesson-10/slides.md；课程工件与讲义见 speaker notes</a:t>
-            </a:r>
-          </a:p>
-        </p:txBody>
-      </p:sp>
-      <p:sp>
-        <p:nvSpPr>
-          <p:cNvPr id="10" name="quote">
-            <a:extLst xmlns:a="http://schemas.openxmlformats.org/drawingml/2006/main">
-              <a:ext uri="{FF2B5EF4-FFF2-40B4-BE49-F238E27FC236}">
-                <a16:creationId xmlns:a16="http://schemas.microsoft.com/office/drawing/2014/main" id="{D396A5A0-3EF5-4EE0-AA94-98D09FE1E678}"/>
-              </a:ext>
-            </a:extLst>
-          </p:cNvPr>
-          <p:cNvSpPr>
-            <a:spLocks xmlns:a="http://schemas.openxmlformats.org/drawingml/2006/main" noGrp="1"/>
-          </p:cNvSpPr>
-          <p:nvPr/>
-        </p:nvSpPr>
-        <p:spPr>
-          <a:xfrm xmlns:a="http://schemas.openxmlformats.org/drawingml/2006/main">
-            <a:off x="762000" y="1428750"/>
-            <a:ext cx="10668000" cy="809625"/>
-          </a:xfrm>
-          <a:prstGeom xmlns:a="http://schemas.openxmlformats.org/drawingml/2006/main" prst="rect">
-            <a:avLst/>
-          </a:prstGeom>
-          <a:noFill xmlns:a="http://schemas.openxmlformats.org/drawingml/2006/main"/>
-          <a:ln xmlns:a="http://schemas.openxmlformats.org/drawingml/2006/main" w="0">
-            <a:noFill/>
-          </a:ln>
-        </p:spPr>
-        <p:txBody>
-          <a:bodyPr xmlns:a="http://schemas.openxmlformats.org/drawingml/2006/main" lIns="0" tIns="0" rIns="0" bIns="0" anchor="t"/>
-          <a:lstStyle xmlns:a="http://schemas.openxmlformats.org/drawingml/2006/main"/>
-          <a:p xmlns:a="http://schemas.openxmlformats.org/drawingml/2006/main">
-            <a:pPr algn="l">
-              <a:lnSpc>
-                <a:spcPct val="118000"/>
-              </a:lnSpc>
-              <a:buNone/>
-              <a:defRPr sz="2800" b="1">
-                <a:solidFill>
-                  <a:srgbClr val="1F4D78"/>
-                </a:solidFill>
-                <a:latin typeface="微软雅黑"/>
-                <a:ea typeface="微软雅黑"/>
-                <a:cs typeface="微软雅黑"/>
-              </a:defRPr>
-            </a:pPr>
-            <a:r>
-              <a:rPr sz="2800" b="1">
-                <a:solidFill>
-                  <a:srgbClr val="1F4D78"/>
-                </a:solidFill>
-                <a:latin typeface="微软雅黑"/>
-                <a:ea typeface="微软雅黑"/>
-                <a:cs typeface="微软雅黑"/>
-              </a:rPr>
-              <a:t>“帮我把 baseline 跑通，看看结果怎么样，有问题就改一下。”</a:t>
-            </a:r>
-          </a:p>
-        </p:txBody>
-      </p:sp>
-      <p:sp>
-        <p:nvSpPr>
-          <p:cNvPr id="11" name="m-label-0">
-            <a:extLst xmlns:a="http://schemas.openxmlformats.org/drawingml/2006/main">
-              <a:ext uri="{FF2B5EF4-FFF2-40B4-BE49-F238E27FC236}">
-                <a16:creationId xmlns:a16="http://schemas.microsoft.com/office/drawing/2014/main" id="{CD3DE876-3E7C-4F20-9BDF-30581DD5DE85}"/>
-              </a:ext>
-            </a:extLst>
-          </p:cNvPr>
-          <p:cNvSpPr>
-            <a:spLocks xmlns:a="http://schemas.openxmlformats.org/drawingml/2006/main" noGrp="1"/>
-          </p:cNvSpPr>
-          <p:nvPr/>
-        </p:nvSpPr>
-        <p:spPr>
-          <a:xfrm xmlns:a="http://schemas.openxmlformats.org/drawingml/2006/main">
-            <a:off x="609600" y="2619375"/>
-            <a:ext cx="2190750" cy="590550"/>
-          </a:xfrm>
-          <a:prstGeom xmlns:a="http://schemas.openxmlformats.org/drawingml/2006/main" prst="rect">
-            <a:avLst/>
-          </a:prstGeom>
-          <a:noFill xmlns:a="http://schemas.openxmlformats.org/drawingml/2006/main"/>
-          <a:ln xmlns:a="http://schemas.openxmlformats.org/drawingml/2006/main" w="0">
-            <a:noFill/>
-          </a:ln>
-        </p:spPr>
-        <p:txBody>
-          <a:bodyPr xmlns:a="http://schemas.openxmlformats.org/drawingml/2006/main" lIns="0" tIns="0" rIns="0" bIns="0" anchor="ctr"/>
-          <a:lstStyle xmlns:a="http://schemas.openxmlformats.org/drawingml/2006/main"/>
-          <a:p xmlns:a="http://schemas.openxmlformats.org/drawingml/2006/main">
-            <a:pPr algn="l">
-              <a:lnSpc>
-                <a:spcPct val="118000"/>
-              </a:lnSpc>
-              <a:buNone/>
-              <a:defRPr sz="2000" b="1">
-                <a:solidFill>
-                  <a:srgbClr val="1F4D78"/>
-                </a:solidFill>
-                <a:latin typeface="微软雅黑"/>
-                <a:ea typeface="微软雅黑"/>
-                <a:cs typeface="微软雅黑"/>
-              </a:defRPr>
-            </a:pPr>
-            <a:r>
-              <a:rPr sz="2000" b="1">
-                <a:solidFill>
-                  <a:srgbClr val="1F4D78"/>
-                </a:solidFill>
-                <a:latin typeface="微软雅黑"/>
-                <a:ea typeface="微软雅黑"/>
-                <a:cs typeface="微软雅黑"/>
-              </a:rPr>
-              <a:t>跑通</a:t>
-            </a:r>
-          </a:p>
-        </p:txBody>
-      </p:sp>
-      <p:sp>
-        <p:nvSpPr>
-          <p:cNvPr id="12" name="m-value-0">
-            <a:extLst xmlns:a="http://schemas.openxmlformats.org/drawingml/2006/main">
-              <a:ext uri="{FF2B5EF4-FFF2-40B4-BE49-F238E27FC236}">
-                <a16:creationId xmlns:a16="http://schemas.microsoft.com/office/drawing/2014/main" id="{A5C7CD31-F5A0-4E43-8D6F-12C9B18E8C6C}"/>
-              </a:ext>
-            </a:extLst>
-          </p:cNvPr>
-          <p:cNvSpPr>
-            <a:spLocks xmlns:a="http://schemas.openxmlformats.org/drawingml/2006/main" noGrp="1"/>
-          </p:cNvSpPr>
-          <p:nvPr/>
-        </p:nvSpPr>
-        <p:spPr>
-          <a:xfrm xmlns:a="http://schemas.openxmlformats.org/drawingml/2006/main">
-            <a:off x="2971800" y="2619375"/>
-            <a:ext cx="8610600" cy="590550"/>
-          </a:xfrm>
-          <a:prstGeom xmlns:a="http://schemas.openxmlformats.org/drawingml/2006/main" prst="rect">
-            <a:avLst/>
-          </a:prstGeom>
-          <a:noFill xmlns:a="http://schemas.openxmlformats.org/drawingml/2006/main"/>
-          <a:ln xmlns:a="http://schemas.openxmlformats.org/drawingml/2006/main" w="0">
-            <a:noFill/>
-          </a:ln>
-        </p:spPr>
-        <p:txBody>
-          <a:bodyPr xmlns:a="http://schemas.openxmlformats.org/drawingml/2006/main" lIns="0" tIns="0" rIns="0" bIns="0" anchor="ctr"/>
-          <a:lstStyle xmlns:a="http://schemas.openxmlformats.org/drawingml/2006/main"/>
-          <a:p xmlns:a="http://schemas.openxmlformats.org/drawingml/2006/main">
-            <a:pPr algn="l">
-              <a:lnSpc>
-                <a:spcPct val="118000"/>
-              </a:lnSpc>
-              <a:buNone/>
-              <a:defRPr sz="2200" b="0">
-                <a:solidFill>
-                  <a:srgbClr val="27333D"/>
-                </a:solidFill>
-                <a:latin typeface="微软雅黑"/>
-                <a:ea typeface="微软雅黑"/>
-                <a:cs typeface="微软雅黑"/>
-              </a:defRPr>
-            </a:pPr>
-            <a:r>
-              <a:rPr sz="2200" b="0">
-                <a:solidFill>
-                  <a:srgbClr val="27333D"/>
-                </a:solidFill>
-                <a:latin typeface="微软雅黑"/>
-                <a:ea typeface="微软雅黑"/>
-                <a:cs typeface="微软雅黑"/>
-              </a:rPr>
-              <a:t>可能修改无关代码</a:t>
-            </a:r>
-          </a:p>
-        </p:txBody>
-      </p:sp>
-      <p:sp>
-        <p:nvSpPr>
-          <p:cNvPr id="13" name="m-rule-0">
-            <a:extLst xmlns:a="http://schemas.openxmlformats.org/drawingml/2006/main">
-              <a:ext uri="{FF2B5EF4-FFF2-40B4-BE49-F238E27FC236}">
-                <a16:creationId xmlns:a16="http://schemas.microsoft.com/office/drawing/2014/main" id="{27EF82E1-C997-4B9F-9DCB-E9AF29F0C02B}"/>
-              </a:ext>
-            </a:extLst>
-          </p:cNvPr>
-          <p:cNvSpPr>
-            <a:spLocks xmlns:a="http://schemas.openxmlformats.org/drawingml/2006/main" noGrp="1"/>
-          </p:cNvSpPr>
-          <p:nvPr/>
-        </p:nvSpPr>
-        <p:spPr>
-          <a:xfrm xmlns:a="http://schemas.openxmlformats.org/drawingml/2006/main">
-            <a:off x="609600" y="3209925"/>
-            <a:ext cx="10972800" cy="14288"/>
-          </a:xfrm>
-          <a:prstGeom xmlns:a="http://schemas.openxmlformats.org/drawingml/2006/main" prst="rect">
-            <a:avLst/>
-          </a:prstGeom>
-          <a:solidFill xmlns:a="http://schemas.openxmlformats.org/drawingml/2006/main">
-            <a:srgbClr val="CDD5DB"/>
-          </a:solidFill>
-          <a:ln xmlns:a="http://schemas.openxmlformats.org/drawingml/2006/main" w="0">
-            <a:noFill/>
-          </a:ln>
-        </p:spPr>
-      </p:sp>
-      <p:sp>
-        <p:nvSpPr>
-          <p:cNvPr id="14" name="m-label-1">
-            <a:extLst xmlns:a="http://schemas.openxmlformats.org/drawingml/2006/main">
-              <a:ext uri="{FF2B5EF4-FFF2-40B4-BE49-F238E27FC236}">
-                <a16:creationId xmlns:a16="http://schemas.microsoft.com/office/drawing/2014/main" id="{6211716E-000C-4BA8-8520-366E3F54F598}"/>
-              </a:ext>
-            </a:extLst>
-          </p:cNvPr>
-          <p:cNvSpPr>
-            <a:spLocks xmlns:a="http://schemas.openxmlformats.org/drawingml/2006/main" noGrp="1"/>
-          </p:cNvSpPr>
-          <p:nvPr/>
-        </p:nvSpPr>
-        <p:spPr>
-          <a:xfrm xmlns:a="http://schemas.openxmlformats.org/drawingml/2006/main">
-            <a:off x="609600" y="3248025"/>
-            <a:ext cx="2190750" cy="590550"/>
-          </a:xfrm>
-          <a:prstGeom xmlns:a="http://schemas.openxmlformats.org/drawingml/2006/main" prst="rect">
-            <a:avLst/>
-          </a:prstGeom>
-          <a:noFill xmlns:a="http://schemas.openxmlformats.org/drawingml/2006/main"/>
-          <a:ln xmlns:a="http://schemas.openxmlformats.org/drawingml/2006/main" w="0">
-            <a:noFill/>
-          </a:ln>
-        </p:spPr>
-        <p:txBody>
-          <a:bodyPr xmlns:a="http://schemas.openxmlformats.org/drawingml/2006/main" lIns="0" tIns="0" rIns="0" bIns="0" anchor="ctr"/>
-          <a:lstStyle xmlns:a="http://schemas.openxmlformats.org/drawingml/2006/main"/>
-          <a:p xmlns:a="http://schemas.openxmlformats.org/drawingml/2006/main">
-            <a:pPr algn="l">
-              <a:lnSpc>
-                <a:spcPct val="118000"/>
-              </a:lnSpc>
-              <a:buNone/>
-              <a:defRPr sz="2000" b="1">
-                <a:solidFill>
-                  <a:srgbClr val="1F4D78"/>
-                </a:solidFill>
-                <a:latin typeface="微软雅黑"/>
-                <a:ea typeface="微软雅黑"/>
-                <a:cs typeface="微软雅黑"/>
-              </a:defRPr>
-            </a:pPr>
-            <a:r>
-              <a:rPr sz="2000" b="1">
-                <a:solidFill>
-                  <a:srgbClr val="1F4D78"/>
-                </a:solidFill>
-                <a:latin typeface="微软雅黑"/>
-                <a:ea typeface="微软雅黑"/>
-                <a:cs typeface="微软雅黑"/>
-              </a:rPr>
-              <a:t>结果怎么样</a:t>
-            </a:r>
-          </a:p>
-        </p:txBody>
-      </p:sp>
-      <p:sp>
-        <p:nvSpPr>
-          <p:cNvPr id="15" name="m-value-1">
-            <a:extLst xmlns:a="http://schemas.openxmlformats.org/drawingml/2006/main">
-              <a:ext uri="{FF2B5EF4-FFF2-40B4-BE49-F238E27FC236}">
-                <a16:creationId xmlns:a16="http://schemas.microsoft.com/office/drawing/2014/main" id="{D6761FC4-0AFE-4B02-83C0-5BB6E3A8F1EB}"/>
-              </a:ext>
-            </a:extLst>
-          </p:cNvPr>
-          <p:cNvSpPr>
-            <a:spLocks xmlns:a="http://schemas.openxmlformats.org/drawingml/2006/main" noGrp="1"/>
-          </p:cNvSpPr>
-          <p:nvPr/>
-        </p:nvSpPr>
-        <p:spPr>
-          <a:xfrm xmlns:a="http://schemas.openxmlformats.org/drawingml/2006/main">
-            <a:off x="2971800" y="3248025"/>
-            <a:ext cx="8610600" cy="590550"/>
-          </a:xfrm>
-          <a:prstGeom xmlns:a="http://schemas.openxmlformats.org/drawingml/2006/main" prst="rect">
-            <a:avLst/>
-          </a:prstGeom>
-          <a:noFill xmlns:a="http://schemas.openxmlformats.org/drawingml/2006/main"/>
-          <a:ln xmlns:a="http://schemas.openxmlformats.org/drawingml/2006/main" w="0">
-            <a:noFill/>
-          </a:ln>
-        </p:spPr>
-        <p:txBody>
-          <a:bodyPr xmlns:a="http://schemas.openxmlformats.org/drawingml/2006/main" lIns="0" tIns="0" rIns="0" bIns="0" anchor="ctr"/>
-          <a:lstStyle xmlns:a="http://schemas.openxmlformats.org/drawingml/2006/main"/>
-          <a:p xmlns:a="http://schemas.openxmlformats.org/drawingml/2006/main">
-            <a:pPr algn="l">
-              <a:lnSpc>
-                <a:spcPct val="118000"/>
-              </a:lnSpc>
-              <a:buNone/>
-              <a:defRPr sz="2200" b="0">
-                <a:solidFill>
-                  <a:srgbClr val="27333D"/>
-                </a:solidFill>
-                <a:latin typeface="微软雅黑"/>
-                <a:ea typeface="微软雅黑"/>
-                <a:cs typeface="微软雅黑"/>
-              </a:defRPr>
-            </a:pPr>
-            <a:r>
-              <a:rPr sz="2200" b="0">
-                <a:solidFill>
-                  <a:srgbClr val="27333D"/>
-                </a:solidFill>
-                <a:latin typeface="微软雅黑"/>
-                <a:ea typeface="微软雅黑"/>
-                <a:cs typeface="微软雅黑"/>
-              </a:rPr>
-              <a:t>可能把单次运行写成方法效应</a:t>
-            </a:r>
-          </a:p>
-        </p:txBody>
-      </p:sp>
-      <p:sp>
-        <p:nvSpPr>
-          <p:cNvPr id="16" name="m-rule-1">
-            <a:extLst xmlns:a="http://schemas.openxmlformats.org/drawingml/2006/main">
-              <a:ext uri="{FF2B5EF4-FFF2-40B4-BE49-F238E27FC236}">
-                <a16:creationId xmlns:a16="http://schemas.microsoft.com/office/drawing/2014/main" id="{DC540070-703E-4014-ABE2-459A812C8965}"/>
-              </a:ext>
-            </a:extLst>
-          </p:cNvPr>
-          <p:cNvSpPr>
-            <a:spLocks xmlns:a="http://schemas.openxmlformats.org/drawingml/2006/main" noGrp="1"/>
-          </p:cNvSpPr>
-          <p:nvPr/>
-        </p:nvSpPr>
-        <p:spPr>
-          <a:xfrm xmlns:a="http://schemas.openxmlformats.org/drawingml/2006/main">
-            <a:off x="609600" y="3838575"/>
-            <a:ext cx="10972800" cy="14288"/>
-          </a:xfrm>
-          <a:prstGeom xmlns:a="http://schemas.openxmlformats.org/drawingml/2006/main" prst="rect">
-            <a:avLst/>
-          </a:prstGeom>
-          <a:solidFill xmlns:a="http://schemas.openxmlformats.org/drawingml/2006/main">
-            <a:srgbClr val="CDD5DB"/>
-          </a:solidFill>
-          <a:ln xmlns:a="http://schemas.openxmlformats.org/drawingml/2006/main" w="0">
-            <a:noFill/>
-          </a:ln>
-        </p:spPr>
-      </p:sp>
-      <p:sp>
-        <p:nvSpPr>
-          <p:cNvPr id="17" name="m-label-2">
-            <a:extLst xmlns:a="http://schemas.openxmlformats.org/drawingml/2006/main">
-              <a:ext uri="{FF2B5EF4-FFF2-40B4-BE49-F238E27FC236}">
-                <a16:creationId xmlns:a16="http://schemas.microsoft.com/office/drawing/2014/main" id="{3540E951-EA00-463C-9EA4-A0595915FD2F}"/>
-              </a:ext>
-            </a:extLst>
-          </p:cNvPr>
-          <p:cNvSpPr>
-            <a:spLocks xmlns:a="http://schemas.openxmlformats.org/drawingml/2006/main" noGrp="1"/>
-          </p:cNvSpPr>
-          <p:nvPr/>
-        </p:nvSpPr>
-        <p:spPr>
-          <a:xfrm xmlns:a="http://schemas.openxmlformats.org/drawingml/2006/main">
-            <a:off x="609600" y="3876675"/>
-            <a:ext cx="2190750" cy="590550"/>
-          </a:xfrm>
-          <a:prstGeom xmlns:a="http://schemas.openxmlformats.org/drawingml/2006/main" prst="rect">
-            <a:avLst/>
-          </a:prstGeom>
-          <a:noFill xmlns:a="http://schemas.openxmlformats.org/drawingml/2006/main"/>
-          <a:ln xmlns:a="http://schemas.openxmlformats.org/drawingml/2006/main" w="0">
-            <a:noFill/>
-          </a:ln>
-        </p:spPr>
-        <p:txBody>
-          <a:bodyPr xmlns:a="http://schemas.openxmlformats.org/drawingml/2006/main" lIns="0" tIns="0" rIns="0" bIns="0" anchor="ctr"/>
-          <a:lstStyle xmlns:a="http://schemas.openxmlformats.org/drawingml/2006/main"/>
-          <a:p xmlns:a="http://schemas.openxmlformats.org/drawingml/2006/main">
-            <a:pPr algn="l">
-              <a:lnSpc>
-                <a:spcPct val="118000"/>
-              </a:lnSpc>
-              <a:buNone/>
-              <a:defRPr sz="2000" b="1">
-                <a:solidFill>
-                  <a:srgbClr val="1F4D78"/>
-                </a:solidFill>
-                <a:latin typeface="微软雅黑"/>
-                <a:ea typeface="微软雅黑"/>
-                <a:cs typeface="微软雅黑"/>
-              </a:defRPr>
-            </a:pPr>
-            <a:r>
-              <a:rPr sz="2000" b="1">
-                <a:solidFill>
-                  <a:srgbClr val="1F4D78"/>
-                </a:solidFill>
-                <a:latin typeface="微软雅黑"/>
-                <a:ea typeface="微软雅黑"/>
-                <a:cs typeface="微软雅黑"/>
-              </a:rPr>
-              <a:t>有问题</a:t>
-            </a:r>
-          </a:p>
-        </p:txBody>
-      </p:sp>
-      <p:sp>
-        <p:nvSpPr>
-          <p:cNvPr id="18" name="m-value-2">
-            <a:extLst xmlns:a="http://schemas.openxmlformats.org/drawingml/2006/main">
-              <a:ext uri="{FF2B5EF4-FFF2-40B4-BE49-F238E27FC236}">
-                <a16:creationId xmlns:a16="http://schemas.microsoft.com/office/drawing/2014/main" id="{44A961E0-1AAD-4F84-91BF-BAD7617062E7}"/>
-              </a:ext>
-            </a:extLst>
-          </p:cNvPr>
-          <p:cNvSpPr>
-            <a:spLocks xmlns:a="http://schemas.openxmlformats.org/drawingml/2006/main" noGrp="1"/>
-          </p:cNvSpPr>
-          <p:nvPr/>
-        </p:nvSpPr>
-        <p:spPr>
-          <a:xfrm xmlns:a="http://schemas.openxmlformats.org/drawingml/2006/main">
-            <a:off x="2971800" y="3876675"/>
-            <a:ext cx="8610600" cy="590550"/>
-          </a:xfrm>
-          <a:prstGeom xmlns:a="http://schemas.openxmlformats.org/drawingml/2006/main" prst="rect">
-            <a:avLst/>
-          </a:prstGeom>
-          <a:noFill xmlns:a="http://schemas.openxmlformats.org/drawingml/2006/main"/>
-          <a:ln xmlns:a="http://schemas.openxmlformats.org/drawingml/2006/main" w="0">
-            <a:noFill/>
-          </a:ln>
-        </p:spPr>
-        <p:txBody>
-          <a:bodyPr xmlns:a="http://schemas.openxmlformats.org/drawingml/2006/main" lIns="0" tIns="0" rIns="0" bIns="0" anchor="ctr"/>
-          <a:lstStyle xmlns:a="http://schemas.openxmlformats.org/drawingml/2006/main"/>
-          <a:p xmlns:a="http://schemas.openxmlformats.org/drawingml/2006/main">
-            <a:pPr algn="l">
-              <a:lnSpc>
-                <a:spcPct val="118000"/>
-              </a:lnSpc>
-              <a:buNone/>
-              <a:defRPr sz="2200" b="0">
-                <a:solidFill>
-                  <a:srgbClr val="27333D"/>
-                </a:solidFill>
-                <a:latin typeface="微软雅黑"/>
-                <a:ea typeface="微软雅黑"/>
-                <a:cs typeface="微软雅黑"/>
-              </a:defRPr>
-            </a:pPr>
-            <a:r>
-              <a:rPr sz="2200" b="0">
-                <a:solidFill>
-                  <a:srgbClr val="27333D"/>
-                </a:solidFill>
-                <a:latin typeface="微软雅黑"/>
-                <a:ea typeface="微软雅黑"/>
-                <a:cs typeface="微软雅黑"/>
-              </a:rPr>
-              <a:t>可能跳过失败测试</a:t>
-            </a:r>
-          </a:p>
-        </p:txBody>
-      </p:sp>
-      <p:sp>
-        <p:nvSpPr>
-          <p:cNvPr id="19" name="m-rule-2">
-            <a:extLst xmlns:a="http://schemas.openxmlformats.org/drawingml/2006/main">
-              <a:ext uri="{FF2B5EF4-FFF2-40B4-BE49-F238E27FC236}">
-                <a16:creationId xmlns:a16="http://schemas.microsoft.com/office/drawing/2014/main" id="{022C3F3E-7B67-4F6D-B1FF-CD488DF711E9}"/>
-              </a:ext>
-            </a:extLst>
-          </p:cNvPr>
-          <p:cNvSpPr>
-            <a:spLocks xmlns:a="http://schemas.openxmlformats.org/drawingml/2006/main" noGrp="1"/>
-          </p:cNvSpPr>
-          <p:nvPr/>
-        </p:nvSpPr>
-        <p:spPr>
-          <a:xfrm xmlns:a="http://schemas.openxmlformats.org/drawingml/2006/main">
-            <a:off x="609600" y="4467225"/>
-            <a:ext cx="10972800" cy="14288"/>
-          </a:xfrm>
-          <a:prstGeom xmlns:a="http://schemas.openxmlformats.org/drawingml/2006/main" prst="rect">
-            <a:avLst/>
-          </a:prstGeom>
-          <a:solidFill xmlns:a="http://schemas.openxmlformats.org/drawingml/2006/main">
-            <a:srgbClr val="CDD5DB"/>
-          </a:solidFill>
-          <a:ln xmlns:a="http://schemas.openxmlformats.org/drawingml/2006/main" w="0">
-            <a:noFill/>
-          </a:ln>
-        </p:spPr>
-      </p:sp>
-      <p:sp>
-        <p:nvSpPr>
-          <p:cNvPr id="20" name="m-label-3">
-            <a:extLst xmlns:a="http://schemas.openxmlformats.org/drawingml/2006/main">
-              <a:ext uri="{FF2B5EF4-FFF2-40B4-BE49-F238E27FC236}">
-                <a16:creationId xmlns:a16="http://schemas.microsoft.com/office/drawing/2014/main" id="{D0DA7CEC-D660-4AA6-B879-8FA9BBA890E1}"/>
-              </a:ext>
-            </a:extLst>
-          </p:cNvPr>
-          <p:cNvSpPr>
-            <a:spLocks xmlns:a="http://schemas.openxmlformats.org/drawingml/2006/main" noGrp="1"/>
-          </p:cNvSpPr>
-          <p:nvPr/>
-        </p:nvSpPr>
-        <p:spPr>
-          <a:xfrm xmlns:a="http://schemas.openxmlformats.org/drawingml/2006/main">
-            <a:off x="609600" y="4505325"/>
-            <a:ext cx="2190750" cy="590550"/>
-          </a:xfrm>
-          <a:prstGeom xmlns:a="http://schemas.openxmlformats.org/drawingml/2006/main" prst="rect">
-            <a:avLst/>
-          </a:prstGeom>
-          <a:noFill xmlns:a="http://schemas.openxmlformats.org/drawingml/2006/main"/>
-          <a:ln xmlns:a="http://schemas.openxmlformats.org/drawingml/2006/main" w="0">
-            <a:noFill/>
-          </a:ln>
-        </p:spPr>
-        <p:txBody>
-          <a:bodyPr xmlns:a="http://schemas.openxmlformats.org/drawingml/2006/main" lIns="0" tIns="0" rIns="0" bIns="0" anchor="ctr"/>
-          <a:lstStyle xmlns:a="http://schemas.openxmlformats.org/drawingml/2006/main"/>
-          <a:p xmlns:a="http://schemas.openxmlformats.org/drawingml/2006/main">
-            <a:pPr algn="l">
-              <a:lnSpc>
-                <a:spcPct val="118000"/>
-              </a:lnSpc>
-              <a:buNone/>
-              <a:defRPr sz="2000" b="1">
-                <a:solidFill>
-                  <a:srgbClr val="C8161E"/>
-                </a:solidFill>
-                <a:latin typeface="微软雅黑"/>
-                <a:ea typeface="微软雅黑"/>
-                <a:cs typeface="微软雅黑"/>
-              </a:defRPr>
-            </a:pPr>
-            <a:r>
-              <a:rPr sz="2000" b="1">
-                <a:solidFill>
-                  <a:srgbClr val="C8161E"/>
-                </a:solidFill>
-                <a:latin typeface="微软雅黑"/>
-                <a:ea typeface="微软雅黑"/>
-                <a:cs typeface="微软雅黑"/>
-              </a:rPr>
-              <a:t>改一下</a:t>
-            </a:r>
-          </a:p>
-        </p:txBody>
-      </p:sp>
-      <p:sp>
-        <p:nvSpPr>
-          <p:cNvPr id="21" name="m-value-3">
-            <a:extLst xmlns:a="http://schemas.openxmlformats.org/drawingml/2006/main">
-              <a:ext uri="{FF2B5EF4-FFF2-40B4-BE49-F238E27FC236}">
-                <a16:creationId xmlns:a16="http://schemas.microsoft.com/office/drawing/2014/main" id="{A24887C1-24E0-44C7-8EFB-4A95FA118B77}"/>
-              </a:ext>
-            </a:extLst>
-          </p:cNvPr>
-          <p:cNvSpPr>
-            <a:spLocks xmlns:a="http://schemas.openxmlformats.org/drawingml/2006/main" noGrp="1"/>
-          </p:cNvSpPr>
-          <p:nvPr/>
-        </p:nvSpPr>
-        <p:spPr>
-          <a:xfrm xmlns:a="http://schemas.openxmlformats.org/drawingml/2006/main">
-            <a:off x="2971800" y="4505325"/>
-            <a:ext cx="8610600" cy="590550"/>
-          </a:xfrm>
-          <a:prstGeom xmlns:a="http://schemas.openxmlformats.org/drawingml/2006/main" prst="rect">
-            <a:avLst/>
-          </a:prstGeom>
-          <a:noFill xmlns:a="http://schemas.openxmlformats.org/drawingml/2006/main"/>
-          <a:ln xmlns:a="http://schemas.openxmlformats.org/drawingml/2006/main" w="0">
-            <a:noFill/>
-          </a:ln>
-        </p:spPr>
-        <p:txBody>
-          <a:bodyPr xmlns:a="http://schemas.openxmlformats.org/drawingml/2006/main" lIns="0" tIns="0" rIns="0" bIns="0" anchor="ctr"/>
-          <a:lstStyle xmlns:a="http://schemas.openxmlformats.org/drawingml/2006/main"/>
-          <a:p xmlns:a="http://schemas.openxmlformats.org/drawingml/2006/main">
-            <a:pPr algn="l">
-              <a:lnSpc>
-                <a:spcPct val="118000"/>
-              </a:lnSpc>
-              <a:buNone/>
-              <a:defRPr sz="2200" b="0">
-                <a:solidFill>
-                  <a:srgbClr val="27333D"/>
-                </a:solidFill>
-                <a:latin typeface="微软雅黑"/>
-                <a:ea typeface="微软雅黑"/>
-                <a:cs typeface="微软雅黑"/>
-              </a:defRPr>
-            </a:pPr>
-            <a:r>
-              <a:rPr sz="2200" b="0">
-                <a:solidFill>
-                  <a:srgbClr val="27333D"/>
-                </a:solidFill>
-                <a:latin typeface="微软雅黑"/>
-                <a:ea typeface="微软雅黑"/>
-                <a:cs typeface="微软雅黑"/>
-              </a:rPr>
-              <a:t>可能改评价协议而非方法</a:t>
-            </a:r>
-          </a:p>
-        </p:txBody>
-      </p:sp>
-      <p:sp>
-        <p:nvSpPr>
-          <p:cNvPr id="22" name="m-rule-3">
-            <a:extLst xmlns:a="http://schemas.openxmlformats.org/drawingml/2006/main">
-              <a:ext uri="{FF2B5EF4-FFF2-40B4-BE49-F238E27FC236}">
-                <a16:creationId xmlns:a16="http://schemas.microsoft.com/office/drawing/2014/main" id="{F062B148-16A8-40ED-936E-CE95D7150199}"/>
-              </a:ext>
-            </a:extLst>
-          </p:cNvPr>
-          <p:cNvSpPr>
-            <a:spLocks xmlns:a="http://schemas.openxmlformats.org/drawingml/2006/main" noGrp="1"/>
-          </p:cNvSpPr>
-          <p:nvPr/>
-        </p:nvSpPr>
-        <p:spPr>
-          <a:xfrm xmlns:a="http://schemas.openxmlformats.org/drawingml/2006/main">
-            <a:off x="609600" y="5095875"/>
-            <a:ext cx="10972800" cy="14288"/>
-          </a:xfrm>
-          <a:prstGeom xmlns:a="http://schemas.openxmlformats.org/drawingml/2006/main" prst="rect">
-            <a:avLst/>
-          </a:prstGeom>
-          <a:solidFill xmlns:a="http://schemas.openxmlformats.org/drawingml/2006/main">
-            <a:srgbClr val="CDD5DB"/>
-          </a:solidFill>
-          <a:ln xmlns:a="http://schemas.openxmlformats.org/drawingml/2006/main" w="0">
-            <a:noFill/>
-          </a:ln>
-        </p:spPr>
+            </a:r>
+          </a:p>
+        </p:txBody>
       </p:sp>
     </p:spTree>
     <p:extLst>
